--- a/day2-deck/decks/Fixed Ops Gross - House Style.pptx
+++ b/day2-deck/decks/Fixed Ops Gross - House Style.pptx
@@ -125,9 +125,7 @@
     <c:autoTitleDeleted val="1"/>
     <c:plotArea>
       <c:layout/>
-      <c:barChart>
-        <c:barDir val="col"/>
-        <c:grouping val="clustered"/>
+      <c:lineChart>
         <c:varyColors val="0"/>
         <c:ser>
           <c:idx val="0"/>
@@ -138,15 +136,22 @@
               <c:strCache>
                 <c:ptCount val="1"/>
                 <c:pt idx="0">
-                  <c:v>2025</c:v>
+                  <c:v>2026</c:v>
                 </c:pt>
               </c:strCache>
             </c:strRef>
           </c:tx>
           <c:spPr>
             <a:solidFill>
-              <a:srgbClr val="9AA3AD"/>
+              <a:srgbClr val="2587C5"/>
             </a:solidFill>
+            <a:ln w="38100" cap="flat">
+              <a:solidFill>
+                <a:srgbClr val="2587C5"/>
+              </a:solidFill>
+              <a:prstDash val="solid"/>
+              <a:round/>
+            </a:ln>
             <a:effectLst/>
           </c:spPr>
           <c:invertIfNegative val="0"/>
@@ -167,6 +172,936 @@
               </a:p>
             </c:txPr>
             <c:showLegendKey val="0"/>
+            <c:showVal val="0"/>
+            <c:showCatName val="0"/>
+            <c:showSerName val="0"/>
+            <c:showPercent val="0"/>
+            <c:showBubbleSize val="0"/>
+            <c:showLeaderLines val="0"/>
+          </c:dLbls>
+          <c:marker>
+            <c:symbol val="circle"/>
+            <c:size val="8"/>
+            <c:spPr>
+              <a:solidFill>
+                <a:srgbClr val="2587C5"/>
+              </a:solidFill>
+              <a:ln w="9525" cap="flat">
+                <a:solidFill>
+                  <a:srgbClr val="2587C5"/>
+                </a:solidFill>
+                <a:prstDash val="solid"/>
+                <a:round/>
+              </a:ln>
+              <a:effectLst/>
+            </c:spPr>
+          </c:marker>
+          <c:cat>
+            <c:multiLvlStrRef>
+              <c:f>Sheet1!$A$2:$A$13</c:f>
+              <c:multiLvlStrCache>
+                <c:ptCount val="12"/>
+                <c:lvl>
+                  <c:pt idx="0">
+                    <c:v>Jan</c:v>
+                  </c:pt>
+                  <c:pt idx="1">
+                    <c:v>Feb</c:v>
+                  </c:pt>
+                  <c:pt idx="2">
+                    <c:v>Mar</c:v>
+                  </c:pt>
+                  <c:pt idx="3">
+                    <c:v>Apr</c:v>
+                  </c:pt>
+                  <c:pt idx="4">
+                    <c:v>May</c:v>
+                  </c:pt>
+                  <c:pt idx="5">
+                    <c:v>Jun</c:v>
+                  </c:pt>
+                  <c:pt idx="6">
+                    <c:v>Jul</c:v>
+                  </c:pt>
+                  <c:pt idx="7">
+                    <c:v>Aug</c:v>
+                  </c:pt>
+                  <c:pt idx="8">
+                    <c:v>Sep</c:v>
+                  </c:pt>
+                  <c:pt idx="9">
+                    <c:v>Oct</c:v>
+                  </c:pt>
+                  <c:pt idx="10">
+                    <c:v>Nov</c:v>
+                  </c:pt>
+                  <c:pt idx="11">
+                    <c:v>Dec</c:v>
+                  </c:pt>
+                </c:lvl>
+              </c:multiLvlStrCache>
+            </c:multiLvlStrRef>
+          </c:cat>
+          <c:val>
+            <c:numRef>
+              <c:f>Sheet1!$B$2:$B$13</c:f>
+              <c:numCache>
+                <c:formatCode>General</c:formatCode>
+                <c:ptCount val="12"/>
+                <c:pt idx="0">
+                  <c:v>19.88</c:v>
+                </c:pt>
+                <c:pt idx="1">
+                  <c:v>18.87</c:v>
+                </c:pt>
+                <c:pt idx="2">
+                  <c:v>21.12</c:v>
+                </c:pt>
+                <c:pt idx="3">
+                  <c:v>21.8</c:v>
+                </c:pt>
+                <c:pt idx="4">
+                  <c:v>20.12</c:v>
+                </c:pt>
+                <c:pt idx="5">
+                  <c:v>21.52</c:v>
+                </c:pt>
+                <c:pt idx="6">
+                  <c:v>22.71</c:v>
+                </c:pt>
+                <c:pt idx="7">
+                  <c:v>21.64</c:v>
+                </c:pt>
+                <c:pt idx="8">
+                  <c:v>21.13</c:v>
+                </c:pt>
+                <c:pt idx="9">
+                  <c:v/>
+                </c:pt>
+                <c:pt idx="10">
+                  <c:v/>
+                </c:pt>
+                <c:pt idx="11">
+                  <c:v/>
+                </c:pt>
+              </c:numCache>
+            </c:numRef>
+          </c:val>
+          <c:smooth val="0"/>
+        </c:ser>
+        <c:dLbls>
+          <c:numFmt formatCode="0.0" sourceLinked="0"/>
+          <c:txPr>
+            <a:bodyPr/>
+            <a:lstStyle/>
+            <a:p>
+              <a:pPr>
+                <a:defRPr b="0" i="0" strike="noStrike" sz="1400" u="none">
+                  <a:solidFill>
+                    <a:srgbClr val="1A1A1A"/>
+                  </a:solidFill>
+                  <a:latin typeface="+mn-lt"/>
+                </a:defRPr>
+              </a:pPr>
+            </a:p>
+          </c:txPr>
+          <c:showLegendKey val="0"/>
+          <c:showVal val="0"/>
+          <c:showCatName val="0"/>
+          <c:showSerName val="0"/>
+          <c:showPercent val="0"/>
+          <c:showBubbleSize val="0"/>
+          <c:showLeaderLines val="0"/>
+        </c:dLbls>
+        <c:marker val="1"/>
+        <c:axId val="2094734554"/>
+        <c:axId val="2094734552"/>
+        <c:axId val="2094734556"/>
+      </c:lineChart>
+      <c:catAx>
+        <c:axId val="2094734554"/>
+        <c:scaling>
+          <c:orientation val="minMax"/>
+        </c:scaling>
+        <c:delete val="0"/>
+        <c:axPos val="b"/>
+        <c:numFmt formatCode="General" sourceLinked="1"/>
+        <c:majorTickMark val="out"/>
+        <c:minorTickMark val="none"/>
+        <c:tickLblPos val="low"/>
+        <c:spPr>
+          <a:ln w="12700" cap="flat">
+            <a:noFill/>
+            <a:prstDash val="solid"/>
+            <a:round/>
+          </a:ln>
+        </c:spPr>
+        <c:txPr>
+          <a:bodyPr/>
+          <a:lstStyle/>
+          <a:p>
+            <a:pPr>
+              <a:defRPr sz="1400" b="0" i="0" u="none" strike="noStrike">
+                <a:solidFill>
+                  <a:srgbClr val="FFFFFF"/>
+                </a:solidFill>
+                <a:latin typeface="+mn-lt"/>
+              </a:defRPr>
+            </a:pPr>
+            <a:endParaRPr lang="en-US"/>
+          </a:p>
+        </c:txPr>
+        <c:crossAx val="2094734552"/>
+        <c:crosses val="min"/>
+        <c:auto val="1"/>
+        <c:lblAlgn val="ctr"/>
+        <c:noMultiLvlLbl val="1"/>
+      </c:catAx>
+      <c:valAx>
+        <c:axId val="2094734552"/>
+        <c:scaling>
+          <c:orientation val="minMax"/>
+          <c:max val="26"/>
+          <c:min val="16"/>
+        </c:scaling>
+        <c:delete val="0"/>
+        <c:axPos val="l"/>
+        <c:numFmt formatCode="$0&quot;M&quot;" sourceLinked="0"/>
+        <c:majorTickMark val="out"/>
+        <c:minorTickMark val="none"/>
+        <c:tickLblPos val="nextTo"/>
+        <c:spPr>
+          <a:ln w="12700" cap="flat">
+            <a:noFill/>
+            <a:prstDash val="solid"/>
+            <a:round/>
+          </a:ln>
+        </c:spPr>
+        <c:txPr>
+          <a:bodyPr/>
+          <a:lstStyle/>
+          <a:p>
+            <a:pPr>
+              <a:defRPr sz="1400" b="0" i="0" u="none" strike="noStrike">
+                <a:solidFill>
+                  <a:srgbClr val="FFFFFF"/>
+                </a:solidFill>
+                <a:latin typeface="+mn-lt"/>
+              </a:defRPr>
+            </a:pPr>
+            <a:endParaRPr lang="en-US"/>
+          </a:p>
+        </c:txPr>
+        <c:crossAx val="2094734554"/>
+        <c:crosses val="autoZero"/>
+        <c:crossBetween val="between"/>
+        <c:majorUnit val="2"/>
+      </c:valAx>
+      <c:spPr>
+        <a:noFill/>
+        <a:ln>
+          <a:noFill/>
+        </a:ln>
+        <a:effectLst/>
+      </c:spPr>
+    </c:plotArea>
+    <c:plotVisOnly val="1"/>
+    <c:dispBlanksAs val="span"/>
+  </c:chart>
+  <c:spPr>
+    <a:noFill/>
+    <a:ln>
+      <a:noFill/>
+    </a:ln>
+    <a:effectLst/>
+  </c:spPr>
+  <c:externalData r:id="rId1">
+    <c:autoUpdate val="0"/>
+  </c:externalData>
+</c:chartSpace>
+</file>
+
+<file path=ppt/charts/chart10.xml><?xml version="1.0" encoding="utf-8"?>
+<c:chartSpace xmlns:c="http://schemas.openxmlformats.org/drawingml/2006/chart" xmlns:a="http://schemas.openxmlformats.org/drawingml/2006/main" xmlns:r="http://schemas.openxmlformats.org/officeDocument/2006/relationships">
+  <c:date1904 val="0"/>
+  <c:roundedCorners val="1"/>
+  <c:chart>
+    <c:autoTitleDeleted val="1"/>
+    <c:plotArea>
+      <c:layout/>
+      <c:lineChart>
+        <c:varyColors val="0"/>
+        <c:ser>
+          <c:idx val="0"/>
+          <c:order val="0"/>
+          <c:tx>
+            <c:strRef>
+              <c:f>Sheet1!$B$1</c:f>
+              <c:strCache>
+                <c:ptCount val="1"/>
+                <c:pt idx="0">
+                  <c:v>2025</c:v>
+                </c:pt>
+              </c:strCache>
+            </c:strRef>
+          </c:tx>
+          <c:spPr>
+            <a:solidFill>
+              <a:srgbClr val="9AA3AD"/>
+            </a:solidFill>
+            <a:ln w="38100" cap="flat">
+              <a:solidFill>
+                <a:srgbClr val="9AA3AD"/>
+              </a:solidFill>
+              <a:prstDash val="solid"/>
+              <a:round/>
+            </a:ln>
+            <a:effectLst/>
+          </c:spPr>
+          <c:invertIfNegative val="0"/>
+          <c:dLbls>
+            <c:numFmt formatCode="0.0" sourceLinked="0"/>
+            <c:txPr>
+              <a:bodyPr/>
+              <a:lstStyle/>
+              <a:p>
+                <a:pPr>
+                  <a:defRPr b="0" i="0" strike="noStrike" sz="1400" u="none">
+                    <a:solidFill>
+                      <a:srgbClr val="1A1A1A"/>
+                    </a:solidFill>
+                    <a:latin typeface="+mn-lt"/>
+                  </a:defRPr>
+                </a:pPr>
+              </a:p>
+            </c:txPr>
+            <c:showLegendKey val="0"/>
+            <c:showVal val="0"/>
+            <c:showCatName val="0"/>
+            <c:showSerName val="0"/>
+            <c:showPercent val="0"/>
+            <c:showBubbleSize val="0"/>
+            <c:showLeaderLines val="0"/>
+          </c:dLbls>
+          <c:marker>
+            <c:symbol val="circle"/>
+            <c:size val="8"/>
+            <c:spPr>
+              <a:solidFill>
+                <a:srgbClr val="9AA3AD"/>
+              </a:solidFill>
+              <a:ln w="9525" cap="flat">
+                <a:solidFill>
+                  <a:srgbClr val="9AA3AD"/>
+                </a:solidFill>
+                <a:prstDash val="solid"/>
+                <a:round/>
+              </a:ln>
+              <a:effectLst/>
+            </c:spPr>
+          </c:marker>
+          <c:cat>
+            <c:multiLvlStrRef>
+              <c:f>Sheet1!$A$2:$A$13</c:f>
+              <c:multiLvlStrCache>
+                <c:ptCount val="12"/>
+                <c:lvl>
+                  <c:pt idx="0">
+                    <c:v>Jan</c:v>
+                  </c:pt>
+                  <c:pt idx="1">
+                    <c:v>Feb</c:v>
+                  </c:pt>
+                  <c:pt idx="2">
+                    <c:v>Mar</c:v>
+                  </c:pt>
+                  <c:pt idx="3">
+                    <c:v>Apr</c:v>
+                  </c:pt>
+                  <c:pt idx="4">
+                    <c:v>May</c:v>
+                  </c:pt>
+                  <c:pt idx="5">
+                    <c:v>Jun</c:v>
+                  </c:pt>
+                  <c:pt idx="6">
+                    <c:v>Jul</c:v>
+                  </c:pt>
+                  <c:pt idx="7">
+                    <c:v>Aug</c:v>
+                  </c:pt>
+                  <c:pt idx="8">
+                    <c:v>Sep</c:v>
+                  </c:pt>
+                  <c:pt idx="9">
+                    <c:v>Oct</c:v>
+                  </c:pt>
+                  <c:pt idx="10">
+                    <c:v>Nov</c:v>
+                  </c:pt>
+                  <c:pt idx="11">
+                    <c:v>Dec</c:v>
+                  </c:pt>
+                </c:lvl>
+              </c:multiLvlStrCache>
+            </c:multiLvlStrRef>
+          </c:cat>
+          <c:val>
+            <c:numRef>
+              <c:f>Sheet1!$B$2:$B$13</c:f>
+              <c:numCache>
+                <c:formatCode>General</c:formatCode>
+                <c:ptCount val="12"/>
+                <c:pt idx="0">
+                  <c:v>13.41</c:v>
+                </c:pt>
+                <c:pt idx="1">
+                  <c:v>12.64</c:v>
+                </c:pt>
+                <c:pt idx="2">
+                  <c:v>13.59</c:v>
+                </c:pt>
+                <c:pt idx="3">
+                  <c:v>14.01</c:v>
+                </c:pt>
+                <c:pt idx="4">
+                  <c:v>13.61</c:v>
+                </c:pt>
+                <c:pt idx="5">
+                  <c:v>13.53</c:v>
+                </c:pt>
+                <c:pt idx="6">
+                  <c:v>13.78</c:v>
+                </c:pt>
+                <c:pt idx="7">
+                  <c:v>13.51</c:v>
+                </c:pt>
+                <c:pt idx="8">
+                  <c:v>12.5</c:v>
+                </c:pt>
+                <c:pt idx="9">
+                  <c:v>13.74</c:v>
+                </c:pt>
+                <c:pt idx="10">
+                  <c:v>11.84</c:v>
+                </c:pt>
+                <c:pt idx="11">
+                  <c:v>12.92</c:v>
+                </c:pt>
+              </c:numCache>
+            </c:numRef>
+          </c:val>
+          <c:smooth val="0"/>
+        </c:ser>
+        <c:dLbls>
+          <c:numFmt formatCode="0.0" sourceLinked="0"/>
+          <c:txPr>
+            <a:bodyPr/>
+            <a:lstStyle/>
+            <a:p>
+              <a:pPr>
+                <a:defRPr b="0" i="0" strike="noStrike" sz="1400" u="none">
+                  <a:solidFill>
+                    <a:srgbClr val="1A1A1A"/>
+                  </a:solidFill>
+                  <a:latin typeface="+mn-lt"/>
+                </a:defRPr>
+              </a:pPr>
+            </a:p>
+          </c:txPr>
+          <c:showLegendKey val="0"/>
+          <c:showVal val="0"/>
+          <c:showCatName val="0"/>
+          <c:showSerName val="0"/>
+          <c:showPercent val="0"/>
+          <c:showBubbleSize val="0"/>
+          <c:showLeaderLines val="0"/>
+        </c:dLbls>
+        <c:marker val="1"/>
+        <c:axId val="2094734554"/>
+        <c:axId val="2094734552"/>
+        <c:axId val="2094734556"/>
+      </c:lineChart>
+      <c:catAx>
+        <c:axId val="2094734554"/>
+        <c:scaling>
+          <c:orientation val="minMax"/>
+        </c:scaling>
+        <c:delete val="0"/>
+        <c:axPos val="b"/>
+        <c:numFmt formatCode="General" sourceLinked="1"/>
+        <c:majorTickMark val="out"/>
+        <c:minorTickMark val="none"/>
+        <c:tickLblPos val="low"/>
+        <c:spPr>
+          <a:ln w="12700" cap="flat">
+            <a:solidFill>
+              <a:srgbClr val="888888"/>
+            </a:solidFill>
+            <a:prstDash val="solid"/>
+            <a:round/>
+          </a:ln>
+        </c:spPr>
+        <c:txPr>
+          <a:bodyPr/>
+          <a:lstStyle/>
+          <a:p>
+            <a:pPr>
+              <a:defRPr sz="1400" b="0" i="0" u="none" strike="noStrike">
+                <a:solidFill>
+                  <a:srgbClr val="1A1A1A"/>
+                </a:solidFill>
+                <a:latin typeface="+mn-lt"/>
+              </a:defRPr>
+            </a:pPr>
+            <a:endParaRPr lang="en-US"/>
+          </a:p>
+        </c:txPr>
+        <c:crossAx val="2094734552"/>
+        <c:crosses val="min"/>
+        <c:auto val="1"/>
+        <c:lblAlgn val="ctr"/>
+        <c:noMultiLvlLbl val="1"/>
+      </c:catAx>
+      <c:valAx>
+        <c:axId val="2094734552"/>
+        <c:scaling>
+          <c:orientation val="minMax"/>
+          <c:max val="18"/>
+          <c:min val="10"/>
+        </c:scaling>
+        <c:delete val="0"/>
+        <c:axPos val="l"/>
+        <c:majorGridlines>
+          <c:spPr>
+            <a:ln w="9525" cap="flat">
+              <a:solidFill>
+                <a:srgbClr val="D9D9D9"/>
+              </a:solidFill>
+              <a:prstDash val="solid"/>
+              <a:round/>
+            </a:ln>
+          </c:spPr>
+        </c:majorGridlines>
+        <c:numFmt formatCode="$0&quot;M&quot;" sourceLinked="0"/>
+        <c:majorTickMark val="out"/>
+        <c:minorTickMark val="none"/>
+        <c:tickLblPos val="nextTo"/>
+        <c:spPr>
+          <a:ln w="12700" cap="flat">
+            <a:noFill/>
+            <a:prstDash val="solid"/>
+            <a:round/>
+          </a:ln>
+        </c:spPr>
+        <c:txPr>
+          <a:bodyPr/>
+          <a:lstStyle/>
+          <a:p>
+            <a:pPr>
+              <a:defRPr sz="1400" b="0" i="0" u="none" strike="noStrike">
+                <a:solidFill>
+                  <a:srgbClr val="595959"/>
+                </a:solidFill>
+                <a:latin typeface="+mn-lt"/>
+              </a:defRPr>
+            </a:pPr>
+            <a:endParaRPr lang="en-US"/>
+          </a:p>
+        </c:txPr>
+        <c:crossAx val="2094734554"/>
+        <c:crosses val="autoZero"/>
+        <c:crossBetween val="between"/>
+        <c:majorUnit val="2"/>
+      </c:valAx>
+      <c:spPr>
+        <a:solidFill>
+          <a:srgbClr val="FFFFFF">
+            <a:alpha val="0"/>
+          </a:srgbClr>
+        </a:solidFill>
+        <a:ln>
+          <a:noFill/>
+        </a:ln>
+        <a:effectLst/>
+      </c:spPr>
+    </c:plotArea>
+    <c:plotVisOnly val="1"/>
+    <c:dispBlanksAs val="span"/>
+  </c:chart>
+  <c:spPr>
+    <a:solidFill>
+      <a:srgbClr val="FFFFFF">
+        <a:alpha val="0"/>
+      </a:srgbClr>
+    </a:solidFill>
+    <a:ln>
+      <a:noFill/>
+    </a:ln>
+    <a:effectLst/>
+  </c:spPr>
+  <c:externalData r:id="rId1">
+    <c:autoUpdate val="0"/>
+  </c:externalData>
+</c:chartSpace>
+</file>
+
+<file path=ppt/charts/chart11.xml><?xml version="1.0" encoding="utf-8"?>
+<c:chartSpace xmlns:c="http://schemas.openxmlformats.org/drawingml/2006/chart" xmlns:a="http://schemas.openxmlformats.org/drawingml/2006/main" xmlns:r="http://schemas.openxmlformats.org/officeDocument/2006/relationships">
+  <c:date1904 val="0"/>
+  <c:roundedCorners val="1"/>
+  <c:chart>
+    <c:autoTitleDeleted val="1"/>
+    <c:plotArea>
+      <c:layout/>
+      <c:lineChart>
+        <c:varyColors val="0"/>
+        <c:ser>
+          <c:idx val="0"/>
+          <c:order val="0"/>
+          <c:tx>
+            <c:strRef>
+              <c:f>Sheet1!$B$1</c:f>
+              <c:strCache>
+                <c:ptCount val="1"/>
+                <c:pt idx="0">
+                  <c:v>2026</c:v>
+                </c:pt>
+              </c:strCache>
+            </c:strRef>
+          </c:tx>
+          <c:spPr>
+            <a:solidFill>
+              <a:srgbClr val="2587C5"/>
+            </a:solidFill>
+            <a:ln w="38100" cap="flat">
+              <a:solidFill>
+                <a:srgbClr val="2587C5"/>
+              </a:solidFill>
+              <a:prstDash val="solid"/>
+              <a:round/>
+            </a:ln>
+            <a:effectLst/>
+          </c:spPr>
+          <c:invertIfNegative val="0"/>
+          <c:dLbls>
+            <c:numFmt formatCode="0.0" sourceLinked="0"/>
+            <c:txPr>
+              <a:bodyPr/>
+              <a:lstStyle/>
+              <a:p>
+                <a:pPr>
+                  <a:defRPr b="0" i="0" strike="noStrike" sz="1400" u="none">
+                    <a:solidFill>
+                      <a:srgbClr val="1A1A1A"/>
+                    </a:solidFill>
+                    <a:latin typeface="+mn-lt"/>
+                  </a:defRPr>
+                </a:pPr>
+              </a:p>
+            </c:txPr>
+            <c:showLegendKey val="0"/>
+            <c:showVal val="0"/>
+            <c:showCatName val="0"/>
+            <c:showSerName val="0"/>
+            <c:showPercent val="0"/>
+            <c:showBubbleSize val="0"/>
+            <c:showLeaderLines val="0"/>
+          </c:dLbls>
+          <c:marker>
+            <c:symbol val="circle"/>
+            <c:size val="8"/>
+            <c:spPr>
+              <a:solidFill>
+                <a:srgbClr val="2587C5"/>
+              </a:solidFill>
+              <a:ln w="9525" cap="flat">
+                <a:solidFill>
+                  <a:srgbClr val="2587C5"/>
+                </a:solidFill>
+                <a:prstDash val="solid"/>
+                <a:round/>
+              </a:ln>
+              <a:effectLst/>
+            </c:spPr>
+          </c:marker>
+          <c:cat>
+            <c:multiLvlStrRef>
+              <c:f>Sheet1!$A$2:$A$13</c:f>
+              <c:multiLvlStrCache>
+                <c:ptCount val="12"/>
+                <c:lvl>
+                  <c:pt idx="0">
+                    <c:v>Jan</c:v>
+                  </c:pt>
+                  <c:pt idx="1">
+                    <c:v>Feb</c:v>
+                  </c:pt>
+                  <c:pt idx="2">
+                    <c:v>Mar</c:v>
+                  </c:pt>
+                  <c:pt idx="3">
+                    <c:v>Apr</c:v>
+                  </c:pt>
+                  <c:pt idx="4">
+                    <c:v>May</c:v>
+                  </c:pt>
+                  <c:pt idx="5">
+                    <c:v>Jun</c:v>
+                  </c:pt>
+                  <c:pt idx="6">
+                    <c:v>Jul</c:v>
+                  </c:pt>
+                  <c:pt idx="7">
+                    <c:v>Aug</c:v>
+                  </c:pt>
+                  <c:pt idx="8">
+                    <c:v>Sep</c:v>
+                  </c:pt>
+                  <c:pt idx="9">
+                    <c:v>Oct</c:v>
+                  </c:pt>
+                  <c:pt idx="10">
+                    <c:v>Nov</c:v>
+                  </c:pt>
+                  <c:pt idx="11">
+                    <c:v>Dec</c:v>
+                  </c:pt>
+                </c:lvl>
+              </c:multiLvlStrCache>
+            </c:multiLvlStrRef>
+          </c:cat>
+          <c:val>
+            <c:numRef>
+              <c:f>Sheet1!$B$2:$B$13</c:f>
+              <c:numCache>
+                <c:formatCode>General</c:formatCode>
+                <c:ptCount val="12"/>
+                <c:pt idx="0">
+                  <c:v>6.41</c:v>
+                </c:pt>
+                <c:pt idx="1">
+                  <c:v>6.08</c:v>
+                </c:pt>
+                <c:pt idx="2">
+                  <c:v>6.77</c:v>
+                </c:pt>
+                <c:pt idx="3">
+                  <c:v>7.14</c:v>
+                </c:pt>
+                <c:pt idx="4">
+                  <c:v>6.41</c:v>
+                </c:pt>
+                <c:pt idx="5">
+                  <c:v>7.07</c:v>
+                </c:pt>
+                <c:pt idx="6">
+                  <c:v>7.66</c:v>
+                </c:pt>
+                <c:pt idx="7">
+                  <c:v>7.21</c:v>
+                </c:pt>
+                <c:pt idx="8">
+                  <c:v>7.18</c:v>
+                </c:pt>
+                <c:pt idx="9">
+                  <c:v/>
+                </c:pt>
+                <c:pt idx="10">
+                  <c:v/>
+                </c:pt>
+                <c:pt idx="11">
+                  <c:v/>
+                </c:pt>
+              </c:numCache>
+            </c:numRef>
+          </c:val>
+          <c:smooth val="0"/>
+        </c:ser>
+        <c:dLbls>
+          <c:numFmt formatCode="0.0" sourceLinked="0"/>
+          <c:txPr>
+            <a:bodyPr/>
+            <a:lstStyle/>
+            <a:p>
+              <a:pPr>
+                <a:defRPr b="0" i="0" strike="noStrike" sz="1400" u="none">
+                  <a:solidFill>
+                    <a:srgbClr val="1A1A1A"/>
+                  </a:solidFill>
+                  <a:latin typeface="+mn-lt"/>
+                </a:defRPr>
+              </a:pPr>
+            </a:p>
+          </c:txPr>
+          <c:showLegendKey val="0"/>
+          <c:showVal val="0"/>
+          <c:showCatName val="0"/>
+          <c:showSerName val="0"/>
+          <c:showPercent val="0"/>
+          <c:showBubbleSize val="0"/>
+          <c:showLeaderLines val="0"/>
+        </c:dLbls>
+        <c:marker val="1"/>
+        <c:axId val="2094734554"/>
+        <c:axId val="2094734552"/>
+        <c:axId val="2094734556"/>
+      </c:lineChart>
+      <c:catAx>
+        <c:axId val="2094734554"/>
+        <c:scaling>
+          <c:orientation val="minMax"/>
+        </c:scaling>
+        <c:delete val="0"/>
+        <c:axPos val="b"/>
+        <c:numFmt formatCode="General" sourceLinked="1"/>
+        <c:majorTickMark val="out"/>
+        <c:minorTickMark val="none"/>
+        <c:tickLblPos val="low"/>
+        <c:spPr>
+          <a:ln w="12700" cap="flat">
+            <a:noFill/>
+            <a:prstDash val="solid"/>
+            <a:round/>
+          </a:ln>
+        </c:spPr>
+        <c:txPr>
+          <a:bodyPr/>
+          <a:lstStyle/>
+          <a:p>
+            <a:pPr>
+              <a:defRPr sz="1400" b="0" i="0" u="none" strike="noStrike">
+                <a:solidFill>
+                  <a:srgbClr val="FFFFFF"/>
+                </a:solidFill>
+                <a:latin typeface="+mn-lt"/>
+              </a:defRPr>
+            </a:pPr>
+            <a:endParaRPr lang="en-US"/>
+          </a:p>
+        </c:txPr>
+        <c:crossAx val="2094734552"/>
+        <c:crosses val="min"/>
+        <c:auto val="1"/>
+        <c:lblAlgn val="ctr"/>
+        <c:noMultiLvlLbl val="1"/>
+      </c:catAx>
+      <c:valAx>
+        <c:axId val="2094734552"/>
+        <c:scaling>
+          <c:orientation val="minMax"/>
+          <c:max val="9"/>
+          <c:min val="5"/>
+        </c:scaling>
+        <c:delete val="0"/>
+        <c:axPos val="l"/>
+        <c:numFmt formatCode="$0&quot;M&quot;" sourceLinked="0"/>
+        <c:majorTickMark val="out"/>
+        <c:minorTickMark val="none"/>
+        <c:tickLblPos val="nextTo"/>
+        <c:spPr>
+          <a:ln w="12700" cap="flat">
+            <a:noFill/>
+            <a:prstDash val="solid"/>
+            <a:round/>
+          </a:ln>
+        </c:spPr>
+        <c:txPr>
+          <a:bodyPr/>
+          <a:lstStyle/>
+          <a:p>
+            <a:pPr>
+              <a:defRPr sz="1400" b="0" i="0" u="none" strike="noStrike">
+                <a:solidFill>
+                  <a:srgbClr val="FFFFFF"/>
+                </a:solidFill>
+                <a:latin typeface="+mn-lt"/>
+              </a:defRPr>
+            </a:pPr>
+            <a:endParaRPr lang="en-US"/>
+          </a:p>
+        </c:txPr>
+        <c:crossAx val="2094734554"/>
+        <c:crosses val="autoZero"/>
+        <c:crossBetween val="between"/>
+        <c:majorUnit val="1"/>
+      </c:valAx>
+      <c:spPr>
+        <a:noFill/>
+        <a:ln>
+          <a:noFill/>
+        </a:ln>
+        <a:effectLst/>
+      </c:spPr>
+    </c:plotArea>
+    <c:plotVisOnly val="1"/>
+    <c:dispBlanksAs val="span"/>
+  </c:chart>
+  <c:spPr>
+    <a:noFill/>
+    <a:ln>
+      <a:noFill/>
+    </a:ln>
+    <a:effectLst/>
+  </c:spPr>
+  <c:externalData r:id="rId1">
+    <c:autoUpdate val="0"/>
+  </c:externalData>
+</c:chartSpace>
+</file>
+
+<file path=ppt/charts/chart12.xml><?xml version="1.0" encoding="utf-8"?>
+<c:chartSpace xmlns:c="http://schemas.openxmlformats.org/drawingml/2006/chart" xmlns:a="http://schemas.openxmlformats.org/drawingml/2006/main" xmlns:r="http://schemas.openxmlformats.org/officeDocument/2006/relationships">
+  <c:date1904 val="0"/>
+  <c:roundedCorners val="1"/>
+  <c:chart>
+    <c:autoTitleDeleted val="1"/>
+    <c:plotArea>
+      <c:layout/>
+      <c:lineChart>
+        <c:varyColors val="0"/>
+        <c:ser>
+          <c:idx val="0"/>
+          <c:order val="0"/>
+          <c:tx>
+            <c:strRef>
+              <c:f>Sheet1!$B$1</c:f>
+              <c:strCache>
+                <c:ptCount val="1"/>
+                <c:pt idx="0">
+                  <c:v>2026</c:v>
+                </c:pt>
+              </c:strCache>
+            </c:strRef>
+          </c:tx>
+          <c:spPr>
+            <a:solidFill>
+              <a:srgbClr val="2587C5"/>
+            </a:solidFill>
+            <a:ln>
+              <a:noFill/>
+            </a:ln>
+            <a:effectLst/>
+          </c:spPr>
+          <c:invertIfNegative val="0"/>
+          <c:dLbls>
+            <c:numFmt formatCode="0.0" sourceLinked="0"/>
+            <c:txPr>
+              <a:bodyPr/>
+              <a:lstStyle/>
+              <a:p>
+                <a:pPr>
+                  <a:defRPr b="0" i="0" strike="noStrike" sz="1400" u="none">
+                    <a:solidFill>
+                      <a:srgbClr val="1A1A1A"/>
+                    </a:solidFill>
+                    <a:latin typeface="+mn-lt"/>
+                  </a:defRPr>
+                </a:pPr>
+              </a:p>
+            </c:txPr>
+            <c:dLblPos val="t"/>
+            <c:showLegendKey val="0"/>
             <c:showVal val="1"/>
             <c:showCatName val="0"/>
             <c:showSerName val="0"/>
@@ -174,6 +1109,2831 @@
             <c:showBubbleSize val="0"/>
             <c:showLeaderLines val="0"/>
           </c:dLbls>
+          <c:marker>
+            <c:symbol val="none"/>
+            <c:size val="8"/>
+            <c:spPr>
+              <a:solidFill>
+                <a:srgbClr val="2587C5"/>
+              </a:solidFill>
+              <a:ln w="9525" cap="flat">
+                <a:solidFill>
+                  <a:srgbClr val="2587C5"/>
+                </a:solidFill>
+                <a:prstDash val="solid"/>
+                <a:round/>
+              </a:ln>
+              <a:effectLst/>
+            </c:spPr>
+          </c:marker>
+          <c:cat>
+            <c:multiLvlStrRef>
+              <c:f>Sheet1!$A$2:$A$13</c:f>
+              <c:multiLvlStrCache>
+                <c:ptCount val="12"/>
+                <c:lvl>
+                  <c:pt idx="0">
+                    <c:v>Jan</c:v>
+                  </c:pt>
+                  <c:pt idx="1">
+                    <c:v>Feb</c:v>
+                  </c:pt>
+                  <c:pt idx="2">
+                    <c:v>Mar</c:v>
+                  </c:pt>
+                  <c:pt idx="3">
+                    <c:v>Apr</c:v>
+                  </c:pt>
+                  <c:pt idx="4">
+                    <c:v>May</c:v>
+                  </c:pt>
+                  <c:pt idx="5">
+                    <c:v>Jun</c:v>
+                  </c:pt>
+                  <c:pt idx="6">
+                    <c:v>Jul</c:v>
+                  </c:pt>
+                  <c:pt idx="7">
+                    <c:v>Aug</c:v>
+                  </c:pt>
+                  <c:pt idx="8">
+                    <c:v>Sep</c:v>
+                  </c:pt>
+                  <c:pt idx="9">
+                    <c:v>Oct</c:v>
+                  </c:pt>
+                  <c:pt idx="10">
+                    <c:v>Nov</c:v>
+                  </c:pt>
+                  <c:pt idx="11">
+                    <c:v>Dec</c:v>
+                  </c:pt>
+                </c:lvl>
+              </c:multiLvlStrCache>
+            </c:multiLvlStrRef>
+          </c:cat>
+          <c:val>
+            <c:numRef>
+              <c:f>Sheet1!$B$2:$B$13</c:f>
+              <c:numCache>
+                <c:formatCode>General</c:formatCode>
+                <c:ptCount val="12"/>
+                <c:pt idx="0">
+                  <c:v/>
+                </c:pt>
+                <c:pt idx="1">
+                  <c:v/>
+                </c:pt>
+                <c:pt idx="2">
+                  <c:v>6.77</c:v>
+                </c:pt>
+                <c:pt idx="3">
+                  <c:v>7.14</c:v>
+                </c:pt>
+                <c:pt idx="4">
+                  <c:v/>
+                </c:pt>
+                <c:pt idx="5">
+                  <c:v>7.07</c:v>
+                </c:pt>
+                <c:pt idx="6">
+                  <c:v>7.66</c:v>
+                </c:pt>
+                <c:pt idx="7">
+                  <c:v>7.21</c:v>
+                </c:pt>
+                <c:pt idx="8">
+                  <c:v>7.18</c:v>
+                </c:pt>
+                <c:pt idx="9">
+                  <c:v/>
+                </c:pt>
+                <c:pt idx="10">
+                  <c:v/>
+                </c:pt>
+                <c:pt idx="11">
+                  <c:v/>
+                </c:pt>
+              </c:numCache>
+            </c:numRef>
+          </c:val>
+          <c:smooth val="0"/>
+        </c:ser>
+        <c:dLbls>
+          <c:numFmt formatCode="0.0" sourceLinked="0"/>
+          <c:txPr>
+            <a:bodyPr/>
+            <a:lstStyle/>
+            <a:p>
+              <a:pPr>
+                <a:defRPr b="0" i="0" strike="noStrike" sz="1400" u="none">
+                  <a:solidFill>
+                    <a:srgbClr val="1A1A1A"/>
+                  </a:solidFill>
+                  <a:latin typeface="+mn-lt"/>
+                </a:defRPr>
+              </a:pPr>
+            </a:p>
+          </c:txPr>
+          <c:dLblPos val="t"/>
+          <c:showLegendKey val="0"/>
+          <c:showVal val="1"/>
+          <c:showCatName val="0"/>
+          <c:showSerName val="0"/>
+          <c:showPercent val="0"/>
+          <c:showBubbleSize val="0"/>
+          <c:showLeaderLines val="0"/>
+        </c:dLbls>
+        <c:marker val="1"/>
+        <c:axId val="2094734554"/>
+        <c:axId val="2094734552"/>
+        <c:axId val="2094734556"/>
+      </c:lineChart>
+      <c:catAx>
+        <c:axId val="2094734554"/>
+        <c:scaling>
+          <c:orientation val="minMax"/>
+        </c:scaling>
+        <c:delete val="0"/>
+        <c:axPos val="b"/>
+        <c:numFmt formatCode="General" sourceLinked="1"/>
+        <c:majorTickMark val="out"/>
+        <c:minorTickMark val="none"/>
+        <c:tickLblPos val="low"/>
+        <c:spPr>
+          <a:ln w="12700" cap="flat">
+            <a:noFill/>
+            <a:prstDash val="solid"/>
+            <a:round/>
+          </a:ln>
+        </c:spPr>
+        <c:txPr>
+          <a:bodyPr/>
+          <a:lstStyle/>
+          <a:p>
+            <a:pPr>
+              <a:defRPr sz="1400" b="0" i="0" u="none" strike="noStrike">
+                <a:solidFill>
+                  <a:srgbClr val="FFFFFF"/>
+                </a:solidFill>
+                <a:latin typeface="+mn-lt"/>
+              </a:defRPr>
+            </a:pPr>
+            <a:endParaRPr lang="en-US"/>
+          </a:p>
+        </c:txPr>
+        <c:crossAx val="2094734552"/>
+        <c:crosses val="min"/>
+        <c:auto val="1"/>
+        <c:lblAlgn val="ctr"/>
+        <c:noMultiLvlLbl val="1"/>
+      </c:catAx>
+      <c:valAx>
+        <c:axId val="2094734552"/>
+        <c:scaling>
+          <c:orientation val="minMax"/>
+          <c:max val="9"/>
+          <c:min val="5"/>
+        </c:scaling>
+        <c:delete val="0"/>
+        <c:axPos val="l"/>
+        <c:numFmt formatCode="$0&quot;M&quot;" sourceLinked="0"/>
+        <c:majorTickMark val="out"/>
+        <c:minorTickMark val="none"/>
+        <c:tickLblPos val="nextTo"/>
+        <c:spPr>
+          <a:ln w="12700" cap="flat">
+            <a:noFill/>
+            <a:prstDash val="solid"/>
+            <a:round/>
+          </a:ln>
+        </c:spPr>
+        <c:txPr>
+          <a:bodyPr/>
+          <a:lstStyle/>
+          <a:p>
+            <a:pPr>
+              <a:defRPr sz="1400" b="0" i="0" u="none" strike="noStrike">
+                <a:solidFill>
+                  <a:srgbClr val="FFFFFF"/>
+                </a:solidFill>
+                <a:latin typeface="+mn-lt"/>
+              </a:defRPr>
+            </a:pPr>
+            <a:endParaRPr lang="en-US"/>
+          </a:p>
+        </c:txPr>
+        <c:crossAx val="2094734554"/>
+        <c:crosses val="autoZero"/>
+        <c:crossBetween val="between"/>
+        <c:majorUnit val="1"/>
+      </c:valAx>
+      <c:spPr>
+        <a:solidFill>
+          <a:srgbClr val="FFFFFF">
+            <a:alpha val="0"/>
+          </a:srgbClr>
+        </a:solidFill>
+        <a:ln>
+          <a:noFill/>
+        </a:ln>
+        <a:effectLst/>
+      </c:spPr>
+    </c:plotArea>
+    <c:plotVisOnly val="1"/>
+    <c:dispBlanksAs val="span"/>
+  </c:chart>
+  <c:spPr>
+    <a:solidFill>
+      <a:srgbClr val="FFFFFF">
+        <a:alpha val="0"/>
+      </a:srgbClr>
+    </a:solidFill>
+    <a:ln>
+      <a:noFill/>
+    </a:ln>
+    <a:effectLst/>
+  </c:spPr>
+  <c:externalData r:id="rId1">
+    <c:autoUpdate val="0"/>
+  </c:externalData>
+</c:chartSpace>
+</file>
+
+<file path=ppt/charts/chart13.xml><?xml version="1.0" encoding="utf-8"?>
+<c:chartSpace xmlns:c="http://schemas.openxmlformats.org/drawingml/2006/chart" xmlns:a="http://schemas.openxmlformats.org/drawingml/2006/main" xmlns:r="http://schemas.openxmlformats.org/officeDocument/2006/relationships">
+  <c:date1904 val="0"/>
+  <c:roundedCorners val="1"/>
+  <c:chart>
+    <c:autoTitleDeleted val="1"/>
+    <c:plotArea>
+      <c:layout/>
+      <c:lineChart>
+        <c:varyColors val="0"/>
+        <c:ser>
+          <c:idx val="0"/>
+          <c:order val="0"/>
+          <c:tx>
+            <c:strRef>
+              <c:f>Sheet1!$B$1</c:f>
+              <c:strCache>
+                <c:ptCount val="1"/>
+                <c:pt idx="0">
+                  <c:v>2026</c:v>
+                </c:pt>
+              </c:strCache>
+            </c:strRef>
+          </c:tx>
+          <c:spPr>
+            <a:solidFill>
+              <a:srgbClr val="2587C5"/>
+            </a:solidFill>
+            <a:ln>
+              <a:noFill/>
+            </a:ln>
+            <a:effectLst/>
+          </c:spPr>
+          <c:invertIfNegative val="0"/>
+          <c:dLbls>
+            <c:numFmt formatCode="0.0" sourceLinked="0"/>
+            <c:txPr>
+              <a:bodyPr/>
+              <a:lstStyle/>
+              <a:p>
+                <a:pPr>
+                  <a:defRPr b="0" i="0" strike="noStrike" sz="1400" u="none">
+                    <a:solidFill>
+                      <a:srgbClr val="1A1A1A"/>
+                    </a:solidFill>
+                    <a:latin typeface="+mn-lt"/>
+                  </a:defRPr>
+                </a:pPr>
+              </a:p>
+            </c:txPr>
+            <c:dLblPos val="b"/>
+            <c:showLegendKey val="0"/>
+            <c:showVal val="1"/>
+            <c:showCatName val="0"/>
+            <c:showSerName val="0"/>
+            <c:showPercent val="0"/>
+            <c:showBubbleSize val="0"/>
+            <c:showLeaderLines val="0"/>
+          </c:dLbls>
+          <c:marker>
+            <c:symbol val="none"/>
+            <c:size val="8"/>
+            <c:spPr>
+              <a:solidFill>
+                <a:srgbClr val="2587C5"/>
+              </a:solidFill>
+              <a:ln w="9525" cap="flat">
+                <a:solidFill>
+                  <a:srgbClr val="2587C5"/>
+                </a:solidFill>
+                <a:prstDash val="solid"/>
+                <a:round/>
+              </a:ln>
+              <a:effectLst/>
+            </c:spPr>
+          </c:marker>
+          <c:cat>
+            <c:multiLvlStrRef>
+              <c:f>Sheet1!$A$2:$A$13</c:f>
+              <c:multiLvlStrCache>
+                <c:ptCount val="12"/>
+                <c:lvl>
+                  <c:pt idx="0">
+                    <c:v>Jan</c:v>
+                  </c:pt>
+                  <c:pt idx="1">
+                    <c:v>Feb</c:v>
+                  </c:pt>
+                  <c:pt idx="2">
+                    <c:v>Mar</c:v>
+                  </c:pt>
+                  <c:pt idx="3">
+                    <c:v>Apr</c:v>
+                  </c:pt>
+                  <c:pt idx="4">
+                    <c:v>May</c:v>
+                  </c:pt>
+                  <c:pt idx="5">
+                    <c:v>Jun</c:v>
+                  </c:pt>
+                  <c:pt idx="6">
+                    <c:v>Jul</c:v>
+                  </c:pt>
+                  <c:pt idx="7">
+                    <c:v>Aug</c:v>
+                  </c:pt>
+                  <c:pt idx="8">
+                    <c:v>Sep</c:v>
+                  </c:pt>
+                  <c:pt idx="9">
+                    <c:v>Oct</c:v>
+                  </c:pt>
+                  <c:pt idx="10">
+                    <c:v>Nov</c:v>
+                  </c:pt>
+                  <c:pt idx="11">
+                    <c:v>Dec</c:v>
+                  </c:pt>
+                </c:lvl>
+              </c:multiLvlStrCache>
+            </c:multiLvlStrRef>
+          </c:cat>
+          <c:val>
+            <c:numRef>
+              <c:f>Sheet1!$B$2:$B$13</c:f>
+              <c:numCache>
+                <c:formatCode>General</c:formatCode>
+                <c:ptCount val="12"/>
+                <c:pt idx="0">
+                  <c:v>6.41</c:v>
+                </c:pt>
+                <c:pt idx="1">
+                  <c:v>6.08</c:v>
+                </c:pt>
+                <c:pt idx="2">
+                  <c:v/>
+                </c:pt>
+                <c:pt idx="3">
+                  <c:v/>
+                </c:pt>
+                <c:pt idx="4">
+                  <c:v>6.41</c:v>
+                </c:pt>
+                <c:pt idx="5">
+                  <c:v/>
+                </c:pt>
+                <c:pt idx="6">
+                  <c:v/>
+                </c:pt>
+                <c:pt idx="7">
+                  <c:v/>
+                </c:pt>
+                <c:pt idx="8">
+                  <c:v/>
+                </c:pt>
+                <c:pt idx="9">
+                  <c:v/>
+                </c:pt>
+                <c:pt idx="10">
+                  <c:v/>
+                </c:pt>
+                <c:pt idx="11">
+                  <c:v/>
+                </c:pt>
+              </c:numCache>
+            </c:numRef>
+          </c:val>
+          <c:smooth val="0"/>
+        </c:ser>
+        <c:dLbls>
+          <c:numFmt formatCode="0.0" sourceLinked="0"/>
+          <c:txPr>
+            <a:bodyPr/>
+            <a:lstStyle/>
+            <a:p>
+              <a:pPr>
+                <a:defRPr b="0" i="0" strike="noStrike" sz="1400" u="none">
+                  <a:solidFill>
+                    <a:srgbClr val="1A1A1A"/>
+                  </a:solidFill>
+                  <a:latin typeface="+mn-lt"/>
+                </a:defRPr>
+              </a:pPr>
+            </a:p>
+          </c:txPr>
+          <c:dLblPos val="b"/>
+          <c:showLegendKey val="0"/>
+          <c:showVal val="1"/>
+          <c:showCatName val="0"/>
+          <c:showSerName val="0"/>
+          <c:showPercent val="0"/>
+          <c:showBubbleSize val="0"/>
+          <c:showLeaderLines val="0"/>
+        </c:dLbls>
+        <c:marker val="1"/>
+        <c:axId val="2094734554"/>
+        <c:axId val="2094734552"/>
+        <c:axId val="2094734556"/>
+      </c:lineChart>
+      <c:catAx>
+        <c:axId val="2094734554"/>
+        <c:scaling>
+          <c:orientation val="minMax"/>
+        </c:scaling>
+        <c:delete val="0"/>
+        <c:axPos val="b"/>
+        <c:numFmt formatCode="General" sourceLinked="1"/>
+        <c:majorTickMark val="out"/>
+        <c:minorTickMark val="none"/>
+        <c:tickLblPos val="low"/>
+        <c:spPr>
+          <a:ln w="12700" cap="flat">
+            <a:noFill/>
+            <a:prstDash val="solid"/>
+            <a:round/>
+          </a:ln>
+        </c:spPr>
+        <c:txPr>
+          <a:bodyPr/>
+          <a:lstStyle/>
+          <a:p>
+            <a:pPr>
+              <a:defRPr sz="1400" b="0" i="0" u="none" strike="noStrike">
+                <a:solidFill>
+                  <a:srgbClr val="FFFFFF"/>
+                </a:solidFill>
+                <a:latin typeface="+mn-lt"/>
+              </a:defRPr>
+            </a:pPr>
+            <a:endParaRPr lang="en-US"/>
+          </a:p>
+        </c:txPr>
+        <c:crossAx val="2094734552"/>
+        <c:crosses val="min"/>
+        <c:auto val="1"/>
+        <c:lblAlgn val="ctr"/>
+        <c:noMultiLvlLbl val="1"/>
+      </c:catAx>
+      <c:valAx>
+        <c:axId val="2094734552"/>
+        <c:scaling>
+          <c:orientation val="minMax"/>
+          <c:max val="9"/>
+          <c:min val="5"/>
+        </c:scaling>
+        <c:delete val="0"/>
+        <c:axPos val="l"/>
+        <c:numFmt formatCode="$0&quot;M&quot;" sourceLinked="0"/>
+        <c:majorTickMark val="out"/>
+        <c:minorTickMark val="none"/>
+        <c:tickLblPos val="nextTo"/>
+        <c:spPr>
+          <a:ln w="12700" cap="flat">
+            <a:noFill/>
+            <a:prstDash val="solid"/>
+            <a:round/>
+          </a:ln>
+        </c:spPr>
+        <c:txPr>
+          <a:bodyPr/>
+          <a:lstStyle/>
+          <a:p>
+            <a:pPr>
+              <a:defRPr sz="1400" b="0" i="0" u="none" strike="noStrike">
+                <a:solidFill>
+                  <a:srgbClr val="FFFFFF"/>
+                </a:solidFill>
+                <a:latin typeface="+mn-lt"/>
+              </a:defRPr>
+            </a:pPr>
+            <a:endParaRPr lang="en-US"/>
+          </a:p>
+        </c:txPr>
+        <c:crossAx val="2094734554"/>
+        <c:crosses val="autoZero"/>
+        <c:crossBetween val="between"/>
+        <c:majorUnit val="1"/>
+      </c:valAx>
+      <c:spPr>
+        <a:solidFill>
+          <a:srgbClr val="FFFFFF">
+            <a:alpha val="0"/>
+          </a:srgbClr>
+        </a:solidFill>
+        <a:ln>
+          <a:noFill/>
+        </a:ln>
+        <a:effectLst/>
+      </c:spPr>
+    </c:plotArea>
+    <c:plotVisOnly val="1"/>
+    <c:dispBlanksAs val="span"/>
+  </c:chart>
+  <c:spPr>
+    <a:solidFill>
+      <a:srgbClr val="FFFFFF">
+        <a:alpha val="0"/>
+      </a:srgbClr>
+    </a:solidFill>
+    <a:ln>
+      <a:noFill/>
+    </a:ln>
+    <a:effectLst/>
+  </c:spPr>
+  <c:externalData r:id="rId1">
+    <c:autoUpdate val="0"/>
+  </c:externalData>
+</c:chartSpace>
+</file>
+
+<file path=ppt/charts/chart14.xml><?xml version="1.0" encoding="utf-8"?>
+<c:chartSpace xmlns:c="http://schemas.openxmlformats.org/drawingml/2006/chart" xmlns:a="http://schemas.openxmlformats.org/drawingml/2006/main" xmlns:r="http://schemas.openxmlformats.org/officeDocument/2006/relationships">
+  <c:date1904 val="0"/>
+  <c:roundedCorners val="1"/>
+  <c:chart>
+    <c:autoTitleDeleted val="1"/>
+    <c:plotArea>
+      <c:layout/>
+      <c:lineChart>
+        <c:varyColors val="0"/>
+        <c:ser>
+          <c:idx val="0"/>
+          <c:order val="0"/>
+          <c:tx>
+            <c:strRef>
+              <c:f>Sheet1!$B$1</c:f>
+              <c:strCache>
+                <c:ptCount val="1"/>
+                <c:pt idx="0">
+                  <c:v>2025</c:v>
+                </c:pt>
+              </c:strCache>
+            </c:strRef>
+          </c:tx>
+          <c:spPr>
+            <a:solidFill>
+              <a:srgbClr val="9AA3AD"/>
+            </a:solidFill>
+            <a:ln>
+              <a:noFill/>
+            </a:ln>
+            <a:effectLst/>
+          </c:spPr>
+          <c:invertIfNegative val="0"/>
+          <c:dLbls>
+            <c:numFmt formatCode="0.0" sourceLinked="0"/>
+            <c:txPr>
+              <a:bodyPr/>
+              <a:lstStyle/>
+              <a:p>
+                <a:pPr>
+                  <a:defRPr b="0" i="0" strike="noStrike" sz="1400" u="none">
+                    <a:solidFill>
+                      <a:srgbClr val="1A1A1A"/>
+                    </a:solidFill>
+                    <a:latin typeface="+mn-lt"/>
+                  </a:defRPr>
+                </a:pPr>
+              </a:p>
+            </c:txPr>
+            <c:dLblPos val="t"/>
+            <c:showLegendKey val="0"/>
+            <c:showVal val="1"/>
+            <c:showCatName val="0"/>
+            <c:showSerName val="0"/>
+            <c:showPercent val="0"/>
+            <c:showBubbleSize val="0"/>
+            <c:showLeaderLines val="0"/>
+          </c:dLbls>
+          <c:marker>
+            <c:symbol val="none"/>
+            <c:size val="8"/>
+            <c:spPr>
+              <a:solidFill>
+                <a:srgbClr val="9AA3AD"/>
+              </a:solidFill>
+              <a:ln w="9525" cap="flat">
+                <a:solidFill>
+                  <a:srgbClr val="9AA3AD"/>
+                </a:solidFill>
+                <a:prstDash val="solid"/>
+                <a:round/>
+              </a:ln>
+              <a:effectLst/>
+            </c:spPr>
+          </c:marker>
+          <c:cat>
+            <c:multiLvlStrRef>
+              <c:f>Sheet1!$A$2:$A$13</c:f>
+              <c:multiLvlStrCache>
+                <c:ptCount val="12"/>
+                <c:lvl>
+                  <c:pt idx="0">
+                    <c:v>Jan</c:v>
+                  </c:pt>
+                  <c:pt idx="1">
+                    <c:v>Feb</c:v>
+                  </c:pt>
+                  <c:pt idx="2">
+                    <c:v>Mar</c:v>
+                  </c:pt>
+                  <c:pt idx="3">
+                    <c:v>Apr</c:v>
+                  </c:pt>
+                  <c:pt idx="4">
+                    <c:v>May</c:v>
+                  </c:pt>
+                  <c:pt idx="5">
+                    <c:v>Jun</c:v>
+                  </c:pt>
+                  <c:pt idx="6">
+                    <c:v>Jul</c:v>
+                  </c:pt>
+                  <c:pt idx="7">
+                    <c:v>Aug</c:v>
+                  </c:pt>
+                  <c:pt idx="8">
+                    <c:v>Sep</c:v>
+                  </c:pt>
+                  <c:pt idx="9">
+                    <c:v>Oct</c:v>
+                  </c:pt>
+                  <c:pt idx="10">
+                    <c:v>Nov</c:v>
+                  </c:pt>
+                  <c:pt idx="11">
+                    <c:v>Dec</c:v>
+                  </c:pt>
+                </c:lvl>
+              </c:multiLvlStrCache>
+            </c:multiLvlStrRef>
+          </c:cat>
+          <c:val>
+            <c:numRef>
+              <c:f>Sheet1!$B$2:$B$13</c:f>
+              <c:numCache>
+                <c:formatCode>General</c:formatCode>
+                <c:ptCount val="12"/>
+                <c:pt idx="0">
+                  <c:v>7.05</c:v>
+                </c:pt>
+                <c:pt idx="1">
+                  <c:v>6.47</c:v>
+                </c:pt>
+                <c:pt idx="2">
+                  <c:v/>
+                </c:pt>
+                <c:pt idx="3">
+                  <c:v/>
+                </c:pt>
+                <c:pt idx="4">
+                  <c:v>6.67</c:v>
+                </c:pt>
+                <c:pt idx="5">
+                  <c:v/>
+                </c:pt>
+                <c:pt idx="6">
+                  <c:v/>
+                </c:pt>
+                <c:pt idx="7">
+                  <c:v/>
+                </c:pt>
+                <c:pt idx="8">
+                  <c:v/>
+                </c:pt>
+                <c:pt idx="9">
+                  <c:v/>
+                </c:pt>
+                <c:pt idx="10">
+                  <c:v/>
+                </c:pt>
+                <c:pt idx="11">
+                  <c:v/>
+                </c:pt>
+              </c:numCache>
+            </c:numRef>
+          </c:val>
+          <c:smooth val="0"/>
+        </c:ser>
+        <c:dLbls>
+          <c:numFmt formatCode="0.0" sourceLinked="0"/>
+          <c:txPr>
+            <a:bodyPr/>
+            <a:lstStyle/>
+            <a:p>
+              <a:pPr>
+                <a:defRPr b="0" i="0" strike="noStrike" sz="1400" u="none">
+                  <a:solidFill>
+                    <a:srgbClr val="1A1A1A"/>
+                  </a:solidFill>
+                  <a:latin typeface="+mn-lt"/>
+                </a:defRPr>
+              </a:pPr>
+            </a:p>
+          </c:txPr>
+          <c:dLblPos val="t"/>
+          <c:showLegendKey val="0"/>
+          <c:showVal val="1"/>
+          <c:showCatName val="0"/>
+          <c:showSerName val="0"/>
+          <c:showPercent val="0"/>
+          <c:showBubbleSize val="0"/>
+          <c:showLeaderLines val="0"/>
+        </c:dLbls>
+        <c:marker val="1"/>
+        <c:axId val="2094734554"/>
+        <c:axId val="2094734552"/>
+        <c:axId val="2094734556"/>
+      </c:lineChart>
+      <c:catAx>
+        <c:axId val="2094734554"/>
+        <c:scaling>
+          <c:orientation val="minMax"/>
+        </c:scaling>
+        <c:delete val="0"/>
+        <c:axPos val="b"/>
+        <c:numFmt formatCode="General" sourceLinked="1"/>
+        <c:majorTickMark val="out"/>
+        <c:minorTickMark val="none"/>
+        <c:tickLblPos val="low"/>
+        <c:spPr>
+          <a:ln w="12700" cap="flat">
+            <a:noFill/>
+            <a:prstDash val="solid"/>
+            <a:round/>
+          </a:ln>
+        </c:spPr>
+        <c:txPr>
+          <a:bodyPr/>
+          <a:lstStyle/>
+          <a:p>
+            <a:pPr>
+              <a:defRPr sz="1400" b="0" i="0" u="none" strike="noStrike">
+                <a:solidFill>
+                  <a:srgbClr val="FFFFFF"/>
+                </a:solidFill>
+                <a:latin typeface="+mn-lt"/>
+              </a:defRPr>
+            </a:pPr>
+            <a:endParaRPr lang="en-US"/>
+          </a:p>
+        </c:txPr>
+        <c:crossAx val="2094734552"/>
+        <c:crosses val="min"/>
+        <c:auto val="1"/>
+        <c:lblAlgn val="ctr"/>
+        <c:noMultiLvlLbl val="1"/>
+      </c:catAx>
+      <c:valAx>
+        <c:axId val="2094734552"/>
+        <c:scaling>
+          <c:orientation val="minMax"/>
+          <c:max val="9"/>
+          <c:min val="5"/>
+        </c:scaling>
+        <c:delete val="0"/>
+        <c:axPos val="l"/>
+        <c:numFmt formatCode="$0&quot;M&quot;" sourceLinked="0"/>
+        <c:majorTickMark val="out"/>
+        <c:minorTickMark val="none"/>
+        <c:tickLblPos val="nextTo"/>
+        <c:spPr>
+          <a:ln w="12700" cap="flat">
+            <a:noFill/>
+            <a:prstDash val="solid"/>
+            <a:round/>
+          </a:ln>
+        </c:spPr>
+        <c:txPr>
+          <a:bodyPr/>
+          <a:lstStyle/>
+          <a:p>
+            <a:pPr>
+              <a:defRPr sz="1400" b="0" i="0" u="none" strike="noStrike">
+                <a:solidFill>
+                  <a:srgbClr val="FFFFFF"/>
+                </a:solidFill>
+                <a:latin typeface="+mn-lt"/>
+              </a:defRPr>
+            </a:pPr>
+            <a:endParaRPr lang="en-US"/>
+          </a:p>
+        </c:txPr>
+        <c:crossAx val="2094734554"/>
+        <c:crosses val="autoZero"/>
+        <c:crossBetween val="between"/>
+        <c:majorUnit val="1"/>
+      </c:valAx>
+      <c:spPr>
+        <a:solidFill>
+          <a:srgbClr val="FFFFFF">
+            <a:alpha val="0"/>
+          </a:srgbClr>
+        </a:solidFill>
+        <a:ln>
+          <a:noFill/>
+        </a:ln>
+        <a:effectLst/>
+      </c:spPr>
+    </c:plotArea>
+    <c:plotVisOnly val="1"/>
+    <c:dispBlanksAs val="span"/>
+  </c:chart>
+  <c:spPr>
+    <a:solidFill>
+      <a:srgbClr val="FFFFFF">
+        <a:alpha val="0"/>
+      </a:srgbClr>
+    </a:solidFill>
+    <a:ln>
+      <a:noFill/>
+    </a:ln>
+    <a:effectLst/>
+  </c:spPr>
+  <c:externalData r:id="rId1">
+    <c:autoUpdate val="0"/>
+  </c:externalData>
+</c:chartSpace>
+</file>
+
+<file path=ppt/charts/chart15.xml><?xml version="1.0" encoding="utf-8"?>
+<c:chartSpace xmlns:c="http://schemas.openxmlformats.org/drawingml/2006/chart" xmlns:a="http://schemas.openxmlformats.org/drawingml/2006/main" xmlns:r="http://schemas.openxmlformats.org/officeDocument/2006/relationships">
+  <c:date1904 val="0"/>
+  <c:roundedCorners val="1"/>
+  <c:chart>
+    <c:autoTitleDeleted val="1"/>
+    <c:plotArea>
+      <c:layout/>
+      <c:lineChart>
+        <c:varyColors val="0"/>
+        <c:ser>
+          <c:idx val="0"/>
+          <c:order val="0"/>
+          <c:tx>
+            <c:strRef>
+              <c:f>Sheet1!$B$1</c:f>
+              <c:strCache>
+                <c:ptCount val="1"/>
+                <c:pt idx="0">
+                  <c:v>2025</c:v>
+                </c:pt>
+              </c:strCache>
+            </c:strRef>
+          </c:tx>
+          <c:spPr>
+            <a:solidFill>
+              <a:srgbClr val="9AA3AD"/>
+            </a:solidFill>
+            <a:ln>
+              <a:noFill/>
+            </a:ln>
+            <a:effectLst/>
+          </c:spPr>
+          <c:invertIfNegative val="0"/>
+          <c:dLbls>
+            <c:numFmt formatCode="0.0" sourceLinked="0"/>
+            <c:txPr>
+              <a:bodyPr/>
+              <a:lstStyle/>
+              <a:p>
+                <a:pPr>
+                  <a:defRPr b="0" i="0" strike="noStrike" sz="1400" u="none">
+                    <a:solidFill>
+                      <a:srgbClr val="1A1A1A"/>
+                    </a:solidFill>
+                    <a:latin typeface="+mn-lt"/>
+                  </a:defRPr>
+                </a:pPr>
+              </a:p>
+            </c:txPr>
+            <c:dLblPos val="b"/>
+            <c:showLegendKey val="0"/>
+            <c:showVal val="1"/>
+            <c:showCatName val="0"/>
+            <c:showSerName val="0"/>
+            <c:showPercent val="0"/>
+            <c:showBubbleSize val="0"/>
+            <c:showLeaderLines val="0"/>
+          </c:dLbls>
+          <c:marker>
+            <c:symbol val="none"/>
+            <c:size val="8"/>
+            <c:spPr>
+              <a:solidFill>
+                <a:srgbClr val="9AA3AD"/>
+              </a:solidFill>
+              <a:ln w="9525" cap="flat">
+                <a:solidFill>
+                  <a:srgbClr val="9AA3AD"/>
+                </a:solidFill>
+                <a:prstDash val="solid"/>
+                <a:round/>
+              </a:ln>
+              <a:effectLst/>
+            </c:spPr>
+          </c:marker>
+          <c:cat>
+            <c:multiLvlStrRef>
+              <c:f>Sheet1!$A$2:$A$13</c:f>
+              <c:multiLvlStrCache>
+                <c:ptCount val="12"/>
+                <c:lvl>
+                  <c:pt idx="0">
+                    <c:v>Jan</c:v>
+                  </c:pt>
+                  <c:pt idx="1">
+                    <c:v>Feb</c:v>
+                  </c:pt>
+                  <c:pt idx="2">
+                    <c:v>Mar</c:v>
+                  </c:pt>
+                  <c:pt idx="3">
+                    <c:v>Apr</c:v>
+                  </c:pt>
+                  <c:pt idx="4">
+                    <c:v>May</c:v>
+                  </c:pt>
+                  <c:pt idx="5">
+                    <c:v>Jun</c:v>
+                  </c:pt>
+                  <c:pt idx="6">
+                    <c:v>Jul</c:v>
+                  </c:pt>
+                  <c:pt idx="7">
+                    <c:v>Aug</c:v>
+                  </c:pt>
+                  <c:pt idx="8">
+                    <c:v>Sep</c:v>
+                  </c:pt>
+                  <c:pt idx="9">
+                    <c:v>Oct</c:v>
+                  </c:pt>
+                  <c:pt idx="10">
+                    <c:v>Nov</c:v>
+                  </c:pt>
+                  <c:pt idx="11">
+                    <c:v>Dec</c:v>
+                  </c:pt>
+                </c:lvl>
+              </c:multiLvlStrCache>
+            </c:multiLvlStrRef>
+          </c:cat>
+          <c:val>
+            <c:numRef>
+              <c:f>Sheet1!$B$2:$B$13</c:f>
+              <c:numCache>
+                <c:formatCode>General</c:formatCode>
+                <c:ptCount val="12"/>
+                <c:pt idx="0">
+                  <c:v/>
+                </c:pt>
+                <c:pt idx="1">
+                  <c:v/>
+                </c:pt>
+                <c:pt idx="2">
+                  <c:v>6.6</c:v>
+                </c:pt>
+                <c:pt idx="3">
+                  <c:v>6.84</c:v>
+                </c:pt>
+                <c:pt idx="4">
+                  <c:v/>
+                </c:pt>
+                <c:pt idx="5">
+                  <c:v>6.81</c:v>
+                </c:pt>
+                <c:pt idx="6">
+                  <c:v>6.97</c:v>
+                </c:pt>
+                <c:pt idx="7">
+                  <c:v>6.81</c:v>
+                </c:pt>
+                <c:pt idx="8">
+                  <c:v>6.54</c:v>
+                </c:pt>
+                <c:pt idx="9">
+                  <c:v>7.53</c:v>
+                </c:pt>
+                <c:pt idx="10">
+                  <c:v>5.91</c:v>
+                </c:pt>
+                <c:pt idx="11">
+                  <c:v>6.4</c:v>
+                </c:pt>
+              </c:numCache>
+            </c:numRef>
+          </c:val>
+          <c:smooth val="0"/>
+        </c:ser>
+        <c:dLbls>
+          <c:numFmt formatCode="0.0" sourceLinked="0"/>
+          <c:txPr>
+            <a:bodyPr/>
+            <a:lstStyle/>
+            <a:p>
+              <a:pPr>
+                <a:defRPr b="0" i="0" strike="noStrike" sz="1400" u="none">
+                  <a:solidFill>
+                    <a:srgbClr val="1A1A1A"/>
+                  </a:solidFill>
+                  <a:latin typeface="+mn-lt"/>
+                </a:defRPr>
+              </a:pPr>
+            </a:p>
+          </c:txPr>
+          <c:dLblPos val="b"/>
+          <c:showLegendKey val="0"/>
+          <c:showVal val="1"/>
+          <c:showCatName val="0"/>
+          <c:showSerName val="0"/>
+          <c:showPercent val="0"/>
+          <c:showBubbleSize val="0"/>
+          <c:showLeaderLines val="0"/>
+        </c:dLbls>
+        <c:marker val="1"/>
+        <c:axId val="2094734554"/>
+        <c:axId val="2094734552"/>
+        <c:axId val="2094734556"/>
+      </c:lineChart>
+      <c:catAx>
+        <c:axId val="2094734554"/>
+        <c:scaling>
+          <c:orientation val="minMax"/>
+        </c:scaling>
+        <c:delete val="0"/>
+        <c:axPos val="b"/>
+        <c:numFmt formatCode="General" sourceLinked="1"/>
+        <c:majorTickMark val="out"/>
+        <c:minorTickMark val="none"/>
+        <c:tickLblPos val="low"/>
+        <c:spPr>
+          <a:ln w="12700" cap="flat">
+            <a:noFill/>
+            <a:prstDash val="solid"/>
+            <a:round/>
+          </a:ln>
+        </c:spPr>
+        <c:txPr>
+          <a:bodyPr/>
+          <a:lstStyle/>
+          <a:p>
+            <a:pPr>
+              <a:defRPr sz="1400" b="0" i="0" u="none" strike="noStrike">
+                <a:solidFill>
+                  <a:srgbClr val="FFFFFF"/>
+                </a:solidFill>
+                <a:latin typeface="+mn-lt"/>
+              </a:defRPr>
+            </a:pPr>
+            <a:endParaRPr lang="en-US"/>
+          </a:p>
+        </c:txPr>
+        <c:crossAx val="2094734552"/>
+        <c:crosses val="min"/>
+        <c:auto val="1"/>
+        <c:lblAlgn val="ctr"/>
+        <c:noMultiLvlLbl val="1"/>
+      </c:catAx>
+      <c:valAx>
+        <c:axId val="2094734552"/>
+        <c:scaling>
+          <c:orientation val="minMax"/>
+          <c:max val="9"/>
+          <c:min val="5"/>
+        </c:scaling>
+        <c:delete val="0"/>
+        <c:axPos val="l"/>
+        <c:numFmt formatCode="$0&quot;M&quot;" sourceLinked="0"/>
+        <c:majorTickMark val="out"/>
+        <c:minorTickMark val="none"/>
+        <c:tickLblPos val="nextTo"/>
+        <c:spPr>
+          <a:ln w="12700" cap="flat">
+            <a:noFill/>
+            <a:prstDash val="solid"/>
+            <a:round/>
+          </a:ln>
+        </c:spPr>
+        <c:txPr>
+          <a:bodyPr/>
+          <a:lstStyle/>
+          <a:p>
+            <a:pPr>
+              <a:defRPr sz="1400" b="0" i="0" u="none" strike="noStrike">
+                <a:solidFill>
+                  <a:srgbClr val="FFFFFF"/>
+                </a:solidFill>
+                <a:latin typeface="+mn-lt"/>
+              </a:defRPr>
+            </a:pPr>
+            <a:endParaRPr lang="en-US"/>
+          </a:p>
+        </c:txPr>
+        <c:crossAx val="2094734554"/>
+        <c:crosses val="autoZero"/>
+        <c:crossBetween val="between"/>
+        <c:majorUnit val="1"/>
+      </c:valAx>
+      <c:spPr>
+        <a:solidFill>
+          <a:srgbClr val="FFFFFF">
+            <a:alpha val="0"/>
+          </a:srgbClr>
+        </a:solidFill>
+        <a:ln>
+          <a:noFill/>
+        </a:ln>
+        <a:effectLst/>
+      </c:spPr>
+    </c:plotArea>
+    <c:plotVisOnly val="1"/>
+    <c:dispBlanksAs val="span"/>
+  </c:chart>
+  <c:spPr>
+    <a:solidFill>
+      <a:srgbClr val="FFFFFF">
+        <a:alpha val="0"/>
+      </a:srgbClr>
+    </a:solidFill>
+    <a:ln>
+      <a:noFill/>
+    </a:ln>
+    <a:effectLst/>
+  </c:spPr>
+  <c:externalData r:id="rId1">
+    <c:autoUpdate val="0"/>
+  </c:externalData>
+</c:chartSpace>
+</file>
+
+<file path=ppt/charts/chart16.xml><?xml version="1.0" encoding="utf-8"?>
+<c:chartSpace xmlns:c="http://schemas.openxmlformats.org/drawingml/2006/chart" xmlns:a="http://schemas.openxmlformats.org/drawingml/2006/main" xmlns:r="http://schemas.openxmlformats.org/officeDocument/2006/relationships">
+  <c:date1904 val="0"/>
+  <c:roundedCorners val="1"/>
+  <c:chart>
+    <c:autoTitleDeleted val="1"/>
+    <c:plotArea>
+      <c:layout/>
+      <c:lineChart>
+        <c:varyColors val="0"/>
+        <c:ser>
+          <c:idx val="0"/>
+          <c:order val="0"/>
+          <c:tx>
+            <c:strRef>
+              <c:f>Sheet1!$B$1</c:f>
+              <c:strCache>
+                <c:ptCount val="1"/>
+                <c:pt idx="0">
+                  <c:v>2025</c:v>
+                </c:pt>
+              </c:strCache>
+            </c:strRef>
+          </c:tx>
+          <c:spPr>
+            <a:solidFill>
+              <a:srgbClr val="9AA3AD"/>
+            </a:solidFill>
+            <a:ln w="38100" cap="flat">
+              <a:solidFill>
+                <a:srgbClr val="9AA3AD"/>
+              </a:solidFill>
+              <a:prstDash val="solid"/>
+              <a:round/>
+            </a:ln>
+            <a:effectLst/>
+          </c:spPr>
+          <c:invertIfNegative val="0"/>
+          <c:dLbls>
+            <c:numFmt formatCode="0.0" sourceLinked="0"/>
+            <c:txPr>
+              <a:bodyPr/>
+              <a:lstStyle/>
+              <a:p>
+                <a:pPr>
+                  <a:defRPr b="0" i="0" strike="noStrike" sz="1400" u="none">
+                    <a:solidFill>
+                      <a:srgbClr val="1A1A1A"/>
+                    </a:solidFill>
+                    <a:latin typeface="+mn-lt"/>
+                  </a:defRPr>
+                </a:pPr>
+              </a:p>
+            </c:txPr>
+            <c:showLegendKey val="0"/>
+            <c:showVal val="0"/>
+            <c:showCatName val="0"/>
+            <c:showSerName val="0"/>
+            <c:showPercent val="0"/>
+            <c:showBubbleSize val="0"/>
+            <c:showLeaderLines val="0"/>
+          </c:dLbls>
+          <c:marker>
+            <c:symbol val="circle"/>
+            <c:size val="8"/>
+            <c:spPr>
+              <a:solidFill>
+                <a:srgbClr val="9AA3AD"/>
+              </a:solidFill>
+              <a:ln w="9525" cap="flat">
+                <a:solidFill>
+                  <a:srgbClr val="9AA3AD"/>
+                </a:solidFill>
+                <a:prstDash val="solid"/>
+                <a:round/>
+              </a:ln>
+              <a:effectLst/>
+            </c:spPr>
+          </c:marker>
+          <c:cat>
+            <c:multiLvlStrRef>
+              <c:f>Sheet1!$A$2:$A$13</c:f>
+              <c:multiLvlStrCache>
+                <c:ptCount val="12"/>
+                <c:lvl>
+                  <c:pt idx="0">
+                    <c:v>Jan</c:v>
+                  </c:pt>
+                  <c:pt idx="1">
+                    <c:v>Feb</c:v>
+                  </c:pt>
+                  <c:pt idx="2">
+                    <c:v>Mar</c:v>
+                  </c:pt>
+                  <c:pt idx="3">
+                    <c:v>Apr</c:v>
+                  </c:pt>
+                  <c:pt idx="4">
+                    <c:v>May</c:v>
+                  </c:pt>
+                  <c:pt idx="5">
+                    <c:v>Jun</c:v>
+                  </c:pt>
+                  <c:pt idx="6">
+                    <c:v>Jul</c:v>
+                  </c:pt>
+                  <c:pt idx="7">
+                    <c:v>Aug</c:v>
+                  </c:pt>
+                  <c:pt idx="8">
+                    <c:v>Sep</c:v>
+                  </c:pt>
+                  <c:pt idx="9">
+                    <c:v>Oct</c:v>
+                  </c:pt>
+                  <c:pt idx="10">
+                    <c:v>Nov</c:v>
+                  </c:pt>
+                  <c:pt idx="11">
+                    <c:v>Dec</c:v>
+                  </c:pt>
+                </c:lvl>
+              </c:multiLvlStrCache>
+            </c:multiLvlStrRef>
+          </c:cat>
+          <c:val>
+            <c:numRef>
+              <c:f>Sheet1!$B$2:$B$13</c:f>
+              <c:numCache>
+                <c:formatCode>General</c:formatCode>
+                <c:ptCount val="12"/>
+                <c:pt idx="0">
+                  <c:v>7.05</c:v>
+                </c:pt>
+                <c:pt idx="1">
+                  <c:v>6.47</c:v>
+                </c:pt>
+                <c:pt idx="2">
+                  <c:v>6.6</c:v>
+                </c:pt>
+                <c:pt idx="3">
+                  <c:v>6.84</c:v>
+                </c:pt>
+                <c:pt idx="4">
+                  <c:v>6.67</c:v>
+                </c:pt>
+                <c:pt idx="5">
+                  <c:v>6.81</c:v>
+                </c:pt>
+                <c:pt idx="6">
+                  <c:v>6.97</c:v>
+                </c:pt>
+                <c:pt idx="7">
+                  <c:v>6.81</c:v>
+                </c:pt>
+                <c:pt idx="8">
+                  <c:v>6.54</c:v>
+                </c:pt>
+                <c:pt idx="9">
+                  <c:v>7.53</c:v>
+                </c:pt>
+                <c:pt idx="10">
+                  <c:v>5.91</c:v>
+                </c:pt>
+                <c:pt idx="11">
+                  <c:v>6.4</c:v>
+                </c:pt>
+              </c:numCache>
+            </c:numRef>
+          </c:val>
+          <c:smooth val="0"/>
+        </c:ser>
+        <c:dLbls>
+          <c:numFmt formatCode="0.0" sourceLinked="0"/>
+          <c:txPr>
+            <a:bodyPr/>
+            <a:lstStyle/>
+            <a:p>
+              <a:pPr>
+                <a:defRPr b="0" i="0" strike="noStrike" sz="1400" u="none">
+                  <a:solidFill>
+                    <a:srgbClr val="1A1A1A"/>
+                  </a:solidFill>
+                  <a:latin typeface="+mn-lt"/>
+                </a:defRPr>
+              </a:pPr>
+            </a:p>
+          </c:txPr>
+          <c:showLegendKey val="0"/>
+          <c:showVal val="0"/>
+          <c:showCatName val="0"/>
+          <c:showSerName val="0"/>
+          <c:showPercent val="0"/>
+          <c:showBubbleSize val="0"/>
+          <c:showLeaderLines val="0"/>
+        </c:dLbls>
+        <c:marker val="1"/>
+        <c:axId val="2094734554"/>
+        <c:axId val="2094734552"/>
+        <c:axId val="2094734556"/>
+      </c:lineChart>
+      <c:catAx>
+        <c:axId val="2094734554"/>
+        <c:scaling>
+          <c:orientation val="minMax"/>
+        </c:scaling>
+        <c:delete val="0"/>
+        <c:axPos val="b"/>
+        <c:numFmt formatCode="General" sourceLinked="1"/>
+        <c:majorTickMark val="out"/>
+        <c:minorTickMark val="none"/>
+        <c:tickLblPos val="low"/>
+        <c:spPr>
+          <a:ln w="12700" cap="flat">
+            <a:solidFill>
+              <a:srgbClr val="888888"/>
+            </a:solidFill>
+            <a:prstDash val="solid"/>
+            <a:round/>
+          </a:ln>
+        </c:spPr>
+        <c:txPr>
+          <a:bodyPr/>
+          <a:lstStyle/>
+          <a:p>
+            <a:pPr>
+              <a:defRPr sz="1400" b="0" i="0" u="none" strike="noStrike">
+                <a:solidFill>
+                  <a:srgbClr val="1A1A1A"/>
+                </a:solidFill>
+                <a:latin typeface="+mn-lt"/>
+              </a:defRPr>
+            </a:pPr>
+            <a:endParaRPr lang="en-US"/>
+          </a:p>
+        </c:txPr>
+        <c:crossAx val="2094734552"/>
+        <c:crosses val="min"/>
+        <c:auto val="1"/>
+        <c:lblAlgn val="ctr"/>
+        <c:noMultiLvlLbl val="1"/>
+      </c:catAx>
+      <c:valAx>
+        <c:axId val="2094734552"/>
+        <c:scaling>
+          <c:orientation val="minMax"/>
+          <c:max val="9"/>
+          <c:min val="5"/>
+        </c:scaling>
+        <c:delete val="0"/>
+        <c:axPos val="l"/>
+        <c:majorGridlines>
+          <c:spPr>
+            <a:ln w="9525" cap="flat">
+              <a:solidFill>
+                <a:srgbClr val="D9D9D9"/>
+              </a:solidFill>
+              <a:prstDash val="solid"/>
+              <a:round/>
+            </a:ln>
+          </c:spPr>
+        </c:majorGridlines>
+        <c:numFmt formatCode="$0&quot;M&quot;" sourceLinked="0"/>
+        <c:majorTickMark val="out"/>
+        <c:minorTickMark val="none"/>
+        <c:tickLblPos val="nextTo"/>
+        <c:spPr>
+          <a:ln w="12700" cap="flat">
+            <a:noFill/>
+            <a:prstDash val="solid"/>
+            <a:round/>
+          </a:ln>
+        </c:spPr>
+        <c:txPr>
+          <a:bodyPr/>
+          <a:lstStyle/>
+          <a:p>
+            <a:pPr>
+              <a:defRPr sz="1400" b="0" i="0" u="none" strike="noStrike">
+                <a:solidFill>
+                  <a:srgbClr val="595959"/>
+                </a:solidFill>
+                <a:latin typeface="+mn-lt"/>
+              </a:defRPr>
+            </a:pPr>
+            <a:endParaRPr lang="en-US"/>
+          </a:p>
+        </c:txPr>
+        <c:crossAx val="2094734554"/>
+        <c:crosses val="autoZero"/>
+        <c:crossBetween val="between"/>
+        <c:majorUnit val="1"/>
+      </c:valAx>
+      <c:spPr>
+        <a:solidFill>
+          <a:srgbClr val="FFFFFF">
+            <a:alpha val="0"/>
+          </a:srgbClr>
+        </a:solidFill>
+        <a:ln>
+          <a:noFill/>
+        </a:ln>
+        <a:effectLst/>
+      </c:spPr>
+    </c:plotArea>
+    <c:plotVisOnly val="1"/>
+    <c:dispBlanksAs val="span"/>
+  </c:chart>
+  <c:spPr>
+    <a:solidFill>
+      <a:srgbClr val="FFFFFF">
+        <a:alpha val="0"/>
+      </a:srgbClr>
+    </a:solidFill>
+    <a:ln>
+      <a:noFill/>
+    </a:ln>
+    <a:effectLst/>
+  </c:spPr>
+  <c:externalData r:id="rId1">
+    <c:autoUpdate val="0"/>
+  </c:externalData>
+</c:chartSpace>
+</file>
+
+<file path=ppt/charts/chart2.xml><?xml version="1.0" encoding="utf-8"?>
+<c:chartSpace xmlns:c="http://schemas.openxmlformats.org/drawingml/2006/chart" xmlns:a="http://schemas.openxmlformats.org/drawingml/2006/main" xmlns:r="http://schemas.openxmlformats.org/officeDocument/2006/relationships">
+  <c:date1904 val="0"/>
+  <c:roundedCorners val="1"/>
+  <c:chart>
+    <c:autoTitleDeleted val="1"/>
+    <c:plotArea>
+      <c:layout/>
+      <c:lineChart>
+        <c:varyColors val="0"/>
+        <c:ser>
+          <c:idx val="0"/>
+          <c:order val="0"/>
+          <c:tx>
+            <c:strRef>
+              <c:f>Sheet1!$B$1</c:f>
+              <c:strCache>
+                <c:ptCount val="1"/>
+                <c:pt idx="0">
+                  <c:v>2026</c:v>
+                </c:pt>
+              </c:strCache>
+            </c:strRef>
+          </c:tx>
+          <c:spPr>
+            <a:solidFill>
+              <a:srgbClr val="2587C5"/>
+            </a:solidFill>
+            <a:ln>
+              <a:noFill/>
+            </a:ln>
+            <a:effectLst/>
+          </c:spPr>
+          <c:invertIfNegative val="0"/>
+          <c:dLbls>
+            <c:numFmt formatCode="0.0" sourceLinked="0"/>
+            <c:txPr>
+              <a:bodyPr/>
+              <a:lstStyle/>
+              <a:p>
+                <a:pPr>
+                  <a:defRPr b="0" i="0" strike="noStrike" sz="1400" u="none">
+                    <a:solidFill>
+                      <a:srgbClr val="1A1A1A"/>
+                    </a:solidFill>
+                    <a:latin typeface="+mn-lt"/>
+                  </a:defRPr>
+                </a:pPr>
+              </a:p>
+            </c:txPr>
+            <c:dLblPos val="t"/>
+            <c:showLegendKey val="0"/>
+            <c:showVal val="1"/>
+            <c:showCatName val="0"/>
+            <c:showSerName val="0"/>
+            <c:showPercent val="0"/>
+            <c:showBubbleSize val="0"/>
+            <c:showLeaderLines val="0"/>
+          </c:dLbls>
+          <c:marker>
+            <c:symbol val="none"/>
+            <c:size val="8"/>
+            <c:spPr>
+              <a:solidFill>
+                <a:srgbClr val="2587C5"/>
+              </a:solidFill>
+              <a:ln w="9525" cap="flat">
+                <a:solidFill>
+                  <a:srgbClr val="2587C5"/>
+                </a:solidFill>
+                <a:prstDash val="solid"/>
+                <a:round/>
+              </a:ln>
+              <a:effectLst/>
+            </c:spPr>
+          </c:marker>
+          <c:cat>
+            <c:multiLvlStrRef>
+              <c:f>Sheet1!$A$2:$A$13</c:f>
+              <c:multiLvlStrCache>
+                <c:ptCount val="12"/>
+                <c:lvl>
+                  <c:pt idx="0">
+                    <c:v>Jan</c:v>
+                  </c:pt>
+                  <c:pt idx="1">
+                    <c:v>Feb</c:v>
+                  </c:pt>
+                  <c:pt idx="2">
+                    <c:v>Mar</c:v>
+                  </c:pt>
+                  <c:pt idx="3">
+                    <c:v>Apr</c:v>
+                  </c:pt>
+                  <c:pt idx="4">
+                    <c:v>May</c:v>
+                  </c:pt>
+                  <c:pt idx="5">
+                    <c:v>Jun</c:v>
+                  </c:pt>
+                  <c:pt idx="6">
+                    <c:v>Jul</c:v>
+                  </c:pt>
+                  <c:pt idx="7">
+                    <c:v>Aug</c:v>
+                  </c:pt>
+                  <c:pt idx="8">
+                    <c:v>Sep</c:v>
+                  </c:pt>
+                  <c:pt idx="9">
+                    <c:v>Oct</c:v>
+                  </c:pt>
+                  <c:pt idx="10">
+                    <c:v>Nov</c:v>
+                  </c:pt>
+                  <c:pt idx="11">
+                    <c:v>Dec</c:v>
+                  </c:pt>
+                </c:lvl>
+              </c:multiLvlStrCache>
+            </c:multiLvlStrRef>
+          </c:cat>
+          <c:val>
+            <c:numRef>
+              <c:f>Sheet1!$B$2:$B$13</c:f>
+              <c:numCache>
+                <c:formatCode>General</c:formatCode>
+                <c:ptCount val="12"/>
+                <c:pt idx="0">
+                  <c:v/>
+                </c:pt>
+                <c:pt idx="1">
+                  <c:v/>
+                </c:pt>
+                <c:pt idx="2">
+                  <c:v>21.12</c:v>
+                </c:pt>
+                <c:pt idx="3">
+                  <c:v>21.8</c:v>
+                </c:pt>
+                <c:pt idx="4">
+                  <c:v/>
+                </c:pt>
+                <c:pt idx="5">
+                  <c:v>21.52</c:v>
+                </c:pt>
+                <c:pt idx="6">
+                  <c:v>22.71</c:v>
+                </c:pt>
+                <c:pt idx="7">
+                  <c:v>21.64</c:v>
+                </c:pt>
+                <c:pt idx="8">
+                  <c:v>21.13</c:v>
+                </c:pt>
+                <c:pt idx="9">
+                  <c:v/>
+                </c:pt>
+                <c:pt idx="10">
+                  <c:v/>
+                </c:pt>
+                <c:pt idx="11">
+                  <c:v/>
+                </c:pt>
+              </c:numCache>
+            </c:numRef>
+          </c:val>
+          <c:smooth val="0"/>
+        </c:ser>
+        <c:dLbls>
+          <c:numFmt formatCode="0.0" sourceLinked="0"/>
+          <c:txPr>
+            <a:bodyPr/>
+            <a:lstStyle/>
+            <a:p>
+              <a:pPr>
+                <a:defRPr b="0" i="0" strike="noStrike" sz="1400" u="none">
+                  <a:solidFill>
+                    <a:srgbClr val="1A1A1A"/>
+                  </a:solidFill>
+                  <a:latin typeface="+mn-lt"/>
+                </a:defRPr>
+              </a:pPr>
+            </a:p>
+          </c:txPr>
+          <c:dLblPos val="t"/>
+          <c:showLegendKey val="0"/>
+          <c:showVal val="1"/>
+          <c:showCatName val="0"/>
+          <c:showSerName val="0"/>
+          <c:showPercent val="0"/>
+          <c:showBubbleSize val="0"/>
+          <c:showLeaderLines val="0"/>
+        </c:dLbls>
+        <c:marker val="1"/>
+        <c:axId val="2094734554"/>
+        <c:axId val="2094734552"/>
+        <c:axId val="2094734556"/>
+      </c:lineChart>
+      <c:catAx>
+        <c:axId val="2094734554"/>
+        <c:scaling>
+          <c:orientation val="minMax"/>
+        </c:scaling>
+        <c:delete val="0"/>
+        <c:axPos val="b"/>
+        <c:numFmt formatCode="General" sourceLinked="1"/>
+        <c:majorTickMark val="out"/>
+        <c:minorTickMark val="none"/>
+        <c:tickLblPos val="low"/>
+        <c:spPr>
+          <a:ln w="12700" cap="flat">
+            <a:noFill/>
+            <a:prstDash val="solid"/>
+            <a:round/>
+          </a:ln>
+        </c:spPr>
+        <c:txPr>
+          <a:bodyPr/>
+          <a:lstStyle/>
+          <a:p>
+            <a:pPr>
+              <a:defRPr sz="1400" b="0" i="0" u="none" strike="noStrike">
+                <a:solidFill>
+                  <a:srgbClr val="FFFFFF"/>
+                </a:solidFill>
+                <a:latin typeface="+mn-lt"/>
+              </a:defRPr>
+            </a:pPr>
+            <a:endParaRPr lang="en-US"/>
+          </a:p>
+        </c:txPr>
+        <c:crossAx val="2094734552"/>
+        <c:crosses val="min"/>
+        <c:auto val="1"/>
+        <c:lblAlgn val="ctr"/>
+        <c:noMultiLvlLbl val="1"/>
+      </c:catAx>
+      <c:valAx>
+        <c:axId val="2094734552"/>
+        <c:scaling>
+          <c:orientation val="minMax"/>
+          <c:max val="26"/>
+          <c:min val="16"/>
+        </c:scaling>
+        <c:delete val="0"/>
+        <c:axPos val="l"/>
+        <c:numFmt formatCode="$0&quot;M&quot;" sourceLinked="0"/>
+        <c:majorTickMark val="out"/>
+        <c:minorTickMark val="none"/>
+        <c:tickLblPos val="nextTo"/>
+        <c:spPr>
+          <a:ln w="12700" cap="flat">
+            <a:noFill/>
+            <a:prstDash val="solid"/>
+            <a:round/>
+          </a:ln>
+        </c:spPr>
+        <c:txPr>
+          <a:bodyPr/>
+          <a:lstStyle/>
+          <a:p>
+            <a:pPr>
+              <a:defRPr sz="1400" b="0" i="0" u="none" strike="noStrike">
+                <a:solidFill>
+                  <a:srgbClr val="FFFFFF"/>
+                </a:solidFill>
+                <a:latin typeface="+mn-lt"/>
+              </a:defRPr>
+            </a:pPr>
+            <a:endParaRPr lang="en-US"/>
+          </a:p>
+        </c:txPr>
+        <c:crossAx val="2094734554"/>
+        <c:crosses val="autoZero"/>
+        <c:crossBetween val="between"/>
+        <c:majorUnit val="2"/>
+      </c:valAx>
+      <c:spPr>
+        <a:solidFill>
+          <a:srgbClr val="FFFFFF">
+            <a:alpha val="0"/>
+          </a:srgbClr>
+        </a:solidFill>
+        <a:ln>
+          <a:noFill/>
+        </a:ln>
+        <a:effectLst/>
+      </c:spPr>
+    </c:plotArea>
+    <c:plotVisOnly val="1"/>
+    <c:dispBlanksAs val="span"/>
+  </c:chart>
+  <c:spPr>
+    <a:solidFill>
+      <a:srgbClr val="FFFFFF">
+        <a:alpha val="0"/>
+      </a:srgbClr>
+    </a:solidFill>
+    <a:ln>
+      <a:noFill/>
+    </a:ln>
+    <a:effectLst/>
+  </c:spPr>
+  <c:externalData r:id="rId1">
+    <c:autoUpdate val="0"/>
+  </c:externalData>
+</c:chartSpace>
+</file>
+
+<file path=ppt/charts/chart3.xml><?xml version="1.0" encoding="utf-8"?>
+<c:chartSpace xmlns:c="http://schemas.openxmlformats.org/drawingml/2006/chart" xmlns:a="http://schemas.openxmlformats.org/drawingml/2006/main" xmlns:r="http://schemas.openxmlformats.org/officeDocument/2006/relationships">
+  <c:date1904 val="0"/>
+  <c:roundedCorners val="1"/>
+  <c:chart>
+    <c:autoTitleDeleted val="1"/>
+    <c:plotArea>
+      <c:layout/>
+      <c:lineChart>
+        <c:varyColors val="0"/>
+        <c:ser>
+          <c:idx val="0"/>
+          <c:order val="0"/>
+          <c:tx>
+            <c:strRef>
+              <c:f>Sheet1!$B$1</c:f>
+              <c:strCache>
+                <c:ptCount val="1"/>
+                <c:pt idx="0">
+                  <c:v>2026</c:v>
+                </c:pt>
+              </c:strCache>
+            </c:strRef>
+          </c:tx>
+          <c:spPr>
+            <a:solidFill>
+              <a:srgbClr val="2587C5"/>
+            </a:solidFill>
+            <a:ln>
+              <a:noFill/>
+            </a:ln>
+            <a:effectLst/>
+          </c:spPr>
+          <c:invertIfNegative val="0"/>
+          <c:dLbls>
+            <c:numFmt formatCode="0.0" sourceLinked="0"/>
+            <c:txPr>
+              <a:bodyPr/>
+              <a:lstStyle/>
+              <a:p>
+                <a:pPr>
+                  <a:defRPr b="0" i="0" strike="noStrike" sz="1400" u="none">
+                    <a:solidFill>
+                      <a:srgbClr val="1A1A1A"/>
+                    </a:solidFill>
+                    <a:latin typeface="+mn-lt"/>
+                  </a:defRPr>
+                </a:pPr>
+              </a:p>
+            </c:txPr>
+            <c:dLblPos val="b"/>
+            <c:showLegendKey val="0"/>
+            <c:showVal val="1"/>
+            <c:showCatName val="0"/>
+            <c:showSerName val="0"/>
+            <c:showPercent val="0"/>
+            <c:showBubbleSize val="0"/>
+            <c:showLeaderLines val="0"/>
+          </c:dLbls>
+          <c:marker>
+            <c:symbol val="none"/>
+            <c:size val="8"/>
+            <c:spPr>
+              <a:solidFill>
+                <a:srgbClr val="2587C5"/>
+              </a:solidFill>
+              <a:ln w="9525" cap="flat">
+                <a:solidFill>
+                  <a:srgbClr val="2587C5"/>
+                </a:solidFill>
+                <a:prstDash val="solid"/>
+                <a:round/>
+              </a:ln>
+              <a:effectLst/>
+            </c:spPr>
+          </c:marker>
+          <c:cat>
+            <c:multiLvlStrRef>
+              <c:f>Sheet1!$A$2:$A$13</c:f>
+              <c:multiLvlStrCache>
+                <c:ptCount val="12"/>
+                <c:lvl>
+                  <c:pt idx="0">
+                    <c:v>Jan</c:v>
+                  </c:pt>
+                  <c:pt idx="1">
+                    <c:v>Feb</c:v>
+                  </c:pt>
+                  <c:pt idx="2">
+                    <c:v>Mar</c:v>
+                  </c:pt>
+                  <c:pt idx="3">
+                    <c:v>Apr</c:v>
+                  </c:pt>
+                  <c:pt idx="4">
+                    <c:v>May</c:v>
+                  </c:pt>
+                  <c:pt idx="5">
+                    <c:v>Jun</c:v>
+                  </c:pt>
+                  <c:pt idx="6">
+                    <c:v>Jul</c:v>
+                  </c:pt>
+                  <c:pt idx="7">
+                    <c:v>Aug</c:v>
+                  </c:pt>
+                  <c:pt idx="8">
+                    <c:v>Sep</c:v>
+                  </c:pt>
+                  <c:pt idx="9">
+                    <c:v>Oct</c:v>
+                  </c:pt>
+                  <c:pt idx="10">
+                    <c:v>Nov</c:v>
+                  </c:pt>
+                  <c:pt idx="11">
+                    <c:v>Dec</c:v>
+                  </c:pt>
+                </c:lvl>
+              </c:multiLvlStrCache>
+            </c:multiLvlStrRef>
+          </c:cat>
+          <c:val>
+            <c:numRef>
+              <c:f>Sheet1!$B$2:$B$13</c:f>
+              <c:numCache>
+                <c:formatCode>General</c:formatCode>
+                <c:ptCount val="12"/>
+                <c:pt idx="0">
+                  <c:v>19.88</c:v>
+                </c:pt>
+                <c:pt idx="1">
+                  <c:v>18.87</c:v>
+                </c:pt>
+                <c:pt idx="2">
+                  <c:v/>
+                </c:pt>
+                <c:pt idx="3">
+                  <c:v/>
+                </c:pt>
+                <c:pt idx="4">
+                  <c:v>20.12</c:v>
+                </c:pt>
+                <c:pt idx="5">
+                  <c:v/>
+                </c:pt>
+                <c:pt idx="6">
+                  <c:v/>
+                </c:pt>
+                <c:pt idx="7">
+                  <c:v/>
+                </c:pt>
+                <c:pt idx="8">
+                  <c:v/>
+                </c:pt>
+                <c:pt idx="9">
+                  <c:v/>
+                </c:pt>
+                <c:pt idx="10">
+                  <c:v/>
+                </c:pt>
+                <c:pt idx="11">
+                  <c:v/>
+                </c:pt>
+              </c:numCache>
+            </c:numRef>
+          </c:val>
+          <c:smooth val="0"/>
+        </c:ser>
+        <c:dLbls>
+          <c:numFmt formatCode="0.0" sourceLinked="0"/>
+          <c:txPr>
+            <a:bodyPr/>
+            <a:lstStyle/>
+            <a:p>
+              <a:pPr>
+                <a:defRPr b="0" i="0" strike="noStrike" sz="1400" u="none">
+                  <a:solidFill>
+                    <a:srgbClr val="1A1A1A"/>
+                  </a:solidFill>
+                  <a:latin typeface="+mn-lt"/>
+                </a:defRPr>
+              </a:pPr>
+            </a:p>
+          </c:txPr>
+          <c:dLblPos val="b"/>
+          <c:showLegendKey val="0"/>
+          <c:showVal val="1"/>
+          <c:showCatName val="0"/>
+          <c:showSerName val="0"/>
+          <c:showPercent val="0"/>
+          <c:showBubbleSize val="0"/>
+          <c:showLeaderLines val="0"/>
+        </c:dLbls>
+        <c:marker val="1"/>
+        <c:axId val="2094734554"/>
+        <c:axId val="2094734552"/>
+        <c:axId val="2094734556"/>
+      </c:lineChart>
+      <c:catAx>
+        <c:axId val="2094734554"/>
+        <c:scaling>
+          <c:orientation val="minMax"/>
+        </c:scaling>
+        <c:delete val="0"/>
+        <c:axPos val="b"/>
+        <c:numFmt formatCode="General" sourceLinked="1"/>
+        <c:majorTickMark val="out"/>
+        <c:minorTickMark val="none"/>
+        <c:tickLblPos val="low"/>
+        <c:spPr>
+          <a:ln w="12700" cap="flat">
+            <a:noFill/>
+            <a:prstDash val="solid"/>
+            <a:round/>
+          </a:ln>
+        </c:spPr>
+        <c:txPr>
+          <a:bodyPr/>
+          <a:lstStyle/>
+          <a:p>
+            <a:pPr>
+              <a:defRPr sz="1400" b="0" i="0" u="none" strike="noStrike">
+                <a:solidFill>
+                  <a:srgbClr val="FFFFFF"/>
+                </a:solidFill>
+                <a:latin typeface="+mn-lt"/>
+              </a:defRPr>
+            </a:pPr>
+            <a:endParaRPr lang="en-US"/>
+          </a:p>
+        </c:txPr>
+        <c:crossAx val="2094734552"/>
+        <c:crosses val="min"/>
+        <c:auto val="1"/>
+        <c:lblAlgn val="ctr"/>
+        <c:noMultiLvlLbl val="1"/>
+      </c:catAx>
+      <c:valAx>
+        <c:axId val="2094734552"/>
+        <c:scaling>
+          <c:orientation val="minMax"/>
+          <c:max val="26"/>
+          <c:min val="16"/>
+        </c:scaling>
+        <c:delete val="0"/>
+        <c:axPos val="l"/>
+        <c:numFmt formatCode="$0&quot;M&quot;" sourceLinked="0"/>
+        <c:majorTickMark val="out"/>
+        <c:minorTickMark val="none"/>
+        <c:tickLblPos val="nextTo"/>
+        <c:spPr>
+          <a:ln w="12700" cap="flat">
+            <a:noFill/>
+            <a:prstDash val="solid"/>
+            <a:round/>
+          </a:ln>
+        </c:spPr>
+        <c:txPr>
+          <a:bodyPr/>
+          <a:lstStyle/>
+          <a:p>
+            <a:pPr>
+              <a:defRPr sz="1400" b="0" i="0" u="none" strike="noStrike">
+                <a:solidFill>
+                  <a:srgbClr val="FFFFFF"/>
+                </a:solidFill>
+                <a:latin typeface="+mn-lt"/>
+              </a:defRPr>
+            </a:pPr>
+            <a:endParaRPr lang="en-US"/>
+          </a:p>
+        </c:txPr>
+        <c:crossAx val="2094734554"/>
+        <c:crosses val="autoZero"/>
+        <c:crossBetween val="between"/>
+        <c:majorUnit val="2"/>
+      </c:valAx>
+      <c:spPr>
+        <a:solidFill>
+          <a:srgbClr val="FFFFFF">
+            <a:alpha val="0"/>
+          </a:srgbClr>
+        </a:solidFill>
+        <a:ln>
+          <a:noFill/>
+        </a:ln>
+        <a:effectLst/>
+      </c:spPr>
+    </c:plotArea>
+    <c:plotVisOnly val="1"/>
+    <c:dispBlanksAs val="span"/>
+  </c:chart>
+  <c:spPr>
+    <a:solidFill>
+      <a:srgbClr val="FFFFFF">
+        <a:alpha val="0"/>
+      </a:srgbClr>
+    </a:solidFill>
+    <a:ln>
+      <a:noFill/>
+    </a:ln>
+    <a:effectLst/>
+  </c:spPr>
+  <c:externalData r:id="rId1">
+    <c:autoUpdate val="0"/>
+  </c:externalData>
+</c:chartSpace>
+</file>
+
+<file path=ppt/charts/chart4.xml><?xml version="1.0" encoding="utf-8"?>
+<c:chartSpace xmlns:c="http://schemas.openxmlformats.org/drawingml/2006/chart" xmlns:a="http://schemas.openxmlformats.org/drawingml/2006/main" xmlns:r="http://schemas.openxmlformats.org/officeDocument/2006/relationships">
+  <c:date1904 val="0"/>
+  <c:roundedCorners val="1"/>
+  <c:chart>
+    <c:autoTitleDeleted val="1"/>
+    <c:plotArea>
+      <c:layout/>
+      <c:lineChart>
+        <c:varyColors val="0"/>
+        <c:ser>
+          <c:idx val="0"/>
+          <c:order val="0"/>
+          <c:tx>
+            <c:strRef>
+              <c:f>Sheet1!$B$1</c:f>
+              <c:strCache>
+                <c:ptCount val="1"/>
+                <c:pt idx="0">
+                  <c:v>2025</c:v>
+                </c:pt>
+              </c:strCache>
+            </c:strRef>
+          </c:tx>
+          <c:spPr>
+            <a:solidFill>
+              <a:srgbClr val="9AA3AD"/>
+            </a:solidFill>
+            <a:ln>
+              <a:noFill/>
+            </a:ln>
+            <a:effectLst/>
+          </c:spPr>
+          <c:invertIfNegative val="0"/>
+          <c:dLbls>
+            <c:numFmt formatCode="0.0" sourceLinked="0"/>
+            <c:txPr>
+              <a:bodyPr/>
+              <a:lstStyle/>
+              <a:p>
+                <a:pPr>
+                  <a:defRPr b="0" i="0" strike="noStrike" sz="1400" u="none">
+                    <a:solidFill>
+                      <a:srgbClr val="1A1A1A"/>
+                    </a:solidFill>
+                    <a:latin typeface="+mn-lt"/>
+                  </a:defRPr>
+                </a:pPr>
+              </a:p>
+            </c:txPr>
+            <c:dLblPos val="t"/>
+            <c:showLegendKey val="0"/>
+            <c:showVal val="1"/>
+            <c:showCatName val="0"/>
+            <c:showSerName val="0"/>
+            <c:showPercent val="0"/>
+            <c:showBubbleSize val="0"/>
+            <c:showLeaderLines val="0"/>
+          </c:dLbls>
+          <c:marker>
+            <c:symbol val="none"/>
+            <c:size val="8"/>
+            <c:spPr>
+              <a:solidFill>
+                <a:srgbClr val="9AA3AD"/>
+              </a:solidFill>
+              <a:ln w="9525" cap="flat">
+                <a:solidFill>
+                  <a:srgbClr val="9AA3AD"/>
+                </a:solidFill>
+                <a:prstDash val="solid"/>
+                <a:round/>
+              </a:ln>
+              <a:effectLst/>
+            </c:spPr>
+          </c:marker>
+          <c:cat>
+            <c:multiLvlStrRef>
+              <c:f>Sheet1!$A$2:$A$13</c:f>
+              <c:multiLvlStrCache>
+                <c:ptCount val="12"/>
+                <c:lvl>
+                  <c:pt idx="0">
+                    <c:v>Jan</c:v>
+                  </c:pt>
+                  <c:pt idx="1">
+                    <c:v>Feb</c:v>
+                  </c:pt>
+                  <c:pt idx="2">
+                    <c:v>Mar</c:v>
+                  </c:pt>
+                  <c:pt idx="3">
+                    <c:v>Apr</c:v>
+                  </c:pt>
+                  <c:pt idx="4">
+                    <c:v>May</c:v>
+                  </c:pt>
+                  <c:pt idx="5">
+                    <c:v>Jun</c:v>
+                  </c:pt>
+                  <c:pt idx="6">
+                    <c:v>Jul</c:v>
+                  </c:pt>
+                  <c:pt idx="7">
+                    <c:v>Aug</c:v>
+                  </c:pt>
+                  <c:pt idx="8">
+                    <c:v>Sep</c:v>
+                  </c:pt>
+                  <c:pt idx="9">
+                    <c:v>Oct</c:v>
+                  </c:pt>
+                  <c:pt idx="10">
+                    <c:v>Nov</c:v>
+                  </c:pt>
+                  <c:pt idx="11">
+                    <c:v>Dec</c:v>
+                  </c:pt>
+                </c:lvl>
+              </c:multiLvlStrCache>
+            </c:multiLvlStrRef>
+          </c:cat>
+          <c:val>
+            <c:numRef>
+              <c:f>Sheet1!$B$2:$B$13</c:f>
+              <c:numCache>
+                <c:formatCode>General</c:formatCode>
+                <c:ptCount val="12"/>
+                <c:pt idx="0">
+                  <c:v>20.46</c:v>
+                </c:pt>
+                <c:pt idx="1">
+                  <c:v>19.1</c:v>
+                </c:pt>
+                <c:pt idx="2">
+                  <c:v/>
+                </c:pt>
+                <c:pt idx="3">
+                  <c:v/>
+                </c:pt>
+                <c:pt idx="4">
+                  <c:v>20.28</c:v>
+                </c:pt>
+                <c:pt idx="5">
+                  <c:v/>
+                </c:pt>
+                <c:pt idx="6">
+                  <c:v/>
+                </c:pt>
+                <c:pt idx="7">
+                  <c:v/>
+                </c:pt>
+                <c:pt idx="8">
+                  <c:v/>
+                </c:pt>
+                <c:pt idx="9">
+                  <c:v/>
+                </c:pt>
+                <c:pt idx="10">
+                  <c:v/>
+                </c:pt>
+                <c:pt idx="11">
+                  <c:v/>
+                </c:pt>
+              </c:numCache>
+            </c:numRef>
+          </c:val>
+          <c:smooth val="0"/>
+        </c:ser>
+        <c:dLbls>
+          <c:numFmt formatCode="0.0" sourceLinked="0"/>
+          <c:txPr>
+            <a:bodyPr/>
+            <a:lstStyle/>
+            <a:p>
+              <a:pPr>
+                <a:defRPr b="0" i="0" strike="noStrike" sz="1400" u="none">
+                  <a:solidFill>
+                    <a:srgbClr val="1A1A1A"/>
+                  </a:solidFill>
+                  <a:latin typeface="+mn-lt"/>
+                </a:defRPr>
+              </a:pPr>
+            </a:p>
+          </c:txPr>
+          <c:dLblPos val="t"/>
+          <c:showLegendKey val="0"/>
+          <c:showVal val="1"/>
+          <c:showCatName val="0"/>
+          <c:showSerName val="0"/>
+          <c:showPercent val="0"/>
+          <c:showBubbleSize val="0"/>
+          <c:showLeaderLines val="0"/>
+        </c:dLbls>
+        <c:marker val="1"/>
+        <c:axId val="2094734554"/>
+        <c:axId val="2094734552"/>
+        <c:axId val="2094734556"/>
+      </c:lineChart>
+      <c:catAx>
+        <c:axId val="2094734554"/>
+        <c:scaling>
+          <c:orientation val="minMax"/>
+        </c:scaling>
+        <c:delete val="0"/>
+        <c:axPos val="b"/>
+        <c:numFmt formatCode="General" sourceLinked="1"/>
+        <c:majorTickMark val="out"/>
+        <c:minorTickMark val="none"/>
+        <c:tickLblPos val="low"/>
+        <c:spPr>
+          <a:ln w="12700" cap="flat">
+            <a:noFill/>
+            <a:prstDash val="solid"/>
+            <a:round/>
+          </a:ln>
+        </c:spPr>
+        <c:txPr>
+          <a:bodyPr/>
+          <a:lstStyle/>
+          <a:p>
+            <a:pPr>
+              <a:defRPr sz="1400" b="0" i="0" u="none" strike="noStrike">
+                <a:solidFill>
+                  <a:srgbClr val="FFFFFF"/>
+                </a:solidFill>
+                <a:latin typeface="+mn-lt"/>
+              </a:defRPr>
+            </a:pPr>
+            <a:endParaRPr lang="en-US"/>
+          </a:p>
+        </c:txPr>
+        <c:crossAx val="2094734552"/>
+        <c:crosses val="min"/>
+        <c:auto val="1"/>
+        <c:lblAlgn val="ctr"/>
+        <c:noMultiLvlLbl val="1"/>
+      </c:catAx>
+      <c:valAx>
+        <c:axId val="2094734552"/>
+        <c:scaling>
+          <c:orientation val="minMax"/>
+          <c:max val="26"/>
+          <c:min val="16"/>
+        </c:scaling>
+        <c:delete val="0"/>
+        <c:axPos val="l"/>
+        <c:numFmt formatCode="$0&quot;M&quot;" sourceLinked="0"/>
+        <c:majorTickMark val="out"/>
+        <c:minorTickMark val="none"/>
+        <c:tickLblPos val="nextTo"/>
+        <c:spPr>
+          <a:ln w="12700" cap="flat">
+            <a:noFill/>
+            <a:prstDash val="solid"/>
+            <a:round/>
+          </a:ln>
+        </c:spPr>
+        <c:txPr>
+          <a:bodyPr/>
+          <a:lstStyle/>
+          <a:p>
+            <a:pPr>
+              <a:defRPr sz="1400" b="0" i="0" u="none" strike="noStrike">
+                <a:solidFill>
+                  <a:srgbClr val="FFFFFF"/>
+                </a:solidFill>
+                <a:latin typeface="+mn-lt"/>
+              </a:defRPr>
+            </a:pPr>
+            <a:endParaRPr lang="en-US"/>
+          </a:p>
+        </c:txPr>
+        <c:crossAx val="2094734554"/>
+        <c:crosses val="autoZero"/>
+        <c:crossBetween val="between"/>
+        <c:majorUnit val="2"/>
+      </c:valAx>
+      <c:spPr>
+        <a:solidFill>
+          <a:srgbClr val="FFFFFF">
+            <a:alpha val="0"/>
+          </a:srgbClr>
+        </a:solidFill>
+        <a:ln>
+          <a:noFill/>
+        </a:ln>
+        <a:effectLst/>
+      </c:spPr>
+    </c:plotArea>
+    <c:plotVisOnly val="1"/>
+    <c:dispBlanksAs val="span"/>
+  </c:chart>
+  <c:spPr>
+    <a:solidFill>
+      <a:srgbClr val="FFFFFF">
+        <a:alpha val="0"/>
+      </a:srgbClr>
+    </a:solidFill>
+    <a:ln>
+      <a:noFill/>
+    </a:ln>
+    <a:effectLst/>
+  </c:spPr>
+  <c:externalData r:id="rId1">
+    <c:autoUpdate val="0"/>
+  </c:externalData>
+</c:chartSpace>
+</file>
+
+<file path=ppt/charts/chart5.xml><?xml version="1.0" encoding="utf-8"?>
+<c:chartSpace xmlns:c="http://schemas.openxmlformats.org/drawingml/2006/chart" xmlns:a="http://schemas.openxmlformats.org/drawingml/2006/main" xmlns:r="http://schemas.openxmlformats.org/officeDocument/2006/relationships">
+  <c:date1904 val="0"/>
+  <c:roundedCorners val="1"/>
+  <c:chart>
+    <c:autoTitleDeleted val="1"/>
+    <c:plotArea>
+      <c:layout/>
+      <c:lineChart>
+        <c:varyColors val="0"/>
+        <c:ser>
+          <c:idx val="0"/>
+          <c:order val="0"/>
+          <c:tx>
+            <c:strRef>
+              <c:f>Sheet1!$B$1</c:f>
+              <c:strCache>
+                <c:ptCount val="1"/>
+                <c:pt idx="0">
+                  <c:v>2025</c:v>
+                </c:pt>
+              </c:strCache>
+            </c:strRef>
+          </c:tx>
+          <c:spPr>
+            <a:solidFill>
+              <a:srgbClr val="9AA3AD"/>
+            </a:solidFill>
+            <a:ln>
+              <a:noFill/>
+            </a:ln>
+            <a:effectLst/>
+          </c:spPr>
+          <c:invertIfNegative val="0"/>
+          <c:dLbls>
+            <c:numFmt formatCode="0.0" sourceLinked="0"/>
+            <c:txPr>
+              <a:bodyPr/>
+              <a:lstStyle/>
+              <a:p>
+                <a:pPr>
+                  <a:defRPr b="0" i="0" strike="noStrike" sz="1400" u="none">
+                    <a:solidFill>
+                      <a:srgbClr val="1A1A1A"/>
+                    </a:solidFill>
+                    <a:latin typeface="+mn-lt"/>
+                  </a:defRPr>
+                </a:pPr>
+              </a:p>
+            </c:txPr>
+            <c:dLblPos val="b"/>
+            <c:showLegendKey val="0"/>
+            <c:showVal val="1"/>
+            <c:showCatName val="0"/>
+            <c:showSerName val="0"/>
+            <c:showPercent val="0"/>
+            <c:showBubbleSize val="0"/>
+            <c:showLeaderLines val="0"/>
+          </c:dLbls>
+          <c:marker>
+            <c:symbol val="none"/>
+            <c:size val="8"/>
+            <c:spPr>
+              <a:solidFill>
+                <a:srgbClr val="9AA3AD"/>
+              </a:solidFill>
+              <a:ln w="9525" cap="flat">
+                <a:solidFill>
+                  <a:srgbClr val="9AA3AD"/>
+                </a:solidFill>
+                <a:prstDash val="solid"/>
+                <a:round/>
+              </a:ln>
+              <a:effectLst/>
+            </c:spPr>
+          </c:marker>
+          <c:cat>
+            <c:multiLvlStrRef>
+              <c:f>Sheet1!$A$2:$A$13</c:f>
+              <c:multiLvlStrCache>
+                <c:ptCount val="12"/>
+                <c:lvl>
+                  <c:pt idx="0">
+                    <c:v>Jan</c:v>
+                  </c:pt>
+                  <c:pt idx="1">
+                    <c:v>Feb</c:v>
+                  </c:pt>
+                  <c:pt idx="2">
+                    <c:v>Mar</c:v>
+                  </c:pt>
+                  <c:pt idx="3">
+                    <c:v>Apr</c:v>
+                  </c:pt>
+                  <c:pt idx="4">
+                    <c:v>May</c:v>
+                  </c:pt>
+                  <c:pt idx="5">
+                    <c:v>Jun</c:v>
+                  </c:pt>
+                  <c:pt idx="6">
+                    <c:v>Jul</c:v>
+                  </c:pt>
+                  <c:pt idx="7">
+                    <c:v>Aug</c:v>
+                  </c:pt>
+                  <c:pt idx="8">
+                    <c:v>Sep</c:v>
+                  </c:pt>
+                  <c:pt idx="9">
+                    <c:v>Oct</c:v>
+                  </c:pt>
+                  <c:pt idx="10">
+                    <c:v>Nov</c:v>
+                  </c:pt>
+                  <c:pt idx="11">
+                    <c:v>Dec</c:v>
+                  </c:pt>
+                </c:lvl>
+              </c:multiLvlStrCache>
+            </c:multiLvlStrRef>
+          </c:cat>
+          <c:val>
+            <c:numRef>
+              <c:f>Sheet1!$B$2:$B$13</c:f>
+              <c:numCache>
+                <c:formatCode>General</c:formatCode>
+                <c:ptCount val="12"/>
+                <c:pt idx="0">
+                  <c:v/>
+                </c:pt>
+                <c:pt idx="1">
+                  <c:v/>
+                </c:pt>
+                <c:pt idx="2">
+                  <c:v>20.19</c:v>
+                </c:pt>
+                <c:pt idx="3">
+                  <c:v>20.85</c:v>
+                </c:pt>
+                <c:pt idx="4">
+                  <c:v/>
+                </c:pt>
+                <c:pt idx="5">
+                  <c:v>20.34</c:v>
+                </c:pt>
+                <c:pt idx="6">
+                  <c:v>20.75</c:v>
+                </c:pt>
+                <c:pt idx="7">
+                  <c:v>20.32</c:v>
+                </c:pt>
+                <c:pt idx="8">
+                  <c:v>19.03</c:v>
+                </c:pt>
+                <c:pt idx="9">
+                  <c:v>21.27</c:v>
+                </c:pt>
+                <c:pt idx="10">
+                  <c:v>17.74</c:v>
+                </c:pt>
+                <c:pt idx="11">
+                  <c:v>19.32</c:v>
+                </c:pt>
+              </c:numCache>
+            </c:numRef>
+          </c:val>
+          <c:smooth val="0"/>
+        </c:ser>
+        <c:dLbls>
+          <c:numFmt formatCode="0.0" sourceLinked="0"/>
+          <c:txPr>
+            <a:bodyPr/>
+            <a:lstStyle/>
+            <a:p>
+              <a:pPr>
+                <a:defRPr b="0" i="0" strike="noStrike" sz="1400" u="none">
+                  <a:solidFill>
+                    <a:srgbClr val="1A1A1A"/>
+                  </a:solidFill>
+                  <a:latin typeface="+mn-lt"/>
+                </a:defRPr>
+              </a:pPr>
+            </a:p>
+          </c:txPr>
+          <c:dLblPos val="b"/>
+          <c:showLegendKey val="0"/>
+          <c:showVal val="1"/>
+          <c:showCatName val="0"/>
+          <c:showSerName val="0"/>
+          <c:showPercent val="0"/>
+          <c:showBubbleSize val="0"/>
+          <c:showLeaderLines val="0"/>
+        </c:dLbls>
+        <c:marker val="1"/>
+        <c:axId val="2094734554"/>
+        <c:axId val="2094734552"/>
+        <c:axId val="2094734556"/>
+      </c:lineChart>
+      <c:catAx>
+        <c:axId val="2094734554"/>
+        <c:scaling>
+          <c:orientation val="minMax"/>
+        </c:scaling>
+        <c:delete val="0"/>
+        <c:axPos val="b"/>
+        <c:numFmt formatCode="General" sourceLinked="1"/>
+        <c:majorTickMark val="out"/>
+        <c:minorTickMark val="none"/>
+        <c:tickLblPos val="low"/>
+        <c:spPr>
+          <a:ln w="12700" cap="flat">
+            <a:noFill/>
+            <a:prstDash val="solid"/>
+            <a:round/>
+          </a:ln>
+        </c:spPr>
+        <c:txPr>
+          <a:bodyPr/>
+          <a:lstStyle/>
+          <a:p>
+            <a:pPr>
+              <a:defRPr sz="1400" b="0" i="0" u="none" strike="noStrike">
+                <a:solidFill>
+                  <a:srgbClr val="FFFFFF"/>
+                </a:solidFill>
+                <a:latin typeface="+mn-lt"/>
+              </a:defRPr>
+            </a:pPr>
+            <a:endParaRPr lang="en-US"/>
+          </a:p>
+        </c:txPr>
+        <c:crossAx val="2094734552"/>
+        <c:crosses val="min"/>
+        <c:auto val="1"/>
+        <c:lblAlgn val="ctr"/>
+        <c:noMultiLvlLbl val="1"/>
+      </c:catAx>
+      <c:valAx>
+        <c:axId val="2094734552"/>
+        <c:scaling>
+          <c:orientation val="minMax"/>
+          <c:max val="26"/>
+          <c:min val="16"/>
+        </c:scaling>
+        <c:delete val="0"/>
+        <c:axPos val="l"/>
+        <c:numFmt formatCode="$0&quot;M&quot;" sourceLinked="0"/>
+        <c:majorTickMark val="out"/>
+        <c:minorTickMark val="none"/>
+        <c:tickLblPos val="nextTo"/>
+        <c:spPr>
+          <a:ln w="12700" cap="flat">
+            <a:noFill/>
+            <a:prstDash val="solid"/>
+            <a:round/>
+          </a:ln>
+        </c:spPr>
+        <c:txPr>
+          <a:bodyPr/>
+          <a:lstStyle/>
+          <a:p>
+            <a:pPr>
+              <a:defRPr sz="1400" b="0" i="0" u="none" strike="noStrike">
+                <a:solidFill>
+                  <a:srgbClr val="FFFFFF"/>
+                </a:solidFill>
+                <a:latin typeface="+mn-lt"/>
+              </a:defRPr>
+            </a:pPr>
+            <a:endParaRPr lang="en-US"/>
+          </a:p>
+        </c:txPr>
+        <c:crossAx val="2094734554"/>
+        <c:crosses val="autoZero"/>
+        <c:crossBetween val="between"/>
+        <c:majorUnit val="2"/>
+      </c:valAx>
+      <c:spPr>
+        <a:solidFill>
+          <a:srgbClr val="FFFFFF">
+            <a:alpha val="0"/>
+          </a:srgbClr>
+        </a:solidFill>
+        <a:ln>
+          <a:noFill/>
+        </a:ln>
+        <a:effectLst/>
+      </c:spPr>
+    </c:plotArea>
+    <c:plotVisOnly val="1"/>
+    <c:dispBlanksAs val="span"/>
+  </c:chart>
+  <c:spPr>
+    <a:solidFill>
+      <a:srgbClr val="FFFFFF">
+        <a:alpha val="0"/>
+      </a:srgbClr>
+    </a:solidFill>
+    <a:ln>
+      <a:noFill/>
+    </a:ln>
+    <a:effectLst/>
+  </c:spPr>
+  <c:externalData r:id="rId1">
+    <c:autoUpdate val="0"/>
+  </c:externalData>
+</c:chartSpace>
+</file>
+
+<file path=ppt/charts/chart6.xml><?xml version="1.0" encoding="utf-8"?>
+<c:chartSpace xmlns:c="http://schemas.openxmlformats.org/drawingml/2006/chart" xmlns:a="http://schemas.openxmlformats.org/drawingml/2006/main" xmlns:r="http://schemas.openxmlformats.org/officeDocument/2006/relationships">
+  <c:date1904 val="0"/>
+  <c:roundedCorners val="1"/>
+  <c:chart>
+    <c:autoTitleDeleted val="1"/>
+    <c:plotArea>
+      <c:layout/>
+      <c:lineChart>
+        <c:varyColors val="0"/>
+        <c:ser>
+          <c:idx val="0"/>
+          <c:order val="0"/>
+          <c:tx>
+            <c:strRef>
+              <c:f>Sheet1!$B$1</c:f>
+              <c:strCache>
+                <c:ptCount val="1"/>
+                <c:pt idx="0">
+                  <c:v>2025</c:v>
+                </c:pt>
+              </c:strCache>
+            </c:strRef>
+          </c:tx>
+          <c:spPr>
+            <a:solidFill>
+              <a:srgbClr val="9AA3AD"/>
+            </a:solidFill>
+            <a:ln w="38100" cap="flat">
+              <a:solidFill>
+                <a:srgbClr val="9AA3AD"/>
+              </a:solidFill>
+              <a:prstDash val="solid"/>
+              <a:round/>
+            </a:ln>
+            <a:effectLst/>
+          </c:spPr>
+          <c:invertIfNegative val="0"/>
+          <c:dLbls>
+            <c:numFmt formatCode="0.0" sourceLinked="0"/>
+            <c:txPr>
+              <a:bodyPr/>
+              <a:lstStyle/>
+              <a:p>
+                <a:pPr>
+                  <a:defRPr b="0" i="0" strike="noStrike" sz="1400" u="none">
+                    <a:solidFill>
+                      <a:srgbClr val="1A1A1A"/>
+                    </a:solidFill>
+                    <a:latin typeface="+mn-lt"/>
+                  </a:defRPr>
+                </a:pPr>
+              </a:p>
+            </c:txPr>
+            <c:showLegendKey val="0"/>
+            <c:showVal val="0"/>
+            <c:showCatName val="0"/>
+            <c:showSerName val="0"/>
+            <c:showPercent val="0"/>
+            <c:showBubbleSize val="0"/>
+            <c:showLeaderLines val="0"/>
+          </c:dLbls>
+          <c:marker>
+            <c:symbol val="circle"/>
+            <c:size val="8"/>
+            <c:spPr>
+              <a:solidFill>
+                <a:srgbClr val="9AA3AD"/>
+              </a:solidFill>
+              <a:ln w="9525" cap="flat">
+                <a:solidFill>
+                  <a:srgbClr val="9AA3AD"/>
+                </a:solidFill>
+                <a:prstDash val="solid"/>
+                <a:round/>
+              </a:ln>
+              <a:effectLst/>
+            </c:spPr>
+          </c:marker>
           <c:cat>
             <c:multiLvlStrRef>
               <c:f>Sheet1!$A$2:$A$13</c:f>
@@ -265,13 +4025,177 @@
               </c:numCache>
             </c:numRef>
           </c:val>
+          <c:smooth val="0"/>
         </c:ser>
+        <c:dLbls>
+          <c:numFmt formatCode="0.0" sourceLinked="0"/>
+          <c:txPr>
+            <a:bodyPr/>
+            <a:lstStyle/>
+            <a:p>
+              <a:pPr>
+                <a:defRPr b="0" i="0" strike="noStrike" sz="1400" u="none">
+                  <a:solidFill>
+                    <a:srgbClr val="1A1A1A"/>
+                  </a:solidFill>
+                  <a:latin typeface="+mn-lt"/>
+                </a:defRPr>
+              </a:pPr>
+            </a:p>
+          </c:txPr>
+          <c:showLegendKey val="0"/>
+          <c:showVal val="0"/>
+          <c:showCatName val="0"/>
+          <c:showSerName val="0"/>
+          <c:showPercent val="0"/>
+          <c:showBubbleSize val="0"/>
+          <c:showLeaderLines val="0"/>
+        </c:dLbls>
+        <c:marker val="1"/>
+        <c:axId val="2094734554"/>
+        <c:axId val="2094734552"/>
+        <c:axId val="2094734556"/>
+      </c:lineChart>
+      <c:catAx>
+        <c:axId val="2094734554"/>
+        <c:scaling>
+          <c:orientation val="minMax"/>
+        </c:scaling>
+        <c:delete val="0"/>
+        <c:axPos val="b"/>
+        <c:numFmt formatCode="General" sourceLinked="1"/>
+        <c:majorTickMark val="out"/>
+        <c:minorTickMark val="none"/>
+        <c:tickLblPos val="low"/>
+        <c:spPr>
+          <a:ln w="12700" cap="flat">
+            <a:solidFill>
+              <a:srgbClr val="888888"/>
+            </a:solidFill>
+            <a:prstDash val="solid"/>
+            <a:round/>
+          </a:ln>
+        </c:spPr>
+        <c:txPr>
+          <a:bodyPr/>
+          <a:lstStyle/>
+          <a:p>
+            <a:pPr>
+              <a:defRPr sz="1400" b="0" i="0" u="none" strike="noStrike">
+                <a:solidFill>
+                  <a:srgbClr val="1A1A1A"/>
+                </a:solidFill>
+                <a:latin typeface="+mn-lt"/>
+              </a:defRPr>
+            </a:pPr>
+            <a:endParaRPr lang="en-US"/>
+          </a:p>
+        </c:txPr>
+        <c:crossAx val="2094734552"/>
+        <c:crosses val="min"/>
+        <c:auto val="1"/>
+        <c:lblAlgn val="ctr"/>
+        <c:noMultiLvlLbl val="1"/>
+      </c:catAx>
+      <c:valAx>
+        <c:axId val="2094734552"/>
+        <c:scaling>
+          <c:orientation val="minMax"/>
+          <c:max val="26"/>
+          <c:min val="16"/>
+        </c:scaling>
+        <c:delete val="0"/>
+        <c:axPos val="l"/>
+        <c:majorGridlines>
+          <c:spPr>
+            <a:ln w="9525" cap="flat">
+              <a:solidFill>
+                <a:srgbClr val="D9D9D9"/>
+              </a:solidFill>
+              <a:prstDash val="solid"/>
+              <a:round/>
+            </a:ln>
+          </c:spPr>
+        </c:majorGridlines>
+        <c:numFmt formatCode="$0&quot;M&quot;" sourceLinked="0"/>
+        <c:majorTickMark val="out"/>
+        <c:minorTickMark val="none"/>
+        <c:tickLblPos val="nextTo"/>
+        <c:spPr>
+          <a:ln w="12700" cap="flat">
+            <a:noFill/>
+            <a:prstDash val="solid"/>
+            <a:round/>
+          </a:ln>
+        </c:spPr>
+        <c:txPr>
+          <a:bodyPr/>
+          <a:lstStyle/>
+          <a:p>
+            <a:pPr>
+              <a:defRPr sz="1400" b="0" i="0" u="none" strike="noStrike">
+                <a:solidFill>
+                  <a:srgbClr val="595959"/>
+                </a:solidFill>
+                <a:latin typeface="+mn-lt"/>
+              </a:defRPr>
+            </a:pPr>
+            <a:endParaRPr lang="en-US"/>
+          </a:p>
+        </c:txPr>
+        <c:crossAx val="2094734554"/>
+        <c:crosses val="autoZero"/>
+        <c:crossBetween val="between"/>
+        <c:majorUnit val="2"/>
+      </c:valAx>
+      <c:spPr>
+        <a:solidFill>
+          <a:srgbClr val="FFFFFF">
+            <a:alpha val="0"/>
+          </a:srgbClr>
+        </a:solidFill>
+        <a:ln>
+          <a:noFill/>
+        </a:ln>
+        <a:effectLst/>
+      </c:spPr>
+    </c:plotArea>
+    <c:plotVisOnly val="1"/>
+    <c:dispBlanksAs val="span"/>
+  </c:chart>
+  <c:spPr>
+    <a:solidFill>
+      <a:srgbClr val="FFFFFF">
+        <a:alpha val="0"/>
+      </a:srgbClr>
+    </a:solidFill>
+    <a:ln>
+      <a:noFill/>
+    </a:ln>
+    <a:effectLst/>
+  </c:spPr>
+  <c:externalData r:id="rId1">
+    <c:autoUpdate val="0"/>
+  </c:externalData>
+</c:chartSpace>
+</file>
+
+<file path=ppt/charts/chart7.xml><?xml version="1.0" encoding="utf-8"?>
+<c:chartSpace xmlns:c="http://schemas.openxmlformats.org/drawingml/2006/chart" xmlns:a="http://schemas.openxmlformats.org/drawingml/2006/main" xmlns:r="http://schemas.openxmlformats.org/officeDocument/2006/relationships">
+  <c:date1904 val="0"/>
+  <c:roundedCorners val="1"/>
+  <c:chart>
+    <c:autoTitleDeleted val="1"/>
+    <c:plotArea>
+      <c:layout/>
+      <c:lineChart>
+        <c:varyColors val="0"/>
         <c:ser>
-          <c:idx val="1"/>
-          <c:order val="1"/>
+          <c:idx val="0"/>
+          <c:order val="0"/>
           <c:tx>
             <c:strRef>
-              <c:f>Sheet1!$C$1</c:f>
+              <c:f>Sheet1!$B$1</c:f>
               <c:strCache>
                 <c:ptCount val="1"/>
                 <c:pt idx="0">
@@ -284,6 +4208,13 @@
             <a:solidFill>
               <a:srgbClr val="2587C5"/>
             </a:solidFill>
+            <a:ln w="38100" cap="flat">
+              <a:solidFill>
+                <a:srgbClr val="2587C5"/>
+              </a:solidFill>
+              <a:prstDash val="solid"/>
+              <a:round/>
+            </a:ln>
             <a:effectLst/>
           </c:spPr>
           <c:invertIfNegative val="0"/>
@@ -304,13 +4235,30 @@
               </a:p>
             </c:txPr>
             <c:showLegendKey val="0"/>
-            <c:showVal val="1"/>
+            <c:showVal val="0"/>
             <c:showCatName val="0"/>
             <c:showSerName val="0"/>
             <c:showPercent val="0"/>
             <c:showBubbleSize val="0"/>
             <c:showLeaderLines val="0"/>
           </c:dLbls>
+          <c:marker>
+            <c:symbol val="circle"/>
+            <c:size val="8"/>
+            <c:spPr>
+              <a:solidFill>
+                <a:srgbClr val="2587C5"/>
+              </a:solidFill>
+              <a:ln w="9525" cap="flat">
+                <a:solidFill>
+                  <a:srgbClr val="2587C5"/>
+                </a:solidFill>
+                <a:prstDash val="solid"/>
+                <a:round/>
+              </a:ln>
+              <a:effectLst/>
+            </c:spPr>
+          </c:marker>
           <c:cat>
             <c:multiLvlStrRef>
               <c:f>Sheet1!$A$2:$A$13</c:f>
@@ -359,36 +4307,36 @@
           </c:cat>
           <c:val>
             <c:numRef>
-              <c:f>Sheet1!$C$2:$C$13</c:f>
+              <c:f>Sheet1!$B$2:$B$13</c:f>
               <c:numCache>
                 <c:formatCode>General</c:formatCode>
                 <c:ptCount val="12"/>
                 <c:pt idx="0">
-                  <c:v>19.88</c:v>
+                  <c:v>13.47</c:v>
                 </c:pt>
                 <c:pt idx="1">
-                  <c:v>18.87</c:v>
+                  <c:v>12.79</c:v>
                 </c:pt>
                 <c:pt idx="2">
-                  <c:v>21.12</c:v>
+                  <c:v>14.35</c:v>
                 </c:pt>
                 <c:pt idx="3">
-                  <c:v>21.8</c:v>
+                  <c:v>14.65</c:v>
                 </c:pt>
                 <c:pt idx="4">
-                  <c:v>20.12</c:v>
+                  <c:v>13.71</c:v>
                 </c:pt>
                 <c:pt idx="5">
-                  <c:v>21.52</c:v>
+                  <c:v>14.45</c:v>
                 </c:pt>
                 <c:pt idx="6">
-                  <c:v>22.71</c:v>
+                  <c:v>15.06</c:v>
                 </c:pt>
                 <c:pt idx="7">
-                  <c:v>21.64</c:v>
+                  <c:v>14.43</c:v>
                 </c:pt>
                 <c:pt idx="8">
-                  <c:v>21.13</c:v>
+                  <c:v>13.96</c:v>
                 </c:pt>
                 <c:pt idx="9">
                   <c:v/>
@@ -402,6 +4350,7 @@
               </c:numCache>
             </c:numRef>
           </c:val>
+          <c:smooth val="0"/>
         </c:ser>
         <c:dLbls>
           <c:numFmt formatCode="0.0" sourceLinked="0"/>
@@ -420,19 +4369,18 @@
             </a:p>
           </c:txPr>
           <c:showLegendKey val="0"/>
-          <c:showVal val="1"/>
+          <c:showVal val="0"/>
           <c:showCatName val="0"/>
           <c:showSerName val="0"/>
           <c:showPercent val="0"/>
           <c:showBubbleSize val="0"/>
           <c:showLeaderLines val="0"/>
         </c:dLbls>
-        <c:gapWidth val="35"/>
-        <c:overlap val="-35"/>
+        <c:marker val="1"/>
         <c:axId val="2094734554"/>
         <c:axId val="2094734552"/>
         <c:axId val="2094734556"/>
-      </c:barChart>
+      </c:lineChart>
       <c:catAx>
         <c:axId val="2094734554"/>
         <c:scaling>
@@ -446,9 +4394,7 @@
         <c:tickLblPos val="low"/>
         <c:spPr>
           <a:ln w="12700" cap="flat">
-            <a:solidFill>
-              <a:srgbClr val="888888"/>
-            </a:solidFill>
+            <a:noFill/>
             <a:prstDash val="solid"/>
             <a:round/>
           </a:ln>
@@ -460,7 +4406,7 @@
             <a:pPr>
               <a:defRPr sz="1400" b="0" i="0" u="none" strike="noStrike">
                 <a:solidFill>
-                  <a:srgbClr val="1A1A1A"/>
+                  <a:srgbClr val="FFFFFF"/>
                 </a:solidFill>
                 <a:latin typeface="+mn-lt"/>
               </a:defRPr>
@@ -478,22 +4424,11 @@
         <c:axId val="2094734552"/>
         <c:scaling>
           <c:orientation val="minMax"/>
-          <c:max val="30"/>
-          <c:min val="0"/>
+          <c:max val="18"/>
+          <c:min val="10"/>
         </c:scaling>
         <c:delete val="0"/>
         <c:axPos val="l"/>
-        <c:majorGridlines>
-          <c:spPr>
-            <a:ln w="9525" cap="flat">
-              <a:solidFill>
-                <a:srgbClr val="D9D9D9"/>
-              </a:solidFill>
-              <a:prstDash val="solid"/>
-              <a:round/>
-            </a:ln>
-          </c:spPr>
-        </c:majorGridlines>
         <c:numFmt formatCode="$0&quot;M&quot;" sourceLinked="0"/>
         <c:majorTickMark val="out"/>
         <c:minorTickMark val="none"/>
@@ -512,7 +4447,7 @@
             <a:pPr>
               <a:defRPr sz="1400" b="0" i="0" u="none" strike="noStrike">
                 <a:solidFill>
-                  <a:srgbClr val="595959"/>
+                  <a:srgbClr val="FFFFFF"/>
                 </a:solidFill>
                 <a:latin typeface="+mn-lt"/>
               </a:defRPr>
@@ -523,7 +4458,7 @@
         <c:crossAx val="2094734554"/>
         <c:crosses val="autoZero"/>
         <c:crossBetween val="between"/>
-        <c:majorUnit val="10"/>
+        <c:majorUnit val="2"/>
       </c:valAx>
       <c:spPr>
         <a:noFill/>
@@ -533,26 +4468,6 @@
         <a:effectLst/>
       </c:spPr>
     </c:plotArea>
-    <c:legend>
-      <c:legendPos val="t"/>
-      <c:overlay val="0"/>
-      <c:txPr>
-        <a:bodyPr/>
-        <a:lstStyle/>
-        <a:p>
-          <a:pPr>
-            <a:defRPr sz="1400">
-              <a:solidFill>
-                <a:srgbClr val="1A1A1A"/>
-              </a:solidFill>
-              <a:latin typeface="+mn-lt"/>
-              <a:cs typeface="+mn-lt"/>
-            </a:defRPr>
-          </a:pPr>
-          <a:endParaRPr lang="en-US"/>
-        </a:p>
-      </c:txPr>
-    </c:legend>
     <c:plotVisOnly val="1"/>
     <c:dispBlanksAs val="span"/>
   </c:chart>
@@ -569,7 +4484,7 @@
 </c:chartSpace>
 </file>
 
-<file path=ppt/charts/chart2.xml><?xml version="1.0" encoding="utf-8"?>
+<file path=ppt/charts/chart8.xml><?xml version="1.0" encoding="utf-8"?>
 <c:chartSpace xmlns:c="http://schemas.openxmlformats.org/drawingml/2006/chart" xmlns:a="http://schemas.openxmlformats.org/drawingml/2006/main" xmlns:r="http://schemas.openxmlformats.org/officeDocument/2006/relationships">
   <c:date1904 val="0"/>
   <c:roundedCorners val="1"/>
@@ -577,9 +4492,317 @@
     <c:autoTitleDeleted val="1"/>
     <c:plotArea>
       <c:layout/>
-      <c:barChart>
-        <c:barDir val="col"/>
-        <c:grouping val="clustered"/>
+      <c:lineChart>
+        <c:varyColors val="0"/>
+        <c:ser>
+          <c:idx val="0"/>
+          <c:order val="0"/>
+          <c:tx>
+            <c:strRef>
+              <c:f>Sheet1!$B$1</c:f>
+              <c:strCache>
+                <c:ptCount val="1"/>
+                <c:pt idx="0">
+                  <c:v>2026</c:v>
+                </c:pt>
+              </c:strCache>
+            </c:strRef>
+          </c:tx>
+          <c:spPr>
+            <a:solidFill>
+              <a:srgbClr val="2587C5"/>
+            </a:solidFill>
+            <a:ln>
+              <a:noFill/>
+            </a:ln>
+            <a:effectLst/>
+          </c:spPr>
+          <c:invertIfNegative val="0"/>
+          <c:dLbls>
+            <c:numFmt formatCode="0.0" sourceLinked="0"/>
+            <c:txPr>
+              <a:bodyPr/>
+              <a:lstStyle/>
+              <a:p>
+                <a:pPr>
+                  <a:defRPr b="0" i="0" strike="noStrike" sz="1400" u="none">
+                    <a:solidFill>
+                      <a:srgbClr val="1A1A1A"/>
+                    </a:solidFill>
+                    <a:latin typeface="+mn-lt"/>
+                  </a:defRPr>
+                </a:pPr>
+              </a:p>
+            </c:txPr>
+            <c:dLblPos val="t"/>
+            <c:showLegendKey val="0"/>
+            <c:showVal val="1"/>
+            <c:showCatName val="0"/>
+            <c:showSerName val="0"/>
+            <c:showPercent val="0"/>
+            <c:showBubbleSize val="0"/>
+            <c:showLeaderLines val="0"/>
+          </c:dLbls>
+          <c:marker>
+            <c:symbol val="none"/>
+            <c:size val="8"/>
+            <c:spPr>
+              <a:solidFill>
+                <a:srgbClr val="2587C5"/>
+              </a:solidFill>
+              <a:ln w="9525" cap="flat">
+                <a:solidFill>
+                  <a:srgbClr val="2587C5"/>
+                </a:solidFill>
+                <a:prstDash val="solid"/>
+                <a:round/>
+              </a:ln>
+              <a:effectLst/>
+            </c:spPr>
+          </c:marker>
+          <c:cat>
+            <c:multiLvlStrRef>
+              <c:f>Sheet1!$A$2:$A$13</c:f>
+              <c:multiLvlStrCache>
+                <c:ptCount val="12"/>
+                <c:lvl>
+                  <c:pt idx="0">
+                    <c:v>Jan</c:v>
+                  </c:pt>
+                  <c:pt idx="1">
+                    <c:v>Feb</c:v>
+                  </c:pt>
+                  <c:pt idx="2">
+                    <c:v>Mar</c:v>
+                  </c:pt>
+                  <c:pt idx="3">
+                    <c:v>Apr</c:v>
+                  </c:pt>
+                  <c:pt idx="4">
+                    <c:v>May</c:v>
+                  </c:pt>
+                  <c:pt idx="5">
+                    <c:v>Jun</c:v>
+                  </c:pt>
+                  <c:pt idx="6">
+                    <c:v>Jul</c:v>
+                  </c:pt>
+                  <c:pt idx="7">
+                    <c:v>Aug</c:v>
+                  </c:pt>
+                  <c:pt idx="8">
+                    <c:v>Sep</c:v>
+                  </c:pt>
+                  <c:pt idx="9">
+                    <c:v>Oct</c:v>
+                  </c:pt>
+                  <c:pt idx="10">
+                    <c:v>Nov</c:v>
+                  </c:pt>
+                  <c:pt idx="11">
+                    <c:v>Dec</c:v>
+                  </c:pt>
+                </c:lvl>
+              </c:multiLvlStrCache>
+            </c:multiLvlStrRef>
+          </c:cat>
+          <c:val>
+            <c:numRef>
+              <c:f>Sheet1!$B$2:$B$13</c:f>
+              <c:numCache>
+                <c:formatCode>General</c:formatCode>
+                <c:ptCount val="12"/>
+                <c:pt idx="0">
+                  <c:v>13.47</c:v>
+                </c:pt>
+                <c:pt idx="1">
+                  <c:v>12.79</c:v>
+                </c:pt>
+                <c:pt idx="2">
+                  <c:v>14.35</c:v>
+                </c:pt>
+                <c:pt idx="3">
+                  <c:v>14.65</c:v>
+                </c:pt>
+                <c:pt idx="4">
+                  <c:v>13.71</c:v>
+                </c:pt>
+                <c:pt idx="5">
+                  <c:v>14.45</c:v>
+                </c:pt>
+                <c:pt idx="6">
+                  <c:v>15.06</c:v>
+                </c:pt>
+                <c:pt idx="7">
+                  <c:v>14.43</c:v>
+                </c:pt>
+                <c:pt idx="8">
+                  <c:v>13.96</c:v>
+                </c:pt>
+                <c:pt idx="9">
+                  <c:v/>
+                </c:pt>
+                <c:pt idx="10">
+                  <c:v/>
+                </c:pt>
+                <c:pt idx="11">
+                  <c:v/>
+                </c:pt>
+              </c:numCache>
+            </c:numRef>
+          </c:val>
+          <c:smooth val="0"/>
+        </c:ser>
+        <c:dLbls>
+          <c:numFmt formatCode="0.0" sourceLinked="0"/>
+          <c:txPr>
+            <a:bodyPr/>
+            <a:lstStyle/>
+            <a:p>
+              <a:pPr>
+                <a:defRPr b="0" i="0" strike="noStrike" sz="1400" u="none">
+                  <a:solidFill>
+                    <a:srgbClr val="1A1A1A"/>
+                  </a:solidFill>
+                  <a:latin typeface="+mn-lt"/>
+                </a:defRPr>
+              </a:pPr>
+            </a:p>
+          </c:txPr>
+          <c:dLblPos val="t"/>
+          <c:showLegendKey val="0"/>
+          <c:showVal val="1"/>
+          <c:showCatName val="0"/>
+          <c:showSerName val="0"/>
+          <c:showPercent val="0"/>
+          <c:showBubbleSize val="0"/>
+          <c:showLeaderLines val="0"/>
+        </c:dLbls>
+        <c:marker val="1"/>
+        <c:axId val="2094734554"/>
+        <c:axId val="2094734552"/>
+        <c:axId val="2094734556"/>
+      </c:lineChart>
+      <c:catAx>
+        <c:axId val="2094734554"/>
+        <c:scaling>
+          <c:orientation val="minMax"/>
+        </c:scaling>
+        <c:delete val="0"/>
+        <c:axPos val="b"/>
+        <c:numFmt formatCode="General" sourceLinked="1"/>
+        <c:majorTickMark val="out"/>
+        <c:minorTickMark val="none"/>
+        <c:tickLblPos val="low"/>
+        <c:spPr>
+          <a:ln w="12700" cap="flat">
+            <a:noFill/>
+            <a:prstDash val="solid"/>
+            <a:round/>
+          </a:ln>
+        </c:spPr>
+        <c:txPr>
+          <a:bodyPr/>
+          <a:lstStyle/>
+          <a:p>
+            <a:pPr>
+              <a:defRPr sz="1400" b="0" i="0" u="none" strike="noStrike">
+                <a:solidFill>
+                  <a:srgbClr val="FFFFFF"/>
+                </a:solidFill>
+                <a:latin typeface="+mn-lt"/>
+              </a:defRPr>
+            </a:pPr>
+            <a:endParaRPr lang="en-US"/>
+          </a:p>
+        </c:txPr>
+        <c:crossAx val="2094734552"/>
+        <c:crosses val="min"/>
+        <c:auto val="1"/>
+        <c:lblAlgn val="ctr"/>
+        <c:noMultiLvlLbl val="1"/>
+      </c:catAx>
+      <c:valAx>
+        <c:axId val="2094734552"/>
+        <c:scaling>
+          <c:orientation val="minMax"/>
+          <c:max val="18"/>
+          <c:min val="10"/>
+        </c:scaling>
+        <c:delete val="0"/>
+        <c:axPos val="l"/>
+        <c:numFmt formatCode="$0&quot;M&quot;" sourceLinked="0"/>
+        <c:majorTickMark val="out"/>
+        <c:minorTickMark val="none"/>
+        <c:tickLblPos val="nextTo"/>
+        <c:spPr>
+          <a:ln w="12700" cap="flat">
+            <a:noFill/>
+            <a:prstDash val="solid"/>
+            <a:round/>
+          </a:ln>
+        </c:spPr>
+        <c:txPr>
+          <a:bodyPr/>
+          <a:lstStyle/>
+          <a:p>
+            <a:pPr>
+              <a:defRPr sz="1400" b="0" i="0" u="none" strike="noStrike">
+                <a:solidFill>
+                  <a:srgbClr val="FFFFFF"/>
+                </a:solidFill>
+                <a:latin typeface="+mn-lt"/>
+              </a:defRPr>
+            </a:pPr>
+            <a:endParaRPr lang="en-US"/>
+          </a:p>
+        </c:txPr>
+        <c:crossAx val="2094734554"/>
+        <c:crosses val="autoZero"/>
+        <c:crossBetween val="between"/>
+        <c:majorUnit val="2"/>
+      </c:valAx>
+      <c:spPr>
+        <a:solidFill>
+          <a:srgbClr val="FFFFFF">
+            <a:alpha val="0"/>
+          </a:srgbClr>
+        </a:solidFill>
+        <a:ln>
+          <a:noFill/>
+        </a:ln>
+        <a:effectLst/>
+      </c:spPr>
+    </c:plotArea>
+    <c:plotVisOnly val="1"/>
+    <c:dispBlanksAs val="span"/>
+  </c:chart>
+  <c:spPr>
+    <a:solidFill>
+      <a:srgbClr val="FFFFFF">
+        <a:alpha val="0"/>
+      </a:srgbClr>
+    </a:solidFill>
+    <a:ln>
+      <a:noFill/>
+    </a:ln>
+    <a:effectLst/>
+  </c:spPr>
+  <c:externalData r:id="rId1">
+    <c:autoUpdate val="0"/>
+  </c:externalData>
+</c:chartSpace>
+</file>
+
+<file path=ppt/charts/chart9.xml><?xml version="1.0" encoding="utf-8"?>
+<c:chartSpace xmlns:c="http://schemas.openxmlformats.org/drawingml/2006/chart" xmlns:a="http://schemas.openxmlformats.org/drawingml/2006/main" xmlns:r="http://schemas.openxmlformats.org/officeDocument/2006/relationships">
+  <c:date1904 val="0"/>
+  <c:roundedCorners val="1"/>
+  <c:chart>
+    <c:autoTitleDeleted val="1"/>
+    <c:plotArea>
+      <c:layout/>
+      <c:lineChart>
         <c:varyColors val="0"/>
         <c:ser>
           <c:idx val="0"/>
@@ -599,6 +4822,9 @@
             <a:solidFill>
               <a:srgbClr val="9AA3AD"/>
             </a:solidFill>
+            <a:ln>
+              <a:noFill/>
+            </a:ln>
             <a:effectLst/>
           </c:spPr>
           <c:invertIfNegative val="0"/>
@@ -618,6 +4844,7 @@
                 </a:pPr>
               </a:p>
             </c:txPr>
+            <c:dLblPos val="b"/>
             <c:showLegendKey val="0"/>
             <c:showVal val="1"/>
             <c:showCatName val="0"/>
@@ -626,6 +4853,23 @@
             <c:showBubbleSize val="0"/>
             <c:showLeaderLines val="0"/>
           </c:dLbls>
+          <c:marker>
+            <c:symbol val="none"/>
+            <c:size val="8"/>
+            <c:spPr>
+              <a:solidFill>
+                <a:srgbClr val="9AA3AD"/>
+              </a:solidFill>
+              <a:ln w="9525" cap="flat">
+                <a:solidFill>
+                  <a:srgbClr val="9AA3AD"/>
+                </a:solidFill>
+                <a:prstDash val="solid"/>
+                <a:round/>
+              </a:ln>
+              <a:effectLst/>
+            </c:spPr>
+          </c:marker>
           <c:cat>
             <c:multiLvlStrRef>
               <c:f>Sheet1!$A$2:$A$13</c:f>
@@ -717,143 +4961,7 @@
               </c:numCache>
             </c:numRef>
           </c:val>
-        </c:ser>
-        <c:ser>
-          <c:idx val="1"/>
-          <c:order val="1"/>
-          <c:tx>
-            <c:strRef>
-              <c:f>Sheet1!$C$1</c:f>
-              <c:strCache>
-                <c:ptCount val="1"/>
-                <c:pt idx="0">
-                  <c:v>2026</c:v>
-                </c:pt>
-              </c:strCache>
-            </c:strRef>
-          </c:tx>
-          <c:spPr>
-            <a:solidFill>
-              <a:srgbClr val="2587C5"/>
-            </a:solidFill>
-            <a:effectLst/>
-          </c:spPr>
-          <c:invertIfNegative val="0"/>
-          <c:dLbls>
-            <c:numFmt formatCode="0.0" sourceLinked="0"/>
-            <c:txPr>
-              <a:bodyPr/>
-              <a:lstStyle/>
-              <a:p>
-                <a:pPr>
-                  <a:defRPr b="0" i="0" strike="noStrike" sz="1400" u="none">
-                    <a:solidFill>
-                      <a:srgbClr val="1A1A1A"/>
-                    </a:solidFill>
-                    <a:latin typeface="+mn-lt"/>
-                  </a:defRPr>
-                </a:pPr>
-              </a:p>
-            </c:txPr>
-            <c:showLegendKey val="0"/>
-            <c:showVal val="1"/>
-            <c:showCatName val="0"/>
-            <c:showSerName val="0"/>
-            <c:showPercent val="0"/>
-            <c:showBubbleSize val="0"/>
-            <c:showLeaderLines val="0"/>
-          </c:dLbls>
-          <c:cat>
-            <c:multiLvlStrRef>
-              <c:f>Sheet1!$A$2:$A$13</c:f>
-              <c:multiLvlStrCache>
-                <c:ptCount val="12"/>
-                <c:lvl>
-                  <c:pt idx="0">
-                    <c:v>Jan</c:v>
-                  </c:pt>
-                  <c:pt idx="1">
-                    <c:v>Feb</c:v>
-                  </c:pt>
-                  <c:pt idx="2">
-                    <c:v>Mar</c:v>
-                  </c:pt>
-                  <c:pt idx="3">
-                    <c:v>Apr</c:v>
-                  </c:pt>
-                  <c:pt idx="4">
-                    <c:v>May</c:v>
-                  </c:pt>
-                  <c:pt idx="5">
-                    <c:v>Jun</c:v>
-                  </c:pt>
-                  <c:pt idx="6">
-                    <c:v>Jul</c:v>
-                  </c:pt>
-                  <c:pt idx="7">
-                    <c:v>Aug</c:v>
-                  </c:pt>
-                  <c:pt idx="8">
-                    <c:v>Sep</c:v>
-                  </c:pt>
-                  <c:pt idx="9">
-                    <c:v>Oct</c:v>
-                  </c:pt>
-                  <c:pt idx="10">
-                    <c:v>Nov</c:v>
-                  </c:pt>
-                  <c:pt idx="11">
-                    <c:v>Dec</c:v>
-                  </c:pt>
-                </c:lvl>
-              </c:multiLvlStrCache>
-            </c:multiLvlStrRef>
-          </c:cat>
-          <c:val>
-            <c:numRef>
-              <c:f>Sheet1!$C$2:$C$13</c:f>
-              <c:numCache>
-                <c:formatCode>General</c:formatCode>
-                <c:ptCount val="12"/>
-                <c:pt idx="0">
-                  <c:v>13.47</c:v>
-                </c:pt>
-                <c:pt idx="1">
-                  <c:v>12.79</c:v>
-                </c:pt>
-                <c:pt idx="2">
-                  <c:v>14.35</c:v>
-                </c:pt>
-                <c:pt idx="3">
-                  <c:v>14.65</c:v>
-                </c:pt>
-                <c:pt idx="4">
-                  <c:v>13.71</c:v>
-                </c:pt>
-                <c:pt idx="5">
-                  <c:v>14.45</c:v>
-                </c:pt>
-                <c:pt idx="6">
-                  <c:v>15.06</c:v>
-                </c:pt>
-                <c:pt idx="7">
-                  <c:v>14.43</c:v>
-                </c:pt>
-                <c:pt idx="8">
-                  <c:v>13.96</c:v>
-                </c:pt>
-                <c:pt idx="9">
-                  <c:v/>
-                </c:pt>
-                <c:pt idx="10">
-                  <c:v/>
-                </c:pt>
-                <c:pt idx="11">
-                  <c:v/>
-                </c:pt>
-              </c:numCache>
-            </c:numRef>
-          </c:val>
+          <c:smooth val="0"/>
         </c:ser>
         <c:dLbls>
           <c:numFmt formatCode="0.0" sourceLinked="0"/>
@@ -871,6 +4979,7 @@
               </a:pPr>
             </a:p>
           </c:txPr>
+          <c:dLblPos val="b"/>
           <c:showLegendKey val="0"/>
           <c:showVal val="1"/>
           <c:showCatName val="0"/>
@@ -879,12 +4988,11 @@
           <c:showBubbleSize val="0"/>
           <c:showLeaderLines val="0"/>
         </c:dLbls>
-        <c:gapWidth val="35"/>
-        <c:overlap val="-35"/>
+        <c:marker val="1"/>
         <c:axId val="2094734554"/>
         <c:axId val="2094734552"/>
         <c:axId val="2094734556"/>
-      </c:barChart>
+      </c:lineChart>
       <c:catAx>
         <c:axId val="2094734554"/>
         <c:scaling>
@@ -898,9 +5006,7 @@
         <c:tickLblPos val="low"/>
         <c:spPr>
           <a:ln w="12700" cap="flat">
-            <a:solidFill>
-              <a:srgbClr val="888888"/>
-            </a:solidFill>
+            <a:noFill/>
             <a:prstDash val="solid"/>
             <a:round/>
           </a:ln>
@@ -912,7 +5018,7 @@
             <a:pPr>
               <a:defRPr sz="1400" b="0" i="0" u="none" strike="noStrike">
                 <a:solidFill>
-                  <a:srgbClr val="1A1A1A"/>
+                  <a:srgbClr val="FFFFFF"/>
                 </a:solidFill>
                 <a:latin typeface="+mn-lt"/>
               </a:defRPr>
@@ -930,22 +5036,11 @@
         <c:axId val="2094734552"/>
         <c:scaling>
           <c:orientation val="minMax"/>
-          <c:max val="20"/>
-          <c:min val="0"/>
+          <c:max val="18"/>
+          <c:min val="10"/>
         </c:scaling>
         <c:delete val="0"/>
         <c:axPos val="l"/>
-        <c:majorGridlines>
-          <c:spPr>
-            <a:ln w="9525" cap="flat">
-              <a:solidFill>
-                <a:srgbClr val="D9D9D9"/>
-              </a:solidFill>
-              <a:prstDash val="solid"/>
-              <a:round/>
-            </a:ln>
-          </c:spPr>
-        </c:majorGridlines>
         <c:numFmt formatCode="$0&quot;M&quot;" sourceLinked="0"/>
         <c:majorTickMark val="out"/>
         <c:minorTickMark val="none"/>
@@ -964,459 +5059,7 @@
             <a:pPr>
               <a:defRPr sz="1400" b="0" i="0" u="none" strike="noStrike">
                 <a:solidFill>
-                  <a:srgbClr val="595959"/>
-                </a:solidFill>
-                <a:latin typeface="+mn-lt"/>
-              </a:defRPr>
-            </a:pPr>
-            <a:endParaRPr lang="en-US"/>
-          </a:p>
-        </c:txPr>
-        <c:crossAx val="2094734554"/>
-        <c:crosses val="autoZero"/>
-        <c:crossBetween val="between"/>
-        <c:majorUnit val="5"/>
-      </c:valAx>
-      <c:spPr>
-        <a:noFill/>
-        <a:ln>
-          <a:noFill/>
-        </a:ln>
-        <a:effectLst/>
-      </c:spPr>
-    </c:plotArea>
-    <c:legend>
-      <c:legendPos val="t"/>
-      <c:overlay val="0"/>
-      <c:txPr>
-        <a:bodyPr/>
-        <a:lstStyle/>
-        <a:p>
-          <a:pPr>
-            <a:defRPr sz="1400">
-              <a:solidFill>
-                <a:srgbClr val="1A1A1A"/>
-              </a:solidFill>
-              <a:latin typeface="+mn-lt"/>
-              <a:cs typeface="+mn-lt"/>
-            </a:defRPr>
-          </a:pPr>
-          <a:endParaRPr lang="en-US"/>
-        </a:p>
-      </c:txPr>
-    </c:legend>
-    <c:plotVisOnly val="1"/>
-    <c:dispBlanksAs val="span"/>
-  </c:chart>
-  <c:spPr>
-    <a:noFill/>
-    <a:ln>
-      <a:noFill/>
-    </a:ln>
-    <a:effectLst/>
-  </c:spPr>
-  <c:externalData r:id="rId1">
-    <c:autoUpdate val="0"/>
-  </c:externalData>
-</c:chartSpace>
-</file>
-
-<file path=ppt/charts/chart3.xml><?xml version="1.0" encoding="utf-8"?>
-<c:chartSpace xmlns:c="http://schemas.openxmlformats.org/drawingml/2006/chart" xmlns:a="http://schemas.openxmlformats.org/drawingml/2006/main" xmlns:r="http://schemas.openxmlformats.org/officeDocument/2006/relationships">
-  <c:date1904 val="0"/>
-  <c:roundedCorners val="1"/>
-  <c:chart>
-    <c:autoTitleDeleted val="1"/>
-    <c:plotArea>
-      <c:layout/>
-      <c:barChart>
-        <c:barDir val="col"/>
-        <c:grouping val="clustered"/>
-        <c:varyColors val="0"/>
-        <c:ser>
-          <c:idx val="0"/>
-          <c:order val="0"/>
-          <c:tx>
-            <c:strRef>
-              <c:f>Sheet1!$B$1</c:f>
-              <c:strCache>
-                <c:ptCount val="1"/>
-                <c:pt idx="0">
-                  <c:v>2025</c:v>
-                </c:pt>
-              </c:strCache>
-            </c:strRef>
-          </c:tx>
-          <c:spPr>
-            <a:solidFill>
-              <a:srgbClr val="9AA3AD"/>
-            </a:solidFill>
-            <a:effectLst/>
-          </c:spPr>
-          <c:invertIfNegative val="0"/>
-          <c:dLbls>
-            <c:numFmt formatCode="0.0" sourceLinked="0"/>
-            <c:txPr>
-              <a:bodyPr/>
-              <a:lstStyle/>
-              <a:p>
-                <a:pPr>
-                  <a:defRPr b="0" i="0" strike="noStrike" sz="1400" u="none">
-                    <a:solidFill>
-                      <a:srgbClr val="1A1A1A"/>
-                    </a:solidFill>
-                    <a:latin typeface="+mn-lt"/>
-                  </a:defRPr>
-                </a:pPr>
-              </a:p>
-            </c:txPr>
-            <c:showLegendKey val="0"/>
-            <c:showVal val="1"/>
-            <c:showCatName val="0"/>
-            <c:showSerName val="0"/>
-            <c:showPercent val="0"/>
-            <c:showBubbleSize val="0"/>
-            <c:showLeaderLines val="0"/>
-          </c:dLbls>
-          <c:cat>
-            <c:multiLvlStrRef>
-              <c:f>Sheet1!$A$2:$A$13</c:f>
-              <c:multiLvlStrCache>
-                <c:ptCount val="12"/>
-                <c:lvl>
-                  <c:pt idx="0">
-                    <c:v>Jan</c:v>
-                  </c:pt>
-                  <c:pt idx="1">
-                    <c:v>Feb</c:v>
-                  </c:pt>
-                  <c:pt idx="2">
-                    <c:v>Mar</c:v>
-                  </c:pt>
-                  <c:pt idx="3">
-                    <c:v>Apr</c:v>
-                  </c:pt>
-                  <c:pt idx="4">
-                    <c:v>May</c:v>
-                  </c:pt>
-                  <c:pt idx="5">
-                    <c:v>Jun</c:v>
-                  </c:pt>
-                  <c:pt idx="6">
-                    <c:v>Jul</c:v>
-                  </c:pt>
-                  <c:pt idx="7">
-                    <c:v>Aug</c:v>
-                  </c:pt>
-                  <c:pt idx="8">
-                    <c:v>Sep</c:v>
-                  </c:pt>
-                  <c:pt idx="9">
-                    <c:v>Oct</c:v>
-                  </c:pt>
-                  <c:pt idx="10">
-                    <c:v>Nov</c:v>
-                  </c:pt>
-                  <c:pt idx="11">
-                    <c:v>Dec</c:v>
-                  </c:pt>
-                </c:lvl>
-              </c:multiLvlStrCache>
-            </c:multiLvlStrRef>
-          </c:cat>
-          <c:val>
-            <c:numRef>
-              <c:f>Sheet1!$B$2:$B$13</c:f>
-              <c:numCache>
-                <c:formatCode>General</c:formatCode>
-                <c:ptCount val="12"/>
-                <c:pt idx="0">
-                  <c:v>7.05</c:v>
-                </c:pt>
-                <c:pt idx="1">
-                  <c:v>6.47</c:v>
-                </c:pt>
-                <c:pt idx="2">
-                  <c:v>6.6</c:v>
-                </c:pt>
-                <c:pt idx="3">
-                  <c:v>6.84</c:v>
-                </c:pt>
-                <c:pt idx="4">
-                  <c:v>6.67</c:v>
-                </c:pt>
-                <c:pt idx="5">
-                  <c:v>6.81</c:v>
-                </c:pt>
-                <c:pt idx="6">
-                  <c:v>6.97</c:v>
-                </c:pt>
-                <c:pt idx="7">
-                  <c:v>6.81</c:v>
-                </c:pt>
-                <c:pt idx="8">
-                  <c:v>6.54</c:v>
-                </c:pt>
-                <c:pt idx="9">
-                  <c:v>7.53</c:v>
-                </c:pt>
-                <c:pt idx="10">
-                  <c:v>5.91</c:v>
-                </c:pt>
-                <c:pt idx="11">
-                  <c:v>6.4</c:v>
-                </c:pt>
-              </c:numCache>
-            </c:numRef>
-          </c:val>
-        </c:ser>
-        <c:ser>
-          <c:idx val="1"/>
-          <c:order val="1"/>
-          <c:tx>
-            <c:strRef>
-              <c:f>Sheet1!$C$1</c:f>
-              <c:strCache>
-                <c:ptCount val="1"/>
-                <c:pt idx="0">
-                  <c:v>2026</c:v>
-                </c:pt>
-              </c:strCache>
-            </c:strRef>
-          </c:tx>
-          <c:spPr>
-            <a:solidFill>
-              <a:srgbClr val="2587C5"/>
-            </a:solidFill>
-            <a:effectLst/>
-          </c:spPr>
-          <c:invertIfNegative val="0"/>
-          <c:dLbls>
-            <c:numFmt formatCode="0.0" sourceLinked="0"/>
-            <c:txPr>
-              <a:bodyPr/>
-              <a:lstStyle/>
-              <a:p>
-                <a:pPr>
-                  <a:defRPr b="0" i="0" strike="noStrike" sz="1400" u="none">
-                    <a:solidFill>
-                      <a:srgbClr val="1A1A1A"/>
-                    </a:solidFill>
-                    <a:latin typeface="+mn-lt"/>
-                  </a:defRPr>
-                </a:pPr>
-              </a:p>
-            </c:txPr>
-            <c:showLegendKey val="0"/>
-            <c:showVal val="1"/>
-            <c:showCatName val="0"/>
-            <c:showSerName val="0"/>
-            <c:showPercent val="0"/>
-            <c:showBubbleSize val="0"/>
-            <c:showLeaderLines val="0"/>
-          </c:dLbls>
-          <c:cat>
-            <c:multiLvlStrRef>
-              <c:f>Sheet1!$A$2:$A$13</c:f>
-              <c:multiLvlStrCache>
-                <c:ptCount val="12"/>
-                <c:lvl>
-                  <c:pt idx="0">
-                    <c:v>Jan</c:v>
-                  </c:pt>
-                  <c:pt idx="1">
-                    <c:v>Feb</c:v>
-                  </c:pt>
-                  <c:pt idx="2">
-                    <c:v>Mar</c:v>
-                  </c:pt>
-                  <c:pt idx="3">
-                    <c:v>Apr</c:v>
-                  </c:pt>
-                  <c:pt idx="4">
-                    <c:v>May</c:v>
-                  </c:pt>
-                  <c:pt idx="5">
-                    <c:v>Jun</c:v>
-                  </c:pt>
-                  <c:pt idx="6">
-                    <c:v>Jul</c:v>
-                  </c:pt>
-                  <c:pt idx="7">
-                    <c:v>Aug</c:v>
-                  </c:pt>
-                  <c:pt idx="8">
-                    <c:v>Sep</c:v>
-                  </c:pt>
-                  <c:pt idx="9">
-                    <c:v>Oct</c:v>
-                  </c:pt>
-                  <c:pt idx="10">
-                    <c:v>Nov</c:v>
-                  </c:pt>
-                  <c:pt idx="11">
-                    <c:v>Dec</c:v>
-                  </c:pt>
-                </c:lvl>
-              </c:multiLvlStrCache>
-            </c:multiLvlStrRef>
-          </c:cat>
-          <c:val>
-            <c:numRef>
-              <c:f>Sheet1!$C$2:$C$13</c:f>
-              <c:numCache>
-                <c:formatCode>General</c:formatCode>
-                <c:ptCount val="12"/>
-                <c:pt idx="0">
-                  <c:v>6.41</c:v>
-                </c:pt>
-                <c:pt idx="1">
-                  <c:v>6.08</c:v>
-                </c:pt>
-                <c:pt idx="2">
-                  <c:v>6.77</c:v>
-                </c:pt>
-                <c:pt idx="3">
-                  <c:v>7.14</c:v>
-                </c:pt>
-                <c:pt idx="4">
-                  <c:v>6.41</c:v>
-                </c:pt>
-                <c:pt idx="5">
-                  <c:v>7.07</c:v>
-                </c:pt>
-                <c:pt idx="6">
-                  <c:v>7.66</c:v>
-                </c:pt>
-                <c:pt idx="7">
-                  <c:v>7.21</c:v>
-                </c:pt>
-                <c:pt idx="8">
-                  <c:v>7.18</c:v>
-                </c:pt>
-                <c:pt idx="9">
-                  <c:v/>
-                </c:pt>
-                <c:pt idx="10">
-                  <c:v/>
-                </c:pt>
-                <c:pt idx="11">
-                  <c:v/>
-                </c:pt>
-              </c:numCache>
-            </c:numRef>
-          </c:val>
-        </c:ser>
-        <c:dLbls>
-          <c:numFmt formatCode="0.0" sourceLinked="0"/>
-          <c:txPr>
-            <a:bodyPr/>
-            <a:lstStyle/>
-            <a:p>
-              <a:pPr>
-                <a:defRPr b="0" i="0" strike="noStrike" sz="1400" u="none">
-                  <a:solidFill>
-                    <a:srgbClr val="1A1A1A"/>
-                  </a:solidFill>
-                  <a:latin typeface="+mn-lt"/>
-                </a:defRPr>
-              </a:pPr>
-            </a:p>
-          </c:txPr>
-          <c:showLegendKey val="0"/>
-          <c:showVal val="1"/>
-          <c:showCatName val="0"/>
-          <c:showSerName val="0"/>
-          <c:showPercent val="0"/>
-          <c:showBubbleSize val="0"/>
-          <c:showLeaderLines val="0"/>
-        </c:dLbls>
-        <c:gapWidth val="35"/>
-        <c:overlap val="-35"/>
-        <c:axId val="2094734554"/>
-        <c:axId val="2094734552"/>
-        <c:axId val="2094734556"/>
-      </c:barChart>
-      <c:catAx>
-        <c:axId val="2094734554"/>
-        <c:scaling>
-          <c:orientation val="minMax"/>
-        </c:scaling>
-        <c:delete val="0"/>
-        <c:axPos val="b"/>
-        <c:numFmt formatCode="General" sourceLinked="1"/>
-        <c:majorTickMark val="out"/>
-        <c:minorTickMark val="none"/>
-        <c:tickLblPos val="low"/>
-        <c:spPr>
-          <a:ln w="12700" cap="flat">
-            <a:solidFill>
-              <a:srgbClr val="888888"/>
-            </a:solidFill>
-            <a:prstDash val="solid"/>
-            <a:round/>
-          </a:ln>
-        </c:spPr>
-        <c:txPr>
-          <a:bodyPr/>
-          <a:lstStyle/>
-          <a:p>
-            <a:pPr>
-              <a:defRPr sz="1400" b="0" i="0" u="none" strike="noStrike">
-                <a:solidFill>
-                  <a:srgbClr val="1A1A1A"/>
-                </a:solidFill>
-                <a:latin typeface="+mn-lt"/>
-              </a:defRPr>
-            </a:pPr>
-            <a:endParaRPr lang="en-US"/>
-          </a:p>
-        </c:txPr>
-        <c:crossAx val="2094734552"/>
-        <c:crosses val="min"/>
-        <c:auto val="1"/>
-        <c:lblAlgn val="ctr"/>
-        <c:noMultiLvlLbl val="1"/>
-      </c:catAx>
-      <c:valAx>
-        <c:axId val="2094734552"/>
-        <c:scaling>
-          <c:orientation val="minMax"/>
-          <c:max val="10"/>
-          <c:min val="0"/>
-        </c:scaling>
-        <c:delete val="0"/>
-        <c:axPos val="l"/>
-        <c:majorGridlines>
-          <c:spPr>
-            <a:ln w="9525" cap="flat">
-              <a:solidFill>
-                <a:srgbClr val="D9D9D9"/>
-              </a:solidFill>
-              <a:prstDash val="solid"/>
-              <a:round/>
-            </a:ln>
-          </c:spPr>
-        </c:majorGridlines>
-        <c:numFmt formatCode="$0&quot;M&quot;" sourceLinked="0"/>
-        <c:majorTickMark val="out"/>
-        <c:minorTickMark val="none"/>
-        <c:tickLblPos val="nextTo"/>
-        <c:spPr>
-          <a:ln w="12700" cap="flat">
-            <a:noFill/>
-            <a:prstDash val="solid"/>
-            <a:round/>
-          </a:ln>
-        </c:spPr>
-        <c:txPr>
-          <a:bodyPr/>
-          <a:lstStyle/>
-          <a:p>
-            <a:pPr>
-              <a:defRPr sz="1400" b="0" i="0" u="none" strike="noStrike">
-                <a:solidFill>
-                  <a:srgbClr val="595959"/>
+                  <a:srgbClr val="FFFFFF"/>
                 </a:solidFill>
                 <a:latin typeface="+mn-lt"/>
               </a:defRPr>
@@ -1430,38 +5073,26 @@
         <c:majorUnit val="2"/>
       </c:valAx>
       <c:spPr>
-        <a:noFill/>
+        <a:solidFill>
+          <a:srgbClr val="FFFFFF">
+            <a:alpha val="0"/>
+          </a:srgbClr>
+        </a:solidFill>
         <a:ln>
           <a:noFill/>
         </a:ln>
         <a:effectLst/>
       </c:spPr>
     </c:plotArea>
-    <c:legend>
-      <c:legendPos val="t"/>
-      <c:overlay val="0"/>
-      <c:txPr>
-        <a:bodyPr/>
-        <a:lstStyle/>
-        <a:p>
-          <a:pPr>
-            <a:defRPr sz="1400">
-              <a:solidFill>
-                <a:srgbClr val="1A1A1A"/>
-              </a:solidFill>
-              <a:latin typeface="+mn-lt"/>
-              <a:cs typeface="+mn-lt"/>
-            </a:defRPr>
-          </a:pPr>
-          <a:endParaRPr lang="en-US"/>
-        </a:p>
-      </c:txPr>
-    </c:legend>
     <c:plotVisOnly val="1"/>
     <c:dispBlanksAs val="span"/>
   </c:chart>
   <c:spPr>
-    <a:noFill/>
+    <a:solidFill>
+      <a:srgbClr val="FFFFFF">
+        <a:alpha val="0"/>
+      </a:srgbClr>
+    </a:solidFill>
     <a:ln>
       <a:noFill/>
     </a:ln>
@@ -13640,8 +17271,8 @@
           <p:nvPr/>
         </p:nvGraphicFramePr>
         <p:xfrm>
-          <a:off x="621792" y="2889504"/>
-          <a:ext cx="10945368" cy="3008376"/>
+          <a:off x="621792" y="3218688"/>
+          <a:ext cx="10945368" cy="2679192"/>
         </p:xfrm>
         <a:graphic xmlns:a="http://schemas.openxmlformats.org/drawingml/2006/main">
           <a:graphicData uri="http://schemas.openxmlformats.org/drawingml/2006/chart">
@@ -13649,9 +17280,247 @@
           </a:graphicData>
         </a:graphic>
       </p:graphicFrame>
-      <p:sp>
-        <p:nvSpPr>
-          <p:cNvPr id="18" name="Shape 15"/>
+      <p:graphicFrame>
+        <p:nvGraphicFramePr>
+          <p:cNvPr id="18" name="Chart 1" descr=""/>
+          <p:cNvGraphicFramePr/>
+          <p:nvPr/>
+        </p:nvGraphicFramePr>
+        <p:xfrm>
+          <a:off x="621792" y="3218688"/>
+          <a:ext cx="10945368" cy="2679192"/>
+        </p:xfrm>
+        <a:graphic xmlns:a="http://schemas.openxmlformats.org/drawingml/2006/main">
+          <a:graphicData uri="http://schemas.openxmlformats.org/drawingml/2006/chart">
+            <c:chart xmlns:c="http://schemas.openxmlformats.org/drawingml/2006/chart" r:id="rId2"/>
+          </a:graphicData>
+        </a:graphic>
+      </p:graphicFrame>
+      <p:graphicFrame>
+        <p:nvGraphicFramePr>
+          <p:cNvPr id="19" name="Chart 2" descr=""/>
+          <p:cNvGraphicFramePr/>
+          <p:nvPr/>
+        </p:nvGraphicFramePr>
+        <p:xfrm>
+          <a:off x="621792" y="3218688"/>
+          <a:ext cx="10945368" cy="2679192"/>
+        </p:xfrm>
+        <a:graphic xmlns:a="http://schemas.openxmlformats.org/drawingml/2006/main">
+          <a:graphicData uri="http://schemas.openxmlformats.org/drawingml/2006/chart">
+            <c:chart xmlns:c="http://schemas.openxmlformats.org/drawingml/2006/chart" r:id="rId3"/>
+          </a:graphicData>
+        </a:graphic>
+      </p:graphicFrame>
+      <p:graphicFrame>
+        <p:nvGraphicFramePr>
+          <p:cNvPr id="20" name="Chart 3" descr=""/>
+          <p:cNvGraphicFramePr/>
+          <p:nvPr/>
+        </p:nvGraphicFramePr>
+        <p:xfrm>
+          <a:off x="621792" y="3218688"/>
+          <a:ext cx="10945368" cy="2679192"/>
+        </p:xfrm>
+        <a:graphic xmlns:a="http://schemas.openxmlformats.org/drawingml/2006/main">
+          <a:graphicData uri="http://schemas.openxmlformats.org/drawingml/2006/chart">
+            <c:chart xmlns:c="http://schemas.openxmlformats.org/drawingml/2006/chart" r:id="rId4"/>
+          </a:graphicData>
+        </a:graphic>
+      </p:graphicFrame>
+      <p:graphicFrame>
+        <p:nvGraphicFramePr>
+          <p:cNvPr id="21" name="Chart 4" descr=""/>
+          <p:cNvGraphicFramePr/>
+          <p:nvPr/>
+        </p:nvGraphicFramePr>
+        <p:xfrm>
+          <a:off x="621792" y="3218688"/>
+          <a:ext cx="10945368" cy="2679192"/>
+        </p:xfrm>
+        <a:graphic xmlns:a="http://schemas.openxmlformats.org/drawingml/2006/main">
+          <a:graphicData uri="http://schemas.openxmlformats.org/drawingml/2006/chart">
+            <c:chart xmlns:c="http://schemas.openxmlformats.org/drawingml/2006/chart" r:id="rId5"/>
+          </a:graphicData>
+        </a:graphic>
+      </p:graphicFrame>
+      <p:graphicFrame>
+        <p:nvGraphicFramePr>
+          <p:cNvPr id="22" name="Chart 5" descr=""/>
+          <p:cNvGraphicFramePr/>
+          <p:nvPr/>
+        </p:nvGraphicFramePr>
+        <p:xfrm>
+          <a:off x="621792" y="3218688"/>
+          <a:ext cx="10945368" cy="2679192"/>
+        </p:xfrm>
+        <a:graphic xmlns:a="http://schemas.openxmlformats.org/drawingml/2006/main">
+          <a:graphicData uri="http://schemas.openxmlformats.org/drawingml/2006/chart">
+            <c:chart xmlns:c="http://schemas.openxmlformats.org/drawingml/2006/chart" r:id="rId6"/>
+          </a:graphicData>
+        </a:graphic>
+      </p:graphicFrame>
+      <p:sp>
+        <p:nvSpPr>
+          <p:cNvPr id="23" name="Shape 15"/>
+          <p:cNvSpPr/>
+          <p:nvPr/>
+        </p:nvSpPr>
+        <p:spPr>
+          <a:xfrm>
+            <a:off x="4951476" y="3049524"/>
+            <a:ext cx="310896" cy="45720"/>
+          </a:xfrm>
+          <a:prstGeom prst="rect">
+            <a:avLst/>
+          </a:prstGeom>
+          <a:solidFill>
+            <a:srgbClr val="9AA3AD"/>
+          </a:solidFill>
+          <a:ln/>
+        </p:spPr>
+      </p:sp>
+      <p:sp>
+        <p:nvSpPr>
+          <p:cNvPr id="24" name="Shape 16"/>
+          <p:cNvSpPr/>
+          <p:nvPr/>
+        </p:nvSpPr>
+        <p:spPr>
+          <a:xfrm>
+            <a:off x="5052060" y="3017520"/>
+            <a:ext cx="109728" cy="109728"/>
+          </a:xfrm>
+          <a:prstGeom prst="ellipse">
+            <a:avLst/>
+          </a:prstGeom>
+          <a:solidFill>
+            <a:srgbClr val="9AA3AD"/>
+          </a:solidFill>
+          <a:ln/>
+        </p:spPr>
+      </p:sp>
+      <p:sp>
+        <p:nvSpPr>
+          <p:cNvPr id="25" name="Text 17"/>
+          <p:cNvSpPr txBox="1"/>
+          <p:nvPr/>
+        </p:nvSpPr>
+        <p:spPr>
+          <a:xfrm>
+            <a:off x="5335524" y="2926080"/>
+            <a:ext cx="777240" cy="292608"/>
+          </a:xfrm>
+          <a:prstGeom prst="rect">
+            <a:avLst/>
+          </a:prstGeom>
+          <a:noFill/>
+          <a:ln/>
+        </p:spPr>
+        <p:txBody>
+          <a:bodyPr wrap="square" lIns="0" tIns="0" rIns="0" bIns="0" rtlCol="0" anchor="ctr"/>
+          <a:lstStyle/>
+          <a:p>
+            <a:pPr indent="0" marL="0">
+              <a:buNone/>
+            </a:pPr>
+            <a:r>
+              <a:rPr lang="en-US" sz="1400" dirty="0">
+                <a:solidFill>
+                  <a:srgbClr val="1A1A1A"/>
+                </a:solidFill>
+                <a:latin typeface="Inter" pitchFamily="34" charset="0"/>
+                <a:ea typeface="Inter" pitchFamily="34" charset="-122"/>
+                <a:cs typeface="Inter" pitchFamily="34" charset="-120"/>
+              </a:rPr>
+              <a:t>2025</a:t>
+            </a:r>
+            <a:endParaRPr lang="en-US" sz="1400" dirty="0"/>
+          </a:p>
+        </p:txBody>
+      </p:sp>
+      <p:sp>
+        <p:nvSpPr>
+          <p:cNvPr id="26" name="Shape 18"/>
+          <p:cNvSpPr/>
+          <p:nvPr/>
+        </p:nvSpPr>
+        <p:spPr>
+          <a:xfrm>
+            <a:off x="6185916" y="3049524"/>
+            <a:ext cx="310896" cy="45720"/>
+          </a:xfrm>
+          <a:prstGeom prst="rect">
+            <a:avLst/>
+          </a:prstGeom>
+          <a:solidFill>
+            <a:srgbClr val="2587C5"/>
+          </a:solidFill>
+          <a:ln/>
+        </p:spPr>
+      </p:sp>
+      <p:sp>
+        <p:nvSpPr>
+          <p:cNvPr id="27" name="Shape 19"/>
+          <p:cNvSpPr/>
+          <p:nvPr/>
+        </p:nvSpPr>
+        <p:spPr>
+          <a:xfrm>
+            <a:off x="6286500" y="3017520"/>
+            <a:ext cx="109728" cy="109728"/>
+          </a:xfrm>
+          <a:prstGeom prst="ellipse">
+            <a:avLst/>
+          </a:prstGeom>
+          <a:solidFill>
+            <a:srgbClr val="2587C5"/>
+          </a:solidFill>
+          <a:ln/>
+        </p:spPr>
+      </p:sp>
+      <p:sp>
+        <p:nvSpPr>
+          <p:cNvPr id="28" name="Text 20"/>
+          <p:cNvSpPr txBox="1"/>
+          <p:nvPr/>
+        </p:nvSpPr>
+        <p:spPr>
+          <a:xfrm>
+            <a:off x="6569964" y="2926080"/>
+            <a:ext cx="777240" cy="292608"/>
+          </a:xfrm>
+          <a:prstGeom prst="rect">
+            <a:avLst/>
+          </a:prstGeom>
+          <a:noFill/>
+          <a:ln/>
+        </p:spPr>
+        <p:txBody>
+          <a:bodyPr wrap="square" lIns="0" tIns="0" rIns="0" bIns="0" rtlCol="0" anchor="ctr"/>
+          <a:lstStyle/>
+          <a:p>
+            <a:pPr indent="0" marL="0">
+              <a:buNone/>
+            </a:pPr>
+            <a:r>
+              <a:rPr lang="en-US" sz="1400" dirty="0">
+                <a:solidFill>
+                  <a:srgbClr val="1A1A1A"/>
+                </a:solidFill>
+                <a:latin typeface="Inter" pitchFamily="34" charset="0"/>
+                <a:ea typeface="Inter" pitchFamily="34" charset="-122"/>
+                <a:cs typeface="Inter" pitchFamily="34" charset="-120"/>
+              </a:rPr>
+              <a:t>2026</a:t>
+            </a:r>
+            <a:endParaRPr lang="en-US" sz="1400" dirty="0"/>
+          </a:p>
+        </p:txBody>
+      </p:sp>
+      <p:sp>
+        <p:nvSpPr>
+          <p:cNvPr id="29" name="Shape 21"/>
           <p:cNvSpPr/>
           <p:nvPr/>
         </p:nvSpPr>
@@ -13671,7 +17540,7 @@
       </p:sp>
       <p:sp>
         <p:nvSpPr>
-          <p:cNvPr id="19" name="Text 16"/>
+          <p:cNvPr id="30" name="Text 22"/>
           <p:cNvSpPr txBox="1"/>
           <p:nvPr/>
         </p:nvSpPr>
@@ -25771,8 +29640,8 @@
           <p:nvPr/>
         </p:nvGraphicFramePr>
         <p:xfrm>
-          <a:off x="621792" y="2889504"/>
-          <a:ext cx="10945368" cy="3008376"/>
+          <a:off x="621792" y="3218688"/>
+          <a:ext cx="10945368" cy="2679192"/>
         </p:xfrm>
         <a:graphic xmlns:a="http://schemas.openxmlformats.org/drawingml/2006/main">
           <a:graphicData uri="http://schemas.openxmlformats.org/drawingml/2006/chart">
@@ -25780,9 +29649,215 @@
           </a:graphicData>
         </a:graphic>
       </p:graphicFrame>
-      <p:sp>
-        <p:nvSpPr>
-          <p:cNvPr id="18" name="Shape 15"/>
+      <p:graphicFrame>
+        <p:nvGraphicFramePr>
+          <p:cNvPr id="18" name="Chart 1" descr=""/>
+          <p:cNvGraphicFramePr/>
+          <p:nvPr/>
+        </p:nvGraphicFramePr>
+        <p:xfrm>
+          <a:off x="621792" y="3218688"/>
+          <a:ext cx="10945368" cy="2679192"/>
+        </p:xfrm>
+        <a:graphic xmlns:a="http://schemas.openxmlformats.org/drawingml/2006/main">
+          <a:graphicData uri="http://schemas.openxmlformats.org/drawingml/2006/chart">
+            <c:chart xmlns:c="http://schemas.openxmlformats.org/drawingml/2006/chart" r:id="rId2"/>
+          </a:graphicData>
+        </a:graphic>
+      </p:graphicFrame>
+      <p:graphicFrame>
+        <p:nvGraphicFramePr>
+          <p:cNvPr id="19" name="Chart 2" descr=""/>
+          <p:cNvGraphicFramePr/>
+          <p:nvPr/>
+        </p:nvGraphicFramePr>
+        <p:xfrm>
+          <a:off x="621792" y="3218688"/>
+          <a:ext cx="10945368" cy="2679192"/>
+        </p:xfrm>
+        <a:graphic xmlns:a="http://schemas.openxmlformats.org/drawingml/2006/main">
+          <a:graphicData uri="http://schemas.openxmlformats.org/drawingml/2006/chart">
+            <c:chart xmlns:c="http://schemas.openxmlformats.org/drawingml/2006/chart" r:id="rId3"/>
+          </a:graphicData>
+        </a:graphic>
+      </p:graphicFrame>
+      <p:graphicFrame>
+        <p:nvGraphicFramePr>
+          <p:cNvPr id="20" name="Chart 3" descr=""/>
+          <p:cNvGraphicFramePr/>
+          <p:nvPr/>
+        </p:nvGraphicFramePr>
+        <p:xfrm>
+          <a:off x="621792" y="3218688"/>
+          <a:ext cx="10945368" cy="2679192"/>
+        </p:xfrm>
+        <a:graphic xmlns:a="http://schemas.openxmlformats.org/drawingml/2006/main">
+          <a:graphicData uri="http://schemas.openxmlformats.org/drawingml/2006/chart">
+            <c:chart xmlns:c="http://schemas.openxmlformats.org/drawingml/2006/chart" r:id="rId4"/>
+          </a:graphicData>
+        </a:graphic>
+      </p:graphicFrame>
+      <p:sp>
+        <p:nvSpPr>
+          <p:cNvPr id="21" name="Shape 15"/>
+          <p:cNvSpPr/>
+          <p:nvPr/>
+        </p:nvSpPr>
+        <p:spPr>
+          <a:xfrm>
+            <a:off x="4951476" y="3049524"/>
+            <a:ext cx="310896" cy="45720"/>
+          </a:xfrm>
+          <a:prstGeom prst="rect">
+            <a:avLst/>
+          </a:prstGeom>
+          <a:solidFill>
+            <a:srgbClr val="9AA3AD"/>
+          </a:solidFill>
+          <a:ln/>
+        </p:spPr>
+      </p:sp>
+      <p:sp>
+        <p:nvSpPr>
+          <p:cNvPr id="22" name="Shape 16"/>
+          <p:cNvSpPr/>
+          <p:nvPr/>
+        </p:nvSpPr>
+        <p:spPr>
+          <a:xfrm>
+            <a:off x="5052060" y="3017520"/>
+            <a:ext cx="109728" cy="109728"/>
+          </a:xfrm>
+          <a:prstGeom prst="ellipse">
+            <a:avLst/>
+          </a:prstGeom>
+          <a:solidFill>
+            <a:srgbClr val="9AA3AD"/>
+          </a:solidFill>
+          <a:ln/>
+        </p:spPr>
+      </p:sp>
+      <p:sp>
+        <p:nvSpPr>
+          <p:cNvPr id="23" name="Text 17"/>
+          <p:cNvSpPr txBox="1"/>
+          <p:nvPr/>
+        </p:nvSpPr>
+        <p:spPr>
+          <a:xfrm>
+            <a:off x="5335524" y="2926080"/>
+            <a:ext cx="777240" cy="292608"/>
+          </a:xfrm>
+          <a:prstGeom prst="rect">
+            <a:avLst/>
+          </a:prstGeom>
+          <a:noFill/>
+          <a:ln/>
+        </p:spPr>
+        <p:txBody>
+          <a:bodyPr wrap="square" lIns="0" tIns="0" rIns="0" bIns="0" rtlCol="0" anchor="ctr"/>
+          <a:lstStyle/>
+          <a:p>
+            <a:pPr indent="0" marL="0">
+              <a:buNone/>
+            </a:pPr>
+            <a:r>
+              <a:rPr lang="en-US" sz="1400" dirty="0">
+                <a:solidFill>
+                  <a:srgbClr val="1A1A1A"/>
+                </a:solidFill>
+                <a:latin typeface="Inter" pitchFamily="34" charset="0"/>
+                <a:ea typeface="Inter" pitchFamily="34" charset="-122"/>
+                <a:cs typeface="Inter" pitchFamily="34" charset="-120"/>
+              </a:rPr>
+              <a:t>2025</a:t>
+            </a:r>
+            <a:endParaRPr lang="en-US" sz="1400" dirty="0"/>
+          </a:p>
+        </p:txBody>
+      </p:sp>
+      <p:sp>
+        <p:nvSpPr>
+          <p:cNvPr id="24" name="Shape 18"/>
+          <p:cNvSpPr/>
+          <p:nvPr/>
+        </p:nvSpPr>
+        <p:spPr>
+          <a:xfrm>
+            <a:off x="6185916" y="3049524"/>
+            <a:ext cx="310896" cy="45720"/>
+          </a:xfrm>
+          <a:prstGeom prst="rect">
+            <a:avLst/>
+          </a:prstGeom>
+          <a:solidFill>
+            <a:srgbClr val="2587C5"/>
+          </a:solidFill>
+          <a:ln/>
+        </p:spPr>
+      </p:sp>
+      <p:sp>
+        <p:nvSpPr>
+          <p:cNvPr id="25" name="Shape 19"/>
+          <p:cNvSpPr/>
+          <p:nvPr/>
+        </p:nvSpPr>
+        <p:spPr>
+          <a:xfrm>
+            <a:off x="6286500" y="3017520"/>
+            <a:ext cx="109728" cy="109728"/>
+          </a:xfrm>
+          <a:prstGeom prst="ellipse">
+            <a:avLst/>
+          </a:prstGeom>
+          <a:solidFill>
+            <a:srgbClr val="2587C5"/>
+          </a:solidFill>
+          <a:ln/>
+        </p:spPr>
+      </p:sp>
+      <p:sp>
+        <p:nvSpPr>
+          <p:cNvPr id="26" name="Text 20"/>
+          <p:cNvSpPr txBox="1"/>
+          <p:nvPr/>
+        </p:nvSpPr>
+        <p:spPr>
+          <a:xfrm>
+            <a:off x="6569964" y="2926080"/>
+            <a:ext cx="777240" cy="292608"/>
+          </a:xfrm>
+          <a:prstGeom prst="rect">
+            <a:avLst/>
+          </a:prstGeom>
+          <a:noFill/>
+          <a:ln/>
+        </p:spPr>
+        <p:txBody>
+          <a:bodyPr wrap="square" lIns="0" tIns="0" rIns="0" bIns="0" rtlCol="0" anchor="ctr"/>
+          <a:lstStyle/>
+          <a:p>
+            <a:pPr indent="0" marL="0">
+              <a:buNone/>
+            </a:pPr>
+            <a:r>
+              <a:rPr lang="en-US" sz="1400" dirty="0">
+                <a:solidFill>
+                  <a:srgbClr val="1A1A1A"/>
+                </a:solidFill>
+                <a:latin typeface="Inter" pitchFamily="34" charset="0"/>
+                <a:ea typeface="Inter" pitchFamily="34" charset="-122"/>
+                <a:cs typeface="Inter" pitchFamily="34" charset="-120"/>
+              </a:rPr>
+              <a:t>2026</a:t>
+            </a:r>
+            <a:endParaRPr lang="en-US" sz="1400" dirty="0"/>
+          </a:p>
+        </p:txBody>
+      </p:sp>
+      <p:sp>
+        <p:nvSpPr>
+          <p:cNvPr id="27" name="Shape 21"/>
           <p:cNvSpPr/>
           <p:nvPr/>
         </p:nvSpPr>
@@ -25802,7 +29877,7 @@
       </p:sp>
       <p:sp>
         <p:nvSpPr>
-          <p:cNvPr id="19" name="Text 16"/>
+          <p:cNvPr id="28" name="Text 22"/>
           <p:cNvSpPr txBox="1"/>
           <p:nvPr/>
         </p:nvSpPr>
@@ -36241,8 +40316,8 @@
           <p:nvPr/>
         </p:nvGraphicFramePr>
         <p:xfrm>
-          <a:off x="621792" y="2889504"/>
-          <a:ext cx="10945368" cy="3008376"/>
+          <a:off x="621792" y="3218688"/>
+          <a:ext cx="10945368" cy="2679192"/>
         </p:xfrm>
         <a:graphic xmlns:a="http://schemas.openxmlformats.org/drawingml/2006/main">
           <a:graphicData uri="http://schemas.openxmlformats.org/drawingml/2006/chart">
@@ -36250,9 +40325,247 @@
           </a:graphicData>
         </a:graphic>
       </p:graphicFrame>
-      <p:sp>
-        <p:nvSpPr>
-          <p:cNvPr id="18" name="Shape 15"/>
+      <p:graphicFrame>
+        <p:nvGraphicFramePr>
+          <p:cNvPr id="18" name="Chart 1" descr=""/>
+          <p:cNvGraphicFramePr/>
+          <p:nvPr/>
+        </p:nvGraphicFramePr>
+        <p:xfrm>
+          <a:off x="621792" y="3218688"/>
+          <a:ext cx="10945368" cy="2679192"/>
+        </p:xfrm>
+        <a:graphic xmlns:a="http://schemas.openxmlformats.org/drawingml/2006/main">
+          <a:graphicData uri="http://schemas.openxmlformats.org/drawingml/2006/chart">
+            <c:chart xmlns:c="http://schemas.openxmlformats.org/drawingml/2006/chart" r:id="rId2"/>
+          </a:graphicData>
+        </a:graphic>
+      </p:graphicFrame>
+      <p:graphicFrame>
+        <p:nvGraphicFramePr>
+          <p:cNvPr id="19" name="Chart 2" descr=""/>
+          <p:cNvGraphicFramePr/>
+          <p:nvPr/>
+        </p:nvGraphicFramePr>
+        <p:xfrm>
+          <a:off x="621792" y="3218688"/>
+          <a:ext cx="10945368" cy="2679192"/>
+        </p:xfrm>
+        <a:graphic xmlns:a="http://schemas.openxmlformats.org/drawingml/2006/main">
+          <a:graphicData uri="http://schemas.openxmlformats.org/drawingml/2006/chart">
+            <c:chart xmlns:c="http://schemas.openxmlformats.org/drawingml/2006/chart" r:id="rId3"/>
+          </a:graphicData>
+        </a:graphic>
+      </p:graphicFrame>
+      <p:graphicFrame>
+        <p:nvGraphicFramePr>
+          <p:cNvPr id="20" name="Chart 3" descr=""/>
+          <p:cNvGraphicFramePr/>
+          <p:nvPr/>
+        </p:nvGraphicFramePr>
+        <p:xfrm>
+          <a:off x="621792" y="3218688"/>
+          <a:ext cx="10945368" cy="2679192"/>
+        </p:xfrm>
+        <a:graphic xmlns:a="http://schemas.openxmlformats.org/drawingml/2006/main">
+          <a:graphicData uri="http://schemas.openxmlformats.org/drawingml/2006/chart">
+            <c:chart xmlns:c="http://schemas.openxmlformats.org/drawingml/2006/chart" r:id="rId4"/>
+          </a:graphicData>
+        </a:graphic>
+      </p:graphicFrame>
+      <p:graphicFrame>
+        <p:nvGraphicFramePr>
+          <p:cNvPr id="21" name="Chart 4" descr=""/>
+          <p:cNvGraphicFramePr/>
+          <p:nvPr/>
+        </p:nvGraphicFramePr>
+        <p:xfrm>
+          <a:off x="621792" y="3218688"/>
+          <a:ext cx="10945368" cy="2679192"/>
+        </p:xfrm>
+        <a:graphic xmlns:a="http://schemas.openxmlformats.org/drawingml/2006/main">
+          <a:graphicData uri="http://schemas.openxmlformats.org/drawingml/2006/chart">
+            <c:chart xmlns:c="http://schemas.openxmlformats.org/drawingml/2006/chart" r:id="rId5"/>
+          </a:graphicData>
+        </a:graphic>
+      </p:graphicFrame>
+      <p:graphicFrame>
+        <p:nvGraphicFramePr>
+          <p:cNvPr id="22" name="Chart 5" descr=""/>
+          <p:cNvGraphicFramePr/>
+          <p:nvPr/>
+        </p:nvGraphicFramePr>
+        <p:xfrm>
+          <a:off x="621792" y="3218688"/>
+          <a:ext cx="10945368" cy="2679192"/>
+        </p:xfrm>
+        <a:graphic xmlns:a="http://schemas.openxmlformats.org/drawingml/2006/main">
+          <a:graphicData uri="http://schemas.openxmlformats.org/drawingml/2006/chart">
+            <c:chart xmlns:c="http://schemas.openxmlformats.org/drawingml/2006/chart" r:id="rId6"/>
+          </a:graphicData>
+        </a:graphic>
+      </p:graphicFrame>
+      <p:sp>
+        <p:nvSpPr>
+          <p:cNvPr id="23" name="Shape 15"/>
+          <p:cNvSpPr/>
+          <p:nvPr/>
+        </p:nvSpPr>
+        <p:spPr>
+          <a:xfrm>
+            <a:off x="4951476" y="3049524"/>
+            <a:ext cx="310896" cy="45720"/>
+          </a:xfrm>
+          <a:prstGeom prst="rect">
+            <a:avLst/>
+          </a:prstGeom>
+          <a:solidFill>
+            <a:srgbClr val="9AA3AD"/>
+          </a:solidFill>
+          <a:ln/>
+        </p:spPr>
+      </p:sp>
+      <p:sp>
+        <p:nvSpPr>
+          <p:cNvPr id="24" name="Shape 16"/>
+          <p:cNvSpPr/>
+          <p:nvPr/>
+        </p:nvSpPr>
+        <p:spPr>
+          <a:xfrm>
+            <a:off x="5052060" y="3017520"/>
+            <a:ext cx="109728" cy="109728"/>
+          </a:xfrm>
+          <a:prstGeom prst="ellipse">
+            <a:avLst/>
+          </a:prstGeom>
+          <a:solidFill>
+            <a:srgbClr val="9AA3AD"/>
+          </a:solidFill>
+          <a:ln/>
+        </p:spPr>
+      </p:sp>
+      <p:sp>
+        <p:nvSpPr>
+          <p:cNvPr id="25" name="Text 17"/>
+          <p:cNvSpPr txBox="1"/>
+          <p:nvPr/>
+        </p:nvSpPr>
+        <p:spPr>
+          <a:xfrm>
+            <a:off x="5335524" y="2926080"/>
+            <a:ext cx="777240" cy="292608"/>
+          </a:xfrm>
+          <a:prstGeom prst="rect">
+            <a:avLst/>
+          </a:prstGeom>
+          <a:noFill/>
+          <a:ln/>
+        </p:spPr>
+        <p:txBody>
+          <a:bodyPr wrap="square" lIns="0" tIns="0" rIns="0" bIns="0" rtlCol="0" anchor="ctr"/>
+          <a:lstStyle/>
+          <a:p>
+            <a:pPr indent="0" marL="0">
+              <a:buNone/>
+            </a:pPr>
+            <a:r>
+              <a:rPr lang="en-US" sz="1400" dirty="0">
+                <a:solidFill>
+                  <a:srgbClr val="1A1A1A"/>
+                </a:solidFill>
+                <a:latin typeface="Inter" pitchFamily="34" charset="0"/>
+                <a:ea typeface="Inter" pitchFamily="34" charset="-122"/>
+                <a:cs typeface="Inter" pitchFamily="34" charset="-120"/>
+              </a:rPr>
+              <a:t>2025</a:t>
+            </a:r>
+            <a:endParaRPr lang="en-US" sz="1400" dirty="0"/>
+          </a:p>
+        </p:txBody>
+      </p:sp>
+      <p:sp>
+        <p:nvSpPr>
+          <p:cNvPr id="26" name="Shape 18"/>
+          <p:cNvSpPr/>
+          <p:nvPr/>
+        </p:nvSpPr>
+        <p:spPr>
+          <a:xfrm>
+            <a:off x="6185916" y="3049524"/>
+            <a:ext cx="310896" cy="45720"/>
+          </a:xfrm>
+          <a:prstGeom prst="rect">
+            <a:avLst/>
+          </a:prstGeom>
+          <a:solidFill>
+            <a:srgbClr val="2587C5"/>
+          </a:solidFill>
+          <a:ln/>
+        </p:spPr>
+      </p:sp>
+      <p:sp>
+        <p:nvSpPr>
+          <p:cNvPr id="27" name="Shape 19"/>
+          <p:cNvSpPr/>
+          <p:nvPr/>
+        </p:nvSpPr>
+        <p:spPr>
+          <a:xfrm>
+            <a:off x="6286500" y="3017520"/>
+            <a:ext cx="109728" cy="109728"/>
+          </a:xfrm>
+          <a:prstGeom prst="ellipse">
+            <a:avLst/>
+          </a:prstGeom>
+          <a:solidFill>
+            <a:srgbClr val="2587C5"/>
+          </a:solidFill>
+          <a:ln/>
+        </p:spPr>
+      </p:sp>
+      <p:sp>
+        <p:nvSpPr>
+          <p:cNvPr id="28" name="Text 20"/>
+          <p:cNvSpPr txBox="1"/>
+          <p:nvPr/>
+        </p:nvSpPr>
+        <p:spPr>
+          <a:xfrm>
+            <a:off x="6569964" y="2926080"/>
+            <a:ext cx="777240" cy="292608"/>
+          </a:xfrm>
+          <a:prstGeom prst="rect">
+            <a:avLst/>
+          </a:prstGeom>
+          <a:noFill/>
+          <a:ln/>
+        </p:spPr>
+        <p:txBody>
+          <a:bodyPr wrap="square" lIns="0" tIns="0" rIns="0" bIns="0" rtlCol="0" anchor="ctr"/>
+          <a:lstStyle/>
+          <a:p>
+            <a:pPr indent="0" marL="0">
+              <a:buNone/>
+            </a:pPr>
+            <a:r>
+              <a:rPr lang="en-US" sz="1400" dirty="0">
+                <a:solidFill>
+                  <a:srgbClr val="1A1A1A"/>
+                </a:solidFill>
+                <a:latin typeface="Inter" pitchFamily="34" charset="0"/>
+                <a:ea typeface="Inter" pitchFamily="34" charset="-122"/>
+                <a:cs typeface="Inter" pitchFamily="34" charset="-120"/>
+              </a:rPr>
+              <a:t>2026</a:t>
+            </a:r>
+            <a:endParaRPr lang="en-US" sz="1400" dirty="0"/>
+          </a:p>
+        </p:txBody>
+      </p:sp>
+      <p:sp>
+        <p:nvSpPr>
+          <p:cNvPr id="29" name="Shape 21"/>
           <p:cNvSpPr/>
           <p:nvPr/>
         </p:nvSpPr>
@@ -36272,7 +40585,7 @@
       </p:sp>
       <p:sp>
         <p:nvSpPr>
-          <p:cNvPr id="19" name="Text 16"/>
+          <p:cNvPr id="30" name="Text 22"/>
           <p:cNvSpPr txBox="1"/>
           <p:nvPr/>
         </p:nvSpPr>

--- a/day2-deck/decks/Fixed Ops Gross - House Style.pptx
+++ b/day2-deck/decks/Fixed Ops Gross - House Style.pptx
@@ -198,9 +198,9 @@
           </c:marker>
           <c:cat>
             <c:multiLvlStrRef>
-              <c:f>Sheet1!$A$2:$A$13</c:f>
+              <c:f>Sheet1!$A$2:$A$10</c:f>
               <c:multiLvlStrCache>
-                <c:ptCount val="12"/>
+                <c:ptCount val="9"/>
                 <c:lvl>
                   <c:pt idx="0">
                     <c:v>Jan</c:v>
@@ -229,25 +229,16 @@
                   <c:pt idx="8">
                     <c:v>Sep</c:v>
                   </c:pt>
-                  <c:pt idx="9">
-                    <c:v>Oct</c:v>
-                  </c:pt>
-                  <c:pt idx="10">
-                    <c:v>Nov</c:v>
-                  </c:pt>
-                  <c:pt idx="11">
-                    <c:v>Dec</c:v>
-                  </c:pt>
                 </c:lvl>
               </c:multiLvlStrCache>
             </c:multiLvlStrRef>
           </c:cat>
           <c:val>
             <c:numRef>
-              <c:f>Sheet1!$B$2:$B$13</c:f>
+              <c:f>Sheet1!$B$2:$B$10</c:f>
               <c:numCache>
                 <c:formatCode>General</c:formatCode>
-                <c:ptCount val="12"/>
+                <c:ptCount val="9"/>
                 <c:pt idx="0">
                   <c:v>19.88</c:v>
                 </c:pt>
@@ -274,15 +265,6 @@
                 </c:pt>
                 <c:pt idx="8">
                   <c:v>21.13</c:v>
-                </c:pt>
-                <c:pt idx="9">
-                  <c:v/>
-                </c:pt>
-                <c:pt idx="10">
-                  <c:v/>
-                </c:pt>
-                <c:pt idx="11">
-                  <c:v/>
                 </c:pt>
               </c:numCache>
             </c:numRef>
@@ -502,9 +484,9 @@
           </c:marker>
           <c:cat>
             <c:multiLvlStrRef>
-              <c:f>Sheet1!$A$2:$A$13</c:f>
+              <c:f>Sheet1!$A$2:$A$10</c:f>
               <c:multiLvlStrCache>
-                <c:ptCount val="12"/>
+                <c:ptCount val="9"/>
                 <c:lvl>
                   <c:pt idx="0">
                     <c:v>Jan</c:v>
@@ -533,25 +515,16 @@
                   <c:pt idx="8">
                     <c:v>Sep</c:v>
                   </c:pt>
-                  <c:pt idx="9">
-                    <c:v>Oct</c:v>
-                  </c:pt>
-                  <c:pt idx="10">
-                    <c:v>Nov</c:v>
-                  </c:pt>
-                  <c:pt idx="11">
-                    <c:v>Dec</c:v>
-                  </c:pt>
                 </c:lvl>
               </c:multiLvlStrCache>
             </c:multiLvlStrRef>
           </c:cat>
           <c:val>
             <c:numRef>
-              <c:f>Sheet1!$B$2:$B$13</c:f>
+              <c:f>Sheet1!$B$2:$B$10</c:f>
               <c:numCache>
                 <c:formatCode>General</c:formatCode>
-                <c:ptCount val="12"/>
+                <c:ptCount val="9"/>
                 <c:pt idx="0">
                   <c:v>13.41</c:v>
                 </c:pt>
@@ -578,15 +551,6 @@
                 </c:pt>
                 <c:pt idx="8">
                   <c:v>12.5</c:v>
-                </c:pt>
-                <c:pt idx="9">
-                  <c:v>13.74</c:v>
-                </c:pt>
-                <c:pt idx="10">
-                  <c:v>11.84</c:v>
-                </c:pt>
-                <c:pt idx="11">
-                  <c:v>12.92</c:v>
                 </c:pt>
               </c:numCache>
             </c:numRef>
@@ -667,8 +631,8 @@
         <c:axId val="2094734552"/>
         <c:scaling>
           <c:orientation val="minMax"/>
-          <c:max val="18"/>
-          <c:min val="10"/>
+          <c:max val="16"/>
+          <c:min val="11"/>
         </c:scaling>
         <c:delete val="0"/>
         <c:axPos val="l"/>
@@ -712,7 +676,7 @@
         <c:crossAx val="2094734554"/>
         <c:crosses val="autoZero"/>
         <c:crossBetween val="between"/>
-        <c:majorUnit val="2"/>
+        <c:majorUnit val="1"/>
       </c:valAx>
       <c:spPr>
         <a:solidFill>
@@ -827,9 +791,9 @@
           </c:marker>
           <c:cat>
             <c:multiLvlStrRef>
-              <c:f>Sheet1!$A$2:$A$13</c:f>
+              <c:f>Sheet1!$A$2:$A$10</c:f>
               <c:multiLvlStrCache>
-                <c:ptCount val="12"/>
+                <c:ptCount val="9"/>
                 <c:lvl>
                   <c:pt idx="0">
                     <c:v>Jan</c:v>
@@ -858,25 +822,16 @@
                   <c:pt idx="8">
                     <c:v>Sep</c:v>
                   </c:pt>
-                  <c:pt idx="9">
-                    <c:v>Oct</c:v>
-                  </c:pt>
-                  <c:pt idx="10">
-                    <c:v>Nov</c:v>
-                  </c:pt>
-                  <c:pt idx="11">
-                    <c:v>Dec</c:v>
-                  </c:pt>
                 </c:lvl>
               </c:multiLvlStrCache>
             </c:multiLvlStrRef>
           </c:cat>
           <c:val>
             <c:numRef>
-              <c:f>Sheet1!$B$2:$B$13</c:f>
+              <c:f>Sheet1!$B$2:$B$10</c:f>
               <c:numCache>
                 <c:formatCode>General</c:formatCode>
-                <c:ptCount val="12"/>
+                <c:ptCount val="9"/>
                 <c:pt idx="0">
                   <c:v>6.41</c:v>
                 </c:pt>
@@ -903,15 +858,6 @@
                 </c:pt>
                 <c:pt idx="8">
                   <c:v>7.18</c:v>
-                </c:pt>
-                <c:pt idx="9">
-                  <c:v/>
-                </c:pt>
-                <c:pt idx="10">
-                  <c:v/>
-                </c:pt>
-                <c:pt idx="11">
-                  <c:v/>
                 </c:pt>
               </c:numCache>
             </c:numRef>
@@ -1128,9 +1074,9 @@
           </c:marker>
           <c:cat>
             <c:multiLvlStrRef>
-              <c:f>Sheet1!$A$2:$A$13</c:f>
+              <c:f>Sheet1!$A$2:$A$10</c:f>
               <c:multiLvlStrCache>
-                <c:ptCount val="12"/>
+                <c:ptCount val="9"/>
                 <c:lvl>
                   <c:pt idx="0">
                     <c:v>Jan</c:v>
@@ -1159,25 +1105,16 @@
                   <c:pt idx="8">
                     <c:v>Sep</c:v>
                   </c:pt>
-                  <c:pt idx="9">
-                    <c:v>Oct</c:v>
-                  </c:pt>
-                  <c:pt idx="10">
-                    <c:v>Nov</c:v>
-                  </c:pt>
-                  <c:pt idx="11">
-                    <c:v>Dec</c:v>
-                  </c:pt>
                 </c:lvl>
               </c:multiLvlStrCache>
             </c:multiLvlStrRef>
           </c:cat>
           <c:val>
             <c:numRef>
-              <c:f>Sheet1!$B$2:$B$13</c:f>
+              <c:f>Sheet1!$B$2:$B$10</c:f>
               <c:numCache>
                 <c:formatCode>General</c:formatCode>
-                <c:ptCount val="12"/>
+                <c:ptCount val="9"/>
                 <c:pt idx="0">
                   <c:v/>
                 </c:pt>
@@ -1204,15 +1141,6 @@
                 </c:pt>
                 <c:pt idx="8">
                   <c:v>7.18</c:v>
-                </c:pt>
-                <c:pt idx="9">
-                  <c:v/>
-                </c:pt>
-                <c:pt idx="10">
-                  <c:v/>
-                </c:pt>
-                <c:pt idx="11">
-                  <c:v/>
                 </c:pt>
               </c:numCache>
             </c:numRef>
@@ -1438,9 +1366,9 @@
           </c:marker>
           <c:cat>
             <c:multiLvlStrRef>
-              <c:f>Sheet1!$A$2:$A$13</c:f>
+              <c:f>Sheet1!$A$2:$A$10</c:f>
               <c:multiLvlStrCache>
-                <c:ptCount val="12"/>
+                <c:ptCount val="9"/>
                 <c:lvl>
                   <c:pt idx="0">
                     <c:v>Jan</c:v>
@@ -1469,25 +1397,16 @@
                   <c:pt idx="8">
                     <c:v>Sep</c:v>
                   </c:pt>
-                  <c:pt idx="9">
-                    <c:v>Oct</c:v>
-                  </c:pt>
-                  <c:pt idx="10">
-                    <c:v>Nov</c:v>
-                  </c:pt>
-                  <c:pt idx="11">
-                    <c:v>Dec</c:v>
-                  </c:pt>
                 </c:lvl>
               </c:multiLvlStrCache>
             </c:multiLvlStrRef>
           </c:cat>
           <c:val>
             <c:numRef>
-              <c:f>Sheet1!$B$2:$B$13</c:f>
+              <c:f>Sheet1!$B$2:$B$10</c:f>
               <c:numCache>
                 <c:formatCode>General</c:formatCode>
-                <c:ptCount val="12"/>
+                <c:ptCount val="9"/>
                 <c:pt idx="0">
                   <c:v>6.41</c:v>
                 </c:pt>
@@ -1513,15 +1432,6 @@
                   <c:v/>
                 </c:pt>
                 <c:pt idx="8">
-                  <c:v/>
-                </c:pt>
-                <c:pt idx="9">
-                  <c:v/>
-                </c:pt>
-                <c:pt idx="10">
-                  <c:v/>
-                </c:pt>
-                <c:pt idx="11">
                   <c:v/>
                 </c:pt>
               </c:numCache>
@@ -1748,9 +1658,9 @@
           </c:marker>
           <c:cat>
             <c:multiLvlStrRef>
-              <c:f>Sheet1!$A$2:$A$13</c:f>
+              <c:f>Sheet1!$A$2:$A$10</c:f>
               <c:multiLvlStrCache>
-                <c:ptCount val="12"/>
+                <c:ptCount val="9"/>
                 <c:lvl>
                   <c:pt idx="0">
                     <c:v>Jan</c:v>
@@ -1779,25 +1689,16 @@
                   <c:pt idx="8">
                     <c:v>Sep</c:v>
                   </c:pt>
-                  <c:pt idx="9">
-                    <c:v>Oct</c:v>
-                  </c:pt>
-                  <c:pt idx="10">
-                    <c:v>Nov</c:v>
-                  </c:pt>
-                  <c:pt idx="11">
-                    <c:v>Dec</c:v>
-                  </c:pt>
                 </c:lvl>
               </c:multiLvlStrCache>
             </c:multiLvlStrRef>
           </c:cat>
           <c:val>
             <c:numRef>
-              <c:f>Sheet1!$B$2:$B$13</c:f>
+              <c:f>Sheet1!$B$2:$B$10</c:f>
               <c:numCache>
                 <c:formatCode>General</c:formatCode>
-                <c:ptCount val="12"/>
+                <c:ptCount val="9"/>
                 <c:pt idx="0">
                   <c:v>7.05</c:v>
                 </c:pt>
@@ -1823,15 +1724,6 @@
                   <c:v/>
                 </c:pt>
                 <c:pt idx="8">
-                  <c:v/>
-                </c:pt>
-                <c:pt idx="9">
-                  <c:v/>
-                </c:pt>
-                <c:pt idx="10">
-                  <c:v/>
-                </c:pt>
-                <c:pt idx="11">
                   <c:v/>
                 </c:pt>
               </c:numCache>
@@ -2058,9 +1950,9 @@
           </c:marker>
           <c:cat>
             <c:multiLvlStrRef>
-              <c:f>Sheet1!$A$2:$A$13</c:f>
+              <c:f>Sheet1!$A$2:$A$10</c:f>
               <c:multiLvlStrCache>
-                <c:ptCount val="12"/>
+                <c:ptCount val="9"/>
                 <c:lvl>
                   <c:pt idx="0">
                     <c:v>Jan</c:v>
@@ -2089,25 +1981,16 @@
                   <c:pt idx="8">
                     <c:v>Sep</c:v>
                   </c:pt>
-                  <c:pt idx="9">
-                    <c:v>Oct</c:v>
-                  </c:pt>
-                  <c:pt idx="10">
-                    <c:v>Nov</c:v>
-                  </c:pt>
-                  <c:pt idx="11">
-                    <c:v>Dec</c:v>
-                  </c:pt>
                 </c:lvl>
               </c:multiLvlStrCache>
             </c:multiLvlStrRef>
           </c:cat>
           <c:val>
             <c:numRef>
-              <c:f>Sheet1!$B$2:$B$13</c:f>
+              <c:f>Sheet1!$B$2:$B$10</c:f>
               <c:numCache>
                 <c:formatCode>General</c:formatCode>
-                <c:ptCount val="12"/>
+                <c:ptCount val="9"/>
                 <c:pt idx="0">
                   <c:v/>
                 </c:pt>
@@ -2134,15 +2017,6 @@
                 </c:pt>
                 <c:pt idx="8">
                   <c:v>6.54</c:v>
-                </c:pt>
-                <c:pt idx="9">
-                  <c:v>7.53</c:v>
-                </c:pt>
-                <c:pt idx="10">
-                  <c:v>5.91</c:v>
-                </c:pt>
-                <c:pt idx="11">
-                  <c:v>6.4</c:v>
                 </c:pt>
               </c:numCache>
             </c:numRef>
@@ -2371,9 +2245,9 @@
           </c:marker>
           <c:cat>
             <c:multiLvlStrRef>
-              <c:f>Sheet1!$A$2:$A$13</c:f>
+              <c:f>Sheet1!$A$2:$A$10</c:f>
               <c:multiLvlStrCache>
-                <c:ptCount val="12"/>
+                <c:ptCount val="9"/>
                 <c:lvl>
                   <c:pt idx="0">
                     <c:v>Jan</c:v>
@@ -2402,25 +2276,16 @@
                   <c:pt idx="8">
                     <c:v>Sep</c:v>
                   </c:pt>
-                  <c:pt idx="9">
-                    <c:v>Oct</c:v>
-                  </c:pt>
-                  <c:pt idx="10">
-                    <c:v>Nov</c:v>
-                  </c:pt>
-                  <c:pt idx="11">
-                    <c:v>Dec</c:v>
-                  </c:pt>
                 </c:lvl>
               </c:multiLvlStrCache>
             </c:multiLvlStrRef>
           </c:cat>
           <c:val>
             <c:numRef>
-              <c:f>Sheet1!$B$2:$B$13</c:f>
+              <c:f>Sheet1!$B$2:$B$10</c:f>
               <c:numCache>
                 <c:formatCode>General</c:formatCode>
-                <c:ptCount val="12"/>
+                <c:ptCount val="9"/>
                 <c:pt idx="0">
                   <c:v>7.05</c:v>
                 </c:pt>
@@ -2447,15 +2312,6 @@
                 </c:pt>
                 <c:pt idx="8">
                   <c:v>6.54</c:v>
-                </c:pt>
-                <c:pt idx="9">
-                  <c:v>7.53</c:v>
-                </c:pt>
-                <c:pt idx="10">
-                  <c:v>5.91</c:v>
-                </c:pt>
-                <c:pt idx="11">
-                  <c:v>6.4</c:v>
                 </c:pt>
               </c:numCache>
             </c:numRef>
@@ -2693,9 +2549,9 @@
           </c:marker>
           <c:cat>
             <c:multiLvlStrRef>
-              <c:f>Sheet1!$A$2:$A$13</c:f>
+              <c:f>Sheet1!$A$2:$A$10</c:f>
               <c:multiLvlStrCache>
-                <c:ptCount val="12"/>
+                <c:ptCount val="9"/>
                 <c:lvl>
                   <c:pt idx="0">
                     <c:v>Jan</c:v>
@@ -2724,25 +2580,16 @@
                   <c:pt idx="8">
                     <c:v>Sep</c:v>
                   </c:pt>
-                  <c:pt idx="9">
-                    <c:v>Oct</c:v>
-                  </c:pt>
-                  <c:pt idx="10">
-                    <c:v>Nov</c:v>
-                  </c:pt>
-                  <c:pt idx="11">
-                    <c:v>Dec</c:v>
-                  </c:pt>
                 </c:lvl>
               </c:multiLvlStrCache>
             </c:multiLvlStrRef>
           </c:cat>
           <c:val>
             <c:numRef>
-              <c:f>Sheet1!$B$2:$B$13</c:f>
+              <c:f>Sheet1!$B$2:$B$10</c:f>
               <c:numCache>
                 <c:formatCode>General</c:formatCode>
-                <c:ptCount val="12"/>
+                <c:ptCount val="9"/>
                 <c:pt idx="0">
                   <c:v/>
                 </c:pt>
@@ -2769,15 +2616,6 @@
                 </c:pt>
                 <c:pt idx="8">
                   <c:v>21.13</c:v>
-                </c:pt>
-                <c:pt idx="9">
-                  <c:v/>
-                </c:pt>
-                <c:pt idx="10">
-                  <c:v/>
-                </c:pt>
-                <c:pt idx="11">
-                  <c:v/>
                 </c:pt>
               </c:numCache>
             </c:numRef>
@@ -3003,9 +2841,9 @@
           </c:marker>
           <c:cat>
             <c:multiLvlStrRef>
-              <c:f>Sheet1!$A$2:$A$13</c:f>
+              <c:f>Sheet1!$A$2:$A$10</c:f>
               <c:multiLvlStrCache>
-                <c:ptCount val="12"/>
+                <c:ptCount val="9"/>
                 <c:lvl>
                   <c:pt idx="0">
                     <c:v>Jan</c:v>
@@ -3034,25 +2872,16 @@
                   <c:pt idx="8">
                     <c:v>Sep</c:v>
                   </c:pt>
-                  <c:pt idx="9">
-                    <c:v>Oct</c:v>
-                  </c:pt>
-                  <c:pt idx="10">
-                    <c:v>Nov</c:v>
-                  </c:pt>
-                  <c:pt idx="11">
-                    <c:v>Dec</c:v>
-                  </c:pt>
                 </c:lvl>
               </c:multiLvlStrCache>
             </c:multiLvlStrRef>
           </c:cat>
           <c:val>
             <c:numRef>
-              <c:f>Sheet1!$B$2:$B$13</c:f>
+              <c:f>Sheet1!$B$2:$B$10</c:f>
               <c:numCache>
                 <c:formatCode>General</c:formatCode>
-                <c:ptCount val="12"/>
+                <c:ptCount val="9"/>
                 <c:pt idx="0">
                   <c:v>19.88</c:v>
                 </c:pt>
@@ -3078,15 +2907,6 @@
                   <c:v/>
                 </c:pt>
                 <c:pt idx="8">
-                  <c:v/>
-                </c:pt>
-                <c:pt idx="9">
-                  <c:v/>
-                </c:pt>
-                <c:pt idx="10">
-                  <c:v/>
-                </c:pt>
-                <c:pt idx="11">
                   <c:v/>
                 </c:pt>
               </c:numCache>
@@ -3313,9 +3133,9 @@
           </c:marker>
           <c:cat>
             <c:multiLvlStrRef>
-              <c:f>Sheet1!$A$2:$A$13</c:f>
+              <c:f>Sheet1!$A$2:$A$10</c:f>
               <c:multiLvlStrCache>
-                <c:ptCount val="12"/>
+                <c:ptCount val="9"/>
                 <c:lvl>
                   <c:pt idx="0">
                     <c:v>Jan</c:v>
@@ -3344,25 +3164,16 @@
                   <c:pt idx="8">
                     <c:v>Sep</c:v>
                   </c:pt>
-                  <c:pt idx="9">
-                    <c:v>Oct</c:v>
-                  </c:pt>
-                  <c:pt idx="10">
-                    <c:v>Nov</c:v>
-                  </c:pt>
-                  <c:pt idx="11">
-                    <c:v>Dec</c:v>
-                  </c:pt>
                 </c:lvl>
               </c:multiLvlStrCache>
             </c:multiLvlStrRef>
           </c:cat>
           <c:val>
             <c:numRef>
-              <c:f>Sheet1!$B$2:$B$13</c:f>
+              <c:f>Sheet1!$B$2:$B$10</c:f>
               <c:numCache>
                 <c:formatCode>General</c:formatCode>
-                <c:ptCount val="12"/>
+                <c:ptCount val="9"/>
                 <c:pt idx="0">
                   <c:v>20.46</c:v>
                 </c:pt>
@@ -3388,15 +3199,6 @@
                   <c:v/>
                 </c:pt>
                 <c:pt idx="8">
-                  <c:v/>
-                </c:pt>
-                <c:pt idx="9">
-                  <c:v/>
-                </c:pt>
-                <c:pt idx="10">
-                  <c:v/>
-                </c:pt>
-                <c:pt idx="11">
                   <c:v/>
                 </c:pt>
               </c:numCache>
@@ -3623,9 +3425,9 @@
           </c:marker>
           <c:cat>
             <c:multiLvlStrRef>
-              <c:f>Sheet1!$A$2:$A$13</c:f>
+              <c:f>Sheet1!$A$2:$A$10</c:f>
               <c:multiLvlStrCache>
-                <c:ptCount val="12"/>
+                <c:ptCount val="9"/>
                 <c:lvl>
                   <c:pt idx="0">
                     <c:v>Jan</c:v>
@@ -3654,25 +3456,16 @@
                   <c:pt idx="8">
                     <c:v>Sep</c:v>
                   </c:pt>
-                  <c:pt idx="9">
-                    <c:v>Oct</c:v>
-                  </c:pt>
-                  <c:pt idx="10">
-                    <c:v>Nov</c:v>
-                  </c:pt>
-                  <c:pt idx="11">
-                    <c:v>Dec</c:v>
-                  </c:pt>
                 </c:lvl>
               </c:multiLvlStrCache>
             </c:multiLvlStrRef>
           </c:cat>
           <c:val>
             <c:numRef>
-              <c:f>Sheet1!$B$2:$B$13</c:f>
+              <c:f>Sheet1!$B$2:$B$10</c:f>
               <c:numCache>
                 <c:formatCode>General</c:formatCode>
-                <c:ptCount val="12"/>
+                <c:ptCount val="9"/>
                 <c:pt idx="0">
                   <c:v/>
                 </c:pt>
@@ -3699,15 +3492,6 @@
                 </c:pt>
                 <c:pt idx="8">
                   <c:v>19.03</c:v>
-                </c:pt>
-                <c:pt idx="9">
-                  <c:v>21.27</c:v>
-                </c:pt>
-                <c:pt idx="10">
-                  <c:v>17.74</c:v>
-                </c:pt>
-                <c:pt idx="11">
-                  <c:v>19.32</c:v>
                 </c:pt>
               </c:numCache>
             </c:numRef>
@@ -3936,9 +3720,9 @@
           </c:marker>
           <c:cat>
             <c:multiLvlStrRef>
-              <c:f>Sheet1!$A$2:$A$13</c:f>
+              <c:f>Sheet1!$A$2:$A$10</c:f>
               <c:multiLvlStrCache>
-                <c:ptCount val="12"/>
+                <c:ptCount val="9"/>
                 <c:lvl>
                   <c:pt idx="0">
                     <c:v>Jan</c:v>
@@ -3967,25 +3751,16 @@
                   <c:pt idx="8">
                     <c:v>Sep</c:v>
                   </c:pt>
-                  <c:pt idx="9">
-                    <c:v>Oct</c:v>
-                  </c:pt>
-                  <c:pt idx="10">
-                    <c:v>Nov</c:v>
-                  </c:pt>
-                  <c:pt idx="11">
-                    <c:v>Dec</c:v>
-                  </c:pt>
                 </c:lvl>
               </c:multiLvlStrCache>
             </c:multiLvlStrRef>
           </c:cat>
           <c:val>
             <c:numRef>
-              <c:f>Sheet1!$B$2:$B$13</c:f>
+              <c:f>Sheet1!$B$2:$B$10</c:f>
               <c:numCache>
                 <c:formatCode>General</c:formatCode>
-                <c:ptCount val="12"/>
+                <c:ptCount val="9"/>
                 <c:pt idx="0">
                   <c:v>20.46</c:v>
                 </c:pt>
@@ -4012,15 +3787,6 @@
                 </c:pt>
                 <c:pt idx="8">
                   <c:v>19.03</c:v>
-                </c:pt>
-                <c:pt idx="9">
-                  <c:v>21.27</c:v>
-                </c:pt>
-                <c:pt idx="10">
-                  <c:v>17.74</c:v>
-                </c:pt>
-                <c:pt idx="11">
-                  <c:v>19.32</c:v>
                 </c:pt>
               </c:numCache>
             </c:numRef>
@@ -4261,9 +4027,9 @@
           </c:marker>
           <c:cat>
             <c:multiLvlStrRef>
-              <c:f>Sheet1!$A$2:$A$13</c:f>
+              <c:f>Sheet1!$A$2:$A$10</c:f>
               <c:multiLvlStrCache>
-                <c:ptCount val="12"/>
+                <c:ptCount val="9"/>
                 <c:lvl>
                   <c:pt idx="0">
                     <c:v>Jan</c:v>
@@ -4292,25 +4058,16 @@
                   <c:pt idx="8">
                     <c:v>Sep</c:v>
                   </c:pt>
-                  <c:pt idx="9">
-                    <c:v>Oct</c:v>
-                  </c:pt>
-                  <c:pt idx="10">
-                    <c:v>Nov</c:v>
-                  </c:pt>
-                  <c:pt idx="11">
-                    <c:v>Dec</c:v>
-                  </c:pt>
                 </c:lvl>
               </c:multiLvlStrCache>
             </c:multiLvlStrRef>
           </c:cat>
           <c:val>
             <c:numRef>
-              <c:f>Sheet1!$B$2:$B$13</c:f>
+              <c:f>Sheet1!$B$2:$B$10</c:f>
               <c:numCache>
                 <c:formatCode>General</c:formatCode>
-                <c:ptCount val="12"/>
+                <c:ptCount val="9"/>
                 <c:pt idx="0">
                   <c:v>13.47</c:v>
                 </c:pt>
@@ -4337,15 +4094,6 @@
                 </c:pt>
                 <c:pt idx="8">
                   <c:v>13.96</c:v>
-                </c:pt>
-                <c:pt idx="9">
-                  <c:v/>
-                </c:pt>
-                <c:pt idx="10">
-                  <c:v/>
-                </c:pt>
-                <c:pt idx="11">
-                  <c:v/>
                 </c:pt>
               </c:numCache>
             </c:numRef>
@@ -4424,8 +4172,8 @@
         <c:axId val="2094734552"/>
         <c:scaling>
           <c:orientation val="minMax"/>
-          <c:max val="18"/>
-          <c:min val="10"/>
+          <c:max val="16"/>
+          <c:min val="11"/>
         </c:scaling>
         <c:delete val="0"/>
         <c:axPos val="l"/>
@@ -4458,7 +4206,7 @@
         <c:crossAx val="2094734554"/>
         <c:crosses val="autoZero"/>
         <c:crossBetween val="between"/>
-        <c:majorUnit val="2"/>
+        <c:majorUnit val="1"/>
       </c:valAx>
       <c:spPr>
         <a:noFill/>
@@ -4562,9 +4310,9 @@
           </c:marker>
           <c:cat>
             <c:multiLvlStrRef>
-              <c:f>Sheet1!$A$2:$A$13</c:f>
+              <c:f>Sheet1!$A$2:$A$10</c:f>
               <c:multiLvlStrCache>
-                <c:ptCount val="12"/>
+                <c:ptCount val="9"/>
                 <c:lvl>
                   <c:pt idx="0">
                     <c:v>Jan</c:v>
@@ -4593,25 +4341,16 @@
                   <c:pt idx="8">
                     <c:v>Sep</c:v>
                   </c:pt>
-                  <c:pt idx="9">
-                    <c:v>Oct</c:v>
-                  </c:pt>
-                  <c:pt idx="10">
-                    <c:v>Nov</c:v>
-                  </c:pt>
-                  <c:pt idx="11">
-                    <c:v>Dec</c:v>
-                  </c:pt>
                 </c:lvl>
               </c:multiLvlStrCache>
             </c:multiLvlStrRef>
           </c:cat>
           <c:val>
             <c:numRef>
-              <c:f>Sheet1!$B$2:$B$13</c:f>
+              <c:f>Sheet1!$B$2:$B$10</c:f>
               <c:numCache>
                 <c:formatCode>General</c:formatCode>
-                <c:ptCount val="12"/>
+                <c:ptCount val="9"/>
                 <c:pt idx="0">
                   <c:v>13.47</c:v>
                 </c:pt>
@@ -4638,15 +4377,6 @@
                 </c:pt>
                 <c:pt idx="8">
                   <c:v>13.96</c:v>
-                </c:pt>
-                <c:pt idx="9">
-                  <c:v/>
-                </c:pt>
-                <c:pt idx="10">
-                  <c:v/>
-                </c:pt>
-                <c:pt idx="11">
-                  <c:v/>
                 </c:pt>
               </c:numCache>
             </c:numRef>
@@ -4726,8 +4456,8 @@
         <c:axId val="2094734552"/>
         <c:scaling>
           <c:orientation val="minMax"/>
-          <c:max val="18"/>
-          <c:min val="10"/>
+          <c:max val="16"/>
+          <c:min val="11"/>
         </c:scaling>
         <c:delete val="0"/>
         <c:axPos val="l"/>
@@ -4760,7 +4490,7 @@
         <c:crossAx val="2094734554"/>
         <c:crosses val="autoZero"/>
         <c:crossBetween val="between"/>
-        <c:majorUnit val="2"/>
+        <c:majorUnit val="1"/>
       </c:valAx>
       <c:spPr>
         <a:solidFill>
@@ -4872,9 +4602,9 @@
           </c:marker>
           <c:cat>
             <c:multiLvlStrRef>
-              <c:f>Sheet1!$A$2:$A$13</c:f>
+              <c:f>Sheet1!$A$2:$A$10</c:f>
               <c:multiLvlStrCache>
-                <c:ptCount val="12"/>
+                <c:ptCount val="9"/>
                 <c:lvl>
                   <c:pt idx="0">
                     <c:v>Jan</c:v>
@@ -4903,25 +4633,16 @@
                   <c:pt idx="8">
                     <c:v>Sep</c:v>
                   </c:pt>
-                  <c:pt idx="9">
-                    <c:v>Oct</c:v>
-                  </c:pt>
-                  <c:pt idx="10">
-                    <c:v>Nov</c:v>
-                  </c:pt>
-                  <c:pt idx="11">
-                    <c:v>Dec</c:v>
-                  </c:pt>
                 </c:lvl>
               </c:multiLvlStrCache>
             </c:multiLvlStrRef>
           </c:cat>
           <c:val>
             <c:numRef>
-              <c:f>Sheet1!$B$2:$B$13</c:f>
+              <c:f>Sheet1!$B$2:$B$10</c:f>
               <c:numCache>
                 <c:formatCode>General</c:formatCode>
-                <c:ptCount val="12"/>
+                <c:ptCount val="9"/>
                 <c:pt idx="0">
                   <c:v>13.41</c:v>
                 </c:pt>
@@ -4948,15 +4669,6 @@
                 </c:pt>
                 <c:pt idx="8">
                   <c:v>12.5</c:v>
-                </c:pt>
-                <c:pt idx="9">
-                  <c:v>13.74</c:v>
-                </c:pt>
-                <c:pt idx="10">
-                  <c:v>11.84</c:v>
-                </c:pt>
-                <c:pt idx="11">
-                  <c:v>12.92</c:v>
                 </c:pt>
               </c:numCache>
             </c:numRef>
@@ -5036,8 +4748,8 @@
         <c:axId val="2094734552"/>
         <c:scaling>
           <c:orientation val="minMax"/>
-          <c:max val="18"/>
-          <c:min val="10"/>
+          <c:max val="16"/>
+          <c:min val="11"/>
         </c:scaling>
         <c:delete val="0"/>
         <c:axPos val="l"/>
@@ -5070,7 +4782,7 @@
         <c:crossAx val="2094734554"/>
         <c:crosses val="autoZero"/>
         <c:crossBetween val="between"/>
-        <c:majorUnit val="2"/>
+        <c:majorUnit val="1"/>
       </c:valAx>
       <c:spPr>
         <a:solidFill>
@@ -5763,7 +5475,7 @@
           <a:p>
             <a:r>
               <a:rPr lang="en-US" dirty="0"/>
-              <a:t>Source: Qlik - Profit &amp; Loss. Same-store, INEOS excluded (opened 2026). Fixed ops = service + parts; GMC Prescott body shop gross excluded. Jan-Sep 2026 vs Jan-Sep 2025; 2025 shown January-December.</a:t>
+              <a:t>Source: Qlik - Profit &amp; Loss. Same-store, INEOS excluded (opened 2026). Fixed ops = service + parts; GMC Prescott body shop gross excluded. Jan-Sep 2026 vs Jan-Sep 2025.</a:t>
             </a:r>
             <a:endParaRPr lang="en-US" dirty="0"/>
           </a:p>
@@ -6115,7 +5827,7 @@
           <a:p>
             <a:r>
               <a:rPr lang="en-US" dirty="0"/>
-              <a:t>Source: Qlik - Profit &amp; Loss. Same-store, INEOS excluded (opened 2026). Fixed ops = service + parts; GMC Prescott body shop gross excluded. Jan-Sep 2026 vs Jan-Sep 2025; 2025 shown January-December.</a:t>
+              <a:t>Source: Qlik - Profit &amp; Loss. Same-store, INEOS excluded (opened 2026). Fixed ops = service + parts; GMC Prescott body shop gross excluded. Jan-Sep 2026 vs Jan-Sep 2025.</a:t>
             </a:r>
             <a:endParaRPr lang="en-US" dirty="0"/>
           </a:p>
@@ -6379,7 +6091,7 @@
           <a:p>
             <a:r>
               <a:rPr lang="en-US" dirty="0"/>
-              <a:t>Source: Qlik - Profit &amp; Loss. Same-store, INEOS excluded (opened 2026). Fixed ops = service + parts; GMC Prescott body shop gross excluded. Jan-Sep 2026 vs Jan-Sep 2025; 2025 shown January-December.</a:t>
+              <a:t>Source: Qlik - Profit &amp; Loss. Same-store, INEOS excluded (opened 2026). Fixed ops = service + parts; GMC Prescott body shop gross excluded. Jan-Sep 2026 vs Jan-Sep 2025.</a:t>
             </a:r>
             <a:endParaRPr lang="en-US" dirty="0"/>
           </a:p>

--- a/day2-deck/decks/Fixed Ops Gross - House Style.pptx
+++ b/day2-deck/decks/Fixed Ops Gross - House Style.pptx
@@ -198,9 +198,9 @@
           </c:marker>
           <c:cat>
             <c:multiLvlStrRef>
-              <c:f>Sheet1!$A$2:$A$10</c:f>
+              <c:f>Sheet1!$A$2:$A$13</c:f>
               <c:multiLvlStrCache>
-                <c:ptCount val="9"/>
+                <c:ptCount val="12"/>
                 <c:lvl>
                   <c:pt idx="0">
                     <c:v>Jan</c:v>
@@ -229,16 +229,25 @@
                   <c:pt idx="8">
                     <c:v>Sep</c:v>
                   </c:pt>
+                  <c:pt idx="9">
+                    <c:v>Oct</c:v>
+                  </c:pt>
+                  <c:pt idx="10">
+                    <c:v>Nov</c:v>
+                  </c:pt>
+                  <c:pt idx="11">
+                    <c:v>Dec</c:v>
+                  </c:pt>
                 </c:lvl>
               </c:multiLvlStrCache>
             </c:multiLvlStrRef>
           </c:cat>
           <c:val>
             <c:numRef>
-              <c:f>Sheet1!$B$2:$B$10</c:f>
+              <c:f>Sheet1!$B$2:$B$13</c:f>
               <c:numCache>
                 <c:formatCode>General</c:formatCode>
-                <c:ptCount val="9"/>
+                <c:ptCount val="12"/>
                 <c:pt idx="0">
                   <c:v>19.88</c:v>
                 </c:pt>
@@ -265,6 +274,15 @@
                 </c:pt>
                 <c:pt idx="8">
                   <c:v>21.13</c:v>
+                </c:pt>
+                <c:pt idx="9">
+                  <c:v/>
+                </c:pt>
+                <c:pt idx="10">
+                  <c:v/>
+                </c:pt>
+                <c:pt idx="11">
+                  <c:v/>
                 </c:pt>
               </c:numCache>
             </c:numRef>
@@ -484,9 +502,9 @@
           </c:marker>
           <c:cat>
             <c:multiLvlStrRef>
-              <c:f>Sheet1!$A$2:$A$10</c:f>
+              <c:f>Sheet1!$A$2:$A$13</c:f>
               <c:multiLvlStrCache>
-                <c:ptCount val="9"/>
+                <c:ptCount val="12"/>
                 <c:lvl>
                   <c:pt idx="0">
                     <c:v>Jan</c:v>
@@ -515,16 +533,25 @@
                   <c:pt idx="8">
                     <c:v>Sep</c:v>
                   </c:pt>
+                  <c:pt idx="9">
+                    <c:v>Oct</c:v>
+                  </c:pt>
+                  <c:pt idx="10">
+                    <c:v>Nov</c:v>
+                  </c:pt>
+                  <c:pt idx="11">
+                    <c:v>Dec</c:v>
+                  </c:pt>
                 </c:lvl>
               </c:multiLvlStrCache>
             </c:multiLvlStrRef>
           </c:cat>
           <c:val>
             <c:numRef>
-              <c:f>Sheet1!$B$2:$B$10</c:f>
+              <c:f>Sheet1!$B$2:$B$13</c:f>
               <c:numCache>
                 <c:formatCode>General</c:formatCode>
-                <c:ptCount val="9"/>
+                <c:ptCount val="12"/>
                 <c:pt idx="0">
                   <c:v>13.41</c:v>
                 </c:pt>
@@ -551,6 +578,15 @@
                 </c:pt>
                 <c:pt idx="8">
                   <c:v>12.5</c:v>
+                </c:pt>
+                <c:pt idx="9">
+                  <c:v>13.74</c:v>
+                </c:pt>
+                <c:pt idx="10">
+                  <c:v>11.84</c:v>
+                </c:pt>
+                <c:pt idx="11">
+                  <c:v>12.92</c:v>
                 </c:pt>
               </c:numCache>
             </c:numRef>
@@ -631,8 +667,8 @@
         <c:axId val="2094734552"/>
         <c:scaling>
           <c:orientation val="minMax"/>
-          <c:max val="16"/>
-          <c:min val="11"/>
+          <c:max val="18"/>
+          <c:min val="10"/>
         </c:scaling>
         <c:delete val="0"/>
         <c:axPos val="l"/>
@@ -676,7 +712,7 @@
         <c:crossAx val="2094734554"/>
         <c:crosses val="autoZero"/>
         <c:crossBetween val="between"/>
-        <c:majorUnit val="1"/>
+        <c:majorUnit val="2"/>
       </c:valAx>
       <c:spPr>
         <a:solidFill>
@@ -791,9 +827,9 @@
           </c:marker>
           <c:cat>
             <c:multiLvlStrRef>
-              <c:f>Sheet1!$A$2:$A$10</c:f>
+              <c:f>Sheet1!$A$2:$A$13</c:f>
               <c:multiLvlStrCache>
-                <c:ptCount val="9"/>
+                <c:ptCount val="12"/>
                 <c:lvl>
                   <c:pt idx="0">
                     <c:v>Jan</c:v>
@@ -822,16 +858,25 @@
                   <c:pt idx="8">
                     <c:v>Sep</c:v>
                   </c:pt>
+                  <c:pt idx="9">
+                    <c:v>Oct</c:v>
+                  </c:pt>
+                  <c:pt idx="10">
+                    <c:v>Nov</c:v>
+                  </c:pt>
+                  <c:pt idx="11">
+                    <c:v>Dec</c:v>
+                  </c:pt>
                 </c:lvl>
               </c:multiLvlStrCache>
             </c:multiLvlStrRef>
           </c:cat>
           <c:val>
             <c:numRef>
-              <c:f>Sheet1!$B$2:$B$10</c:f>
+              <c:f>Sheet1!$B$2:$B$13</c:f>
               <c:numCache>
                 <c:formatCode>General</c:formatCode>
-                <c:ptCount val="9"/>
+                <c:ptCount val="12"/>
                 <c:pt idx="0">
                   <c:v>6.41</c:v>
                 </c:pt>
@@ -858,6 +903,15 @@
                 </c:pt>
                 <c:pt idx="8">
                   <c:v>7.18</c:v>
+                </c:pt>
+                <c:pt idx="9">
+                  <c:v/>
+                </c:pt>
+                <c:pt idx="10">
+                  <c:v/>
+                </c:pt>
+                <c:pt idx="11">
+                  <c:v/>
                 </c:pt>
               </c:numCache>
             </c:numRef>
@@ -1074,9 +1128,9 @@
           </c:marker>
           <c:cat>
             <c:multiLvlStrRef>
-              <c:f>Sheet1!$A$2:$A$10</c:f>
+              <c:f>Sheet1!$A$2:$A$13</c:f>
               <c:multiLvlStrCache>
-                <c:ptCount val="9"/>
+                <c:ptCount val="12"/>
                 <c:lvl>
                   <c:pt idx="0">
                     <c:v>Jan</c:v>
@@ -1105,16 +1159,25 @@
                   <c:pt idx="8">
                     <c:v>Sep</c:v>
                   </c:pt>
+                  <c:pt idx="9">
+                    <c:v>Oct</c:v>
+                  </c:pt>
+                  <c:pt idx="10">
+                    <c:v>Nov</c:v>
+                  </c:pt>
+                  <c:pt idx="11">
+                    <c:v>Dec</c:v>
+                  </c:pt>
                 </c:lvl>
               </c:multiLvlStrCache>
             </c:multiLvlStrRef>
           </c:cat>
           <c:val>
             <c:numRef>
-              <c:f>Sheet1!$B$2:$B$10</c:f>
+              <c:f>Sheet1!$B$2:$B$13</c:f>
               <c:numCache>
                 <c:formatCode>General</c:formatCode>
-                <c:ptCount val="9"/>
+                <c:ptCount val="12"/>
                 <c:pt idx="0">
                   <c:v/>
                 </c:pt>
@@ -1141,6 +1204,15 @@
                 </c:pt>
                 <c:pt idx="8">
                   <c:v>7.18</c:v>
+                </c:pt>
+                <c:pt idx="9">
+                  <c:v/>
+                </c:pt>
+                <c:pt idx="10">
+                  <c:v/>
+                </c:pt>
+                <c:pt idx="11">
+                  <c:v/>
                 </c:pt>
               </c:numCache>
             </c:numRef>
@@ -1366,9 +1438,9 @@
           </c:marker>
           <c:cat>
             <c:multiLvlStrRef>
-              <c:f>Sheet1!$A$2:$A$10</c:f>
+              <c:f>Sheet1!$A$2:$A$13</c:f>
               <c:multiLvlStrCache>
-                <c:ptCount val="9"/>
+                <c:ptCount val="12"/>
                 <c:lvl>
                   <c:pt idx="0">
                     <c:v>Jan</c:v>
@@ -1397,16 +1469,25 @@
                   <c:pt idx="8">
                     <c:v>Sep</c:v>
                   </c:pt>
+                  <c:pt idx="9">
+                    <c:v>Oct</c:v>
+                  </c:pt>
+                  <c:pt idx="10">
+                    <c:v>Nov</c:v>
+                  </c:pt>
+                  <c:pt idx="11">
+                    <c:v>Dec</c:v>
+                  </c:pt>
                 </c:lvl>
               </c:multiLvlStrCache>
             </c:multiLvlStrRef>
           </c:cat>
           <c:val>
             <c:numRef>
-              <c:f>Sheet1!$B$2:$B$10</c:f>
+              <c:f>Sheet1!$B$2:$B$13</c:f>
               <c:numCache>
                 <c:formatCode>General</c:formatCode>
-                <c:ptCount val="9"/>
+                <c:ptCount val="12"/>
                 <c:pt idx="0">
                   <c:v>6.41</c:v>
                 </c:pt>
@@ -1432,6 +1513,15 @@
                   <c:v/>
                 </c:pt>
                 <c:pt idx="8">
+                  <c:v/>
+                </c:pt>
+                <c:pt idx="9">
+                  <c:v/>
+                </c:pt>
+                <c:pt idx="10">
+                  <c:v/>
+                </c:pt>
+                <c:pt idx="11">
                   <c:v/>
                 </c:pt>
               </c:numCache>
@@ -1658,9 +1748,9 @@
           </c:marker>
           <c:cat>
             <c:multiLvlStrRef>
-              <c:f>Sheet1!$A$2:$A$10</c:f>
+              <c:f>Sheet1!$A$2:$A$13</c:f>
               <c:multiLvlStrCache>
-                <c:ptCount val="9"/>
+                <c:ptCount val="12"/>
                 <c:lvl>
                   <c:pt idx="0">
                     <c:v>Jan</c:v>
@@ -1689,16 +1779,25 @@
                   <c:pt idx="8">
                     <c:v>Sep</c:v>
                   </c:pt>
+                  <c:pt idx="9">
+                    <c:v>Oct</c:v>
+                  </c:pt>
+                  <c:pt idx="10">
+                    <c:v>Nov</c:v>
+                  </c:pt>
+                  <c:pt idx="11">
+                    <c:v>Dec</c:v>
+                  </c:pt>
                 </c:lvl>
               </c:multiLvlStrCache>
             </c:multiLvlStrRef>
           </c:cat>
           <c:val>
             <c:numRef>
-              <c:f>Sheet1!$B$2:$B$10</c:f>
+              <c:f>Sheet1!$B$2:$B$13</c:f>
               <c:numCache>
                 <c:formatCode>General</c:formatCode>
-                <c:ptCount val="9"/>
+                <c:ptCount val="12"/>
                 <c:pt idx="0">
                   <c:v>7.05</c:v>
                 </c:pt>
@@ -1724,6 +1823,15 @@
                   <c:v/>
                 </c:pt>
                 <c:pt idx="8">
+                  <c:v/>
+                </c:pt>
+                <c:pt idx="9">
+                  <c:v/>
+                </c:pt>
+                <c:pt idx="10">
+                  <c:v/>
+                </c:pt>
+                <c:pt idx="11">
                   <c:v/>
                 </c:pt>
               </c:numCache>
@@ -1950,9 +2058,9 @@
           </c:marker>
           <c:cat>
             <c:multiLvlStrRef>
-              <c:f>Sheet1!$A$2:$A$10</c:f>
+              <c:f>Sheet1!$A$2:$A$13</c:f>
               <c:multiLvlStrCache>
-                <c:ptCount val="9"/>
+                <c:ptCount val="12"/>
                 <c:lvl>
                   <c:pt idx="0">
                     <c:v>Jan</c:v>
@@ -1981,16 +2089,25 @@
                   <c:pt idx="8">
                     <c:v>Sep</c:v>
                   </c:pt>
+                  <c:pt idx="9">
+                    <c:v>Oct</c:v>
+                  </c:pt>
+                  <c:pt idx="10">
+                    <c:v>Nov</c:v>
+                  </c:pt>
+                  <c:pt idx="11">
+                    <c:v>Dec</c:v>
+                  </c:pt>
                 </c:lvl>
               </c:multiLvlStrCache>
             </c:multiLvlStrRef>
           </c:cat>
           <c:val>
             <c:numRef>
-              <c:f>Sheet1!$B$2:$B$10</c:f>
+              <c:f>Sheet1!$B$2:$B$13</c:f>
               <c:numCache>
                 <c:formatCode>General</c:formatCode>
-                <c:ptCount val="9"/>
+                <c:ptCount val="12"/>
                 <c:pt idx="0">
                   <c:v/>
                 </c:pt>
@@ -2017,6 +2134,15 @@
                 </c:pt>
                 <c:pt idx="8">
                   <c:v>6.54</c:v>
+                </c:pt>
+                <c:pt idx="9">
+                  <c:v>7.53</c:v>
+                </c:pt>
+                <c:pt idx="10">
+                  <c:v>5.91</c:v>
+                </c:pt>
+                <c:pt idx="11">
+                  <c:v>6.4</c:v>
                 </c:pt>
               </c:numCache>
             </c:numRef>
@@ -2245,9 +2371,9 @@
           </c:marker>
           <c:cat>
             <c:multiLvlStrRef>
-              <c:f>Sheet1!$A$2:$A$10</c:f>
+              <c:f>Sheet1!$A$2:$A$13</c:f>
               <c:multiLvlStrCache>
-                <c:ptCount val="9"/>
+                <c:ptCount val="12"/>
                 <c:lvl>
                   <c:pt idx="0">
                     <c:v>Jan</c:v>
@@ -2276,16 +2402,25 @@
                   <c:pt idx="8">
                     <c:v>Sep</c:v>
                   </c:pt>
+                  <c:pt idx="9">
+                    <c:v>Oct</c:v>
+                  </c:pt>
+                  <c:pt idx="10">
+                    <c:v>Nov</c:v>
+                  </c:pt>
+                  <c:pt idx="11">
+                    <c:v>Dec</c:v>
+                  </c:pt>
                 </c:lvl>
               </c:multiLvlStrCache>
             </c:multiLvlStrRef>
           </c:cat>
           <c:val>
             <c:numRef>
-              <c:f>Sheet1!$B$2:$B$10</c:f>
+              <c:f>Sheet1!$B$2:$B$13</c:f>
               <c:numCache>
                 <c:formatCode>General</c:formatCode>
-                <c:ptCount val="9"/>
+                <c:ptCount val="12"/>
                 <c:pt idx="0">
                   <c:v>7.05</c:v>
                 </c:pt>
@@ -2312,6 +2447,15 @@
                 </c:pt>
                 <c:pt idx="8">
                   <c:v>6.54</c:v>
+                </c:pt>
+                <c:pt idx="9">
+                  <c:v>7.53</c:v>
+                </c:pt>
+                <c:pt idx="10">
+                  <c:v>5.91</c:v>
+                </c:pt>
+                <c:pt idx="11">
+                  <c:v>6.4</c:v>
                 </c:pt>
               </c:numCache>
             </c:numRef>
@@ -2549,9 +2693,9 @@
           </c:marker>
           <c:cat>
             <c:multiLvlStrRef>
-              <c:f>Sheet1!$A$2:$A$10</c:f>
+              <c:f>Sheet1!$A$2:$A$13</c:f>
               <c:multiLvlStrCache>
-                <c:ptCount val="9"/>
+                <c:ptCount val="12"/>
                 <c:lvl>
                   <c:pt idx="0">
                     <c:v>Jan</c:v>
@@ -2580,16 +2724,25 @@
                   <c:pt idx="8">
                     <c:v>Sep</c:v>
                   </c:pt>
+                  <c:pt idx="9">
+                    <c:v>Oct</c:v>
+                  </c:pt>
+                  <c:pt idx="10">
+                    <c:v>Nov</c:v>
+                  </c:pt>
+                  <c:pt idx="11">
+                    <c:v>Dec</c:v>
+                  </c:pt>
                 </c:lvl>
               </c:multiLvlStrCache>
             </c:multiLvlStrRef>
           </c:cat>
           <c:val>
             <c:numRef>
-              <c:f>Sheet1!$B$2:$B$10</c:f>
+              <c:f>Sheet1!$B$2:$B$13</c:f>
               <c:numCache>
                 <c:formatCode>General</c:formatCode>
-                <c:ptCount val="9"/>
+                <c:ptCount val="12"/>
                 <c:pt idx="0">
                   <c:v/>
                 </c:pt>
@@ -2616,6 +2769,15 @@
                 </c:pt>
                 <c:pt idx="8">
                   <c:v>21.13</c:v>
+                </c:pt>
+                <c:pt idx="9">
+                  <c:v/>
+                </c:pt>
+                <c:pt idx="10">
+                  <c:v/>
+                </c:pt>
+                <c:pt idx="11">
+                  <c:v/>
                 </c:pt>
               </c:numCache>
             </c:numRef>
@@ -2841,9 +3003,9 @@
           </c:marker>
           <c:cat>
             <c:multiLvlStrRef>
-              <c:f>Sheet1!$A$2:$A$10</c:f>
+              <c:f>Sheet1!$A$2:$A$13</c:f>
               <c:multiLvlStrCache>
-                <c:ptCount val="9"/>
+                <c:ptCount val="12"/>
                 <c:lvl>
                   <c:pt idx="0">
                     <c:v>Jan</c:v>
@@ -2872,16 +3034,25 @@
                   <c:pt idx="8">
                     <c:v>Sep</c:v>
                   </c:pt>
+                  <c:pt idx="9">
+                    <c:v>Oct</c:v>
+                  </c:pt>
+                  <c:pt idx="10">
+                    <c:v>Nov</c:v>
+                  </c:pt>
+                  <c:pt idx="11">
+                    <c:v>Dec</c:v>
+                  </c:pt>
                 </c:lvl>
               </c:multiLvlStrCache>
             </c:multiLvlStrRef>
           </c:cat>
           <c:val>
             <c:numRef>
-              <c:f>Sheet1!$B$2:$B$10</c:f>
+              <c:f>Sheet1!$B$2:$B$13</c:f>
               <c:numCache>
                 <c:formatCode>General</c:formatCode>
-                <c:ptCount val="9"/>
+                <c:ptCount val="12"/>
                 <c:pt idx="0">
                   <c:v>19.88</c:v>
                 </c:pt>
@@ -2907,6 +3078,15 @@
                   <c:v/>
                 </c:pt>
                 <c:pt idx="8">
+                  <c:v/>
+                </c:pt>
+                <c:pt idx="9">
+                  <c:v/>
+                </c:pt>
+                <c:pt idx="10">
+                  <c:v/>
+                </c:pt>
+                <c:pt idx="11">
                   <c:v/>
                 </c:pt>
               </c:numCache>
@@ -3133,9 +3313,9 @@
           </c:marker>
           <c:cat>
             <c:multiLvlStrRef>
-              <c:f>Sheet1!$A$2:$A$10</c:f>
+              <c:f>Sheet1!$A$2:$A$13</c:f>
               <c:multiLvlStrCache>
-                <c:ptCount val="9"/>
+                <c:ptCount val="12"/>
                 <c:lvl>
                   <c:pt idx="0">
                     <c:v>Jan</c:v>
@@ -3164,16 +3344,25 @@
                   <c:pt idx="8">
                     <c:v>Sep</c:v>
                   </c:pt>
+                  <c:pt idx="9">
+                    <c:v>Oct</c:v>
+                  </c:pt>
+                  <c:pt idx="10">
+                    <c:v>Nov</c:v>
+                  </c:pt>
+                  <c:pt idx="11">
+                    <c:v>Dec</c:v>
+                  </c:pt>
                 </c:lvl>
               </c:multiLvlStrCache>
             </c:multiLvlStrRef>
           </c:cat>
           <c:val>
             <c:numRef>
-              <c:f>Sheet1!$B$2:$B$10</c:f>
+              <c:f>Sheet1!$B$2:$B$13</c:f>
               <c:numCache>
                 <c:formatCode>General</c:formatCode>
-                <c:ptCount val="9"/>
+                <c:ptCount val="12"/>
                 <c:pt idx="0">
                   <c:v>20.46</c:v>
                 </c:pt>
@@ -3199,6 +3388,15 @@
                   <c:v/>
                 </c:pt>
                 <c:pt idx="8">
+                  <c:v/>
+                </c:pt>
+                <c:pt idx="9">
+                  <c:v/>
+                </c:pt>
+                <c:pt idx="10">
+                  <c:v/>
+                </c:pt>
+                <c:pt idx="11">
                   <c:v/>
                 </c:pt>
               </c:numCache>
@@ -3425,9 +3623,9 @@
           </c:marker>
           <c:cat>
             <c:multiLvlStrRef>
-              <c:f>Sheet1!$A$2:$A$10</c:f>
+              <c:f>Sheet1!$A$2:$A$13</c:f>
               <c:multiLvlStrCache>
-                <c:ptCount val="9"/>
+                <c:ptCount val="12"/>
                 <c:lvl>
                   <c:pt idx="0">
                     <c:v>Jan</c:v>
@@ -3456,16 +3654,25 @@
                   <c:pt idx="8">
                     <c:v>Sep</c:v>
                   </c:pt>
+                  <c:pt idx="9">
+                    <c:v>Oct</c:v>
+                  </c:pt>
+                  <c:pt idx="10">
+                    <c:v>Nov</c:v>
+                  </c:pt>
+                  <c:pt idx="11">
+                    <c:v>Dec</c:v>
+                  </c:pt>
                 </c:lvl>
               </c:multiLvlStrCache>
             </c:multiLvlStrRef>
           </c:cat>
           <c:val>
             <c:numRef>
-              <c:f>Sheet1!$B$2:$B$10</c:f>
+              <c:f>Sheet1!$B$2:$B$13</c:f>
               <c:numCache>
                 <c:formatCode>General</c:formatCode>
-                <c:ptCount val="9"/>
+                <c:ptCount val="12"/>
                 <c:pt idx="0">
                   <c:v/>
                 </c:pt>
@@ -3492,6 +3699,15 @@
                 </c:pt>
                 <c:pt idx="8">
                   <c:v>19.03</c:v>
+                </c:pt>
+                <c:pt idx="9">
+                  <c:v>21.27</c:v>
+                </c:pt>
+                <c:pt idx="10">
+                  <c:v>17.74</c:v>
+                </c:pt>
+                <c:pt idx="11">
+                  <c:v>19.32</c:v>
                 </c:pt>
               </c:numCache>
             </c:numRef>
@@ -3720,9 +3936,9 @@
           </c:marker>
           <c:cat>
             <c:multiLvlStrRef>
-              <c:f>Sheet1!$A$2:$A$10</c:f>
+              <c:f>Sheet1!$A$2:$A$13</c:f>
               <c:multiLvlStrCache>
-                <c:ptCount val="9"/>
+                <c:ptCount val="12"/>
                 <c:lvl>
                   <c:pt idx="0">
                     <c:v>Jan</c:v>
@@ -3751,16 +3967,25 @@
                   <c:pt idx="8">
                     <c:v>Sep</c:v>
                   </c:pt>
+                  <c:pt idx="9">
+                    <c:v>Oct</c:v>
+                  </c:pt>
+                  <c:pt idx="10">
+                    <c:v>Nov</c:v>
+                  </c:pt>
+                  <c:pt idx="11">
+                    <c:v>Dec</c:v>
+                  </c:pt>
                 </c:lvl>
               </c:multiLvlStrCache>
             </c:multiLvlStrRef>
           </c:cat>
           <c:val>
             <c:numRef>
-              <c:f>Sheet1!$B$2:$B$10</c:f>
+              <c:f>Sheet1!$B$2:$B$13</c:f>
               <c:numCache>
                 <c:formatCode>General</c:formatCode>
-                <c:ptCount val="9"/>
+                <c:ptCount val="12"/>
                 <c:pt idx="0">
                   <c:v>20.46</c:v>
                 </c:pt>
@@ -3787,6 +4012,15 @@
                 </c:pt>
                 <c:pt idx="8">
                   <c:v>19.03</c:v>
+                </c:pt>
+                <c:pt idx="9">
+                  <c:v>21.27</c:v>
+                </c:pt>
+                <c:pt idx="10">
+                  <c:v>17.74</c:v>
+                </c:pt>
+                <c:pt idx="11">
+                  <c:v>19.32</c:v>
                 </c:pt>
               </c:numCache>
             </c:numRef>
@@ -4027,9 +4261,9 @@
           </c:marker>
           <c:cat>
             <c:multiLvlStrRef>
-              <c:f>Sheet1!$A$2:$A$10</c:f>
+              <c:f>Sheet1!$A$2:$A$13</c:f>
               <c:multiLvlStrCache>
-                <c:ptCount val="9"/>
+                <c:ptCount val="12"/>
                 <c:lvl>
                   <c:pt idx="0">
                     <c:v>Jan</c:v>
@@ -4058,16 +4292,25 @@
                   <c:pt idx="8">
                     <c:v>Sep</c:v>
                   </c:pt>
+                  <c:pt idx="9">
+                    <c:v>Oct</c:v>
+                  </c:pt>
+                  <c:pt idx="10">
+                    <c:v>Nov</c:v>
+                  </c:pt>
+                  <c:pt idx="11">
+                    <c:v>Dec</c:v>
+                  </c:pt>
                 </c:lvl>
               </c:multiLvlStrCache>
             </c:multiLvlStrRef>
           </c:cat>
           <c:val>
             <c:numRef>
-              <c:f>Sheet1!$B$2:$B$10</c:f>
+              <c:f>Sheet1!$B$2:$B$13</c:f>
               <c:numCache>
                 <c:formatCode>General</c:formatCode>
-                <c:ptCount val="9"/>
+                <c:ptCount val="12"/>
                 <c:pt idx="0">
                   <c:v>13.47</c:v>
                 </c:pt>
@@ -4094,6 +4337,15 @@
                 </c:pt>
                 <c:pt idx="8">
                   <c:v>13.96</c:v>
+                </c:pt>
+                <c:pt idx="9">
+                  <c:v/>
+                </c:pt>
+                <c:pt idx="10">
+                  <c:v/>
+                </c:pt>
+                <c:pt idx="11">
+                  <c:v/>
                 </c:pt>
               </c:numCache>
             </c:numRef>
@@ -4172,8 +4424,8 @@
         <c:axId val="2094734552"/>
         <c:scaling>
           <c:orientation val="minMax"/>
-          <c:max val="16"/>
-          <c:min val="11"/>
+          <c:max val="18"/>
+          <c:min val="10"/>
         </c:scaling>
         <c:delete val="0"/>
         <c:axPos val="l"/>
@@ -4206,7 +4458,7 @@
         <c:crossAx val="2094734554"/>
         <c:crosses val="autoZero"/>
         <c:crossBetween val="between"/>
-        <c:majorUnit val="1"/>
+        <c:majorUnit val="2"/>
       </c:valAx>
       <c:spPr>
         <a:noFill/>
@@ -4310,9 +4562,9 @@
           </c:marker>
           <c:cat>
             <c:multiLvlStrRef>
-              <c:f>Sheet1!$A$2:$A$10</c:f>
+              <c:f>Sheet1!$A$2:$A$13</c:f>
               <c:multiLvlStrCache>
-                <c:ptCount val="9"/>
+                <c:ptCount val="12"/>
                 <c:lvl>
                   <c:pt idx="0">
                     <c:v>Jan</c:v>
@@ -4341,16 +4593,25 @@
                   <c:pt idx="8">
                     <c:v>Sep</c:v>
                   </c:pt>
+                  <c:pt idx="9">
+                    <c:v>Oct</c:v>
+                  </c:pt>
+                  <c:pt idx="10">
+                    <c:v>Nov</c:v>
+                  </c:pt>
+                  <c:pt idx="11">
+                    <c:v>Dec</c:v>
+                  </c:pt>
                 </c:lvl>
               </c:multiLvlStrCache>
             </c:multiLvlStrRef>
           </c:cat>
           <c:val>
             <c:numRef>
-              <c:f>Sheet1!$B$2:$B$10</c:f>
+              <c:f>Sheet1!$B$2:$B$13</c:f>
               <c:numCache>
                 <c:formatCode>General</c:formatCode>
-                <c:ptCount val="9"/>
+                <c:ptCount val="12"/>
                 <c:pt idx="0">
                   <c:v>13.47</c:v>
                 </c:pt>
@@ -4377,6 +4638,15 @@
                 </c:pt>
                 <c:pt idx="8">
                   <c:v>13.96</c:v>
+                </c:pt>
+                <c:pt idx="9">
+                  <c:v/>
+                </c:pt>
+                <c:pt idx="10">
+                  <c:v/>
+                </c:pt>
+                <c:pt idx="11">
+                  <c:v/>
                 </c:pt>
               </c:numCache>
             </c:numRef>
@@ -4456,8 +4726,8 @@
         <c:axId val="2094734552"/>
         <c:scaling>
           <c:orientation val="minMax"/>
-          <c:max val="16"/>
-          <c:min val="11"/>
+          <c:max val="18"/>
+          <c:min val="10"/>
         </c:scaling>
         <c:delete val="0"/>
         <c:axPos val="l"/>
@@ -4490,7 +4760,7 @@
         <c:crossAx val="2094734554"/>
         <c:crosses val="autoZero"/>
         <c:crossBetween val="between"/>
-        <c:majorUnit val="1"/>
+        <c:majorUnit val="2"/>
       </c:valAx>
       <c:spPr>
         <a:solidFill>
@@ -4602,9 +4872,9 @@
           </c:marker>
           <c:cat>
             <c:multiLvlStrRef>
-              <c:f>Sheet1!$A$2:$A$10</c:f>
+              <c:f>Sheet1!$A$2:$A$13</c:f>
               <c:multiLvlStrCache>
-                <c:ptCount val="9"/>
+                <c:ptCount val="12"/>
                 <c:lvl>
                   <c:pt idx="0">
                     <c:v>Jan</c:v>
@@ -4633,16 +4903,25 @@
                   <c:pt idx="8">
                     <c:v>Sep</c:v>
                   </c:pt>
+                  <c:pt idx="9">
+                    <c:v>Oct</c:v>
+                  </c:pt>
+                  <c:pt idx="10">
+                    <c:v>Nov</c:v>
+                  </c:pt>
+                  <c:pt idx="11">
+                    <c:v>Dec</c:v>
+                  </c:pt>
                 </c:lvl>
               </c:multiLvlStrCache>
             </c:multiLvlStrRef>
           </c:cat>
           <c:val>
             <c:numRef>
-              <c:f>Sheet1!$B$2:$B$10</c:f>
+              <c:f>Sheet1!$B$2:$B$13</c:f>
               <c:numCache>
                 <c:formatCode>General</c:formatCode>
-                <c:ptCount val="9"/>
+                <c:ptCount val="12"/>
                 <c:pt idx="0">
                   <c:v>13.41</c:v>
                 </c:pt>
@@ -4669,6 +4948,15 @@
                 </c:pt>
                 <c:pt idx="8">
                   <c:v>12.5</c:v>
+                </c:pt>
+                <c:pt idx="9">
+                  <c:v>13.74</c:v>
+                </c:pt>
+                <c:pt idx="10">
+                  <c:v>11.84</c:v>
+                </c:pt>
+                <c:pt idx="11">
+                  <c:v>12.92</c:v>
                 </c:pt>
               </c:numCache>
             </c:numRef>
@@ -4748,8 +5036,8 @@
         <c:axId val="2094734552"/>
         <c:scaling>
           <c:orientation val="minMax"/>
-          <c:max val="16"/>
-          <c:min val="11"/>
+          <c:max val="18"/>
+          <c:min val="10"/>
         </c:scaling>
         <c:delete val="0"/>
         <c:axPos val="l"/>
@@ -4782,7 +5070,7 @@
         <c:crossAx val="2094734554"/>
         <c:crosses val="autoZero"/>
         <c:crossBetween val="between"/>
-        <c:majorUnit val="1"/>
+        <c:majorUnit val="2"/>
       </c:valAx>
       <c:spPr>
         <a:solidFill>
@@ -5475,7 +5763,7 @@
           <a:p>
             <a:r>
               <a:rPr lang="en-US" dirty="0"/>
-              <a:t>Source: Qlik - Profit &amp; Loss. Same-store, INEOS excluded (opened 2026). Fixed ops = service + parts; GMC Prescott body shop gross excluded. Jan-Sep 2026 vs Jan-Sep 2025.</a:t>
+              <a:t>Source: Qlik - Profit &amp; Loss. Same-store, INEOS excluded (opened 2026). Fixed ops = service + parts; GMC Prescott body shop gross excluded. Jan-Sep 2026 vs Jan-Sep 2025; 2025 shown January-December.</a:t>
             </a:r>
             <a:endParaRPr lang="en-US" dirty="0"/>
           </a:p>
@@ -5827,7 +6115,7 @@
           <a:p>
             <a:r>
               <a:rPr lang="en-US" dirty="0"/>
-              <a:t>Source: Qlik - Profit &amp; Loss. Same-store, INEOS excluded (opened 2026). Fixed ops = service + parts; GMC Prescott body shop gross excluded. Jan-Sep 2026 vs Jan-Sep 2025.</a:t>
+              <a:t>Source: Qlik - Profit &amp; Loss. Same-store, INEOS excluded (opened 2026). Fixed ops = service + parts; GMC Prescott body shop gross excluded. Jan-Sep 2026 vs Jan-Sep 2025; 2025 shown January-December.</a:t>
             </a:r>
             <a:endParaRPr lang="en-US" dirty="0"/>
           </a:p>
@@ -6091,7 +6379,7 @@
           <a:p>
             <a:r>
               <a:rPr lang="en-US" dirty="0"/>
-              <a:t>Source: Qlik - Profit &amp; Loss. Same-store, INEOS excluded (opened 2026). Fixed ops = service + parts; GMC Prescott body shop gross excluded. Jan-Sep 2026 vs Jan-Sep 2025.</a:t>
+              <a:t>Source: Qlik - Profit &amp; Loss. Same-store, INEOS excluded (opened 2026). Fixed ops = service + parts; GMC Prescott body shop gross excluded. Jan-Sep 2026 vs Jan-Sep 2025; 2025 shown January-December.</a:t>
             </a:r>
             <a:endParaRPr lang="en-US" dirty="0"/>
           </a:p>

--- a/day2-deck/decks/Fixed Ops Gross - House Style.pptx
+++ b/day2-deck/decks/Fixed Ops Gross - House Style.pptx
@@ -8301,7 +8301,7 @@
             <a:avLst/>
           </a:prstGeom>
           <a:solidFill>
-            <a:srgbClr val="12A566"/>
+            <a:srgbClr val="2587C5"/>
           </a:solidFill>
           <a:ln/>
         </p:spPr>
@@ -8438,7 +8438,7 @@
             <a:avLst/>
           </a:prstGeom>
           <a:solidFill>
-            <a:srgbClr val="12A566"/>
+            <a:srgbClr val="2587C5"/>
           </a:solidFill>
           <a:ln/>
         </p:spPr>
@@ -8575,7 +8575,7 @@
             <a:avLst/>
           </a:prstGeom>
           <a:solidFill>
-            <a:srgbClr val="12A566"/>
+            <a:srgbClr val="2587C5"/>
           </a:solidFill>
           <a:ln/>
         </p:spPr>
@@ -8712,7 +8712,7 @@
             <a:avLst/>
           </a:prstGeom>
           <a:solidFill>
-            <a:srgbClr val="12A566"/>
+            <a:srgbClr val="2587C5"/>
           </a:solidFill>
           <a:ln/>
         </p:spPr>
@@ -8849,7 +8849,7 @@
             <a:avLst/>
           </a:prstGeom>
           <a:solidFill>
-            <a:srgbClr val="12A566"/>
+            <a:srgbClr val="2587C5"/>
           </a:solidFill>
           <a:ln/>
         </p:spPr>
@@ -8986,7 +8986,7 @@
             <a:avLst/>
           </a:prstGeom>
           <a:solidFill>
-            <a:srgbClr val="12A566"/>
+            <a:srgbClr val="2587C5"/>
           </a:solidFill>
           <a:ln/>
         </p:spPr>
@@ -9123,7 +9123,7 @@
             <a:avLst/>
           </a:prstGeom>
           <a:solidFill>
-            <a:srgbClr val="12A566"/>
+            <a:srgbClr val="2587C5"/>
           </a:solidFill>
           <a:ln/>
         </p:spPr>
@@ -9260,7 +9260,7 @@
             <a:avLst/>
           </a:prstGeom>
           <a:solidFill>
-            <a:srgbClr val="12A566"/>
+            <a:srgbClr val="2587C5"/>
           </a:solidFill>
           <a:ln/>
         </p:spPr>
@@ -9397,7 +9397,7 @@
             <a:avLst/>
           </a:prstGeom>
           <a:solidFill>
-            <a:srgbClr val="12A566"/>
+            <a:srgbClr val="2587C5"/>
           </a:solidFill>
           <a:ln/>
         </p:spPr>
@@ -9534,7 +9534,7 @@
             <a:avLst/>
           </a:prstGeom>
           <a:solidFill>
-            <a:srgbClr val="12A566"/>
+            <a:srgbClr val="2587C5"/>
           </a:solidFill>
           <a:ln/>
         </p:spPr>
@@ -9671,7 +9671,7 @@
             <a:avLst/>
           </a:prstGeom>
           <a:solidFill>
-            <a:srgbClr val="12A566"/>
+            <a:srgbClr val="2587C5"/>
           </a:solidFill>
           <a:ln/>
         </p:spPr>
@@ -9808,7 +9808,7 @@
             <a:avLst/>
           </a:prstGeom>
           <a:solidFill>
-            <a:srgbClr val="12A566"/>
+            <a:srgbClr val="2587C5"/>
           </a:solidFill>
           <a:ln/>
         </p:spPr>
@@ -9945,7 +9945,7 @@
             <a:avLst/>
           </a:prstGeom>
           <a:solidFill>
-            <a:srgbClr val="12A566"/>
+            <a:srgbClr val="2587C5"/>
           </a:solidFill>
           <a:ln/>
         </p:spPr>
@@ -10082,7 +10082,7 @@
             <a:avLst/>
           </a:prstGeom>
           <a:solidFill>
-            <a:srgbClr val="12A566"/>
+            <a:srgbClr val="2587C5"/>
           </a:solidFill>
           <a:ln/>
         </p:spPr>
@@ -10219,7 +10219,7 @@
             <a:avLst/>
           </a:prstGeom>
           <a:solidFill>
-            <a:srgbClr val="12A566"/>
+            <a:srgbClr val="2587C5"/>
           </a:solidFill>
           <a:ln/>
         </p:spPr>
@@ -10356,7 +10356,7 @@
             <a:avLst/>
           </a:prstGeom>
           <a:solidFill>
-            <a:srgbClr val="12A566"/>
+            <a:srgbClr val="2587C5"/>
           </a:solidFill>
           <a:ln/>
         </p:spPr>
@@ -10493,7 +10493,7 @@
             <a:avLst/>
           </a:prstGeom>
           <a:solidFill>
-            <a:srgbClr val="12A566"/>
+            <a:srgbClr val="2587C5"/>
           </a:solidFill>
           <a:ln/>
         </p:spPr>
@@ -10630,7 +10630,7 @@
             <a:avLst/>
           </a:prstGeom>
           <a:solidFill>
-            <a:srgbClr val="12A566"/>
+            <a:srgbClr val="2587C5"/>
           </a:solidFill>
           <a:ln/>
         </p:spPr>
@@ -10767,7 +10767,7 @@
             <a:avLst/>
           </a:prstGeom>
           <a:solidFill>
-            <a:srgbClr val="12A566"/>
+            <a:srgbClr val="2587C5"/>
           </a:solidFill>
           <a:ln/>
         </p:spPr>
@@ -10904,7 +10904,7 @@
             <a:avLst/>
           </a:prstGeom>
           <a:solidFill>
-            <a:srgbClr val="12A566"/>
+            <a:srgbClr val="2587C5"/>
           </a:solidFill>
           <a:ln/>
         </p:spPr>
@@ -11041,7 +11041,7 @@
             <a:avLst/>
           </a:prstGeom>
           <a:solidFill>
-            <a:srgbClr val="12A566"/>
+            <a:srgbClr val="2587C5"/>
           </a:solidFill>
           <a:ln/>
         </p:spPr>
@@ -11178,7 +11178,7 @@
             <a:avLst/>
           </a:prstGeom>
           <a:solidFill>
-            <a:srgbClr val="12A566"/>
+            <a:srgbClr val="2587C5"/>
           </a:solidFill>
           <a:ln/>
         </p:spPr>
@@ -11315,7 +11315,7 @@
             <a:avLst/>
           </a:prstGeom>
           <a:solidFill>
-            <a:srgbClr val="12A566"/>
+            <a:srgbClr val="2587C5"/>
           </a:solidFill>
           <a:ln/>
         </p:spPr>
@@ -11452,7 +11452,7 @@
             <a:avLst/>
           </a:prstGeom>
           <a:solidFill>
-            <a:srgbClr val="12A566"/>
+            <a:srgbClr val="2587C5"/>
           </a:solidFill>
           <a:ln/>
         </p:spPr>
@@ -11589,7 +11589,7 @@
             <a:avLst/>
           </a:prstGeom>
           <a:solidFill>
-            <a:srgbClr val="12A566"/>
+            <a:srgbClr val="2587C5"/>
           </a:solidFill>
           <a:ln/>
         </p:spPr>
@@ -11726,7 +11726,7 @@
             <a:avLst/>
           </a:prstGeom>
           <a:solidFill>
-            <a:srgbClr val="12A566"/>
+            <a:srgbClr val="2587C5"/>
           </a:solidFill>
           <a:ln/>
         </p:spPr>
@@ -11863,7 +11863,7 @@
             <a:avLst/>
           </a:prstGeom>
           <a:solidFill>
-            <a:srgbClr val="12A566"/>
+            <a:srgbClr val="2587C5"/>
           </a:solidFill>
           <a:ln/>
         </p:spPr>
@@ -12000,7 +12000,7 @@
             <a:avLst/>
           </a:prstGeom>
           <a:solidFill>
-            <a:srgbClr val="12A566"/>
+            <a:srgbClr val="2587C5"/>
           </a:solidFill>
           <a:ln/>
         </p:spPr>
@@ -12137,7 +12137,7 @@
             <a:avLst/>
           </a:prstGeom>
           <a:solidFill>
-            <a:srgbClr val="12A566"/>
+            <a:srgbClr val="2587C5"/>
           </a:solidFill>
           <a:ln/>
         </p:spPr>
@@ -12274,7 +12274,7 @@
             <a:avLst/>
           </a:prstGeom>
           <a:solidFill>
-            <a:srgbClr val="12A566"/>
+            <a:srgbClr val="2587C5"/>
           </a:solidFill>
           <a:ln/>
         </p:spPr>
@@ -12411,7 +12411,7 @@
             <a:avLst/>
           </a:prstGeom>
           <a:solidFill>
-            <a:srgbClr val="12A566"/>
+            <a:srgbClr val="2587C5"/>
           </a:solidFill>
           <a:ln/>
         </p:spPr>
@@ -12548,7 +12548,7 @@
             <a:avLst/>
           </a:prstGeom>
           <a:solidFill>
-            <a:srgbClr val="12A566"/>
+            <a:srgbClr val="2587C5"/>
           </a:solidFill>
           <a:ln/>
         </p:spPr>
@@ -12685,7 +12685,7 @@
             <a:avLst/>
           </a:prstGeom>
           <a:solidFill>
-            <a:srgbClr val="12A566"/>
+            <a:srgbClr val="2587C5"/>
           </a:solidFill>
           <a:ln/>
         </p:spPr>
@@ -22934,7 +22934,7 @@
             <a:avLst/>
           </a:prstGeom>
           <a:solidFill>
-            <a:srgbClr val="12A566"/>
+            <a:srgbClr val="2587C5"/>
           </a:solidFill>
           <a:ln/>
         </p:spPr>
@@ -23071,7 +23071,7 @@
             <a:avLst/>
           </a:prstGeom>
           <a:solidFill>
-            <a:srgbClr val="12A566"/>
+            <a:srgbClr val="2587C5"/>
           </a:solidFill>
           <a:ln/>
         </p:spPr>
@@ -23208,7 +23208,7 @@
             <a:avLst/>
           </a:prstGeom>
           <a:solidFill>
-            <a:srgbClr val="12A566"/>
+            <a:srgbClr val="2587C5"/>
           </a:solidFill>
           <a:ln/>
         </p:spPr>
@@ -23345,7 +23345,7 @@
             <a:avLst/>
           </a:prstGeom>
           <a:solidFill>
-            <a:srgbClr val="12A566"/>
+            <a:srgbClr val="2587C5"/>
           </a:solidFill>
           <a:ln/>
         </p:spPr>
@@ -23482,7 +23482,7 @@
             <a:avLst/>
           </a:prstGeom>
           <a:solidFill>
-            <a:srgbClr val="12A566"/>
+            <a:srgbClr val="2587C5"/>
           </a:solidFill>
           <a:ln/>
         </p:spPr>
@@ -23619,7 +23619,7 @@
             <a:avLst/>
           </a:prstGeom>
           <a:solidFill>
-            <a:srgbClr val="12A566"/>
+            <a:srgbClr val="2587C5"/>
           </a:solidFill>
           <a:ln/>
         </p:spPr>
@@ -23756,7 +23756,7 @@
             <a:avLst/>
           </a:prstGeom>
           <a:solidFill>
-            <a:srgbClr val="12A566"/>
+            <a:srgbClr val="2587C5"/>
           </a:solidFill>
           <a:ln/>
         </p:spPr>
@@ -23893,7 +23893,7 @@
             <a:avLst/>
           </a:prstGeom>
           <a:solidFill>
-            <a:srgbClr val="12A566"/>
+            <a:srgbClr val="2587C5"/>
           </a:solidFill>
           <a:ln/>
         </p:spPr>
@@ -24030,7 +24030,7 @@
             <a:avLst/>
           </a:prstGeom>
           <a:solidFill>
-            <a:srgbClr val="12A566"/>
+            <a:srgbClr val="2587C5"/>
           </a:solidFill>
           <a:ln/>
         </p:spPr>
@@ -24167,7 +24167,7 @@
             <a:avLst/>
           </a:prstGeom>
           <a:solidFill>
-            <a:srgbClr val="12A566"/>
+            <a:srgbClr val="2587C5"/>
           </a:solidFill>
           <a:ln/>
         </p:spPr>
@@ -24304,7 +24304,7 @@
             <a:avLst/>
           </a:prstGeom>
           <a:solidFill>
-            <a:srgbClr val="12A566"/>
+            <a:srgbClr val="2587C5"/>
           </a:solidFill>
           <a:ln/>
         </p:spPr>
@@ -24441,7 +24441,7 @@
             <a:avLst/>
           </a:prstGeom>
           <a:solidFill>
-            <a:srgbClr val="12A566"/>
+            <a:srgbClr val="2587C5"/>
           </a:solidFill>
           <a:ln/>
         </p:spPr>
@@ -24578,7 +24578,7 @@
             <a:avLst/>
           </a:prstGeom>
           <a:solidFill>
-            <a:srgbClr val="12A566"/>
+            <a:srgbClr val="2587C5"/>
           </a:solidFill>
           <a:ln/>
         </p:spPr>
@@ -24715,7 +24715,7 @@
             <a:avLst/>
           </a:prstGeom>
           <a:solidFill>
-            <a:srgbClr val="12A566"/>
+            <a:srgbClr val="2587C5"/>
           </a:solidFill>
           <a:ln/>
         </p:spPr>
@@ -24852,7 +24852,7 @@
             <a:avLst/>
           </a:prstGeom>
           <a:solidFill>
-            <a:srgbClr val="12A566"/>
+            <a:srgbClr val="2587C5"/>
           </a:solidFill>
           <a:ln/>
         </p:spPr>
@@ -24989,7 +24989,7 @@
             <a:avLst/>
           </a:prstGeom>
           <a:solidFill>
-            <a:srgbClr val="12A566"/>
+            <a:srgbClr val="2587C5"/>
           </a:solidFill>
           <a:ln/>
         </p:spPr>
@@ -25126,7 +25126,7 @@
             <a:avLst/>
           </a:prstGeom>
           <a:solidFill>
-            <a:srgbClr val="12A566"/>
+            <a:srgbClr val="2587C5"/>
           </a:solidFill>
           <a:ln/>
         </p:spPr>
@@ -25263,7 +25263,7 @@
             <a:avLst/>
           </a:prstGeom>
           <a:solidFill>
-            <a:srgbClr val="12A566"/>
+            <a:srgbClr val="2587C5"/>
           </a:solidFill>
           <a:ln/>
         </p:spPr>
@@ -25400,7 +25400,7 @@
             <a:avLst/>
           </a:prstGeom>
           <a:solidFill>
-            <a:srgbClr val="12A566"/>
+            <a:srgbClr val="2587C5"/>
           </a:solidFill>
           <a:ln/>
         </p:spPr>
@@ -25537,7 +25537,7 @@
             <a:avLst/>
           </a:prstGeom>
           <a:solidFill>
-            <a:srgbClr val="12A566"/>
+            <a:srgbClr val="2587C5"/>
           </a:solidFill>
           <a:ln/>
         </p:spPr>
@@ -25674,7 +25674,7 @@
             <a:avLst/>
           </a:prstGeom>
           <a:solidFill>
-            <a:srgbClr val="12A566"/>
+            <a:srgbClr val="2587C5"/>
           </a:solidFill>
           <a:ln/>
         </p:spPr>
@@ -25811,7 +25811,7 @@
             <a:avLst/>
           </a:prstGeom>
           <a:solidFill>
-            <a:srgbClr val="12A566"/>
+            <a:srgbClr val="2587C5"/>
           </a:solidFill>
           <a:ln/>
         </p:spPr>
@@ -25948,7 +25948,7 @@
             <a:avLst/>
           </a:prstGeom>
           <a:solidFill>
-            <a:srgbClr val="12A566"/>
+            <a:srgbClr val="2587C5"/>
           </a:solidFill>
           <a:ln/>
         </p:spPr>
@@ -26085,7 +26085,7 @@
             <a:avLst/>
           </a:prstGeom>
           <a:solidFill>
-            <a:srgbClr val="12A566"/>
+            <a:srgbClr val="2587C5"/>
           </a:solidFill>
           <a:ln/>
         </p:spPr>
@@ -26222,7 +26222,7 @@
             <a:avLst/>
           </a:prstGeom>
           <a:solidFill>
-            <a:srgbClr val="12A566"/>
+            <a:srgbClr val="2587C5"/>
           </a:solidFill>
           <a:ln/>
         </p:spPr>
@@ -26359,7 +26359,7 @@
             <a:avLst/>
           </a:prstGeom>
           <a:solidFill>
-            <a:srgbClr val="12A566"/>
+            <a:srgbClr val="2587C5"/>
           </a:solidFill>
           <a:ln/>
         </p:spPr>
@@ -26496,7 +26496,7 @@
             <a:avLst/>
           </a:prstGeom>
           <a:solidFill>
-            <a:srgbClr val="12A566"/>
+            <a:srgbClr val="2587C5"/>
           </a:solidFill>
           <a:ln/>
         </p:spPr>
@@ -26633,7 +26633,7 @@
             <a:avLst/>
           </a:prstGeom>
           <a:solidFill>
-            <a:srgbClr val="12A566"/>
+            <a:srgbClr val="2587C5"/>
           </a:solidFill>
           <a:ln/>
         </p:spPr>
@@ -26770,7 +26770,7 @@
             <a:avLst/>
           </a:prstGeom>
           <a:solidFill>
-            <a:srgbClr val="12A566"/>
+            <a:srgbClr val="2587C5"/>
           </a:solidFill>
           <a:ln/>
         </p:spPr>
@@ -26907,7 +26907,7 @@
             <a:avLst/>
           </a:prstGeom>
           <a:solidFill>
-            <a:srgbClr val="12A566"/>
+            <a:srgbClr val="2587C5"/>
           </a:solidFill>
           <a:ln/>
         </p:spPr>
@@ -27044,7 +27044,7 @@
             <a:avLst/>
           </a:prstGeom>
           <a:solidFill>
-            <a:srgbClr val="12A566"/>
+            <a:srgbClr val="2587C5"/>
           </a:solidFill>
           <a:ln/>
         </p:spPr>
@@ -27181,7 +27181,7 @@
             <a:avLst/>
           </a:prstGeom>
           <a:solidFill>
-            <a:srgbClr val="12A566"/>
+            <a:srgbClr val="2587C5"/>
           </a:solidFill>
           <a:ln/>
         </p:spPr>
@@ -27318,7 +27318,7 @@
             <a:avLst/>
           </a:prstGeom>
           <a:solidFill>
-            <a:srgbClr val="12A566"/>
+            <a:srgbClr val="2587C5"/>
           </a:solidFill>
           <a:ln/>
         </p:spPr>
@@ -36714,7 +36714,7 @@
             <a:avLst/>
           </a:prstGeom>
           <a:solidFill>
-            <a:srgbClr val="12A566"/>
+            <a:srgbClr val="2587C5"/>
           </a:solidFill>
           <a:ln/>
         </p:spPr>
@@ -36851,7 +36851,7 @@
             <a:avLst/>
           </a:prstGeom>
           <a:solidFill>
-            <a:srgbClr val="12A566"/>
+            <a:srgbClr val="2587C5"/>
           </a:solidFill>
           <a:ln/>
         </p:spPr>
@@ -36988,7 +36988,7 @@
             <a:avLst/>
           </a:prstGeom>
           <a:solidFill>
-            <a:srgbClr val="12A566"/>
+            <a:srgbClr val="2587C5"/>
           </a:solidFill>
           <a:ln/>
         </p:spPr>
@@ -37125,7 +37125,7 @@
             <a:avLst/>
           </a:prstGeom>
           <a:solidFill>
-            <a:srgbClr val="12A566"/>
+            <a:srgbClr val="2587C5"/>
           </a:solidFill>
           <a:ln/>
         </p:spPr>
@@ -37262,7 +37262,7 @@
             <a:avLst/>
           </a:prstGeom>
           <a:solidFill>
-            <a:srgbClr val="12A566"/>
+            <a:srgbClr val="2587C5"/>
           </a:solidFill>
           <a:ln/>
         </p:spPr>
@@ -37399,7 +37399,7 @@
             <a:avLst/>
           </a:prstGeom>
           <a:solidFill>
-            <a:srgbClr val="12A566"/>
+            <a:srgbClr val="2587C5"/>
           </a:solidFill>
           <a:ln/>
         </p:spPr>
@@ -37536,7 +37536,7 @@
             <a:avLst/>
           </a:prstGeom>
           <a:solidFill>
-            <a:srgbClr val="12A566"/>
+            <a:srgbClr val="2587C5"/>
           </a:solidFill>
           <a:ln/>
         </p:spPr>
@@ -37673,7 +37673,7 @@
             <a:avLst/>
           </a:prstGeom>
           <a:solidFill>
-            <a:srgbClr val="12A566"/>
+            <a:srgbClr val="2587C5"/>
           </a:solidFill>
           <a:ln/>
         </p:spPr>
@@ -37810,7 +37810,7 @@
             <a:avLst/>
           </a:prstGeom>
           <a:solidFill>
-            <a:srgbClr val="12A566"/>
+            <a:srgbClr val="2587C5"/>
           </a:solidFill>
           <a:ln/>
         </p:spPr>
@@ -37947,7 +37947,7 @@
             <a:avLst/>
           </a:prstGeom>
           <a:solidFill>
-            <a:srgbClr val="12A566"/>
+            <a:srgbClr val="2587C5"/>
           </a:solidFill>
           <a:ln/>
         </p:spPr>
@@ -38084,7 +38084,7 @@
             <a:avLst/>
           </a:prstGeom>
           <a:solidFill>
-            <a:srgbClr val="12A566"/>
+            <a:srgbClr val="2587C5"/>
           </a:solidFill>
           <a:ln/>
         </p:spPr>
@@ -38221,7 +38221,7 @@
             <a:avLst/>
           </a:prstGeom>
           <a:solidFill>
-            <a:srgbClr val="12A566"/>
+            <a:srgbClr val="2587C5"/>
           </a:solidFill>
           <a:ln/>
         </p:spPr>
@@ -38358,7 +38358,7 @@
             <a:avLst/>
           </a:prstGeom>
           <a:solidFill>
-            <a:srgbClr val="12A566"/>
+            <a:srgbClr val="2587C5"/>
           </a:solidFill>
           <a:ln/>
         </p:spPr>
@@ -38495,7 +38495,7 @@
             <a:avLst/>
           </a:prstGeom>
           <a:solidFill>
-            <a:srgbClr val="12A566"/>
+            <a:srgbClr val="2587C5"/>
           </a:solidFill>
           <a:ln/>
         </p:spPr>
@@ -38632,7 +38632,7 @@
             <a:avLst/>
           </a:prstGeom>
           <a:solidFill>
-            <a:srgbClr val="12A566"/>
+            <a:srgbClr val="2587C5"/>
           </a:solidFill>
           <a:ln/>
         </p:spPr>
@@ -38769,7 +38769,7 @@
             <a:avLst/>
           </a:prstGeom>
           <a:solidFill>
-            <a:srgbClr val="12A566"/>
+            <a:srgbClr val="2587C5"/>
           </a:solidFill>
           <a:ln/>
         </p:spPr>
@@ -38906,7 +38906,7 @@
             <a:avLst/>
           </a:prstGeom>
           <a:solidFill>
-            <a:srgbClr val="12A566"/>
+            <a:srgbClr val="2587C5"/>
           </a:solidFill>
           <a:ln/>
         </p:spPr>
@@ -39043,7 +39043,7 @@
             <a:avLst/>
           </a:prstGeom>
           <a:solidFill>
-            <a:srgbClr val="12A566"/>
+            <a:srgbClr val="2587C5"/>
           </a:solidFill>
           <a:ln/>
         </p:spPr>
@@ -39180,7 +39180,7 @@
             <a:avLst/>
           </a:prstGeom>
           <a:solidFill>
-            <a:srgbClr val="12A566"/>
+            <a:srgbClr val="2587C5"/>
           </a:solidFill>
           <a:ln/>
         </p:spPr>
@@ -39317,7 +39317,7 @@
             <a:avLst/>
           </a:prstGeom>
           <a:solidFill>
-            <a:srgbClr val="12A566"/>
+            <a:srgbClr val="2587C5"/>
           </a:solidFill>
           <a:ln/>
         </p:spPr>
@@ -39454,7 +39454,7 @@
             <a:avLst/>
           </a:prstGeom>
           <a:solidFill>
-            <a:srgbClr val="12A566"/>
+            <a:srgbClr val="2587C5"/>
           </a:solidFill>
           <a:ln/>
         </p:spPr>
@@ -39591,7 +39591,7 @@
             <a:avLst/>
           </a:prstGeom>
           <a:solidFill>
-            <a:srgbClr val="12A566"/>
+            <a:srgbClr val="2587C5"/>
           </a:solidFill>
           <a:ln/>
         </p:spPr>
@@ -39728,7 +39728,7 @@
             <a:avLst/>
           </a:prstGeom>
           <a:solidFill>
-            <a:srgbClr val="12A566"/>
+            <a:srgbClr val="2587C5"/>
           </a:solidFill>
           <a:ln/>
         </p:spPr>
@@ -39865,7 +39865,7 @@
             <a:avLst/>
           </a:prstGeom>
           <a:solidFill>
-            <a:srgbClr val="12A566"/>
+            <a:srgbClr val="2587C5"/>
           </a:solidFill>
           <a:ln/>
         </p:spPr>
@@ -40002,7 +40002,7 @@
             <a:avLst/>
           </a:prstGeom>
           <a:solidFill>
-            <a:srgbClr val="12A566"/>
+            <a:srgbClr val="2587C5"/>
           </a:solidFill>
           <a:ln/>
         </p:spPr>
@@ -40139,7 +40139,7 @@
             <a:avLst/>
           </a:prstGeom>
           <a:solidFill>
-            <a:srgbClr val="12A566"/>
+            <a:srgbClr val="2587C5"/>
           </a:solidFill>
           <a:ln/>
         </p:spPr>
@@ -40276,7 +40276,7 @@
             <a:avLst/>
           </a:prstGeom>
           <a:solidFill>
-            <a:srgbClr val="12A566"/>
+            <a:srgbClr val="2587C5"/>
           </a:solidFill>
           <a:ln/>
         </p:spPr>
@@ -40413,7 +40413,7 @@
             <a:avLst/>
           </a:prstGeom>
           <a:solidFill>
-            <a:srgbClr val="12A566"/>
+            <a:srgbClr val="2587C5"/>
           </a:solidFill>
           <a:ln/>
         </p:spPr>
@@ -40550,7 +40550,7 @@
             <a:avLst/>
           </a:prstGeom>
           <a:solidFill>
-            <a:srgbClr val="12A566"/>
+            <a:srgbClr val="2587C5"/>
           </a:solidFill>
           <a:ln/>
         </p:spPr>
@@ -40687,7 +40687,7 @@
             <a:avLst/>
           </a:prstGeom>
           <a:solidFill>
-            <a:srgbClr val="12A566"/>
+            <a:srgbClr val="2587C5"/>
           </a:solidFill>
           <a:ln/>
         </p:spPr>
@@ -40824,7 +40824,7 @@
             <a:avLst/>
           </a:prstGeom>
           <a:solidFill>
-            <a:srgbClr val="12A566"/>
+            <a:srgbClr val="2587C5"/>
           </a:solidFill>
           <a:ln/>
         </p:spPr>
@@ -40961,7 +40961,7 @@
             <a:avLst/>
           </a:prstGeom>
           <a:solidFill>
-            <a:srgbClr val="12A566"/>
+            <a:srgbClr val="2587C5"/>
           </a:solidFill>
           <a:ln/>
         </p:spPr>
@@ -41098,7 +41098,7 @@
             <a:avLst/>
           </a:prstGeom>
           <a:solidFill>
-            <a:srgbClr val="12A566"/>
+            <a:srgbClr val="2587C5"/>
           </a:solidFill>
           <a:ln/>
         </p:spPr>

--- a/day2-deck/decks/Fixed Ops Gross - House Style.pptx
+++ b/day2-deck/decks/Fixed Ops Gross - House Style.pptx
@@ -6205,7 +6205,7 @@
           <a:p>
             <a:r>
               <a:rPr lang="en-US" dirty="0"/>
-              <a:t>Source: Qlik - Profit &amp; Loss. Same-store, INEOS excluded (opened 2026). Fixed ops = service + parts; GMC Prescott body shop gross excluded. Top five and bottom four stores by variance.</a:t>
+              <a:t>Source: Qlik - Profit &amp; Loss. Same-store, INEOS excluded (opened 2026). Fixed ops = service + parts; GMC Prescott body shop gross excluded. Top and bottom five stores by percent change in fixed ops gross, Jan-Sep 2026 vs 2025.Conversation starter: each top store says one thing they started doing; each bottom store says what got in the way and what they would try. The room trades ideas.</a:t>
             </a:r>
             <a:endParaRPr lang="en-US" dirty="0"/>
           </a:p>
@@ -33970,7 +33970,7 @@
         <p:spPr>
           <a:xfrm>
             <a:off x="457200" y="1207008"/>
-            <a:ext cx="5486400" cy="4782312"/>
+            <a:ext cx="11274552" cy="4782312"/>
           </a:xfrm>
           <a:prstGeom prst="rect">
             <a:avLst/>
@@ -33989,8 +33989,8 @@
         </p:nvSpPr>
         <p:spPr>
           <a:xfrm>
-            <a:off x="685800" y="1344168"/>
-            <a:ext cx="5029200" cy="292608"/>
+            <a:off x="713232" y="1298448"/>
+            <a:ext cx="10762488" cy="310896"/>
           </a:xfrm>
           <a:prstGeom prst="rect">
             <a:avLst/>
@@ -34006,17 +34006,17 @@
               <a:buNone/>
             </a:pPr>
             <a:r>
-              <a:rPr lang="en-US" sz="1500" dirty="0">
-                <a:solidFill>
-                  <a:srgbClr val="1A1A1A"/>
-                </a:solidFill>
-                <a:latin typeface="Inter" pitchFamily="34" charset="0"/>
-                <a:ea typeface="Inter" pitchFamily="34" charset="-122"/>
-                <a:cs typeface="Inter" pitchFamily="34" charset="-120"/>
-              </a:rPr>
-              <a:t>How the group got there, Jan–Sep</a:t>
-            </a:r>
-            <a:endParaRPr lang="en-US" sz="1500" dirty="0"/>
+              <a:rPr lang="en-US" sz="1400" dirty="0">
+                <a:solidFill>
+                  <a:srgbClr val="595959"/>
+                </a:solidFill>
+                <a:latin typeface="Inter" pitchFamily="34" charset="0"/>
+                <a:ea typeface="Inter" pitchFamily="34" charset="-122"/>
+                <a:cs typeface="Inter" pitchFamily="34" charset="-120"/>
+              </a:rPr>
+              <a:t>Jan–Sep 2026 against Jan–Sep 2025. Group $181.33M → $188.80M (+4.1%). Ranked by percent change.</a:t>
+            </a:r>
+            <a:endParaRPr lang="en-US" sz="1400" dirty="0"/>
           </a:p>
         </p:txBody>
       </p:sp>
@@ -34028,28 +34028,145 @@
         </p:nvSpPr>
         <p:spPr>
           <a:xfrm>
-            <a:off x="685800" y="1691640"/>
-            <a:ext cx="5029200" cy="10973"/>
+            <a:off x="658368" y="1737360"/>
+            <a:ext cx="5321808" cy="45720"/>
           </a:xfrm>
           <a:prstGeom prst="rect">
             <a:avLst/>
           </a:prstGeom>
           <a:solidFill>
-            <a:srgbClr val="1A1A1A"/>
+            <a:srgbClr val="12A566"/>
           </a:solidFill>
           <a:ln/>
         </p:spPr>
       </p:sp>
       <p:sp>
         <p:nvSpPr>
-          <p:cNvPr id="8" name="Shape 6"/>
+          <p:cNvPr id="8" name="Text 6"/>
+          <p:cNvSpPr txBox="1"/>
+          <p:nvPr/>
+        </p:nvSpPr>
+        <p:spPr>
+          <a:xfrm>
+            <a:off x="749808" y="1810512"/>
+            <a:ext cx="1828800" cy="274320"/>
+          </a:xfrm>
+          <a:prstGeom prst="rect">
+            <a:avLst/>
+          </a:prstGeom>
+          <a:noFill/>
+          <a:ln/>
+        </p:spPr>
+        <p:txBody>
+          <a:bodyPr wrap="square" lIns="0" tIns="0" rIns="0" bIns="0" rtlCol="0" anchor="ctr"/>
+          <a:lstStyle/>
+          <a:p>
+            <a:pPr indent="0" marL="0">
+              <a:buNone/>
+            </a:pPr>
+            <a:r>
+              <a:rPr lang="en-US" sz="1400" b="1" spc="100" kern="0" dirty="0">
+                <a:solidFill>
+                  <a:srgbClr val="0B7A4A"/>
+                </a:solidFill>
+                <a:latin typeface="Inter" pitchFamily="34" charset="0"/>
+                <a:ea typeface="Inter" pitchFamily="34" charset="-122"/>
+                <a:cs typeface="Inter" pitchFamily="34" charset="-120"/>
+              </a:rPr>
+              <a:t>TOP 5</a:t>
+            </a:r>
+            <a:endParaRPr lang="en-US" sz="1400" dirty="0"/>
+          </a:p>
+        </p:txBody>
+      </p:sp>
+      <p:sp>
+        <p:nvSpPr>
+          <p:cNvPr id="9" name="Text 7"/>
+          <p:cNvSpPr txBox="1"/>
+          <p:nvPr/>
+        </p:nvSpPr>
+        <p:spPr>
+          <a:xfrm>
+            <a:off x="2898648" y="1810512"/>
+            <a:ext cx="1828800" cy="274320"/>
+          </a:xfrm>
+          <a:prstGeom prst="rect">
+            <a:avLst/>
+          </a:prstGeom>
+          <a:noFill/>
+          <a:ln/>
+        </p:spPr>
+        <p:txBody>
+          <a:bodyPr wrap="square" lIns="0" tIns="0" rIns="0" bIns="0" rtlCol="0" anchor="ctr"/>
+          <a:lstStyle/>
+          <a:p>
+            <a:pPr indent="0" marL="0">
+              <a:buNone/>
+            </a:pPr>
+            <a:r>
+              <a:rPr lang="en-US" sz="1400" b="1" dirty="0">
+                <a:solidFill>
+                  <a:srgbClr val="595959"/>
+                </a:solidFill>
+                <a:latin typeface="Inter" pitchFamily="34" charset="0"/>
+                <a:ea typeface="Inter" pitchFamily="34" charset="-122"/>
+                <a:cs typeface="Inter" pitchFamily="34" charset="-120"/>
+              </a:rPr>
+              <a:t>2025 → 2026</a:t>
+            </a:r>
+            <a:endParaRPr lang="en-US" sz="1400" dirty="0"/>
+          </a:p>
+        </p:txBody>
+      </p:sp>
+      <p:sp>
+        <p:nvSpPr>
+          <p:cNvPr id="10" name="Text 8"/>
+          <p:cNvSpPr txBox="1"/>
+          <p:nvPr/>
+        </p:nvSpPr>
+        <p:spPr>
+          <a:xfrm>
+            <a:off x="4864608" y="1810512"/>
+            <a:ext cx="1051560" cy="274320"/>
+          </a:xfrm>
+          <a:prstGeom prst="rect">
+            <a:avLst/>
+          </a:prstGeom>
+          <a:noFill/>
+          <a:ln/>
+        </p:spPr>
+        <p:txBody>
+          <a:bodyPr wrap="square" lIns="0" tIns="0" rIns="0" bIns="0" rtlCol="0" anchor="ctr"/>
+          <a:lstStyle/>
+          <a:p>
+            <a:pPr algn="r" indent="0" marL="0">
+              <a:buNone/>
+            </a:pPr>
+            <a:r>
+              <a:rPr lang="en-US" sz="1400" b="1" dirty="0">
+                <a:solidFill>
+                  <a:srgbClr val="595959"/>
+                </a:solidFill>
+                <a:latin typeface="Inter" pitchFamily="34" charset="0"/>
+                <a:ea typeface="Inter" pitchFamily="34" charset="-122"/>
+                <a:cs typeface="Inter" pitchFamily="34" charset="-120"/>
+              </a:rPr>
+              <a:t>Change</a:t>
+            </a:r>
+            <a:endParaRPr lang="en-US" sz="1400" dirty="0"/>
+          </a:p>
+        </p:txBody>
+      </p:sp>
+      <p:sp>
+        <p:nvSpPr>
+          <p:cNvPr id="11" name="Shape 9"/>
           <p:cNvSpPr/>
           <p:nvPr/>
         </p:nvSpPr>
         <p:spPr>
           <a:xfrm>
-            <a:off x="713232" y="1700784"/>
-            <a:ext cx="4974336" cy="621792"/>
+            <a:off x="658368" y="2121408"/>
+            <a:ext cx="5321808" cy="751637"/>
           </a:xfrm>
           <a:prstGeom prst="rect">
             <a:avLst/>
@@ -34062,14 +34179,14 @@
       </p:sp>
       <p:sp>
         <p:nvSpPr>
-          <p:cNvPr id="9" name="Text 7"/>
-          <p:cNvSpPr txBox="1"/>
-          <p:nvPr/>
-        </p:nvSpPr>
-        <p:spPr>
-          <a:xfrm>
-            <a:off x="896112" y="1728216"/>
-            <a:ext cx="2743200" cy="457200"/>
+          <p:cNvPr id="12" name="Text 10"/>
+          <p:cNvSpPr txBox="1"/>
+          <p:nvPr/>
+        </p:nvSpPr>
+        <p:spPr>
+          <a:xfrm>
+            <a:off x="749808" y="2121408"/>
+            <a:ext cx="320040" cy="751637"/>
           </a:xfrm>
           <a:prstGeom prst="rect">
             <a:avLst/>
@@ -34085,7 +34202,46 @@
               <a:buNone/>
             </a:pPr>
             <a:r>
-              <a:rPr lang="en-US" sz="2600" b="1" dirty="0">
+              <a:rPr lang="en-US" sz="1500" b="1" dirty="0">
+                <a:solidFill>
+                  <a:srgbClr val="0B2C4A"/>
+                </a:solidFill>
+                <a:latin typeface="Inter" pitchFamily="34" charset="0"/>
+                <a:ea typeface="Inter" pitchFamily="34" charset="-122"/>
+                <a:cs typeface="Inter" pitchFamily="34" charset="-120"/>
+              </a:rPr>
+              <a:t>1</a:t>
+            </a:r>
+            <a:endParaRPr lang="en-US" sz="1500" dirty="0"/>
+          </a:p>
+        </p:txBody>
+      </p:sp>
+      <p:sp>
+        <p:nvSpPr>
+          <p:cNvPr id="13" name="Text 11"/>
+          <p:cNvSpPr txBox="1"/>
+          <p:nvPr/>
+        </p:nvSpPr>
+        <p:spPr>
+          <a:xfrm>
+            <a:off x="1115568" y="2121408"/>
+            <a:ext cx="1737360" cy="751637"/>
+          </a:xfrm>
+          <a:prstGeom prst="rect">
+            <a:avLst/>
+          </a:prstGeom>
+          <a:noFill/>
+          <a:ln/>
+        </p:spPr>
+        <p:txBody>
+          <a:bodyPr wrap="square" lIns="0" tIns="0" rIns="0" bIns="0" rtlCol="0" anchor="ctr"/>
+          <a:lstStyle/>
+          <a:p>
+            <a:pPr indent="0" marL="0">
+              <a:buNone/>
+            </a:pPr>
+            <a:r>
+              <a:rPr lang="en-US" sz="1400" b="1" dirty="0">
                 <a:solidFill>
                   <a:srgbClr val="1A1A1A"/>
                 </a:solidFill>
@@ -34093,34 +34249,34 @@
                 <a:ea typeface="Inter" pitchFamily="34" charset="-122"/>
                 <a:cs typeface="Inter" pitchFamily="34" charset="-120"/>
               </a:rPr>
-              <a:t>$181.33M</a:t>
-            </a:r>
-            <a:endParaRPr lang="en-US" sz="2600" dirty="0"/>
-          </a:p>
-        </p:txBody>
-      </p:sp>
-      <p:sp>
-        <p:nvSpPr>
-          <p:cNvPr id="10" name="Text 8"/>
-          <p:cNvSpPr txBox="1"/>
-          <p:nvPr/>
-        </p:nvSpPr>
-        <p:spPr>
-          <a:xfrm>
-            <a:off x="3657600" y="1728216"/>
-            <a:ext cx="1874520" cy="585216"/>
-          </a:xfrm>
-          <a:prstGeom prst="rect">
-            <a:avLst/>
-          </a:prstGeom>
-          <a:noFill/>
-          <a:ln/>
-        </p:spPr>
-        <p:txBody>
-          <a:bodyPr wrap="square" lIns="0" tIns="0" rIns="0" bIns="0" rtlCol="0" anchor="ctr"/>
-          <a:lstStyle/>
-          <a:p>
-            <a:pPr algn="r" indent="0" marL="0">
+              <a:t>Hyundai Prescott</a:t>
+            </a:r>
+            <a:endParaRPr lang="en-US" sz="1400" dirty="0"/>
+          </a:p>
+        </p:txBody>
+      </p:sp>
+      <p:sp>
+        <p:nvSpPr>
+          <p:cNvPr id="14" name="Text 12"/>
+          <p:cNvSpPr txBox="1"/>
+          <p:nvPr/>
+        </p:nvSpPr>
+        <p:spPr>
+          <a:xfrm>
+            <a:off x="2898648" y="2121408"/>
+            <a:ext cx="1920240" cy="751637"/>
+          </a:xfrm>
+          <a:prstGeom prst="rect">
+            <a:avLst/>
+          </a:prstGeom>
+          <a:noFill/>
+          <a:ln/>
+        </p:spPr>
+        <p:txBody>
+          <a:bodyPr wrap="square" lIns="0" tIns="0" rIns="0" bIns="0" rtlCol="0" anchor="ctr"/>
+          <a:lstStyle/>
+          <a:p>
+            <a:pPr indent="0" marL="0">
               <a:buNone/>
             </a:pPr>
             <a:r>
@@ -34132,7 +34288,35 @@
                 <a:ea typeface="Inter" pitchFamily="34" charset="-122"/>
                 <a:cs typeface="Inter" pitchFamily="34" charset="-120"/>
               </a:rPr>
-              <a:t>2025 group</a:t>
+              <a:t>$1.13M  </a:t>
+            </a:r>
+            <a:pPr indent="0" marL="0">
+              <a:buNone/>
+            </a:pPr>
+            <a:r>
+              <a:rPr lang="en-US" sz="1400" b="1" dirty="0">
+                <a:solidFill>
+                  <a:srgbClr val="0B7A4A"/>
+                </a:solidFill>
+                <a:latin typeface="Inter" pitchFamily="34" charset="0"/>
+                <a:ea typeface="Inter" pitchFamily="34" charset="-122"/>
+                <a:cs typeface="Inter" pitchFamily="34" charset="-120"/>
+              </a:rPr>
+              <a:t>→  </a:t>
+            </a:r>
+            <a:pPr indent="0" marL="0">
+              <a:buNone/>
+            </a:pPr>
+            <a:r>
+              <a:rPr lang="en-US" sz="1400" b="1" dirty="0">
+                <a:solidFill>
+                  <a:srgbClr val="0B7A4A"/>
+                </a:solidFill>
+                <a:latin typeface="Inter" pitchFamily="34" charset="0"/>
+                <a:ea typeface="Inter" pitchFamily="34" charset="-122"/>
+                <a:cs typeface="Inter" pitchFamily="34" charset="-120"/>
+              </a:rPr>
+              <a:t>$1.54M</a:t>
             </a:r>
             <a:endParaRPr lang="en-US" sz="1400" dirty="0"/>
           </a:p>
@@ -34140,93 +34324,645 @@
       </p:sp>
       <p:sp>
         <p:nvSpPr>
-          <p:cNvPr id="11" name="Shape 9"/>
+          <p:cNvPr id="15" name="Text 13"/>
+          <p:cNvSpPr txBox="1"/>
+          <p:nvPr/>
+        </p:nvSpPr>
+        <p:spPr>
+          <a:xfrm>
+            <a:off x="4864608" y="2121408"/>
+            <a:ext cx="1051560" cy="751637"/>
+          </a:xfrm>
+          <a:prstGeom prst="rect">
+            <a:avLst/>
+          </a:prstGeom>
+          <a:noFill/>
+          <a:ln/>
+        </p:spPr>
+        <p:txBody>
+          <a:bodyPr wrap="square" lIns="0" tIns="0" rIns="0" bIns="0" rtlCol="0" anchor="ctr"/>
+          <a:lstStyle/>
+          <a:p>
+            <a:pPr algn="r" indent="0" marL="0">
+              <a:buNone/>
+            </a:pPr>
+            <a:r>
+              <a:rPr lang="en-US" sz="1600" b="1" dirty="0">
+                <a:solidFill>
+                  <a:srgbClr val="0B7A4A"/>
+                </a:solidFill>
+                <a:latin typeface="Inter" pitchFamily="34" charset="0"/>
+                <a:ea typeface="Inter" pitchFamily="34" charset="-122"/>
+                <a:cs typeface="Inter" pitchFamily="34" charset="-120"/>
+              </a:rPr>
+              <a:t>+35.8%</a:t>
+            </a:r>
+            <a:endParaRPr lang="en-US" sz="1600" dirty="0"/>
+          </a:p>
+        </p:txBody>
+      </p:sp>
+      <p:sp>
+        <p:nvSpPr>
+          <p:cNvPr id="16" name="Text 14"/>
+          <p:cNvSpPr txBox="1"/>
+          <p:nvPr/>
+        </p:nvSpPr>
+        <p:spPr>
+          <a:xfrm>
+            <a:off x="749808" y="2873045"/>
+            <a:ext cx="320040" cy="751637"/>
+          </a:xfrm>
+          <a:prstGeom prst="rect">
+            <a:avLst/>
+          </a:prstGeom>
+          <a:noFill/>
+          <a:ln/>
+        </p:spPr>
+        <p:txBody>
+          <a:bodyPr wrap="square" lIns="0" tIns="0" rIns="0" bIns="0" rtlCol="0" anchor="ctr"/>
+          <a:lstStyle/>
+          <a:p>
+            <a:pPr indent="0" marL="0">
+              <a:buNone/>
+            </a:pPr>
+            <a:r>
+              <a:rPr lang="en-US" sz="1500" b="1" dirty="0">
+                <a:solidFill>
+                  <a:srgbClr val="0B2C4A"/>
+                </a:solidFill>
+                <a:latin typeface="Inter" pitchFamily="34" charset="0"/>
+                <a:ea typeface="Inter" pitchFamily="34" charset="-122"/>
+                <a:cs typeface="Inter" pitchFamily="34" charset="-120"/>
+              </a:rPr>
+              <a:t>2</a:t>
+            </a:r>
+            <a:endParaRPr lang="en-US" sz="1500" dirty="0"/>
+          </a:p>
+        </p:txBody>
+      </p:sp>
+      <p:sp>
+        <p:nvSpPr>
+          <p:cNvPr id="17" name="Text 15"/>
+          <p:cNvSpPr txBox="1"/>
+          <p:nvPr/>
+        </p:nvSpPr>
+        <p:spPr>
+          <a:xfrm>
+            <a:off x="1115568" y="2873045"/>
+            <a:ext cx="1737360" cy="751637"/>
+          </a:xfrm>
+          <a:prstGeom prst="rect">
+            <a:avLst/>
+          </a:prstGeom>
+          <a:noFill/>
+          <a:ln/>
+        </p:spPr>
+        <p:txBody>
+          <a:bodyPr wrap="square" lIns="0" tIns="0" rIns="0" bIns="0" rtlCol="0" anchor="ctr"/>
+          <a:lstStyle/>
+          <a:p>
+            <a:pPr indent="0" marL="0">
+              <a:buNone/>
+            </a:pPr>
+            <a:r>
+              <a:rPr lang="en-US" sz="1400" b="1" dirty="0">
+                <a:solidFill>
+                  <a:srgbClr val="1A1A1A"/>
+                </a:solidFill>
+                <a:latin typeface="Inter" pitchFamily="34" charset="0"/>
+                <a:ea typeface="Inter" pitchFamily="34" charset="-122"/>
+                <a:cs typeface="Inter" pitchFamily="34" charset="-120"/>
+              </a:rPr>
+              <a:t>Lincoln</a:t>
+            </a:r>
+            <a:endParaRPr lang="en-US" sz="1400" dirty="0"/>
+          </a:p>
+        </p:txBody>
+      </p:sp>
+      <p:sp>
+        <p:nvSpPr>
+          <p:cNvPr id="18" name="Text 16"/>
+          <p:cNvSpPr txBox="1"/>
+          <p:nvPr/>
+        </p:nvSpPr>
+        <p:spPr>
+          <a:xfrm>
+            <a:off x="2898648" y="2873045"/>
+            <a:ext cx="1920240" cy="751637"/>
+          </a:xfrm>
+          <a:prstGeom prst="rect">
+            <a:avLst/>
+          </a:prstGeom>
+          <a:noFill/>
+          <a:ln/>
+        </p:spPr>
+        <p:txBody>
+          <a:bodyPr wrap="square" lIns="0" tIns="0" rIns="0" bIns="0" rtlCol="0" anchor="ctr"/>
+          <a:lstStyle/>
+          <a:p>
+            <a:pPr indent="0" marL="0">
+              <a:buNone/>
+            </a:pPr>
+            <a:r>
+              <a:rPr lang="en-US" sz="1400" dirty="0">
+                <a:solidFill>
+                  <a:srgbClr val="595959"/>
+                </a:solidFill>
+                <a:latin typeface="Inter" pitchFamily="34" charset="0"/>
+                <a:ea typeface="Inter" pitchFamily="34" charset="-122"/>
+                <a:cs typeface="Inter" pitchFamily="34" charset="-120"/>
+              </a:rPr>
+              <a:t>$2.26M  </a:t>
+            </a:r>
+            <a:pPr indent="0" marL="0">
+              <a:buNone/>
+            </a:pPr>
+            <a:r>
+              <a:rPr lang="en-US" sz="1400" b="1" dirty="0">
+                <a:solidFill>
+                  <a:srgbClr val="0B7A4A"/>
+                </a:solidFill>
+                <a:latin typeface="Inter" pitchFamily="34" charset="0"/>
+                <a:ea typeface="Inter" pitchFamily="34" charset="-122"/>
+                <a:cs typeface="Inter" pitchFamily="34" charset="-120"/>
+              </a:rPr>
+              <a:t>→  </a:t>
+            </a:r>
+            <a:pPr indent="0" marL="0">
+              <a:buNone/>
+            </a:pPr>
+            <a:r>
+              <a:rPr lang="en-US" sz="1400" b="1" dirty="0">
+                <a:solidFill>
+                  <a:srgbClr val="0B7A4A"/>
+                </a:solidFill>
+                <a:latin typeface="Inter" pitchFamily="34" charset="0"/>
+                <a:ea typeface="Inter" pitchFamily="34" charset="-122"/>
+                <a:cs typeface="Inter" pitchFamily="34" charset="-120"/>
+              </a:rPr>
+              <a:t>$2.98M</a:t>
+            </a:r>
+            <a:endParaRPr lang="en-US" sz="1400" dirty="0"/>
+          </a:p>
+        </p:txBody>
+      </p:sp>
+      <p:sp>
+        <p:nvSpPr>
+          <p:cNvPr id="19" name="Text 17"/>
+          <p:cNvSpPr txBox="1"/>
+          <p:nvPr/>
+        </p:nvSpPr>
+        <p:spPr>
+          <a:xfrm>
+            <a:off x="4864608" y="2873045"/>
+            <a:ext cx="1051560" cy="751637"/>
+          </a:xfrm>
+          <a:prstGeom prst="rect">
+            <a:avLst/>
+          </a:prstGeom>
+          <a:noFill/>
+          <a:ln/>
+        </p:spPr>
+        <p:txBody>
+          <a:bodyPr wrap="square" lIns="0" tIns="0" rIns="0" bIns="0" rtlCol="0" anchor="ctr"/>
+          <a:lstStyle/>
+          <a:p>
+            <a:pPr algn="r" indent="0" marL="0">
+              <a:buNone/>
+            </a:pPr>
+            <a:r>
+              <a:rPr lang="en-US" sz="1600" b="1" dirty="0">
+                <a:solidFill>
+                  <a:srgbClr val="0B7A4A"/>
+                </a:solidFill>
+                <a:latin typeface="Inter" pitchFamily="34" charset="0"/>
+                <a:ea typeface="Inter" pitchFamily="34" charset="-122"/>
+                <a:cs typeface="Inter" pitchFamily="34" charset="-120"/>
+              </a:rPr>
+              <a:t>+31.7%</a:t>
+            </a:r>
+            <a:endParaRPr lang="en-US" sz="1600" dirty="0"/>
+          </a:p>
+        </p:txBody>
+      </p:sp>
+      <p:sp>
+        <p:nvSpPr>
+          <p:cNvPr id="20" name="Shape 18"/>
           <p:cNvSpPr/>
           <p:nvPr/>
         </p:nvSpPr>
         <p:spPr>
           <a:xfrm>
-            <a:off x="987552" y="2395728"/>
-            <a:ext cx="292608" cy="292608"/>
-          </a:xfrm>
-          <a:prstGeom prst="ellipse">
+            <a:off x="658368" y="3624682"/>
+            <a:ext cx="5321808" cy="751637"/>
+          </a:xfrm>
+          <a:prstGeom prst="rect">
             <a:avLst/>
           </a:prstGeom>
           <a:solidFill>
-            <a:srgbClr val="2587C5"/>
+            <a:srgbClr val="F7F7F7"/>
           </a:solidFill>
           <a:ln/>
         </p:spPr>
       </p:sp>
       <p:sp>
         <p:nvSpPr>
-          <p:cNvPr id="12" name="Text 10"/>
-          <p:cNvSpPr txBox="1"/>
-          <p:nvPr/>
-        </p:nvSpPr>
-        <p:spPr>
-          <a:xfrm>
-            <a:off x="987552" y="2395728"/>
-            <a:ext cx="292608" cy="292608"/>
-          </a:xfrm>
-          <a:prstGeom prst="rect">
-            <a:avLst/>
-          </a:prstGeom>
-          <a:noFill/>
-          <a:ln/>
-        </p:spPr>
-        <p:txBody>
-          <a:bodyPr wrap="square" lIns="0" tIns="0" rIns="0" bIns="0" rtlCol="0" anchor="ctr"/>
-          <a:lstStyle/>
-          <a:p>
-            <a:pPr algn="ctr" indent="0" marL="0">
-              <a:buNone/>
-            </a:pPr>
-            <a:r>
-              <a:rPr lang="en-US" sz="1800" b="1" dirty="0">
-                <a:solidFill>
-                  <a:srgbClr val="FFFFFF"/>
-                </a:solidFill>
-                <a:latin typeface="Inter" pitchFamily="34" charset="0"/>
-                <a:ea typeface="Inter" pitchFamily="34" charset="-122"/>
-                <a:cs typeface="Inter" pitchFamily="34" charset="-120"/>
-              </a:rPr>
-              <a:t>+</a:t>
-            </a:r>
-            <a:endParaRPr lang="en-US" sz="1800" dirty="0"/>
-          </a:p>
-        </p:txBody>
-      </p:sp>
-      <p:sp>
-        <p:nvSpPr>
-          <p:cNvPr id="13" name="Shape 11"/>
+          <p:cNvPr id="21" name="Text 19"/>
+          <p:cNvSpPr txBox="1"/>
+          <p:nvPr/>
+        </p:nvSpPr>
+        <p:spPr>
+          <a:xfrm>
+            <a:off x="749808" y="3624682"/>
+            <a:ext cx="320040" cy="751637"/>
+          </a:xfrm>
+          <a:prstGeom prst="rect">
+            <a:avLst/>
+          </a:prstGeom>
+          <a:noFill/>
+          <a:ln/>
+        </p:spPr>
+        <p:txBody>
+          <a:bodyPr wrap="square" lIns="0" tIns="0" rIns="0" bIns="0" rtlCol="0" anchor="ctr"/>
+          <a:lstStyle/>
+          <a:p>
+            <a:pPr indent="0" marL="0">
+              <a:buNone/>
+            </a:pPr>
+            <a:r>
+              <a:rPr lang="en-US" sz="1500" b="1" dirty="0">
+                <a:solidFill>
+                  <a:srgbClr val="0B2C4A"/>
+                </a:solidFill>
+                <a:latin typeface="Inter" pitchFamily="34" charset="0"/>
+                <a:ea typeface="Inter" pitchFamily="34" charset="-122"/>
+                <a:cs typeface="Inter" pitchFamily="34" charset="-120"/>
+              </a:rPr>
+              <a:t>3</a:t>
+            </a:r>
+            <a:endParaRPr lang="en-US" sz="1500" dirty="0"/>
+          </a:p>
+        </p:txBody>
+      </p:sp>
+      <p:sp>
+        <p:nvSpPr>
+          <p:cNvPr id="22" name="Text 20"/>
+          <p:cNvSpPr txBox="1"/>
+          <p:nvPr/>
+        </p:nvSpPr>
+        <p:spPr>
+          <a:xfrm>
+            <a:off x="1115568" y="3624682"/>
+            <a:ext cx="1737360" cy="751637"/>
+          </a:xfrm>
+          <a:prstGeom prst="rect">
+            <a:avLst/>
+          </a:prstGeom>
+          <a:noFill/>
+          <a:ln/>
+        </p:spPr>
+        <p:txBody>
+          <a:bodyPr wrap="square" lIns="0" tIns="0" rIns="0" bIns="0" rtlCol="0" anchor="ctr"/>
+          <a:lstStyle/>
+          <a:p>
+            <a:pPr indent="0" marL="0">
+              <a:buNone/>
+            </a:pPr>
+            <a:r>
+              <a:rPr lang="en-US" sz="1400" b="1" dirty="0">
+                <a:solidFill>
+                  <a:srgbClr val="1A1A1A"/>
+                </a:solidFill>
+                <a:latin typeface="Inter" pitchFamily="34" charset="0"/>
+                <a:ea typeface="Inter" pitchFamily="34" charset="-122"/>
+                <a:cs typeface="Inter" pitchFamily="34" charset="-120"/>
+              </a:rPr>
+              <a:t>Lexus</a:t>
+            </a:r>
+            <a:endParaRPr lang="en-US" sz="1400" dirty="0"/>
+          </a:p>
+        </p:txBody>
+      </p:sp>
+      <p:sp>
+        <p:nvSpPr>
+          <p:cNvPr id="23" name="Text 21"/>
+          <p:cNvSpPr txBox="1"/>
+          <p:nvPr/>
+        </p:nvSpPr>
+        <p:spPr>
+          <a:xfrm>
+            <a:off x="2898648" y="3624682"/>
+            <a:ext cx="1920240" cy="751637"/>
+          </a:xfrm>
+          <a:prstGeom prst="rect">
+            <a:avLst/>
+          </a:prstGeom>
+          <a:noFill/>
+          <a:ln/>
+        </p:spPr>
+        <p:txBody>
+          <a:bodyPr wrap="square" lIns="0" tIns="0" rIns="0" bIns="0" rtlCol="0" anchor="ctr"/>
+          <a:lstStyle/>
+          <a:p>
+            <a:pPr indent="0" marL="0">
+              <a:buNone/>
+            </a:pPr>
+            <a:r>
+              <a:rPr lang="en-US" sz="1400" dirty="0">
+                <a:solidFill>
+                  <a:srgbClr val="595959"/>
+                </a:solidFill>
+                <a:latin typeface="Inter" pitchFamily="34" charset="0"/>
+                <a:ea typeface="Inter" pitchFamily="34" charset="-122"/>
+                <a:cs typeface="Inter" pitchFamily="34" charset="-120"/>
+              </a:rPr>
+              <a:t>$3.38M  </a:t>
+            </a:r>
+            <a:pPr indent="0" marL="0">
+              <a:buNone/>
+            </a:pPr>
+            <a:r>
+              <a:rPr lang="en-US" sz="1400" b="1" dirty="0">
+                <a:solidFill>
+                  <a:srgbClr val="0B7A4A"/>
+                </a:solidFill>
+                <a:latin typeface="Inter" pitchFamily="34" charset="0"/>
+                <a:ea typeface="Inter" pitchFamily="34" charset="-122"/>
+                <a:cs typeface="Inter" pitchFamily="34" charset="-120"/>
+              </a:rPr>
+              <a:t>→  </a:t>
+            </a:r>
+            <a:pPr indent="0" marL="0">
+              <a:buNone/>
+            </a:pPr>
+            <a:r>
+              <a:rPr lang="en-US" sz="1400" b="1" dirty="0">
+                <a:solidFill>
+                  <a:srgbClr val="0B7A4A"/>
+                </a:solidFill>
+                <a:latin typeface="Inter" pitchFamily="34" charset="0"/>
+                <a:ea typeface="Inter" pitchFamily="34" charset="-122"/>
+                <a:cs typeface="Inter" pitchFamily="34" charset="-120"/>
+              </a:rPr>
+              <a:t>$4.15M</a:t>
+            </a:r>
+            <a:endParaRPr lang="en-US" sz="1400" dirty="0"/>
+          </a:p>
+        </p:txBody>
+      </p:sp>
+      <p:sp>
+        <p:nvSpPr>
+          <p:cNvPr id="24" name="Text 22"/>
+          <p:cNvSpPr txBox="1"/>
+          <p:nvPr/>
+        </p:nvSpPr>
+        <p:spPr>
+          <a:xfrm>
+            <a:off x="4864608" y="3624682"/>
+            <a:ext cx="1051560" cy="751637"/>
+          </a:xfrm>
+          <a:prstGeom prst="rect">
+            <a:avLst/>
+          </a:prstGeom>
+          <a:noFill/>
+          <a:ln/>
+        </p:spPr>
+        <p:txBody>
+          <a:bodyPr wrap="square" lIns="0" tIns="0" rIns="0" bIns="0" rtlCol="0" anchor="ctr"/>
+          <a:lstStyle/>
+          <a:p>
+            <a:pPr algn="r" indent="0" marL="0">
+              <a:buNone/>
+            </a:pPr>
+            <a:r>
+              <a:rPr lang="en-US" sz="1600" b="1" dirty="0">
+                <a:solidFill>
+                  <a:srgbClr val="0B7A4A"/>
+                </a:solidFill>
+                <a:latin typeface="Inter" pitchFamily="34" charset="0"/>
+                <a:ea typeface="Inter" pitchFamily="34" charset="-122"/>
+                <a:cs typeface="Inter" pitchFamily="34" charset="-120"/>
+              </a:rPr>
+              <a:t>+22.6%</a:t>
+            </a:r>
+            <a:endParaRPr lang="en-US" sz="1600" dirty="0"/>
+          </a:p>
+        </p:txBody>
+      </p:sp>
+      <p:sp>
+        <p:nvSpPr>
+          <p:cNvPr id="25" name="Text 23"/>
+          <p:cNvSpPr txBox="1"/>
+          <p:nvPr/>
+        </p:nvSpPr>
+        <p:spPr>
+          <a:xfrm>
+            <a:off x="749808" y="4376318"/>
+            <a:ext cx="320040" cy="751637"/>
+          </a:xfrm>
+          <a:prstGeom prst="rect">
+            <a:avLst/>
+          </a:prstGeom>
+          <a:noFill/>
+          <a:ln/>
+        </p:spPr>
+        <p:txBody>
+          <a:bodyPr wrap="square" lIns="0" tIns="0" rIns="0" bIns="0" rtlCol="0" anchor="ctr"/>
+          <a:lstStyle/>
+          <a:p>
+            <a:pPr indent="0" marL="0">
+              <a:buNone/>
+            </a:pPr>
+            <a:r>
+              <a:rPr lang="en-US" sz="1500" b="1" dirty="0">
+                <a:solidFill>
+                  <a:srgbClr val="0B2C4A"/>
+                </a:solidFill>
+                <a:latin typeface="Inter" pitchFamily="34" charset="0"/>
+                <a:ea typeface="Inter" pitchFamily="34" charset="-122"/>
+                <a:cs typeface="Inter" pitchFamily="34" charset="-120"/>
+              </a:rPr>
+              <a:t>4</a:t>
+            </a:r>
+            <a:endParaRPr lang="en-US" sz="1500" dirty="0"/>
+          </a:p>
+        </p:txBody>
+      </p:sp>
+      <p:sp>
+        <p:nvSpPr>
+          <p:cNvPr id="26" name="Text 24"/>
+          <p:cNvSpPr txBox="1"/>
+          <p:nvPr/>
+        </p:nvSpPr>
+        <p:spPr>
+          <a:xfrm>
+            <a:off x="1115568" y="4376318"/>
+            <a:ext cx="1737360" cy="751637"/>
+          </a:xfrm>
+          <a:prstGeom prst="rect">
+            <a:avLst/>
+          </a:prstGeom>
+          <a:noFill/>
+          <a:ln/>
+        </p:spPr>
+        <p:txBody>
+          <a:bodyPr wrap="square" lIns="0" tIns="0" rIns="0" bIns="0" rtlCol="0" anchor="ctr"/>
+          <a:lstStyle/>
+          <a:p>
+            <a:pPr indent="0" marL="0">
+              <a:buNone/>
+            </a:pPr>
+            <a:r>
+              <a:rPr lang="en-US" sz="1400" b="1" dirty="0">
+                <a:solidFill>
+                  <a:srgbClr val="1A1A1A"/>
+                </a:solidFill>
+                <a:latin typeface="Inter" pitchFamily="34" charset="0"/>
+                <a:ea typeface="Inter" pitchFamily="34" charset="-122"/>
+                <a:cs typeface="Inter" pitchFamily="34" charset="-120"/>
+              </a:rPr>
+              <a:t>Audi Henderson</a:t>
+            </a:r>
+            <a:endParaRPr lang="en-US" sz="1400" dirty="0"/>
+          </a:p>
+        </p:txBody>
+      </p:sp>
+      <p:sp>
+        <p:nvSpPr>
+          <p:cNvPr id="27" name="Text 25"/>
+          <p:cNvSpPr txBox="1"/>
+          <p:nvPr/>
+        </p:nvSpPr>
+        <p:spPr>
+          <a:xfrm>
+            <a:off x="2898648" y="4376318"/>
+            <a:ext cx="1920240" cy="751637"/>
+          </a:xfrm>
+          <a:prstGeom prst="rect">
+            <a:avLst/>
+          </a:prstGeom>
+          <a:noFill/>
+          <a:ln/>
+        </p:spPr>
+        <p:txBody>
+          <a:bodyPr wrap="square" lIns="0" tIns="0" rIns="0" bIns="0" rtlCol="0" anchor="ctr"/>
+          <a:lstStyle/>
+          <a:p>
+            <a:pPr indent="0" marL="0">
+              <a:buNone/>
+            </a:pPr>
+            <a:r>
+              <a:rPr lang="en-US" sz="1400" dirty="0">
+                <a:solidFill>
+                  <a:srgbClr val="595959"/>
+                </a:solidFill>
+                <a:latin typeface="Inter" pitchFamily="34" charset="0"/>
+                <a:ea typeface="Inter" pitchFamily="34" charset="-122"/>
+                <a:cs typeface="Inter" pitchFamily="34" charset="-120"/>
+              </a:rPr>
+              <a:t>$10.64M  </a:t>
+            </a:r>
+            <a:pPr indent="0" marL="0">
+              <a:buNone/>
+            </a:pPr>
+            <a:r>
+              <a:rPr lang="en-US" sz="1400" b="1" dirty="0">
+                <a:solidFill>
+                  <a:srgbClr val="0B7A4A"/>
+                </a:solidFill>
+                <a:latin typeface="Inter" pitchFamily="34" charset="0"/>
+                <a:ea typeface="Inter" pitchFamily="34" charset="-122"/>
+                <a:cs typeface="Inter" pitchFamily="34" charset="-120"/>
+              </a:rPr>
+              <a:t>→  </a:t>
+            </a:r>
+            <a:pPr indent="0" marL="0">
+              <a:buNone/>
+            </a:pPr>
+            <a:r>
+              <a:rPr lang="en-US" sz="1400" b="1" dirty="0">
+                <a:solidFill>
+                  <a:srgbClr val="0B7A4A"/>
+                </a:solidFill>
+                <a:latin typeface="Inter" pitchFamily="34" charset="0"/>
+                <a:ea typeface="Inter" pitchFamily="34" charset="-122"/>
+                <a:cs typeface="Inter" pitchFamily="34" charset="-120"/>
+              </a:rPr>
+              <a:t>$12.34M</a:t>
+            </a:r>
+            <a:endParaRPr lang="en-US" sz="1400" dirty="0"/>
+          </a:p>
+        </p:txBody>
+      </p:sp>
+      <p:sp>
+        <p:nvSpPr>
+          <p:cNvPr id="28" name="Text 26"/>
+          <p:cNvSpPr txBox="1"/>
+          <p:nvPr/>
+        </p:nvSpPr>
+        <p:spPr>
+          <a:xfrm>
+            <a:off x="4864608" y="4376318"/>
+            <a:ext cx="1051560" cy="751637"/>
+          </a:xfrm>
+          <a:prstGeom prst="rect">
+            <a:avLst/>
+          </a:prstGeom>
+          <a:noFill/>
+          <a:ln/>
+        </p:spPr>
+        <p:txBody>
+          <a:bodyPr wrap="square" lIns="0" tIns="0" rIns="0" bIns="0" rtlCol="0" anchor="ctr"/>
+          <a:lstStyle/>
+          <a:p>
+            <a:pPr algn="r" indent="0" marL="0">
+              <a:buNone/>
+            </a:pPr>
+            <a:r>
+              <a:rPr lang="en-US" sz="1600" b="1" dirty="0">
+                <a:solidFill>
+                  <a:srgbClr val="0B7A4A"/>
+                </a:solidFill>
+                <a:latin typeface="Inter" pitchFamily="34" charset="0"/>
+                <a:ea typeface="Inter" pitchFamily="34" charset="-122"/>
+                <a:cs typeface="Inter" pitchFamily="34" charset="-120"/>
+              </a:rPr>
+              <a:t>+16.0%</a:t>
+            </a:r>
+            <a:endParaRPr lang="en-US" sz="1600" dirty="0"/>
+          </a:p>
+        </p:txBody>
+      </p:sp>
+      <p:sp>
+        <p:nvSpPr>
+          <p:cNvPr id="29" name="Shape 27"/>
           <p:cNvSpPr/>
           <p:nvPr/>
         </p:nvSpPr>
         <p:spPr>
           <a:xfrm>
-            <a:off x="713232" y="2706624"/>
-            <a:ext cx="4974336" cy="621792"/>
+            <a:off x="658368" y="5127955"/>
+            <a:ext cx="5321808" cy="751637"/>
           </a:xfrm>
           <a:prstGeom prst="rect">
             <a:avLst/>
           </a:prstGeom>
           <a:solidFill>
-            <a:srgbClr val="E6F6EE"/>
+            <a:srgbClr val="F7F7F7"/>
           </a:solidFill>
           <a:ln/>
         </p:spPr>
       </p:sp>
       <p:sp>
         <p:nvSpPr>
-          <p:cNvPr id="14" name="Text 12"/>
-          <p:cNvSpPr txBox="1"/>
-          <p:nvPr/>
-        </p:nvSpPr>
-        <p:spPr>
-          <a:xfrm>
-            <a:off x="896112" y="2734056"/>
-            <a:ext cx="2743200" cy="457200"/>
+          <p:cNvPr id="30" name="Text 28"/>
+          <p:cNvSpPr txBox="1"/>
+          <p:nvPr/>
+        </p:nvSpPr>
+        <p:spPr>
+          <a:xfrm>
+            <a:off x="749808" y="5127955"/>
+            <a:ext cx="320040" cy="751637"/>
           </a:xfrm>
           <a:prstGeom prst="rect">
             <a:avLst/>
@@ -34242,7 +34978,99 @@
               <a:buNone/>
             </a:pPr>
             <a:r>
-              <a:rPr lang="en-US" sz="2600" b="1" dirty="0">
+              <a:rPr lang="en-US" sz="1500" b="1" dirty="0">
+                <a:solidFill>
+                  <a:srgbClr val="0B2C4A"/>
+                </a:solidFill>
+                <a:latin typeface="Inter" pitchFamily="34" charset="0"/>
+                <a:ea typeface="Inter" pitchFamily="34" charset="-122"/>
+                <a:cs typeface="Inter" pitchFamily="34" charset="-120"/>
+              </a:rPr>
+              <a:t>5</a:t>
+            </a:r>
+            <a:endParaRPr lang="en-US" sz="1500" dirty="0"/>
+          </a:p>
+        </p:txBody>
+      </p:sp>
+      <p:sp>
+        <p:nvSpPr>
+          <p:cNvPr id="31" name="Text 29"/>
+          <p:cNvSpPr txBox="1"/>
+          <p:nvPr/>
+        </p:nvSpPr>
+        <p:spPr>
+          <a:xfrm>
+            <a:off x="1115568" y="5127955"/>
+            <a:ext cx="1737360" cy="751637"/>
+          </a:xfrm>
+          <a:prstGeom prst="rect">
+            <a:avLst/>
+          </a:prstGeom>
+          <a:noFill/>
+          <a:ln/>
+        </p:spPr>
+        <p:txBody>
+          <a:bodyPr wrap="square" lIns="0" tIns="0" rIns="0" bIns="0" rtlCol="0" anchor="ctr"/>
+          <a:lstStyle/>
+          <a:p>
+            <a:pPr indent="0" marL="0">
+              <a:buNone/>
+            </a:pPr>
+            <a:r>
+              <a:rPr lang="en-US" sz="1400" b="1" dirty="0">
+                <a:solidFill>
+                  <a:srgbClr val="1A1A1A"/>
+                </a:solidFill>
+                <a:latin typeface="Inter" pitchFamily="34" charset="0"/>
+                <a:ea typeface="Inter" pitchFamily="34" charset="-122"/>
+                <a:cs typeface="Inter" pitchFamily="34" charset="-120"/>
+              </a:rPr>
+              <a:t>Subaru Prescott</a:t>
+            </a:r>
+            <a:endParaRPr lang="en-US" sz="1400" dirty="0"/>
+          </a:p>
+        </p:txBody>
+      </p:sp>
+      <p:sp>
+        <p:nvSpPr>
+          <p:cNvPr id="32" name="Text 30"/>
+          <p:cNvSpPr txBox="1"/>
+          <p:nvPr/>
+        </p:nvSpPr>
+        <p:spPr>
+          <a:xfrm>
+            <a:off x="2898648" y="5127955"/>
+            <a:ext cx="1920240" cy="751637"/>
+          </a:xfrm>
+          <a:prstGeom prst="rect">
+            <a:avLst/>
+          </a:prstGeom>
+          <a:noFill/>
+          <a:ln/>
+        </p:spPr>
+        <p:txBody>
+          <a:bodyPr wrap="square" lIns="0" tIns="0" rIns="0" bIns="0" rtlCol="0" anchor="ctr"/>
+          <a:lstStyle/>
+          <a:p>
+            <a:pPr indent="0" marL="0">
+              <a:buNone/>
+            </a:pPr>
+            <a:r>
+              <a:rPr lang="en-US" sz="1400" dirty="0">
+                <a:solidFill>
+                  <a:srgbClr val="595959"/>
+                </a:solidFill>
+                <a:latin typeface="Inter" pitchFamily="34" charset="0"/>
+                <a:ea typeface="Inter" pitchFamily="34" charset="-122"/>
+                <a:cs typeface="Inter" pitchFamily="34" charset="-120"/>
+              </a:rPr>
+              <a:t>$2.33M  </a:t>
+            </a:r>
+            <a:pPr indent="0" marL="0">
+              <a:buNone/>
+            </a:pPr>
+            <a:r>
+              <a:rPr lang="en-US" sz="1400" b="1" dirty="0">
                 <a:solidFill>
                   <a:srgbClr val="0B7A4A"/>
                 </a:solidFill>
@@ -34250,34 +35078,322 @@
                 <a:ea typeface="Inter" pitchFamily="34" charset="-122"/>
                 <a:cs typeface="Inter" pitchFamily="34" charset="-120"/>
               </a:rPr>
-              <a:t>+$7,468,567</a:t>
-            </a:r>
-            <a:endParaRPr lang="en-US" sz="2600" dirty="0"/>
-          </a:p>
-        </p:txBody>
-      </p:sp>
-      <p:sp>
-        <p:nvSpPr>
-          <p:cNvPr id="15" name="Text 13"/>
-          <p:cNvSpPr txBox="1"/>
-          <p:nvPr/>
-        </p:nvSpPr>
-        <p:spPr>
-          <a:xfrm>
-            <a:off x="3657600" y="2734056"/>
-            <a:ext cx="1874520" cy="585216"/>
-          </a:xfrm>
-          <a:prstGeom prst="rect">
-            <a:avLst/>
-          </a:prstGeom>
-          <a:noFill/>
-          <a:ln/>
-        </p:spPr>
-        <p:txBody>
-          <a:bodyPr wrap="square" lIns="0" tIns="0" rIns="0" bIns="0" rtlCol="0" anchor="ctr"/>
-          <a:lstStyle/>
-          <a:p>
-            <a:pPr algn="r" indent="0" marL="0">
+              <a:t>→  </a:t>
+            </a:r>
+            <a:pPr indent="0" marL="0">
+              <a:buNone/>
+            </a:pPr>
+            <a:r>
+              <a:rPr lang="en-US" sz="1400" b="1" dirty="0">
+                <a:solidFill>
+                  <a:srgbClr val="0B7A4A"/>
+                </a:solidFill>
+                <a:latin typeface="Inter" pitchFamily="34" charset="0"/>
+                <a:ea typeface="Inter" pitchFamily="34" charset="-122"/>
+                <a:cs typeface="Inter" pitchFamily="34" charset="-120"/>
+              </a:rPr>
+              <a:t>$2.70M</a:t>
+            </a:r>
+            <a:endParaRPr lang="en-US" sz="1400" dirty="0"/>
+          </a:p>
+        </p:txBody>
+      </p:sp>
+      <p:sp>
+        <p:nvSpPr>
+          <p:cNvPr id="33" name="Text 31"/>
+          <p:cNvSpPr txBox="1"/>
+          <p:nvPr/>
+        </p:nvSpPr>
+        <p:spPr>
+          <a:xfrm>
+            <a:off x="4864608" y="5127955"/>
+            <a:ext cx="1051560" cy="751637"/>
+          </a:xfrm>
+          <a:prstGeom prst="rect">
+            <a:avLst/>
+          </a:prstGeom>
+          <a:noFill/>
+          <a:ln/>
+        </p:spPr>
+        <p:txBody>
+          <a:bodyPr wrap="square" lIns="0" tIns="0" rIns="0" bIns="0" rtlCol="0" anchor="ctr"/>
+          <a:lstStyle/>
+          <a:p>
+            <a:pPr algn="r" indent="0" marL="0">
+              <a:buNone/>
+            </a:pPr>
+            <a:r>
+              <a:rPr lang="en-US" sz="1600" b="1" dirty="0">
+                <a:solidFill>
+                  <a:srgbClr val="0B7A4A"/>
+                </a:solidFill>
+                <a:latin typeface="Inter" pitchFamily="34" charset="0"/>
+                <a:ea typeface="Inter" pitchFamily="34" charset="-122"/>
+                <a:cs typeface="Inter" pitchFamily="34" charset="-120"/>
+              </a:rPr>
+              <a:t>+15.8%</a:t>
+            </a:r>
+            <a:endParaRPr lang="en-US" sz="1600" dirty="0"/>
+          </a:p>
+        </p:txBody>
+      </p:sp>
+      <p:sp>
+        <p:nvSpPr>
+          <p:cNvPr id="34" name="Shape 32"/>
+          <p:cNvSpPr/>
+          <p:nvPr/>
+        </p:nvSpPr>
+        <p:spPr>
+          <a:xfrm>
+            <a:off x="6208776" y="1737360"/>
+            <a:ext cx="5321808" cy="45720"/>
+          </a:xfrm>
+          <a:prstGeom prst="rect">
+            <a:avLst/>
+          </a:prstGeom>
+          <a:solidFill>
+            <a:srgbClr val="C2352F"/>
+          </a:solidFill>
+          <a:ln/>
+        </p:spPr>
+      </p:sp>
+      <p:sp>
+        <p:nvSpPr>
+          <p:cNvPr id="35" name="Text 33"/>
+          <p:cNvSpPr txBox="1"/>
+          <p:nvPr/>
+        </p:nvSpPr>
+        <p:spPr>
+          <a:xfrm>
+            <a:off x="6300216" y="1810512"/>
+            <a:ext cx="1828800" cy="274320"/>
+          </a:xfrm>
+          <a:prstGeom prst="rect">
+            <a:avLst/>
+          </a:prstGeom>
+          <a:noFill/>
+          <a:ln/>
+        </p:spPr>
+        <p:txBody>
+          <a:bodyPr wrap="square" lIns="0" tIns="0" rIns="0" bIns="0" rtlCol="0" anchor="ctr"/>
+          <a:lstStyle/>
+          <a:p>
+            <a:pPr indent="0" marL="0">
+              <a:buNone/>
+            </a:pPr>
+            <a:r>
+              <a:rPr lang="en-US" sz="1400" b="1" spc="100" kern="0" dirty="0">
+                <a:solidFill>
+                  <a:srgbClr val="A82B26"/>
+                </a:solidFill>
+                <a:latin typeface="Inter" pitchFamily="34" charset="0"/>
+                <a:ea typeface="Inter" pitchFamily="34" charset="-122"/>
+                <a:cs typeface="Inter" pitchFamily="34" charset="-120"/>
+              </a:rPr>
+              <a:t>BOTTOM 5</a:t>
+            </a:r>
+            <a:endParaRPr lang="en-US" sz="1400" dirty="0"/>
+          </a:p>
+        </p:txBody>
+      </p:sp>
+      <p:sp>
+        <p:nvSpPr>
+          <p:cNvPr id="36" name="Text 34"/>
+          <p:cNvSpPr txBox="1"/>
+          <p:nvPr/>
+        </p:nvSpPr>
+        <p:spPr>
+          <a:xfrm>
+            <a:off x="8449056" y="1810512"/>
+            <a:ext cx="1828800" cy="274320"/>
+          </a:xfrm>
+          <a:prstGeom prst="rect">
+            <a:avLst/>
+          </a:prstGeom>
+          <a:noFill/>
+          <a:ln/>
+        </p:spPr>
+        <p:txBody>
+          <a:bodyPr wrap="square" lIns="0" tIns="0" rIns="0" bIns="0" rtlCol="0" anchor="ctr"/>
+          <a:lstStyle/>
+          <a:p>
+            <a:pPr indent="0" marL="0">
+              <a:buNone/>
+            </a:pPr>
+            <a:r>
+              <a:rPr lang="en-US" sz="1400" b="1" dirty="0">
+                <a:solidFill>
+                  <a:srgbClr val="595959"/>
+                </a:solidFill>
+                <a:latin typeface="Inter" pitchFamily="34" charset="0"/>
+                <a:ea typeface="Inter" pitchFamily="34" charset="-122"/>
+                <a:cs typeface="Inter" pitchFamily="34" charset="-120"/>
+              </a:rPr>
+              <a:t>2025 → 2026</a:t>
+            </a:r>
+            <a:endParaRPr lang="en-US" sz="1400" dirty="0"/>
+          </a:p>
+        </p:txBody>
+      </p:sp>
+      <p:sp>
+        <p:nvSpPr>
+          <p:cNvPr id="37" name="Text 35"/>
+          <p:cNvSpPr txBox="1"/>
+          <p:nvPr/>
+        </p:nvSpPr>
+        <p:spPr>
+          <a:xfrm>
+            <a:off x="10415016" y="1810512"/>
+            <a:ext cx="1051560" cy="274320"/>
+          </a:xfrm>
+          <a:prstGeom prst="rect">
+            <a:avLst/>
+          </a:prstGeom>
+          <a:noFill/>
+          <a:ln/>
+        </p:spPr>
+        <p:txBody>
+          <a:bodyPr wrap="square" lIns="0" tIns="0" rIns="0" bIns="0" rtlCol="0" anchor="ctr"/>
+          <a:lstStyle/>
+          <a:p>
+            <a:pPr algn="r" indent="0" marL="0">
+              <a:buNone/>
+            </a:pPr>
+            <a:r>
+              <a:rPr lang="en-US" sz="1400" b="1" dirty="0">
+                <a:solidFill>
+                  <a:srgbClr val="595959"/>
+                </a:solidFill>
+                <a:latin typeface="Inter" pitchFamily="34" charset="0"/>
+                <a:ea typeface="Inter" pitchFamily="34" charset="-122"/>
+                <a:cs typeface="Inter" pitchFamily="34" charset="-120"/>
+              </a:rPr>
+              <a:t>Change</a:t>
+            </a:r>
+            <a:endParaRPr lang="en-US" sz="1400" dirty="0"/>
+          </a:p>
+        </p:txBody>
+      </p:sp>
+      <p:sp>
+        <p:nvSpPr>
+          <p:cNvPr id="38" name="Shape 36"/>
+          <p:cNvSpPr/>
+          <p:nvPr/>
+        </p:nvSpPr>
+        <p:spPr>
+          <a:xfrm>
+            <a:off x="6208776" y="2121408"/>
+            <a:ext cx="5321808" cy="751637"/>
+          </a:xfrm>
+          <a:prstGeom prst="rect">
+            <a:avLst/>
+          </a:prstGeom>
+          <a:solidFill>
+            <a:srgbClr val="F7F7F7"/>
+          </a:solidFill>
+          <a:ln/>
+        </p:spPr>
+      </p:sp>
+      <p:sp>
+        <p:nvSpPr>
+          <p:cNvPr id="39" name="Text 37"/>
+          <p:cNvSpPr txBox="1"/>
+          <p:nvPr/>
+        </p:nvSpPr>
+        <p:spPr>
+          <a:xfrm>
+            <a:off x="6300216" y="2121408"/>
+            <a:ext cx="320040" cy="751637"/>
+          </a:xfrm>
+          <a:prstGeom prst="rect">
+            <a:avLst/>
+          </a:prstGeom>
+          <a:noFill/>
+          <a:ln/>
+        </p:spPr>
+        <p:txBody>
+          <a:bodyPr wrap="square" lIns="0" tIns="0" rIns="0" bIns="0" rtlCol="0" anchor="ctr"/>
+          <a:lstStyle/>
+          <a:p>
+            <a:pPr indent="0" marL="0">
+              <a:buNone/>
+            </a:pPr>
+            <a:r>
+              <a:rPr lang="en-US" sz="1500" b="1" dirty="0">
+                <a:solidFill>
+                  <a:srgbClr val="0B2C4A"/>
+                </a:solidFill>
+                <a:latin typeface="Inter" pitchFamily="34" charset="0"/>
+                <a:ea typeface="Inter" pitchFamily="34" charset="-122"/>
+                <a:cs typeface="Inter" pitchFamily="34" charset="-120"/>
+              </a:rPr>
+              <a:t>33</a:t>
+            </a:r>
+            <a:endParaRPr lang="en-US" sz="1500" dirty="0"/>
+          </a:p>
+        </p:txBody>
+      </p:sp>
+      <p:sp>
+        <p:nvSpPr>
+          <p:cNvPr id="40" name="Text 38"/>
+          <p:cNvSpPr txBox="1"/>
+          <p:nvPr/>
+        </p:nvSpPr>
+        <p:spPr>
+          <a:xfrm>
+            <a:off x="6665976" y="2121408"/>
+            <a:ext cx="1737360" cy="751637"/>
+          </a:xfrm>
+          <a:prstGeom prst="rect">
+            <a:avLst/>
+          </a:prstGeom>
+          <a:noFill/>
+          <a:ln/>
+        </p:spPr>
+        <p:txBody>
+          <a:bodyPr wrap="square" lIns="0" tIns="0" rIns="0" bIns="0" rtlCol="0" anchor="ctr"/>
+          <a:lstStyle/>
+          <a:p>
+            <a:pPr indent="0" marL="0">
+              <a:buNone/>
+            </a:pPr>
+            <a:r>
+              <a:rPr lang="en-US" sz="1400" b="1" dirty="0">
+                <a:solidFill>
+                  <a:srgbClr val="1A1A1A"/>
+                </a:solidFill>
+                <a:latin typeface="Inter" pitchFamily="34" charset="0"/>
+                <a:ea typeface="Inter" pitchFamily="34" charset="-122"/>
+                <a:cs typeface="Inter" pitchFamily="34" charset="-120"/>
+              </a:rPr>
+              <a:t>Acura</a:t>
+            </a:r>
+            <a:endParaRPr lang="en-US" sz="1400" dirty="0"/>
+          </a:p>
+        </p:txBody>
+      </p:sp>
+      <p:sp>
+        <p:nvSpPr>
+          <p:cNvPr id="41" name="Text 39"/>
+          <p:cNvSpPr txBox="1"/>
+          <p:nvPr/>
+        </p:nvSpPr>
+        <p:spPr>
+          <a:xfrm>
+            <a:off x="8449056" y="2121408"/>
+            <a:ext cx="1920240" cy="751637"/>
+          </a:xfrm>
+          <a:prstGeom prst="rect">
+            <a:avLst/>
+          </a:prstGeom>
+          <a:noFill/>
+          <a:ln/>
+        </p:spPr>
+        <p:txBody>
+          <a:bodyPr wrap="square" lIns="0" tIns="0" rIns="0" bIns="0" rtlCol="0" anchor="ctr"/>
+          <a:lstStyle/>
+          <a:p>
+            <a:pPr indent="0" marL="0">
               <a:buNone/>
             </a:pPr>
             <a:r>
@@ -34289,7 +35405,35 @@
                 <a:ea typeface="Inter" pitchFamily="34" charset="-122"/>
                 <a:cs typeface="Inter" pitchFamily="34" charset="-120"/>
               </a:rPr>
-              <a:t>same-store growth</a:t>
+              <a:t>$3.41M  </a:t>
+            </a:r>
+            <a:pPr indent="0" marL="0">
+              <a:buNone/>
+            </a:pPr>
+            <a:r>
+              <a:rPr lang="en-US" sz="1400" b="1" dirty="0">
+                <a:solidFill>
+                  <a:srgbClr val="A82B26"/>
+                </a:solidFill>
+                <a:latin typeface="Inter" pitchFamily="34" charset="0"/>
+                <a:ea typeface="Inter" pitchFamily="34" charset="-122"/>
+                <a:cs typeface="Inter" pitchFamily="34" charset="-120"/>
+              </a:rPr>
+              <a:t>→  </a:t>
+            </a:r>
+            <a:pPr indent="0" marL="0">
+              <a:buNone/>
+            </a:pPr>
+            <a:r>
+              <a:rPr lang="en-US" sz="1400" b="1" dirty="0">
+                <a:solidFill>
+                  <a:srgbClr val="A82B26"/>
+                </a:solidFill>
+                <a:latin typeface="Inter" pitchFamily="34" charset="0"/>
+                <a:ea typeface="Inter" pitchFamily="34" charset="-122"/>
+                <a:cs typeface="Inter" pitchFamily="34" charset="-120"/>
+              </a:rPr>
+              <a:t>$2.89M</a:t>
             </a:r>
             <a:endParaRPr lang="en-US" sz="1400" dirty="0"/>
           </a:p>
@@ -34297,73 +35441,829 @@
       </p:sp>
       <p:sp>
         <p:nvSpPr>
-          <p:cNvPr id="16" name="Shape 14"/>
+          <p:cNvPr id="42" name="Text 40"/>
+          <p:cNvSpPr txBox="1"/>
+          <p:nvPr/>
+        </p:nvSpPr>
+        <p:spPr>
+          <a:xfrm>
+            <a:off x="10415016" y="2121408"/>
+            <a:ext cx="1051560" cy="751637"/>
+          </a:xfrm>
+          <a:prstGeom prst="rect">
+            <a:avLst/>
+          </a:prstGeom>
+          <a:noFill/>
+          <a:ln/>
+        </p:spPr>
+        <p:txBody>
+          <a:bodyPr wrap="square" lIns="0" tIns="0" rIns="0" bIns="0" rtlCol="0" anchor="ctr"/>
+          <a:lstStyle/>
+          <a:p>
+            <a:pPr algn="r" indent="0" marL="0">
+              <a:buNone/>
+            </a:pPr>
+            <a:r>
+              <a:rPr lang="en-US" sz="1600" b="1" dirty="0">
+                <a:solidFill>
+                  <a:srgbClr val="A82B26"/>
+                </a:solidFill>
+                <a:latin typeface="Inter" pitchFamily="34" charset="0"/>
+                <a:ea typeface="Inter" pitchFamily="34" charset="-122"/>
+                <a:cs typeface="Inter" pitchFamily="34" charset="-120"/>
+              </a:rPr>
+              <a:t>−15.2%</a:t>
+            </a:r>
+            <a:endParaRPr lang="en-US" sz="1600" dirty="0"/>
+          </a:p>
+        </p:txBody>
+      </p:sp>
+      <p:sp>
+        <p:nvSpPr>
+          <p:cNvPr id="43" name="Text 41"/>
+          <p:cNvSpPr txBox="1"/>
+          <p:nvPr/>
+        </p:nvSpPr>
+        <p:spPr>
+          <a:xfrm>
+            <a:off x="6300216" y="2873045"/>
+            <a:ext cx="320040" cy="751637"/>
+          </a:xfrm>
+          <a:prstGeom prst="rect">
+            <a:avLst/>
+          </a:prstGeom>
+          <a:noFill/>
+          <a:ln/>
+        </p:spPr>
+        <p:txBody>
+          <a:bodyPr wrap="square" lIns="0" tIns="0" rIns="0" bIns="0" rtlCol="0" anchor="ctr"/>
+          <a:lstStyle/>
+          <a:p>
+            <a:pPr indent="0" marL="0">
+              <a:buNone/>
+            </a:pPr>
+            <a:r>
+              <a:rPr lang="en-US" sz="1500" b="1" dirty="0">
+                <a:solidFill>
+                  <a:srgbClr val="0B2C4A"/>
+                </a:solidFill>
+                <a:latin typeface="Inter" pitchFamily="34" charset="0"/>
+                <a:ea typeface="Inter" pitchFamily="34" charset="-122"/>
+                <a:cs typeface="Inter" pitchFamily="34" charset="-120"/>
+              </a:rPr>
+              <a:t>32</a:t>
+            </a:r>
+            <a:endParaRPr lang="en-US" sz="1500" dirty="0"/>
+          </a:p>
+        </p:txBody>
+      </p:sp>
+      <p:sp>
+        <p:nvSpPr>
+          <p:cNvPr id="44" name="Text 42"/>
+          <p:cNvSpPr txBox="1"/>
+          <p:nvPr/>
+        </p:nvSpPr>
+        <p:spPr>
+          <a:xfrm>
+            <a:off x="6665976" y="2873045"/>
+            <a:ext cx="1737360" cy="751637"/>
+          </a:xfrm>
+          <a:prstGeom prst="rect">
+            <a:avLst/>
+          </a:prstGeom>
+          <a:noFill/>
+          <a:ln/>
+        </p:spPr>
+        <p:txBody>
+          <a:bodyPr wrap="square" lIns="0" tIns="0" rIns="0" bIns="0" rtlCol="0" anchor="ctr"/>
+          <a:lstStyle/>
+          <a:p>
+            <a:pPr indent="0" marL="0">
+              <a:buNone/>
+            </a:pPr>
+            <a:r>
+              <a:rPr lang="en-US" sz="1400" b="1" dirty="0">
+                <a:solidFill>
+                  <a:srgbClr val="1A1A1A"/>
+                </a:solidFill>
+                <a:latin typeface="Inter" pitchFamily="34" charset="0"/>
+                <a:ea typeface="Inter" pitchFamily="34" charset="-122"/>
+                <a:cs typeface="Inter" pitchFamily="34" charset="-120"/>
+              </a:rPr>
+              <a:t>VW St George</a:t>
+            </a:r>
+            <a:endParaRPr lang="en-US" sz="1400" dirty="0"/>
+          </a:p>
+        </p:txBody>
+      </p:sp>
+      <p:sp>
+        <p:nvSpPr>
+          <p:cNvPr id="45" name="Text 43"/>
+          <p:cNvSpPr txBox="1"/>
+          <p:nvPr/>
+        </p:nvSpPr>
+        <p:spPr>
+          <a:xfrm>
+            <a:off x="8449056" y="2873045"/>
+            <a:ext cx="1920240" cy="751637"/>
+          </a:xfrm>
+          <a:prstGeom prst="rect">
+            <a:avLst/>
+          </a:prstGeom>
+          <a:noFill/>
+          <a:ln/>
+        </p:spPr>
+        <p:txBody>
+          <a:bodyPr wrap="square" lIns="0" tIns="0" rIns="0" bIns="0" rtlCol="0" anchor="ctr"/>
+          <a:lstStyle/>
+          <a:p>
+            <a:pPr indent="0" marL="0">
+              <a:buNone/>
+            </a:pPr>
+            <a:r>
+              <a:rPr lang="en-US" sz="1400" dirty="0">
+                <a:solidFill>
+                  <a:srgbClr val="595959"/>
+                </a:solidFill>
+                <a:latin typeface="Inter" pitchFamily="34" charset="0"/>
+                <a:ea typeface="Inter" pitchFamily="34" charset="-122"/>
+                <a:cs typeface="Inter" pitchFamily="34" charset="-120"/>
+              </a:rPr>
+              <a:t>$1.13M  </a:t>
+            </a:r>
+            <a:pPr indent="0" marL="0">
+              <a:buNone/>
+            </a:pPr>
+            <a:r>
+              <a:rPr lang="en-US" sz="1400" b="1" dirty="0">
+                <a:solidFill>
+                  <a:srgbClr val="A82B26"/>
+                </a:solidFill>
+                <a:latin typeface="Inter" pitchFamily="34" charset="0"/>
+                <a:ea typeface="Inter" pitchFamily="34" charset="-122"/>
+                <a:cs typeface="Inter" pitchFamily="34" charset="-120"/>
+              </a:rPr>
+              <a:t>→  </a:t>
+            </a:r>
+            <a:pPr indent="0" marL="0">
+              <a:buNone/>
+            </a:pPr>
+            <a:r>
+              <a:rPr lang="en-US" sz="1400" b="1" dirty="0">
+                <a:solidFill>
+                  <a:srgbClr val="A82B26"/>
+                </a:solidFill>
+                <a:latin typeface="Inter" pitchFamily="34" charset="0"/>
+                <a:ea typeface="Inter" pitchFamily="34" charset="-122"/>
+                <a:cs typeface="Inter" pitchFamily="34" charset="-120"/>
+              </a:rPr>
+              <a:t>$968K</a:t>
+            </a:r>
+            <a:endParaRPr lang="en-US" sz="1400" dirty="0"/>
+          </a:p>
+        </p:txBody>
+      </p:sp>
+      <p:sp>
+        <p:nvSpPr>
+          <p:cNvPr id="46" name="Text 44"/>
+          <p:cNvSpPr txBox="1"/>
+          <p:nvPr/>
+        </p:nvSpPr>
+        <p:spPr>
+          <a:xfrm>
+            <a:off x="10415016" y="2873045"/>
+            <a:ext cx="1051560" cy="751637"/>
+          </a:xfrm>
+          <a:prstGeom prst="rect">
+            <a:avLst/>
+          </a:prstGeom>
+          <a:noFill/>
+          <a:ln/>
+        </p:spPr>
+        <p:txBody>
+          <a:bodyPr wrap="square" lIns="0" tIns="0" rIns="0" bIns="0" rtlCol="0" anchor="ctr"/>
+          <a:lstStyle/>
+          <a:p>
+            <a:pPr algn="r" indent="0" marL="0">
+              <a:buNone/>
+            </a:pPr>
+            <a:r>
+              <a:rPr lang="en-US" sz="1600" b="1" dirty="0">
+                <a:solidFill>
+                  <a:srgbClr val="A82B26"/>
+                </a:solidFill>
+                <a:latin typeface="Inter" pitchFamily="34" charset="0"/>
+                <a:ea typeface="Inter" pitchFamily="34" charset="-122"/>
+                <a:cs typeface="Inter" pitchFamily="34" charset="-120"/>
+              </a:rPr>
+              <a:t>−14.4%</a:t>
+            </a:r>
+            <a:endParaRPr lang="en-US" sz="1600" dirty="0"/>
+          </a:p>
+        </p:txBody>
+      </p:sp>
+      <p:sp>
+        <p:nvSpPr>
+          <p:cNvPr id="47" name="Shape 45"/>
           <p:cNvSpPr/>
           <p:nvPr/>
         </p:nvSpPr>
         <p:spPr>
           <a:xfrm>
-            <a:off x="987552" y="3401568"/>
-            <a:ext cx="292608" cy="292608"/>
-          </a:xfrm>
-          <a:prstGeom prst="ellipse">
+            <a:off x="6208776" y="3624682"/>
+            <a:ext cx="5321808" cy="751637"/>
+          </a:xfrm>
+          <a:prstGeom prst="rect">
             <a:avLst/>
           </a:prstGeom>
           <a:solidFill>
-            <a:srgbClr val="0B2C4A"/>
+            <a:srgbClr val="F7F7F7"/>
           </a:solidFill>
           <a:ln/>
         </p:spPr>
       </p:sp>
       <p:sp>
         <p:nvSpPr>
-          <p:cNvPr id="17" name="Text 15"/>
-          <p:cNvSpPr txBox="1"/>
-          <p:nvPr/>
-        </p:nvSpPr>
-        <p:spPr>
-          <a:xfrm>
-            <a:off x="987552" y="3401568"/>
-            <a:ext cx="292608" cy="292608"/>
-          </a:xfrm>
-          <a:prstGeom prst="rect">
-            <a:avLst/>
-          </a:prstGeom>
-          <a:noFill/>
-          <a:ln/>
-        </p:spPr>
-        <p:txBody>
-          <a:bodyPr wrap="square" lIns="0" tIns="0" rIns="0" bIns="0" rtlCol="0" anchor="ctr"/>
-          <a:lstStyle/>
-          <a:p>
-            <a:pPr algn="ctr" indent="0" marL="0">
-              <a:buNone/>
-            </a:pPr>
-            <a:r>
-              <a:rPr lang="en-US" sz="1800" b="1" dirty="0">
-                <a:solidFill>
-                  <a:srgbClr val="FFFFFF"/>
-                </a:solidFill>
-                <a:latin typeface="Inter" pitchFamily="34" charset="0"/>
-                <a:ea typeface="Inter" pitchFamily="34" charset="-122"/>
-                <a:cs typeface="Inter" pitchFamily="34" charset="-120"/>
-              </a:rPr>
-              <a:t>=</a:t>
-            </a:r>
-            <a:endParaRPr lang="en-US" sz="1800" dirty="0"/>
-          </a:p>
-        </p:txBody>
-      </p:sp>
-      <p:sp>
-        <p:nvSpPr>
-          <p:cNvPr id="18" name="Shape 16"/>
+          <p:cNvPr id="48" name="Text 46"/>
+          <p:cNvSpPr txBox="1"/>
+          <p:nvPr/>
+        </p:nvSpPr>
+        <p:spPr>
+          <a:xfrm>
+            <a:off x="6300216" y="3624682"/>
+            <a:ext cx="320040" cy="751637"/>
+          </a:xfrm>
+          <a:prstGeom prst="rect">
+            <a:avLst/>
+          </a:prstGeom>
+          <a:noFill/>
+          <a:ln/>
+        </p:spPr>
+        <p:txBody>
+          <a:bodyPr wrap="square" lIns="0" tIns="0" rIns="0" bIns="0" rtlCol="0" anchor="ctr"/>
+          <a:lstStyle/>
+          <a:p>
+            <a:pPr indent="0" marL="0">
+              <a:buNone/>
+            </a:pPr>
+            <a:r>
+              <a:rPr lang="en-US" sz="1500" b="1" dirty="0">
+                <a:solidFill>
+                  <a:srgbClr val="0B2C4A"/>
+                </a:solidFill>
+                <a:latin typeface="Inter" pitchFamily="34" charset="0"/>
+                <a:ea typeface="Inter" pitchFamily="34" charset="-122"/>
+                <a:cs typeface="Inter" pitchFamily="34" charset="-120"/>
+              </a:rPr>
+              <a:t>31</a:t>
+            </a:r>
+            <a:endParaRPr lang="en-US" sz="1500" dirty="0"/>
+          </a:p>
+        </p:txBody>
+      </p:sp>
+      <p:sp>
+        <p:nvSpPr>
+          <p:cNvPr id="49" name="Text 47"/>
+          <p:cNvSpPr txBox="1"/>
+          <p:nvPr/>
+        </p:nvSpPr>
+        <p:spPr>
+          <a:xfrm>
+            <a:off x="6665976" y="3624682"/>
+            <a:ext cx="1737360" cy="751637"/>
+          </a:xfrm>
+          <a:prstGeom prst="rect">
+            <a:avLst/>
+          </a:prstGeom>
+          <a:noFill/>
+          <a:ln/>
+        </p:spPr>
+        <p:txBody>
+          <a:bodyPr wrap="square" lIns="0" tIns="0" rIns="0" bIns="0" rtlCol="0" anchor="ctr"/>
+          <a:lstStyle/>
+          <a:p>
+            <a:pPr indent="0" marL="0">
+              <a:buNone/>
+            </a:pPr>
+            <a:r>
+              <a:rPr lang="en-US" sz="1400" b="1" dirty="0">
+                <a:solidFill>
+                  <a:srgbClr val="1A1A1A"/>
+                </a:solidFill>
+                <a:latin typeface="Inter" pitchFamily="34" charset="0"/>
+                <a:ea typeface="Inter" pitchFamily="34" charset="-122"/>
+                <a:cs typeface="Inter" pitchFamily="34" charset="-120"/>
+              </a:rPr>
+              <a:t>VW Henderson</a:t>
+            </a:r>
+            <a:endParaRPr lang="en-US" sz="1400" dirty="0"/>
+          </a:p>
+        </p:txBody>
+      </p:sp>
+      <p:sp>
+        <p:nvSpPr>
+          <p:cNvPr id="50" name="Text 48"/>
+          <p:cNvSpPr txBox="1"/>
+          <p:nvPr/>
+        </p:nvSpPr>
+        <p:spPr>
+          <a:xfrm>
+            <a:off x="8449056" y="3624682"/>
+            <a:ext cx="1920240" cy="751637"/>
+          </a:xfrm>
+          <a:prstGeom prst="rect">
+            <a:avLst/>
+          </a:prstGeom>
+          <a:noFill/>
+          <a:ln/>
+        </p:spPr>
+        <p:txBody>
+          <a:bodyPr wrap="square" lIns="0" tIns="0" rIns="0" bIns="0" rtlCol="0" anchor="ctr"/>
+          <a:lstStyle/>
+          <a:p>
+            <a:pPr indent="0" marL="0">
+              <a:buNone/>
+            </a:pPr>
+            <a:r>
+              <a:rPr lang="en-US" sz="1400" dirty="0">
+                <a:solidFill>
+                  <a:srgbClr val="595959"/>
+                </a:solidFill>
+                <a:latin typeface="Inter" pitchFamily="34" charset="0"/>
+                <a:ea typeface="Inter" pitchFamily="34" charset="-122"/>
+                <a:cs typeface="Inter" pitchFamily="34" charset="-120"/>
+              </a:rPr>
+              <a:t>$5.55M  </a:t>
+            </a:r>
+            <a:pPr indent="0" marL="0">
+              <a:buNone/>
+            </a:pPr>
+            <a:r>
+              <a:rPr lang="en-US" sz="1400" b="1" dirty="0">
+                <a:solidFill>
+                  <a:srgbClr val="A82B26"/>
+                </a:solidFill>
+                <a:latin typeface="Inter" pitchFamily="34" charset="0"/>
+                <a:ea typeface="Inter" pitchFamily="34" charset="-122"/>
+                <a:cs typeface="Inter" pitchFamily="34" charset="-120"/>
+              </a:rPr>
+              <a:t>→  </a:t>
+            </a:r>
+            <a:pPr indent="0" marL="0">
+              <a:buNone/>
+            </a:pPr>
+            <a:r>
+              <a:rPr lang="en-US" sz="1400" b="1" dirty="0">
+                <a:solidFill>
+                  <a:srgbClr val="A82B26"/>
+                </a:solidFill>
+                <a:latin typeface="Inter" pitchFamily="34" charset="0"/>
+                <a:ea typeface="Inter" pitchFamily="34" charset="-122"/>
+                <a:cs typeface="Inter" pitchFamily="34" charset="-120"/>
+              </a:rPr>
+              <a:t>$4.79M</a:t>
+            </a:r>
+            <a:endParaRPr lang="en-US" sz="1400" dirty="0"/>
+          </a:p>
+        </p:txBody>
+      </p:sp>
+      <p:sp>
+        <p:nvSpPr>
+          <p:cNvPr id="51" name="Text 49"/>
+          <p:cNvSpPr txBox="1"/>
+          <p:nvPr/>
+        </p:nvSpPr>
+        <p:spPr>
+          <a:xfrm>
+            <a:off x="10415016" y="3624682"/>
+            <a:ext cx="1051560" cy="751637"/>
+          </a:xfrm>
+          <a:prstGeom prst="rect">
+            <a:avLst/>
+          </a:prstGeom>
+          <a:noFill/>
+          <a:ln/>
+        </p:spPr>
+        <p:txBody>
+          <a:bodyPr wrap="square" lIns="0" tIns="0" rIns="0" bIns="0" rtlCol="0" anchor="ctr"/>
+          <a:lstStyle/>
+          <a:p>
+            <a:pPr algn="r" indent="0" marL="0">
+              <a:buNone/>
+            </a:pPr>
+            <a:r>
+              <a:rPr lang="en-US" sz="1600" b="1" dirty="0">
+                <a:solidFill>
+                  <a:srgbClr val="A82B26"/>
+                </a:solidFill>
+                <a:latin typeface="Inter" pitchFamily="34" charset="0"/>
+                <a:ea typeface="Inter" pitchFamily="34" charset="-122"/>
+                <a:cs typeface="Inter" pitchFamily="34" charset="-120"/>
+              </a:rPr>
+              <a:t>−13.7%</a:t>
+            </a:r>
+            <a:endParaRPr lang="en-US" sz="1600" dirty="0"/>
+          </a:p>
+        </p:txBody>
+      </p:sp>
+      <p:sp>
+        <p:nvSpPr>
+          <p:cNvPr id="52" name="Text 50"/>
+          <p:cNvSpPr txBox="1"/>
+          <p:nvPr/>
+        </p:nvSpPr>
+        <p:spPr>
+          <a:xfrm>
+            <a:off x="6300216" y="4376318"/>
+            <a:ext cx="320040" cy="751637"/>
+          </a:xfrm>
+          <a:prstGeom prst="rect">
+            <a:avLst/>
+          </a:prstGeom>
+          <a:noFill/>
+          <a:ln/>
+        </p:spPr>
+        <p:txBody>
+          <a:bodyPr wrap="square" lIns="0" tIns="0" rIns="0" bIns="0" rtlCol="0" anchor="ctr"/>
+          <a:lstStyle/>
+          <a:p>
+            <a:pPr indent="0" marL="0">
+              <a:buNone/>
+            </a:pPr>
+            <a:r>
+              <a:rPr lang="en-US" sz="1500" b="1" dirty="0">
+                <a:solidFill>
+                  <a:srgbClr val="0B2C4A"/>
+                </a:solidFill>
+                <a:latin typeface="Inter" pitchFamily="34" charset="0"/>
+                <a:ea typeface="Inter" pitchFamily="34" charset="-122"/>
+                <a:cs typeface="Inter" pitchFamily="34" charset="-120"/>
+              </a:rPr>
+              <a:t>30</a:t>
+            </a:r>
+            <a:endParaRPr lang="en-US" sz="1500" dirty="0"/>
+          </a:p>
+        </p:txBody>
+      </p:sp>
+      <p:sp>
+        <p:nvSpPr>
+          <p:cNvPr id="53" name="Text 51"/>
+          <p:cNvSpPr txBox="1"/>
+          <p:nvPr/>
+        </p:nvSpPr>
+        <p:spPr>
+          <a:xfrm>
+            <a:off x="6665976" y="4376318"/>
+            <a:ext cx="1737360" cy="751637"/>
+          </a:xfrm>
+          <a:prstGeom prst="rect">
+            <a:avLst/>
+          </a:prstGeom>
+          <a:noFill/>
+          <a:ln/>
+        </p:spPr>
+        <p:txBody>
+          <a:bodyPr wrap="square" lIns="0" tIns="0" rIns="0" bIns="0" rtlCol="0" anchor="ctr"/>
+          <a:lstStyle/>
+          <a:p>
+            <a:pPr indent="0" marL="0">
+              <a:buNone/>
+            </a:pPr>
+            <a:r>
+              <a:rPr lang="en-US" sz="1400" b="1" dirty="0">
+                <a:solidFill>
+                  <a:srgbClr val="1A1A1A"/>
+                </a:solidFill>
+                <a:latin typeface="Inter" pitchFamily="34" charset="0"/>
+                <a:ea typeface="Inter" pitchFamily="34" charset="-122"/>
+                <a:cs typeface="Inter" pitchFamily="34" charset="-120"/>
+              </a:rPr>
+              <a:t>Audi Reno</a:t>
+            </a:r>
+            <a:endParaRPr lang="en-US" sz="1400" dirty="0"/>
+          </a:p>
+        </p:txBody>
+      </p:sp>
+      <p:sp>
+        <p:nvSpPr>
+          <p:cNvPr id="54" name="Text 52"/>
+          <p:cNvSpPr txBox="1"/>
+          <p:nvPr/>
+        </p:nvSpPr>
+        <p:spPr>
+          <a:xfrm>
+            <a:off x="8449056" y="4376318"/>
+            <a:ext cx="1920240" cy="751637"/>
+          </a:xfrm>
+          <a:prstGeom prst="rect">
+            <a:avLst/>
+          </a:prstGeom>
+          <a:noFill/>
+          <a:ln/>
+        </p:spPr>
+        <p:txBody>
+          <a:bodyPr wrap="square" lIns="0" tIns="0" rIns="0" bIns="0" rtlCol="0" anchor="ctr"/>
+          <a:lstStyle/>
+          <a:p>
+            <a:pPr indent="0" marL="0">
+              <a:buNone/>
+            </a:pPr>
+            <a:r>
+              <a:rPr lang="en-US" sz="1400" dirty="0">
+                <a:solidFill>
+                  <a:srgbClr val="595959"/>
+                </a:solidFill>
+                <a:latin typeface="Inter" pitchFamily="34" charset="0"/>
+                <a:ea typeface="Inter" pitchFamily="34" charset="-122"/>
+                <a:cs typeface="Inter" pitchFamily="34" charset="-120"/>
+              </a:rPr>
+              <a:t>$4.98M  </a:t>
+            </a:r>
+            <a:pPr indent="0" marL="0">
+              <a:buNone/>
+            </a:pPr>
+            <a:r>
+              <a:rPr lang="en-US" sz="1400" b="1" dirty="0">
+                <a:solidFill>
+                  <a:srgbClr val="A82B26"/>
+                </a:solidFill>
+                <a:latin typeface="Inter" pitchFamily="34" charset="0"/>
+                <a:ea typeface="Inter" pitchFamily="34" charset="-122"/>
+                <a:cs typeface="Inter" pitchFamily="34" charset="-120"/>
+              </a:rPr>
+              <a:t>→  </a:t>
+            </a:r>
+            <a:pPr indent="0" marL="0">
+              <a:buNone/>
+            </a:pPr>
+            <a:r>
+              <a:rPr lang="en-US" sz="1400" b="1" dirty="0">
+                <a:solidFill>
+                  <a:srgbClr val="A82B26"/>
+                </a:solidFill>
+                <a:latin typeface="Inter" pitchFamily="34" charset="0"/>
+                <a:ea typeface="Inter" pitchFamily="34" charset="-122"/>
+                <a:cs typeface="Inter" pitchFamily="34" charset="-120"/>
+              </a:rPr>
+              <a:t>$4.46M</a:t>
+            </a:r>
+            <a:endParaRPr lang="en-US" sz="1400" dirty="0"/>
+          </a:p>
+        </p:txBody>
+      </p:sp>
+      <p:sp>
+        <p:nvSpPr>
+          <p:cNvPr id="55" name="Text 53"/>
+          <p:cNvSpPr txBox="1"/>
+          <p:nvPr/>
+        </p:nvSpPr>
+        <p:spPr>
+          <a:xfrm>
+            <a:off x="10415016" y="4376318"/>
+            <a:ext cx="1051560" cy="751637"/>
+          </a:xfrm>
+          <a:prstGeom prst="rect">
+            <a:avLst/>
+          </a:prstGeom>
+          <a:noFill/>
+          <a:ln/>
+        </p:spPr>
+        <p:txBody>
+          <a:bodyPr wrap="square" lIns="0" tIns="0" rIns="0" bIns="0" rtlCol="0" anchor="ctr"/>
+          <a:lstStyle/>
+          <a:p>
+            <a:pPr algn="r" indent="0" marL="0">
+              <a:buNone/>
+            </a:pPr>
+            <a:r>
+              <a:rPr lang="en-US" sz="1600" b="1" dirty="0">
+                <a:solidFill>
+                  <a:srgbClr val="A82B26"/>
+                </a:solidFill>
+                <a:latin typeface="Inter" pitchFamily="34" charset="0"/>
+                <a:ea typeface="Inter" pitchFamily="34" charset="-122"/>
+                <a:cs typeface="Inter" pitchFamily="34" charset="-120"/>
+              </a:rPr>
+              <a:t>−10.4%</a:t>
+            </a:r>
+            <a:endParaRPr lang="en-US" sz="1600" dirty="0"/>
+          </a:p>
+        </p:txBody>
+      </p:sp>
+      <p:sp>
+        <p:nvSpPr>
+          <p:cNvPr id="56" name="Shape 54"/>
           <p:cNvSpPr/>
           <p:nvPr/>
         </p:nvSpPr>
         <p:spPr>
           <a:xfrm>
-            <a:off x="713232" y="3712464"/>
-            <a:ext cx="4974336" cy="713232"/>
+            <a:off x="6208776" y="5127955"/>
+            <a:ext cx="5321808" cy="751637"/>
+          </a:xfrm>
+          <a:prstGeom prst="rect">
+            <a:avLst/>
+          </a:prstGeom>
+          <a:solidFill>
+            <a:srgbClr val="F7F7F7"/>
+          </a:solidFill>
+          <a:ln/>
+        </p:spPr>
+      </p:sp>
+      <p:sp>
+        <p:nvSpPr>
+          <p:cNvPr id="57" name="Text 55"/>
+          <p:cNvSpPr txBox="1"/>
+          <p:nvPr/>
+        </p:nvSpPr>
+        <p:spPr>
+          <a:xfrm>
+            <a:off x="6300216" y="5127955"/>
+            <a:ext cx="320040" cy="751637"/>
+          </a:xfrm>
+          <a:prstGeom prst="rect">
+            <a:avLst/>
+          </a:prstGeom>
+          <a:noFill/>
+          <a:ln/>
+        </p:spPr>
+        <p:txBody>
+          <a:bodyPr wrap="square" lIns="0" tIns="0" rIns="0" bIns="0" rtlCol="0" anchor="ctr"/>
+          <a:lstStyle/>
+          <a:p>
+            <a:pPr indent="0" marL="0">
+              <a:buNone/>
+            </a:pPr>
+            <a:r>
+              <a:rPr lang="en-US" sz="1500" b="1" dirty="0">
+                <a:solidFill>
+                  <a:srgbClr val="0B2C4A"/>
+                </a:solidFill>
+                <a:latin typeface="Inter" pitchFamily="34" charset="0"/>
+                <a:ea typeface="Inter" pitchFamily="34" charset="-122"/>
+                <a:cs typeface="Inter" pitchFamily="34" charset="-120"/>
+              </a:rPr>
+              <a:t>29</a:t>
+            </a:r>
+            <a:endParaRPr lang="en-US" sz="1500" dirty="0"/>
+          </a:p>
+        </p:txBody>
+      </p:sp>
+      <p:sp>
+        <p:nvSpPr>
+          <p:cNvPr id="58" name="Text 56"/>
+          <p:cNvSpPr txBox="1"/>
+          <p:nvPr/>
+        </p:nvSpPr>
+        <p:spPr>
+          <a:xfrm>
+            <a:off x="6665976" y="5127955"/>
+            <a:ext cx="1737360" cy="751637"/>
+          </a:xfrm>
+          <a:prstGeom prst="rect">
+            <a:avLst/>
+          </a:prstGeom>
+          <a:noFill/>
+          <a:ln/>
+        </p:spPr>
+        <p:txBody>
+          <a:bodyPr wrap="square" lIns="0" tIns="0" rIns="0" bIns="0" rtlCol="0" anchor="ctr"/>
+          <a:lstStyle/>
+          <a:p>
+            <a:pPr indent="0" marL="0">
+              <a:buNone/>
+            </a:pPr>
+            <a:r>
+              <a:rPr lang="en-US" sz="1400" b="1" dirty="0">
+                <a:solidFill>
+                  <a:srgbClr val="1A1A1A"/>
+                </a:solidFill>
+                <a:latin typeface="Inter" pitchFamily="34" charset="0"/>
+                <a:ea typeface="Inter" pitchFamily="34" charset="-122"/>
+                <a:cs typeface="Inter" pitchFamily="34" charset="-120"/>
+              </a:rPr>
+              <a:t>Honda North</a:t>
+            </a:r>
+            <a:endParaRPr lang="en-US" sz="1400" dirty="0"/>
+          </a:p>
+        </p:txBody>
+      </p:sp>
+      <p:sp>
+        <p:nvSpPr>
+          <p:cNvPr id="59" name="Text 57"/>
+          <p:cNvSpPr txBox="1"/>
+          <p:nvPr/>
+        </p:nvSpPr>
+        <p:spPr>
+          <a:xfrm>
+            <a:off x="8449056" y="5127955"/>
+            <a:ext cx="1920240" cy="751637"/>
+          </a:xfrm>
+          <a:prstGeom prst="rect">
+            <a:avLst/>
+          </a:prstGeom>
+          <a:noFill/>
+          <a:ln/>
+        </p:spPr>
+        <p:txBody>
+          <a:bodyPr wrap="square" lIns="0" tIns="0" rIns="0" bIns="0" rtlCol="0" anchor="ctr"/>
+          <a:lstStyle/>
+          <a:p>
+            <a:pPr indent="0" marL="0">
+              <a:buNone/>
+            </a:pPr>
+            <a:r>
+              <a:rPr lang="en-US" sz="1400" dirty="0">
+                <a:solidFill>
+                  <a:srgbClr val="595959"/>
+                </a:solidFill>
+                <a:latin typeface="Inter" pitchFamily="34" charset="0"/>
+                <a:ea typeface="Inter" pitchFamily="34" charset="-122"/>
+                <a:cs typeface="Inter" pitchFamily="34" charset="-120"/>
+              </a:rPr>
+              <a:t>$9.46M  </a:t>
+            </a:r>
+            <a:pPr indent="0" marL="0">
+              <a:buNone/>
+            </a:pPr>
+            <a:r>
+              <a:rPr lang="en-US" sz="1400" b="1" dirty="0">
+                <a:solidFill>
+                  <a:srgbClr val="A82B26"/>
+                </a:solidFill>
+                <a:latin typeface="Inter" pitchFamily="34" charset="0"/>
+                <a:ea typeface="Inter" pitchFamily="34" charset="-122"/>
+                <a:cs typeface="Inter" pitchFamily="34" charset="-120"/>
+              </a:rPr>
+              <a:t>→  </a:t>
+            </a:r>
+            <a:pPr indent="0" marL="0">
+              <a:buNone/>
+            </a:pPr>
+            <a:r>
+              <a:rPr lang="en-US" sz="1400" b="1" dirty="0">
+                <a:solidFill>
+                  <a:srgbClr val="A82B26"/>
+                </a:solidFill>
+                <a:latin typeface="Inter" pitchFamily="34" charset="0"/>
+                <a:ea typeface="Inter" pitchFamily="34" charset="-122"/>
+                <a:cs typeface="Inter" pitchFamily="34" charset="-120"/>
+              </a:rPr>
+              <a:t>$8.62M</a:t>
+            </a:r>
+            <a:endParaRPr lang="en-US" sz="1400" dirty="0"/>
+          </a:p>
+        </p:txBody>
+      </p:sp>
+      <p:sp>
+        <p:nvSpPr>
+          <p:cNvPr id="60" name="Text 58"/>
+          <p:cNvSpPr txBox="1"/>
+          <p:nvPr/>
+        </p:nvSpPr>
+        <p:spPr>
+          <a:xfrm>
+            <a:off x="10415016" y="5127955"/>
+            <a:ext cx="1051560" cy="751637"/>
+          </a:xfrm>
+          <a:prstGeom prst="rect">
+            <a:avLst/>
+          </a:prstGeom>
+          <a:noFill/>
+          <a:ln/>
+        </p:spPr>
+        <p:txBody>
+          <a:bodyPr wrap="square" lIns="0" tIns="0" rIns="0" bIns="0" rtlCol="0" anchor="ctr"/>
+          <a:lstStyle/>
+          <a:p>
+            <a:pPr algn="r" indent="0" marL="0">
+              <a:buNone/>
+            </a:pPr>
+            <a:r>
+              <a:rPr lang="en-US" sz="1600" b="1" dirty="0">
+                <a:solidFill>
+                  <a:srgbClr val="A82B26"/>
+                </a:solidFill>
+                <a:latin typeface="Inter" pitchFamily="34" charset="0"/>
+                <a:ea typeface="Inter" pitchFamily="34" charset="-122"/>
+                <a:cs typeface="Inter" pitchFamily="34" charset="-120"/>
+              </a:rPr>
+              <a:t>−8.9%</a:t>
+            </a:r>
+            <a:endParaRPr lang="en-US" sz="1600" dirty="0"/>
+          </a:p>
+        </p:txBody>
+      </p:sp>
+      <p:sp>
+        <p:nvSpPr>
+          <p:cNvPr id="61" name="Shape 59"/>
+          <p:cNvSpPr/>
+          <p:nvPr/>
+        </p:nvSpPr>
+        <p:spPr>
+          <a:xfrm>
+            <a:off x="457200" y="6126480"/>
+            <a:ext cx="11274552" cy="615696"/>
           </a:xfrm>
           <a:prstGeom prst="rect">
             <a:avLst/>
@@ -34376,14 +36276,14 @@
       </p:sp>
       <p:sp>
         <p:nvSpPr>
-          <p:cNvPr id="19" name="Text 17"/>
-          <p:cNvSpPr txBox="1"/>
-          <p:nvPr/>
-        </p:nvSpPr>
-        <p:spPr>
-          <a:xfrm>
-            <a:off x="896112" y="3739896"/>
-            <a:ext cx="2743200" cy="512064"/>
+          <p:cNvPr id="62" name="Text 60"/>
+          <p:cNvSpPr txBox="1"/>
+          <p:nvPr/>
+        </p:nvSpPr>
+        <p:spPr>
+          <a:xfrm>
+            <a:off x="658368" y="6144768"/>
+            <a:ext cx="10927080" cy="579120"/>
           </a:xfrm>
           <a:prstGeom prst="rect">
             <a:avLst/>
@@ -34399,7 +36299,7 @@
               <a:buNone/>
             </a:pPr>
             <a:r>
-              <a:rPr lang="en-US" sz="3000" b="1" dirty="0">
+              <a:rPr lang="en-US" sz="1600" b="1" dirty="0">
                 <a:solidFill>
                   <a:srgbClr val="0B2C4A"/>
                 </a:solidFill>
@@ -34407,1086 +36307,7 @@
                 <a:ea typeface="Inter" pitchFamily="34" charset="-122"/>
                 <a:cs typeface="Inter" pitchFamily="34" charset="-120"/>
               </a:rPr>
-              <a:t>$188.80M</a:t>
-            </a:r>
-            <a:endParaRPr lang="en-US" sz="3000" dirty="0"/>
-          </a:p>
-        </p:txBody>
-      </p:sp>
-      <p:sp>
-        <p:nvSpPr>
-          <p:cNvPr id="20" name="Text 18"/>
-          <p:cNvSpPr txBox="1"/>
-          <p:nvPr/>
-        </p:nvSpPr>
-        <p:spPr>
-          <a:xfrm>
-            <a:off x="3657600" y="3739896"/>
-            <a:ext cx="1874520" cy="658368"/>
-          </a:xfrm>
-          <a:prstGeom prst="rect">
-            <a:avLst/>
-          </a:prstGeom>
-          <a:noFill/>
-          <a:ln/>
-        </p:spPr>
-        <p:txBody>
-          <a:bodyPr wrap="square" lIns="0" tIns="0" rIns="0" bIns="0" rtlCol="0" anchor="ctr"/>
-          <a:lstStyle/>
-          <a:p>
-            <a:pPr algn="r" indent="0" marL="0">
-              <a:buNone/>
-            </a:pPr>
-            <a:r>
-              <a:rPr lang="en-US" sz="1400" dirty="0">
-                <a:solidFill>
-                  <a:srgbClr val="595959"/>
-                </a:solidFill>
-                <a:latin typeface="Inter" pitchFamily="34" charset="0"/>
-                <a:ea typeface="Inter" pitchFamily="34" charset="-122"/>
-                <a:cs typeface="Inter" pitchFamily="34" charset="-120"/>
-              </a:rPr>
-              <a:t>2026 group</a:t>
-            </a:r>
-            <a:endParaRPr lang="en-US" sz="1400" dirty="0"/>
-          </a:p>
-        </p:txBody>
-      </p:sp>
-      <p:sp>
-        <p:nvSpPr>
-          <p:cNvPr id="21" name="Shape 19"/>
-          <p:cNvSpPr/>
-          <p:nvPr/>
-        </p:nvSpPr>
-        <p:spPr>
-          <a:xfrm>
-            <a:off x="6126480" y="1207008"/>
-            <a:ext cx="5605272" cy="4782312"/>
-          </a:xfrm>
-          <a:prstGeom prst="rect">
-            <a:avLst/>
-          </a:prstGeom>
-          <a:solidFill>
-            <a:srgbClr val="FFFFFF"/>
-          </a:solidFill>
-          <a:ln/>
-        </p:spPr>
-      </p:sp>
-      <p:sp>
-        <p:nvSpPr>
-          <p:cNvPr id="22" name="Text 20"/>
-          <p:cNvSpPr txBox="1"/>
-          <p:nvPr/>
-        </p:nvSpPr>
-        <p:spPr>
-          <a:xfrm>
-            <a:off x="6355080" y="1344168"/>
-            <a:ext cx="5148072" cy="292608"/>
-          </a:xfrm>
-          <a:prstGeom prst="rect">
-            <a:avLst/>
-          </a:prstGeom>
-          <a:noFill/>
-          <a:ln/>
-        </p:spPr>
-        <p:txBody>
-          <a:bodyPr wrap="square" lIns="0" tIns="0" rIns="0" bIns="0" rtlCol="0" anchor="ctr"/>
-          <a:lstStyle/>
-          <a:p>
-            <a:pPr indent="0" marL="0">
-              <a:buNone/>
-            </a:pPr>
-            <a:r>
-              <a:rPr lang="en-US" sz="1500" dirty="0">
-                <a:solidFill>
-                  <a:srgbClr val="1A1A1A"/>
-                </a:solidFill>
-                <a:latin typeface="Inter" pitchFamily="34" charset="0"/>
-                <a:ea typeface="Inter" pitchFamily="34" charset="-122"/>
-                <a:cs typeface="Inter" pitchFamily="34" charset="-120"/>
-              </a:rPr>
-              <a:t>Who moved it</a:t>
-            </a:r>
-            <a:endParaRPr lang="en-US" sz="1500" dirty="0"/>
-          </a:p>
-        </p:txBody>
-      </p:sp>
-      <p:sp>
-        <p:nvSpPr>
-          <p:cNvPr id="23" name="Shape 21"/>
-          <p:cNvSpPr/>
-          <p:nvPr/>
-        </p:nvSpPr>
-        <p:spPr>
-          <a:xfrm>
-            <a:off x="6355080" y="1691640"/>
-            <a:ext cx="5148072" cy="10973"/>
-          </a:xfrm>
-          <a:prstGeom prst="rect">
-            <a:avLst/>
-          </a:prstGeom>
-          <a:solidFill>
-            <a:srgbClr val="1A1A1A"/>
-          </a:solidFill>
-          <a:ln/>
-        </p:spPr>
-      </p:sp>
-      <p:sp>
-        <p:nvSpPr>
-          <p:cNvPr id="24" name="Text 22"/>
-          <p:cNvSpPr txBox="1"/>
-          <p:nvPr/>
-        </p:nvSpPr>
-        <p:spPr>
-          <a:xfrm>
-            <a:off x="6355080" y="1828800"/>
-            <a:ext cx="2148840" cy="384048"/>
-          </a:xfrm>
-          <a:prstGeom prst="rect">
-            <a:avLst/>
-          </a:prstGeom>
-          <a:noFill/>
-          <a:ln/>
-        </p:spPr>
-        <p:txBody>
-          <a:bodyPr wrap="square" lIns="0" tIns="0" rIns="0" bIns="0" rtlCol="0" anchor="ctr"/>
-          <a:lstStyle/>
-          <a:p>
-            <a:pPr indent="0" marL="0">
-              <a:buNone/>
-            </a:pPr>
-            <a:r>
-              <a:rPr lang="en-US" sz="1400" dirty="0">
-                <a:solidFill>
-                  <a:srgbClr val="1A1A1A"/>
-                </a:solidFill>
-                <a:latin typeface="Inter" pitchFamily="34" charset="0"/>
-                <a:ea typeface="Inter" pitchFamily="34" charset="-122"/>
-                <a:cs typeface="Inter" pitchFamily="34" charset="-120"/>
-              </a:rPr>
-              <a:t>TOYOTA HENDERSON</a:t>
-            </a:r>
-            <a:endParaRPr lang="en-US" sz="1400" dirty="0"/>
-          </a:p>
-        </p:txBody>
-      </p:sp>
-      <p:sp>
-        <p:nvSpPr>
-          <p:cNvPr id="25" name="Shape 23"/>
-          <p:cNvSpPr/>
-          <p:nvPr/>
-        </p:nvSpPr>
-        <p:spPr>
-          <a:xfrm>
-            <a:off x="8595360" y="1929384"/>
-            <a:ext cx="1463040" cy="182880"/>
-          </a:xfrm>
-          <a:prstGeom prst="rect">
-            <a:avLst/>
-          </a:prstGeom>
-          <a:solidFill>
-            <a:srgbClr val="12A566"/>
-          </a:solidFill>
-          <a:ln/>
-        </p:spPr>
-      </p:sp>
-      <p:sp>
-        <p:nvSpPr>
-          <p:cNvPr id="26" name="Text 24"/>
-          <p:cNvSpPr txBox="1"/>
-          <p:nvPr/>
-        </p:nvSpPr>
-        <p:spPr>
-          <a:xfrm>
-            <a:off x="10149840" y="1828800"/>
-            <a:ext cx="1371600" cy="384048"/>
-          </a:xfrm>
-          <a:prstGeom prst="rect">
-            <a:avLst/>
-          </a:prstGeom>
-          <a:noFill/>
-          <a:ln/>
-        </p:spPr>
-        <p:txBody>
-          <a:bodyPr wrap="square" lIns="0" tIns="0" rIns="0" bIns="0" rtlCol="0" anchor="ctr"/>
-          <a:lstStyle/>
-          <a:p>
-            <a:pPr algn="r" indent="0" marL="0">
-              <a:buNone/>
-            </a:pPr>
-            <a:r>
-              <a:rPr lang="en-US" sz="1400" b="1" dirty="0">
-                <a:solidFill>
-                  <a:srgbClr val="0B7A4A"/>
-                </a:solidFill>
-                <a:latin typeface="Inter" pitchFamily="34" charset="0"/>
-                <a:ea typeface="Inter" pitchFamily="34" charset="-122"/>
-                <a:cs typeface="Inter" pitchFamily="34" charset="-120"/>
-              </a:rPr>
-              <a:t>+$1,772,700</a:t>
-            </a:r>
-            <a:endParaRPr lang="en-US" sz="1400" dirty="0"/>
-          </a:p>
-        </p:txBody>
-      </p:sp>
-      <p:sp>
-        <p:nvSpPr>
-          <p:cNvPr id="27" name="Text 25"/>
-          <p:cNvSpPr txBox="1"/>
-          <p:nvPr/>
-        </p:nvSpPr>
-        <p:spPr>
-          <a:xfrm>
-            <a:off x="6355080" y="2258568"/>
-            <a:ext cx="2148840" cy="384048"/>
-          </a:xfrm>
-          <a:prstGeom prst="rect">
-            <a:avLst/>
-          </a:prstGeom>
-          <a:noFill/>
-          <a:ln/>
-        </p:spPr>
-        <p:txBody>
-          <a:bodyPr wrap="square" lIns="0" tIns="0" rIns="0" bIns="0" rtlCol="0" anchor="ctr"/>
-          <a:lstStyle/>
-          <a:p>
-            <a:pPr indent="0" marL="0">
-              <a:buNone/>
-            </a:pPr>
-            <a:r>
-              <a:rPr lang="en-US" sz="1400" dirty="0">
-                <a:solidFill>
-                  <a:srgbClr val="1A1A1A"/>
-                </a:solidFill>
-                <a:latin typeface="Inter" pitchFamily="34" charset="0"/>
-                <a:ea typeface="Inter" pitchFamily="34" charset="-122"/>
-                <a:cs typeface="Inter" pitchFamily="34" charset="-120"/>
-              </a:rPr>
-              <a:t>AUDI HENDERSON</a:t>
-            </a:r>
-            <a:endParaRPr lang="en-US" sz="1400" dirty="0"/>
-          </a:p>
-        </p:txBody>
-      </p:sp>
-      <p:sp>
-        <p:nvSpPr>
-          <p:cNvPr id="28" name="Shape 26"/>
-          <p:cNvSpPr/>
-          <p:nvPr/>
-        </p:nvSpPr>
-        <p:spPr>
-          <a:xfrm>
-            <a:off x="8595360" y="2359152"/>
-            <a:ext cx="1407053" cy="182880"/>
-          </a:xfrm>
-          <a:prstGeom prst="rect">
-            <a:avLst/>
-          </a:prstGeom>
-          <a:solidFill>
-            <a:srgbClr val="12A566"/>
-          </a:solidFill>
-          <a:ln/>
-        </p:spPr>
-      </p:sp>
-      <p:sp>
-        <p:nvSpPr>
-          <p:cNvPr id="29" name="Text 27"/>
-          <p:cNvSpPr txBox="1"/>
-          <p:nvPr/>
-        </p:nvSpPr>
-        <p:spPr>
-          <a:xfrm>
-            <a:off x="10149840" y="2258568"/>
-            <a:ext cx="1371600" cy="384048"/>
-          </a:xfrm>
-          <a:prstGeom prst="rect">
-            <a:avLst/>
-          </a:prstGeom>
-          <a:noFill/>
-          <a:ln/>
-        </p:spPr>
-        <p:txBody>
-          <a:bodyPr wrap="square" lIns="0" tIns="0" rIns="0" bIns="0" rtlCol="0" anchor="ctr"/>
-          <a:lstStyle/>
-          <a:p>
-            <a:pPr algn="r" indent="0" marL="0">
-              <a:buNone/>
-            </a:pPr>
-            <a:r>
-              <a:rPr lang="en-US" sz="1400" b="1" dirty="0">
-                <a:solidFill>
-                  <a:srgbClr val="0B7A4A"/>
-                </a:solidFill>
-                <a:latin typeface="Inter" pitchFamily="34" charset="0"/>
-                <a:ea typeface="Inter" pitchFamily="34" charset="-122"/>
-                <a:cs typeface="Inter" pitchFamily="34" charset="-120"/>
-              </a:rPr>
-              <a:t>+$1,704,863</a:t>
-            </a:r>
-            <a:endParaRPr lang="en-US" sz="1400" dirty="0"/>
-          </a:p>
-        </p:txBody>
-      </p:sp>
-      <p:sp>
-        <p:nvSpPr>
-          <p:cNvPr id="30" name="Text 28"/>
-          <p:cNvSpPr txBox="1"/>
-          <p:nvPr/>
-        </p:nvSpPr>
-        <p:spPr>
-          <a:xfrm>
-            <a:off x="6355080" y="2688336"/>
-            <a:ext cx="2148840" cy="384048"/>
-          </a:xfrm>
-          <a:prstGeom prst="rect">
-            <a:avLst/>
-          </a:prstGeom>
-          <a:noFill/>
-          <a:ln/>
-        </p:spPr>
-        <p:txBody>
-          <a:bodyPr wrap="square" lIns="0" tIns="0" rIns="0" bIns="0" rtlCol="0" anchor="ctr"/>
-          <a:lstStyle/>
-          <a:p>
-            <a:pPr indent="0" marL="0">
-              <a:buNone/>
-            </a:pPr>
-            <a:r>
-              <a:rPr lang="en-US" sz="1400" dirty="0">
-                <a:solidFill>
-                  <a:srgbClr val="1A1A1A"/>
-                </a:solidFill>
-                <a:latin typeface="Inter" pitchFamily="34" charset="0"/>
-                <a:ea typeface="Inter" pitchFamily="34" charset="-122"/>
-                <a:cs typeface="Inter" pitchFamily="34" charset="-120"/>
-              </a:rPr>
-              <a:t>HONDA HENDERSON</a:t>
-            </a:r>
-            <a:endParaRPr lang="en-US" sz="1400" dirty="0"/>
-          </a:p>
-        </p:txBody>
-      </p:sp>
-      <p:sp>
-        <p:nvSpPr>
-          <p:cNvPr id="31" name="Shape 29"/>
-          <p:cNvSpPr/>
-          <p:nvPr/>
-        </p:nvSpPr>
-        <p:spPr>
-          <a:xfrm>
-            <a:off x="8595360" y="2788920"/>
-            <a:ext cx="769067" cy="182880"/>
-          </a:xfrm>
-          <a:prstGeom prst="rect">
-            <a:avLst/>
-          </a:prstGeom>
-          <a:solidFill>
-            <a:srgbClr val="12A566"/>
-          </a:solidFill>
-          <a:ln/>
-        </p:spPr>
-      </p:sp>
-      <p:sp>
-        <p:nvSpPr>
-          <p:cNvPr id="32" name="Text 30"/>
-          <p:cNvSpPr txBox="1"/>
-          <p:nvPr/>
-        </p:nvSpPr>
-        <p:spPr>
-          <a:xfrm>
-            <a:off x="10149840" y="2688336"/>
-            <a:ext cx="1371600" cy="384048"/>
-          </a:xfrm>
-          <a:prstGeom prst="rect">
-            <a:avLst/>
-          </a:prstGeom>
-          <a:noFill/>
-          <a:ln/>
-        </p:spPr>
-        <p:txBody>
-          <a:bodyPr wrap="square" lIns="0" tIns="0" rIns="0" bIns="0" rtlCol="0" anchor="ctr"/>
-          <a:lstStyle/>
-          <a:p>
-            <a:pPr algn="r" indent="0" marL="0">
-              <a:buNone/>
-            </a:pPr>
-            <a:r>
-              <a:rPr lang="en-US" sz="1400" b="1" dirty="0">
-                <a:solidFill>
-                  <a:srgbClr val="0B7A4A"/>
-                </a:solidFill>
-                <a:latin typeface="Inter" pitchFamily="34" charset="0"/>
-                <a:ea typeface="Inter" pitchFamily="34" charset="-122"/>
-                <a:cs typeface="Inter" pitchFamily="34" charset="-120"/>
-              </a:rPr>
-              <a:t>+$931,844</a:t>
-            </a:r>
-            <a:endParaRPr lang="en-US" sz="1400" dirty="0"/>
-          </a:p>
-        </p:txBody>
-      </p:sp>
-      <p:sp>
-        <p:nvSpPr>
-          <p:cNvPr id="33" name="Text 31"/>
-          <p:cNvSpPr txBox="1"/>
-          <p:nvPr/>
-        </p:nvSpPr>
-        <p:spPr>
-          <a:xfrm>
-            <a:off x="6355080" y="3118104"/>
-            <a:ext cx="2148840" cy="384048"/>
-          </a:xfrm>
-          <a:prstGeom prst="rect">
-            <a:avLst/>
-          </a:prstGeom>
-          <a:noFill/>
-          <a:ln/>
-        </p:spPr>
-        <p:txBody>
-          <a:bodyPr wrap="square" lIns="0" tIns="0" rIns="0" bIns="0" rtlCol="0" anchor="ctr"/>
-          <a:lstStyle/>
-          <a:p>
-            <a:pPr indent="0" marL="0">
-              <a:buNone/>
-            </a:pPr>
-            <a:r>
-              <a:rPr lang="en-US" sz="1400" dirty="0">
-                <a:solidFill>
-                  <a:srgbClr val="1A1A1A"/>
-                </a:solidFill>
-                <a:latin typeface="Inter" pitchFamily="34" charset="0"/>
-                <a:ea typeface="Inter" pitchFamily="34" charset="-122"/>
-                <a:cs typeface="Inter" pitchFamily="34" charset="-120"/>
-              </a:rPr>
-              <a:t>LEXUS</a:t>
-            </a:r>
-            <a:endParaRPr lang="en-US" sz="1400" dirty="0"/>
-          </a:p>
-        </p:txBody>
-      </p:sp>
-      <p:sp>
-        <p:nvSpPr>
-          <p:cNvPr id="34" name="Shape 32"/>
-          <p:cNvSpPr/>
-          <p:nvPr/>
-        </p:nvSpPr>
-        <p:spPr>
-          <a:xfrm>
-            <a:off x="8595360" y="3218688"/>
-            <a:ext cx="630324" cy="182880"/>
-          </a:xfrm>
-          <a:prstGeom prst="rect">
-            <a:avLst/>
-          </a:prstGeom>
-          <a:solidFill>
-            <a:srgbClr val="12A566"/>
-          </a:solidFill>
-          <a:ln/>
-        </p:spPr>
-      </p:sp>
-      <p:sp>
-        <p:nvSpPr>
-          <p:cNvPr id="35" name="Text 33"/>
-          <p:cNvSpPr txBox="1"/>
-          <p:nvPr/>
-        </p:nvSpPr>
-        <p:spPr>
-          <a:xfrm>
-            <a:off x="10149840" y="3118104"/>
-            <a:ext cx="1371600" cy="384048"/>
-          </a:xfrm>
-          <a:prstGeom prst="rect">
-            <a:avLst/>
-          </a:prstGeom>
-          <a:noFill/>
-          <a:ln/>
-        </p:spPr>
-        <p:txBody>
-          <a:bodyPr wrap="square" lIns="0" tIns="0" rIns="0" bIns="0" rtlCol="0" anchor="ctr"/>
-          <a:lstStyle/>
-          <a:p>
-            <a:pPr algn="r" indent="0" marL="0">
-              <a:buNone/>
-            </a:pPr>
-            <a:r>
-              <a:rPr lang="en-US" sz="1400" b="1" dirty="0">
-                <a:solidFill>
-                  <a:srgbClr val="0B7A4A"/>
-                </a:solidFill>
-                <a:latin typeface="Inter" pitchFamily="34" charset="0"/>
-                <a:ea typeface="Inter" pitchFamily="34" charset="-122"/>
-                <a:cs typeface="Inter" pitchFamily="34" charset="-120"/>
-              </a:rPr>
-              <a:t>+$763,736</a:t>
-            </a:r>
-            <a:endParaRPr lang="en-US" sz="1400" dirty="0"/>
-          </a:p>
-        </p:txBody>
-      </p:sp>
-      <p:sp>
-        <p:nvSpPr>
-          <p:cNvPr id="36" name="Text 34"/>
-          <p:cNvSpPr txBox="1"/>
-          <p:nvPr/>
-        </p:nvSpPr>
-        <p:spPr>
-          <a:xfrm>
-            <a:off x="6355080" y="3547872"/>
-            <a:ext cx="2148840" cy="384048"/>
-          </a:xfrm>
-          <a:prstGeom prst="rect">
-            <a:avLst/>
-          </a:prstGeom>
-          <a:noFill/>
-          <a:ln/>
-        </p:spPr>
-        <p:txBody>
-          <a:bodyPr wrap="square" lIns="0" tIns="0" rIns="0" bIns="0" rtlCol="0" anchor="ctr"/>
-          <a:lstStyle/>
-          <a:p>
-            <a:pPr indent="0" marL="0">
-              <a:buNone/>
-            </a:pPr>
-            <a:r>
-              <a:rPr lang="en-US" sz="1400" dirty="0">
-                <a:solidFill>
-                  <a:srgbClr val="1A1A1A"/>
-                </a:solidFill>
-                <a:latin typeface="Inter" pitchFamily="34" charset="0"/>
-                <a:ea typeface="Inter" pitchFamily="34" charset="-122"/>
-                <a:cs typeface="Inter" pitchFamily="34" charset="-120"/>
-              </a:rPr>
-              <a:t>LINCOLN</a:t>
-            </a:r>
-            <a:endParaRPr lang="en-US" sz="1400" dirty="0"/>
-          </a:p>
-        </p:txBody>
-      </p:sp>
-      <p:sp>
-        <p:nvSpPr>
-          <p:cNvPr id="37" name="Shape 35"/>
-          <p:cNvSpPr/>
-          <p:nvPr/>
-        </p:nvSpPr>
-        <p:spPr>
-          <a:xfrm>
-            <a:off x="8595360" y="3648456"/>
-            <a:ext cx="592076" cy="182880"/>
-          </a:xfrm>
-          <a:prstGeom prst="rect">
-            <a:avLst/>
-          </a:prstGeom>
-          <a:solidFill>
-            <a:srgbClr val="12A566"/>
-          </a:solidFill>
-          <a:ln/>
-        </p:spPr>
-      </p:sp>
-      <p:sp>
-        <p:nvSpPr>
-          <p:cNvPr id="38" name="Text 36"/>
-          <p:cNvSpPr txBox="1"/>
-          <p:nvPr/>
-        </p:nvSpPr>
-        <p:spPr>
-          <a:xfrm>
-            <a:off x="10149840" y="3547872"/>
-            <a:ext cx="1371600" cy="384048"/>
-          </a:xfrm>
-          <a:prstGeom prst="rect">
-            <a:avLst/>
-          </a:prstGeom>
-          <a:noFill/>
-          <a:ln/>
-        </p:spPr>
-        <p:txBody>
-          <a:bodyPr wrap="square" lIns="0" tIns="0" rIns="0" bIns="0" rtlCol="0" anchor="ctr"/>
-          <a:lstStyle/>
-          <a:p>
-            <a:pPr algn="r" indent="0" marL="0">
-              <a:buNone/>
-            </a:pPr>
-            <a:r>
-              <a:rPr lang="en-US" sz="1400" b="1" dirty="0">
-                <a:solidFill>
-                  <a:srgbClr val="0B7A4A"/>
-                </a:solidFill>
-                <a:latin typeface="Inter" pitchFamily="34" charset="0"/>
-                <a:ea typeface="Inter" pitchFamily="34" charset="-122"/>
-                <a:cs typeface="Inter" pitchFamily="34" charset="-120"/>
-              </a:rPr>
-              <a:t>+$717,392</a:t>
-            </a:r>
-            <a:endParaRPr lang="en-US" sz="1400" dirty="0"/>
-          </a:p>
-        </p:txBody>
-      </p:sp>
-      <p:sp>
-        <p:nvSpPr>
-          <p:cNvPr id="39" name="Text 37"/>
-          <p:cNvSpPr txBox="1"/>
-          <p:nvPr/>
-        </p:nvSpPr>
-        <p:spPr>
-          <a:xfrm>
-            <a:off x="6355080" y="3977640"/>
-            <a:ext cx="2148840" cy="384048"/>
-          </a:xfrm>
-          <a:prstGeom prst="rect">
-            <a:avLst/>
-          </a:prstGeom>
-          <a:noFill/>
-          <a:ln/>
-        </p:spPr>
-        <p:txBody>
-          <a:bodyPr wrap="square" lIns="0" tIns="0" rIns="0" bIns="0" rtlCol="0" anchor="ctr"/>
-          <a:lstStyle/>
-          <a:p>
-            <a:pPr indent="0" marL="0">
-              <a:buNone/>
-            </a:pPr>
-            <a:r>
-              <a:rPr lang="en-US" sz="1400" dirty="0">
-                <a:solidFill>
-                  <a:srgbClr val="1A1A1A"/>
-                </a:solidFill>
-                <a:latin typeface="Inter" pitchFamily="34" charset="0"/>
-                <a:ea typeface="Inter" pitchFamily="34" charset="-122"/>
-                <a:cs typeface="Inter" pitchFamily="34" charset="-120"/>
-              </a:rPr>
-              <a:t>ACURA</a:t>
-            </a:r>
-            <a:endParaRPr lang="en-US" sz="1400" dirty="0"/>
-          </a:p>
-        </p:txBody>
-      </p:sp>
-      <p:sp>
-        <p:nvSpPr>
-          <p:cNvPr id="40" name="Shape 38"/>
-          <p:cNvSpPr/>
-          <p:nvPr/>
-        </p:nvSpPr>
-        <p:spPr>
-          <a:xfrm>
-            <a:off x="8168846" y="4078224"/>
-            <a:ext cx="426514" cy="182880"/>
-          </a:xfrm>
-          <a:prstGeom prst="rect">
-            <a:avLst/>
-          </a:prstGeom>
-          <a:solidFill>
-            <a:srgbClr val="C2352F"/>
-          </a:solidFill>
-          <a:ln/>
-        </p:spPr>
-      </p:sp>
-      <p:sp>
-        <p:nvSpPr>
-          <p:cNvPr id="41" name="Text 39"/>
-          <p:cNvSpPr txBox="1"/>
-          <p:nvPr/>
-        </p:nvSpPr>
-        <p:spPr>
-          <a:xfrm>
-            <a:off x="10149840" y="3977640"/>
-            <a:ext cx="1371600" cy="384048"/>
-          </a:xfrm>
-          <a:prstGeom prst="rect">
-            <a:avLst/>
-          </a:prstGeom>
-          <a:noFill/>
-          <a:ln/>
-        </p:spPr>
-        <p:txBody>
-          <a:bodyPr wrap="square" lIns="0" tIns="0" rIns="0" bIns="0" rtlCol="0" anchor="ctr"/>
-          <a:lstStyle/>
-          <a:p>
-            <a:pPr algn="r" indent="0" marL="0">
-              <a:buNone/>
-            </a:pPr>
-            <a:r>
-              <a:rPr lang="en-US" sz="1400" b="1" dirty="0">
-                <a:solidFill>
-                  <a:srgbClr val="A82B26"/>
-                </a:solidFill>
-                <a:latin typeface="Inter" pitchFamily="34" charset="0"/>
-                <a:ea typeface="Inter" pitchFamily="34" charset="-122"/>
-                <a:cs typeface="Inter" pitchFamily="34" charset="-120"/>
-              </a:rPr>
-              <a:t>−$516,788</a:t>
-            </a:r>
-            <a:endParaRPr lang="en-US" sz="1400" dirty="0"/>
-          </a:p>
-        </p:txBody>
-      </p:sp>
-      <p:sp>
-        <p:nvSpPr>
-          <p:cNvPr id="42" name="Text 40"/>
-          <p:cNvSpPr txBox="1"/>
-          <p:nvPr/>
-        </p:nvSpPr>
-        <p:spPr>
-          <a:xfrm>
-            <a:off x="6355080" y="4407408"/>
-            <a:ext cx="2148840" cy="384048"/>
-          </a:xfrm>
-          <a:prstGeom prst="rect">
-            <a:avLst/>
-          </a:prstGeom>
-          <a:noFill/>
-          <a:ln/>
-        </p:spPr>
-        <p:txBody>
-          <a:bodyPr wrap="square" lIns="0" tIns="0" rIns="0" bIns="0" rtlCol="0" anchor="ctr"/>
-          <a:lstStyle/>
-          <a:p>
-            <a:pPr indent="0" marL="0">
-              <a:buNone/>
-            </a:pPr>
-            <a:r>
-              <a:rPr lang="en-US" sz="1400" dirty="0">
-                <a:solidFill>
-                  <a:srgbClr val="1A1A1A"/>
-                </a:solidFill>
-                <a:latin typeface="Inter" pitchFamily="34" charset="0"/>
-                <a:ea typeface="Inter" pitchFamily="34" charset="-122"/>
-                <a:cs typeface="Inter" pitchFamily="34" charset="-120"/>
-              </a:rPr>
-              <a:t>AUDI RENO</a:t>
-            </a:r>
-            <a:endParaRPr lang="en-US" sz="1400" dirty="0"/>
-          </a:p>
-        </p:txBody>
-      </p:sp>
-      <p:sp>
-        <p:nvSpPr>
-          <p:cNvPr id="43" name="Shape 41"/>
-          <p:cNvSpPr/>
-          <p:nvPr/>
-        </p:nvSpPr>
-        <p:spPr>
-          <a:xfrm>
-            <a:off x="8166323" y="4507992"/>
-            <a:ext cx="429037" cy="182880"/>
-          </a:xfrm>
-          <a:prstGeom prst="rect">
-            <a:avLst/>
-          </a:prstGeom>
-          <a:solidFill>
-            <a:srgbClr val="C2352F"/>
-          </a:solidFill>
-          <a:ln/>
-        </p:spPr>
-      </p:sp>
-      <p:sp>
-        <p:nvSpPr>
-          <p:cNvPr id="44" name="Text 42"/>
-          <p:cNvSpPr txBox="1"/>
-          <p:nvPr/>
-        </p:nvSpPr>
-        <p:spPr>
-          <a:xfrm>
-            <a:off x="10149840" y="4407408"/>
-            <a:ext cx="1371600" cy="384048"/>
-          </a:xfrm>
-          <a:prstGeom prst="rect">
-            <a:avLst/>
-          </a:prstGeom>
-          <a:noFill/>
-          <a:ln/>
-        </p:spPr>
-        <p:txBody>
-          <a:bodyPr wrap="square" lIns="0" tIns="0" rIns="0" bIns="0" rtlCol="0" anchor="ctr"/>
-          <a:lstStyle/>
-          <a:p>
-            <a:pPr algn="r" indent="0" marL="0">
-              <a:buNone/>
-            </a:pPr>
-            <a:r>
-              <a:rPr lang="en-US" sz="1400" b="1" dirty="0">
-                <a:solidFill>
-                  <a:srgbClr val="A82B26"/>
-                </a:solidFill>
-                <a:latin typeface="Inter" pitchFamily="34" charset="0"/>
-                <a:ea typeface="Inter" pitchFamily="34" charset="-122"/>
-                <a:cs typeface="Inter" pitchFamily="34" charset="-120"/>
-              </a:rPr>
-              <a:t>−$519,845</a:t>
-            </a:r>
-            <a:endParaRPr lang="en-US" sz="1400" dirty="0"/>
-          </a:p>
-        </p:txBody>
-      </p:sp>
-      <p:sp>
-        <p:nvSpPr>
-          <p:cNvPr id="45" name="Text 43"/>
-          <p:cNvSpPr txBox="1"/>
-          <p:nvPr/>
-        </p:nvSpPr>
-        <p:spPr>
-          <a:xfrm>
-            <a:off x="6355080" y="4837176"/>
-            <a:ext cx="2148840" cy="384048"/>
-          </a:xfrm>
-          <a:prstGeom prst="rect">
-            <a:avLst/>
-          </a:prstGeom>
-          <a:noFill/>
-          <a:ln/>
-        </p:spPr>
-        <p:txBody>
-          <a:bodyPr wrap="square" lIns="0" tIns="0" rIns="0" bIns="0" rtlCol="0" anchor="ctr"/>
-          <a:lstStyle/>
-          <a:p>
-            <a:pPr indent="0" marL="0">
-              <a:buNone/>
-            </a:pPr>
-            <a:r>
-              <a:rPr lang="en-US" sz="1400" dirty="0">
-                <a:solidFill>
-                  <a:srgbClr val="1A1A1A"/>
-                </a:solidFill>
-                <a:latin typeface="Inter" pitchFamily="34" charset="0"/>
-                <a:ea typeface="Inter" pitchFamily="34" charset="-122"/>
-                <a:cs typeface="Inter" pitchFamily="34" charset="-120"/>
-              </a:rPr>
-              <a:t>VW HENDERSON</a:t>
-            </a:r>
-            <a:endParaRPr lang="en-US" sz="1400" dirty="0"/>
-          </a:p>
-        </p:txBody>
-      </p:sp>
-      <p:sp>
-        <p:nvSpPr>
-          <p:cNvPr id="46" name="Shape 44"/>
-          <p:cNvSpPr/>
-          <p:nvPr/>
-        </p:nvSpPr>
-        <p:spPr>
-          <a:xfrm>
-            <a:off x="7967135" y="4937760"/>
-            <a:ext cx="628225" cy="182880"/>
-          </a:xfrm>
-          <a:prstGeom prst="rect">
-            <a:avLst/>
-          </a:prstGeom>
-          <a:solidFill>
-            <a:srgbClr val="C2352F"/>
-          </a:solidFill>
-          <a:ln/>
-        </p:spPr>
-      </p:sp>
-      <p:sp>
-        <p:nvSpPr>
-          <p:cNvPr id="47" name="Text 45"/>
-          <p:cNvSpPr txBox="1"/>
-          <p:nvPr/>
-        </p:nvSpPr>
-        <p:spPr>
-          <a:xfrm>
-            <a:off x="10149840" y="4837176"/>
-            <a:ext cx="1371600" cy="384048"/>
-          </a:xfrm>
-          <a:prstGeom prst="rect">
-            <a:avLst/>
-          </a:prstGeom>
-          <a:noFill/>
-          <a:ln/>
-        </p:spPr>
-        <p:txBody>
-          <a:bodyPr wrap="square" lIns="0" tIns="0" rIns="0" bIns="0" rtlCol="0" anchor="ctr"/>
-          <a:lstStyle/>
-          <a:p>
-            <a:pPr algn="r" indent="0" marL="0">
-              <a:buNone/>
-            </a:pPr>
-            <a:r>
-              <a:rPr lang="en-US" sz="1400" b="1" dirty="0">
-                <a:solidFill>
-                  <a:srgbClr val="A82B26"/>
-                </a:solidFill>
-                <a:latin typeface="Inter" pitchFamily="34" charset="0"/>
-                <a:ea typeface="Inter" pitchFamily="34" charset="-122"/>
-                <a:cs typeface="Inter" pitchFamily="34" charset="-120"/>
-              </a:rPr>
-              <a:t>−$761,192</a:t>
-            </a:r>
-            <a:endParaRPr lang="en-US" sz="1400" dirty="0"/>
-          </a:p>
-        </p:txBody>
-      </p:sp>
-      <p:sp>
-        <p:nvSpPr>
-          <p:cNvPr id="48" name="Text 46"/>
-          <p:cNvSpPr txBox="1"/>
-          <p:nvPr/>
-        </p:nvSpPr>
-        <p:spPr>
-          <a:xfrm>
-            <a:off x="6355080" y="5266944"/>
-            <a:ext cx="2148840" cy="384048"/>
-          </a:xfrm>
-          <a:prstGeom prst="rect">
-            <a:avLst/>
-          </a:prstGeom>
-          <a:noFill/>
-          <a:ln/>
-        </p:spPr>
-        <p:txBody>
-          <a:bodyPr wrap="square" lIns="0" tIns="0" rIns="0" bIns="0" rtlCol="0" anchor="ctr"/>
-          <a:lstStyle/>
-          <a:p>
-            <a:pPr indent="0" marL="0">
-              <a:buNone/>
-            </a:pPr>
-            <a:r>
-              <a:rPr lang="en-US" sz="1400" dirty="0">
-                <a:solidFill>
-                  <a:srgbClr val="1A1A1A"/>
-                </a:solidFill>
-                <a:latin typeface="Inter" pitchFamily="34" charset="0"/>
-                <a:ea typeface="Inter" pitchFamily="34" charset="-122"/>
-                <a:cs typeface="Inter" pitchFamily="34" charset="-120"/>
-              </a:rPr>
-              <a:t>HONDA NORTH</a:t>
-            </a:r>
-            <a:endParaRPr lang="en-US" sz="1400" dirty="0"/>
-          </a:p>
-        </p:txBody>
-      </p:sp>
-      <p:sp>
-        <p:nvSpPr>
-          <p:cNvPr id="49" name="Shape 47"/>
-          <p:cNvSpPr/>
-          <p:nvPr/>
-        </p:nvSpPr>
-        <p:spPr>
-          <a:xfrm>
-            <a:off x="7902183" y="5367528"/>
-            <a:ext cx="693177" cy="182880"/>
-          </a:xfrm>
-          <a:prstGeom prst="rect">
-            <a:avLst/>
-          </a:prstGeom>
-          <a:solidFill>
-            <a:srgbClr val="C2352F"/>
-          </a:solidFill>
-          <a:ln/>
-        </p:spPr>
-      </p:sp>
-      <p:sp>
-        <p:nvSpPr>
-          <p:cNvPr id="50" name="Text 48"/>
-          <p:cNvSpPr txBox="1"/>
-          <p:nvPr/>
-        </p:nvSpPr>
-        <p:spPr>
-          <a:xfrm>
-            <a:off x="10149840" y="5266944"/>
-            <a:ext cx="1371600" cy="384048"/>
-          </a:xfrm>
-          <a:prstGeom prst="rect">
-            <a:avLst/>
-          </a:prstGeom>
-          <a:noFill/>
-          <a:ln/>
-        </p:spPr>
-        <p:txBody>
-          <a:bodyPr wrap="square" lIns="0" tIns="0" rIns="0" bIns="0" rtlCol="0" anchor="ctr"/>
-          <a:lstStyle/>
-          <a:p>
-            <a:pPr algn="r" indent="0" marL="0">
-              <a:buNone/>
-            </a:pPr>
-            <a:r>
-              <a:rPr lang="en-US" sz="1400" b="1" dirty="0">
-                <a:solidFill>
-                  <a:srgbClr val="A82B26"/>
-                </a:solidFill>
-                <a:latin typeface="Inter" pitchFamily="34" charset="0"/>
-                <a:ea typeface="Inter" pitchFamily="34" charset="-122"/>
-                <a:cs typeface="Inter" pitchFamily="34" charset="-120"/>
-              </a:rPr>
-              <a:t>−$839,891</a:t>
-            </a:r>
-            <a:endParaRPr lang="en-US" sz="1400" dirty="0"/>
-          </a:p>
-        </p:txBody>
-      </p:sp>
-      <p:sp>
-        <p:nvSpPr>
-          <p:cNvPr id="51" name="Shape 49"/>
-          <p:cNvSpPr/>
-          <p:nvPr/>
-        </p:nvSpPr>
-        <p:spPr>
-          <a:xfrm>
-            <a:off x="8589874" y="1828800"/>
-            <a:ext cx="10973" cy="3813048"/>
-          </a:xfrm>
-          <a:prstGeom prst="rect">
-            <a:avLst/>
-          </a:prstGeom>
-          <a:solidFill>
-            <a:srgbClr val="9AA3AD"/>
-          </a:solidFill>
-          <a:ln/>
-        </p:spPr>
-      </p:sp>
-      <p:sp>
-        <p:nvSpPr>
-          <p:cNvPr id="52" name="Shape 50"/>
-          <p:cNvSpPr/>
-          <p:nvPr/>
-        </p:nvSpPr>
-        <p:spPr>
-          <a:xfrm>
-            <a:off x="457200" y="6126480"/>
-            <a:ext cx="11274552" cy="371856"/>
-          </a:xfrm>
-          <a:prstGeom prst="rect">
-            <a:avLst/>
-          </a:prstGeom>
-          <a:solidFill>
-            <a:srgbClr val="E6F6EE"/>
-          </a:solidFill>
-          <a:ln/>
-        </p:spPr>
-      </p:sp>
-      <p:sp>
-        <p:nvSpPr>
-          <p:cNvPr id="53" name="Text 51"/>
-          <p:cNvSpPr txBox="1"/>
-          <p:nvPr/>
-        </p:nvSpPr>
-        <p:spPr>
-          <a:xfrm>
-            <a:off x="658368" y="6144768"/>
-            <a:ext cx="10927080" cy="335280"/>
-          </a:xfrm>
-          <a:prstGeom prst="rect">
-            <a:avLst/>
-          </a:prstGeom>
-          <a:noFill/>
-          <a:ln/>
-        </p:spPr>
-        <p:txBody>
-          <a:bodyPr wrap="square" lIns="0" tIns="0" rIns="0" bIns="0" rtlCol="0" anchor="ctr"/>
-          <a:lstStyle/>
-          <a:p>
-            <a:pPr indent="0" marL="0">
-              <a:buNone/>
-            </a:pPr>
-            <a:r>
-              <a:rPr lang="en-US" sz="1600" b="1" dirty="0">
-                <a:solidFill>
-                  <a:srgbClr val="0B7A4A"/>
-                </a:solidFill>
-                <a:latin typeface="Inter" pitchFamily="34" charset="0"/>
-                <a:ea typeface="Inter" pitchFamily="34" charset="-122"/>
-                <a:cs typeface="Inter" pitchFamily="34" charset="-120"/>
-              </a:rPr>
-              <a:t>Five stores added +$5,890,534; the bottom four gave back $2,637,716.</a:t>
+              <a:t>Ask Hyundai Prescott, Lincoln and Lexus what changed. Ask Acura, VW St George and VW Henderson what got in the way.</a:t>
             </a:r>
             <a:endParaRPr lang="en-US" sz="1600" dirty="0"/>
           </a:p>

--- a/day2-deck/decks/Fixed Ops Gross - House Style.pptx
+++ b/day2-deck/decks/Fixed Ops Gross - House Style.pptx
@@ -368,6 +368,17 @@
         </c:scaling>
         <c:delete val="0"/>
         <c:axPos val="l"/>
+        <c:majorGridlines>
+          <c:spPr>
+            <a:ln w="9525" cap="flat">
+              <a:solidFill>
+                <a:srgbClr val="D9D9D9"/>
+              </a:solidFill>
+              <a:prstDash val="solid"/>
+              <a:round/>
+            </a:ln>
+          </c:spPr>
+        </c:majorGridlines>
         <c:numFmt formatCode="$0&quot;M&quot;" sourceLinked="0"/>
         <c:majorTickMark val="out"/>
         <c:minorTickMark val="none"/>
@@ -424,6 +435,316 @@
 </file>
 
 <file path=ppt/charts/chart10.xml><?xml version="1.0" encoding="utf-8"?>
+<c:chartSpace xmlns:c="http://schemas.openxmlformats.org/drawingml/2006/chart" xmlns:a="http://schemas.openxmlformats.org/drawingml/2006/main" xmlns:r="http://schemas.openxmlformats.org/officeDocument/2006/relationships">
+  <c:date1904 val="0"/>
+  <c:roundedCorners val="1"/>
+  <c:chart>
+    <c:autoTitleDeleted val="1"/>
+    <c:plotArea>
+      <c:layout/>
+      <c:lineChart>
+        <c:varyColors val="0"/>
+        <c:ser>
+          <c:idx val="0"/>
+          <c:order val="0"/>
+          <c:tx>
+            <c:strRef>
+              <c:f>Sheet1!$B$1</c:f>
+              <c:strCache>
+                <c:ptCount val="1"/>
+                <c:pt idx="0">
+                  <c:v>2025</c:v>
+                </c:pt>
+              </c:strCache>
+            </c:strRef>
+          </c:tx>
+          <c:spPr>
+            <a:solidFill>
+              <a:srgbClr val="9AA3AD"/>
+            </a:solidFill>
+            <a:ln>
+              <a:noFill/>
+            </a:ln>
+            <a:effectLst/>
+          </c:spPr>
+          <c:invertIfNegative val="0"/>
+          <c:dLbls>
+            <c:numFmt formatCode="0.0" sourceLinked="0"/>
+            <c:txPr>
+              <a:bodyPr/>
+              <a:lstStyle/>
+              <a:p>
+                <a:pPr>
+                  <a:defRPr b="0" i="0" strike="noStrike" sz="1400" u="none">
+                    <a:solidFill>
+                      <a:srgbClr val="1A1A1A"/>
+                    </a:solidFill>
+                    <a:latin typeface="+mn-lt"/>
+                  </a:defRPr>
+                </a:pPr>
+              </a:p>
+            </c:txPr>
+            <c:dLblPos val="b"/>
+            <c:showLegendKey val="0"/>
+            <c:showVal val="1"/>
+            <c:showCatName val="0"/>
+            <c:showSerName val="0"/>
+            <c:showPercent val="0"/>
+            <c:showBubbleSize val="0"/>
+            <c:showLeaderLines val="0"/>
+          </c:dLbls>
+          <c:marker>
+            <c:symbol val="none"/>
+            <c:size val="8"/>
+            <c:spPr>
+              <a:solidFill>
+                <a:srgbClr val="9AA3AD"/>
+              </a:solidFill>
+              <a:ln w="9525" cap="flat">
+                <a:solidFill>
+                  <a:srgbClr val="9AA3AD"/>
+                </a:solidFill>
+                <a:prstDash val="solid"/>
+                <a:round/>
+              </a:ln>
+              <a:effectLst/>
+            </c:spPr>
+          </c:marker>
+          <c:cat>
+            <c:multiLvlStrRef>
+              <c:f>Sheet1!$A$2:$A$13</c:f>
+              <c:multiLvlStrCache>
+                <c:ptCount val="12"/>
+                <c:lvl>
+                  <c:pt idx="0">
+                    <c:v>Jan</c:v>
+                  </c:pt>
+                  <c:pt idx="1">
+                    <c:v>Feb</c:v>
+                  </c:pt>
+                  <c:pt idx="2">
+                    <c:v>Mar</c:v>
+                  </c:pt>
+                  <c:pt idx="3">
+                    <c:v>Apr</c:v>
+                  </c:pt>
+                  <c:pt idx="4">
+                    <c:v>May</c:v>
+                  </c:pt>
+                  <c:pt idx="5">
+                    <c:v>Jun</c:v>
+                  </c:pt>
+                  <c:pt idx="6">
+                    <c:v>Jul</c:v>
+                  </c:pt>
+                  <c:pt idx="7">
+                    <c:v>Aug</c:v>
+                  </c:pt>
+                  <c:pt idx="8">
+                    <c:v>Sep</c:v>
+                  </c:pt>
+                  <c:pt idx="9">
+                    <c:v>Oct</c:v>
+                  </c:pt>
+                  <c:pt idx="10">
+                    <c:v>Nov</c:v>
+                  </c:pt>
+                  <c:pt idx="11">
+                    <c:v>Dec</c:v>
+                  </c:pt>
+                </c:lvl>
+              </c:multiLvlStrCache>
+            </c:multiLvlStrRef>
+          </c:cat>
+          <c:val>
+            <c:numRef>
+              <c:f>Sheet1!$B$2:$B$13</c:f>
+              <c:numCache>
+                <c:formatCode>General</c:formatCode>
+                <c:ptCount val="12"/>
+                <c:pt idx="0">
+                  <c:v>13.41</c:v>
+                </c:pt>
+                <c:pt idx="1">
+                  <c:v>12.64</c:v>
+                </c:pt>
+                <c:pt idx="2">
+                  <c:v>13.59</c:v>
+                </c:pt>
+                <c:pt idx="3">
+                  <c:v>14.01</c:v>
+                </c:pt>
+                <c:pt idx="4">
+                  <c:v>13.61</c:v>
+                </c:pt>
+                <c:pt idx="5">
+                  <c:v>13.53</c:v>
+                </c:pt>
+                <c:pt idx="6">
+                  <c:v>13.78</c:v>
+                </c:pt>
+                <c:pt idx="7">
+                  <c:v>13.51</c:v>
+                </c:pt>
+                <c:pt idx="8">
+                  <c:v>12.5</c:v>
+                </c:pt>
+                <c:pt idx="9">
+                  <c:v/>
+                </c:pt>
+                <c:pt idx="10">
+                  <c:v>11.84</c:v>
+                </c:pt>
+                <c:pt idx="11">
+                  <c:v/>
+                </c:pt>
+              </c:numCache>
+            </c:numRef>
+          </c:val>
+          <c:smooth val="0"/>
+        </c:ser>
+        <c:dLbls>
+          <c:numFmt formatCode="0.0" sourceLinked="0"/>
+          <c:txPr>
+            <a:bodyPr/>
+            <a:lstStyle/>
+            <a:p>
+              <a:pPr>
+                <a:defRPr b="0" i="0" strike="noStrike" sz="1400" u="none">
+                  <a:solidFill>
+                    <a:srgbClr val="1A1A1A"/>
+                  </a:solidFill>
+                  <a:latin typeface="+mn-lt"/>
+                </a:defRPr>
+              </a:pPr>
+            </a:p>
+          </c:txPr>
+          <c:dLblPos val="b"/>
+          <c:showLegendKey val="0"/>
+          <c:showVal val="1"/>
+          <c:showCatName val="0"/>
+          <c:showSerName val="0"/>
+          <c:showPercent val="0"/>
+          <c:showBubbleSize val="0"/>
+          <c:showLeaderLines val="0"/>
+        </c:dLbls>
+        <c:marker val="1"/>
+        <c:axId val="2094734554"/>
+        <c:axId val="2094734552"/>
+        <c:axId val="2094734556"/>
+      </c:lineChart>
+      <c:catAx>
+        <c:axId val="2094734554"/>
+        <c:scaling>
+          <c:orientation val="minMax"/>
+        </c:scaling>
+        <c:delete val="0"/>
+        <c:axPos val="b"/>
+        <c:numFmt formatCode="General" sourceLinked="1"/>
+        <c:majorTickMark val="out"/>
+        <c:minorTickMark val="none"/>
+        <c:tickLblPos val="low"/>
+        <c:spPr>
+          <a:ln w="12700" cap="flat">
+            <a:noFill/>
+            <a:prstDash val="solid"/>
+            <a:round/>
+          </a:ln>
+        </c:spPr>
+        <c:txPr>
+          <a:bodyPr/>
+          <a:lstStyle/>
+          <a:p>
+            <a:pPr>
+              <a:defRPr sz="1400" b="0" i="0" u="none" strike="noStrike">
+                <a:solidFill>
+                  <a:srgbClr val="FFFFFF"/>
+                </a:solidFill>
+                <a:latin typeface="+mn-lt"/>
+              </a:defRPr>
+            </a:pPr>
+            <a:endParaRPr lang="en-US"/>
+          </a:p>
+        </c:txPr>
+        <c:crossAx val="2094734552"/>
+        <c:crosses val="min"/>
+        <c:auto val="1"/>
+        <c:lblAlgn val="ctr"/>
+        <c:noMultiLvlLbl val="1"/>
+      </c:catAx>
+      <c:valAx>
+        <c:axId val="2094734552"/>
+        <c:scaling>
+          <c:orientation val="minMax"/>
+          <c:max val="18"/>
+          <c:min val="10"/>
+        </c:scaling>
+        <c:delete val="0"/>
+        <c:axPos val="l"/>
+        <c:numFmt formatCode="$0&quot;M&quot;" sourceLinked="0"/>
+        <c:majorTickMark val="out"/>
+        <c:minorTickMark val="none"/>
+        <c:tickLblPos val="nextTo"/>
+        <c:spPr>
+          <a:ln w="12700" cap="flat">
+            <a:noFill/>
+            <a:prstDash val="solid"/>
+            <a:round/>
+          </a:ln>
+        </c:spPr>
+        <c:txPr>
+          <a:bodyPr/>
+          <a:lstStyle/>
+          <a:p>
+            <a:pPr>
+              <a:defRPr sz="1400" b="0" i="0" u="none" strike="noStrike">
+                <a:solidFill>
+                  <a:srgbClr val="FFFFFF"/>
+                </a:solidFill>
+                <a:latin typeface="+mn-lt"/>
+              </a:defRPr>
+            </a:pPr>
+            <a:endParaRPr lang="en-US"/>
+          </a:p>
+        </c:txPr>
+        <c:crossAx val="2094734554"/>
+        <c:crosses val="autoZero"/>
+        <c:crossBetween val="between"/>
+        <c:majorUnit val="2"/>
+      </c:valAx>
+      <c:spPr>
+        <a:solidFill>
+          <a:srgbClr val="FFFFFF">
+            <a:alpha val="0"/>
+          </a:srgbClr>
+        </a:solidFill>
+        <a:ln>
+          <a:noFill/>
+        </a:ln>
+        <a:effectLst/>
+      </c:spPr>
+    </c:plotArea>
+    <c:plotVisOnly val="1"/>
+    <c:dispBlanksAs val="span"/>
+  </c:chart>
+  <c:spPr>
+    <a:solidFill>
+      <a:srgbClr val="FFFFFF">
+        <a:alpha val="0"/>
+      </a:srgbClr>
+    </a:solidFill>
+    <a:ln>
+      <a:noFill/>
+    </a:ln>
+    <a:effectLst/>
+  </c:spPr>
+  <c:externalData r:id="rId1">
+    <c:autoUpdate val="0"/>
+  </c:externalData>
+</c:chartSpace>
+</file>
+
+<file path=ppt/charts/chart11.xml><?xml version="1.0" encoding="utf-8"?>
 <c:chartSpace xmlns:c="http://schemas.openxmlformats.org/drawingml/2006/chart" xmlns:a="http://schemas.openxmlformats.org/drawingml/2006/main" xmlns:r="http://schemas.openxmlformats.org/officeDocument/2006/relationships">
   <c:date1904 val="0"/>
   <c:roundedCorners val="1"/>
@@ -674,17 +995,6 @@
         </c:scaling>
         <c:delete val="0"/>
         <c:axPos val="l"/>
-        <c:majorGridlines>
-          <c:spPr>
-            <a:ln w="9525" cap="flat">
-              <a:solidFill>
-                <a:srgbClr val="D9D9D9"/>
-              </a:solidFill>
-              <a:prstDash val="solid"/>
-              <a:round/>
-            </a:ln>
-          </c:spPr>
-        </c:majorGridlines>
         <c:numFmt formatCode="$0&quot;M&quot;" sourceLinked="0"/>
         <c:majorTickMark val="out"/>
         <c:minorTickMark val="none"/>
@@ -748,7 +1058,7 @@
 </c:chartSpace>
 </file>
 
-<file path=ppt/charts/chart11.xml><?xml version="1.0" encoding="utf-8"?>
+<file path=ppt/charts/chart12.xml><?xml version="1.0" encoding="utf-8"?>
 <c:chartSpace xmlns:c="http://schemas.openxmlformats.org/drawingml/2006/chart" xmlns:a="http://schemas.openxmlformats.org/drawingml/2006/main" xmlns:r="http://schemas.openxmlformats.org/officeDocument/2006/relationships">
   <c:date1904 val="0"/>
   <c:roundedCorners val="1"/>
@@ -997,6 +1307,17 @@
         </c:scaling>
         <c:delete val="0"/>
         <c:axPos val="l"/>
+        <c:majorGridlines>
+          <c:spPr>
+            <a:ln w="9525" cap="flat">
+              <a:solidFill>
+                <a:srgbClr val="D9D9D9"/>
+              </a:solidFill>
+              <a:prstDash val="solid"/>
+              <a:round/>
+            </a:ln>
+          </c:spPr>
+        </c:majorGridlines>
         <c:numFmt formatCode="$0&quot;M&quot;" sourceLinked="0"/>
         <c:majorTickMark val="out"/>
         <c:minorTickMark val="none"/>
@@ -1052,7 +1373,7 @@
 </c:chartSpace>
 </file>
 
-<file path=ppt/charts/chart12.xml><?xml version="1.0" encoding="utf-8"?>
+<file path=ppt/charts/chart13.xml><?xml version="1.0" encoding="utf-8"?>
 <c:chartSpace xmlns:c="http://schemas.openxmlformats.org/drawingml/2006/chart" xmlns:a="http://schemas.openxmlformats.org/drawingml/2006/main" xmlns:r="http://schemas.openxmlformats.org/officeDocument/2006/relationships">
   <c:date1904 val="0"/>
   <c:roundedCorners val="1"/>
@@ -1362,7 +1683,7 @@
 </c:chartSpace>
 </file>
 
-<file path=ppt/charts/chart13.xml><?xml version="1.0" encoding="utf-8"?>
+<file path=ppt/charts/chart14.xml><?xml version="1.0" encoding="utf-8"?>
 <c:chartSpace xmlns:c="http://schemas.openxmlformats.org/drawingml/2006/chart" xmlns:a="http://schemas.openxmlformats.org/drawingml/2006/main" xmlns:r="http://schemas.openxmlformats.org/officeDocument/2006/relationships">
   <c:date1904 val="0"/>
   <c:roundedCorners val="1"/>
@@ -1672,7 +1993,7 @@
 </c:chartSpace>
 </file>
 
-<file path=ppt/charts/chart14.xml><?xml version="1.0" encoding="utf-8"?>
+<file path=ppt/charts/chart15.xml><?xml version="1.0" encoding="utf-8"?>
 <c:chartSpace xmlns:c="http://schemas.openxmlformats.org/drawingml/2006/chart" xmlns:a="http://schemas.openxmlformats.org/drawingml/2006/main" xmlns:r="http://schemas.openxmlformats.org/officeDocument/2006/relationships">
   <c:date1904 val="0"/>
   <c:roundedCorners val="1"/>
@@ -1828,13 +2149,13 @@
                   <c:v/>
                 </c:pt>
                 <c:pt idx="9">
-                  <c:v/>
+                  <c:v>7.53</c:v>
                 </c:pt>
                 <c:pt idx="10">
                   <c:v/>
                 </c:pt>
                 <c:pt idx="11">
-                  <c:v/>
+                  <c:v>6.4</c:v>
                 </c:pt>
               </c:numCache>
             </c:numRef>
@@ -1982,7 +2303,7 @@
 </c:chartSpace>
 </file>
 
-<file path=ppt/charts/chart15.xml><?xml version="1.0" encoding="utf-8"?>
+<file path=ppt/charts/chart16.xml><?xml version="1.0" encoding="utf-8"?>
 <c:chartSpace xmlns:c="http://schemas.openxmlformats.org/drawingml/2006/chart" xmlns:a="http://schemas.openxmlformats.org/drawingml/2006/main" xmlns:r="http://schemas.openxmlformats.org/officeDocument/2006/relationships">
   <c:date1904 val="0"/>
   <c:roundedCorners val="1"/>
@@ -2138,13 +2459,13 @@
                   <c:v>6.54</c:v>
                 </c:pt>
                 <c:pt idx="9">
-                  <c:v>7.53</c:v>
+                  <c:v/>
                 </c:pt>
                 <c:pt idx="10">
                   <c:v>5.91</c:v>
                 </c:pt>
                 <c:pt idx="11">
-                  <c:v>6.4</c:v>
+                  <c:v/>
                 </c:pt>
               </c:numCache>
             </c:numRef>
@@ -2292,7 +2613,7 @@
 </c:chartSpace>
 </file>
 
-<file path=ppt/charts/chart16.xml><?xml version="1.0" encoding="utf-8"?>
+<file path=ppt/charts/chart17.xml><?xml version="1.0" encoding="utf-8"?>
 <c:chartSpace xmlns:c="http://schemas.openxmlformats.org/drawingml/2006/chart" xmlns:a="http://schemas.openxmlformats.org/drawingml/2006/main" xmlns:r="http://schemas.openxmlformats.org/officeDocument/2006/relationships">
   <c:date1904 val="0"/>
   <c:roundedCorners val="1"/>
@@ -2543,17 +2864,6 @@
         </c:scaling>
         <c:delete val="0"/>
         <c:axPos val="l"/>
-        <c:majorGridlines>
-          <c:spPr>
-            <a:ln w="9525" cap="flat">
-              <a:solidFill>
-                <a:srgbClr val="D9D9D9"/>
-              </a:solidFill>
-              <a:prstDash val="solid"/>
-              <a:round/>
-            </a:ln>
-          </c:spPr>
-        </c:majorGridlines>
         <c:numFmt formatCode="$0&quot;M&quot;" sourceLinked="0"/>
         <c:majorTickMark val="out"/>
         <c:minorTickMark val="none"/>
@@ -3393,13 +3703,13 @@
                   <c:v/>
                 </c:pt>
                 <c:pt idx="9">
-                  <c:v/>
+                  <c:v>21.27</c:v>
                 </c:pt>
                 <c:pt idx="10">
                   <c:v/>
                 </c:pt>
                 <c:pt idx="11">
-                  <c:v/>
+                  <c:v>19.32</c:v>
                 </c:pt>
               </c:numCache>
             </c:numRef>
@@ -3703,13 +4013,13 @@
                   <c:v>19.03</c:v>
                 </c:pt>
                 <c:pt idx="9">
-                  <c:v>21.27</c:v>
+                  <c:v/>
                 </c:pt>
                 <c:pt idx="10">
                   <c:v>17.74</c:v>
                 </c:pt>
                 <c:pt idx="11">
-                  <c:v>19.32</c:v>
+                  <c:v/>
                 </c:pt>
               </c:numCache>
             </c:numRef>
@@ -4108,17 +4418,6 @@
         </c:scaling>
         <c:delete val="0"/>
         <c:axPos val="l"/>
-        <c:majorGridlines>
-          <c:spPr>
-            <a:ln w="9525" cap="flat">
-              <a:solidFill>
-                <a:srgbClr val="D9D9D9"/>
-              </a:solidFill>
-              <a:prstDash val="solid"/>
-              <a:round/>
-            </a:ln>
-          </c:spPr>
-        </c:majorGridlines>
         <c:numFmt formatCode="$0&quot;M&quot;" sourceLinked="0"/>
         <c:majorTickMark val="out"/>
         <c:minorTickMark val="none"/>
@@ -4431,6 +4730,17 @@
         </c:scaling>
         <c:delete val="0"/>
         <c:axPos val="l"/>
+        <c:majorGridlines>
+          <c:spPr>
+            <a:ln w="9525" cap="flat">
+              <a:solidFill>
+                <a:srgbClr val="D9D9D9"/>
+              </a:solidFill>
+              <a:prstDash val="solid"/>
+              <a:round/>
+            </a:ln>
+          </c:spPr>
+        </c:majorGridlines>
         <c:numFmt formatCode="$0&quot;M&quot;" sourceLinked="0"/>
         <c:majorTickMark val="out"/>
         <c:minorTickMark val="none"/>
@@ -4846,7 +5156,7 @@
                 </a:pPr>
               </a:p>
             </c:txPr>
-            <c:dLblPos val="b"/>
+            <c:dLblPos val="t"/>
             <c:showLegendKey val="0"/>
             <c:showVal val="1"/>
             <c:showCatName val="0"/>
@@ -4925,37 +5235,37 @@
                 <c:formatCode>General</c:formatCode>
                 <c:ptCount val="12"/>
                 <c:pt idx="0">
-                  <c:v>13.41</c:v>
+                  <c:v/>
                 </c:pt>
                 <c:pt idx="1">
-                  <c:v>12.64</c:v>
+                  <c:v/>
                 </c:pt>
                 <c:pt idx="2">
-                  <c:v>13.59</c:v>
+                  <c:v/>
                 </c:pt>
                 <c:pt idx="3">
-                  <c:v>14.01</c:v>
+                  <c:v/>
                 </c:pt>
                 <c:pt idx="4">
-                  <c:v>13.61</c:v>
+                  <c:v/>
                 </c:pt>
                 <c:pt idx="5">
-                  <c:v>13.53</c:v>
+                  <c:v/>
                 </c:pt>
                 <c:pt idx="6">
-                  <c:v>13.78</c:v>
+                  <c:v/>
                 </c:pt>
                 <c:pt idx="7">
-                  <c:v>13.51</c:v>
+                  <c:v/>
                 </c:pt>
                 <c:pt idx="8">
-                  <c:v>12.5</c:v>
+                  <c:v/>
                 </c:pt>
                 <c:pt idx="9">
                   <c:v>13.74</c:v>
                 </c:pt>
                 <c:pt idx="10">
-                  <c:v>11.84</c:v>
+                  <c:v/>
                 </c:pt>
                 <c:pt idx="11">
                   <c:v>12.92</c:v>
@@ -4981,7 +5291,7 @@
               </a:pPr>
             </a:p>
           </c:txPr>
-          <c:dLblPos val="b"/>
+          <c:dLblPos val="t"/>
           <c:showLegendKey val="0"/>
           <c:showVal val="1"/>
           <c:showCatName val="0"/>
@@ -38030,9 +38340,25 @@
           </a:graphicData>
         </a:graphic>
       </p:graphicFrame>
-      <p:sp>
-        <p:nvSpPr>
-          <p:cNvPr id="21" name="Shape 15"/>
+      <p:graphicFrame>
+        <p:nvGraphicFramePr>
+          <p:cNvPr id="21" name="Chart 4" descr=""/>
+          <p:cNvGraphicFramePr/>
+          <p:nvPr/>
+        </p:nvGraphicFramePr>
+        <p:xfrm>
+          <a:off x="621792" y="3218688"/>
+          <a:ext cx="10945368" cy="2679192"/>
+        </p:xfrm>
+        <a:graphic xmlns:a="http://schemas.openxmlformats.org/drawingml/2006/main">
+          <a:graphicData uri="http://schemas.openxmlformats.org/drawingml/2006/chart">
+            <c:chart xmlns:c="http://schemas.openxmlformats.org/drawingml/2006/chart" r:id="rId5"/>
+          </a:graphicData>
+        </a:graphic>
+      </p:graphicFrame>
+      <p:sp>
+        <p:nvSpPr>
+          <p:cNvPr id="22" name="Shape 15"/>
           <p:cNvSpPr/>
           <p:nvPr/>
         </p:nvSpPr>
@@ -38052,7 +38378,7 @@
       </p:sp>
       <p:sp>
         <p:nvSpPr>
-          <p:cNvPr id="22" name="Shape 16"/>
+          <p:cNvPr id="23" name="Shape 16"/>
           <p:cNvSpPr/>
           <p:nvPr/>
         </p:nvSpPr>
@@ -38072,7 +38398,7 @@
       </p:sp>
       <p:sp>
         <p:nvSpPr>
-          <p:cNvPr id="23" name="Text 17"/>
+          <p:cNvPr id="24" name="Text 17"/>
           <p:cNvSpPr txBox="1"/>
           <p:nvPr/>
         </p:nvSpPr>
@@ -38111,7 +38437,7 @@
       </p:sp>
       <p:sp>
         <p:nvSpPr>
-          <p:cNvPr id="24" name="Shape 18"/>
+          <p:cNvPr id="25" name="Shape 18"/>
           <p:cNvSpPr/>
           <p:nvPr/>
         </p:nvSpPr>
@@ -38131,7 +38457,7 @@
       </p:sp>
       <p:sp>
         <p:nvSpPr>
-          <p:cNvPr id="25" name="Shape 19"/>
+          <p:cNvPr id="26" name="Shape 19"/>
           <p:cNvSpPr/>
           <p:nvPr/>
         </p:nvSpPr>
@@ -38151,7 +38477,7 @@
       </p:sp>
       <p:sp>
         <p:nvSpPr>
-          <p:cNvPr id="26" name="Text 20"/>
+          <p:cNvPr id="27" name="Text 20"/>
           <p:cNvSpPr txBox="1"/>
           <p:nvPr/>
         </p:nvSpPr>
@@ -38190,7 +38516,7 @@
       </p:sp>
       <p:sp>
         <p:nvSpPr>
-          <p:cNvPr id="27" name="Shape 21"/>
+          <p:cNvPr id="28" name="Shape 21"/>
           <p:cNvSpPr/>
           <p:nvPr/>
         </p:nvSpPr>
@@ -38210,7 +38536,7 @@
       </p:sp>
       <p:sp>
         <p:nvSpPr>
-          <p:cNvPr id="28" name="Text 22"/>
+          <p:cNvPr id="29" name="Text 22"/>
           <p:cNvSpPr txBox="1"/>
           <p:nvPr/>
         </p:nvSpPr>

--- a/day2-deck/decks/Fixed Ops Gross - House Style.pptx
+++ b/day2-deck/decks/Fixed Ops Gross - House Style.pptx
@@ -13765,8 +13765,8 @@
         </p:nvSpPr>
         <p:spPr>
           <a:xfrm>
-            <a:off x="5020056" y="2201284"/>
-            <a:ext cx="182880" cy="64008"/>
+            <a:off x="5907024" y="2167128"/>
+            <a:ext cx="54864" cy="132319"/>
           </a:xfrm>
           <a:prstGeom prst="rect">
             <a:avLst/>
@@ -14489,8 +14489,8 @@
         </p:nvSpPr>
         <p:spPr>
           <a:xfrm>
-            <a:off x="5020056" y="3096320"/>
-            <a:ext cx="182880" cy="64008"/>
+            <a:off x="5907024" y="3062164"/>
+            <a:ext cx="54864" cy="132319"/>
           </a:xfrm>
           <a:prstGeom prst="rect">
             <a:avLst/>
@@ -14685,8 +14685,8 @@
         </p:nvSpPr>
         <p:spPr>
           <a:xfrm>
-            <a:off x="5020056" y="3320079"/>
-            <a:ext cx="182880" cy="64008"/>
+            <a:off x="5907024" y="3285923"/>
+            <a:ext cx="54864" cy="132319"/>
           </a:xfrm>
           <a:prstGeom prst="rect">
             <a:avLst/>
@@ -18929,8 +18929,8 @@
         </p:nvSpPr>
         <p:spPr>
           <a:xfrm>
-            <a:off x="10570464" y="4886392"/>
-            <a:ext cx="182880" cy="64008"/>
+            <a:off x="11457432" y="4852237"/>
+            <a:ext cx="54864" cy="132319"/>
           </a:xfrm>
           <a:prstGeom prst="rect">
             <a:avLst/>
@@ -19125,8 +19125,8 @@
         </p:nvSpPr>
         <p:spPr>
           <a:xfrm>
-            <a:off x="10570464" y="5110151"/>
-            <a:ext cx="182880" cy="64008"/>
+            <a:off x="11457432" y="5075996"/>
+            <a:ext cx="54864" cy="132319"/>
           </a:xfrm>
           <a:prstGeom prst="rect">
             <a:avLst/>
@@ -19497,8 +19497,8 @@
         </p:nvSpPr>
         <p:spPr>
           <a:xfrm>
-            <a:off x="10570464" y="5557669"/>
-            <a:ext cx="182880" cy="64008"/>
+            <a:off x="11457432" y="5523514"/>
+            <a:ext cx="54864" cy="132319"/>
           </a:xfrm>
           <a:prstGeom prst="rect">
             <a:avLst/>
@@ -29602,8 +29602,8 @@
         </p:nvSpPr>
         <p:spPr>
           <a:xfrm>
-            <a:off x="5020056" y="2872561"/>
-            <a:ext cx="182880" cy="64008"/>
+            <a:off x="5907024" y="2838405"/>
+            <a:ext cx="54864" cy="132319"/>
           </a:xfrm>
           <a:prstGeom prst="rect">
             <a:avLst/>
@@ -29798,8 +29798,8 @@
         </p:nvSpPr>
         <p:spPr>
           <a:xfrm>
-            <a:off x="5020056" y="3096320"/>
-            <a:ext cx="182880" cy="64008"/>
+            <a:off x="5907024" y="3062164"/>
+            <a:ext cx="54864" cy="132319"/>
           </a:xfrm>
           <a:prstGeom prst="rect">
             <a:avLst/>
@@ -31050,8 +31050,8 @@
         </p:nvSpPr>
         <p:spPr>
           <a:xfrm>
-            <a:off x="5020056" y="4662633"/>
-            <a:ext cx="182880" cy="64008"/>
+            <a:off x="5907024" y="4628478"/>
+            <a:ext cx="54864" cy="132319"/>
           </a:xfrm>
           <a:prstGeom prst="rect">
             <a:avLst/>
@@ -33534,8 +33534,8 @@
         </p:nvSpPr>
         <p:spPr>
           <a:xfrm>
-            <a:off x="10570464" y="3991356"/>
-            <a:ext cx="182880" cy="64008"/>
+            <a:off x="11457432" y="3957200"/>
+            <a:ext cx="54864" cy="132319"/>
           </a:xfrm>
           <a:prstGeom prst="rect">
             <a:avLst/>
@@ -34258,8 +34258,8 @@
         </p:nvSpPr>
         <p:spPr>
           <a:xfrm>
-            <a:off x="10570464" y="4886392"/>
-            <a:ext cx="182880" cy="64008"/>
+            <a:off x="11457432" y="4852237"/>
+            <a:ext cx="54864" cy="132319"/>
           </a:xfrm>
           <a:prstGeom prst="rect">
             <a:avLst/>
@@ -34630,8 +34630,8 @@
         </p:nvSpPr>
         <p:spPr>
           <a:xfrm>
-            <a:off x="10570464" y="5333910"/>
-            <a:ext cx="182880" cy="64008"/>
+            <a:off x="11457432" y="5299755"/>
+            <a:ext cx="54864" cy="132319"/>
           </a:xfrm>
           <a:prstGeom prst="rect">
             <a:avLst/>
@@ -44759,8 +44759,8 @@
         </p:nvSpPr>
         <p:spPr>
           <a:xfrm>
-            <a:off x="5020056" y="2648802"/>
-            <a:ext cx="182880" cy="64008"/>
+            <a:off x="5907024" y="2614646"/>
+            <a:ext cx="54864" cy="132319"/>
           </a:xfrm>
           <a:prstGeom prst="rect">
             <a:avLst/>
@@ -45483,8 +45483,8 @@
         </p:nvSpPr>
         <p:spPr>
           <a:xfrm>
-            <a:off x="5020056" y="3543838"/>
-            <a:ext cx="182880" cy="64008"/>
+            <a:off x="5907024" y="3509682"/>
+            <a:ext cx="54864" cy="132319"/>
           </a:xfrm>
           <a:prstGeom prst="rect">
             <a:avLst/>
@@ -46031,8 +46031,8 @@
         </p:nvSpPr>
         <p:spPr>
           <a:xfrm>
-            <a:off x="5020056" y="4215115"/>
-            <a:ext cx="182880" cy="64008"/>
+            <a:off x="5907024" y="4180960"/>
+            <a:ext cx="54864" cy="132319"/>
           </a:xfrm>
           <a:prstGeom prst="rect">
             <a:avLst/>
@@ -49043,8 +49043,8 @@
         </p:nvSpPr>
         <p:spPr>
           <a:xfrm>
-            <a:off x="10570464" y="4215115"/>
-            <a:ext cx="182880" cy="64008"/>
+            <a:off x="11457432" y="4180960"/>
+            <a:ext cx="54864" cy="132319"/>
           </a:xfrm>
           <a:prstGeom prst="rect">
             <a:avLst/>
@@ -49767,8 +49767,8 @@
         </p:nvSpPr>
         <p:spPr>
           <a:xfrm>
-            <a:off x="10570464" y="5110151"/>
-            <a:ext cx="182880" cy="64008"/>
+            <a:off x="11457432" y="5075996"/>
+            <a:ext cx="54864" cy="132319"/>
           </a:xfrm>
           <a:prstGeom prst="rect">
             <a:avLst/>
@@ -49963,8 +49963,8 @@
         </p:nvSpPr>
         <p:spPr>
           <a:xfrm>
-            <a:off x="10570464" y="5333910"/>
-            <a:ext cx="182880" cy="64008"/>
+            <a:off x="11457432" y="5299755"/>
+            <a:ext cx="54864" cy="132319"/>
           </a:xfrm>
           <a:prstGeom prst="rect">
             <a:avLst/>

--- a/day2-deck/decks/Fixed Ops Gross - House Style.pptx
+++ b/day2-deck/decks/Fixed Ops Gross - House Style.pptx
@@ -19870,7 +19870,7 @@
                 <a:ea typeface="Inter" pitchFamily="34" charset="-122"/>
                 <a:cs typeface="Inter" pitchFamily="34" charset="-120"/>
               </a:rPr>
-              <a:t>Jan–Sep 2026 vs Jan–Sep 2025</a:t>
+              <a:t>Jan–Sep, this year vs last</a:t>
             </a:r>
             <a:endParaRPr lang="en-US" sz="1200" dirty="0"/>
           </a:p>
@@ -20813,7 +20813,7 @@
                 <a:ea typeface="Inter" pitchFamily="34" charset="-122"/>
                 <a:cs typeface="Inter" pitchFamily="34" charset="-120"/>
               </a:rPr>
-              <a:t>Jan–Sep 2026 vs Jan–Sep 2025</a:t>
+              <a:t>Jan–Sep, this year vs last</a:t>
             </a:r>
             <a:endParaRPr lang="en-US" sz="1200" dirty="0"/>
           </a:p>
@@ -21756,7 +21756,7 @@
                 <a:ea typeface="Inter" pitchFamily="34" charset="-122"/>
                 <a:cs typeface="Inter" pitchFamily="34" charset="-120"/>
               </a:rPr>
-              <a:t>Jul–Sep vs Jan–Mar 2026, per month</a:t>
+              <a:t>Jul–Sep vs Jan–Mar this year</a:t>
             </a:r>
             <a:endParaRPr lang="en-US" sz="1200" dirty="0"/>
           </a:p>
@@ -35179,7 +35179,7 @@
                 <a:ea typeface="Inter" pitchFamily="34" charset="-122"/>
                 <a:cs typeface="Inter" pitchFamily="34" charset="-120"/>
               </a:rPr>
-              <a:t>Jan–Sep 2026 vs Jan–Sep 2025</a:t>
+              <a:t>Jan–Sep, this year vs last</a:t>
             </a:r>
             <a:endParaRPr lang="en-US" sz="1200" dirty="0"/>
           </a:p>
@@ -36142,7 +36142,7 @@
                 <a:ea typeface="Inter" pitchFamily="34" charset="-122"/>
                 <a:cs typeface="Inter" pitchFamily="34" charset="-120"/>
               </a:rPr>
-              <a:t>Jan–Sep 2026 vs Jan–Sep 2025</a:t>
+              <a:t>Jan–Sep, this year vs last</a:t>
             </a:r>
             <a:endParaRPr lang="en-US" sz="1200" dirty="0"/>
           </a:p>
@@ -37085,7 +37085,7 @@
                 <a:ea typeface="Inter" pitchFamily="34" charset="-122"/>
                 <a:cs typeface="Inter" pitchFamily="34" charset="-120"/>
               </a:rPr>
-              <a:t>Jul–Sep vs Jan–Mar 2026, per month</a:t>
+              <a:t>Jul–Sep vs Jan–Mar this year</a:t>
             </a:r>
             <a:endParaRPr lang="en-US" sz="1200" dirty="0"/>
           </a:p>
@@ -50512,7 +50512,7 @@
                 <a:ea typeface="Inter" pitchFamily="34" charset="-122"/>
                 <a:cs typeface="Inter" pitchFamily="34" charset="-120"/>
               </a:rPr>
-              <a:t>Jan–Sep 2026 vs Jan–Sep 2025</a:t>
+              <a:t>Jan–Sep, this year vs last</a:t>
             </a:r>
             <a:endParaRPr lang="en-US" sz="1200" dirty="0"/>
           </a:p>
@@ -51475,7 +51475,7 @@
                 <a:ea typeface="Inter" pitchFamily="34" charset="-122"/>
                 <a:cs typeface="Inter" pitchFamily="34" charset="-120"/>
               </a:rPr>
-              <a:t>Jan–Sep 2026 vs Jan–Sep 2025</a:t>
+              <a:t>Jan–Sep, this year vs last</a:t>
             </a:r>
             <a:endParaRPr lang="en-US" sz="1200" dirty="0"/>
           </a:p>
@@ -52418,7 +52418,7 @@
                 <a:ea typeface="Inter" pitchFamily="34" charset="-122"/>
                 <a:cs typeface="Inter" pitchFamily="34" charset="-120"/>
               </a:rPr>
-              <a:t>Jul–Sep vs Jan–Mar 2026, per month</a:t>
+              <a:t>Jul–Sep vs Jan–Mar this year</a:t>
             </a:r>
             <a:endParaRPr lang="en-US" sz="1200" dirty="0"/>
           </a:p>

--- a/day2-deck/decks/Fixed Ops Gross - House Style.pptx
+++ b/day2-deck/decks/Fixed Ops Gross - House Style.pptx
@@ -5987,7 +5987,7 @@
           <a:p>
             <a:r>
               <a:rPr lang="en-US" dirty="0"/>
-              <a:t>Takeaway (off the slide): Toyota Henderson is $6.21M of the group's $61.93M; VW St George is smallest at $379,537.Source: Qlik - Profit &amp; Loss. Same-store, INEOS excluded (opened 2026). Fixed ops = service + parts; GMC Prescott body shop gross excluded. Jan-Sep 2026.</a:t>
+              <a:t>Takeaway with the store call-outs (off the slide): Toyota Henderson is $6.21M of the group's $61.93M; VW St George is smallest at $379,537.Source: Qlik - Profit &amp; Loss. Same-store, INEOS excluded (opened 2026). Fixed ops = service + parts; GMC Prescott body shop gross excluded. Jan-Sep 2026.</a:t>
             </a:r>
             <a:endParaRPr lang="en-US" dirty="0"/>
           </a:p>
@@ -6075,7 +6075,7 @@
           <a:p>
             <a:r>
               <a:rPr lang="en-US" dirty="0"/>
-              <a:t>Takeaway (off the slide): 17 of 33 stores grew. Cadillac added the most at +$688K (+28.4%); Audi Reno fell most at −$328K (−18.8%).Source: Qlik - Profit &amp; Loss. Same-store, INEOS excluded (opened 2026). Fixed ops = service + parts; GMC Prescott body shop gross excluded. Ranked by dollar change, Jan-Sep 2026 vs Jan-Sep 2025; percent change alongside, the top three and bottom three by percent marked.</a:t>
+              <a:t>Takeaway with the store call-outs (off the slide): 17 of 33 stores grew. Cadillac added the most at +$688K (+28.4%); Audi Reno fell most at −$328K (−18.8%).Source: Qlik - Profit &amp; Loss. Same-store, INEOS excluded (opened 2026). Fixed ops = service + parts; GMC Prescott body shop gross excluded. Ranked by dollar change, Jan-Sep 2026 vs Jan-Sep 2025; percent change alongside, the top three and bottom three by percent marked.</a:t>
             </a:r>
             <a:endParaRPr lang="en-US" dirty="0"/>
           </a:p>
@@ -6163,7 +6163,7 @@
           <a:p>
             <a:r>
               <a:rPr lang="en-US" dirty="0"/>
-              <a:t>Takeaway (off the slide): Ask Lincoln, Cadillac and Subaru St George what changed. Ask Hyundai St George, Audi Reno and VW Henderson what got in the way. Ask Audi Henderson, Mazda and Honda Flagstaff what they started this year.Source: Qlik - Profit &amp; Loss. Same-store, INEOS excluded (opened 2026). Fixed ops = service + parts; GMC Prescott body shop gross excluded. Top and bottom five stores by percent change in parts gross, Jan-Sep 2026 vs 2025. Moving now: Jul-Sep 2026 vs Jan-Mar 2026, each store against itself (monthly averages); the group moved +14.4% on the same basis, so part of every store's change is seasonal. Green bar at the right of a row: the store is on both the top five vs last year and the top five moving now.Conversation starter: each top store says one thing they started doing; each bottom store says what got in the way and what they would try. The room trades ideas. Moving now: ask the top three what they started this year.</a:t>
+              <a:t>Takeaway with the store call-outs (off the slide): Ask Lincoln, Cadillac and Subaru St George what changed. Ask Hyundai St George, Audi Reno and VW Henderson what got in the way. Ask Audi Henderson, Mazda and Honda Flagstaff what they started this year.Source: Qlik - Profit &amp; Loss. Same-store, INEOS excluded (opened 2026). Fixed ops = service + parts; GMC Prescott body shop gross excluded. Top and bottom five stores by percent change in parts gross, Jan-Sep 2026 vs 2025. Moving now: Jul-Sep 2026 vs Jan-Mar 2026, each store against itself (monthly averages); the group moved +14.4% on the same basis, so part of every store's change is seasonal. Green bar at the right of a row: the store is on both the top five vs last year and the top five moving now.Conversation starter: each top store says one thing they started doing; each bottom store says what got in the way and what they would try. The room trades ideas. Moving now: ask the top three what they started this year.</a:t>
             </a:r>
             <a:endParaRPr lang="en-US" dirty="0"/>
           </a:p>
@@ -6339,7 +6339,7 @@
           <a:p>
             <a:r>
               <a:rPr lang="en-US" dirty="0"/>
-              <a:t>Takeaway (off the slide): Toyota Henderson is $22.59M of the group's $188.80M; VW St George is smallest at $968,018.Source: Qlik - Profit &amp; Loss. Same-store, INEOS excluded (opened 2026). Fixed ops = service + parts; GMC Prescott body shop gross excluded. Jan-Sep 2026.</a:t>
+              <a:t>Takeaway with the store call-outs (off the slide): Toyota Henderson is $22.59M of the group's $188.80M; VW St George is smallest at $968,018.Source: Qlik - Profit &amp; Loss. Same-store, INEOS excluded (opened 2026). Fixed ops = service + parts; GMC Prescott body shop gross excluded. Jan-Sep 2026.</a:t>
             </a:r>
             <a:endParaRPr lang="en-US" dirty="0"/>
           </a:p>
@@ -6427,7 +6427,7 @@
           <a:p>
             <a:r>
               <a:rPr lang="en-US" dirty="0"/>
-              <a:t>Takeaway (off the slide): 25 of 33 stores grew. Toyota Henderson added the most at +$1.77M (+8.5%); Honda North fell most at −$840K (−8.9%).Source: Qlik - Profit &amp; Loss. Same-store, INEOS excluded (opened 2026). Fixed ops = service + parts; GMC Prescott body shop gross excluded. Ranked by dollar change, Jan-Sep 2026 vs Jan-Sep 2025; percent change alongside, the top three and bottom three by percent marked.</a:t>
+              <a:t>Takeaway with the store call-outs (off the slide): 25 of 33 stores grew. Toyota Henderson added the most at +$1.77M (+8.5%); Honda North fell most at −$840K (−8.9%).Source: Qlik - Profit &amp; Loss. Same-store, INEOS excluded (opened 2026). Fixed ops = service + parts; GMC Prescott body shop gross excluded. Ranked by dollar change, Jan-Sep 2026 vs Jan-Sep 2025; percent change alongside, the top three and bottom three by percent marked.</a:t>
             </a:r>
             <a:endParaRPr lang="en-US" dirty="0"/>
           </a:p>
@@ -6515,7 +6515,7 @@
           <a:p>
             <a:r>
               <a:rPr lang="en-US" dirty="0"/>
-              <a:t>Takeaway (off the slide): Ask Hyundai Prescott, Lincoln and Lexus what changed. Ask Acura, VW St George and VW Henderson what got in the way. Ask Mazda, Kia St George and LR Henderson what they started this year.Source: Qlik - Profit &amp; Loss. Same-store, INEOS excluded (opened 2026). Fixed ops = service + parts; GMC Prescott body shop gross excluded. Top and bottom five stores by percent change in fixed ops gross, Jan-Sep 2026 vs 2025. Moving now: Jul-Sep 2026 vs Jan-Mar 2026, each store against itself (monthly averages); the group moved +9.4% on the same basis, so part of every store's change is seasonal. Green bar at the right of a row: the store is on both the top five vs last year and the top five moving now.Conversation starter: each top store says one thing they started doing; each bottom store says what got in the way and what they would try. The room trades ideas. Moving now: ask the top three what they started this year.</a:t>
+              <a:t>Takeaway with the store call-outs (off the slide): Ask Hyundai Prescott, Lincoln and Lexus what changed. Ask Acura, VW St George and VW Henderson what got in the way. Ask Mazda, Kia St George and LR Henderson what they started this year.Source: Qlik - Profit &amp; Loss. Same-store, INEOS excluded (opened 2026). Fixed ops = service + parts; GMC Prescott body shop gross excluded. Top and bottom five stores by percent change in fixed ops gross, Jan-Sep 2026 vs 2025. Moving now: Jul-Sep 2026 vs Jan-Mar 2026, each store against itself (monthly averages); the group moved +9.4% on the same basis, so part of every store's change is seasonal. Green bar at the right of a row: the store is on both the top five vs last year and the top five moving now.Conversation starter: each top store says one thing they started doing; each bottom store says what got in the way and what they would try. The room trades ideas. Moving now: ask the top three what they started this year.</a:t>
             </a:r>
             <a:endParaRPr lang="en-US" dirty="0"/>
           </a:p>
@@ -6691,7 +6691,7 @@
           <a:p>
             <a:r>
               <a:rPr lang="en-US" dirty="0"/>
-              <a:t>Takeaway (off the slide): Toyota Henderson is $16.38M of the group's $126.87M; VW St George is smallest at $588,480.Source: Qlik - Profit &amp; Loss. Same-store, INEOS excluded (opened 2026). Fixed ops = service + parts; GMC Prescott body shop gross excluded. Jan-Sep 2026.</a:t>
+              <a:t>Takeaway with the store call-outs (off the slide): Toyota Henderson is $16.38M of the group's $126.87M; VW St George is smallest at $588,480.Source: Qlik - Profit &amp; Loss. Same-store, INEOS excluded (opened 2026). Fixed ops = service + parts; GMC Prescott body shop gross excluded. Jan-Sep 2026.</a:t>
             </a:r>
             <a:endParaRPr lang="en-US" dirty="0"/>
           </a:p>
@@ -6779,7 +6779,7 @@
           <a:p>
             <a:r>
               <a:rPr lang="en-US" dirty="0"/>
-              <a:t>Takeaway (off the slide): 23 of 33 stores grew. Toyota Henderson added the most at +$1.50M (+10.1%); Honda North fell most at −$695K (−10.5%).Source: Qlik - Profit &amp; Loss. Same-store, INEOS excluded (opened 2026). Fixed ops = service + parts; GMC Prescott body shop gross excluded. Ranked by dollar change, Jan-Sep 2026 vs Jan-Sep 2025; percent change alongside, the top three and bottom three by percent marked.</a:t>
+              <a:t>Takeaway with the store call-outs (off the slide): 23 of 33 stores grew. Toyota Henderson added the most at +$1.50M (+10.1%); Honda North fell most at −$695K (−10.5%).Source: Qlik - Profit &amp; Loss. Same-store, INEOS excluded (opened 2026). Fixed ops = service + parts; GMC Prescott body shop gross excluded. Ranked by dollar change, Jan-Sep 2026 vs Jan-Sep 2025; percent change alongside, the top three and bottom three by percent marked.</a:t>
             </a:r>
             <a:endParaRPr lang="en-US" dirty="0"/>
           </a:p>
@@ -6867,7 +6867,7 @@
           <a:p>
             <a:r>
               <a:rPr lang="en-US" dirty="0"/>
-              <a:t>Takeaway (off the slide): Ask Hyundai Prescott, Lincoln and Lexus what changed. Ask Acura, VW St George and VW Henderson what got in the way. Ask Mazda, Kia St George and Hyundai Prescott what they started this year.Source: Qlik - Profit &amp; Loss. Same-store, INEOS excluded (opened 2026). Fixed ops = service + parts; GMC Prescott body shop gross excluded. Top and bottom five stores by percent change in service gross, Jan-Sep 2026 vs 2025. Moving now: Jul-Sep 2026 vs Jan-Mar 2026, each store against itself (monthly averages); the group moved +7.0% on the same basis, so part of every store's change is seasonal. Green bar at the right of a row: the store is on both the top five vs last year and the top five moving now.Conversation starter: each top store says one thing they started doing; each bottom store says what got in the way and what they would try. The room trades ideas. Moving now: ask the top three what they started this year.</a:t>
+              <a:t>Takeaway with the store call-outs (off the slide): Ask Hyundai Prescott, Lincoln and Lexus what changed. Ask Acura, VW St George and VW Henderson what got in the way. Ask Mazda, Kia St George and Hyundai Prescott what they started this year.Source: Qlik - Profit &amp; Loss. Same-store, INEOS excluded (opened 2026). Fixed ops = service + parts; GMC Prescott body shop gross excluded. Top and bottom five stores by percent change in service gross, Jan-Sep 2026 vs 2025. Moving now: Jul-Sep 2026 vs Jan-Mar 2026, each store against itself (monthly averages); the group moved +7.0% on the same basis, so part of every store's change is seasonal. Green bar at the right of a row: the store is on both the top five vs last year and the top five moving now.Conversation starter: each top store says one thing they started doing; each bottom store says what got in the way and what they would try. The room trades ideas. Moving now: ask the top three what they started this year.</a:t>
             </a:r>
             <a:endParaRPr lang="en-US" dirty="0"/>
           </a:p>
@@ -13198,7 +13198,7 @@
         <p:spPr>
           <a:xfrm>
             <a:off x="457200" y="1207008"/>
-            <a:ext cx="11274552" cy="5148072"/>
+            <a:ext cx="11274552" cy="4782312"/>
           </a:xfrm>
           <a:prstGeom prst="rect">
             <a:avLst/>
@@ -13531,7 +13531,7 @@
         <p:spPr>
           <a:xfrm>
             <a:off x="658368" y="2121408"/>
-            <a:ext cx="310896" cy="245274"/>
+            <a:ext cx="310896" cy="223759"/>
           </a:xfrm>
           <a:prstGeom prst="rect">
             <a:avLst/>
@@ -13570,7 +13570,7 @@
         <p:spPr>
           <a:xfrm>
             <a:off x="1014984" y="2121408"/>
-            <a:ext cx="1920240" cy="245274"/>
+            <a:ext cx="1920240" cy="223759"/>
           </a:xfrm>
           <a:prstGeom prst="rect">
             <a:avLst/>
@@ -13608,8 +13608,8 @@
         </p:nvSpPr>
         <p:spPr>
           <a:xfrm>
-            <a:off x="3579876" y="2187632"/>
-            <a:ext cx="571500" cy="112826"/>
+            <a:off x="3579876" y="2181823"/>
+            <a:ext cx="571500" cy="102929"/>
           </a:xfrm>
           <a:prstGeom prst="rect">
             <a:avLst/>
@@ -13629,7 +13629,7 @@
         <p:spPr>
           <a:xfrm>
             <a:off x="4206240" y="2121408"/>
-            <a:ext cx="777240" cy="245274"/>
+            <a:ext cx="777240" cy="223759"/>
           </a:xfrm>
           <a:prstGeom prst="rect">
             <a:avLst/>
@@ -13668,7 +13668,7 @@
         <p:spPr>
           <a:xfrm>
             <a:off x="4983480" y="2121408"/>
-            <a:ext cx="868680" cy="245274"/>
+            <a:ext cx="868680" cy="223759"/>
           </a:xfrm>
           <a:prstGeom prst="rect">
             <a:avLst/>
@@ -13707,7 +13707,7 @@
         <p:spPr>
           <a:xfrm>
             <a:off x="5907024" y="2167128"/>
-            <a:ext cx="54864" cy="153834"/>
+            <a:ext cx="54864" cy="132319"/>
           </a:xfrm>
           <a:prstGeom prst="rect">
             <a:avLst/>
@@ -13726,8 +13726,8 @@
         </p:nvSpPr>
         <p:spPr>
           <a:xfrm>
-            <a:off x="658368" y="2366682"/>
-            <a:ext cx="310896" cy="245274"/>
+            <a:off x="658368" y="2345167"/>
+            <a:ext cx="310896" cy="223759"/>
           </a:xfrm>
           <a:prstGeom prst="rect">
             <a:avLst/>
@@ -13765,8 +13765,8 @@
         </p:nvSpPr>
         <p:spPr>
           <a:xfrm>
-            <a:off x="1014984" y="2366682"/>
-            <a:ext cx="1920240" cy="245274"/>
+            <a:off x="1014984" y="2345167"/>
+            <a:ext cx="1920240" cy="223759"/>
           </a:xfrm>
           <a:prstGeom prst="rect">
             <a:avLst/>
@@ -13804,8 +13804,8 @@
         </p:nvSpPr>
         <p:spPr>
           <a:xfrm>
-            <a:off x="3579876" y="2432906"/>
-            <a:ext cx="266553" cy="112826"/>
+            <a:off x="3579876" y="2405582"/>
+            <a:ext cx="266553" cy="102929"/>
           </a:xfrm>
           <a:prstGeom prst="rect">
             <a:avLst/>
@@ -13824,8 +13824,8 @@
         </p:nvSpPr>
         <p:spPr>
           <a:xfrm>
-            <a:off x="4206240" y="2366682"/>
-            <a:ext cx="777240" cy="245274"/>
+            <a:off x="4206240" y="2345167"/>
+            <a:ext cx="777240" cy="223759"/>
           </a:xfrm>
           <a:prstGeom prst="rect">
             <a:avLst/>
@@ -13863,8 +13863,8 @@
         </p:nvSpPr>
         <p:spPr>
           <a:xfrm>
-            <a:off x="4983480" y="2366682"/>
-            <a:ext cx="868680" cy="245274"/>
+            <a:off x="4983480" y="2345167"/>
+            <a:ext cx="868680" cy="223759"/>
           </a:xfrm>
           <a:prstGeom prst="rect">
             <a:avLst/>
@@ -13902,8 +13902,8 @@
         </p:nvSpPr>
         <p:spPr>
           <a:xfrm>
-            <a:off x="658368" y="2611957"/>
-            <a:ext cx="310896" cy="245274"/>
+            <a:off x="658368" y="2568926"/>
+            <a:ext cx="310896" cy="223759"/>
           </a:xfrm>
           <a:prstGeom prst="rect">
             <a:avLst/>
@@ -13941,8 +13941,8 @@
         </p:nvSpPr>
         <p:spPr>
           <a:xfrm>
-            <a:off x="1014984" y="2611957"/>
-            <a:ext cx="1920240" cy="245274"/>
+            <a:off x="1014984" y="2568926"/>
+            <a:ext cx="1920240" cy="223759"/>
           </a:xfrm>
           <a:prstGeom prst="rect">
             <a:avLst/>
@@ -13980,8 +13980,8 @@
         </p:nvSpPr>
         <p:spPr>
           <a:xfrm>
-            <a:off x="3579876" y="2678181"/>
-            <a:ext cx="238998" cy="112826"/>
+            <a:off x="3579876" y="2629341"/>
+            <a:ext cx="238998" cy="102929"/>
           </a:xfrm>
           <a:prstGeom prst="rect">
             <a:avLst/>
@@ -14000,8 +14000,8 @@
         </p:nvSpPr>
         <p:spPr>
           <a:xfrm>
-            <a:off x="4206240" y="2611957"/>
-            <a:ext cx="777240" cy="245274"/>
+            <a:off x="4206240" y="2568926"/>
+            <a:ext cx="777240" cy="223759"/>
           </a:xfrm>
           <a:prstGeom prst="rect">
             <a:avLst/>
@@ -14039,8 +14039,8 @@
         </p:nvSpPr>
         <p:spPr>
           <a:xfrm>
-            <a:off x="4983480" y="2611957"/>
-            <a:ext cx="868680" cy="245274"/>
+            <a:off x="4983480" y="2568926"/>
+            <a:ext cx="868680" cy="223759"/>
           </a:xfrm>
           <a:prstGeom prst="rect">
             <a:avLst/>
@@ -14078,8 +14078,8 @@
         </p:nvSpPr>
         <p:spPr>
           <a:xfrm>
-            <a:off x="658368" y="2857231"/>
-            <a:ext cx="310896" cy="245274"/>
+            <a:off x="658368" y="2792685"/>
+            <a:ext cx="310896" cy="223759"/>
           </a:xfrm>
           <a:prstGeom prst="rect">
             <a:avLst/>
@@ -14117,8 +14117,8 @@
         </p:nvSpPr>
         <p:spPr>
           <a:xfrm>
-            <a:off x="1014984" y="2857231"/>
-            <a:ext cx="1920240" cy="245274"/>
+            <a:off x="1014984" y="2792685"/>
+            <a:ext cx="1920240" cy="223759"/>
           </a:xfrm>
           <a:prstGeom prst="rect">
             <a:avLst/>
@@ -14156,8 +14156,8 @@
         </p:nvSpPr>
         <p:spPr>
           <a:xfrm>
-            <a:off x="3579876" y="2923455"/>
-            <a:ext cx="227128" cy="112826"/>
+            <a:off x="3579876" y="2853100"/>
+            <a:ext cx="227128" cy="102929"/>
           </a:xfrm>
           <a:prstGeom prst="rect">
             <a:avLst/>
@@ -14176,8 +14176,8 @@
         </p:nvSpPr>
         <p:spPr>
           <a:xfrm>
-            <a:off x="4206240" y="2857231"/>
-            <a:ext cx="777240" cy="245274"/>
+            <a:off x="4206240" y="2792685"/>
+            <a:ext cx="777240" cy="223759"/>
           </a:xfrm>
           <a:prstGeom prst="rect">
             <a:avLst/>
@@ -14215,8 +14215,8 @@
         </p:nvSpPr>
         <p:spPr>
           <a:xfrm>
-            <a:off x="4983480" y="2857231"/>
-            <a:ext cx="868680" cy="245274"/>
+            <a:off x="4983480" y="2792685"/>
+            <a:ext cx="868680" cy="223759"/>
           </a:xfrm>
           <a:prstGeom prst="rect">
             <a:avLst/>
@@ -14254,8 +14254,8 @@
         </p:nvSpPr>
         <p:spPr>
           <a:xfrm>
-            <a:off x="658368" y="3102505"/>
-            <a:ext cx="310896" cy="245274"/>
+            <a:off x="658368" y="3016444"/>
+            <a:ext cx="310896" cy="223759"/>
           </a:xfrm>
           <a:prstGeom prst="rect">
             <a:avLst/>
@@ -14293,8 +14293,8 @@
         </p:nvSpPr>
         <p:spPr>
           <a:xfrm>
-            <a:off x="1014984" y="3102505"/>
-            <a:ext cx="1920240" cy="245274"/>
+            <a:off x="1014984" y="3016444"/>
+            <a:ext cx="1920240" cy="223759"/>
           </a:xfrm>
           <a:prstGeom prst="rect">
             <a:avLst/>
@@ -14332,8 +14332,8 @@
         </p:nvSpPr>
         <p:spPr>
           <a:xfrm>
-            <a:off x="3579876" y="3168729"/>
-            <a:ext cx="224863" cy="112826"/>
+            <a:off x="3579876" y="3076859"/>
+            <a:ext cx="224863" cy="102929"/>
           </a:xfrm>
           <a:prstGeom prst="rect">
             <a:avLst/>
@@ -14352,8 +14352,8 @@
         </p:nvSpPr>
         <p:spPr>
           <a:xfrm>
-            <a:off x="4206240" y="3102505"/>
-            <a:ext cx="777240" cy="245274"/>
+            <a:off x="4206240" y="3016444"/>
+            <a:ext cx="777240" cy="223759"/>
           </a:xfrm>
           <a:prstGeom prst="rect">
             <a:avLst/>
@@ -14391,8 +14391,8 @@
         </p:nvSpPr>
         <p:spPr>
           <a:xfrm>
-            <a:off x="4983480" y="3102505"/>
-            <a:ext cx="868680" cy="245274"/>
+            <a:off x="4983480" y="3016444"/>
+            <a:ext cx="868680" cy="223759"/>
           </a:xfrm>
           <a:prstGeom prst="rect">
             <a:avLst/>
@@ -14430,8 +14430,8 @@
         </p:nvSpPr>
         <p:spPr>
           <a:xfrm>
-            <a:off x="5907024" y="3148225"/>
-            <a:ext cx="54864" cy="153834"/>
+            <a:off x="5907024" y="3062164"/>
+            <a:ext cx="54864" cy="132319"/>
           </a:xfrm>
           <a:prstGeom prst="rect">
             <a:avLst/>
@@ -14450,8 +14450,8 @@
         </p:nvSpPr>
         <p:spPr>
           <a:xfrm>
-            <a:off x="658368" y="3347780"/>
-            <a:ext cx="310896" cy="245274"/>
+            <a:off x="658368" y="3240203"/>
+            <a:ext cx="310896" cy="223759"/>
           </a:xfrm>
           <a:prstGeom prst="rect">
             <a:avLst/>
@@ -14489,8 +14489,8 @@
         </p:nvSpPr>
         <p:spPr>
           <a:xfrm>
-            <a:off x="1014984" y="3347780"/>
-            <a:ext cx="1920240" cy="245274"/>
+            <a:off x="1014984" y="3240203"/>
+            <a:ext cx="1920240" cy="223759"/>
           </a:xfrm>
           <a:prstGeom prst="rect">
             <a:avLst/>
@@ -14528,8 +14528,8 @@
         </p:nvSpPr>
         <p:spPr>
           <a:xfrm>
-            <a:off x="3579876" y="3414004"/>
-            <a:ext cx="201457" cy="112826"/>
+            <a:off x="3579876" y="3300618"/>
+            <a:ext cx="201457" cy="102929"/>
           </a:xfrm>
           <a:prstGeom prst="rect">
             <a:avLst/>
@@ -14548,8 +14548,8 @@
         </p:nvSpPr>
         <p:spPr>
           <a:xfrm>
-            <a:off x="4206240" y="3347780"/>
-            <a:ext cx="777240" cy="245274"/>
+            <a:off x="4206240" y="3240203"/>
+            <a:ext cx="777240" cy="223759"/>
           </a:xfrm>
           <a:prstGeom prst="rect">
             <a:avLst/>
@@ -14587,8 +14587,8 @@
         </p:nvSpPr>
         <p:spPr>
           <a:xfrm>
-            <a:off x="4983480" y="3347780"/>
-            <a:ext cx="868680" cy="245274"/>
+            <a:off x="4983480" y="3240203"/>
+            <a:ext cx="868680" cy="223759"/>
           </a:xfrm>
           <a:prstGeom prst="rect">
             <a:avLst/>
@@ -14626,8 +14626,8 @@
         </p:nvSpPr>
         <p:spPr>
           <a:xfrm>
-            <a:off x="5907024" y="3393500"/>
-            <a:ext cx="54864" cy="153834"/>
+            <a:off x="5907024" y="3285923"/>
+            <a:ext cx="54864" cy="132319"/>
           </a:xfrm>
           <a:prstGeom prst="rect">
             <a:avLst/>
@@ -14646,8 +14646,8 @@
         </p:nvSpPr>
         <p:spPr>
           <a:xfrm>
-            <a:off x="658368" y="3593054"/>
-            <a:ext cx="310896" cy="245274"/>
+            <a:off x="658368" y="3463962"/>
+            <a:ext cx="310896" cy="223759"/>
           </a:xfrm>
           <a:prstGeom prst="rect">
             <a:avLst/>
@@ -14685,8 +14685,8 @@
         </p:nvSpPr>
         <p:spPr>
           <a:xfrm>
-            <a:off x="1014984" y="3593054"/>
-            <a:ext cx="1920240" cy="245274"/>
+            <a:off x="1014984" y="3463962"/>
+            <a:ext cx="1920240" cy="223759"/>
           </a:xfrm>
           <a:prstGeom prst="rect">
             <a:avLst/>
@@ -14724,8 +14724,8 @@
         </p:nvSpPr>
         <p:spPr>
           <a:xfrm>
-            <a:off x="3579876" y="3659278"/>
-            <a:ext cx="175005" cy="112826"/>
+            <a:off x="3579876" y="3524377"/>
+            <a:ext cx="175005" cy="102929"/>
           </a:xfrm>
           <a:prstGeom prst="rect">
             <a:avLst/>
@@ -14744,8 +14744,8 @@
         </p:nvSpPr>
         <p:spPr>
           <a:xfrm>
-            <a:off x="4206240" y="3593054"/>
-            <a:ext cx="777240" cy="245274"/>
+            <a:off x="4206240" y="3463962"/>
+            <a:ext cx="777240" cy="223759"/>
           </a:xfrm>
           <a:prstGeom prst="rect">
             <a:avLst/>
@@ -14783,8 +14783,8 @@
         </p:nvSpPr>
         <p:spPr>
           <a:xfrm>
-            <a:off x="4983480" y="3593054"/>
-            <a:ext cx="868680" cy="245274"/>
+            <a:off x="4983480" y="3463962"/>
+            <a:ext cx="868680" cy="223759"/>
           </a:xfrm>
           <a:prstGeom prst="rect">
             <a:avLst/>
@@ -14822,8 +14822,8 @@
         </p:nvSpPr>
         <p:spPr>
           <a:xfrm>
-            <a:off x="658368" y="3838328"/>
-            <a:ext cx="310896" cy="245274"/>
+            <a:off x="658368" y="3687721"/>
+            <a:ext cx="310896" cy="223759"/>
           </a:xfrm>
           <a:prstGeom prst="rect">
             <a:avLst/>
@@ -14861,8 +14861,8 @@
         </p:nvSpPr>
         <p:spPr>
           <a:xfrm>
-            <a:off x="1014984" y="3838328"/>
-            <a:ext cx="1920240" cy="245274"/>
+            <a:off x="1014984" y="3687721"/>
+            <a:ext cx="1920240" cy="223759"/>
           </a:xfrm>
           <a:prstGeom prst="rect">
             <a:avLst/>
@@ -14900,8 +14900,8 @@
         </p:nvSpPr>
         <p:spPr>
           <a:xfrm>
-            <a:off x="3579876" y="3904553"/>
-            <a:ext cx="131404" cy="112826"/>
+            <a:off x="3579876" y="3748136"/>
+            <a:ext cx="131404" cy="102929"/>
           </a:xfrm>
           <a:prstGeom prst="rect">
             <a:avLst/>
@@ -14920,8 +14920,8 @@
         </p:nvSpPr>
         <p:spPr>
           <a:xfrm>
-            <a:off x="4206240" y="3838328"/>
-            <a:ext cx="777240" cy="245274"/>
+            <a:off x="4206240" y="3687721"/>
+            <a:ext cx="777240" cy="223759"/>
           </a:xfrm>
           <a:prstGeom prst="rect">
             <a:avLst/>
@@ -14959,8 +14959,8 @@
         </p:nvSpPr>
         <p:spPr>
           <a:xfrm>
-            <a:off x="4983480" y="3838328"/>
-            <a:ext cx="868680" cy="245274"/>
+            <a:off x="4983480" y="3687721"/>
+            <a:ext cx="868680" cy="223759"/>
           </a:xfrm>
           <a:prstGeom prst="rect">
             <a:avLst/>
@@ -14998,8 +14998,8 @@
         </p:nvSpPr>
         <p:spPr>
           <a:xfrm>
-            <a:off x="658368" y="4083603"/>
-            <a:ext cx="310896" cy="245274"/>
+            <a:off x="658368" y="3911480"/>
+            <a:ext cx="310896" cy="223759"/>
           </a:xfrm>
           <a:prstGeom prst="rect">
             <a:avLst/>
@@ -15037,8 +15037,8 @@
         </p:nvSpPr>
         <p:spPr>
           <a:xfrm>
-            <a:off x="1014984" y="4083603"/>
-            <a:ext cx="1920240" cy="245274"/>
+            <a:off x="1014984" y="3911480"/>
+            <a:ext cx="1920240" cy="223759"/>
           </a:xfrm>
           <a:prstGeom prst="rect">
             <a:avLst/>
@@ -15076,8 +15076,8 @@
         </p:nvSpPr>
         <p:spPr>
           <a:xfrm>
-            <a:off x="3579876" y="4149827"/>
-            <a:ext cx="125702" cy="112826"/>
+            <a:off x="3579876" y="3971895"/>
+            <a:ext cx="125702" cy="102929"/>
           </a:xfrm>
           <a:prstGeom prst="rect">
             <a:avLst/>
@@ -15096,8 +15096,8 @@
         </p:nvSpPr>
         <p:spPr>
           <a:xfrm>
-            <a:off x="4206240" y="4083603"/>
-            <a:ext cx="777240" cy="245274"/>
+            <a:off x="4206240" y="3911480"/>
+            <a:ext cx="777240" cy="223759"/>
           </a:xfrm>
           <a:prstGeom prst="rect">
             <a:avLst/>
@@ -15135,8 +15135,8 @@
         </p:nvSpPr>
         <p:spPr>
           <a:xfrm>
-            <a:off x="4983480" y="4083603"/>
-            <a:ext cx="868680" cy="245274"/>
+            <a:off x="4983480" y="3911480"/>
+            <a:ext cx="868680" cy="223759"/>
           </a:xfrm>
           <a:prstGeom prst="rect">
             <a:avLst/>
@@ -15174,8 +15174,8 @@
         </p:nvSpPr>
         <p:spPr>
           <a:xfrm>
-            <a:off x="658368" y="4328877"/>
-            <a:ext cx="310896" cy="245274"/>
+            <a:off x="658368" y="4135240"/>
+            <a:ext cx="310896" cy="223759"/>
           </a:xfrm>
           <a:prstGeom prst="rect">
             <a:avLst/>
@@ -15213,8 +15213,8 @@
         </p:nvSpPr>
         <p:spPr>
           <a:xfrm>
-            <a:off x="1014984" y="4328877"/>
-            <a:ext cx="1920240" cy="245274"/>
+            <a:off x="1014984" y="4135240"/>
+            <a:ext cx="1920240" cy="223759"/>
           </a:xfrm>
           <a:prstGeom prst="rect">
             <a:avLst/>
@@ -15252,8 +15252,8 @@
         </p:nvSpPr>
         <p:spPr>
           <a:xfrm>
-            <a:off x="3579876" y="4395101"/>
-            <a:ext cx="103334" cy="112826"/>
+            <a:off x="3579876" y="4195654"/>
+            <a:ext cx="103334" cy="102929"/>
           </a:xfrm>
           <a:prstGeom prst="rect">
             <a:avLst/>
@@ -15272,8 +15272,8 @@
         </p:nvSpPr>
         <p:spPr>
           <a:xfrm>
-            <a:off x="4206240" y="4328877"/>
-            <a:ext cx="777240" cy="245274"/>
+            <a:off x="4206240" y="4135240"/>
+            <a:ext cx="777240" cy="223759"/>
           </a:xfrm>
           <a:prstGeom prst="rect">
             <a:avLst/>
@@ -15311,8 +15311,8 @@
         </p:nvSpPr>
         <p:spPr>
           <a:xfrm>
-            <a:off x="4983480" y="4328877"/>
-            <a:ext cx="868680" cy="245274"/>
+            <a:off x="4983480" y="4135240"/>
+            <a:ext cx="868680" cy="223759"/>
           </a:xfrm>
           <a:prstGeom prst="rect">
             <a:avLst/>
@@ -15350,8 +15350,8 @@
         </p:nvSpPr>
         <p:spPr>
           <a:xfrm>
-            <a:off x="658368" y="4574152"/>
-            <a:ext cx="310896" cy="245274"/>
+            <a:off x="658368" y="4358999"/>
+            <a:ext cx="310896" cy="223759"/>
           </a:xfrm>
           <a:prstGeom prst="rect">
             <a:avLst/>
@@ -15389,8 +15389,8 @@
         </p:nvSpPr>
         <p:spPr>
           <a:xfrm>
-            <a:off x="1014984" y="4574152"/>
-            <a:ext cx="1920240" cy="245274"/>
+            <a:off x="1014984" y="4358999"/>
+            <a:ext cx="1920240" cy="223759"/>
           </a:xfrm>
           <a:prstGeom prst="rect">
             <a:avLst/>
@@ -15428,8 +15428,8 @@
         </p:nvSpPr>
         <p:spPr>
           <a:xfrm>
-            <a:off x="3579876" y="4640376"/>
-            <a:ext cx="73474" cy="112826"/>
+            <a:off x="3579876" y="4419414"/>
+            <a:ext cx="73474" cy="102929"/>
           </a:xfrm>
           <a:prstGeom prst="rect">
             <a:avLst/>
@@ -15448,8 +15448,8 @@
         </p:nvSpPr>
         <p:spPr>
           <a:xfrm>
-            <a:off x="4206240" y="4574152"/>
-            <a:ext cx="777240" cy="245274"/>
+            <a:off x="4206240" y="4358999"/>
+            <a:ext cx="777240" cy="223759"/>
           </a:xfrm>
           <a:prstGeom prst="rect">
             <a:avLst/>
@@ -15487,8 +15487,8 @@
         </p:nvSpPr>
         <p:spPr>
           <a:xfrm>
-            <a:off x="4983480" y="4574152"/>
-            <a:ext cx="868680" cy="245274"/>
+            <a:off x="4983480" y="4358999"/>
+            <a:ext cx="868680" cy="223759"/>
           </a:xfrm>
           <a:prstGeom prst="rect">
             <a:avLst/>
@@ -15526,8 +15526,8 @@
         </p:nvSpPr>
         <p:spPr>
           <a:xfrm>
-            <a:off x="658368" y="4819426"/>
-            <a:ext cx="310896" cy="245274"/>
+            <a:off x="658368" y="4582758"/>
+            <a:ext cx="310896" cy="223759"/>
           </a:xfrm>
           <a:prstGeom prst="rect">
             <a:avLst/>
@@ -15565,8 +15565,8 @@
         </p:nvSpPr>
         <p:spPr>
           <a:xfrm>
-            <a:off x="1014984" y="4819426"/>
-            <a:ext cx="1920240" cy="245274"/>
+            <a:off x="1014984" y="4582758"/>
+            <a:ext cx="1920240" cy="223759"/>
           </a:xfrm>
           <a:prstGeom prst="rect">
             <a:avLst/>
@@ -15604,8 +15604,8 @@
         </p:nvSpPr>
         <p:spPr>
           <a:xfrm>
-            <a:off x="3579876" y="4885650"/>
-            <a:ext cx="49502" cy="112826"/>
+            <a:off x="3579876" y="4643173"/>
+            <a:ext cx="49502" cy="102929"/>
           </a:xfrm>
           <a:prstGeom prst="rect">
             <a:avLst/>
@@ -15624,8 +15624,8 @@
         </p:nvSpPr>
         <p:spPr>
           <a:xfrm>
-            <a:off x="4206240" y="4819426"/>
-            <a:ext cx="777240" cy="245274"/>
+            <a:off x="4206240" y="4582758"/>
+            <a:ext cx="777240" cy="223759"/>
           </a:xfrm>
           <a:prstGeom prst="rect">
             <a:avLst/>
@@ -15663,8 +15663,8 @@
         </p:nvSpPr>
         <p:spPr>
           <a:xfrm>
-            <a:off x="4983480" y="4819426"/>
-            <a:ext cx="868680" cy="245274"/>
+            <a:off x="4983480" y="4582758"/>
+            <a:ext cx="868680" cy="223759"/>
           </a:xfrm>
           <a:prstGeom prst="rect">
             <a:avLst/>
@@ -15702,8 +15702,8 @@
         </p:nvSpPr>
         <p:spPr>
           <a:xfrm>
-            <a:off x="658368" y="5064700"/>
-            <a:ext cx="310896" cy="245274"/>
+            <a:off x="658368" y="4806517"/>
+            <a:ext cx="310896" cy="223759"/>
           </a:xfrm>
           <a:prstGeom prst="rect">
             <a:avLst/>
@@ -15741,8 +15741,8 @@
         </p:nvSpPr>
         <p:spPr>
           <a:xfrm>
-            <a:off x="1014984" y="5064700"/>
-            <a:ext cx="1920240" cy="245274"/>
+            <a:off x="1014984" y="4806517"/>
+            <a:ext cx="1920240" cy="223759"/>
           </a:xfrm>
           <a:prstGeom prst="rect">
             <a:avLst/>
@@ -15780,8 +15780,8 @@
         </p:nvSpPr>
         <p:spPr>
           <a:xfrm>
-            <a:off x="3579876" y="5130924"/>
-            <a:ext cx="41830" cy="112826"/>
+            <a:off x="3579876" y="4866932"/>
+            <a:ext cx="41830" cy="102929"/>
           </a:xfrm>
           <a:prstGeom prst="rect">
             <a:avLst/>
@@ -15800,8 +15800,8 @@
         </p:nvSpPr>
         <p:spPr>
           <a:xfrm>
-            <a:off x="4206240" y="5064700"/>
-            <a:ext cx="777240" cy="245274"/>
+            <a:off x="4206240" y="4806517"/>
+            <a:ext cx="777240" cy="223759"/>
           </a:xfrm>
           <a:prstGeom prst="rect">
             <a:avLst/>
@@ -15839,8 +15839,8 @@
         </p:nvSpPr>
         <p:spPr>
           <a:xfrm>
-            <a:off x="4983480" y="5064700"/>
-            <a:ext cx="868680" cy="245274"/>
+            <a:off x="4983480" y="4806517"/>
+            <a:ext cx="868680" cy="223759"/>
           </a:xfrm>
           <a:prstGeom prst="rect">
             <a:avLst/>
@@ -15878,8 +15878,8 @@
         </p:nvSpPr>
         <p:spPr>
           <a:xfrm>
-            <a:off x="658368" y="5309975"/>
-            <a:ext cx="310896" cy="245274"/>
+            <a:off x="658368" y="5030276"/>
+            <a:ext cx="310896" cy="223759"/>
           </a:xfrm>
           <a:prstGeom prst="rect">
             <a:avLst/>
@@ -15917,8 +15917,8 @@
         </p:nvSpPr>
         <p:spPr>
           <a:xfrm>
-            <a:off x="1014984" y="5309975"/>
-            <a:ext cx="1920240" cy="245274"/>
+            <a:off x="1014984" y="5030276"/>
+            <a:ext cx="1920240" cy="223759"/>
           </a:xfrm>
           <a:prstGeom prst="rect">
             <a:avLst/>
@@ -15956,8 +15956,8 @@
         </p:nvSpPr>
         <p:spPr>
           <a:xfrm>
-            <a:off x="3579876" y="5376199"/>
-            <a:ext cx="38877" cy="112826"/>
+            <a:off x="3579876" y="5090691"/>
+            <a:ext cx="38877" cy="102929"/>
           </a:xfrm>
           <a:prstGeom prst="rect">
             <a:avLst/>
@@ -15976,8 +15976,8 @@
         </p:nvSpPr>
         <p:spPr>
           <a:xfrm>
-            <a:off x="4206240" y="5309975"/>
-            <a:ext cx="777240" cy="245274"/>
+            <a:off x="4206240" y="5030276"/>
+            <a:ext cx="777240" cy="223759"/>
           </a:xfrm>
           <a:prstGeom prst="rect">
             <a:avLst/>
@@ -16015,8 +16015,8 @@
         </p:nvSpPr>
         <p:spPr>
           <a:xfrm>
-            <a:off x="4983480" y="5309975"/>
-            <a:ext cx="868680" cy="245274"/>
+            <a:off x="4983480" y="5030276"/>
+            <a:ext cx="868680" cy="223759"/>
           </a:xfrm>
           <a:prstGeom prst="rect">
             <a:avLst/>
@@ -16054,8 +16054,8 @@
         </p:nvSpPr>
         <p:spPr>
           <a:xfrm>
-            <a:off x="658368" y="5555249"/>
-            <a:ext cx="310896" cy="245274"/>
+            <a:off x="658368" y="5254035"/>
+            <a:ext cx="310896" cy="223759"/>
           </a:xfrm>
           <a:prstGeom prst="rect">
             <a:avLst/>
@@ -16093,8 +16093,8 @@
         </p:nvSpPr>
         <p:spPr>
           <a:xfrm>
-            <a:off x="1014984" y="5555249"/>
-            <a:ext cx="1920240" cy="245274"/>
+            <a:off x="1014984" y="5254035"/>
+            <a:ext cx="1920240" cy="223759"/>
           </a:xfrm>
           <a:prstGeom prst="rect">
             <a:avLst/>
@@ -16132,8 +16132,8 @@
         </p:nvSpPr>
         <p:spPr>
           <a:xfrm>
-            <a:off x="3579876" y="5621473"/>
-            <a:ext cx="27168" cy="112826"/>
+            <a:off x="3579876" y="5314450"/>
+            <a:ext cx="27168" cy="102929"/>
           </a:xfrm>
           <a:prstGeom prst="rect">
             <a:avLst/>
@@ -16152,8 +16152,8 @@
         </p:nvSpPr>
         <p:spPr>
           <a:xfrm>
-            <a:off x="4206240" y="5555249"/>
-            <a:ext cx="777240" cy="245274"/>
+            <a:off x="4206240" y="5254035"/>
+            <a:ext cx="777240" cy="223759"/>
           </a:xfrm>
           <a:prstGeom prst="rect">
             <a:avLst/>
@@ -16191,8 +16191,8 @@
         </p:nvSpPr>
         <p:spPr>
           <a:xfrm>
-            <a:off x="4983480" y="5555249"/>
-            <a:ext cx="868680" cy="245274"/>
+            <a:off x="4983480" y="5254035"/>
+            <a:ext cx="868680" cy="223759"/>
           </a:xfrm>
           <a:prstGeom prst="rect">
             <a:avLst/>
@@ -16230,8 +16230,8 @@
         </p:nvSpPr>
         <p:spPr>
           <a:xfrm>
-            <a:off x="658368" y="5800523"/>
-            <a:ext cx="310896" cy="245274"/>
+            <a:off x="658368" y="5477794"/>
+            <a:ext cx="310896" cy="223759"/>
           </a:xfrm>
           <a:prstGeom prst="rect">
             <a:avLst/>
@@ -16269,8 +16269,8 @@
         </p:nvSpPr>
         <p:spPr>
           <a:xfrm>
-            <a:off x="1014984" y="5800523"/>
-            <a:ext cx="1920240" cy="245274"/>
+            <a:off x="1014984" y="5477794"/>
+            <a:ext cx="1920240" cy="223759"/>
           </a:xfrm>
           <a:prstGeom prst="rect">
             <a:avLst/>
@@ -16308,8 +16308,8 @@
         </p:nvSpPr>
         <p:spPr>
           <a:xfrm>
-            <a:off x="3579876" y="5866747"/>
-            <a:ext cx="22407" cy="112826"/>
+            <a:off x="3579876" y="5538209"/>
+            <a:ext cx="22407" cy="102929"/>
           </a:xfrm>
           <a:prstGeom prst="rect">
             <a:avLst/>
@@ -16328,8 +16328,8 @@
         </p:nvSpPr>
         <p:spPr>
           <a:xfrm>
-            <a:off x="4206240" y="5800523"/>
-            <a:ext cx="777240" cy="245274"/>
+            <a:off x="4206240" y="5477794"/>
+            <a:ext cx="777240" cy="223759"/>
           </a:xfrm>
           <a:prstGeom prst="rect">
             <a:avLst/>
@@ -16367,8 +16367,8 @@
         </p:nvSpPr>
         <p:spPr>
           <a:xfrm>
-            <a:off x="4983480" y="5800523"/>
-            <a:ext cx="868680" cy="245274"/>
+            <a:off x="4983480" y="5477794"/>
+            <a:ext cx="868680" cy="223759"/>
           </a:xfrm>
           <a:prstGeom prst="rect">
             <a:avLst/>
@@ -16406,8 +16406,8 @@
         </p:nvSpPr>
         <p:spPr>
           <a:xfrm>
-            <a:off x="658368" y="6045798"/>
-            <a:ext cx="310896" cy="245274"/>
+            <a:off x="658368" y="5701553"/>
+            <a:ext cx="310896" cy="223759"/>
           </a:xfrm>
           <a:prstGeom prst="rect">
             <a:avLst/>
@@ -16445,8 +16445,8 @@
         </p:nvSpPr>
         <p:spPr>
           <a:xfrm>
-            <a:off x="1014984" y="6045798"/>
-            <a:ext cx="1920240" cy="245274"/>
+            <a:off x="1014984" y="5701553"/>
+            <a:ext cx="1920240" cy="223759"/>
           </a:xfrm>
           <a:prstGeom prst="rect">
             <a:avLst/>
@@ -16484,8 +16484,8 @@
         </p:nvSpPr>
         <p:spPr>
           <a:xfrm>
-            <a:off x="3579876" y="6112022"/>
-            <a:ext cx="15551" cy="112826"/>
+            <a:off x="3579876" y="5761968"/>
+            <a:ext cx="15551" cy="102929"/>
           </a:xfrm>
           <a:prstGeom prst="rect">
             <a:avLst/>
@@ -16504,8 +16504,8 @@
         </p:nvSpPr>
         <p:spPr>
           <a:xfrm>
-            <a:off x="4206240" y="6045798"/>
-            <a:ext cx="777240" cy="245274"/>
+            <a:off x="4206240" y="5701553"/>
+            <a:ext cx="777240" cy="223759"/>
           </a:xfrm>
           <a:prstGeom prst="rect">
             <a:avLst/>
@@ -16543,8 +16543,8 @@
         </p:nvSpPr>
         <p:spPr>
           <a:xfrm>
-            <a:off x="4983480" y="6045798"/>
-            <a:ext cx="868680" cy="245274"/>
+            <a:off x="4983480" y="5701553"/>
+            <a:ext cx="868680" cy="223759"/>
           </a:xfrm>
           <a:prstGeom prst="rect">
             <a:avLst/>
@@ -16583,7 +16583,7 @@
         <p:spPr>
           <a:xfrm>
             <a:off x="6208776" y="2121408"/>
-            <a:ext cx="310896" cy="245274"/>
+            <a:ext cx="310896" cy="223759"/>
           </a:xfrm>
           <a:prstGeom prst="rect">
             <a:avLst/>
@@ -16622,7 +16622,7 @@
         <p:spPr>
           <a:xfrm>
             <a:off x="6565392" y="2121408"/>
-            <a:ext cx="1920240" cy="245274"/>
+            <a:ext cx="1920240" cy="223759"/>
           </a:xfrm>
           <a:prstGeom prst="rect">
             <a:avLst/>
@@ -16660,8 +16660,8 @@
         </p:nvSpPr>
         <p:spPr>
           <a:xfrm>
-            <a:off x="9126201" y="2187632"/>
-            <a:ext cx="12802" cy="112826"/>
+            <a:off x="9126201" y="2181823"/>
+            <a:ext cx="12802" cy="102929"/>
           </a:xfrm>
           <a:prstGeom prst="rect">
             <a:avLst/>
@@ -16681,7 +16681,7 @@
         <p:spPr>
           <a:xfrm>
             <a:off x="9756648" y="2121408"/>
-            <a:ext cx="777240" cy="245274"/>
+            <a:ext cx="777240" cy="223759"/>
           </a:xfrm>
           <a:prstGeom prst="rect">
             <a:avLst/>
@@ -16720,7 +16720,7 @@
         <p:spPr>
           <a:xfrm>
             <a:off x="10533888" y="2121408"/>
-            <a:ext cx="868680" cy="245274"/>
+            <a:ext cx="868680" cy="223759"/>
           </a:xfrm>
           <a:prstGeom prst="rect">
             <a:avLst/>
@@ -16758,8 +16758,8 @@
         </p:nvSpPr>
         <p:spPr>
           <a:xfrm>
-            <a:off x="6208776" y="2366682"/>
-            <a:ext cx="310896" cy="245274"/>
+            <a:off x="6208776" y="2345167"/>
+            <a:ext cx="310896" cy="223759"/>
           </a:xfrm>
           <a:prstGeom prst="rect">
             <a:avLst/>
@@ -16797,8 +16797,8 @@
         </p:nvSpPr>
         <p:spPr>
           <a:xfrm>
-            <a:off x="6565392" y="2366682"/>
-            <a:ext cx="1920240" cy="245274"/>
+            <a:off x="6565392" y="2345167"/>
+            <a:ext cx="1920240" cy="223759"/>
           </a:xfrm>
           <a:prstGeom prst="rect">
             <a:avLst/>
@@ -16836,8 +16836,8 @@
         </p:nvSpPr>
         <p:spPr>
           <a:xfrm>
-            <a:off x="9120717" y="2432906"/>
-            <a:ext cx="12802" cy="112826"/>
+            <a:off x="9120717" y="2405582"/>
+            <a:ext cx="12802" cy="102929"/>
           </a:xfrm>
           <a:prstGeom prst="rect">
             <a:avLst/>
@@ -16856,8 +16856,8 @@
         </p:nvSpPr>
         <p:spPr>
           <a:xfrm>
-            <a:off x="9756648" y="2366682"/>
-            <a:ext cx="777240" cy="245274"/>
+            <a:off x="9756648" y="2345167"/>
+            <a:ext cx="777240" cy="223759"/>
           </a:xfrm>
           <a:prstGeom prst="rect">
             <a:avLst/>
@@ -16895,8 +16895,8 @@
         </p:nvSpPr>
         <p:spPr>
           <a:xfrm>
-            <a:off x="10533888" y="2366682"/>
-            <a:ext cx="868680" cy="245274"/>
+            <a:off x="10533888" y="2345167"/>
+            <a:ext cx="868680" cy="223759"/>
           </a:xfrm>
           <a:prstGeom prst="rect">
             <a:avLst/>
@@ -16934,8 +16934,8 @@
         </p:nvSpPr>
         <p:spPr>
           <a:xfrm>
-            <a:off x="6208776" y="2611957"/>
-            <a:ext cx="310896" cy="245274"/>
+            <a:off x="6208776" y="2568926"/>
+            <a:ext cx="310896" cy="223759"/>
           </a:xfrm>
           <a:prstGeom prst="rect">
             <a:avLst/>
@@ -16973,8 +16973,8 @@
         </p:nvSpPr>
         <p:spPr>
           <a:xfrm>
-            <a:off x="6565392" y="2611957"/>
-            <a:ext cx="1920240" cy="245274"/>
+            <a:off x="6565392" y="2568926"/>
+            <a:ext cx="1920240" cy="223759"/>
           </a:xfrm>
           <a:prstGeom prst="rect">
             <a:avLst/>
@@ -17012,8 +17012,8 @@
         </p:nvSpPr>
         <p:spPr>
           <a:xfrm>
-            <a:off x="9107185" y="2678181"/>
-            <a:ext cx="23099" cy="112826"/>
+            <a:off x="9107185" y="2629341"/>
+            <a:ext cx="23099" cy="102929"/>
           </a:xfrm>
           <a:prstGeom prst="rect">
             <a:avLst/>
@@ -17032,8 +17032,8 @@
         </p:nvSpPr>
         <p:spPr>
           <a:xfrm>
-            <a:off x="9756648" y="2611957"/>
-            <a:ext cx="777240" cy="245274"/>
+            <a:off x="9756648" y="2568926"/>
+            <a:ext cx="777240" cy="223759"/>
           </a:xfrm>
           <a:prstGeom prst="rect">
             <a:avLst/>
@@ -17071,8 +17071,8 @@
         </p:nvSpPr>
         <p:spPr>
           <a:xfrm>
-            <a:off x="10533888" y="2611957"/>
-            <a:ext cx="868680" cy="245274"/>
+            <a:off x="10533888" y="2568926"/>
+            <a:ext cx="868680" cy="223759"/>
           </a:xfrm>
           <a:prstGeom prst="rect">
             <a:avLst/>
@@ -17110,8 +17110,8 @@
         </p:nvSpPr>
         <p:spPr>
           <a:xfrm>
-            <a:off x="6208776" y="2857231"/>
-            <a:ext cx="310896" cy="245274"/>
+            <a:off x="6208776" y="2792685"/>
+            <a:ext cx="310896" cy="223759"/>
           </a:xfrm>
           <a:prstGeom prst="rect">
             <a:avLst/>
@@ -17149,8 +17149,8 @@
         </p:nvSpPr>
         <p:spPr>
           <a:xfrm>
-            <a:off x="6565392" y="2857231"/>
-            <a:ext cx="1920240" cy="245274"/>
+            <a:off x="6565392" y="2792685"/>
+            <a:ext cx="1920240" cy="223759"/>
           </a:xfrm>
           <a:prstGeom prst="rect">
             <a:avLst/>
@@ -17188,8 +17188,8 @@
         </p:nvSpPr>
         <p:spPr>
           <a:xfrm>
-            <a:off x="9102703" y="2923455"/>
-            <a:ext cx="27581" cy="112826"/>
+            <a:off x="9102703" y="2853100"/>
+            <a:ext cx="27581" cy="102929"/>
           </a:xfrm>
           <a:prstGeom prst="rect">
             <a:avLst/>
@@ -17208,8 +17208,8 @@
         </p:nvSpPr>
         <p:spPr>
           <a:xfrm>
-            <a:off x="9756648" y="2857231"/>
-            <a:ext cx="777240" cy="245274"/>
+            <a:off x="9756648" y="2792685"/>
+            <a:ext cx="777240" cy="223759"/>
           </a:xfrm>
           <a:prstGeom prst="rect">
             <a:avLst/>
@@ -17247,8 +17247,8 @@
         </p:nvSpPr>
         <p:spPr>
           <a:xfrm>
-            <a:off x="10533888" y="2857231"/>
-            <a:ext cx="868680" cy="245274"/>
+            <a:off x="10533888" y="2792685"/>
+            <a:ext cx="868680" cy="223759"/>
           </a:xfrm>
           <a:prstGeom prst="rect">
             <a:avLst/>
@@ -17286,8 +17286,8 @@
         </p:nvSpPr>
         <p:spPr>
           <a:xfrm>
-            <a:off x="6208776" y="3102505"/>
-            <a:ext cx="310896" cy="245274"/>
+            <a:off x="6208776" y="3016444"/>
+            <a:ext cx="310896" cy="223759"/>
           </a:xfrm>
           <a:prstGeom prst="rect">
             <a:avLst/>
@@ -17325,8 +17325,8 @@
         </p:nvSpPr>
         <p:spPr>
           <a:xfrm>
-            <a:off x="6565392" y="3102505"/>
-            <a:ext cx="1920240" cy="245274"/>
+            <a:off x="6565392" y="3016444"/>
+            <a:ext cx="1920240" cy="223759"/>
           </a:xfrm>
           <a:prstGeom prst="rect">
             <a:avLst/>
@@ -17364,8 +17364,8 @@
         </p:nvSpPr>
         <p:spPr>
           <a:xfrm>
-            <a:off x="9095278" y="3168729"/>
-            <a:ext cx="35006" cy="112826"/>
+            <a:off x="9095278" y="3076859"/>
+            <a:ext cx="35006" cy="102929"/>
           </a:xfrm>
           <a:prstGeom prst="rect">
             <a:avLst/>
@@ -17384,8 +17384,8 @@
         </p:nvSpPr>
         <p:spPr>
           <a:xfrm>
-            <a:off x="9756648" y="3102505"/>
-            <a:ext cx="777240" cy="245274"/>
+            <a:off x="9756648" y="3016444"/>
+            <a:ext cx="777240" cy="223759"/>
           </a:xfrm>
           <a:prstGeom prst="rect">
             <a:avLst/>
@@ -17423,8 +17423,8 @@
         </p:nvSpPr>
         <p:spPr>
           <a:xfrm>
-            <a:off x="10533888" y="3102505"/>
-            <a:ext cx="868680" cy="245274"/>
+            <a:off x="10533888" y="3016444"/>
+            <a:ext cx="868680" cy="223759"/>
           </a:xfrm>
           <a:prstGeom prst="rect">
             <a:avLst/>
@@ -17462,8 +17462,8 @@
         </p:nvSpPr>
         <p:spPr>
           <a:xfrm>
-            <a:off x="6208776" y="3347780"/>
-            <a:ext cx="310896" cy="245274"/>
+            <a:off x="6208776" y="3240203"/>
+            <a:ext cx="310896" cy="223759"/>
           </a:xfrm>
           <a:prstGeom prst="rect">
             <a:avLst/>
@@ -17501,8 +17501,8 @@
         </p:nvSpPr>
         <p:spPr>
           <a:xfrm>
-            <a:off x="6565392" y="3347780"/>
-            <a:ext cx="1920240" cy="245274"/>
+            <a:off x="6565392" y="3240203"/>
+            <a:ext cx="1920240" cy="223759"/>
           </a:xfrm>
           <a:prstGeom prst="rect">
             <a:avLst/>
@@ -17540,8 +17540,8 @@
         </p:nvSpPr>
         <p:spPr>
           <a:xfrm>
-            <a:off x="9088719" y="3414004"/>
-            <a:ext cx="41565" cy="112826"/>
+            <a:off x="9088719" y="3300618"/>
+            <a:ext cx="41565" cy="102929"/>
           </a:xfrm>
           <a:prstGeom prst="rect">
             <a:avLst/>
@@ -17560,8 +17560,8 @@
         </p:nvSpPr>
         <p:spPr>
           <a:xfrm>
-            <a:off x="9756648" y="3347780"/>
-            <a:ext cx="777240" cy="245274"/>
+            <a:off x="9756648" y="3240203"/>
+            <a:ext cx="777240" cy="223759"/>
           </a:xfrm>
           <a:prstGeom prst="rect">
             <a:avLst/>
@@ -17599,8 +17599,8 @@
         </p:nvSpPr>
         <p:spPr>
           <a:xfrm>
-            <a:off x="10533888" y="3347780"/>
-            <a:ext cx="868680" cy="245274"/>
+            <a:off x="10533888" y="3240203"/>
+            <a:ext cx="868680" cy="223759"/>
           </a:xfrm>
           <a:prstGeom prst="rect">
             <a:avLst/>
@@ -17638,8 +17638,8 @@
         </p:nvSpPr>
         <p:spPr>
           <a:xfrm>
-            <a:off x="6208776" y="3593054"/>
-            <a:ext cx="310896" cy="245274"/>
+            <a:off x="6208776" y="3463962"/>
+            <a:ext cx="310896" cy="223759"/>
           </a:xfrm>
           <a:prstGeom prst="rect">
             <a:avLst/>
@@ -17677,8 +17677,8 @@
         </p:nvSpPr>
         <p:spPr>
           <a:xfrm>
-            <a:off x="6565392" y="3593054"/>
-            <a:ext cx="1920240" cy="245274"/>
+            <a:off x="6565392" y="3463962"/>
+            <a:ext cx="1920240" cy="223759"/>
           </a:xfrm>
           <a:prstGeom prst="rect">
             <a:avLst/>
@@ -17716,8 +17716,8 @@
         </p:nvSpPr>
         <p:spPr>
           <a:xfrm>
-            <a:off x="9082739" y="3659278"/>
-            <a:ext cx="47545" cy="112826"/>
+            <a:off x="9082739" y="3524377"/>
+            <a:ext cx="47545" cy="102929"/>
           </a:xfrm>
           <a:prstGeom prst="rect">
             <a:avLst/>
@@ -17736,8 +17736,8 @@
         </p:nvSpPr>
         <p:spPr>
           <a:xfrm>
-            <a:off x="9756648" y="3593054"/>
-            <a:ext cx="777240" cy="245274"/>
+            <a:off x="9756648" y="3463962"/>
+            <a:ext cx="777240" cy="223759"/>
           </a:xfrm>
           <a:prstGeom prst="rect">
             <a:avLst/>
@@ -17775,8 +17775,8 @@
         </p:nvSpPr>
         <p:spPr>
           <a:xfrm>
-            <a:off x="10533888" y="3593054"/>
-            <a:ext cx="868680" cy="245274"/>
+            <a:off x="10533888" y="3463962"/>
+            <a:ext cx="868680" cy="223759"/>
           </a:xfrm>
           <a:prstGeom prst="rect">
             <a:avLst/>
@@ -17814,8 +17814,8 @@
         </p:nvSpPr>
         <p:spPr>
           <a:xfrm>
-            <a:off x="6208776" y="3838328"/>
-            <a:ext cx="310896" cy="245274"/>
+            <a:off x="6208776" y="3687721"/>
+            <a:ext cx="310896" cy="223759"/>
           </a:xfrm>
           <a:prstGeom prst="rect">
             <a:avLst/>
@@ -17853,8 +17853,8 @@
         </p:nvSpPr>
         <p:spPr>
           <a:xfrm>
-            <a:off x="6565392" y="3838328"/>
-            <a:ext cx="1920240" cy="245274"/>
+            <a:off x="6565392" y="3687721"/>
+            <a:ext cx="1920240" cy="223759"/>
           </a:xfrm>
           <a:prstGeom prst="rect">
             <a:avLst/>
@@ -17892,8 +17892,8 @@
         </p:nvSpPr>
         <p:spPr>
           <a:xfrm>
-            <a:off x="9079991" y="3904553"/>
-            <a:ext cx="50293" cy="112826"/>
+            <a:off x="9079991" y="3748136"/>
+            <a:ext cx="50293" cy="102929"/>
           </a:xfrm>
           <a:prstGeom prst="rect">
             <a:avLst/>
@@ -17912,8 +17912,8 @@
         </p:nvSpPr>
         <p:spPr>
           <a:xfrm>
-            <a:off x="9756648" y="3838328"/>
-            <a:ext cx="777240" cy="245274"/>
+            <a:off x="9756648" y="3687721"/>
+            <a:ext cx="777240" cy="223759"/>
           </a:xfrm>
           <a:prstGeom prst="rect">
             <a:avLst/>
@@ -17951,8 +17951,8 @@
         </p:nvSpPr>
         <p:spPr>
           <a:xfrm>
-            <a:off x="10533888" y="3838328"/>
-            <a:ext cx="868680" cy="245274"/>
+            <a:off x="10533888" y="3687721"/>
+            <a:ext cx="868680" cy="223759"/>
           </a:xfrm>
           <a:prstGeom prst="rect">
             <a:avLst/>
@@ -17990,8 +17990,8 @@
         </p:nvSpPr>
         <p:spPr>
           <a:xfrm>
-            <a:off x="6208776" y="4083603"/>
-            <a:ext cx="310896" cy="245274"/>
+            <a:off x="6208776" y="3911480"/>
+            <a:ext cx="310896" cy="223759"/>
           </a:xfrm>
           <a:prstGeom prst="rect">
             <a:avLst/>
@@ -18029,8 +18029,8 @@
         </p:nvSpPr>
         <p:spPr>
           <a:xfrm>
-            <a:off x="6565392" y="4083603"/>
-            <a:ext cx="1920240" cy="245274"/>
+            <a:off x="6565392" y="3911480"/>
+            <a:ext cx="1920240" cy="223759"/>
           </a:xfrm>
           <a:prstGeom prst="rect">
             <a:avLst/>
@@ -18068,8 +18068,8 @@
         </p:nvSpPr>
         <p:spPr>
           <a:xfrm>
-            <a:off x="9064780" y="4149827"/>
-            <a:ext cx="65504" cy="112826"/>
+            <a:off x="9064780" y="3971895"/>
+            <a:ext cx="65504" cy="102929"/>
           </a:xfrm>
           <a:prstGeom prst="rect">
             <a:avLst/>
@@ -18088,8 +18088,8 @@
         </p:nvSpPr>
         <p:spPr>
           <a:xfrm>
-            <a:off x="9756648" y="4083603"/>
-            <a:ext cx="777240" cy="245274"/>
+            <a:off x="9756648" y="3911480"/>
+            <a:ext cx="777240" cy="223759"/>
           </a:xfrm>
           <a:prstGeom prst="rect">
             <a:avLst/>
@@ -18127,8 +18127,8 @@
         </p:nvSpPr>
         <p:spPr>
           <a:xfrm>
-            <a:off x="10533888" y="4083603"/>
-            <a:ext cx="868680" cy="245274"/>
+            <a:off x="10533888" y="3911480"/>
+            <a:ext cx="868680" cy="223759"/>
           </a:xfrm>
           <a:prstGeom prst="rect">
             <a:avLst/>
@@ -18166,8 +18166,8 @@
         </p:nvSpPr>
         <p:spPr>
           <a:xfrm>
-            <a:off x="6208776" y="4328877"/>
-            <a:ext cx="310896" cy="245274"/>
+            <a:off x="6208776" y="4135240"/>
+            <a:ext cx="310896" cy="223759"/>
           </a:xfrm>
           <a:prstGeom prst="rect">
             <a:avLst/>
@@ -18205,8 +18205,8 @@
         </p:nvSpPr>
         <p:spPr>
           <a:xfrm>
-            <a:off x="6565392" y="4328877"/>
-            <a:ext cx="1920240" cy="245274"/>
+            <a:off x="6565392" y="4135240"/>
+            <a:ext cx="1920240" cy="223759"/>
           </a:xfrm>
           <a:prstGeom prst="rect">
             <a:avLst/>
@@ -18244,8 +18244,8 @@
         </p:nvSpPr>
         <p:spPr>
           <a:xfrm>
-            <a:off x="9009622" y="4395101"/>
-            <a:ext cx="120662" cy="112826"/>
+            <a:off x="9009622" y="4195654"/>
+            <a:ext cx="120662" cy="102929"/>
           </a:xfrm>
           <a:prstGeom prst="rect">
             <a:avLst/>
@@ -18264,8 +18264,8 @@
         </p:nvSpPr>
         <p:spPr>
           <a:xfrm>
-            <a:off x="9756648" y="4328877"/>
-            <a:ext cx="777240" cy="245274"/>
+            <a:off x="9756648" y="4135240"/>
+            <a:ext cx="777240" cy="223759"/>
           </a:xfrm>
           <a:prstGeom prst="rect">
             <a:avLst/>
@@ -18303,8 +18303,8 @@
         </p:nvSpPr>
         <p:spPr>
           <a:xfrm>
-            <a:off x="10533888" y="4328877"/>
-            <a:ext cx="868680" cy="245274"/>
+            <a:off x="10533888" y="4135240"/>
+            <a:ext cx="868680" cy="223759"/>
           </a:xfrm>
           <a:prstGeom prst="rect">
             <a:avLst/>
@@ -18342,8 +18342,8 @@
         </p:nvSpPr>
         <p:spPr>
           <a:xfrm>
-            <a:off x="6208776" y="4574152"/>
-            <a:ext cx="310896" cy="245274"/>
+            <a:off x="6208776" y="4358999"/>
+            <a:ext cx="310896" cy="223759"/>
           </a:xfrm>
           <a:prstGeom prst="rect">
             <a:avLst/>
@@ -18381,8 +18381,8 @@
         </p:nvSpPr>
         <p:spPr>
           <a:xfrm>
-            <a:off x="6565392" y="4574152"/>
-            <a:ext cx="1920240" cy="245274"/>
+            <a:off x="6565392" y="4358999"/>
+            <a:ext cx="1920240" cy="223759"/>
           </a:xfrm>
           <a:prstGeom prst="rect">
             <a:avLst/>
@@ -18420,8 +18420,8 @@
         </p:nvSpPr>
         <p:spPr>
           <a:xfrm>
-            <a:off x="9009094" y="4640376"/>
-            <a:ext cx="121190" cy="112826"/>
+            <a:off x="9009094" y="4419414"/>
+            <a:ext cx="121190" cy="102929"/>
           </a:xfrm>
           <a:prstGeom prst="rect">
             <a:avLst/>
@@ -18440,8 +18440,8 @@
         </p:nvSpPr>
         <p:spPr>
           <a:xfrm>
-            <a:off x="9756648" y="4574152"/>
-            <a:ext cx="777240" cy="245274"/>
+            <a:off x="9756648" y="4358999"/>
+            <a:ext cx="777240" cy="223759"/>
           </a:xfrm>
           <a:prstGeom prst="rect">
             <a:avLst/>
@@ -18479,8 +18479,8 @@
         </p:nvSpPr>
         <p:spPr>
           <a:xfrm>
-            <a:off x="10533888" y="4574152"/>
-            <a:ext cx="868680" cy="245274"/>
+            <a:off x="10533888" y="4358999"/>
+            <a:ext cx="868680" cy="223759"/>
           </a:xfrm>
           <a:prstGeom prst="rect">
             <a:avLst/>
@@ -18518,8 +18518,8 @@
         </p:nvSpPr>
         <p:spPr>
           <a:xfrm>
-            <a:off x="6208776" y="4819426"/>
-            <a:ext cx="310896" cy="245274"/>
+            <a:off x="6208776" y="4582758"/>
+            <a:ext cx="310896" cy="223759"/>
           </a:xfrm>
           <a:prstGeom prst="rect">
             <a:avLst/>
@@ -18557,8 +18557,8 @@
         </p:nvSpPr>
         <p:spPr>
           <a:xfrm>
-            <a:off x="6565392" y="4819426"/>
-            <a:ext cx="1920240" cy="245274"/>
+            <a:off x="6565392" y="4582758"/>
+            <a:ext cx="1920240" cy="223759"/>
           </a:xfrm>
           <a:prstGeom prst="rect">
             <a:avLst/>
@@ -18596,8 +18596,8 @@
         </p:nvSpPr>
         <p:spPr>
           <a:xfrm>
-            <a:off x="8991431" y="4885650"/>
-            <a:ext cx="138853" cy="112826"/>
+            <a:off x="8991431" y="4643173"/>
+            <a:ext cx="138853" cy="102929"/>
           </a:xfrm>
           <a:prstGeom prst="rect">
             <a:avLst/>
@@ -18616,8 +18616,8 @@
         </p:nvSpPr>
         <p:spPr>
           <a:xfrm>
-            <a:off x="9756648" y="4819426"/>
-            <a:ext cx="777240" cy="245274"/>
+            <a:off x="9756648" y="4582758"/>
+            <a:ext cx="777240" cy="223759"/>
           </a:xfrm>
           <a:prstGeom prst="rect">
             <a:avLst/>
@@ -18655,8 +18655,8 @@
         </p:nvSpPr>
         <p:spPr>
           <a:xfrm>
-            <a:off x="10533888" y="4819426"/>
-            <a:ext cx="868680" cy="245274"/>
+            <a:off x="10533888" y="4582758"/>
+            <a:ext cx="868680" cy="223759"/>
           </a:xfrm>
           <a:prstGeom prst="rect">
             <a:avLst/>
@@ -18694,8 +18694,8 @@
         </p:nvSpPr>
         <p:spPr>
           <a:xfrm>
-            <a:off x="6208776" y="5064700"/>
-            <a:ext cx="310896" cy="245274"/>
+            <a:off x="6208776" y="4806517"/>
+            <a:ext cx="310896" cy="223759"/>
           </a:xfrm>
           <a:prstGeom prst="rect">
             <a:avLst/>
@@ -18733,8 +18733,8 @@
         </p:nvSpPr>
         <p:spPr>
           <a:xfrm>
-            <a:off x="6565392" y="5064700"/>
-            <a:ext cx="1920240" cy="245274"/>
+            <a:off x="6565392" y="4806517"/>
+            <a:ext cx="1920240" cy="223759"/>
           </a:xfrm>
           <a:prstGeom prst="rect">
             <a:avLst/>
@@ -18772,8 +18772,8 @@
         </p:nvSpPr>
         <p:spPr>
           <a:xfrm>
-            <a:off x="8952555" y="5130924"/>
-            <a:ext cx="177729" cy="112826"/>
+            <a:off x="8952555" y="4866932"/>
+            <a:ext cx="177729" cy="102929"/>
           </a:xfrm>
           <a:prstGeom prst="rect">
             <a:avLst/>
@@ -18792,8 +18792,8 @@
         </p:nvSpPr>
         <p:spPr>
           <a:xfrm>
-            <a:off x="9756648" y="5064700"/>
-            <a:ext cx="777240" cy="245274"/>
+            <a:off x="9756648" y="4806517"/>
+            <a:ext cx="777240" cy="223759"/>
           </a:xfrm>
           <a:prstGeom prst="rect">
             <a:avLst/>
@@ -18831,8 +18831,8 @@
         </p:nvSpPr>
         <p:spPr>
           <a:xfrm>
-            <a:off x="10533888" y="5064700"/>
-            <a:ext cx="868680" cy="245274"/>
+            <a:off x="10533888" y="4806517"/>
+            <a:ext cx="868680" cy="223759"/>
           </a:xfrm>
           <a:prstGeom prst="rect">
             <a:avLst/>
@@ -18870,8 +18870,8 @@
         </p:nvSpPr>
         <p:spPr>
           <a:xfrm>
-            <a:off x="11457432" y="5110420"/>
-            <a:ext cx="54864" cy="153834"/>
+            <a:off x="11457432" y="4852237"/>
+            <a:ext cx="54864" cy="132319"/>
           </a:xfrm>
           <a:prstGeom prst="rect">
             <a:avLst/>
@@ -18890,8 +18890,8 @@
         </p:nvSpPr>
         <p:spPr>
           <a:xfrm>
-            <a:off x="6208776" y="5309975"/>
-            <a:ext cx="310896" cy="245274"/>
+            <a:off x="6208776" y="5030276"/>
+            <a:ext cx="310896" cy="223759"/>
           </a:xfrm>
           <a:prstGeom prst="rect">
             <a:avLst/>
@@ -18929,8 +18929,8 @@
         </p:nvSpPr>
         <p:spPr>
           <a:xfrm>
-            <a:off x="6565392" y="5309975"/>
-            <a:ext cx="1920240" cy="245274"/>
+            <a:off x="6565392" y="5030276"/>
+            <a:ext cx="1920240" cy="223759"/>
           </a:xfrm>
           <a:prstGeom prst="rect">
             <a:avLst/>
@@ -18968,8 +18968,8 @@
         </p:nvSpPr>
         <p:spPr>
           <a:xfrm>
-            <a:off x="8941928" y="5376199"/>
-            <a:ext cx="188356" cy="112826"/>
+            <a:off x="8941928" y="5090691"/>
+            <a:ext cx="188356" cy="102929"/>
           </a:xfrm>
           <a:prstGeom prst="rect">
             <a:avLst/>
@@ -18988,8 +18988,8 @@
         </p:nvSpPr>
         <p:spPr>
           <a:xfrm>
-            <a:off x="9756648" y="5309975"/>
-            <a:ext cx="777240" cy="245274"/>
+            <a:off x="9756648" y="5030276"/>
+            <a:ext cx="777240" cy="223759"/>
           </a:xfrm>
           <a:prstGeom prst="rect">
             <a:avLst/>
@@ -19027,8 +19027,8 @@
         </p:nvSpPr>
         <p:spPr>
           <a:xfrm>
-            <a:off x="10533888" y="5309975"/>
-            <a:ext cx="868680" cy="245274"/>
+            <a:off x="10533888" y="5030276"/>
+            <a:ext cx="868680" cy="223759"/>
           </a:xfrm>
           <a:prstGeom prst="rect">
             <a:avLst/>
@@ -19066,8 +19066,8 @@
         </p:nvSpPr>
         <p:spPr>
           <a:xfrm>
-            <a:off x="11457432" y="5355695"/>
-            <a:ext cx="54864" cy="153834"/>
+            <a:off x="11457432" y="5075996"/>
+            <a:ext cx="54864" cy="132319"/>
           </a:xfrm>
           <a:prstGeom prst="rect">
             <a:avLst/>
@@ -19086,8 +19086,8 @@
         </p:nvSpPr>
         <p:spPr>
           <a:xfrm>
-            <a:off x="6208776" y="5555249"/>
-            <a:ext cx="310896" cy="245274"/>
+            <a:off x="6208776" y="5254035"/>
+            <a:ext cx="310896" cy="223759"/>
           </a:xfrm>
           <a:prstGeom prst="rect">
             <a:avLst/>
@@ -19125,8 +19125,8 @@
         </p:nvSpPr>
         <p:spPr>
           <a:xfrm>
-            <a:off x="6565392" y="5555249"/>
-            <a:ext cx="1920240" cy="245274"/>
+            <a:off x="6565392" y="5254035"/>
+            <a:ext cx="1920240" cy="223759"/>
           </a:xfrm>
           <a:prstGeom prst="rect">
             <a:avLst/>
@@ -19164,8 +19164,8 @@
         </p:nvSpPr>
         <p:spPr>
           <a:xfrm>
-            <a:off x="8891687" y="5621473"/>
-            <a:ext cx="238597" cy="112826"/>
+            <a:off x="8891687" y="5314450"/>
+            <a:ext cx="238597" cy="102929"/>
           </a:xfrm>
           <a:prstGeom prst="rect">
             <a:avLst/>
@@ -19184,8 +19184,8 @@
         </p:nvSpPr>
         <p:spPr>
           <a:xfrm>
-            <a:off x="9756648" y="5555249"/>
-            <a:ext cx="777240" cy="245274"/>
+            <a:off x="9756648" y="5254035"/>
+            <a:ext cx="777240" cy="223759"/>
           </a:xfrm>
           <a:prstGeom prst="rect">
             <a:avLst/>
@@ -19223,8 +19223,8 @@
         </p:nvSpPr>
         <p:spPr>
           <a:xfrm>
-            <a:off x="10533888" y="5555249"/>
-            <a:ext cx="868680" cy="245274"/>
+            <a:off x="10533888" y="5254035"/>
+            <a:ext cx="868680" cy="223759"/>
           </a:xfrm>
           <a:prstGeom prst="rect">
             <a:avLst/>
@@ -19262,8 +19262,8 @@
         </p:nvSpPr>
         <p:spPr>
           <a:xfrm>
-            <a:off x="6208776" y="5800523"/>
-            <a:ext cx="310896" cy="245274"/>
+            <a:off x="6208776" y="5477794"/>
+            <a:ext cx="310896" cy="223759"/>
           </a:xfrm>
           <a:prstGeom prst="rect">
             <a:avLst/>
@@ -19301,8 +19301,8 @@
         </p:nvSpPr>
         <p:spPr>
           <a:xfrm>
-            <a:off x="6565392" y="5800523"/>
-            <a:ext cx="1920240" cy="245274"/>
+            <a:off x="6565392" y="5477794"/>
+            <a:ext cx="1920240" cy="223759"/>
           </a:xfrm>
           <a:prstGeom prst="rect">
             <a:avLst/>
@@ -19340,8 +19340,8 @@
         </p:nvSpPr>
         <p:spPr>
           <a:xfrm>
-            <a:off x="8857921" y="5866747"/>
-            <a:ext cx="272363" cy="112826"/>
+            <a:off x="8857921" y="5538209"/>
+            <a:ext cx="272363" cy="102929"/>
           </a:xfrm>
           <a:prstGeom prst="rect">
             <a:avLst/>
@@ -19360,8 +19360,8 @@
         </p:nvSpPr>
         <p:spPr>
           <a:xfrm>
-            <a:off x="9756648" y="5800523"/>
-            <a:ext cx="777240" cy="245274"/>
+            <a:off x="9756648" y="5477794"/>
+            <a:ext cx="777240" cy="223759"/>
           </a:xfrm>
           <a:prstGeom prst="rect">
             <a:avLst/>
@@ -19399,8 +19399,8 @@
         </p:nvSpPr>
         <p:spPr>
           <a:xfrm>
-            <a:off x="10533888" y="5800523"/>
-            <a:ext cx="868680" cy="245274"/>
+            <a:off x="10533888" y="5477794"/>
+            <a:ext cx="868680" cy="223759"/>
           </a:xfrm>
           <a:prstGeom prst="rect">
             <a:avLst/>
@@ -19438,8 +19438,8 @@
         </p:nvSpPr>
         <p:spPr>
           <a:xfrm>
-            <a:off x="11457432" y="5846243"/>
-            <a:ext cx="54864" cy="153834"/>
+            <a:off x="11457432" y="5523514"/>
+            <a:ext cx="54864" cy="132319"/>
           </a:xfrm>
           <a:prstGeom prst="rect">
             <a:avLst/>
@@ -19459,7 +19459,7 @@
         <p:spPr>
           <a:xfrm>
             <a:off x="3574390" y="2121408"/>
-            <a:ext cx="10973" cy="4169664"/>
+            <a:ext cx="10973" cy="3803904"/>
           </a:xfrm>
           <a:prstGeom prst="rect">
             <a:avLst/>
@@ -19479,7 +19479,7 @@
         <p:spPr>
           <a:xfrm>
             <a:off x="9124798" y="2121408"/>
-            <a:ext cx="10973" cy="4169664"/>
+            <a:ext cx="10973" cy="3803904"/>
           </a:xfrm>
           <a:prstGeom prst="rect">
             <a:avLst/>
@@ -19499,7 +19499,7 @@
         <p:spPr>
           <a:xfrm>
             <a:off x="6085332" y="2121408"/>
-            <a:ext cx="10973" cy="4169664"/>
+            <a:ext cx="10973" cy="3803904"/>
           </a:xfrm>
           <a:prstGeom prst="rect">
             <a:avLst/>
@@ -19509,6 +19509,65 @@
           </a:solidFill>
           <a:ln/>
         </p:spPr>
+      </p:sp>
+      <p:sp>
+        <p:nvSpPr>
+          <p:cNvPr id="190" name="Shape 187"/>
+          <p:cNvSpPr/>
+          <p:nvPr/>
+        </p:nvSpPr>
+        <p:spPr>
+          <a:xfrm>
+            <a:off x="457200" y="6126480"/>
+            <a:ext cx="11274552" cy="371856"/>
+          </a:xfrm>
+          <a:prstGeom prst="rect">
+            <a:avLst/>
+          </a:prstGeom>
+          <a:solidFill>
+            <a:srgbClr val="E6F6EE"/>
+          </a:solidFill>
+          <a:ln/>
+        </p:spPr>
+      </p:sp>
+      <p:sp>
+        <p:nvSpPr>
+          <p:cNvPr id="191" name="Text 188"/>
+          <p:cNvSpPr txBox="1"/>
+          <p:nvPr/>
+        </p:nvSpPr>
+        <p:spPr>
+          <a:xfrm>
+            <a:off x="658368" y="6144768"/>
+            <a:ext cx="10927080" cy="335280"/>
+          </a:xfrm>
+          <a:prstGeom prst="rect">
+            <a:avLst/>
+          </a:prstGeom>
+          <a:noFill/>
+          <a:ln/>
+        </p:spPr>
+        <p:txBody>
+          <a:bodyPr wrap="square" lIns="0" tIns="0" rIns="0" bIns="0" rtlCol="0" anchor="ctr"/>
+          <a:lstStyle/>
+          <a:p>
+            <a:pPr indent="0" marL="0">
+              <a:buNone/>
+            </a:pPr>
+            <a:r>
+              <a:rPr lang="en-US" sz="1600" b="1" dirty="0">
+                <a:solidFill>
+                  <a:srgbClr val="0B7A4A"/>
+                </a:solidFill>
+                <a:latin typeface="Inter" pitchFamily="34" charset="0"/>
+                <a:ea typeface="Inter" pitchFamily="34" charset="-122"/>
+                <a:cs typeface="Inter" pitchFamily="34" charset="-120"/>
+              </a:rPr>
+              <a:t>17 of 33 stores grew.</a:t>
+            </a:r>
+            <a:endParaRPr lang="en-US" sz="1600" dirty="0"/>
+          </a:p>
+        </p:txBody>
       </p:sp>
     </p:spTree>
   </p:cSld>
@@ -28330,7 +28389,7 @@
         <p:spPr>
           <a:xfrm>
             <a:off x="457200" y="1207008"/>
-            <a:ext cx="11274552" cy="5148072"/>
+            <a:ext cx="11274552" cy="4782312"/>
           </a:xfrm>
           <a:prstGeom prst="rect">
             <a:avLst/>
@@ -28663,7 +28722,7 @@
         <p:spPr>
           <a:xfrm>
             <a:off x="658368" y="2121408"/>
-            <a:ext cx="310896" cy="245274"/>
+            <a:ext cx="310896" cy="223759"/>
           </a:xfrm>
           <a:prstGeom prst="rect">
             <a:avLst/>
@@ -28702,7 +28761,7 @@
         <p:spPr>
           <a:xfrm>
             <a:off x="1014984" y="2121408"/>
-            <a:ext cx="1920240" cy="245274"/>
+            <a:ext cx="1920240" cy="223759"/>
           </a:xfrm>
           <a:prstGeom prst="rect">
             <a:avLst/>
@@ -28740,8 +28799,8 @@
         </p:nvSpPr>
         <p:spPr>
           <a:xfrm>
-            <a:off x="3579876" y="2187632"/>
-            <a:ext cx="571500" cy="112826"/>
+            <a:off x="3579876" y="2181823"/>
+            <a:ext cx="571500" cy="102929"/>
           </a:xfrm>
           <a:prstGeom prst="rect">
             <a:avLst/>
@@ -28761,7 +28820,7 @@
         <p:spPr>
           <a:xfrm>
             <a:off x="4206240" y="2121408"/>
-            <a:ext cx="777240" cy="245274"/>
+            <a:ext cx="777240" cy="223759"/>
           </a:xfrm>
           <a:prstGeom prst="rect">
             <a:avLst/>
@@ -28800,7 +28859,7 @@
         <p:spPr>
           <a:xfrm>
             <a:off x="4983480" y="2121408"/>
-            <a:ext cx="868680" cy="245274"/>
+            <a:ext cx="868680" cy="223759"/>
           </a:xfrm>
           <a:prstGeom prst="rect">
             <a:avLst/>
@@ -28838,8 +28897,8 @@
         </p:nvSpPr>
         <p:spPr>
           <a:xfrm>
-            <a:off x="658368" y="2366682"/>
-            <a:ext cx="310896" cy="245274"/>
+            <a:off x="658368" y="2345167"/>
+            <a:ext cx="310896" cy="223759"/>
           </a:xfrm>
           <a:prstGeom prst="rect">
             <a:avLst/>
@@ -28877,8 +28936,8 @@
         </p:nvSpPr>
         <p:spPr>
           <a:xfrm>
-            <a:off x="1014984" y="2366682"/>
-            <a:ext cx="1920240" cy="245274"/>
+            <a:off x="1014984" y="2345167"/>
+            <a:ext cx="1920240" cy="223759"/>
           </a:xfrm>
           <a:prstGeom prst="rect">
             <a:avLst/>
@@ -28916,8 +28975,8 @@
         </p:nvSpPr>
         <p:spPr>
           <a:xfrm>
-            <a:off x="3579876" y="2432906"/>
-            <a:ext cx="549630" cy="112826"/>
+            <a:off x="3579876" y="2405582"/>
+            <a:ext cx="549630" cy="102929"/>
           </a:xfrm>
           <a:prstGeom prst="rect">
             <a:avLst/>
@@ -28936,8 +28995,8 @@
         </p:nvSpPr>
         <p:spPr>
           <a:xfrm>
-            <a:off x="4206240" y="2366682"/>
-            <a:ext cx="777240" cy="245274"/>
+            <a:off x="4206240" y="2345167"/>
+            <a:ext cx="777240" cy="223759"/>
           </a:xfrm>
           <a:prstGeom prst="rect">
             <a:avLst/>
@@ -28975,8 +29034,8 @@
         </p:nvSpPr>
         <p:spPr>
           <a:xfrm>
-            <a:off x="4983480" y="2366682"/>
-            <a:ext cx="868680" cy="245274"/>
+            <a:off x="4983480" y="2345167"/>
+            <a:ext cx="868680" cy="223759"/>
           </a:xfrm>
           <a:prstGeom prst="rect">
             <a:avLst/>
@@ -29014,8 +29073,8 @@
         </p:nvSpPr>
         <p:spPr>
           <a:xfrm>
-            <a:off x="658368" y="2611957"/>
-            <a:ext cx="310896" cy="245274"/>
+            <a:off x="658368" y="2568926"/>
+            <a:ext cx="310896" cy="223759"/>
           </a:xfrm>
           <a:prstGeom prst="rect">
             <a:avLst/>
@@ -29053,8 +29112,8 @@
         </p:nvSpPr>
         <p:spPr>
           <a:xfrm>
-            <a:off x="1014984" y="2611957"/>
-            <a:ext cx="1920240" cy="245274"/>
+            <a:off x="1014984" y="2568926"/>
+            <a:ext cx="1920240" cy="223759"/>
           </a:xfrm>
           <a:prstGeom prst="rect">
             <a:avLst/>
@@ -29092,8 +29151,8 @@
         </p:nvSpPr>
         <p:spPr>
           <a:xfrm>
-            <a:off x="3579876" y="2678181"/>
-            <a:ext cx="300417" cy="112826"/>
+            <a:off x="3579876" y="2629341"/>
+            <a:ext cx="300417" cy="102929"/>
           </a:xfrm>
           <a:prstGeom prst="rect">
             <a:avLst/>
@@ -29112,8 +29171,8 @@
         </p:nvSpPr>
         <p:spPr>
           <a:xfrm>
-            <a:off x="4206240" y="2611957"/>
-            <a:ext cx="777240" cy="245274"/>
+            <a:off x="4206240" y="2568926"/>
+            <a:ext cx="777240" cy="223759"/>
           </a:xfrm>
           <a:prstGeom prst="rect">
             <a:avLst/>
@@ -29151,8 +29210,8 @@
         </p:nvSpPr>
         <p:spPr>
           <a:xfrm>
-            <a:off x="4983480" y="2611957"/>
-            <a:ext cx="868680" cy="245274"/>
+            <a:off x="4983480" y="2568926"/>
+            <a:ext cx="868680" cy="223759"/>
           </a:xfrm>
           <a:prstGeom prst="rect">
             <a:avLst/>
@@ -29190,8 +29249,8 @@
         </p:nvSpPr>
         <p:spPr>
           <a:xfrm>
-            <a:off x="658368" y="2857231"/>
-            <a:ext cx="310896" cy="245274"/>
+            <a:off x="658368" y="2792685"/>
+            <a:ext cx="310896" cy="223759"/>
           </a:xfrm>
           <a:prstGeom prst="rect">
             <a:avLst/>
@@ -29229,8 +29288,8 @@
         </p:nvSpPr>
         <p:spPr>
           <a:xfrm>
-            <a:off x="1014984" y="2857231"/>
-            <a:ext cx="1920240" cy="245274"/>
+            <a:off x="1014984" y="2792685"/>
+            <a:ext cx="1920240" cy="223759"/>
           </a:xfrm>
           <a:prstGeom prst="rect">
             <a:avLst/>
@@ -29268,8 +29327,8 @@
         </p:nvSpPr>
         <p:spPr>
           <a:xfrm>
-            <a:off x="3579876" y="2923455"/>
-            <a:ext cx="246220" cy="112826"/>
+            <a:off x="3579876" y="2853100"/>
+            <a:ext cx="246220" cy="102929"/>
           </a:xfrm>
           <a:prstGeom prst="rect">
             <a:avLst/>
@@ -29288,8 +29347,8 @@
         </p:nvSpPr>
         <p:spPr>
           <a:xfrm>
-            <a:off x="4206240" y="2857231"/>
-            <a:ext cx="777240" cy="245274"/>
+            <a:off x="4206240" y="2792685"/>
+            <a:ext cx="777240" cy="223759"/>
           </a:xfrm>
           <a:prstGeom prst="rect">
             <a:avLst/>
@@ -29327,8 +29386,8 @@
         </p:nvSpPr>
         <p:spPr>
           <a:xfrm>
-            <a:off x="4983480" y="2857231"/>
-            <a:ext cx="868680" cy="245274"/>
+            <a:off x="4983480" y="2792685"/>
+            <a:ext cx="868680" cy="223759"/>
           </a:xfrm>
           <a:prstGeom prst="rect">
             <a:avLst/>
@@ -29366,8 +29425,8 @@
         </p:nvSpPr>
         <p:spPr>
           <a:xfrm>
-            <a:off x="5907024" y="2902951"/>
-            <a:ext cx="54864" cy="153834"/>
+            <a:off x="5907024" y="2838405"/>
+            <a:ext cx="54864" cy="132319"/>
           </a:xfrm>
           <a:prstGeom prst="rect">
             <a:avLst/>
@@ -29386,8 +29445,8 @@
         </p:nvSpPr>
         <p:spPr>
           <a:xfrm>
-            <a:off x="658368" y="3102505"/>
-            <a:ext cx="310896" cy="245274"/>
+            <a:off x="658368" y="3016444"/>
+            <a:ext cx="310896" cy="223759"/>
           </a:xfrm>
           <a:prstGeom prst="rect">
             <a:avLst/>
@@ -29425,8 +29484,8 @@
         </p:nvSpPr>
         <p:spPr>
           <a:xfrm>
-            <a:off x="1014984" y="3102505"/>
-            <a:ext cx="1920240" cy="245274"/>
+            <a:off x="1014984" y="3016444"/>
+            <a:ext cx="1920240" cy="223759"/>
           </a:xfrm>
           <a:prstGeom prst="rect">
             <a:avLst/>
@@ -29464,8 +29523,8 @@
         </p:nvSpPr>
         <p:spPr>
           <a:xfrm>
-            <a:off x="3579876" y="3168729"/>
-            <a:ext cx="231280" cy="112826"/>
+            <a:off x="3579876" y="3076859"/>
+            <a:ext cx="231280" cy="102929"/>
           </a:xfrm>
           <a:prstGeom prst="rect">
             <a:avLst/>
@@ -29484,8 +29543,8 @@
         </p:nvSpPr>
         <p:spPr>
           <a:xfrm>
-            <a:off x="4206240" y="3102505"/>
-            <a:ext cx="777240" cy="245274"/>
+            <a:off x="4206240" y="3016444"/>
+            <a:ext cx="777240" cy="223759"/>
           </a:xfrm>
           <a:prstGeom prst="rect">
             <a:avLst/>
@@ -29523,8 +29582,8 @@
         </p:nvSpPr>
         <p:spPr>
           <a:xfrm>
-            <a:off x="4983480" y="3102505"/>
-            <a:ext cx="868680" cy="245274"/>
+            <a:off x="4983480" y="3016444"/>
+            <a:ext cx="868680" cy="223759"/>
           </a:xfrm>
           <a:prstGeom prst="rect">
             <a:avLst/>
@@ -29562,8 +29621,8 @@
         </p:nvSpPr>
         <p:spPr>
           <a:xfrm>
-            <a:off x="5907024" y="3148225"/>
-            <a:ext cx="54864" cy="153834"/>
+            <a:off x="5907024" y="3062164"/>
+            <a:ext cx="54864" cy="132319"/>
           </a:xfrm>
           <a:prstGeom prst="rect">
             <a:avLst/>
@@ -29582,8 +29641,8 @@
         </p:nvSpPr>
         <p:spPr>
           <a:xfrm>
-            <a:off x="658368" y="3347780"/>
-            <a:ext cx="310896" cy="245274"/>
+            <a:off x="658368" y="3240203"/>
+            <a:ext cx="310896" cy="223759"/>
           </a:xfrm>
           <a:prstGeom prst="rect">
             <a:avLst/>
@@ -29621,8 +29680,8 @@
         </p:nvSpPr>
         <p:spPr>
           <a:xfrm>
-            <a:off x="1014984" y="3347780"/>
-            <a:ext cx="1920240" cy="245274"/>
+            <a:off x="1014984" y="3240203"/>
+            <a:ext cx="1920240" cy="223759"/>
           </a:xfrm>
           <a:prstGeom prst="rect">
             <a:avLst/>
@@ -29660,8 +29719,8 @@
         </p:nvSpPr>
         <p:spPr>
           <a:xfrm>
-            <a:off x="3579876" y="3414004"/>
-            <a:ext cx="214115" cy="112826"/>
+            <a:off x="3579876" y="3300618"/>
+            <a:ext cx="214115" cy="102929"/>
           </a:xfrm>
           <a:prstGeom prst="rect">
             <a:avLst/>
@@ -29680,8 +29739,8 @@
         </p:nvSpPr>
         <p:spPr>
           <a:xfrm>
-            <a:off x="4206240" y="3347780"/>
-            <a:ext cx="777240" cy="245274"/>
+            <a:off x="4206240" y="3240203"/>
+            <a:ext cx="777240" cy="223759"/>
           </a:xfrm>
           <a:prstGeom prst="rect">
             <a:avLst/>
@@ -29719,8 +29778,8 @@
         </p:nvSpPr>
         <p:spPr>
           <a:xfrm>
-            <a:off x="4983480" y="3347780"/>
-            <a:ext cx="868680" cy="245274"/>
+            <a:off x="4983480" y="3240203"/>
+            <a:ext cx="868680" cy="223759"/>
           </a:xfrm>
           <a:prstGeom prst="rect">
             <a:avLst/>
@@ -29758,8 +29817,8 @@
         </p:nvSpPr>
         <p:spPr>
           <a:xfrm>
-            <a:off x="658368" y="3593054"/>
-            <a:ext cx="310896" cy="245274"/>
+            <a:off x="658368" y="3463962"/>
+            <a:ext cx="310896" cy="223759"/>
           </a:xfrm>
           <a:prstGeom prst="rect">
             <a:avLst/>
@@ -29797,8 +29856,8 @@
         </p:nvSpPr>
         <p:spPr>
           <a:xfrm>
-            <a:off x="1014984" y="3593054"/>
-            <a:ext cx="1920240" cy="245274"/>
+            <a:off x="1014984" y="3463962"/>
+            <a:ext cx="1920240" cy="223759"/>
           </a:xfrm>
           <a:prstGeom prst="rect">
             <a:avLst/>
@@ -29836,8 +29895,8 @@
         </p:nvSpPr>
         <p:spPr>
           <a:xfrm>
-            <a:off x="3579876" y="3659278"/>
-            <a:ext cx="188889" cy="112826"/>
+            <a:off x="3579876" y="3524377"/>
+            <a:ext cx="188889" cy="102929"/>
           </a:xfrm>
           <a:prstGeom prst="rect">
             <a:avLst/>
@@ -29856,8 +29915,8 @@
         </p:nvSpPr>
         <p:spPr>
           <a:xfrm>
-            <a:off x="4206240" y="3593054"/>
-            <a:ext cx="777240" cy="245274"/>
+            <a:off x="4206240" y="3463962"/>
+            <a:ext cx="777240" cy="223759"/>
           </a:xfrm>
           <a:prstGeom prst="rect">
             <a:avLst/>
@@ -29895,8 +29954,8 @@
         </p:nvSpPr>
         <p:spPr>
           <a:xfrm>
-            <a:off x="4983480" y="3593054"/>
-            <a:ext cx="868680" cy="245274"/>
+            <a:off x="4983480" y="3463962"/>
+            <a:ext cx="868680" cy="223759"/>
           </a:xfrm>
           <a:prstGeom prst="rect">
             <a:avLst/>
@@ -29934,8 +29993,8 @@
         </p:nvSpPr>
         <p:spPr>
           <a:xfrm>
-            <a:off x="658368" y="3838328"/>
-            <a:ext cx="310896" cy="245274"/>
+            <a:off x="658368" y="3687721"/>
+            <a:ext cx="310896" cy="223759"/>
           </a:xfrm>
           <a:prstGeom prst="rect">
             <a:avLst/>
@@ -29973,8 +30032,8 @@
         </p:nvSpPr>
         <p:spPr>
           <a:xfrm>
-            <a:off x="1014984" y="3838328"/>
-            <a:ext cx="1920240" cy="245274"/>
+            <a:off x="1014984" y="3687721"/>
+            <a:ext cx="1920240" cy="223759"/>
           </a:xfrm>
           <a:prstGeom prst="rect">
             <a:avLst/>
@@ -30012,8 +30071,8 @@
         </p:nvSpPr>
         <p:spPr>
           <a:xfrm>
-            <a:off x="3579876" y="3904553"/>
-            <a:ext cx="175547" cy="112826"/>
+            <a:off x="3579876" y="3748136"/>
+            <a:ext cx="175547" cy="102929"/>
           </a:xfrm>
           <a:prstGeom prst="rect">
             <a:avLst/>
@@ -30032,8 +30091,8 @@
         </p:nvSpPr>
         <p:spPr>
           <a:xfrm>
-            <a:off x="4206240" y="3838328"/>
-            <a:ext cx="777240" cy="245274"/>
+            <a:off x="4206240" y="3687721"/>
+            <a:ext cx="777240" cy="223759"/>
           </a:xfrm>
           <a:prstGeom prst="rect">
             <a:avLst/>
@@ -30071,8 +30130,8 @@
         </p:nvSpPr>
         <p:spPr>
           <a:xfrm>
-            <a:off x="4983480" y="3838328"/>
-            <a:ext cx="868680" cy="245274"/>
+            <a:off x="4983480" y="3687721"/>
+            <a:ext cx="868680" cy="223759"/>
           </a:xfrm>
           <a:prstGeom prst="rect">
             <a:avLst/>
@@ -30110,8 +30169,8 @@
         </p:nvSpPr>
         <p:spPr>
           <a:xfrm>
-            <a:off x="658368" y="4083603"/>
-            <a:ext cx="310896" cy="245274"/>
+            <a:off x="658368" y="3911480"/>
+            <a:ext cx="310896" cy="223759"/>
           </a:xfrm>
           <a:prstGeom prst="rect">
             <a:avLst/>
@@ -30149,8 +30208,8 @@
         </p:nvSpPr>
         <p:spPr>
           <a:xfrm>
-            <a:off x="1014984" y="4083603"/>
-            <a:ext cx="1920240" cy="245274"/>
+            <a:off x="1014984" y="3911480"/>
+            <a:ext cx="1920240" cy="223759"/>
           </a:xfrm>
           <a:prstGeom prst="rect">
             <a:avLst/>
@@ -30188,8 +30247,8 @@
         </p:nvSpPr>
         <p:spPr>
           <a:xfrm>
-            <a:off x="3579876" y="4149827"/>
-            <a:ext cx="152295" cy="112826"/>
+            <a:off x="3579876" y="3971895"/>
+            <a:ext cx="152295" cy="102929"/>
           </a:xfrm>
           <a:prstGeom prst="rect">
             <a:avLst/>
@@ -30208,8 +30267,8 @@
         </p:nvSpPr>
         <p:spPr>
           <a:xfrm>
-            <a:off x="4206240" y="4083603"/>
-            <a:ext cx="777240" cy="245274"/>
+            <a:off x="4206240" y="3911480"/>
+            <a:ext cx="777240" cy="223759"/>
           </a:xfrm>
           <a:prstGeom prst="rect">
             <a:avLst/>
@@ -30247,8 +30306,8 @@
         </p:nvSpPr>
         <p:spPr>
           <a:xfrm>
-            <a:off x="4983480" y="4083603"/>
-            <a:ext cx="868680" cy="245274"/>
+            <a:off x="4983480" y="3911480"/>
+            <a:ext cx="868680" cy="223759"/>
           </a:xfrm>
           <a:prstGeom prst="rect">
             <a:avLst/>
@@ -30286,8 +30345,8 @@
         </p:nvSpPr>
         <p:spPr>
           <a:xfrm>
-            <a:off x="658368" y="4328877"/>
-            <a:ext cx="310896" cy="245274"/>
+            <a:off x="658368" y="4135240"/>
+            <a:ext cx="310896" cy="223759"/>
           </a:xfrm>
           <a:prstGeom prst="rect">
             <a:avLst/>
@@ -30325,8 +30384,8 @@
         </p:nvSpPr>
         <p:spPr>
           <a:xfrm>
-            <a:off x="1014984" y="4328877"/>
-            <a:ext cx="1920240" cy="245274"/>
+            <a:off x="1014984" y="4135240"/>
+            <a:ext cx="1920240" cy="223759"/>
           </a:xfrm>
           <a:prstGeom prst="rect">
             <a:avLst/>
@@ -30364,8 +30423,8 @@
         </p:nvSpPr>
         <p:spPr>
           <a:xfrm>
-            <a:off x="3579876" y="4395101"/>
-            <a:ext cx="143334" cy="112826"/>
+            <a:off x="3579876" y="4195654"/>
+            <a:ext cx="143334" cy="102929"/>
           </a:xfrm>
           <a:prstGeom prst="rect">
             <a:avLst/>
@@ -30384,8 +30443,8 @@
         </p:nvSpPr>
         <p:spPr>
           <a:xfrm>
-            <a:off x="4206240" y="4328877"/>
-            <a:ext cx="777240" cy="245274"/>
+            <a:off x="4206240" y="4135240"/>
+            <a:ext cx="777240" cy="223759"/>
           </a:xfrm>
           <a:prstGeom prst="rect">
             <a:avLst/>
@@ -30423,8 +30482,8 @@
         </p:nvSpPr>
         <p:spPr>
           <a:xfrm>
-            <a:off x="4983480" y="4328877"/>
-            <a:ext cx="868680" cy="245274"/>
+            <a:off x="4983480" y="4135240"/>
+            <a:ext cx="868680" cy="223759"/>
           </a:xfrm>
           <a:prstGeom prst="rect">
             <a:avLst/>
@@ -30462,8 +30521,8 @@
         </p:nvSpPr>
         <p:spPr>
           <a:xfrm>
-            <a:off x="658368" y="4574152"/>
-            <a:ext cx="310896" cy="245274"/>
+            <a:off x="658368" y="4358999"/>
+            <a:ext cx="310896" cy="223759"/>
           </a:xfrm>
           <a:prstGeom prst="rect">
             <a:avLst/>
@@ -30501,8 +30560,8 @@
         </p:nvSpPr>
         <p:spPr>
           <a:xfrm>
-            <a:off x="1014984" y="4574152"/>
-            <a:ext cx="1920240" cy="245274"/>
+            <a:off x="1014984" y="4358999"/>
+            <a:ext cx="1920240" cy="223759"/>
           </a:xfrm>
           <a:prstGeom prst="rect">
             <a:avLst/>
@@ -30540,8 +30599,8 @@
         </p:nvSpPr>
         <p:spPr>
           <a:xfrm>
-            <a:off x="3579876" y="4640376"/>
-            <a:ext cx="136162" cy="112826"/>
+            <a:off x="3579876" y="4419414"/>
+            <a:ext cx="136162" cy="102929"/>
           </a:xfrm>
           <a:prstGeom prst="rect">
             <a:avLst/>
@@ -30560,8 +30619,8 @@
         </p:nvSpPr>
         <p:spPr>
           <a:xfrm>
-            <a:off x="4206240" y="4574152"/>
-            <a:ext cx="777240" cy="245274"/>
+            <a:off x="4206240" y="4358999"/>
+            <a:ext cx="777240" cy="223759"/>
           </a:xfrm>
           <a:prstGeom prst="rect">
             <a:avLst/>
@@ -30599,8 +30658,8 @@
         </p:nvSpPr>
         <p:spPr>
           <a:xfrm>
-            <a:off x="4983480" y="4574152"/>
-            <a:ext cx="868680" cy="245274"/>
+            <a:off x="4983480" y="4358999"/>
+            <a:ext cx="868680" cy="223759"/>
           </a:xfrm>
           <a:prstGeom prst="rect">
             <a:avLst/>
@@ -30638,8 +30697,8 @@
         </p:nvSpPr>
         <p:spPr>
           <a:xfrm>
-            <a:off x="658368" y="4819426"/>
-            <a:ext cx="310896" cy="245274"/>
+            <a:off x="658368" y="4582758"/>
+            <a:ext cx="310896" cy="223759"/>
           </a:xfrm>
           <a:prstGeom prst="rect">
             <a:avLst/>
@@ -30677,8 +30736,8 @@
         </p:nvSpPr>
         <p:spPr>
           <a:xfrm>
-            <a:off x="1014984" y="4819426"/>
-            <a:ext cx="1920240" cy="245274"/>
+            <a:off x="1014984" y="4582758"/>
+            <a:ext cx="1920240" cy="223759"/>
           </a:xfrm>
           <a:prstGeom prst="rect">
             <a:avLst/>
@@ -30716,8 +30775,8 @@
         </p:nvSpPr>
         <p:spPr>
           <a:xfrm>
-            <a:off x="3579876" y="4885650"/>
-            <a:ext cx="130403" cy="112826"/>
+            <a:off x="3579876" y="4643173"/>
+            <a:ext cx="130403" cy="102929"/>
           </a:xfrm>
           <a:prstGeom prst="rect">
             <a:avLst/>
@@ -30736,8 +30795,8 @@
         </p:nvSpPr>
         <p:spPr>
           <a:xfrm>
-            <a:off x="4206240" y="4819426"/>
-            <a:ext cx="777240" cy="245274"/>
+            <a:off x="4206240" y="4582758"/>
+            <a:ext cx="777240" cy="223759"/>
           </a:xfrm>
           <a:prstGeom prst="rect">
             <a:avLst/>
@@ -30775,8 +30834,8 @@
         </p:nvSpPr>
         <p:spPr>
           <a:xfrm>
-            <a:off x="4983480" y="4819426"/>
-            <a:ext cx="868680" cy="245274"/>
+            <a:off x="4983480" y="4582758"/>
+            <a:ext cx="868680" cy="223759"/>
           </a:xfrm>
           <a:prstGeom prst="rect">
             <a:avLst/>
@@ -30814,8 +30873,8 @@
         </p:nvSpPr>
         <p:spPr>
           <a:xfrm>
-            <a:off x="5907024" y="4865146"/>
-            <a:ext cx="54864" cy="153834"/>
+            <a:off x="5907024" y="4628478"/>
+            <a:ext cx="54864" cy="132319"/>
           </a:xfrm>
           <a:prstGeom prst="rect">
             <a:avLst/>
@@ -30834,8 +30893,8 @@
         </p:nvSpPr>
         <p:spPr>
           <a:xfrm>
-            <a:off x="658368" y="5064700"/>
-            <a:ext cx="310896" cy="245274"/>
+            <a:off x="658368" y="4806517"/>
+            <a:ext cx="310896" cy="223759"/>
           </a:xfrm>
           <a:prstGeom prst="rect">
             <a:avLst/>
@@ -30873,8 +30932,8 @@
         </p:nvSpPr>
         <p:spPr>
           <a:xfrm>
-            <a:off x="1014984" y="5064700"/>
-            <a:ext cx="1920240" cy="245274"/>
+            <a:off x="1014984" y="4806517"/>
+            <a:ext cx="1920240" cy="223759"/>
           </a:xfrm>
           <a:prstGeom prst="rect">
             <a:avLst/>
@@ -30912,8 +30971,8 @@
         </p:nvSpPr>
         <p:spPr>
           <a:xfrm>
-            <a:off x="3579876" y="5130924"/>
-            <a:ext cx="120222" cy="112826"/>
+            <a:off x="3579876" y="4866932"/>
+            <a:ext cx="120222" cy="102929"/>
           </a:xfrm>
           <a:prstGeom prst="rect">
             <a:avLst/>
@@ -30932,8 +30991,8 @@
         </p:nvSpPr>
         <p:spPr>
           <a:xfrm>
-            <a:off x="4206240" y="5064700"/>
-            <a:ext cx="777240" cy="245274"/>
+            <a:off x="4206240" y="4806517"/>
+            <a:ext cx="777240" cy="223759"/>
           </a:xfrm>
           <a:prstGeom prst="rect">
             <a:avLst/>
@@ -30971,8 +31030,8 @@
         </p:nvSpPr>
         <p:spPr>
           <a:xfrm>
-            <a:off x="4983480" y="5064700"/>
-            <a:ext cx="868680" cy="245274"/>
+            <a:off x="4983480" y="4806517"/>
+            <a:ext cx="868680" cy="223759"/>
           </a:xfrm>
           <a:prstGeom prst="rect">
             <a:avLst/>
@@ -31010,8 +31069,8 @@
         </p:nvSpPr>
         <p:spPr>
           <a:xfrm>
-            <a:off x="658368" y="5309975"/>
-            <a:ext cx="310896" cy="245274"/>
+            <a:off x="658368" y="5030276"/>
+            <a:ext cx="310896" cy="223759"/>
           </a:xfrm>
           <a:prstGeom prst="rect">
             <a:avLst/>
@@ -31049,8 +31108,8 @@
         </p:nvSpPr>
         <p:spPr>
           <a:xfrm>
-            <a:off x="1014984" y="5309975"/>
-            <a:ext cx="1920240" cy="245274"/>
+            <a:off x="1014984" y="5030276"/>
+            <a:ext cx="1920240" cy="223759"/>
           </a:xfrm>
           <a:prstGeom prst="rect">
             <a:avLst/>
@@ -31088,8 +31147,8 @@
         </p:nvSpPr>
         <p:spPr>
           <a:xfrm>
-            <a:off x="3579876" y="5376199"/>
-            <a:ext cx="118653" cy="112826"/>
+            <a:off x="3579876" y="5090691"/>
+            <a:ext cx="118653" cy="102929"/>
           </a:xfrm>
           <a:prstGeom prst="rect">
             <a:avLst/>
@@ -31108,8 +31167,8 @@
         </p:nvSpPr>
         <p:spPr>
           <a:xfrm>
-            <a:off x="4206240" y="5309975"/>
-            <a:ext cx="777240" cy="245274"/>
+            <a:off x="4206240" y="5030276"/>
+            <a:ext cx="777240" cy="223759"/>
           </a:xfrm>
           <a:prstGeom prst="rect">
             <a:avLst/>
@@ -31147,8 +31206,8 @@
         </p:nvSpPr>
         <p:spPr>
           <a:xfrm>
-            <a:off x="4983480" y="5309975"/>
-            <a:ext cx="868680" cy="245274"/>
+            <a:off x="4983480" y="5030276"/>
+            <a:ext cx="868680" cy="223759"/>
           </a:xfrm>
           <a:prstGeom prst="rect">
             <a:avLst/>
@@ -31186,8 +31245,8 @@
         </p:nvSpPr>
         <p:spPr>
           <a:xfrm>
-            <a:off x="658368" y="5555249"/>
-            <a:ext cx="310896" cy="245274"/>
+            <a:off x="658368" y="5254035"/>
+            <a:ext cx="310896" cy="223759"/>
           </a:xfrm>
           <a:prstGeom prst="rect">
             <a:avLst/>
@@ -31225,8 +31284,8 @@
         </p:nvSpPr>
         <p:spPr>
           <a:xfrm>
-            <a:off x="1014984" y="5555249"/>
-            <a:ext cx="1920240" cy="245274"/>
+            <a:off x="1014984" y="5254035"/>
+            <a:ext cx="1920240" cy="223759"/>
           </a:xfrm>
           <a:prstGeom prst="rect">
             <a:avLst/>
@@ -31264,8 +31323,8 @@
         </p:nvSpPr>
         <p:spPr>
           <a:xfrm>
-            <a:off x="3579876" y="5621473"/>
-            <a:ext cx="69607" cy="112826"/>
+            <a:off x="3579876" y="5314450"/>
+            <a:ext cx="69607" cy="102929"/>
           </a:xfrm>
           <a:prstGeom prst="rect">
             <a:avLst/>
@@ -31284,8 +31343,8 @@
         </p:nvSpPr>
         <p:spPr>
           <a:xfrm>
-            <a:off x="4206240" y="5555249"/>
-            <a:ext cx="777240" cy="245274"/>
+            <a:off x="4206240" y="5254035"/>
+            <a:ext cx="777240" cy="223759"/>
           </a:xfrm>
           <a:prstGeom prst="rect">
             <a:avLst/>
@@ -31323,8 +31382,8 @@
         </p:nvSpPr>
         <p:spPr>
           <a:xfrm>
-            <a:off x="4983480" y="5555249"/>
-            <a:ext cx="868680" cy="245274"/>
+            <a:off x="4983480" y="5254035"/>
+            <a:ext cx="868680" cy="223759"/>
           </a:xfrm>
           <a:prstGeom prst="rect">
             <a:avLst/>
@@ -31362,8 +31421,8 @@
         </p:nvSpPr>
         <p:spPr>
           <a:xfrm>
-            <a:off x="658368" y="5800523"/>
-            <a:ext cx="310896" cy="245274"/>
+            <a:off x="658368" y="5477794"/>
+            <a:ext cx="310896" cy="223759"/>
           </a:xfrm>
           <a:prstGeom prst="rect">
             <a:avLst/>
@@ -31401,8 +31460,8 @@
         </p:nvSpPr>
         <p:spPr>
           <a:xfrm>
-            <a:off x="1014984" y="5800523"/>
-            <a:ext cx="1920240" cy="245274"/>
+            <a:off x="1014984" y="5477794"/>
+            <a:ext cx="1920240" cy="223759"/>
           </a:xfrm>
           <a:prstGeom prst="rect">
             <a:avLst/>
@@ -31440,8 +31499,8 @@
         </p:nvSpPr>
         <p:spPr>
           <a:xfrm>
-            <a:off x="3579876" y="5866747"/>
-            <a:ext cx="57491" cy="112826"/>
+            <a:off x="3579876" y="5538209"/>
+            <a:ext cx="57491" cy="102929"/>
           </a:xfrm>
           <a:prstGeom prst="rect">
             <a:avLst/>
@@ -31460,8 +31519,8 @@
         </p:nvSpPr>
         <p:spPr>
           <a:xfrm>
-            <a:off x="4206240" y="5800523"/>
-            <a:ext cx="777240" cy="245274"/>
+            <a:off x="4206240" y="5477794"/>
+            <a:ext cx="777240" cy="223759"/>
           </a:xfrm>
           <a:prstGeom prst="rect">
             <a:avLst/>
@@ -31499,8 +31558,8 @@
         </p:nvSpPr>
         <p:spPr>
           <a:xfrm>
-            <a:off x="4983480" y="5800523"/>
-            <a:ext cx="868680" cy="245274"/>
+            <a:off x="4983480" y="5477794"/>
+            <a:ext cx="868680" cy="223759"/>
           </a:xfrm>
           <a:prstGeom prst="rect">
             <a:avLst/>
@@ -31538,8 +31597,8 @@
         </p:nvSpPr>
         <p:spPr>
           <a:xfrm>
-            <a:off x="658368" y="6045798"/>
-            <a:ext cx="310896" cy="245274"/>
+            <a:off x="658368" y="5701553"/>
+            <a:ext cx="310896" cy="223759"/>
           </a:xfrm>
           <a:prstGeom prst="rect">
             <a:avLst/>
@@ -31577,8 +31636,8 @@
         </p:nvSpPr>
         <p:spPr>
           <a:xfrm>
-            <a:off x="1014984" y="6045798"/>
-            <a:ext cx="1920240" cy="245274"/>
+            <a:off x="1014984" y="5701553"/>
+            <a:ext cx="1920240" cy="223759"/>
           </a:xfrm>
           <a:prstGeom prst="rect">
             <a:avLst/>
@@ -31616,8 +31675,8 @@
         </p:nvSpPr>
         <p:spPr>
           <a:xfrm>
-            <a:off x="3579876" y="6112022"/>
-            <a:ext cx="50512" cy="112826"/>
+            <a:off x="3579876" y="5761968"/>
+            <a:ext cx="50512" cy="102929"/>
           </a:xfrm>
           <a:prstGeom prst="rect">
             <a:avLst/>
@@ -31636,8 +31695,8 @@
         </p:nvSpPr>
         <p:spPr>
           <a:xfrm>
-            <a:off x="4206240" y="6045798"/>
-            <a:ext cx="777240" cy="245274"/>
+            <a:off x="4206240" y="5701553"/>
+            <a:ext cx="777240" cy="223759"/>
           </a:xfrm>
           <a:prstGeom prst="rect">
             <a:avLst/>
@@ -31675,8 +31734,8 @@
         </p:nvSpPr>
         <p:spPr>
           <a:xfrm>
-            <a:off x="4983480" y="6045798"/>
-            <a:ext cx="868680" cy="245274"/>
+            <a:off x="4983480" y="5701553"/>
+            <a:ext cx="868680" cy="223759"/>
           </a:xfrm>
           <a:prstGeom prst="rect">
             <a:avLst/>
@@ -31715,7 +31774,7 @@
         <p:spPr>
           <a:xfrm>
             <a:off x="6208776" y="2121408"/>
-            <a:ext cx="310896" cy="245274"/>
+            <a:ext cx="310896" cy="223759"/>
           </a:xfrm>
           <a:prstGeom prst="rect">
             <a:avLst/>
@@ -31754,7 +31813,7 @@
         <p:spPr>
           <a:xfrm>
             <a:off x="6565392" y="2121408"/>
-            <a:ext cx="1920240" cy="245274"/>
+            <a:ext cx="1920240" cy="223759"/>
           </a:xfrm>
           <a:prstGeom prst="rect">
             <a:avLst/>
@@ -31792,8 +31851,8 @@
         </p:nvSpPr>
         <p:spPr>
           <a:xfrm>
-            <a:off x="9130284" y="2187632"/>
-            <a:ext cx="43577" cy="112826"/>
+            <a:off x="9130284" y="2181823"/>
+            <a:ext cx="43577" cy="102929"/>
           </a:xfrm>
           <a:prstGeom prst="rect">
             <a:avLst/>
@@ -31813,7 +31872,7 @@
         <p:spPr>
           <a:xfrm>
             <a:off x="9756648" y="2121408"/>
-            <a:ext cx="777240" cy="245274"/>
+            <a:ext cx="777240" cy="223759"/>
           </a:xfrm>
           <a:prstGeom prst="rect">
             <a:avLst/>
@@ -31852,7 +31911,7 @@
         <p:spPr>
           <a:xfrm>
             <a:off x="10533888" y="2121408"/>
-            <a:ext cx="868680" cy="245274"/>
+            <a:ext cx="868680" cy="223759"/>
           </a:xfrm>
           <a:prstGeom prst="rect">
             <a:avLst/>
@@ -31890,8 +31949,8 @@
         </p:nvSpPr>
         <p:spPr>
           <a:xfrm>
-            <a:off x="6208776" y="2366682"/>
-            <a:ext cx="310896" cy="245274"/>
+            <a:off x="6208776" y="2345167"/>
+            <a:ext cx="310896" cy="223759"/>
           </a:xfrm>
           <a:prstGeom prst="rect">
             <a:avLst/>
@@ -31929,8 +31988,8 @@
         </p:nvSpPr>
         <p:spPr>
           <a:xfrm>
-            <a:off x="6565392" y="2366682"/>
-            <a:ext cx="1920240" cy="245274"/>
+            <a:off x="6565392" y="2345167"/>
+            <a:ext cx="1920240" cy="223759"/>
           </a:xfrm>
           <a:prstGeom prst="rect">
             <a:avLst/>
@@ -31968,8 +32027,8 @@
         </p:nvSpPr>
         <p:spPr>
           <a:xfrm>
-            <a:off x="9130284" y="2432906"/>
-            <a:ext cx="40298" cy="112826"/>
+            <a:off x="9130284" y="2405582"/>
+            <a:ext cx="40298" cy="102929"/>
           </a:xfrm>
           <a:prstGeom prst="rect">
             <a:avLst/>
@@ -31988,8 +32047,8 @@
         </p:nvSpPr>
         <p:spPr>
           <a:xfrm>
-            <a:off x="9756648" y="2366682"/>
-            <a:ext cx="777240" cy="245274"/>
+            <a:off x="9756648" y="2345167"/>
+            <a:ext cx="777240" cy="223759"/>
           </a:xfrm>
           <a:prstGeom prst="rect">
             <a:avLst/>
@@ -32027,8 +32086,8 @@
         </p:nvSpPr>
         <p:spPr>
           <a:xfrm>
-            <a:off x="10533888" y="2366682"/>
-            <a:ext cx="868680" cy="245274"/>
+            <a:off x="10533888" y="2345167"/>
+            <a:ext cx="868680" cy="223759"/>
           </a:xfrm>
           <a:prstGeom prst="rect">
             <a:avLst/>
@@ -32066,8 +32125,8 @@
         </p:nvSpPr>
         <p:spPr>
           <a:xfrm>
-            <a:off x="6208776" y="2611957"/>
-            <a:ext cx="310896" cy="245274"/>
+            <a:off x="6208776" y="2568926"/>
+            <a:ext cx="310896" cy="223759"/>
           </a:xfrm>
           <a:prstGeom prst="rect">
             <a:avLst/>
@@ -32105,8 +32164,8 @@
         </p:nvSpPr>
         <p:spPr>
           <a:xfrm>
-            <a:off x="6565392" y="2611957"/>
-            <a:ext cx="1920240" cy="245274"/>
+            <a:off x="6565392" y="2568926"/>
+            <a:ext cx="1920240" cy="223759"/>
           </a:xfrm>
           <a:prstGeom prst="rect">
             <a:avLst/>
@@ -32144,8 +32203,8 @@
         </p:nvSpPr>
         <p:spPr>
           <a:xfrm>
-            <a:off x="9130284" y="2678181"/>
-            <a:ext cx="38573" cy="112826"/>
+            <a:off x="9130284" y="2629341"/>
+            <a:ext cx="38573" cy="102929"/>
           </a:xfrm>
           <a:prstGeom prst="rect">
             <a:avLst/>
@@ -32164,8 +32223,8 @@
         </p:nvSpPr>
         <p:spPr>
           <a:xfrm>
-            <a:off x="9756648" y="2611957"/>
-            <a:ext cx="777240" cy="245274"/>
+            <a:off x="9756648" y="2568926"/>
+            <a:ext cx="777240" cy="223759"/>
           </a:xfrm>
           <a:prstGeom prst="rect">
             <a:avLst/>
@@ -32203,8 +32262,8 @@
         </p:nvSpPr>
         <p:spPr>
           <a:xfrm>
-            <a:off x="10533888" y="2611957"/>
-            <a:ext cx="868680" cy="245274"/>
+            <a:off x="10533888" y="2568926"/>
+            <a:ext cx="868680" cy="223759"/>
           </a:xfrm>
           <a:prstGeom prst="rect">
             <a:avLst/>
@@ -32242,8 +32301,8 @@
         </p:nvSpPr>
         <p:spPr>
           <a:xfrm>
-            <a:off x="6208776" y="2857231"/>
-            <a:ext cx="310896" cy="245274"/>
+            <a:off x="6208776" y="2792685"/>
+            <a:ext cx="310896" cy="223759"/>
           </a:xfrm>
           <a:prstGeom prst="rect">
             <a:avLst/>
@@ -32281,8 +32340,8 @@
         </p:nvSpPr>
         <p:spPr>
           <a:xfrm>
-            <a:off x="6565392" y="2857231"/>
-            <a:ext cx="1920240" cy="245274"/>
+            <a:off x="6565392" y="2792685"/>
+            <a:ext cx="1920240" cy="223759"/>
           </a:xfrm>
           <a:prstGeom prst="rect">
             <a:avLst/>
@@ -32320,8 +32379,8 @@
         </p:nvSpPr>
         <p:spPr>
           <a:xfrm>
-            <a:off x="9130284" y="2923455"/>
-            <a:ext cx="30667" cy="112826"/>
+            <a:off x="9130284" y="2853100"/>
+            <a:ext cx="30667" cy="102929"/>
           </a:xfrm>
           <a:prstGeom prst="rect">
             <a:avLst/>
@@ -32340,8 +32399,8 @@
         </p:nvSpPr>
         <p:spPr>
           <a:xfrm>
-            <a:off x="9756648" y="2857231"/>
-            <a:ext cx="777240" cy="245274"/>
+            <a:off x="9756648" y="2792685"/>
+            <a:ext cx="777240" cy="223759"/>
           </a:xfrm>
           <a:prstGeom prst="rect">
             <a:avLst/>
@@ -32379,8 +32438,8 @@
         </p:nvSpPr>
         <p:spPr>
           <a:xfrm>
-            <a:off x="10533888" y="2857231"/>
-            <a:ext cx="868680" cy="245274"/>
+            <a:off x="10533888" y="2792685"/>
+            <a:ext cx="868680" cy="223759"/>
           </a:xfrm>
           <a:prstGeom prst="rect">
             <a:avLst/>
@@ -32418,8 +32477,8 @@
         </p:nvSpPr>
         <p:spPr>
           <a:xfrm>
-            <a:off x="6208776" y="3102505"/>
-            <a:ext cx="310896" cy="245274"/>
+            <a:off x="6208776" y="3016444"/>
+            <a:ext cx="310896" cy="223759"/>
           </a:xfrm>
           <a:prstGeom prst="rect">
             <a:avLst/>
@@ -32457,8 +32516,8 @@
         </p:nvSpPr>
         <p:spPr>
           <a:xfrm>
-            <a:off x="6565392" y="3102505"/>
-            <a:ext cx="1920240" cy="245274"/>
+            <a:off x="6565392" y="3016444"/>
+            <a:ext cx="1920240" cy="223759"/>
           </a:xfrm>
           <a:prstGeom prst="rect">
             <a:avLst/>
@@ -32496,8 +32555,8 @@
         </p:nvSpPr>
         <p:spPr>
           <a:xfrm>
-            <a:off x="9130284" y="3168729"/>
-            <a:ext cx="28430" cy="112826"/>
+            <a:off x="9130284" y="3076859"/>
+            <a:ext cx="28430" cy="102929"/>
           </a:xfrm>
           <a:prstGeom prst="rect">
             <a:avLst/>
@@ -32516,8 +32575,8 @@
         </p:nvSpPr>
         <p:spPr>
           <a:xfrm>
-            <a:off x="9756648" y="3102505"/>
-            <a:ext cx="777240" cy="245274"/>
+            <a:off x="9756648" y="3016444"/>
+            <a:ext cx="777240" cy="223759"/>
           </a:xfrm>
           <a:prstGeom prst="rect">
             <a:avLst/>
@@ -32555,8 +32614,8 @@
         </p:nvSpPr>
         <p:spPr>
           <a:xfrm>
-            <a:off x="10533888" y="3102505"/>
-            <a:ext cx="868680" cy="245274"/>
+            <a:off x="10533888" y="3016444"/>
+            <a:ext cx="868680" cy="223759"/>
           </a:xfrm>
           <a:prstGeom prst="rect">
             <a:avLst/>
@@ -32594,8 +32653,8 @@
         </p:nvSpPr>
         <p:spPr>
           <a:xfrm>
-            <a:off x="6208776" y="3347780"/>
-            <a:ext cx="310896" cy="245274"/>
+            <a:off x="6208776" y="3240203"/>
+            <a:ext cx="310896" cy="223759"/>
           </a:xfrm>
           <a:prstGeom prst="rect">
             <a:avLst/>
@@ -32633,8 +32692,8 @@
         </p:nvSpPr>
         <p:spPr>
           <a:xfrm>
-            <a:off x="6565392" y="3347780"/>
-            <a:ext cx="1920240" cy="245274"/>
+            <a:off x="6565392" y="3240203"/>
+            <a:ext cx="1920240" cy="223759"/>
           </a:xfrm>
           <a:prstGeom prst="rect">
             <a:avLst/>
@@ -32672,8 +32731,8 @@
         </p:nvSpPr>
         <p:spPr>
           <a:xfrm>
-            <a:off x="9130284" y="3414004"/>
-            <a:ext cx="20244" cy="112826"/>
+            <a:off x="9130284" y="3300618"/>
+            <a:ext cx="20244" cy="102929"/>
           </a:xfrm>
           <a:prstGeom prst="rect">
             <a:avLst/>
@@ -32692,8 +32751,8 @@
         </p:nvSpPr>
         <p:spPr>
           <a:xfrm>
-            <a:off x="9756648" y="3347780"/>
-            <a:ext cx="777240" cy="245274"/>
+            <a:off x="9756648" y="3240203"/>
+            <a:ext cx="777240" cy="223759"/>
           </a:xfrm>
           <a:prstGeom prst="rect">
             <a:avLst/>
@@ -32731,8 +32790,8 @@
         </p:nvSpPr>
         <p:spPr>
           <a:xfrm>
-            <a:off x="10533888" y="3347780"/>
-            <a:ext cx="868680" cy="245274"/>
+            <a:off x="10533888" y="3240203"/>
+            <a:ext cx="868680" cy="223759"/>
           </a:xfrm>
           <a:prstGeom prst="rect">
             <a:avLst/>
@@ -32770,8 +32829,8 @@
         </p:nvSpPr>
         <p:spPr>
           <a:xfrm>
-            <a:off x="6208776" y="3593054"/>
-            <a:ext cx="310896" cy="245274"/>
+            <a:off x="6208776" y="3463962"/>
+            <a:ext cx="310896" cy="223759"/>
           </a:xfrm>
           <a:prstGeom prst="rect">
             <a:avLst/>
@@ -32809,8 +32868,8 @@
         </p:nvSpPr>
         <p:spPr>
           <a:xfrm>
-            <a:off x="6565392" y="3593054"/>
-            <a:ext cx="1920240" cy="245274"/>
+            <a:off x="6565392" y="3463962"/>
+            <a:ext cx="1920240" cy="223759"/>
           </a:xfrm>
           <a:prstGeom prst="rect">
             <a:avLst/>
@@ -32848,8 +32907,8 @@
         </p:nvSpPr>
         <p:spPr>
           <a:xfrm>
-            <a:off x="9130284" y="3659278"/>
-            <a:ext cx="12802" cy="112826"/>
+            <a:off x="9130284" y="3524377"/>
+            <a:ext cx="12802" cy="102929"/>
           </a:xfrm>
           <a:prstGeom prst="rect">
             <a:avLst/>
@@ -32868,8 +32927,8 @@
         </p:nvSpPr>
         <p:spPr>
           <a:xfrm>
-            <a:off x="9756648" y="3593054"/>
-            <a:ext cx="777240" cy="245274"/>
+            <a:off x="9756648" y="3463962"/>
+            <a:ext cx="777240" cy="223759"/>
           </a:xfrm>
           <a:prstGeom prst="rect">
             <a:avLst/>
@@ -32907,8 +32966,8 @@
         </p:nvSpPr>
         <p:spPr>
           <a:xfrm>
-            <a:off x="10533888" y="3593054"/>
-            <a:ext cx="868680" cy="245274"/>
+            <a:off x="10533888" y="3463962"/>
+            <a:ext cx="868680" cy="223759"/>
           </a:xfrm>
           <a:prstGeom prst="rect">
             <a:avLst/>
@@ -32946,8 +33005,8 @@
         </p:nvSpPr>
         <p:spPr>
           <a:xfrm>
-            <a:off x="6208776" y="3838328"/>
-            <a:ext cx="310896" cy="245274"/>
+            <a:off x="6208776" y="3687721"/>
+            <a:ext cx="310896" cy="223759"/>
           </a:xfrm>
           <a:prstGeom prst="rect">
             <a:avLst/>
@@ -32985,8 +33044,8 @@
         </p:nvSpPr>
         <p:spPr>
           <a:xfrm>
-            <a:off x="6565392" y="3838328"/>
-            <a:ext cx="1920240" cy="245274"/>
+            <a:off x="6565392" y="3687721"/>
+            <a:ext cx="1920240" cy="223759"/>
           </a:xfrm>
           <a:prstGeom prst="rect">
             <a:avLst/>
@@ -33024,8 +33083,8 @@
         </p:nvSpPr>
         <p:spPr>
           <a:xfrm>
-            <a:off x="9130284" y="3904553"/>
-            <a:ext cx="12802" cy="112826"/>
+            <a:off x="9130284" y="3748136"/>
+            <a:ext cx="12802" cy="102929"/>
           </a:xfrm>
           <a:prstGeom prst="rect">
             <a:avLst/>
@@ -33044,8 +33103,8 @@
         </p:nvSpPr>
         <p:spPr>
           <a:xfrm>
-            <a:off x="9756648" y="3838328"/>
-            <a:ext cx="777240" cy="245274"/>
+            <a:off x="9756648" y="3687721"/>
+            <a:ext cx="777240" cy="223759"/>
           </a:xfrm>
           <a:prstGeom prst="rect">
             <a:avLst/>
@@ -33083,8 +33142,8 @@
         </p:nvSpPr>
         <p:spPr>
           <a:xfrm>
-            <a:off x="10533888" y="3838328"/>
-            <a:ext cx="868680" cy="245274"/>
+            <a:off x="10533888" y="3687721"/>
+            <a:ext cx="868680" cy="223759"/>
           </a:xfrm>
           <a:prstGeom prst="rect">
             <a:avLst/>
@@ -33122,8 +33181,8 @@
         </p:nvSpPr>
         <p:spPr>
           <a:xfrm>
-            <a:off x="6208776" y="4083603"/>
-            <a:ext cx="310896" cy="245274"/>
+            <a:off x="6208776" y="3911480"/>
+            <a:ext cx="310896" cy="223759"/>
           </a:xfrm>
           <a:prstGeom prst="rect">
             <a:avLst/>
@@ -33161,8 +33220,8 @@
         </p:nvSpPr>
         <p:spPr>
           <a:xfrm>
-            <a:off x="6565392" y="4083603"/>
-            <a:ext cx="1920240" cy="245274"/>
+            <a:off x="6565392" y="3911480"/>
+            <a:ext cx="1920240" cy="223759"/>
           </a:xfrm>
           <a:prstGeom prst="rect">
             <a:avLst/>
@@ -33200,8 +33259,8 @@
         </p:nvSpPr>
         <p:spPr>
           <a:xfrm>
-            <a:off x="9077784" y="4149827"/>
-            <a:ext cx="52500" cy="112826"/>
+            <a:off x="9077784" y="3971895"/>
+            <a:ext cx="52500" cy="102929"/>
           </a:xfrm>
           <a:prstGeom prst="rect">
             <a:avLst/>
@@ -33220,8 +33279,8 @@
         </p:nvSpPr>
         <p:spPr>
           <a:xfrm>
-            <a:off x="9756648" y="4083603"/>
-            <a:ext cx="777240" cy="245274"/>
+            <a:off x="9756648" y="3911480"/>
+            <a:ext cx="777240" cy="223759"/>
           </a:xfrm>
           <a:prstGeom prst="rect">
             <a:avLst/>
@@ -33259,8 +33318,8 @@
         </p:nvSpPr>
         <p:spPr>
           <a:xfrm>
-            <a:off x="10533888" y="4083603"/>
-            <a:ext cx="868680" cy="245274"/>
+            <a:off x="10533888" y="3911480"/>
+            <a:ext cx="868680" cy="223759"/>
           </a:xfrm>
           <a:prstGeom prst="rect">
             <a:avLst/>
@@ -33298,8 +33357,8 @@
         </p:nvSpPr>
         <p:spPr>
           <a:xfrm>
-            <a:off x="11457432" y="4129323"/>
-            <a:ext cx="54864" cy="153834"/>
+            <a:off x="11457432" y="3957200"/>
+            <a:ext cx="54864" cy="132319"/>
           </a:xfrm>
           <a:prstGeom prst="rect">
             <a:avLst/>
@@ -33318,8 +33377,8 @@
         </p:nvSpPr>
         <p:spPr>
           <a:xfrm>
-            <a:off x="6208776" y="4328877"/>
-            <a:ext cx="310896" cy="245274"/>
+            <a:off x="6208776" y="4135240"/>
+            <a:ext cx="310896" cy="223759"/>
           </a:xfrm>
           <a:prstGeom prst="rect">
             <a:avLst/>
@@ -33357,8 +33416,8 @@
         </p:nvSpPr>
         <p:spPr>
           <a:xfrm>
-            <a:off x="6565392" y="4328877"/>
-            <a:ext cx="1920240" cy="245274"/>
+            <a:off x="6565392" y="4135240"/>
+            <a:ext cx="1920240" cy="223759"/>
           </a:xfrm>
           <a:prstGeom prst="rect">
             <a:avLst/>
@@ -33396,8 +33455,8 @@
         </p:nvSpPr>
         <p:spPr>
           <a:xfrm>
-            <a:off x="9064631" y="4395101"/>
-            <a:ext cx="65653" cy="112826"/>
+            <a:off x="9064631" y="4195654"/>
+            <a:ext cx="65653" cy="102929"/>
           </a:xfrm>
           <a:prstGeom prst="rect">
             <a:avLst/>
@@ -33416,8 +33475,8 @@
         </p:nvSpPr>
         <p:spPr>
           <a:xfrm>
-            <a:off x="9756648" y="4328877"/>
-            <a:ext cx="777240" cy="245274"/>
+            <a:off x="9756648" y="4135240"/>
+            <a:ext cx="777240" cy="223759"/>
           </a:xfrm>
           <a:prstGeom prst="rect">
             <a:avLst/>
@@ -33455,8 +33514,8 @@
         </p:nvSpPr>
         <p:spPr>
           <a:xfrm>
-            <a:off x="10533888" y="4328877"/>
-            <a:ext cx="868680" cy="245274"/>
+            <a:off x="10533888" y="4135240"/>
+            <a:ext cx="868680" cy="223759"/>
           </a:xfrm>
           <a:prstGeom prst="rect">
             <a:avLst/>
@@ -33494,8 +33553,8 @@
         </p:nvSpPr>
         <p:spPr>
           <a:xfrm>
-            <a:off x="6208776" y="4574152"/>
-            <a:ext cx="310896" cy="245274"/>
+            <a:off x="6208776" y="4358999"/>
+            <a:ext cx="310896" cy="223759"/>
           </a:xfrm>
           <a:prstGeom prst="rect">
             <a:avLst/>
@@ -33533,8 +33592,8 @@
         </p:nvSpPr>
         <p:spPr>
           <a:xfrm>
-            <a:off x="6565392" y="4574152"/>
-            <a:ext cx="1920240" cy="245274"/>
+            <a:off x="6565392" y="4358999"/>
+            <a:ext cx="1920240" cy="223759"/>
           </a:xfrm>
           <a:prstGeom prst="rect">
             <a:avLst/>
@@ -33572,8 +33631,8 @@
         </p:nvSpPr>
         <p:spPr>
           <a:xfrm>
-            <a:off x="8989404" y="4640376"/>
-            <a:ext cx="140880" cy="112826"/>
+            <a:off x="8989404" y="4419414"/>
+            <a:ext cx="140880" cy="102929"/>
           </a:xfrm>
           <a:prstGeom prst="rect">
             <a:avLst/>
@@ -33592,8 +33651,8 @@
         </p:nvSpPr>
         <p:spPr>
           <a:xfrm>
-            <a:off x="9756648" y="4574152"/>
-            <a:ext cx="777240" cy="245274"/>
+            <a:off x="9756648" y="4358999"/>
+            <a:ext cx="777240" cy="223759"/>
           </a:xfrm>
           <a:prstGeom prst="rect">
             <a:avLst/>
@@ -33631,8 +33690,8 @@
         </p:nvSpPr>
         <p:spPr>
           <a:xfrm>
-            <a:off x="10533888" y="4574152"/>
-            <a:ext cx="868680" cy="245274"/>
+            <a:off x="10533888" y="4358999"/>
+            <a:ext cx="868680" cy="223759"/>
           </a:xfrm>
           <a:prstGeom prst="rect">
             <a:avLst/>
@@ -33670,8 +33729,8 @@
         </p:nvSpPr>
         <p:spPr>
           <a:xfrm>
-            <a:off x="6208776" y="4819426"/>
-            <a:ext cx="310896" cy="245274"/>
+            <a:off x="6208776" y="4582758"/>
+            <a:ext cx="310896" cy="223759"/>
           </a:xfrm>
           <a:prstGeom prst="rect">
             <a:avLst/>
@@ -33709,8 +33768,8 @@
         </p:nvSpPr>
         <p:spPr>
           <a:xfrm>
-            <a:off x="6565392" y="4819426"/>
-            <a:ext cx="1920240" cy="245274"/>
+            <a:off x="6565392" y="4582758"/>
+            <a:ext cx="1920240" cy="223759"/>
           </a:xfrm>
           <a:prstGeom prst="rect">
             <a:avLst/>
@@ -33748,8 +33807,8 @@
         </p:nvSpPr>
         <p:spPr>
           <a:xfrm>
-            <a:off x="8969548" y="4885650"/>
-            <a:ext cx="160736" cy="112826"/>
+            <a:off x="8969548" y="4643173"/>
+            <a:ext cx="160736" cy="102929"/>
           </a:xfrm>
           <a:prstGeom prst="rect">
             <a:avLst/>
@@ -33768,8 +33827,8 @@
         </p:nvSpPr>
         <p:spPr>
           <a:xfrm>
-            <a:off x="9756648" y="4819426"/>
-            <a:ext cx="777240" cy="245274"/>
+            <a:off x="9756648" y="4582758"/>
+            <a:ext cx="777240" cy="223759"/>
           </a:xfrm>
           <a:prstGeom prst="rect">
             <a:avLst/>
@@ -33807,8 +33866,8 @@
         </p:nvSpPr>
         <p:spPr>
           <a:xfrm>
-            <a:off x="10533888" y="4819426"/>
-            <a:ext cx="868680" cy="245274"/>
+            <a:off x="10533888" y="4582758"/>
+            <a:ext cx="868680" cy="223759"/>
           </a:xfrm>
           <a:prstGeom prst="rect">
             <a:avLst/>
@@ -33846,8 +33905,8 @@
         </p:nvSpPr>
         <p:spPr>
           <a:xfrm>
-            <a:off x="6208776" y="5064700"/>
-            <a:ext cx="310896" cy="245274"/>
+            <a:off x="6208776" y="4806517"/>
+            <a:ext cx="310896" cy="223759"/>
           </a:xfrm>
           <a:prstGeom prst="rect">
             <a:avLst/>
@@ -33885,8 +33944,8 @@
         </p:nvSpPr>
         <p:spPr>
           <a:xfrm>
-            <a:off x="6565392" y="5064700"/>
-            <a:ext cx="1920240" cy="245274"/>
+            <a:off x="6565392" y="4806517"/>
+            <a:ext cx="1920240" cy="223759"/>
           </a:xfrm>
           <a:prstGeom prst="rect">
             <a:avLst/>
@@ -33924,8 +33983,8 @@
         </p:nvSpPr>
         <p:spPr>
           <a:xfrm>
-            <a:off x="8963677" y="5130924"/>
-            <a:ext cx="166607" cy="112826"/>
+            <a:off x="8963677" y="4866932"/>
+            <a:ext cx="166607" cy="102929"/>
           </a:xfrm>
           <a:prstGeom prst="rect">
             <a:avLst/>
@@ -33944,8 +34003,8 @@
         </p:nvSpPr>
         <p:spPr>
           <a:xfrm>
-            <a:off x="9756648" y="5064700"/>
-            <a:ext cx="777240" cy="245274"/>
+            <a:off x="9756648" y="4806517"/>
+            <a:ext cx="777240" cy="223759"/>
           </a:xfrm>
           <a:prstGeom prst="rect">
             <a:avLst/>
@@ -33983,8 +34042,8 @@
         </p:nvSpPr>
         <p:spPr>
           <a:xfrm>
-            <a:off x="10533888" y="5064700"/>
-            <a:ext cx="868680" cy="245274"/>
+            <a:off x="10533888" y="4806517"/>
+            <a:ext cx="868680" cy="223759"/>
           </a:xfrm>
           <a:prstGeom prst="rect">
             <a:avLst/>
@@ -34022,8 +34081,8 @@
         </p:nvSpPr>
         <p:spPr>
           <a:xfrm>
-            <a:off x="11457432" y="5110420"/>
-            <a:ext cx="54864" cy="153834"/>
+            <a:off x="11457432" y="4852237"/>
+            <a:ext cx="54864" cy="132319"/>
           </a:xfrm>
           <a:prstGeom prst="rect">
             <a:avLst/>
@@ -34042,8 +34101,8 @@
         </p:nvSpPr>
         <p:spPr>
           <a:xfrm>
-            <a:off x="6208776" y="5309975"/>
-            <a:ext cx="310896" cy="245274"/>
+            <a:off x="6208776" y="5030276"/>
+            <a:ext cx="310896" cy="223759"/>
           </a:xfrm>
           <a:prstGeom prst="rect">
             <a:avLst/>
@@ -34081,8 +34140,8 @@
         </p:nvSpPr>
         <p:spPr>
           <a:xfrm>
-            <a:off x="6565392" y="5309975"/>
-            <a:ext cx="1920240" cy="245274"/>
+            <a:off x="6565392" y="5030276"/>
+            <a:ext cx="1920240" cy="223759"/>
           </a:xfrm>
           <a:prstGeom prst="rect">
             <a:avLst/>
@@ -34120,8 +34179,8 @@
         </p:nvSpPr>
         <p:spPr>
           <a:xfrm>
-            <a:off x="8962691" y="5376199"/>
-            <a:ext cx="167593" cy="112826"/>
+            <a:off x="8962691" y="5090691"/>
+            <a:ext cx="167593" cy="102929"/>
           </a:xfrm>
           <a:prstGeom prst="rect">
             <a:avLst/>
@@ -34140,8 +34199,8 @@
         </p:nvSpPr>
         <p:spPr>
           <a:xfrm>
-            <a:off x="9756648" y="5309975"/>
-            <a:ext cx="777240" cy="245274"/>
+            <a:off x="9756648" y="5030276"/>
+            <a:ext cx="777240" cy="223759"/>
           </a:xfrm>
           <a:prstGeom prst="rect">
             <a:avLst/>
@@ -34179,8 +34238,8 @@
         </p:nvSpPr>
         <p:spPr>
           <a:xfrm>
-            <a:off x="10533888" y="5309975"/>
-            <a:ext cx="868680" cy="245274"/>
+            <a:off x="10533888" y="5030276"/>
+            <a:ext cx="868680" cy="223759"/>
           </a:xfrm>
           <a:prstGeom prst="rect">
             <a:avLst/>
@@ -34218,8 +34277,8 @@
         </p:nvSpPr>
         <p:spPr>
           <a:xfrm>
-            <a:off x="6208776" y="5555249"/>
-            <a:ext cx="310896" cy="245274"/>
+            <a:off x="6208776" y="5254035"/>
+            <a:ext cx="310896" cy="223759"/>
           </a:xfrm>
           <a:prstGeom prst="rect">
             <a:avLst/>
@@ -34257,8 +34316,8 @@
         </p:nvSpPr>
         <p:spPr>
           <a:xfrm>
-            <a:off x="6565392" y="5555249"/>
-            <a:ext cx="1920240" cy="245274"/>
+            <a:off x="6565392" y="5254035"/>
+            <a:ext cx="1920240" cy="223759"/>
           </a:xfrm>
           <a:prstGeom prst="rect">
             <a:avLst/>
@@ -34296,8 +34355,8 @@
         </p:nvSpPr>
         <p:spPr>
           <a:xfrm>
-            <a:off x="8884884" y="5621473"/>
-            <a:ext cx="245400" cy="112826"/>
+            <a:off x="8884884" y="5314450"/>
+            <a:ext cx="245400" cy="102929"/>
           </a:xfrm>
           <a:prstGeom prst="rect">
             <a:avLst/>
@@ -34316,8 +34375,8 @@
         </p:nvSpPr>
         <p:spPr>
           <a:xfrm>
-            <a:off x="9756648" y="5555249"/>
-            <a:ext cx="777240" cy="245274"/>
+            <a:off x="9756648" y="5254035"/>
+            <a:ext cx="777240" cy="223759"/>
           </a:xfrm>
           <a:prstGeom prst="rect">
             <a:avLst/>
@@ -34355,8 +34414,8 @@
         </p:nvSpPr>
         <p:spPr>
           <a:xfrm>
-            <a:off x="10533888" y="5555249"/>
-            <a:ext cx="868680" cy="245274"/>
+            <a:off x="10533888" y="5254035"/>
+            <a:ext cx="868680" cy="223759"/>
           </a:xfrm>
           <a:prstGeom prst="rect">
             <a:avLst/>
@@ -34394,8 +34453,8 @@
         </p:nvSpPr>
         <p:spPr>
           <a:xfrm>
-            <a:off x="11457432" y="5600969"/>
-            <a:ext cx="54864" cy="153834"/>
+            <a:off x="11457432" y="5299755"/>
+            <a:ext cx="54864" cy="132319"/>
           </a:xfrm>
           <a:prstGeom prst="rect">
             <a:avLst/>
@@ -34414,8 +34473,8 @@
         </p:nvSpPr>
         <p:spPr>
           <a:xfrm>
-            <a:off x="6208776" y="5800523"/>
-            <a:ext cx="310896" cy="245274"/>
+            <a:off x="6208776" y="5477794"/>
+            <a:ext cx="310896" cy="223759"/>
           </a:xfrm>
           <a:prstGeom prst="rect">
             <a:avLst/>
@@ -34453,8 +34512,8 @@
         </p:nvSpPr>
         <p:spPr>
           <a:xfrm>
-            <a:off x="6565392" y="5800523"/>
-            <a:ext cx="1920240" cy="245274"/>
+            <a:off x="6565392" y="5477794"/>
+            <a:ext cx="1920240" cy="223759"/>
           </a:xfrm>
           <a:prstGeom prst="rect">
             <a:avLst/>
@@ -34492,8 +34551,8 @@
         </p:nvSpPr>
         <p:spPr>
           <a:xfrm>
-            <a:off x="8859512" y="5866747"/>
-            <a:ext cx="270772" cy="112826"/>
+            <a:off x="8859512" y="5538209"/>
+            <a:ext cx="270772" cy="102929"/>
           </a:xfrm>
           <a:prstGeom prst="rect">
             <a:avLst/>
@@ -34512,8 +34571,8 @@
         </p:nvSpPr>
         <p:spPr>
           <a:xfrm>
-            <a:off x="9756648" y="5800523"/>
-            <a:ext cx="777240" cy="245274"/>
+            <a:off x="9756648" y="5477794"/>
+            <a:ext cx="777240" cy="223759"/>
           </a:xfrm>
           <a:prstGeom prst="rect">
             <a:avLst/>
@@ -34551,8 +34610,8 @@
         </p:nvSpPr>
         <p:spPr>
           <a:xfrm>
-            <a:off x="10533888" y="5800523"/>
-            <a:ext cx="868680" cy="245274"/>
+            <a:off x="10533888" y="5477794"/>
+            <a:ext cx="868680" cy="223759"/>
           </a:xfrm>
           <a:prstGeom prst="rect">
             <a:avLst/>
@@ -34591,7 +34650,7 @@
         <p:spPr>
           <a:xfrm>
             <a:off x="3574390" y="2121408"/>
-            <a:ext cx="10973" cy="4169664"/>
+            <a:ext cx="10973" cy="3803904"/>
           </a:xfrm>
           <a:prstGeom prst="rect">
             <a:avLst/>
@@ -34611,7 +34670,7 @@
         <p:spPr>
           <a:xfrm>
             <a:off x="9124798" y="2121408"/>
-            <a:ext cx="10973" cy="4169664"/>
+            <a:ext cx="10973" cy="3803904"/>
           </a:xfrm>
           <a:prstGeom prst="rect">
             <a:avLst/>
@@ -34631,7 +34690,7 @@
         <p:spPr>
           <a:xfrm>
             <a:off x="6085332" y="2121408"/>
-            <a:ext cx="10973" cy="4169664"/>
+            <a:ext cx="10973" cy="3803904"/>
           </a:xfrm>
           <a:prstGeom prst="rect">
             <a:avLst/>
@@ -34641,6 +34700,65 @@
           </a:solidFill>
           <a:ln/>
         </p:spPr>
+      </p:sp>
+      <p:sp>
+        <p:nvSpPr>
+          <p:cNvPr id="190" name="Shape 187"/>
+          <p:cNvSpPr/>
+          <p:nvPr/>
+        </p:nvSpPr>
+        <p:spPr>
+          <a:xfrm>
+            <a:off x="457200" y="6126480"/>
+            <a:ext cx="11274552" cy="371856"/>
+          </a:xfrm>
+          <a:prstGeom prst="rect">
+            <a:avLst/>
+          </a:prstGeom>
+          <a:solidFill>
+            <a:srgbClr val="E6F6EE"/>
+          </a:solidFill>
+          <a:ln/>
+        </p:spPr>
+      </p:sp>
+      <p:sp>
+        <p:nvSpPr>
+          <p:cNvPr id="191" name="Text 188"/>
+          <p:cNvSpPr txBox="1"/>
+          <p:nvPr/>
+        </p:nvSpPr>
+        <p:spPr>
+          <a:xfrm>
+            <a:off x="658368" y="6144768"/>
+            <a:ext cx="10927080" cy="335280"/>
+          </a:xfrm>
+          <a:prstGeom prst="rect">
+            <a:avLst/>
+          </a:prstGeom>
+          <a:noFill/>
+          <a:ln/>
+        </p:spPr>
+        <p:txBody>
+          <a:bodyPr wrap="square" lIns="0" tIns="0" rIns="0" bIns="0" rtlCol="0" anchor="ctr"/>
+          <a:lstStyle/>
+          <a:p>
+            <a:pPr indent="0" marL="0">
+              <a:buNone/>
+            </a:pPr>
+            <a:r>
+              <a:rPr lang="en-US" sz="1600" b="1" dirty="0">
+                <a:solidFill>
+                  <a:srgbClr val="0B7A4A"/>
+                </a:solidFill>
+                <a:latin typeface="Inter" pitchFamily="34" charset="0"/>
+                <a:ea typeface="Inter" pitchFamily="34" charset="-122"/>
+                <a:cs typeface="Inter" pitchFamily="34" charset="-120"/>
+              </a:rPr>
+              <a:t>25 of 33 stores grew.</a:t>
+            </a:r>
+            <a:endParaRPr lang="en-US" sz="1600" dirty="0"/>
+          </a:p>
+        </p:txBody>
       </p:sp>
     </p:spTree>
   </p:cSld>
@@ -43486,7 +43604,7 @@
         <p:spPr>
           <a:xfrm>
             <a:off x="457200" y="1207008"/>
-            <a:ext cx="11274552" cy="5148072"/>
+            <a:ext cx="11274552" cy="4782312"/>
           </a:xfrm>
           <a:prstGeom prst="rect">
             <a:avLst/>
@@ -43819,7 +43937,7 @@
         <p:spPr>
           <a:xfrm>
             <a:off x="658368" y="2121408"/>
-            <a:ext cx="310896" cy="245274"/>
+            <a:ext cx="310896" cy="223759"/>
           </a:xfrm>
           <a:prstGeom prst="rect">
             <a:avLst/>
@@ -43858,7 +43976,7 @@
         <p:spPr>
           <a:xfrm>
             <a:off x="1014984" y="2121408"/>
-            <a:ext cx="1920240" cy="245274"/>
+            <a:ext cx="1920240" cy="223759"/>
           </a:xfrm>
           <a:prstGeom prst="rect">
             <a:avLst/>
@@ -43896,8 +44014,8 @@
         </p:nvSpPr>
         <p:spPr>
           <a:xfrm>
-            <a:off x="3579876" y="2187632"/>
-            <a:ext cx="571500" cy="112826"/>
+            <a:off x="3579876" y="2181823"/>
+            <a:ext cx="571500" cy="102929"/>
           </a:xfrm>
           <a:prstGeom prst="rect">
             <a:avLst/>
@@ -43917,7 +44035,7 @@
         <p:spPr>
           <a:xfrm>
             <a:off x="4206240" y="2121408"/>
-            <a:ext cx="777240" cy="245274"/>
+            <a:ext cx="777240" cy="223759"/>
           </a:xfrm>
           <a:prstGeom prst="rect">
             <a:avLst/>
@@ -43956,7 +44074,7 @@
         <p:spPr>
           <a:xfrm>
             <a:off x="4983480" y="2121408"/>
-            <a:ext cx="868680" cy="245274"/>
+            <a:ext cx="868680" cy="223759"/>
           </a:xfrm>
           <a:prstGeom prst="rect">
             <a:avLst/>
@@ -43994,8 +44112,8 @@
         </p:nvSpPr>
         <p:spPr>
           <a:xfrm>
-            <a:off x="658368" y="2366682"/>
-            <a:ext cx="310896" cy="245274"/>
+            <a:off x="658368" y="2345167"/>
+            <a:ext cx="310896" cy="223759"/>
           </a:xfrm>
           <a:prstGeom prst="rect">
             <a:avLst/>
@@ -44033,8 +44151,8 @@
         </p:nvSpPr>
         <p:spPr>
           <a:xfrm>
-            <a:off x="1014984" y="2366682"/>
-            <a:ext cx="1920240" cy="245274"/>
+            <a:off x="1014984" y="2345167"/>
+            <a:ext cx="1920240" cy="223759"/>
           </a:xfrm>
           <a:prstGeom prst="rect">
             <a:avLst/>
@@ -44072,8 +44190,8 @@
         </p:nvSpPr>
         <p:spPr>
           <a:xfrm>
-            <a:off x="3579876" y="2432906"/>
-            <a:ext cx="540193" cy="112826"/>
+            <a:off x="3579876" y="2405582"/>
+            <a:ext cx="540193" cy="102929"/>
           </a:xfrm>
           <a:prstGeom prst="rect">
             <a:avLst/>
@@ -44092,8 +44210,8 @@
         </p:nvSpPr>
         <p:spPr>
           <a:xfrm>
-            <a:off x="4206240" y="2366682"/>
-            <a:ext cx="777240" cy="245274"/>
+            <a:off x="4206240" y="2345167"/>
+            <a:ext cx="777240" cy="223759"/>
           </a:xfrm>
           <a:prstGeom prst="rect">
             <a:avLst/>
@@ -44131,8 +44249,8 @@
         </p:nvSpPr>
         <p:spPr>
           <a:xfrm>
-            <a:off x="4983480" y="2366682"/>
-            <a:ext cx="868680" cy="245274"/>
+            <a:off x="4983480" y="2345167"/>
+            <a:ext cx="868680" cy="223759"/>
           </a:xfrm>
           <a:prstGeom prst="rect">
             <a:avLst/>
@@ -44170,8 +44288,8 @@
         </p:nvSpPr>
         <p:spPr>
           <a:xfrm>
-            <a:off x="658368" y="2611957"/>
-            <a:ext cx="310896" cy="245274"/>
+            <a:off x="658368" y="2568926"/>
+            <a:ext cx="310896" cy="223759"/>
           </a:xfrm>
           <a:prstGeom prst="rect">
             <a:avLst/>
@@ -44209,8 +44327,8 @@
         </p:nvSpPr>
         <p:spPr>
           <a:xfrm>
-            <a:off x="1014984" y="2611957"/>
-            <a:ext cx="1920240" cy="245274"/>
+            <a:off x="1014984" y="2568926"/>
+            <a:ext cx="1920240" cy="223759"/>
           </a:xfrm>
           <a:prstGeom prst="rect">
             <a:avLst/>
@@ -44248,8 +44366,8 @@
         </p:nvSpPr>
         <p:spPr>
           <a:xfrm>
-            <a:off x="3579876" y="2678181"/>
-            <a:ext cx="243705" cy="112826"/>
+            <a:off x="3579876" y="2629341"/>
+            <a:ext cx="243705" cy="102929"/>
           </a:xfrm>
           <a:prstGeom prst="rect">
             <a:avLst/>
@@ -44268,8 +44386,8 @@
         </p:nvSpPr>
         <p:spPr>
           <a:xfrm>
-            <a:off x="4206240" y="2611957"/>
-            <a:ext cx="777240" cy="245274"/>
+            <a:off x="4206240" y="2568926"/>
+            <a:ext cx="777240" cy="223759"/>
           </a:xfrm>
           <a:prstGeom prst="rect">
             <a:avLst/>
@@ -44307,8 +44425,8 @@
         </p:nvSpPr>
         <p:spPr>
           <a:xfrm>
-            <a:off x="4983480" y="2611957"/>
-            <a:ext cx="868680" cy="245274"/>
+            <a:off x="4983480" y="2568926"/>
+            <a:ext cx="868680" cy="223759"/>
           </a:xfrm>
           <a:prstGeom prst="rect">
             <a:avLst/>
@@ -44346,8 +44464,8 @@
         </p:nvSpPr>
         <p:spPr>
           <a:xfrm>
-            <a:off x="5907024" y="2657677"/>
-            <a:ext cx="54864" cy="153834"/>
+            <a:off x="5907024" y="2614646"/>
+            <a:ext cx="54864" cy="132319"/>
           </a:xfrm>
           <a:prstGeom prst="rect">
             <a:avLst/>
@@ -44366,8 +44484,8 @@
         </p:nvSpPr>
         <p:spPr>
           <a:xfrm>
-            <a:off x="658368" y="2857231"/>
-            <a:ext cx="310896" cy="245274"/>
+            <a:off x="658368" y="2792685"/>
+            <a:ext cx="310896" cy="223759"/>
           </a:xfrm>
           <a:prstGeom prst="rect">
             <a:avLst/>
@@ -44405,8 +44523,8 @@
         </p:nvSpPr>
         <p:spPr>
           <a:xfrm>
-            <a:off x="1014984" y="2857231"/>
-            <a:ext cx="1920240" cy="245274"/>
+            <a:off x="1014984" y="2792685"/>
+            <a:ext cx="1920240" cy="223759"/>
           </a:xfrm>
           <a:prstGeom prst="rect">
             <a:avLst/>
@@ -44444,8 +44562,8 @@
         </p:nvSpPr>
         <p:spPr>
           <a:xfrm>
-            <a:off x="3579876" y="2923455"/>
-            <a:ext cx="236000" cy="112826"/>
+            <a:off x="3579876" y="2853100"/>
+            <a:ext cx="236000" cy="102929"/>
           </a:xfrm>
           <a:prstGeom prst="rect">
             <a:avLst/>
@@ -44464,8 +44582,8 @@
         </p:nvSpPr>
         <p:spPr>
           <a:xfrm>
-            <a:off x="4206240" y="2857231"/>
-            <a:ext cx="777240" cy="245274"/>
+            <a:off x="4206240" y="2792685"/>
+            <a:ext cx="777240" cy="223759"/>
           </a:xfrm>
           <a:prstGeom prst="rect">
             <a:avLst/>
@@ -44503,8 +44621,8 @@
         </p:nvSpPr>
         <p:spPr>
           <a:xfrm>
-            <a:off x="4983480" y="2857231"/>
-            <a:ext cx="868680" cy="245274"/>
+            <a:off x="4983480" y="2792685"/>
+            <a:ext cx="868680" cy="223759"/>
           </a:xfrm>
           <a:prstGeom prst="rect">
             <a:avLst/>
@@ -44542,8 +44660,8 @@
         </p:nvSpPr>
         <p:spPr>
           <a:xfrm>
-            <a:off x="658368" y="3102505"/>
-            <a:ext cx="310896" cy="245274"/>
+            <a:off x="658368" y="3016444"/>
+            <a:ext cx="310896" cy="223759"/>
           </a:xfrm>
           <a:prstGeom prst="rect">
             <a:avLst/>
@@ -44581,8 +44699,8 @@
         </p:nvSpPr>
         <p:spPr>
           <a:xfrm>
-            <a:off x="1014984" y="3102505"/>
-            <a:ext cx="1920240" cy="245274"/>
+            <a:off x="1014984" y="3016444"/>
+            <a:ext cx="1920240" cy="223759"/>
           </a:xfrm>
           <a:prstGeom prst="rect">
             <a:avLst/>
@@ -44620,8 +44738,8 @@
         </p:nvSpPr>
         <p:spPr>
           <a:xfrm>
-            <a:off x="3579876" y="3168729"/>
-            <a:ext cx="232878" cy="112826"/>
+            <a:off x="3579876" y="3076859"/>
+            <a:ext cx="232878" cy="102929"/>
           </a:xfrm>
           <a:prstGeom prst="rect">
             <a:avLst/>
@@ -44640,8 +44758,8 @@
         </p:nvSpPr>
         <p:spPr>
           <a:xfrm>
-            <a:off x="4206240" y="3102505"/>
-            <a:ext cx="777240" cy="245274"/>
+            <a:off x="4206240" y="3016444"/>
+            <a:ext cx="777240" cy="223759"/>
           </a:xfrm>
           <a:prstGeom prst="rect">
             <a:avLst/>
@@ -44679,8 +44797,8 @@
         </p:nvSpPr>
         <p:spPr>
           <a:xfrm>
-            <a:off x="4983480" y="3102505"/>
-            <a:ext cx="868680" cy="245274"/>
+            <a:off x="4983480" y="3016444"/>
+            <a:ext cx="868680" cy="223759"/>
           </a:xfrm>
           <a:prstGeom prst="rect">
             <a:avLst/>
@@ -44718,8 +44836,8 @@
         </p:nvSpPr>
         <p:spPr>
           <a:xfrm>
-            <a:off x="658368" y="3347780"/>
-            <a:ext cx="310896" cy="245274"/>
+            <a:off x="658368" y="3240203"/>
+            <a:ext cx="310896" cy="223759"/>
           </a:xfrm>
           <a:prstGeom prst="rect">
             <a:avLst/>
@@ -44757,8 +44875,8 @@
         </p:nvSpPr>
         <p:spPr>
           <a:xfrm>
-            <a:off x="1014984" y="3347780"/>
-            <a:ext cx="1920240" cy="245274"/>
+            <a:off x="1014984" y="3240203"/>
+            <a:ext cx="1920240" cy="223759"/>
           </a:xfrm>
           <a:prstGeom prst="rect">
             <a:avLst/>
@@ -44796,8 +44914,8 @@
         </p:nvSpPr>
         <p:spPr>
           <a:xfrm>
-            <a:off x="3579876" y="3414004"/>
-            <a:ext cx="229387" cy="112826"/>
+            <a:off x="3579876" y="3300618"/>
+            <a:ext cx="229387" cy="102929"/>
           </a:xfrm>
           <a:prstGeom prst="rect">
             <a:avLst/>
@@ -44816,8 +44934,8 @@
         </p:nvSpPr>
         <p:spPr>
           <a:xfrm>
-            <a:off x="4206240" y="3347780"/>
-            <a:ext cx="777240" cy="245274"/>
+            <a:off x="4206240" y="3240203"/>
+            <a:ext cx="777240" cy="223759"/>
           </a:xfrm>
           <a:prstGeom prst="rect">
             <a:avLst/>
@@ -44855,8 +44973,8 @@
         </p:nvSpPr>
         <p:spPr>
           <a:xfrm>
-            <a:off x="4983480" y="3347780"/>
-            <a:ext cx="868680" cy="245274"/>
+            <a:off x="4983480" y="3240203"/>
+            <a:ext cx="868680" cy="223759"/>
           </a:xfrm>
           <a:prstGeom prst="rect">
             <a:avLst/>
@@ -44894,8 +45012,8 @@
         </p:nvSpPr>
         <p:spPr>
           <a:xfrm>
-            <a:off x="658368" y="3593054"/>
-            <a:ext cx="310896" cy="245274"/>
+            <a:off x="658368" y="3463962"/>
+            <a:ext cx="310896" cy="223759"/>
           </a:xfrm>
           <a:prstGeom prst="rect">
             <a:avLst/>
@@ -44933,8 +45051,8 @@
         </p:nvSpPr>
         <p:spPr>
           <a:xfrm>
-            <a:off x="1014984" y="3593054"/>
-            <a:ext cx="1920240" cy="245274"/>
+            <a:off x="1014984" y="3463962"/>
+            <a:ext cx="1920240" cy="223759"/>
           </a:xfrm>
           <a:prstGeom prst="rect">
             <a:avLst/>
@@ -44972,8 +45090,8 @@
         </p:nvSpPr>
         <p:spPr>
           <a:xfrm>
-            <a:off x="3579876" y="3659278"/>
-            <a:ext cx="181006" cy="112826"/>
+            <a:off x="3579876" y="3524377"/>
+            <a:ext cx="181006" cy="102929"/>
           </a:xfrm>
           <a:prstGeom prst="rect">
             <a:avLst/>
@@ -44992,8 +45110,8 @@
         </p:nvSpPr>
         <p:spPr>
           <a:xfrm>
-            <a:off x="4206240" y="3593054"/>
-            <a:ext cx="777240" cy="245274"/>
+            <a:off x="4206240" y="3463962"/>
+            <a:ext cx="777240" cy="223759"/>
           </a:xfrm>
           <a:prstGeom prst="rect">
             <a:avLst/>
@@ -45031,8 +45149,8 @@
         </p:nvSpPr>
         <p:spPr>
           <a:xfrm>
-            <a:off x="4983480" y="3593054"/>
-            <a:ext cx="868680" cy="245274"/>
+            <a:off x="4983480" y="3463962"/>
+            <a:ext cx="868680" cy="223759"/>
           </a:xfrm>
           <a:prstGeom prst="rect">
             <a:avLst/>
@@ -45070,8 +45188,8 @@
         </p:nvSpPr>
         <p:spPr>
           <a:xfrm>
-            <a:off x="5907024" y="3638774"/>
-            <a:ext cx="54864" cy="153834"/>
+            <a:off x="5907024" y="3509682"/>
+            <a:ext cx="54864" cy="132319"/>
           </a:xfrm>
           <a:prstGeom prst="rect">
             <a:avLst/>
@@ -45090,8 +45208,8 @@
         </p:nvSpPr>
         <p:spPr>
           <a:xfrm>
-            <a:off x="658368" y="3838328"/>
-            <a:ext cx="310896" cy="245274"/>
+            <a:off x="658368" y="3687721"/>
+            <a:ext cx="310896" cy="223759"/>
           </a:xfrm>
           <a:prstGeom prst="rect">
             <a:avLst/>
@@ -45129,8 +45247,8 @@
         </p:nvSpPr>
         <p:spPr>
           <a:xfrm>
-            <a:off x="1014984" y="3838328"/>
-            <a:ext cx="1920240" cy="245274"/>
+            <a:off x="1014984" y="3687721"/>
+            <a:ext cx="1920240" cy="223759"/>
           </a:xfrm>
           <a:prstGeom prst="rect">
             <a:avLst/>
@@ -45168,8 +45286,8 @@
         </p:nvSpPr>
         <p:spPr>
           <a:xfrm>
-            <a:off x="3579876" y="3904553"/>
-            <a:ext cx="148529" cy="112826"/>
+            <a:off x="3579876" y="3748136"/>
+            <a:ext cx="148529" cy="102929"/>
           </a:xfrm>
           <a:prstGeom prst="rect">
             <a:avLst/>
@@ -45188,8 +45306,8 @@
         </p:nvSpPr>
         <p:spPr>
           <a:xfrm>
-            <a:off x="4206240" y="3838328"/>
-            <a:ext cx="777240" cy="245274"/>
+            <a:off x="4206240" y="3687721"/>
+            <a:ext cx="777240" cy="223759"/>
           </a:xfrm>
           <a:prstGeom prst="rect">
             <a:avLst/>
@@ -45227,8 +45345,8 @@
         </p:nvSpPr>
         <p:spPr>
           <a:xfrm>
-            <a:off x="4983480" y="3838328"/>
-            <a:ext cx="868680" cy="245274"/>
+            <a:off x="4983480" y="3687721"/>
+            <a:ext cx="868680" cy="223759"/>
           </a:xfrm>
           <a:prstGeom prst="rect">
             <a:avLst/>
@@ -45266,8 +45384,8 @@
         </p:nvSpPr>
         <p:spPr>
           <a:xfrm>
-            <a:off x="658368" y="4083603"/>
-            <a:ext cx="310896" cy="245274"/>
+            <a:off x="658368" y="3911480"/>
+            <a:ext cx="310896" cy="223759"/>
           </a:xfrm>
           <a:prstGeom prst="rect">
             <a:avLst/>
@@ -45305,8 +45423,8 @@
         </p:nvSpPr>
         <p:spPr>
           <a:xfrm>
-            <a:off x="1014984" y="4083603"/>
-            <a:ext cx="1920240" cy="245274"/>
+            <a:off x="1014984" y="3911480"/>
+            <a:ext cx="1920240" cy="223759"/>
           </a:xfrm>
           <a:prstGeom prst="rect">
             <a:avLst/>
@@ -45344,8 +45462,8 @@
         </p:nvSpPr>
         <p:spPr>
           <a:xfrm>
-            <a:off x="3579876" y="4149827"/>
-            <a:ext cx="146541" cy="112826"/>
+            <a:off x="3579876" y="3971895"/>
+            <a:ext cx="146541" cy="102929"/>
           </a:xfrm>
           <a:prstGeom prst="rect">
             <a:avLst/>
@@ -45364,8 +45482,8 @@
         </p:nvSpPr>
         <p:spPr>
           <a:xfrm>
-            <a:off x="4206240" y="4083603"/>
-            <a:ext cx="777240" cy="245274"/>
+            <a:off x="4206240" y="3911480"/>
+            <a:ext cx="777240" cy="223759"/>
           </a:xfrm>
           <a:prstGeom prst="rect">
             <a:avLst/>
@@ -45403,8 +45521,8 @@
         </p:nvSpPr>
         <p:spPr>
           <a:xfrm>
-            <a:off x="4983480" y="4083603"/>
-            <a:ext cx="868680" cy="245274"/>
+            <a:off x="4983480" y="3911480"/>
+            <a:ext cx="868680" cy="223759"/>
           </a:xfrm>
           <a:prstGeom prst="rect">
             <a:avLst/>
@@ -45442,8 +45560,8 @@
         </p:nvSpPr>
         <p:spPr>
           <a:xfrm>
-            <a:off x="658368" y="4328877"/>
-            <a:ext cx="310896" cy="245274"/>
+            <a:off x="658368" y="4135240"/>
+            <a:ext cx="310896" cy="223759"/>
           </a:xfrm>
           <a:prstGeom prst="rect">
             <a:avLst/>
@@ -45481,8 +45599,8 @@
         </p:nvSpPr>
         <p:spPr>
           <a:xfrm>
-            <a:off x="1014984" y="4328877"/>
-            <a:ext cx="1920240" cy="245274"/>
+            <a:off x="1014984" y="4135240"/>
+            <a:ext cx="1920240" cy="223759"/>
           </a:xfrm>
           <a:prstGeom prst="rect">
             <a:avLst/>
@@ -45520,8 +45638,8 @@
         </p:nvSpPr>
         <p:spPr>
           <a:xfrm>
-            <a:off x="3579876" y="4395101"/>
-            <a:ext cx="131469" cy="112826"/>
+            <a:off x="3579876" y="4195654"/>
+            <a:ext cx="131469" cy="102929"/>
           </a:xfrm>
           <a:prstGeom prst="rect">
             <a:avLst/>
@@ -45540,8 +45658,8 @@
         </p:nvSpPr>
         <p:spPr>
           <a:xfrm>
-            <a:off x="4206240" y="4328877"/>
-            <a:ext cx="777240" cy="245274"/>
+            <a:off x="4206240" y="4135240"/>
+            <a:ext cx="777240" cy="223759"/>
           </a:xfrm>
           <a:prstGeom prst="rect">
             <a:avLst/>
@@ -45579,8 +45697,8 @@
         </p:nvSpPr>
         <p:spPr>
           <a:xfrm>
-            <a:off x="4983480" y="4328877"/>
-            <a:ext cx="868680" cy="245274"/>
+            <a:off x="4983480" y="4135240"/>
+            <a:ext cx="868680" cy="223759"/>
           </a:xfrm>
           <a:prstGeom prst="rect">
             <a:avLst/>
@@ -45618,8 +45736,8 @@
         </p:nvSpPr>
         <p:spPr>
           <a:xfrm>
-            <a:off x="5907024" y="4374597"/>
-            <a:ext cx="54864" cy="153834"/>
+            <a:off x="5907024" y="4180960"/>
+            <a:ext cx="54864" cy="132319"/>
           </a:xfrm>
           <a:prstGeom prst="rect">
             <a:avLst/>
@@ -45638,8 +45756,8 @@
         </p:nvSpPr>
         <p:spPr>
           <a:xfrm>
-            <a:off x="658368" y="4574152"/>
-            <a:ext cx="310896" cy="245274"/>
+            <a:off x="658368" y="4358999"/>
+            <a:ext cx="310896" cy="223759"/>
           </a:xfrm>
           <a:prstGeom prst="rect">
             <a:avLst/>
@@ -45677,8 +45795,8 @@
         </p:nvSpPr>
         <p:spPr>
           <a:xfrm>
-            <a:off x="1014984" y="4574152"/>
-            <a:ext cx="1920240" cy="245274"/>
+            <a:off x="1014984" y="4358999"/>
+            <a:ext cx="1920240" cy="223759"/>
           </a:xfrm>
           <a:prstGeom prst="rect">
             <a:avLst/>
@@ -45716,8 +45834,8 @@
         </p:nvSpPr>
         <p:spPr>
           <a:xfrm>
-            <a:off x="3579876" y="4640376"/>
-            <a:ext cx="120062" cy="112826"/>
+            <a:off x="3579876" y="4419414"/>
+            <a:ext cx="120062" cy="102929"/>
           </a:xfrm>
           <a:prstGeom prst="rect">
             <a:avLst/>
@@ -45736,8 +45854,8 @@
         </p:nvSpPr>
         <p:spPr>
           <a:xfrm>
-            <a:off x="4206240" y="4574152"/>
-            <a:ext cx="777240" cy="245274"/>
+            <a:off x="4206240" y="4358999"/>
+            <a:ext cx="777240" cy="223759"/>
           </a:xfrm>
           <a:prstGeom prst="rect">
             <a:avLst/>
@@ -45775,8 +45893,8 @@
         </p:nvSpPr>
         <p:spPr>
           <a:xfrm>
-            <a:off x="4983480" y="4574152"/>
-            <a:ext cx="868680" cy="245274"/>
+            <a:off x="4983480" y="4358999"/>
+            <a:ext cx="868680" cy="223759"/>
           </a:xfrm>
           <a:prstGeom prst="rect">
             <a:avLst/>
@@ -45814,8 +45932,8 @@
         </p:nvSpPr>
         <p:spPr>
           <a:xfrm>
-            <a:off x="658368" y="4819426"/>
-            <a:ext cx="310896" cy="245274"/>
+            <a:off x="658368" y="4582758"/>
+            <a:ext cx="310896" cy="223759"/>
           </a:xfrm>
           <a:prstGeom prst="rect">
             <a:avLst/>
@@ -45853,8 +45971,8 @@
         </p:nvSpPr>
         <p:spPr>
           <a:xfrm>
-            <a:off x="1014984" y="4819426"/>
-            <a:ext cx="1920240" cy="245274"/>
+            <a:off x="1014984" y="4582758"/>
+            <a:ext cx="1920240" cy="223759"/>
           </a:xfrm>
           <a:prstGeom prst="rect">
             <a:avLst/>
@@ -45892,8 +46010,8 @@
         </p:nvSpPr>
         <p:spPr>
           <a:xfrm>
-            <a:off x="3579876" y="4885650"/>
-            <a:ext cx="111374" cy="112826"/>
+            <a:off x="3579876" y="4643173"/>
+            <a:ext cx="111374" cy="102929"/>
           </a:xfrm>
           <a:prstGeom prst="rect">
             <a:avLst/>
@@ -45912,8 +46030,8 @@
         </p:nvSpPr>
         <p:spPr>
           <a:xfrm>
-            <a:off x="4206240" y="4819426"/>
-            <a:ext cx="777240" cy="245274"/>
+            <a:off x="4206240" y="4582758"/>
+            <a:ext cx="777240" cy="223759"/>
           </a:xfrm>
           <a:prstGeom prst="rect">
             <a:avLst/>
@@ -45951,8 +46069,8 @@
         </p:nvSpPr>
         <p:spPr>
           <a:xfrm>
-            <a:off x="4983480" y="4819426"/>
-            <a:ext cx="868680" cy="245274"/>
+            <a:off x="4983480" y="4582758"/>
+            <a:ext cx="868680" cy="223759"/>
           </a:xfrm>
           <a:prstGeom prst="rect">
             <a:avLst/>
@@ -45990,8 +46108,8 @@
         </p:nvSpPr>
         <p:spPr>
           <a:xfrm>
-            <a:off x="658368" y="5064700"/>
-            <a:ext cx="310896" cy="245274"/>
+            <a:off x="658368" y="4806517"/>
+            <a:ext cx="310896" cy="223759"/>
           </a:xfrm>
           <a:prstGeom prst="rect">
             <a:avLst/>
@@ -46029,8 +46147,8 @@
         </p:nvSpPr>
         <p:spPr>
           <a:xfrm>
-            <a:off x="1014984" y="5064700"/>
-            <a:ext cx="1920240" cy="245274"/>
+            <a:off x="1014984" y="4806517"/>
+            <a:ext cx="1920240" cy="223759"/>
           </a:xfrm>
           <a:prstGeom prst="rect">
             <a:avLst/>
@@ -46068,8 +46186,8 @@
         </p:nvSpPr>
         <p:spPr>
           <a:xfrm>
-            <a:off x="3579876" y="5130924"/>
-            <a:ext cx="89160" cy="112826"/>
+            <a:off x="3579876" y="4866932"/>
+            <a:ext cx="89160" cy="102929"/>
           </a:xfrm>
           <a:prstGeom prst="rect">
             <a:avLst/>
@@ -46088,8 +46206,8 @@
         </p:nvSpPr>
         <p:spPr>
           <a:xfrm>
-            <a:off x="4206240" y="5064700"/>
-            <a:ext cx="777240" cy="245274"/>
+            <a:off x="4206240" y="4806517"/>
+            <a:ext cx="777240" cy="223759"/>
           </a:xfrm>
           <a:prstGeom prst="rect">
             <a:avLst/>
@@ -46127,8 +46245,8 @@
         </p:nvSpPr>
         <p:spPr>
           <a:xfrm>
-            <a:off x="4983480" y="5064700"/>
-            <a:ext cx="868680" cy="245274"/>
+            <a:off x="4983480" y="4806517"/>
+            <a:ext cx="868680" cy="223759"/>
           </a:xfrm>
           <a:prstGeom prst="rect">
             <a:avLst/>
@@ -46166,8 +46284,8 @@
         </p:nvSpPr>
         <p:spPr>
           <a:xfrm>
-            <a:off x="658368" y="5309975"/>
-            <a:ext cx="310896" cy="245274"/>
+            <a:off x="658368" y="5030276"/>
+            <a:ext cx="310896" cy="223759"/>
           </a:xfrm>
           <a:prstGeom prst="rect">
             <a:avLst/>
@@ -46205,8 +46323,8 @@
         </p:nvSpPr>
         <p:spPr>
           <a:xfrm>
-            <a:off x="1014984" y="5309975"/>
-            <a:ext cx="1920240" cy="245274"/>
+            <a:off x="1014984" y="5030276"/>
+            <a:ext cx="1920240" cy="223759"/>
           </a:xfrm>
           <a:prstGeom prst="rect">
             <a:avLst/>
@@ -46244,8 +46362,8 @@
         </p:nvSpPr>
         <p:spPr>
           <a:xfrm>
-            <a:off x="3579876" y="5376199"/>
-            <a:ext cx="82605" cy="112826"/>
+            <a:off x="3579876" y="5090691"/>
+            <a:ext cx="82605" cy="102929"/>
           </a:xfrm>
           <a:prstGeom prst="rect">
             <a:avLst/>
@@ -46264,8 +46382,8 @@
         </p:nvSpPr>
         <p:spPr>
           <a:xfrm>
-            <a:off x="4206240" y="5309975"/>
-            <a:ext cx="777240" cy="245274"/>
+            <a:off x="4206240" y="5030276"/>
+            <a:ext cx="777240" cy="223759"/>
           </a:xfrm>
           <a:prstGeom prst="rect">
             <a:avLst/>
@@ -46303,8 +46421,8 @@
         </p:nvSpPr>
         <p:spPr>
           <a:xfrm>
-            <a:off x="4983480" y="5309975"/>
-            <a:ext cx="868680" cy="245274"/>
+            <a:off x="4983480" y="5030276"/>
+            <a:ext cx="868680" cy="223759"/>
           </a:xfrm>
           <a:prstGeom prst="rect">
             <a:avLst/>
@@ -46342,8 +46460,8 @@
         </p:nvSpPr>
         <p:spPr>
           <a:xfrm>
-            <a:off x="658368" y="5555249"/>
-            <a:ext cx="310896" cy="245274"/>
+            <a:off x="658368" y="5254035"/>
+            <a:ext cx="310896" cy="223759"/>
           </a:xfrm>
           <a:prstGeom prst="rect">
             <a:avLst/>
@@ -46381,8 +46499,8 @@
         </p:nvSpPr>
         <p:spPr>
           <a:xfrm>
-            <a:off x="1014984" y="5555249"/>
-            <a:ext cx="1920240" cy="245274"/>
+            <a:off x="1014984" y="5254035"/>
+            <a:ext cx="1920240" cy="223759"/>
           </a:xfrm>
           <a:prstGeom prst="rect">
             <a:avLst/>
@@ -46420,8 +46538,8 @@
         </p:nvSpPr>
         <p:spPr>
           <a:xfrm>
-            <a:off x="3579876" y="5621473"/>
-            <a:ext cx="76873" cy="112826"/>
+            <a:off x="3579876" y="5314450"/>
+            <a:ext cx="76873" cy="102929"/>
           </a:xfrm>
           <a:prstGeom prst="rect">
             <a:avLst/>
@@ -46440,8 +46558,8 @@
         </p:nvSpPr>
         <p:spPr>
           <a:xfrm>
-            <a:off x="4206240" y="5555249"/>
-            <a:ext cx="777240" cy="245274"/>
+            <a:off x="4206240" y="5254035"/>
+            <a:ext cx="777240" cy="223759"/>
           </a:xfrm>
           <a:prstGeom prst="rect">
             <a:avLst/>
@@ -46479,8 +46597,8 @@
         </p:nvSpPr>
         <p:spPr>
           <a:xfrm>
-            <a:off x="4983480" y="5555249"/>
-            <a:ext cx="868680" cy="245274"/>
+            <a:off x="4983480" y="5254035"/>
+            <a:ext cx="868680" cy="223759"/>
           </a:xfrm>
           <a:prstGeom prst="rect">
             <a:avLst/>
@@ -46518,8 +46636,8 @@
         </p:nvSpPr>
         <p:spPr>
           <a:xfrm>
-            <a:off x="658368" y="5800523"/>
-            <a:ext cx="310896" cy="245274"/>
+            <a:off x="658368" y="5477794"/>
+            <a:ext cx="310896" cy="223759"/>
           </a:xfrm>
           <a:prstGeom prst="rect">
             <a:avLst/>
@@ -46557,8 +46675,8 @@
         </p:nvSpPr>
         <p:spPr>
           <a:xfrm>
-            <a:off x="1014984" y="5800523"/>
-            <a:ext cx="1920240" cy="245274"/>
+            <a:off x="1014984" y="5477794"/>
+            <a:ext cx="1920240" cy="223759"/>
           </a:xfrm>
           <a:prstGeom prst="rect">
             <a:avLst/>
@@ -46596,8 +46714,8 @@
         </p:nvSpPr>
         <p:spPr>
           <a:xfrm>
-            <a:off x="3579876" y="5866747"/>
-            <a:ext cx="74606" cy="112826"/>
+            <a:off x="3579876" y="5538209"/>
+            <a:ext cx="74606" cy="102929"/>
           </a:xfrm>
           <a:prstGeom prst="rect">
             <a:avLst/>
@@ -46616,8 +46734,8 @@
         </p:nvSpPr>
         <p:spPr>
           <a:xfrm>
-            <a:off x="4206240" y="5800523"/>
-            <a:ext cx="777240" cy="245274"/>
+            <a:off x="4206240" y="5477794"/>
+            <a:ext cx="777240" cy="223759"/>
           </a:xfrm>
           <a:prstGeom prst="rect">
             <a:avLst/>
@@ -46655,8 +46773,8 @@
         </p:nvSpPr>
         <p:spPr>
           <a:xfrm>
-            <a:off x="4983480" y="5800523"/>
-            <a:ext cx="868680" cy="245274"/>
+            <a:off x="4983480" y="5477794"/>
+            <a:ext cx="868680" cy="223759"/>
           </a:xfrm>
           <a:prstGeom prst="rect">
             <a:avLst/>
@@ -46694,8 +46812,8 @@
         </p:nvSpPr>
         <p:spPr>
           <a:xfrm>
-            <a:off x="658368" y="6045798"/>
-            <a:ext cx="310896" cy="245274"/>
+            <a:off x="658368" y="5701553"/>
+            <a:ext cx="310896" cy="223759"/>
           </a:xfrm>
           <a:prstGeom prst="rect">
             <a:avLst/>
@@ -46733,8 +46851,8 @@
         </p:nvSpPr>
         <p:spPr>
           <a:xfrm>
-            <a:off x="1014984" y="6045798"/>
-            <a:ext cx="1920240" cy="245274"/>
+            <a:off x="1014984" y="5701553"/>
+            <a:ext cx="1920240" cy="223759"/>
           </a:xfrm>
           <a:prstGeom prst="rect">
             <a:avLst/>
@@ -46772,8 +46890,8 @@
         </p:nvSpPr>
         <p:spPr>
           <a:xfrm>
-            <a:off x="3579876" y="6112022"/>
-            <a:ext cx="64461" cy="112826"/>
+            <a:off x="3579876" y="5761968"/>
+            <a:ext cx="64461" cy="102929"/>
           </a:xfrm>
           <a:prstGeom prst="rect">
             <a:avLst/>
@@ -46792,8 +46910,8 @@
         </p:nvSpPr>
         <p:spPr>
           <a:xfrm>
-            <a:off x="4206240" y="6045798"/>
-            <a:ext cx="777240" cy="245274"/>
+            <a:off x="4206240" y="5701553"/>
+            <a:ext cx="777240" cy="223759"/>
           </a:xfrm>
           <a:prstGeom prst="rect">
             <a:avLst/>
@@ -46831,8 +46949,8 @@
         </p:nvSpPr>
         <p:spPr>
           <a:xfrm>
-            <a:off x="4983480" y="6045798"/>
-            <a:ext cx="868680" cy="245274"/>
+            <a:off x="4983480" y="5701553"/>
+            <a:ext cx="868680" cy="223759"/>
           </a:xfrm>
           <a:prstGeom prst="rect">
             <a:avLst/>
@@ -46871,7 +46989,7 @@
         <p:spPr>
           <a:xfrm>
             <a:off x="6208776" y="2121408"/>
-            <a:ext cx="310896" cy="245274"/>
+            <a:ext cx="310896" cy="223759"/>
           </a:xfrm>
           <a:prstGeom prst="rect">
             <a:avLst/>
@@ -46910,7 +47028,7 @@
         <p:spPr>
           <a:xfrm>
             <a:off x="6565392" y="2121408"/>
-            <a:ext cx="1920240" cy="245274"/>
+            <a:ext cx="1920240" cy="223759"/>
           </a:xfrm>
           <a:prstGeom prst="rect">
             <a:avLst/>
@@ -46948,8 +47066,8 @@
         </p:nvSpPr>
         <p:spPr>
           <a:xfrm>
-            <a:off x="9130284" y="2187632"/>
-            <a:ext cx="61599" cy="112826"/>
+            <a:off x="9130284" y="2181823"/>
+            <a:ext cx="61599" cy="102929"/>
           </a:xfrm>
           <a:prstGeom prst="rect">
             <a:avLst/>
@@ -46969,7 +47087,7 @@
         <p:spPr>
           <a:xfrm>
             <a:off x="9756648" y="2121408"/>
-            <a:ext cx="777240" cy="245274"/>
+            <a:ext cx="777240" cy="223759"/>
           </a:xfrm>
           <a:prstGeom prst="rect">
             <a:avLst/>
@@ -47008,7 +47126,7 @@
         <p:spPr>
           <a:xfrm>
             <a:off x="10533888" y="2121408"/>
-            <a:ext cx="868680" cy="245274"/>
+            <a:ext cx="868680" cy="223759"/>
           </a:xfrm>
           <a:prstGeom prst="rect">
             <a:avLst/>
@@ -47046,8 +47164,8 @@
         </p:nvSpPr>
         <p:spPr>
           <a:xfrm>
-            <a:off x="6208776" y="2366682"/>
-            <a:ext cx="310896" cy="245274"/>
+            <a:off x="6208776" y="2345167"/>
+            <a:ext cx="310896" cy="223759"/>
           </a:xfrm>
           <a:prstGeom prst="rect">
             <a:avLst/>
@@ -47085,8 +47203,8 @@
         </p:nvSpPr>
         <p:spPr>
           <a:xfrm>
-            <a:off x="6565392" y="2366682"/>
-            <a:ext cx="1920240" cy="245274"/>
+            <a:off x="6565392" y="2345167"/>
+            <a:ext cx="1920240" cy="223759"/>
           </a:xfrm>
           <a:prstGeom prst="rect">
             <a:avLst/>
@@ -47124,8 +47242,8 @@
         </p:nvSpPr>
         <p:spPr>
           <a:xfrm>
-            <a:off x="9130284" y="2432906"/>
-            <a:ext cx="43013" cy="112826"/>
+            <a:off x="9130284" y="2405582"/>
+            <a:ext cx="43013" cy="102929"/>
           </a:xfrm>
           <a:prstGeom prst="rect">
             <a:avLst/>
@@ -47144,8 +47262,8 @@
         </p:nvSpPr>
         <p:spPr>
           <a:xfrm>
-            <a:off x="9756648" y="2366682"/>
-            <a:ext cx="777240" cy="245274"/>
+            <a:off x="9756648" y="2345167"/>
+            <a:ext cx="777240" cy="223759"/>
           </a:xfrm>
           <a:prstGeom prst="rect">
             <a:avLst/>
@@ -47183,8 +47301,8 @@
         </p:nvSpPr>
         <p:spPr>
           <a:xfrm>
-            <a:off x="10533888" y="2366682"/>
-            <a:ext cx="868680" cy="245274"/>
+            <a:off x="10533888" y="2345167"/>
+            <a:ext cx="868680" cy="223759"/>
           </a:xfrm>
           <a:prstGeom prst="rect">
             <a:avLst/>
@@ -47222,8 +47340,8 @@
         </p:nvSpPr>
         <p:spPr>
           <a:xfrm>
-            <a:off x="6208776" y="2611957"/>
-            <a:ext cx="310896" cy="245274"/>
+            <a:off x="6208776" y="2568926"/>
+            <a:ext cx="310896" cy="223759"/>
           </a:xfrm>
           <a:prstGeom prst="rect">
             <a:avLst/>
@@ -47261,8 +47379,8 @@
         </p:nvSpPr>
         <p:spPr>
           <a:xfrm>
-            <a:off x="6565392" y="2611957"/>
-            <a:ext cx="1920240" cy="245274"/>
+            <a:off x="6565392" y="2568926"/>
+            <a:ext cx="1920240" cy="223759"/>
           </a:xfrm>
           <a:prstGeom prst="rect">
             <a:avLst/>
@@ -47300,8 +47418,8 @@
         </p:nvSpPr>
         <p:spPr>
           <a:xfrm>
-            <a:off x="9130284" y="2678181"/>
-            <a:ext cx="25977" cy="112826"/>
+            <a:off x="9130284" y="2629341"/>
+            <a:ext cx="25977" cy="102929"/>
           </a:xfrm>
           <a:prstGeom prst="rect">
             <a:avLst/>
@@ -47320,8 +47438,8 @@
         </p:nvSpPr>
         <p:spPr>
           <a:xfrm>
-            <a:off x="9756648" y="2611957"/>
-            <a:ext cx="777240" cy="245274"/>
+            <a:off x="9756648" y="2568926"/>
+            <a:ext cx="777240" cy="223759"/>
           </a:xfrm>
           <a:prstGeom prst="rect">
             <a:avLst/>
@@ -47359,8 +47477,8 @@
         </p:nvSpPr>
         <p:spPr>
           <a:xfrm>
-            <a:off x="10533888" y="2611957"/>
-            <a:ext cx="868680" cy="245274"/>
+            <a:off x="10533888" y="2568926"/>
+            <a:ext cx="868680" cy="223759"/>
           </a:xfrm>
           <a:prstGeom prst="rect">
             <a:avLst/>
@@ -47398,8 +47516,8 @@
         </p:nvSpPr>
         <p:spPr>
           <a:xfrm>
-            <a:off x="6208776" y="2857231"/>
-            <a:ext cx="310896" cy="245274"/>
+            <a:off x="6208776" y="2792685"/>
+            <a:ext cx="310896" cy="223759"/>
           </a:xfrm>
           <a:prstGeom prst="rect">
             <a:avLst/>
@@ -47437,8 +47555,8 @@
         </p:nvSpPr>
         <p:spPr>
           <a:xfrm>
-            <a:off x="6565392" y="2857231"/>
-            <a:ext cx="1920240" cy="245274"/>
+            <a:off x="6565392" y="2792685"/>
+            <a:ext cx="1920240" cy="223759"/>
           </a:xfrm>
           <a:prstGeom prst="rect">
             <a:avLst/>
@@ -47476,8 +47594,8 @@
         </p:nvSpPr>
         <p:spPr>
           <a:xfrm>
-            <a:off x="9130284" y="2923455"/>
-            <a:ext cx="12802" cy="112826"/>
+            <a:off x="9130284" y="2853100"/>
+            <a:ext cx="12802" cy="102929"/>
           </a:xfrm>
           <a:prstGeom prst="rect">
             <a:avLst/>
@@ -47496,8 +47614,8 @@
         </p:nvSpPr>
         <p:spPr>
           <a:xfrm>
-            <a:off x="9756648" y="2857231"/>
-            <a:ext cx="777240" cy="245274"/>
+            <a:off x="9756648" y="2792685"/>
+            <a:ext cx="777240" cy="223759"/>
           </a:xfrm>
           <a:prstGeom prst="rect">
             <a:avLst/>
@@ -47535,8 +47653,8 @@
         </p:nvSpPr>
         <p:spPr>
           <a:xfrm>
-            <a:off x="10533888" y="2857231"/>
-            <a:ext cx="868680" cy="245274"/>
+            <a:off x="10533888" y="2792685"/>
+            <a:ext cx="868680" cy="223759"/>
           </a:xfrm>
           <a:prstGeom prst="rect">
             <a:avLst/>
@@ -47574,8 +47692,8 @@
         </p:nvSpPr>
         <p:spPr>
           <a:xfrm>
-            <a:off x="6208776" y="3102505"/>
-            <a:ext cx="310896" cy="245274"/>
+            <a:off x="6208776" y="3016444"/>
+            <a:ext cx="310896" cy="223759"/>
           </a:xfrm>
           <a:prstGeom prst="rect">
             <a:avLst/>
@@ -47613,8 +47731,8 @@
         </p:nvSpPr>
         <p:spPr>
           <a:xfrm>
-            <a:off x="6565392" y="3102505"/>
-            <a:ext cx="1920240" cy="245274"/>
+            <a:off x="6565392" y="3016444"/>
+            <a:ext cx="1920240" cy="223759"/>
           </a:xfrm>
           <a:prstGeom prst="rect">
             <a:avLst/>
@@ -47652,8 +47770,8 @@
         </p:nvSpPr>
         <p:spPr>
           <a:xfrm>
-            <a:off x="9130284" y="3168729"/>
-            <a:ext cx="12802" cy="112826"/>
+            <a:off x="9130284" y="3076859"/>
+            <a:ext cx="12802" cy="102929"/>
           </a:xfrm>
           <a:prstGeom prst="rect">
             <a:avLst/>
@@ -47672,8 +47790,8 @@
         </p:nvSpPr>
         <p:spPr>
           <a:xfrm>
-            <a:off x="9756648" y="3102505"/>
-            <a:ext cx="777240" cy="245274"/>
+            <a:off x="9756648" y="3016444"/>
+            <a:ext cx="777240" cy="223759"/>
           </a:xfrm>
           <a:prstGeom prst="rect">
             <a:avLst/>
@@ -47711,8 +47829,8 @@
         </p:nvSpPr>
         <p:spPr>
           <a:xfrm>
-            <a:off x="10533888" y="3102505"/>
-            <a:ext cx="868680" cy="245274"/>
+            <a:off x="10533888" y="3016444"/>
+            <a:ext cx="868680" cy="223759"/>
           </a:xfrm>
           <a:prstGeom prst="rect">
             <a:avLst/>
@@ -47750,8 +47868,8 @@
         </p:nvSpPr>
         <p:spPr>
           <a:xfrm>
-            <a:off x="6208776" y="3347780"/>
-            <a:ext cx="310896" cy="245274"/>
+            <a:off x="6208776" y="3240203"/>
+            <a:ext cx="310896" cy="223759"/>
           </a:xfrm>
           <a:prstGeom prst="rect">
             <a:avLst/>
@@ -47789,8 +47907,8 @@
         </p:nvSpPr>
         <p:spPr>
           <a:xfrm>
-            <a:off x="6565392" y="3347780"/>
-            <a:ext cx="1920240" cy="245274"/>
+            <a:off x="6565392" y="3240203"/>
+            <a:ext cx="1920240" cy="223759"/>
           </a:xfrm>
           <a:prstGeom prst="rect">
             <a:avLst/>
@@ -47828,8 +47946,8 @@
         </p:nvSpPr>
         <p:spPr>
           <a:xfrm>
-            <a:off x="9130284" y="3414004"/>
-            <a:ext cx="12802" cy="112826"/>
+            <a:off x="9130284" y="3300618"/>
+            <a:ext cx="12802" cy="102929"/>
           </a:xfrm>
           <a:prstGeom prst="rect">
             <a:avLst/>
@@ -47848,8 +47966,8 @@
         </p:nvSpPr>
         <p:spPr>
           <a:xfrm>
-            <a:off x="9756648" y="3347780"/>
-            <a:ext cx="777240" cy="245274"/>
+            <a:off x="9756648" y="3240203"/>
+            <a:ext cx="777240" cy="223759"/>
           </a:xfrm>
           <a:prstGeom prst="rect">
             <a:avLst/>
@@ -47887,8 +48005,8 @@
         </p:nvSpPr>
         <p:spPr>
           <a:xfrm>
-            <a:off x="10533888" y="3347780"/>
-            <a:ext cx="868680" cy="245274"/>
+            <a:off x="10533888" y="3240203"/>
+            <a:ext cx="868680" cy="223759"/>
           </a:xfrm>
           <a:prstGeom prst="rect">
             <a:avLst/>
@@ -47926,8 +48044,8 @@
         </p:nvSpPr>
         <p:spPr>
           <a:xfrm>
-            <a:off x="6208776" y="3593054"/>
-            <a:ext cx="310896" cy="245274"/>
+            <a:off x="6208776" y="3463962"/>
+            <a:ext cx="310896" cy="223759"/>
           </a:xfrm>
           <a:prstGeom prst="rect">
             <a:avLst/>
@@ -47965,8 +48083,8 @@
         </p:nvSpPr>
         <p:spPr>
           <a:xfrm>
-            <a:off x="6565392" y="3593054"/>
-            <a:ext cx="1920240" cy="245274"/>
+            <a:off x="6565392" y="3463962"/>
+            <a:ext cx="1920240" cy="223759"/>
           </a:xfrm>
           <a:prstGeom prst="rect">
             <a:avLst/>
@@ -48004,8 +48122,8 @@
         </p:nvSpPr>
         <p:spPr>
           <a:xfrm>
-            <a:off x="9121165" y="3659278"/>
-            <a:ext cx="12802" cy="112826"/>
+            <a:off x="9121165" y="3524377"/>
+            <a:ext cx="12802" cy="102929"/>
           </a:xfrm>
           <a:prstGeom prst="rect">
             <a:avLst/>
@@ -48024,8 +48142,8 @@
         </p:nvSpPr>
         <p:spPr>
           <a:xfrm>
-            <a:off x="9756648" y="3593054"/>
-            <a:ext cx="777240" cy="245274"/>
+            <a:off x="9756648" y="3463962"/>
+            <a:ext cx="777240" cy="223759"/>
           </a:xfrm>
           <a:prstGeom prst="rect">
             <a:avLst/>
@@ -48063,8 +48181,8 @@
         </p:nvSpPr>
         <p:spPr>
           <a:xfrm>
-            <a:off x="10533888" y="3593054"/>
-            <a:ext cx="868680" cy="245274"/>
+            <a:off x="10533888" y="3463962"/>
+            <a:ext cx="868680" cy="223759"/>
           </a:xfrm>
           <a:prstGeom prst="rect">
             <a:avLst/>
@@ -48102,8 +48220,8 @@
         </p:nvSpPr>
         <p:spPr>
           <a:xfrm>
-            <a:off x="6208776" y="3838328"/>
-            <a:ext cx="310896" cy="245274"/>
+            <a:off x="6208776" y="3687721"/>
+            <a:ext cx="310896" cy="223759"/>
           </a:xfrm>
           <a:prstGeom prst="rect">
             <a:avLst/>
@@ -48141,8 +48259,8 @@
         </p:nvSpPr>
         <p:spPr>
           <a:xfrm>
-            <a:off x="6565392" y="3838328"/>
-            <a:ext cx="1920240" cy="245274"/>
+            <a:off x="6565392" y="3687721"/>
+            <a:ext cx="1920240" cy="223759"/>
           </a:xfrm>
           <a:prstGeom prst="rect">
             <a:avLst/>
@@ -48180,8 +48298,8 @@
         </p:nvSpPr>
         <p:spPr>
           <a:xfrm>
-            <a:off x="9119721" y="3904553"/>
-            <a:ext cx="12802" cy="112826"/>
+            <a:off x="9119721" y="3748136"/>
+            <a:ext cx="12802" cy="102929"/>
           </a:xfrm>
           <a:prstGeom prst="rect">
             <a:avLst/>
@@ -48200,8 +48318,8 @@
         </p:nvSpPr>
         <p:spPr>
           <a:xfrm>
-            <a:off x="9756648" y="3838328"/>
-            <a:ext cx="777240" cy="245274"/>
+            <a:off x="9756648" y="3687721"/>
+            <a:ext cx="777240" cy="223759"/>
           </a:xfrm>
           <a:prstGeom prst="rect">
             <a:avLst/>
@@ -48239,8 +48357,8 @@
         </p:nvSpPr>
         <p:spPr>
           <a:xfrm>
-            <a:off x="10533888" y="3838328"/>
-            <a:ext cx="868680" cy="245274"/>
+            <a:off x="10533888" y="3687721"/>
+            <a:ext cx="868680" cy="223759"/>
           </a:xfrm>
           <a:prstGeom prst="rect">
             <a:avLst/>
@@ -48278,8 +48396,8 @@
         </p:nvSpPr>
         <p:spPr>
           <a:xfrm>
-            <a:off x="6208776" y="4083603"/>
-            <a:ext cx="310896" cy="245274"/>
+            <a:off x="6208776" y="3911480"/>
+            <a:ext cx="310896" cy="223759"/>
           </a:xfrm>
           <a:prstGeom prst="rect">
             <a:avLst/>
@@ -48317,8 +48435,8 @@
         </p:nvSpPr>
         <p:spPr>
           <a:xfrm>
-            <a:off x="6565392" y="4083603"/>
-            <a:ext cx="1920240" cy="245274"/>
+            <a:off x="6565392" y="3911480"/>
+            <a:ext cx="1920240" cy="223759"/>
           </a:xfrm>
           <a:prstGeom prst="rect">
             <a:avLst/>
@@ -48356,8 +48474,8 @@
         </p:nvSpPr>
         <p:spPr>
           <a:xfrm>
-            <a:off x="9108276" y="4149827"/>
-            <a:ext cx="22008" cy="112826"/>
+            <a:off x="9108276" y="3971895"/>
+            <a:ext cx="22008" cy="102929"/>
           </a:xfrm>
           <a:prstGeom prst="rect">
             <a:avLst/>
@@ -48376,8 +48494,8 @@
         </p:nvSpPr>
         <p:spPr>
           <a:xfrm>
-            <a:off x="9756648" y="4083603"/>
-            <a:ext cx="777240" cy="245274"/>
+            <a:off x="9756648" y="3911480"/>
+            <a:ext cx="777240" cy="223759"/>
           </a:xfrm>
           <a:prstGeom prst="rect">
             <a:avLst/>
@@ -48415,8 +48533,8 @@
         </p:nvSpPr>
         <p:spPr>
           <a:xfrm>
-            <a:off x="10533888" y="4083603"/>
-            <a:ext cx="868680" cy="245274"/>
+            <a:off x="10533888" y="3911480"/>
+            <a:ext cx="868680" cy="223759"/>
           </a:xfrm>
           <a:prstGeom prst="rect">
             <a:avLst/>
@@ -48454,8 +48572,8 @@
         </p:nvSpPr>
         <p:spPr>
           <a:xfrm>
-            <a:off x="6208776" y="4328877"/>
-            <a:ext cx="310896" cy="245274"/>
+            <a:off x="6208776" y="4135240"/>
+            <a:ext cx="310896" cy="223759"/>
           </a:xfrm>
           <a:prstGeom prst="rect">
             <a:avLst/>
@@ -48493,8 +48611,8 @@
         </p:nvSpPr>
         <p:spPr>
           <a:xfrm>
-            <a:off x="6565392" y="4328877"/>
-            <a:ext cx="1920240" cy="245274"/>
+            <a:off x="6565392" y="4135240"/>
+            <a:ext cx="1920240" cy="223759"/>
           </a:xfrm>
           <a:prstGeom prst="rect">
             <a:avLst/>
@@ -48532,8 +48650,8 @@
         </p:nvSpPr>
         <p:spPr>
           <a:xfrm>
-            <a:off x="9078809" y="4395101"/>
-            <a:ext cx="51475" cy="112826"/>
+            <a:off x="9078809" y="4195654"/>
+            <a:ext cx="51475" cy="102929"/>
           </a:xfrm>
           <a:prstGeom prst="rect">
             <a:avLst/>
@@ -48552,8 +48670,8 @@
         </p:nvSpPr>
         <p:spPr>
           <a:xfrm>
-            <a:off x="9756648" y="4328877"/>
-            <a:ext cx="777240" cy="245274"/>
+            <a:off x="9756648" y="4135240"/>
+            <a:ext cx="777240" cy="223759"/>
           </a:xfrm>
           <a:prstGeom prst="rect">
             <a:avLst/>
@@ -48591,8 +48709,8 @@
         </p:nvSpPr>
         <p:spPr>
           <a:xfrm>
-            <a:off x="10533888" y="4328877"/>
-            <a:ext cx="868680" cy="245274"/>
+            <a:off x="10533888" y="4135240"/>
+            <a:ext cx="868680" cy="223759"/>
           </a:xfrm>
           <a:prstGeom prst="rect">
             <a:avLst/>
@@ -48630,8 +48748,8 @@
         </p:nvSpPr>
         <p:spPr>
           <a:xfrm>
-            <a:off x="11457432" y="4374597"/>
-            <a:ext cx="54864" cy="153834"/>
+            <a:off x="11457432" y="4180960"/>
+            <a:ext cx="54864" cy="132319"/>
           </a:xfrm>
           <a:prstGeom prst="rect">
             <a:avLst/>
@@ -48650,8 +48768,8 @@
         </p:nvSpPr>
         <p:spPr>
           <a:xfrm>
-            <a:off x="6208776" y="4574152"/>
-            <a:ext cx="310896" cy="245274"/>
+            <a:off x="6208776" y="4358999"/>
+            <a:ext cx="310896" cy="223759"/>
           </a:xfrm>
           <a:prstGeom prst="rect">
             <a:avLst/>
@@ -48689,8 +48807,8 @@
         </p:nvSpPr>
         <p:spPr>
           <a:xfrm>
-            <a:off x="6565392" y="4574152"/>
-            <a:ext cx="1920240" cy="245274"/>
+            <a:off x="6565392" y="4358999"/>
+            <a:ext cx="1920240" cy="223759"/>
           </a:xfrm>
           <a:prstGeom prst="rect">
             <a:avLst/>
@@ -48728,8 +48846,8 @@
         </p:nvSpPr>
         <p:spPr>
           <a:xfrm>
-            <a:off x="9057123" y="4640376"/>
-            <a:ext cx="73161" cy="112826"/>
+            <a:off x="9057123" y="4419414"/>
+            <a:ext cx="73161" cy="102929"/>
           </a:xfrm>
           <a:prstGeom prst="rect">
             <a:avLst/>
@@ -48748,8 +48866,8 @@
         </p:nvSpPr>
         <p:spPr>
           <a:xfrm>
-            <a:off x="9756648" y="4574152"/>
-            <a:ext cx="777240" cy="245274"/>
+            <a:off x="9756648" y="4358999"/>
+            <a:ext cx="777240" cy="223759"/>
           </a:xfrm>
           <a:prstGeom prst="rect">
             <a:avLst/>
@@ -48787,8 +48905,8 @@
         </p:nvSpPr>
         <p:spPr>
           <a:xfrm>
-            <a:off x="10533888" y="4574152"/>
-            <a:ext cx="868680" cy="245274"/>
+            <a:off x="10533888" y="4358999"/>
+            <a:ext cx="868680" cy="223759"/>
           </a:xfrm>
           <a:prstGeom prst="rect">
             <a:avLst/>
@@ -48826,8 +48944,8 @@
         </p:nvSpPr>
         <p:spPr>
           <a:xfrm>
-            <a:off x="6208776" y="4819426"/>
-            <a:ext cx="310896" cy="245274"/>
+            <a:off x="6208776" y="4582758"/>
+            <a:ext cx="310896" cy="223759"/>
           </a:xfrm>
           <a:prstGeom prst="rect">
             <a:avLst/>
@@ -48865,8 +48983,8 @@
         </p:nvSpPr>
         <p:spPr>
           <a:xfrm>
-            <a:off x="6565392" y="4819426"/>
-            <a:ext cx="1920240" cy="245274"/>
+            <a:off x="6565392" y="4582758"/>
+            <a:ext cx="1920240" cy="223759"/>
           </a:xfrm>
           <a:prstGeom prst="rect">
             <a:avLst/>
@@ -48904,8 +49022,8 @@
         </p:nvSpPr>
         <p:spPr>
           <a:xfrm>
-            <a:off x="9049734" y="4885650"/>
-            <a:ext cx="80550" cy="112826"/>
+            <a:off x="9049734" y="4643173"/>
+            <a:ext cx="80550" cy="102929"/>
           </a:xfrm>
           <a:prstGeom prst="rect">
             <a:avLst/>
@@ -48924,8 +49042,8 @@
         </p:nvSpPr>
         <p:spPr>
           <a:xfrm>
-            <a:off x="9756648" y="4819426"/>
-            <a:ext cx="777240" cy="245274"/>
+            <a:off x="9756648" y="4582758"/>
+            <a:ext cx="777240" cy="223759"/>
           </a:xfrm>
           <a:prstGeom prst="rect">
             <a:avLst/>
@@ -48963,8 +49081,8 @@
         </p:nvSpPr>
         <p:spPr>
           <a:xfrm>
-            <a:off x="10533888" y="4819426"/>
-            <a:ext cx="868680" cy="245274"/>
+            <a:off x="10533888" y="4582758"/>
+            <a:ext cx="868680" cy="223759"/>
           </a:xfrm>
           <a:prstGeom prst="rect">
             <a:avLst/>
@@ -49002,8 +49120,8 @@
         </p:nvSpPr>
         <p:spPr>
           <a:xfrm>
-            <a:off x="6208776" y="5064700"/>
-            <a:ext cx="310896" cy="245274"/>
+            <a:off x="6208776" y="4806517"/>
+            <a:ext cx="310896" cy="223759"/>
           </a:xfrm>
           <a:prstGeom prst="rect">
             <a:avLst/>
@@ -49041,8 +49159,8 @@
         </p:nvSpPr>
         <p:spPr>
           <a:xfrm>
-            <a:off x="6565392" y="5064700"/>
-            <a:ext cx="1920240" cy="245274"/>
+            <a:off x="6565392" y="4806517"/>
+            <a:ext cx="1920240" cy="223759"/>
           </a:xfrm>
           <a:prstGeom prst="rect">
             <a:avLst/>
@@ -49080,8 +49198,8 @@
         </p:nvSpPr>
         <p:spPr>
           <a:xfrm>
-            <a:off x="8979773" y="5130924"/>
-            <a:ext cx="150511" cy="112826"/>
+            <a:off x="8979773" y="4866932"/>
+            <a:ext cx="150511" cy="102929"/>
           </a:xfrm>
           <a:prstGeom prst="rect">
             <a:avLst/>
@@ -49100,8 +49218,8 @@
         </p:nvSpPr>
         <p:spPr>
           <a:xfrm>
-            <a:off x="9756648" y="5064700"/>
-            <a:ext cx="777240" cy="245274"/>
+            <a:off x="9756648" y="4806517"/>
+            <a:ext cx="777240" cy="223759"/>
           </a:xfrm>
           <a:prstGeom prst="rect">
             <a:avLst/>
@@ -49139,8 +49257,8 @@
         </p:nvSpPr>
         <p:spPr>
           <a:xfrm>
-            <a:off x="10533888" y="5064700"/>
-            <a:ext cx="868680" cy="245274"/>
+            <a:off x="10533888" y="4806517"/>
+            <a:ext cx="868680" cy="223759"/>
           </a:xfrm>
           <a:prstGeom prst="rect">
             <a:avLst/>
@@ -49178,8 +49296,8 @@
         </p:nvSpPr>
         <p:spPr>
           <a:xfrm>
-            <a:off x="6208776" y="5309975"/>
-            <a:ext cx="310896" cy="245274"/>
+            <a:off x="6208776" y="5030276"/>
+            <a:ext cx="310896" cy="223759"/>
           </a:xfrm>
           <a:prstGeom prst="rect">
             <a:avLst/>
@@ -49217,8 +49335,8 @@
         </p:nvSpPr>
         <p:spPr>
           <a:xfrm>
-            <a:off x="6565392" y="5309975"/>
-            <a:ext cx="1920240" cy="245274"/>
+            <a:off x="6565392" y="5030276"/>
+            <a:ext cx="1920240" cy="223759"/>
           </a:xfrm>
           <a:prstGeom prst="rect">
             <a:avLst/>
@@ -49256,8 +49374,8 @@
         </p:nvSpPr>
         <p:spPr>
           <a:xfrm>
-            <a:off x="8963351" y="5376199"/>
-            <a:ext cx="166933" cy="112826"/>
+            <a:off x="8963351" y="5090691"/>
+            <a:ext cx="166933" cy="102929"/>
           </a:xfrm>
           <a:prstGeom prst="rect">
             <a:avLst/>
@@ -49276,8 +49394,8 @@
         </p:nvSpPr>
         <p:spPr>
           <a:xfrm>
-            <a:off x="9756648" y="5309975"/>
-            <a:ext cx="777240" cy="245274"/>
+            <a:off x="9756648" y="5030276"/>
+            <a:ext cx="777240" cy="223759"/>
           </a:xfrm>
           <a:prstGeom prst="rect">
             <a:avLst/>
@@ -49315,8 +49433,8 @@
         </p:nvSpPr>
         <p:spPr>
           <a:xfrm>
-            <a:off x="10533888" y="5309975"/>
-            <a:ext cx="868680" cy="245274"/>
+            <a:off x="10533888" y="5030276"/>
+            <a:ext cx="868680" cy="223759"/>
           </a:xfrm>
           <a:prstGeom prst="rect">
             <a:avLst/>
@@ -49354,8 +49472,8 @@
         </p:nvSpPr>
         <p:spPr>
           <a:xfrm>
-            <a:off x="11457432" y="5355695"/>
-            <a:ext cx="54864" cy="153834"/>
+            <a:off x="11457432" y="5075996"/>
+            <a:ext cx="54864" cy="132319"/>
           </a:xfrm>
           <a:prstGeom prst="rect">
             <a:avLst/>
@@ -49374,8 +49492,8 @@
         </p:nvSpPr>
         <p:spPr>
           <a:xfrm>
-            <a:off x="6208776" y="5555249"/>
-            <a:ext cx="310896" cy="245274"/>
+            <a:off x="6208776" y="5254035"/>
+            <a:ext cx="310896" cy="223759"/>
           </a:xfrm>
           <a:prstGeom prst="rect">
             <a:avLst/>
@@ -49413,8 +49531,8 @@
         </p:nvSpPr>
         <p:spPr>
           <a:xfrm>
-            <a:off x="6565392" y="5555249"/>
-            <a:ext cx="1920240" cy="245274"/>
+            <a:off x="6565392" y="5254035"/>
+            <a:ext cx="1920240" cy="223759"/>
           </a:xfrm>
           <a:prstGeom prst="rect">
             <a:avLst/>
@@ -49452,8 +49570,8 @@
         </p:nvSpPr>
         <p:spPr>
           <a:xfrm>
-            <a:off x="8921692" y="5621473"/>
-            <a:ext cx="208592" cy="112826"/>
+            <a:off x="8921692" y="5314450"/>
+            <a:ext cx="208592" cy="102929"/>
           </a:xfrm>
           <a:prstGeom prst="rect">
             <a:avLst/>
@@ -49472,8 +49590,8 @@
         </p:nvSpPr>
         <p:spPr>
           <a:xfrm>
-            <a:off x="9756648" y="5555249"/>
-            <a:ext cx="777240" cy="245274"/>
+            <a:off x="9756648" y="5254035"/>
+            <a:ext cx="777240" cy="223759"/>
           </a:xfrm>
           <a:prstGeom prst="rect">
             <a:avLst/>
@@ -49511,8 +49629,8 @@
         </p:nvSpPr>
         <p:spPr>
           <a:xfrm>
-            <a:off x="10533888" y="5555249"/>
-            <a:ext cx="868680" cy="245274"/>
+            <a:off x="10533888" y="5254035"/>
+            <a:ext cx="868680" cy="223759"/>
           </a:xfrm>
           <a:prstGeom prst="rect">
             <a:avLst/>
@@ -49550,8 +49668,8 @@
         </p:nvSpPr>
         <p:spPr>
           <a:xfrm>
-            <a:off x="11457432" y="5600969"/>
-            <a:ext cx="54864" cy="153834"/>
+            <a:off x="11457432" y="5299755"/>
+            <a:ext cx="54864" cy="132319"/>
           </a:xfrm>
           <a:prstGeom prst="rect">
             <a:avLst/>
@@ -49570,8 +49688,8 @@
         </p:nvSpPr>
         <p:spPr>
           <a:xfrm>
-            <a:off x="6208776" y="5800523"/>
-            <a:ext cx="310896" cy="245274"/>
+            <a:off x="6208776" y="5477794"/>
+            <a:ext cx="310896" cy="223759"/>
           </a:xfrm>
           <a:prstGeom prst="rect">
             <a:avLst/>
@@ -49609,8 +49727,8 @@
         </p:nvSpPr>
         <p:spPr>
           <a:xfrm>
-            <a:off x="6565392" y="5800523"/>
-            <a:ext cx="1920240" cy="245274"/>
+            <a:off x="6565392" y="5477794"/>
+            <a:ext cx="1920240" cy="223759"/>
           </a:xfrm>
           <a:prstGeom prst="rect">
             <a:avLst/>
@@ -49648,8 +49766,8 @@
         </p:nvSpPr>
         <p:spPr>
           <a:xfrm>
-            <a:off x="8865502" y="5866747"/>
-            <a:ext cx="264782" cy="112826"/>
+            <a:off x="8865502" y="5538209"/>
+            <a:ext cx="264782" cy="102929"/>
           </a:xfrm>
           <a:prstGeom prst="rect">
             <a:avLst/>
@@ -49668,8 +49786,8 @@
         </p:nvSpPr>
         <p:spPr>
           <a:xfrm>
-            <a:off x="9756648" y="5800523"/>
-            <a:ext cx="777240" cy="245274"/>
+            <a:off x="9756648" y="5477794"/>
+            <a:ext cx="777240" cy="223759"/>
           </a:xfrm>
           <a:prstGeom prst="rect">
             <a:avLst/>
@@ -49707,8 +49825,8 @@
         </p:nvSpPr>
         <p:spPr>
           <a:xfrm>
-            <a:off x="10533888" y="5800523"/>
-            <a:ext cx="868680" cy="245274"/>
+            <a:off x="10533888" y="5477794"/>
+            <a:ext cx="868680" cy="223759"/>
           </a:xfrm>
           <a:prstGeom prst="rect">
             <a:avLst/>
@@ -49747,7 +49865,7 @@
         <p:spPr>
           <a:xfrm>
             <a:off x="3574390" y="2121408"/>
-            <a:ext cx="10973" cy="4169664"/>
+            <a:ext cx="10973" cy="3803904"/>
           </a:xfrm>
           <a:prstGeom prst="rect">
             <a:avLst/>
@@ -49767,7 +49885,7 @@
         <p:spPr>
           <a:xfrm>
             <a:off x="9124798" y="2121408"/>
-            <a:ext cx="10973" cy="4169664"/>
+            <a:ext cx="10973" cy="3803904"/>
           </a:xfrm>
           <a:prstGeom prst="rect">
             <a:avLst/>
@@ -49787,7 +49905,7 @@
         <p:spPr>
           <a:xfrm>
             <a:off x="6085332" y="2121408"/>
-            <a:ext cx="10973" cy="4169664"/>
+            <a:ext cx="10973" cy="3803904"/>
           </a:xfrm>
           <a:prstGeom prst="rect">
             <a:avLst/>
@@ -49797,6 +49915,65 @@
           </a:solidFill>
           <a:ln/>
         </p:spPr>
+      </p:sp>
+      <p:sp>
+        <p:nvSpPr>
+          <p:cNvPr id="190" name="Shape 187"/>
+          <p:cNvSpPr/>
+          <p:nvPr/>
+        </p:nvSpPr>
+        <p:spPr>
+          <a:xfrm>
+            <a:off x="457200" y="6126480"/>
+            <a:ext cx="11274552" cy="371856"/>
+          </a:xfrm>
+          <a:prstGeom prst="rect">
+            <a:avLst/>
+          </a:prstGeom>
+          <a:solidFill>
+            <a:srgbClr val="E6F6EE"/>
+          </a:solidFill>
+          <a:ln/>
+        </p:spPr>
+      </p:sp>
+      <p:sp>
+        <p:nvSpPr>
+          <p:cNvPr id="191" name="Text 188"/>
+          <p:cNvSpPr txBox="1"/>
+          <p:nvPr/>
+        </p:nvSpPr>
+        <p:spPr>
+          <a:xfrm>
+            <a:off x="658368" y="6144768"/>
+            <a:ext cx="10927080" cy="335280"/>
+          </a:xfrm>
+          <a:prstGeom prst="rect">
+            <a:avLst/>
+          </a:prstGeom>
+          <a:noFill/>
+          <a:ln/>
+        </p:spPr>
+        <p:txBody>
+          <a:bodyPr wrap="square" lIns="0" tIns="0" rIns="0" bIns="0" rtlCol="0" anchor="ctr"/>
+          <a:lstStyle/>
+          <a:p>
+            <a:pPr indent="0" marL="0">
+              <a:buNone/>
+            </a:pPr>
+            <a:r>
+              <a:rPr lang="en-US" sz="1600" b="1" dirty="0">
+                <a:solidFill>
+                  <a:srgbClr val="0B7A4A"/>
+                </a:solidFill>
+                <a:latin typeface="Inter" pitchFamily="34" charset="0"/>
+                <a:ea typeface="Inter" pitchFamily="34" charset="-122"/>
+                <a:cs typeface="Inter" pitchFamily="34" charset="-120"/>
+              </a:rPr>
+              <a:t>23 of 33 stores grew.</a:t>
+            </a:r>
+            <a:endParaRPr lang="en-US" sz="1600" dirty="0"/>
+          </a:p>
+        </p:txBody>
       </p:sp>
     </p:spTree>
   </p:cSld>

--- a/day2-deck/decks/Fixed Ops Gross - House Style.pptx
+++ b/day2-deck/decks/Fixed Ops Gross - House Style.pptx
@@ -21697,7 +21697,7 @@
                 <a:ea typeface="Inter" pitchFamily="34" charset="-122"/>
                 <a:cs typeface="Inter" pitchFamily="34" charset="-120"/>
               </a:rPr>
-              <a:t>Jul–Sep vs Jan–Mar this year</a:t>
+              <a:t>Q3 vs Q1, this year</a:t>
             </a:r>
             <a:endParaRPr lang="en-US" sz="1200" dirty="0"/>
           </a:p>
@@ -36908,7 +36908,7 @@
                 <a:ea typeface="Inter" pitchFamily="34" charset="-122"/>
                 <a:cs typeface="Inter" pitchFamily="34" charset="-120"/>
               </a:rPr>
-              <a:t>Jul–Sep vs Jan–Mar this year</a:t>
+              <a:t>Q3 vs Q1, this year</a:t>
             </a:r>
             <a:endParaRPr lang="en-US" sz="1200" dirty="0"/>
           </a:p>
@@ -52123,7 +52123,7 @@
                 <a:ea typeface="Inter" pitchFamily="34" charset="-122"/>
                 <a:cs typeface="Inter" pitchFamily="34" charset="-120"/>
               </a:rPr>
-              <a:t>Jul–Sep vs Jan–Mar this year</a:t>
+              <a:t>Q3 vs Q1, this year</a:t>
             </a:r>
             <a:endParaRPr lang="en-US" sz="1200" dirty="0"/>
           </a:p>

--- a/day2-deck/decks/Fixed Ops Gross - House Style.pptx
+++ b/day2-deck/decks/Fixed Ops Gross - House Style.pptx
@@ -6163,7 +6163,7 @@
           <a:p>
             <a:r>
               <a:rPr lang="en-US" dirty="0"/>
-              <a:t>Takeaway with the store call-outs (off the slide): Ask Lincoln, Cadillac and Subaru St George what changed. Ask Hyundai St George, Audi Reno and VW Henderson what got in the way. Ask Audi Henderson, Mazda and Honda Flagstaff what they started this year.Source: Qlik - Profit &amp; Loss. Same-store, INEOS excluded (opened 2026). Fixed ops = service + parts; GMC Prescott body shop gross excluded. Top and bottom five stores by percent change in parts gross, Jan-Sep 2026 vs 2025. Moving now: Jul-Sep 2026 vs Jan-Mar 2026, each store against itself (monthly averages); the group moved +14.4% on the same basis, so part of every store's change is seasonal. Green bar at the right of a row: the store is on both the top five vs last year and the top five moving now.Conversation starter: each top store says one thing they started doing; each bottom store says what got in the way and what they would try. The room trades ideas. Moving now: ask the top three what they started this year.</a:t>
+              <a:t>Takeaway with the store call-outs (off the slide): Ask Lincoln, Cadillac and Subaru St George what changed. Ask Hyundai St George, Audi Reno and VW Henderson what got in the way. Ask Audi Henderson, Mazda and Honda Flagstaff what they started this year.Source: Qlik - Profit &amp; Loss. Same-store, INEOS excluded (opened 2026). Fixed ops = service + parts; GMC Prescott body shop gross excluded. Top and bottom five stores by percent change in parts gross, Jan-Sep 2026 vs 2025. Moving now: Jul-Sep 2026 vs Jan-Mar 2026, each store against itself (monthly averages); the group moved +14.4% on the same basis, so part of every store's change is seasonal. Green bar at the right of a row: the store is on both the top five vs last year and the top five moving now. Blue bar: a turnaround, on the bottom five vs last year and the top five moving now.Conversation starter: each top store says one thing they started doing; each bottom store says what got in the way and what they would try. The room trades ideas. Moving now: ask the top three what they started this year.</a:t>
             </a:r>
             <a:endParaRPr lang="en-US" dirty="0"/>
           </a:p>
@@ -6515,7 +6515,7 @@
           <a:p>
             <a:r>
               <a:rPr lang="en-US" dirty="0"/>
-              <a:t>Takeaway with the store call-outs (off the slide): Ask Hyundai Prescott, Lincoln and Lexus what changed. Ask Acura, VW St George and VW Henderson what got in the way. Ask Mazda, Kia St George and LR Henderson what they started this year.Source: Qlik - Profit &amp; Loss. Same-store, INEOS excluded (opened 2026). Fixed ops = service + parts; GMC Prescott body shop gross excluded. Top and bottom five stores by percent change in fixed ops gross, Jan-Sep 2026 vs 2025. Moving now: Jul-Sep 2026 vs Jan-Mar 2026, each store against itself (monthly averages); the group moved +9.4% on the same basis, so part of every store's change is seasonal. Green bar at the right of a row: the store is on both the top five vs last year and the top five moving now.Conversation starter: each top store says one thing they started doing; each bottom store says what got in the way and what they would try. The room trades ideas. Moving now: ask the top three what they started this year.</a:t>
+              <a:t>Takeaway with the store call-outs (off the slide): Ask Hyundai Prescott, Lincoln and Lexus what changed. Ask Acura, VW St George and VW Henderson what got in the way. Ask Mazda, Kia St George and LR Henderson what they started this year.Source: Qlik - Profit &amp; Loss. Same-store, INEOS excluded (opened 2026). Fixed ops = service + parts; GMC Prescott body shop gross excluded. Top and bottom five stores by percent change in fixed ops gross, Jan-Sep 2026 vs 2025. Moving now: Jul-Sep 2026 vs Jan-Mar 2026, each store against itself (monthly averages); the group moved +9.4% on the same basis, so part of every store's change is seasonal. Green bar at the right of a row: the store is on both the top five vs last year and the top five moving now. Blue bar: a turnaround, on the bottom five vs last year and the top five moving now.Conversation starter: each top store says one thing they started doing; each bottom store says what got in the way and what they would try. The room trades ideas. Moving now: ask the top three what they started this year.</a:t>
             </a:r>
             <a:endParaRPr lang="en-US" dirty="0"/>
           </a:p>
@@ -6867,7 +6867,7 @@
           <a:p>
             <a:r>
               <a:rPr lang="en-US" dirty="0"/>
-              <a:t>Takeaway with the store call-outs (off the slide): Ask Hyundai Prescott, Lincoln and Lexus what changed. Ask Acura, VW St George and VW Henderson what got in the way. Ask Mazda, Kia St George and Hyundai Prescott what they started this year.Source: Qlik - Profit &amp; Loss. Same-store, INEOS excluded (opened 2026). Fixed ops = service + parts; GMC Prescott body shop gross excluded. Top and bottom five stores by percent change in service gross, Jan-Sep 2026 vs 2025. Moving now: Jul-Sep 2026 vs Jan-Mar 2026, each store against itself (monthly averages); the group moved +7.0% on the same basis, so part of every store's change is seasonal. Green bar at the right of a row: the store is on both the top five vs last year and the top five moving now.Conversation starter: each top store says one thing they started doing; each bottom store says what got in the way and what they would try. The room trades ideas. Moving now: ask the top three what they started this year.</a:t>
+              <a:t>Takeaway with the store call-outs (off the slide): Ask Hyundai Prescott, Lincoln and Lexus what changed. Ask Acura, VW St George and VW Henderson what got in the way. Ask Mazda, Kia St George and Hyundai Prescott what they started this year.Source: Qlik - Profit &amp; Loss. Same-store, INEOS excluded (opened 2026). Fixed ops = service + parts; GMC Prescott body shop gross excluded. Top and bottom five stores by percent change in service gross, Jan-Sep 2026 vs 2025. Moving now: Jul-Sep 2026 vs Jan-Mar 2026, each store against itself (monthly averages); the group moved +7.0% on the same basis, so part of every store's change is seasonal. Green bar at the right of a row: the store is on both the top five vs last year and the top five moving now. Blue bar: a turnaround, on the bottom five vs last year and the top five moving now.Conversation starter: each top store says one thing they started doing; each bottom store says what got in the way and what they would try. The room trades ideas. Moving now: ask the top three what they started this year.</a:t>
             </a:r>
             <a:endParaRPr lang="en-US" dirty="0"/>
           </a:p>
@@ -8205,7 +8205,7 @@
                 <a:ea typeface="Inter" pitchFamily="34" charset="-122"/>
                 <a:cs typeface="Inter" pitchFamily="34" charset="-120"/>
               </a:rPr>
-              <a:t>+$1,171,181 (1.9%) year to date; 6 of nine months ahead of 2025, best July at +$684,859.</a:t>
+              <a:t>+$1,171,181 (1.9%) year to date; 6 of nine months ahead of 2025, largest gain in July, +$684,859.</a:t>
             </a:r>
             <a:endParaRPr lang="en-US" sz="1600" dirty="0"/>
           </a:p>
@@ -23352,7 +23352,7 @@
         <p:spPr>
           <a:xfrm>
             <a:off x="457200" y="6126480"/>
-            <a:ext cx="11274552" cy="371856"/>
+            <a:ext cx="11274552" cy="356616"/>
           </a:xfrm>
           <a:prstGeom prst="rect">
             <a:avLst/>
@@ -23372,7 +23372,7 @@
         <p:spPr>
           <a:xfrm>
             <a:off x="658368" y="6144768"/>
-            <a:ext cx="10927080" cy="335280"/>
+            <a:ext cx="10927080" cy="320040"/>
           </a:xfrm>
           <a:prstGeom prst="rect">
             <a:avLst/>
@@ -23388,7 +23388,7 @@
               <a:buNone/>
             </a:pPr>
             <a:r>
-              <a:rPr lang="en-US" sz="1600" b="1" dirty="0">
+              <a:rPr lang="en-US" sz="1500" b="1" dirty="0">
                 <a:solidFill>
                   <a:srgbClr val="0B7A4A"/>
                 </a:solidFill>
@@ -23396,9 +23396,9 @@
                 <a:ea typeface="Inter" pitchFamily="34" charset="-122"/>
                 <a:cs typeface="Inter" pitchFamily="34" charset="-120"/>
               </a:rPr>
-              <a:t>+$7,468,567 (4.1%) year to date; 6 of nine months ahead of 2025, best September at +$2,098,497.</a:t>
-            </a:r>
-            <a:endParaRPr lang="en-US" sz="1600" dirty="0"/>
+              <a:t>+$7,468,567 (4.1%) year to date; 6 of nine months ahead of 2025, largest gain in September, +$2,098,497.</a:t>
+            </a:r>
+            <a:endParaRPr lang="en-US" sz="1500" dirty="0"/>
           </a:p>
         </p:txBody>
       </p:sp>
@@ -38567,7 +38567,7 @@
         <p:spPr>
           <a:xfrm>
             <a:off x="457200" y="6126480"/>
-            <a:ext cx="11274552" cy="371856"/>
+            <a:ext cx="11274552" cy="356616"/>
           </a:xfrm>
           <a:prstGeom prst="rect">
             <a:avLst/>
@@ -38587,7 +38587,7 @@
         <p:spPr>
           <a:xfrm>
             <a:off x="658368" y="6144768"/>
-            <a:ext cx="10927080" cy="335280"/>
+            <a:ext cx="10927080" cy="320040"/>
           </a:xfrm>
           <a:prstGeom prst="rect">
             <a:avLst/>
@@ -38603,7 +38603,7 @@
               <a:buNone/>
             </a:pPr>
             <a:r>
-              <a:rPr lang="en-US" sz="1600" b="1" dirty="0">
+              <a:rPr lang="en-US" sz="1500" b="1" dirty="0">
                 <a:solidFill>
                   <a:srgbClr val="0B7A4A"/>
                 </a:solidFill>
@@ -38611,9 +38611,9 @@
                 <a:ea typeface="Inter" pitchFamily="34" charset="-122"/>
                 <a:cs typeface="Inter" pitchFamily="34" charset="-120"/>
               </a:rPr>
-              <a:t>+$6,297,386 (5.2%) year to date; 9 of nine months ahead of 2025, best September at +$1,457,847.</a:t>
-            </a:r>
-            <a:endParaRPr lang="en-US" sz="1600" dirty="0"/>
+              <a:t>+$6,297,386 (5.2%) year to date; 9 of nine months ahead of 2025, largest gain in September, +$1,457,847.</a:t>
+            </a:r>
+            <a:endParaRPr lang="en-US" sz="1500" dirty="0"/>
           </a:p>
         </p:txBody>
       </p:sp>

--- a/day2-deck/decks/Fixed Ops Gross - House Style.pptx
+++ b/day2-deck/decks/Fixed Ops Gross - House Style.pptx
@@ -19963,17 +19963,17 @@
         </p:nvSpPr>
         <p:spPr>
           <a:xfrm>
-            <a:off x="2941320" y="2103120"/>
-            <a:ext cx="1115568" cy="828446"/>
-          </a:xfrm>
-          <a:prstGeom prst="rect">
-            <a:avLst/>
-          </a:prstGeom>
-          <a:noFill/>
-          <a:ln/>
-        </p:spPr>
-        <p:txBody>
-          <a:bodyPr wrap="square" lIns="0" tIns="0" rIns="0" bIns="0" rtlCol="0" anchor="ctr"/>
+            <a:off x="2941320" y="2202534"/>
+            <a:ext cx="1115568" cy="414223"/>
+          </a:xfrm>
+          <a:prstGeom prst="rect">
+            <a:avLst/>
+          </a:prstGeom>
+          <a:noFill/>
+          <a:ln/>
+        </p:spPr>
+        <p:txBody>
+          <a:bodyPr wrap="square" lIns="0" tIns="0" rIns="0" bIns="0" rtlCol="0" anchor="b"/>
           <a:lstStyle/>
           <a:p>
             <a:pPr algn="r" indent="0" marL="0">
@@ -19997,6 +19997,45 @@
       <p:sp>
         <p:nvSpPr>
           <p:cNvPr id="13" name="Text 11"/>
+          <p:cNvSpPr txBox="1"/>
+          <p:nvPr/>
+        </p:nvSpPr>
+        <p:spPr>
+          <a:xfrm>
+            <a:off x="2941320" y="2583619"/>
+            <a:ext cx="1115568" cy="265103"/>
+          </a:xfrm>
+          <a:prstGeom prst="rect">
+            <a:avLst/>
+          </a:prstGeom>
+          <a:noFill/>
+          <a:ln/>
+        </p:spPr>
+        <p:txBody>
+          <a:bodyPr wrap="square" lIns="0" tIns="0" rIns="0" bIns="0" rtlCol="0" anchor="t"/>
+          <a:lstStyle/>
+          <a:p>
+            <a:pPr algn="r" indent="0" marL="0">
+              <a:buNone/>
+            </a:pPr>
+            <a:r>
+              <a:rPr lang="en-US" sz="1300" dirty="0">
+                <a:solidFill>
+                  <a:srgbClr val="595959"/>
+                </a:solidFill>
+                <a:latin typeface="Inter" pitchFamily="34" charset="0"/>
+                <a:ea typeface="Inter" pitchFamily="34" charset="-122"/>
+                <a:cs typeface="Inter" pitchFamily="34" charset="-120"/>
+              </a:rPr>
+              <a:t>+$243K</a:t>
+            </a:r>
+            <a:endParaRPr lang="en-US" sz="1300" dirty="0"/>
+          </a:p>
+        </p:txBody>
+      </p:sp>
+      <p:sp>
+        <p:nvSpPr>
+          <p:cNvPr id="14" name="Text 12"/>
           <p:cNvSpPr txBox="1"/>
           <p:nvPr/>
         </p:nvSpPr>
@@ -20035,7 +20074,7 @@
       </p:sp>
       <p:sp>
         <p:nvSpPr>
-          <p:cNvPr id="14" name="Text 12"/>
+          <p:cNvPr id="15" name="Text 13"/>
           <p:cNvSpPr txBox="1"/>
           <p:nvPr/>
         </p:nvSpPr>
@@ -20114,23 +20153,23 @@
       </p:sp>
       <p:sp>
         <p:nvSpPr>
-          <p:cNvPr id="15" name="Text 13"/>
-          <p:cNvSpPr txBox="1"/>
-          <p:nvPr/>
-        </p:nvSpPr>
-        <p:spPr>
-          <a:xfrm>
-            <a:off x="2941320" y="2931566"/>
-            <a:ext cx="1115568" cy="828446"/>
-          </a:xfrm>
-          <a:prstGeom prst="rect">
-            <a:avLst/>
-          </a:prstGeom>
-          <a:noFill/>
-          <a:ln/>
-        </p:spPr>
-        <p:txBody>
-          <a:bodyPr wrap="square" lIns="0" tIns="0" rIns="0" bIns="0" rtlCol="0" anchor="ctr"/>
+          <p:cNvPr id="16" name="Text 14"/>
+          <p:cNvSpPr txBox="1"/>
+          <p:nvPr/>
+        </p:nvSpPr>
+        <p:spPr>
+          <a:xfrm>
+            <a:off x="2941320" y="3030980"/>
+            <a:ext cx="1115568" cy="414223"/>
+          </a:xfrm>
+          <a:prstGeom prst="rect">
+            <a:avLst/>
+          </a:prstGeom>
+          <a:noFill/>
+          <a:ln/>
+        </p:spPr>
+        <p:txBody>
+          <a:bodyPr wrap="square" lIns="0" tIns="0" rIns="0" bIns="0" rtlCol="0" anchor="b"/>
           <a:lstStyle/>
           <a:p>
             <a:pPr algn="r" indent="0" marL="0">
@@ -20153,7 +20192,46 @@
       </p:sp>
       <p:sp>
         <p:nvSpPr>
-          <p:cNvPr id="16" name="Shape 14"/>
+          <p:cNvPr id="17" name="Text 15"/>
+          <p:cNvSpPr txBox="1"/>
+          <p:nvPr/>
+        </p:nvSpPr>
+        <p:spPr>
+          <a:xfrm>
+            <a:off x="2941320" y="3412065"/>
+            <a:ext cx="1115568" cy="265103"/>
+          </a:xfrm>
+          <a:prstGeom prst="rect">
+            <a:avLst/>
+          </a:prstGeom>
+          <a:noFill/>
+          <a:ln/>
+        </p:spPr>
+        <p:txBody>
+          <a:bodyPr wrap="square" lIns="0" tIns="0" rIns="0" bIns="0" rtlCol="0" anchor="t"/>
+          <a:lstStyle/>
+          <a:p>
+            <a:pPr algn="r" indent="0" marL="0">
+              <a:buNone/>
+            </a:pPr>
+            <a:r>
+              <a:rPr lang="en-US" sz="1300" dirty="0">
+                <a:solidFill>
+                  <a:srgbClr val="595959"/>
+                </a:solidFill>
+                <a:latin typeface="Inter" pitchFamily="34" charset="0"/>
+                <a:ea typeface="Inter" pitchFamily="34" charset="-122"/>
+                <a:cs typeface="Inter" pitchFamily="34" charset="-120"/>
+              </a:rPr>
+              <a:t>+$688K</a:t>
+            </a:r>
+            <a:endParaRPr lang="en-US" sz="1300" dirty="0"/>
+          </a:p>
+        </p:txBody>
+      </p:sp>
+      <p:sp>
+        <p:nvSpPr>
+          <p:cNvPr id="18" name="Shape 16"/>
           <p:cNvSpPr/>
           <p:nvPr/>
         </p:nvSpPr>
@@ -20173,7 +20251,7 @@
       </p:sp>
       <p:sp>
         <p:nvSpPr>
-          <p:cNvPr id="17" name="Text 15"/>
+          <p:cNvPr id="19" name="Text 17"/>
           <p:cNvSpPr txBox="1"/>
           <p:nvPr/>
         </p:nvSpPr>
@@ -20212,7 +20290,7 @@
       </p:sp>
       <p:sp>
         <p:nvSpPr>
-          <p:cNvPr id="18" name="Text 16"/>
+          <p:cNvPr id="20" name="Text 18"/>
           <p:cNvSpPr txBox="1"/>
           <p:nvPr/>
         </p:nvSpPr>
@@ -20291,23 +20369,23 @@
       </p:sp>
       <p:sp>
         <p:nvSpPr>
-          <p:cNvPr id="19" name="Text 17"/>
-          <p:cNvSpPr txBox="1"/>
-          <p:nvPr/>
-        </p:nvSpPr>
-        <p:spPr>
-          <a:xfrm>
-            <a:off x="2941320" y="3760013"/>
-            <a:ext cx="1115568" cy="828446"/>
-          </a:xfrm>
-          <a:prstGeom prst="rect">
-            <a:avLst/>
-          </a:prstGeom>
-          <a:noFill/>
-          <a:ln/>
-        </p:spPr>
-        <p:txBody>
-          <a:bodyPr wrap="square" lIns="0" tIns="0" rIns="0" bIns="0" rtlCol="0" anchor="ctr"/>
+          <p:cNvPr id="21" name="Text 19"/>
+          <p:cNvSpPr txBox="1"/>
+          <p:nvPr/>
+        </p:nvSpPr>
+        <p:spPr>
+          <a:xfrm>
+            <a:off x="2941320" y="3859426"/>
+            <a:ext cx="1115568" cy="414223"/>
+          </a:xfrm>
+          <a:prstGeom prst="rect">
+            <a:avLst/>
+          </a:prstGeom>
+          <a:noFill/>
+          <a:ln/>
+        </p:spPr>
+        <p:txBody>
+          <a:bodyPr wrap="square" lIns="0" tIns="0" rIns="0" bIns="0" rtlCol="0" anchor="b"/>
           <a:lstStyle/>
           <a:p>
             <a:pPr algn="r" indent="0" marL="0">
@@ -20330,7 +20408,46 @@
       </p:sp>
       <p:sp>
         <p:nvSpPr>
-          <p:cNvPr id="20" name="Text 18"/>
+          <p:cNvPr id="22" name="Text 20"/>
+          <p:cNvSpPr txBox="1"/>
+          <p:nvPr/>
+        </p:nvSpPr>
+        <p:spPr>
+          <a:xfrm>
+            <a:off x="2941320" y="4240512"/>
+            <a:ext cx="1115568" cy="265103"/>
+          </a:xfrm>
+          <a:prstGeom prst="rect">
+            <a:avLst/>
+          </a:prstGeom>
+          <a:noFill/>
+          <a:ln/>
+        </p:spPr>
+        <p:txBody>
+          <a:bodyPr wrap="square" lIns="0" tIns="0" rIns="0" bIns="0" rtlCol="0" anchor="t"/>
+          <a:lstStyle/>
+          <a:p>
+            <a:pPr algn="r" indent="0" marL="0">
+              <a:buNone/>
+            </a:pPr>
+            <a:r>
+              <a:rPr lang="en-US" sz="1300" dirty="0">
+                <a:solidFill>
+                  <a:srgbClr val="595959"/>
+                </a:solidFill>
+                <a:latin typeface="Inter" pitchFamily="34" charset="0"/>
+                <a:ea typeface="Inter" pitchFamily="34" charset="-122"/>
+                <a:cs typeface="Inter" pitchFamily="34" charset="-120"/>
+              </a:rPr>
+              <a:t>+$271K</a:t>
+            </a:r>
+            <a:endParaRPr lang="en-US" sz="1300" dirty="0"/>
+          </a:p>
+        </p:txBody>
+      </p:sp>
+      <p:sp>
+        <p:nvSpPr>
+          <p:cNvPr id="23" name="Text 21"/>
           <p:cNvSpPr txBox="1"/>
           <p:nvPr/>
         </p:nvSpPr>
@@ -20369,7 +20486,7 @@
       </p:sp>
       <p:sp>
         <p:nvSpPr>
-          <p:cNvPr id="21" name="Text 19"/>
+          <p:cNvPr id="24" name="Text 22"/>
           <p:cNvSpPr txBox="1"/>
           <p:nvPr/>
         </p:nvSpPr>
@@ -20448,23 +20565,23 @@
       </p:sp>
       <p:sp>
         <p:nvSpPr>
-          <p:cNvPr id="22" name="Text 20"/>
-          <p:cNvSpPr txBox="1"/>
-          <p:nvPr/>
-        </p:nvSpPr>
-        <p:spPr>
-          <a:xfrm>
-            <a:off x="2941320" y="4588459"/>
-            <a:ext cx="1115568" cy="828446"/>
-          </a:xfrm>
-          <a:prstGeom prst="rect">
-            <a:avLst/>
-          </a:prstGeom>
-          <a:noFill/>
-          <a:ln/>
-        </p:spPr>
-        <p:txBody>
-          <a:bodyPr wrap="square" lIns="0" tIns="0" rIns="0" bIns="0" rtlCol="0" anchor="ctr"/>
+          <p:cNvPr id="25" name="Text 23"/>
+          <p:cNvSpPr txBox="1"/>
+          <p:nvPr/>
+        </p:nvSpPr>
+        <p:spPr>
+          <a:xfrm>
+            <a:off x="2941320" y="4687873"/>
+            <a:ext cx="1115568" cy="414223"/>
+          </a:xfrm>
+          <a:prstGeom prst="rect">
+            <a:avLst/>
+          </a:prstGeom>
+          <a:noFill/>
+          <a:ln/>
+        </p:spPr>
+        <p:txBody>
+          <a:bodyPr wrap="square" lIns="0" tIns="0" rIns="0" bIns="0" rtlCol="0" anchor="b"/>
           <a:lstStyle/>
           <a:p>
             <a:pPr algn="r" indent="0" marL="0">
@@ -20487,7 +20604,46 @@
       </p:sp>
       <p:sp>
         <p:nvSpPr>
-          <p:cNvPr id="23" name="Shape 21"/>
+          <p:cNvPr id="26" name="Text 24"/>
+          <p:cNvSpPr txBox="1"/>
+          <p:nvPr/>
+        </p:nvSpPr>
+        <p:spPr>
+          <a:xfrm>
+            <a:off x="2941320" y="5068958"/>
+            <a:ext cx="1115568" cy="265103"/>
+          </a:xfrm>
+          <a:prstGeom prst="rect">
+            <a:avLst/>
+          </a:prstGeom>
+          <a:noFill/>
+          <a:ln/>
+        </p:spPr>
+        <p:txBody>
+          <a:bodyPr wrap="square" lIns="0" tIns="0" rIns="0" bIns="0" rtlCol="0" anchor="t"/>
+          <a:lstStyle/>
+          <a:p>
+            <a:pPr algn="r" indent="0" marL="0">
+              <a:buNone/>
+            </a:pPr>
+            <a:r>
+              <a:rPr lang="en-US" sz="1300" dirty="0">
+                <a:solidFill>
+                  <a:srgbClr val="595959"/>
+                </a:solidFill>
+                <a:latin typeface="Inter" pitchFamily="34" charset="0"/>
+                <a:ea typeface="Inter" pitchFamily="34" charset="-122"/>
+                <a:cs typeface="Inter" pitchFamily="34" charset="-120"/>
+              </a:rPr>
+              <a:t>+$158K</a:t>
+            </a:r>
+            <a:endParaRPr lang="en-US" sz="1300" dirty="0"/>
+          </a:p>
+        </p:txBody>
+      </p:sp>
+      <p:sp>
+        <p:nvSpPr>
+          <p:cNvPr id="27" name="Shape 25"/>
           <p:cNvSpPr/>
           <p:nvPr/>
         </p:nvSpPr>
@@ -20507,7 +20663,7 @@
       </p:sp>
       <p:sp>
         <p:nvSpPr>
-          <p:cNvPr id="24" name="Text 22"/>
+          <p:cNvPr id="28" name="Text 26"/>
           <p:cNvSpPr txBox="1"/>
           <p:nvPr/>
         </p:nvSpPr>
@@ -20546,7 +20702,7 @@
       </p:sp>
       <p:sp>
         <p:nvSpPr>
-          <p:cNvPr id="25" name="Text 23"/>
+          <p:cNvPr id="29" name="Text 27"/>
           <p:cNvSpPr txBox="1"/>
           <p:nvPr/>
         </p:nvSpPr>
@@ -20625,23 +20781,23 @@
       </p:sp>
       <p:sp>
         <p:nvSpPr>
-          <p:cNvPr id="26" name="Text 24"/>
-          <p:cNvSpPr txBox="1"/>
-          <p:nvPr/>
-        </p:nvSpPr>
-        <p:spPr>
-          <a:xfrm>
-            <a:off x="2941320" y="5416906"/>
-            <a:ext cx="1115568" cy="828446"/>
-          </a:xfrm>
-          <a:prstGeom prst="rect">
-            <a:avLst/>
-          </a:prstGeom>
-          <a:noFill/>
-          <a:ln/>
-        </p:spPr>
-        <p:txBody>
-          <a:bodyPr wrap="square" lIns="0" tIns="0" rIns="0" bIns="0" rtlCol="0" anchor="ctr"/>
+          <p:cNvPr id="30" name="Text 28"/>
+          <p:cNvSpPr txBox="1"/>
+          <p:nvPr/>
+        </p:nvSpPr>
+        <p:spPr>
+          <a:xfrm>
+            <a:off x="2941320" y="5516319"/>
+            <a:ext cx="1115568" cy="414223"/>
+          </a:xfrm>
+          <a:prstGeom prst="rect">
+            <a:avLst/>
+          </a:prstGeom>
+          <a:noFill/>
+          <a:ln/>
+        </p:spPr>
+        <p:txBody>
+          <a:bodyPr wrap="square" lIns="0" tIns="0" rIns="0" bIns="0" rtlCol="0" anchor="b"/>
           <a:lstStyle/>
           <a:p>
             <a:pPr algn="r" indent="0" marL="0">
@@ -20664,7 +20820,46 @@
       </p:sp>
       <p:sp>
         <p:nvSpPr>
-          <p:cNvPr id="27" name="Shape 25"/>
+          <p:cNvPr id="31" name="Text 29"/>
+          <p:cNvSpPr txBox="1"/>
+          <p:nvPr/>
+        </p:nvSpPr>
+        <p:spPr>
+          <a:xfrm>
+            <a:off x="2941320" y="5897405"/>
+            <a:ext cx="1115568" cy="265103"/>
+          </a:xfrm>
+          <a:prstGeom prst="rect">
+            <a:avLst/>
+          </a:prstGeom>
+          <a:noFill/>
+          <a:ln/>
+        </p:spPr>
+        <p:txBody>
+          <a:bodyPr wrap="square" lIns="0" tIns="0" rIns="0" bIns="0" rtlCol="0" anchor="t"/>
+          <a:lstStyle/>
+          <a:p>
+            <a:pPr algn="r" indent="0" marL="0">
+              <a:buNone/>
+            </a:pPr>
+            <a:r>
+              <a:rPr lang="en-US" sz="1300" dirty="0">
+                <a:solidFill>
+                  <a:srgbClr val="595959"/>
+                </a:solidFill>
+                <a:latin typeface="Inter" pitchFamily="34" charset="0"/>
+                <a:ea typeface="Inter" pitchFamily="34" charset="-122"/>
+                <a:cs typeface="Inter" pitchFamily="34" charset="-120"/>
+              </a:rPr>
+              <a:t>+$151K</a:t>
+            </a:r>
+            <a:endParaRPr lang="en-US" sz="1300" dirty="0"/>
+          </a:p>
+        </p:txBody>
+      </p:sp>
+      <p:sp>
+        <p:nvSpPr>
+          <p:cNvPr id="32" name="Shape 30"/>
           <p:cNvSpPr/>
           <p:nvPr/>
         </p:nvSpPr>
@@ -20684,7 +20879,7 @@
       </p:sp>
       <p:sp>
         <p:nvSpPr>
-          <p:cNvPr id="28" name="Text 26"/>
+          <p:cNvPr id="33" name="Text 31"/>
           <p:cNvSpPr txBox="1"/>
           <p:nvPr/>
         </p:nvSpPr>
@@ -20723,7 +20918,7 @@
       </p:sp>
       <p:sp>
         <p:nvSpPr>
-          <p:cNvPr id="29" name="Text 27"/>
+          <p:cNvPr id="34" name="Text 32"/>
           <p:cNvSpPr txBox="1"/>
           <p:nvPr/>
         </p:nvSpPr>
@@ -20762,7 +20957,7 @@
       </p:sp>
       <p:sp>
         <p:nvSpPr>
-          <p:cNvPr id="30" name="Shape 28"/>
+          <p:cNvPr id="35" name="Shape 33"/>
           <p:cNvSpPr/>
           <p:nvPr/>
         </p:nvSpPr>
@@ -20782,7 +20977,7 @@
       </p:sp>
       <p:sp>
         <p:nvSpPr>
-          <p:cNvPr id="31" name="Text 29"/>
+          <p:cNvPr id="36" name="Text 34"/>
           <p:cNvSpPr txBox="1"/>
           <p:nvPr/>
         </p:nvSpPr>
@@ -20821,7 +21016,7 @@
       </p:sp>
       <p:sp>
         <p:nvSpPr>
-          <p:cNvPr id="32" name="Text 30"/>
+          <p:cNvPr id="37" name="Text 35"/>
           <p:cNvSpPr txBox="1"/>
           <p:nvPr/>
         </p:nvSpPr>
@@ -20900,23 +21095,23 @@
       </p:sp>
       <p:sp>
         <p:nvSpPr>
-          <p:cNvPr id="33" name="Text 31"/>
-          <p:cNvSpPr txBox="1"/>
-          <p:nvPr/>
-        </p:nvSpPr>
-        <p:spPr>
-          <a:xfrm>
-            <a:off x="6632448" y="2103120"/>
-            <a:ext cx="1115568" cy="828446"/>
-          </a:xfrm>
-          <a:prstGeom prst="rect">
-            <a:avLst/>
-          </a:prstGeom>
-          <a:noFill/>
-          <a:ln/>
-        </p:spPr>
-        <p:txBody>
-          <a:bodyPr wrap="square" lIns="0" tIns="0" rIns="0" bIns="0" rtlCol="0" anchor="ctr"/>
+          <p:cNvPr id="38" name="Text 36"/>
+          <p:cNvSpPr txBox="1"/>
+          <p:nvPr/>
+        </p:nvSpPr>
+        <p:spPr>
+          <a:xfrm>
+            <a:off x="6632448" y="2202534"/>
+            <a:ext cx="1115568" cy="414223"/>
+          </a:xfrm>
+          <a:prstGeom prst="rect">
+            <a:avLst/>
+          </a:prstGeom>
+          <a:noFill/>
+          <a:ln/>
+        </p:spPr>
+        <p:txBody>
+          <a:bodyPr wrap="square" lIns="0" tIns="0" rIns="0" bIns="0" rtlCol="0" anchor="b"/>
           <a:lstStyle/>
           <a:p>
             <a:pPr algn="r" indent="0" marL="0">
@@ -20939,7 +21134,46 @@
       </p:sp>
       <p:sp>
         <p:nvSpPr>
-          <p:cNvPr id="34" name="Text 32"/>
+          <p:cNvPr id="39" name="Text 37"/>
+          <p:cNvSpPr txBox="1"/>
+          <p:nvPr/>
+        </p:nvSpPr>
+        <p:spPr>
+          <a:xfrm>
+            <a:off x="6632448" y="2583619"/>
+            <a:ext cx="1115568" cy="265103"/>
+          </a:xfrm>
+          <a:prstGeom prst="rect">
+            <a:avLst/>
+          </a:prstGeom>
+          <a:noFill/>
+          <a:ln/>
+        </p:spPr>
+        <p:txBody>
+          <a:bodyPr wrap="square" lIns="0" tIns="0" rIns="0" bIns="0" rtlCol="0" anchor="t"/>
+          <a:lstStyle/>
+          <a:p>
+            <a:pPr algn="r" indent="0" marL="0">
+              <a:buNone/>
+            </a:pPr>
+            <a:r>
+              <a:rPr lang="en-US" sz="1300" dirty="0">
+                <a:solidFill>
+                  <a:srgbClr val="595959"/>
+                </a:solidFill>
+                <a:latin typeface="Inter" pitchFamily="34" charset="0"/>
+                <a:ea typeface="Inter" pitchFamily="34" charset="-122"/>
+                <a:cs typeface="Inter" pitchFamily="34" charset="-120"/>
+              </a:rPr>
+              <a:t>−$227K</a:t>
+            </a:r>
+            <a:endParaRPr lang="en-US" sz="1300" dirty="0"/>
+          </a:p>
+        </p:txBody>
+      </p:sp>
+      <p:sp>
+        <p:nvSpPr>
+          <p:cNvPr id="40" name="Text 38"/>
           <p:cNvSpPr txBox="1"/>
           <p:nvPr/>
         </p:nvSpPr>
@@ -20978,7 +21212,7 @@
       </p:sp>
       <p:sp>
         <p:nvSpPr>
-          <p:cNvPr id="35" name="Text 33"/>
+          <p:cNvPr id="41" name="Text 39"/>
           <p:cNvSpPr txBox="1"/>
           <p:nvPr/>
         </p:nvSpPr>
@@ -21057,23 +21291,23 @@
       </p:sp>
       <p:sp>
         <p:nvSpPr>
-          <p:cNvPr id="36" name="Text 34"/>
-          <p:cNvSpPr txBox="1"/>
-          <p:nvPr/>
-        </p:nvSpPr>
-        <p:spPr>
-          <a:xfrm>
-            <a:off x="6632448" y="2931566"/>
-            <a:ext cx="1115568" cy="828446"/>
-          </a:xfrm>
-          <a:prstGeom prst="rect">
-            <a:avLst/>
-          </a:prstGeom>
-          <a:noFill/>
-          <a:ln/>
-        </p:spPr>
-        <p:txBody>
-          <a:bodyPr wrap="square" lIns="0" tIns="0" rIns="0" bIns="0" rtlCol="0" anchor="ctr"/>
+          <p:cNvPr id="42" name="Text 40"/>
+          <p:cNvSpPr txBox="1"/>
+          <p:nvPr/>
+        </p:nvSpPr>
+        <p:spPr>
+          <a:xfrm>
+            <a:off x="6632448" y="3030980"/>
+            <a:ext cx="1115568" cy="414223"/>
+          </a:xfrm>
+          <a:prstGeom prst="rect">
+            <a:avLst/>
+          </a:prstGeom>
+          <a:noFill/>
+          <a:ln/>
+        </p:spPr>
+        <p:txBody>
+          <a:bodyPr wrap="square" lIns="0" tIns="0" rIns="0" bIns="0" rtlCol="0" anchor="b"/>
           <a:lstStyle/>
           <a:p>
             <a:pPr algn="r" indent="0" marL="0">
@@ -21096,7 +21330,46 @@
       </p:sp>
       <p:sp>
         <p:nvSpPr>
-          <p:cNvPr id="37" name="Shape 35"/>
+          <p:cNvPr id="43" name="Text 41"/>
+          <p:cNvSpPr txBox="1"/>
+          <p:nvPr/>
+        </p:nvSpPr>
+        <p:spPr>
+          <a:xfrm>
+            <a:off x="6632448" y="3412065"/>
+            <a:ext cx="1115568" cy="265103"/>
+          </a:xfrm>
+          <a:prstGeom prst="rect">
+            <a:avLst/>
+          </a:prstGeom>
+          <a:noFill/>
+          <a:ln/>
+        </p:spPr>
+        <p:txBody>
+          <a:bodyPr wrap="square" lIns="0" tIns="0" rIns="0" bIns="0" rtlCol="0" anchor="t"/>
+          <a:lstStyle/>
+          <a:p>
+            <a:pPr algn="r" indent="0" marL="0">
+              <a:buNone/>
+            </a:pPr>
+            <a:r>
+              <a:rPr lang="en-US" sz="1300" dirty="0">
+                <a:solidFill>
+                  <a:srgbClr val="595959"/>
+                </a:solidFill>
+                <a:latin typeface="Inter" pitchFamily="34" charset="0"/>
+                <a:ea typeface="Inter" pitchFamily="34" charset="-122"/>
+                <a:cs typeface="Inter" pitchFamily="34" charset="-120"/>
+              </a:rPr>
+              <a:t>−$328K</a:t>
+            </a:r>
+            <a:endParaRPr lang="en-US" sz="1300" dirty="0"/>
+          </a:p>
+        </p:txBody>
+      </p:sp>
+      <p:sp>
+        <p:nvSpPr>
+          <p:cNvPr id="44" name="Shape 42"/>
           <p:cNvSpPr/>
           <p:nvPr/>
         </p:nvSpPr>
@@ -21116,7 +21389,7 @@
       </p:sp>
       <p:sp>
         <p:nvSpPr>
-          <p:cNvPr id="38" name="Text 36"/>
+          <p:cNvPr id="45" name="Text 43"/>
           <p:cNvSpPr txBox="1"/>
           <p:nvPr/>
         </p:nvSpPr>
@@ -21155,7 +21428,7 @@
       </p:sp>
       <p:sp>
         <p:nvSpPr>
-          <p:cNvPr id="39" name="Text 37"/>
+          <p:cNvPr id="46" name="Text 44"/>
           <p:cNvSpPr txBox="1"/>
           <p:nvPr/>
         </p:nvSpPr>
@@ -21234,23 +21507,23 @@
       </p:sp>
       <p:sp>
         <p:nvSpPr>
-          <p:cNvPr id="40" name="Text 38"/>
-          <p:cNvSpPr txBox="1"/>
-          <p:nvPr/>
-        </p:nvSpPr>
-        <p:spPr>
-          <a:xfrm>
-            <a:off x="6632448" y="3760013"/>
-            <a:ext cx="1115568" cy="828446"/>
-          </a:xfrm>
-          <a:prstGeom prst="rect">
-            <a:avLst/>
-          </a:prstGeom>
-          <a:noFill/>
-          <a:ln/>
-        </p:spPr>
-        <p:txBody>
-          <a:bodyPr wrap="square" lIns="0" tIns="0" rIns="0" bIns="0" rtlCol="0" anchor="ctr"/>
+          <p:cNvPr id="47" name="Text 45"/>
+          <p:cNvSpPr txBox="1"/>
+          <p:nvPr/>
+        </p:nvSpPr>
+        <p:spPr>
+          <a:xfrm>
+            <a:off x="6632448" y="3859426"/>
+            <a:ext cx="1115568" cy="414223"/>
+          </a:xfrm>
+          <a:prstGeom prst="rect">
+            <a:avLst/>
+          </a:prstGeom>
+          <a:noFill/>
+          <a:ln/>
+        </p:spPr>
+        <p:txBody>
+          <a:bodyPr wrap="square" lIns="0" tIns="0" rIns="0" bIns="0" rtlCol="0" anchor="b"/>
           <a:lstStyle/>
           <a:p>
             <a:pPr algn="r" indent="0" marL="0">
@@ -21273,7 +21546,46 @@
       </p:sp>
       <p:sp>
         <p:nvSpPr>
-          <p:cNvPr id="41" name="Text 39"/>
+          <p:cNvPr id="48" name="Text 46"/>
+          <p:cNvSpPr txBox="1"/>
+          <p:nvPr/>
+        </p:nvSpPr>
+        <p:spPr>
+          <a:xfrm>
+            <a:off x="6632448" y="4240512"/>
+            <a:ext cx="1115568" cy="265103"/>
+          </a:xfrm>
+          <a:prstGeom prst="rect">
+            <a:avLst/>
+          </a:prstGeom>
+          <a:noFill/>
+          <a:ln/>
+        </p:spPr>
+        <p:txBody>
+          <a:bodyPr wrap="square" lIns="0" tIns="0" rIns="0" bIns="0" rtlCol="0" anchor="t"/>
+          <a:lstStyle/>
+          <a:p>
+            <a:pPr algn="r" indent="0" marL="0">
+              <a:buNone/>
+            </a:pPr>
+            <a:r>
+              <a:rPr lang="en-US" sz="1300" dirty="0">
+                <a:solidFill>
+                  <a:srgbClr val="595959"/>
+                </a:solidFill>
+                <a:latin typeface="Inter" pitchFamily="34" charset="0"/>
+                <a:ea typeface="Inter" pitchFamily="34" charset="-122"/>
+                <a:cs typeface="Inter" pitchFamily="34" charset="-120"/>
+              </a:rPr>
+              <a:t>−$214K</a:t>
+            </a:r>
+            <a:endParaRPr lang="en-US" sz="1300" dirty="0"/>
+          </a:p>
+        </p:txBody>
+      </p:sp>
+      <p:sp>
+        <p:nvSpPr>
+          <p:cNvPr id="49" name="Text 47"/>
           <p:cNvSpPr txBox="1"/>
           <p:nvPr/>
         </p:nvSpPr>
@@ -21312,7 +21624,7 @@
       </p:sp>
       <p:sp>
         <p:nvSpPr>
-          <p:cNvPr id="42" name="Text 40"/>
+          <p:cNvPr id="50" name="Text 48"/>
           <p:cNvSpPr txBox="1"/>
           <p:nvPr/>
         </p:nvSpPr>
@@ -21391,23 +21703,23 @@
       </p:sp>
       <p:sp>
         <p:nvSpPr>
-          <p:cNvPr id="43" name="Text 41"/>
-          <p:cNvSpPr txBox="1"/>
-          <p:nvPr/>
-        </p:nvSpPr>
-        <p:spPr>
-          <a:xfrm>
-            <a:off x="6632448" y="4588459"/>
-            <a:ext cx="1115568" cy="828446"/>
-          </a:xfrm>
-          <a:prstGeom prst="rect">
-            <a:avLst/>
-          </a:prstGeom>
-          <a:noFill/>
-          <a:ln/>
-        </p:spPr>
-        <p:txBody>
-          <a:bodyPr wrap="square" lIns="0" tIns="0" rIns="0" bIns="0" rtlCol="0" anchor="ctr"/>
+          <p:cNvPr id="51" name="Text 49"/>
+          <p:cNvSpPr txBox="1"/>
+          <p:nvPr/>
+        </p:nvSpPr>
+        <p:spPr>
+          <a:xfrm>
+            <a:off x="6632448" y="4687873"/>
+            <a:ext cx="1115568" cy="414223"/>
+          </a:xfrm>
+          <a:prstGeom prst="rect">
+            <a:avLst/>
+          </a:prstGeom>
+          <a:noFill/>
+          <a:ln/>
+        </p:spPr>
+        <p:txBody>
+          <a:bodyPr wrap="square" lIns="0" tIns="0" rIns="0" bIns="0" rtlCol="0" anchor="b"/>
           <a:lstStyle/>
           <a:p>
             <a:pPr algn="r" indent="0" marL="0">
@@ -21430,7 +21742,46 @@
       </p:sp>
       <p:sp>
         <p:nvSpPr>
-          <p:cNvPr id="44" name="Shape 42"/>
+          <p:cNvPr id="52" name="Text 50"/>
+          <p:cNvSpPr txBox="1"/>
+          <p:nvPr/>
+        </p:nvSpPr>
+        <p:spPr>
+          <a:xfrm>
+            <a:off x="6632448" y="5068958"/>
+            <a:ext cx="1115568" cy="265103"/>
+          </a:xfrm>
+          <a:prstGeom prst="rect">
+            <a:avLst/>
+          </a:prstGeom>
+          <a:noFill/>
+          <a:ln/>
+        </p:spPr>
+        <p:txBody>
+          <a:bodyPr wrap="square" lIns="0" tIns="0" rIns="0" bIns="0" rtlCol="0" anchor="t"/>
+          <a:lstStyle/>
+          <a:p>
+            <a:pPr algn="r" indent="0" marL="0">
+              <a:buNone/>
+            </a:pPr>
+            <a:r>
+              <a:rPr lang="en-US" sz="1300" dirty="0">
+                <a:solidFill>
+                  <a:srgbClr val="595959"/>
+                </a:solidFill>
+                <a:latin typeface="Inter" pitchFamily="34" charset="0"/>
+                <a:ea typeface="Inter" pitchFamily="34" charset="-122"/>
+                <a:cs typeface="Inter" pitchFamily="34" charset="-120"/>
+              </a:rPr>
+              <a:t>−$146K</a:t>
+            </a:r>
+            <a:endParaRPr lang="en-US" sz="1300" dirty="0"/>
+          </a:p>
+        </p:txBody>
+      </p:sp>
+      <p:sp>
+        <p:nvSpPr>
+          <p:cNvPr id="53" name="Shape 51"/>
           <p:cNvSpPr/>
           <p:nvPr/>
         </p:nvSpPr>
@@ -21450,7 +21801,7 @@
       </p:sp>
       <p:sp>
         <p:nvSpPr>
-          <p:cNvPr id="45" name="Text 43"/>
+          <p:cNvPr id="54" name="Text 52"/>
           <p:cNvSpPr txBox="1"/>
           <p:nvPr/>
         </p:nvSpPr>
@@ -21489,7 +21840,7 @@
       </p:sp>
       <p:sp>
         <p:nvSpPr>
-          <p:cNvPr id="46" name="Text 44"/>
+          <p:cNvPr id="55" name="Text 53"/>
           <p:cNvSpPr txBox="1"/>
           <p:nvPr/>
         </p:nvSpPr>
@@ -21568,23 +21919,23 @@
       </p:sp>
       <p:sp>
         <p:nvSpPr>
-          <p:cNvPr id="47" name="Text 45"/>
-          <p:cNvSpPr txBox="1"/>
-          <p:nvPr/>
-        </p:nvSpPr>
-        <p:spPr>
-          <a:xfrm>
-            <a:off x="6632448" y="5416906"/>
-            <a:ext cx="1115568" cy="828446"/>
-          </a:xfrm>
-          <a:prstGeom prst="rect">
-            <a:avLst/>
-          </a:prstGeom>
-          <a:noFill/>
-          <a:ln/>
-        </p:spPr>
-        <p:txBody>
-          <a:bodyPr wrap="square" lIns="0" tIns="0" rIns="0" bIns="0" rtlCol="0" anchor="ctr"/>
+          <p:cNvPr id="56" name="Text 54"/>
+          <p:cNvSpPr txBox="1"/>
+          <p:nvPr/>
+        </p:nvSpPr>
+        <p:spPr>
+          <a:xfrm>
+            <a:off x="6632448" y="5516319"/>
+            <a:ext cx="1115568" cy="414223"/>
+          </a:xfrm>
+          <a:prstGeom prst="rect">
+            <a:avLst/>
+          </a:prstGeom>
+          <a:noFill/>
+          <a:ln/>
+        </p:spPr>
+        <p:txBody>
+          <a:bodyPr wrap="square" lIns="0" tIns="0" rIns="0" bIns="0" rtlCol="0" anchor="b"/>
           <a:lstStyle/>
           <a:p>
             <a:pPr algn="r" indent="0" marL="0">
@@ -21607,7 +21958,46 @@
       </p:sp>
       <p:sp>
         <p:nvSpPr>
-          <p:cNvPr id="48" name="Shape 46"/>
+          <p:cNvPr id="57" name="Text 55"/>
+          <p:cNvSpPr txBox="1"/>
+          <p:nvPr/>
+        </p:nvSpPr>
+        <p:spPr>
+          <a:xfrm>
+            <a:off x="6632448" y="5897405"/>
+            <a:ext cx="1115568" cy="265103"/>
+          </a:xfrm>
+          <a:prstGeom prst="rect">
+            <a:avLst/>
+          </a:prstGeom>
+          <a:noFill/>
+          <a:ln/>
+        </p:spPr>
+        <p:txBody>
+          <a:bodyPr wrap="square" lIns="0" tIns="0" rIns="0" bIns="0" rtlCol="0" anchor="t"/>
+          <a:lstStyle/>
+          <a:p>
+            <a:pPr algn="r" indent="0" marL="0">
+              <a:buNone/>
+            </a:pPr>
+            <a:r>
+              <a:rPr lang="en-US" sz="1300" dirty="0">
+                <a:solidFill>
+                  <a:srgbClr val="595959"/>
+                </a:solidFill>
+                <a:latin typeface="Inter" pitchFamily="34" charset="0"/>
+                <a:ea typeface="Inter" pitchFamily="34" charset="-122"/>
+                <a:cs typeface="Inter" pitchFamily="34" charset="-120"/>
+              </a:rPr>
+              <a:t>−$167K</a:t>
+            </a:r>
+            <a:endParaRPr lang="en-US" sz="1300" dirty="0"/>
+          </a:p>
+        </p:txBody>
+      </p:sp>
+      <p:sp>
+        <p:nvSpPr>
+          <p:cNvPr id="58" name="Shape 56"/>
           <p:cNvSpPr/>
           <p:nvPr/>
         </p:nvSpPr>
@@ -21627,7 +22017,7 @@
       </p:sp>
       <p:sp>
         <p:nvSpPr>
-          <p:cNvPr id="49" name="Text 47"/>
+          <p:cNvPr id="59" name="Text 57"/>
           <p:cNvSpPr txBox="1"/>
           <p:nvPr/>
         </p:nvSpPr>
@@ -21666,7 +22056,7 @@
       </p:sp>
       <p:sp>
         <p:nvSpPr>
-          <p:cNvPr id="50" name="Text 48"/>
+          <p:cNvPr id="60" name="Text 58"/>
           <p:cNvSpPr txBox="1"/>
           <p:nvPr/>
         </p:nvSpPr>
@@ -21705,7 +22095,7 @@
       </p:sp>
       <p:sp>
         <p:nvSpPr>
-          <p:cNvPr id="51" name="Shape 49"/>
+          <p:cNvPr id="61" name="Shape 59"/>
           <p:cNvSpPr/>
           <p:nvPr/>
         </p:nvSpPr>
@@ -21725,7 +22115,7 @@
       </p:sp>
       <p:sp>
         <p:nvSpPr>
-          <p:cNvPr id="52" name="Text 50"/>
+          <p:cNvPr id="62" name="Text 60"/>
           <p:cNvSpPr txBox="1"/>
           <p:nvPr/>
         </p:nvSpPr>
@@ -21764,7 +22154,7 @@
       </p:sp>
       <p:sp>
         <p:nvSpPr>
-          <p:cNvPr id="53" name="Text 51"/>
+          <p:cNvPr id="63" name="Text 61"/>
           <p:cNvSpPr txBox="1"/>
           <p:nvPr/>
         </p:nvSpPr>
@@ -21843,23 +22233,23 @@
       </p:sp>
       <p:sp>
         <p:nvSpPr>
-          <p:cNvPr id="54" name="Text 52"/>
-          <p:cNvSpPr txBox="1"/>
-          <p:nvPr/>
-        </p:nvSpPr>
-        <p:spPr>
-          <a:xfrm>
-            <a:off x="10323576" y="2103120"/>
-            <a:ext cx="1115568" cy="828446"/>
-          </a:xfrm>
-          <a:prstGeom prst="rect">
-            <a:avLst/>
-          </a:prstGeom>
-          <a:noFill/>
-          <a:ln/>
-        </p:spPr>
-        <p:txBody>
-          <a:bodyPr wrap="square" lIns="0" tIns="0" rIns="0" bIns="0" rtlCol="0" anchor="ctr"/>
+          <p:cNvPr id="64" name="Text 62"/>
+          <p:cNvSpPr txBox="1"/>
+          <p:nvPr/>
+        </p:nvSpPr>
+        <p:spPr>
+          <a:xfrm>
+            <a:off x="10323576" y="2202534"/>
+            <a:ext cx="1115568" cy="414223"/>
+          </a:xfrm>
+          <a:prstGeom prst="rect">
+            <a:avLst/>
+          </a:prstGeom>
+          <a:noFill/>
+          <a:ln/>
+        </p:spPr>
+        <p:txBody>
+          <a:bodyPr wrap="square" lIns="0" tIns="0" rIns="0" bIns="0" rtlCol="0" anchor="b"/>
           <a:lstStyle/>
           <a:p>
             <a:pPr algn="r" indent="0" marL="0">
@@ -21882,7 +22272,46 @@
       </p:sp>
       <p:sp>
         <p:nvSpPr>
-          <p:cNvPr id="55" name="Text 53"/>
+          <p:cNvPr id="65" name="Text 63"/>
+          <p:cNvSpPr txBox="1"/>
+          <p:nvPr/>
+        </p:nvSpPr>
+        <p:spPr>
+          <a:xfrm>
+            <a:off x="10323576" y="2583619"/>
+            <a:ext cx="1115568" cy="265103"/>
+          </a:xfrm>
+          <a:prstGeom prst="rect">
+            <a:avLst/>
+          </a:prstGeom>
+          <a:noFill/>
+          <a:ln/>
+        </p:spPr>
+        <p:txBody>
+          <a:bodyPr wrap="square" lIns="0" tIns="0" rIns="0" bIns="0" rtlCol="0" anchor="t"/>
+          <a:lstStyle/>
+          <a:p>
+            <a:pPr algn="r" indent="0" marL="0">
+              <a:buNone/>
+            </a:pPr>
+            <a:r>
+              <a:rPr lang="en-US" sz="1300" dirty="0">
+                <a:solidFill>
+                  <a:srgbClr val="595959"/>
+                </a:solidFill>
+                <a:latin typeface="Inter" pitchFamily="34" charset="0"/>
+                <a:ea typeface="Inter" pitchFamily="34" charset="-122"/>
+                <a:cs typeface="Inter" pitchFamily="34" charset="-120"/>
+              </a:rPr>
+              <a:t>+$147K</a:t>
+            </a:r>
+            <a:endParaRPr lang="en-US" sz="1300" dirty="0"/>
+          </a:p>
+        </p:txBody>
+      </p:sp>
+      <p:sp>
+        <p:nvSpPr>
+          <p:cNvPr id="66" name="Text 64"/>
           <p:cNvSpPr txBox="1"/>
           <p:nvPr/>
         </p:nvSpPr>
@@ -21921,7 +22350,7 @@
       </p:sp>
       <p:sp>
         <p:nvSpPr>
-          <p:cNvPr id="56" name="Text 54"/>
+          <p:cNvPr id="67" name="Text 65"/>
           <p:cNvSpPr txBox="1"/>
           <p:nvPr/>
         </p:nvSpPr>
@@ -22000,23 +22429,23 @@
       </p:sp>
       <p:sp>
         <p:nvSpPr>
-          <p:cNvPr id="57" name="Text 55"/>
-          <p:cNvSpPr txBox="1"/>
-          <p:nvPr/>
-        </p:nvSpPr>
-        <p:spPr>
-          <a:xfrm>
-            <a:off x="10323576" y="2931566"/>
-            <a:ext cx="1115568" cy="828446"/>
-          </a:xfrm>
-          <a:prstGeom prst="rect">
-            <a:avLst/>
-          </a:prstGeom>
-          <a:noFill/>
-          <a:ln/>
-        </p:spPr>
-        <p:txBody>
-          <a:bodyPr wrap="square" lIns="0" tIns="0" rIns="0" bIns="0" rtlCol="0" anchor="ctr"/>
+          <p:cNvPr id="68" name="Text 66"/>
+          <p:cNvSpPr txBox="1"/>
+          <p:nvPr/>
+        </p:nvSpPr>
+        <p:spPr>
+          <a:xfrm>
+            <a:off x="10323576" y="3030980"/>
+            <a:ext cx="1115568" cy="414223"/>
+          </a:xfrm>
+          <a:prstGeom prst="rect">
+            <a:avLst/>
+          </a:prstGeom>
+          <a:noFill/>
+          <a:ln/>
+        </p:spPr>
+        <p:txBody>
+          <a:bodyPr wrap="square" lIns="0" tIns="0" rIns="0" bIns="0" rtlCol="0" anchor="b"/>
           <a:lstStyle/>
           <a:p>
             <a:pPr algn="r" indent="0" marL="0">
@@ -22039,7 +22468,46 @@
       </p:sp>
       <p:sp>
         <p:nvSpPr>
-          <p:cNvPr id="58" name="Shape 56"/>
+          <p:cNvPr id="69" name="Text 67"/>
+          <p:cNvSpPr txBox="1"/>
+          <p:nvPr/>
+        </p:nvSpPr>
+        <p:spPr>
+          <a:xfrm>
+            <a:off x="10323576" y="3412065"/>
+            <a:ext cx="1115568" cy="265103"/>
+          </a:xfrm>
+          <a:prstGeom prst="rect">
+            <a:avLst/>
+          </a:prstGeom>
+          <a:noFill/>
+          <a:ln/>
+        </p:spPr>
+        <p:txBody>
+          <a:bodyPr wrap="square" lIns="0" tIns="0" rIns="0" bIns="0" rtlCol="0" anchor="t"/>
+          <a:lstStyle/>
+          <a:p>
+            <a:pPr algn="r" indent="0" marL="0">
+              <a:buNone/>
+            </a:pPr>
+            <a:r>
+              <a:rPr lang="en-US" sz="1300" dirty="0">
+                <a:solidFill>
+                  <a:srgbClr val="595959"/>
+                </a:solidFill>
+                <a:latin typeface="Inter" pitchFamily="34" charset="0"/>
+                <a:ea typeface="Inter" pitchFamily="34" charset="-122"/>
+                <a:cs typeface="Inter" pitchFamily="34" charset="-120"/>
+              </a:rPr>
+              <a:t>+$36K</a:t>
+            </a:r>
+            <a:endParaRPr lang="en-US" sz="1300" dirty="0"/>
+          </a:p>
+        </p:txBody>
+      </p:sp>
+      <p:sp>
+        <p:nvSpPr>
+          <p:cNvPr id="70" name="Shape 68"/>
           <p:cNvSpPr/>
           <p:nvPr/>
         </p:nvSpPr>
@@ -22059,7 +22527,7 @@
       </p:sp>
       <p:sp>
         <p:nvSpPr>
-          <p:cNvPr id="59" name="Text 57"/>
+          <p:cNvPr id="71" name="Text 69"/>
           <p:cNvSpPr txBox="1"/>
           <p:nvPr/>
         </p:nvSpPr>
@@ -22098,7 +22566,7 @@
       </p:sp>
       <p:sp>
         <p:nvSpPr>
-          <p:cNvPr id="60" name="Text 58"/>
+          <p:cNvPr id="72" name="Text 70"/>
           <p:cNvSpPr txBox="1"/>
           <p:nvPr/>
         </p:nvSpPr>
@@ -22177,23 +22645,23 @@
       </p:sp>
       <p:sp>
         <p:nvSpPr>
-          <p:cNvPr id="61" name="Text 59"/>
-          <p:cNvSpPr txBox="1"/>
-          <p:nvPr/>
-        </p:nvSpPr>
-        <p:spPr>
-          <a:xfrm>
-            <a:off x="10323576" y="3760013"/>
-            <a:ext cx="1115568" cy="828446"/>
-          </a:xfrm>
-          <a:prstGeom prst="rect">
-            <a:avLst/>
-          </a:prstGeom>
-          <a:noFill/>
-          <a:ln/>
-        </p:spPr>
-        <p:txBody>
-          <a:bodyPr wrap="square" lIns="0" tIns="0" rIns="0" bIns="0" rtlCol="0" anchor="ctr"/>
+          <p:cNvPr id="73" name="Text 71"/>
+          <p:cNvSpPr txBox="1"/>
+          <p:nvPr/>
+        </p:nvSpPr>
+        <p:spPr>
+          <a:xfrm>
+            <a:off x="10323576" y="3859426"/>
+            <a:ext cx="1115568" cy="414223"/>
+          </a:xfrm>
+          <a:prstGeom prst="rect">
+            <a:avLst/>
+          </a:prstGeom>
+          <a:noFill/>
+          <a:ln/>
+        </p:spPr>
+        <p:txBody>
+          <a:bodyPr wrap="square" lIns="0" tIns="0" rIns="0" bIns="0" rtlCol="0" anchor="b"/>
           <a:lstStyle/>
           <a:p>
             <a:pPr algn="r" indent="0" marL="0">
@@ -22216,7 +22684,46 @@
       </p:sp>
       <p:sp>
         <p:nvSpPr>
-          <p:cNvPr id="62" name="Text 60"/>
+          <p:cNvPr id="74" name="Text 72"/>
+          <p:cNvSpPr txBox="1"/>
+          <p:nvPr/>
+        </p:nvSpPr>
+        <p:spPr>
+          <a:xfrm>
+            <a:off x="10323576" y="4240512"/>
+            <a:ext cx="1115568" cy="265103"/>
+          </a:xfrm>
+          <a:prstGeom prst="rect">
+            <a:avLst/>
+          </a:prstGeom>
+          <a:noFill/>
+          <a:ln/>
+        </p:spPr>
+        <p:txBody>
+          <a:bodyPr wrap="square" lIns="0" tIns="0" rIns="0" bIns="0" rtlCol="0" anchor="t"/>
+          <a:lstStyle/>
+          <a:p>
+            <a:pPr algn="r" indent="0" marL="0">
+              <a:buNone/>
+            </a:pPr>
+            <a:r>
+              <a:rPr lang="en-US" sz="1300" dirty="0">
+                <a:solidFill>
+                  <a:srgbClr val="595959"/>
+                </a:solidFill>
+                <a:latin typeface="Inter" pitchFamily="34" charset="0"/>
+                <a:ea typeface="Inter" pitchFamily="34" charset="-122"/>
+                <a:cs typeface="Inter" pitchFamily="34" charset="-120"/>
+              </a:rPr>
+              <a:t>+$16K</a:t>
+            </a:r>
+            <a:endParaRPr lang="en-US" sz="1300" dirty="0"/>
+          </a:p>
+        </p:txBody>
+      </p:sp>
+      <p:sp>
+        <p:nvSpPr>
+          <p:cNvPr id="75" name="Text 73"/>
           <p:cNvSpPr txBox="1"/>
           <p:nvPr/>
         </p:nvSpPr>
@@ -22255,7 +22762,7 @@
       </p:sp>
       <p:sp>
         <p:nvSpPr>
-          <p:cNvPr id="63" name="Text 61"/>
+          <p:cNvPr id="76" name="Text 74"/>
           <p:cNvSpPr txBox="1"/>
           <p:nvPr/>
         </p:nvSpPr>
@@ -22334,23 +22841,23 @@
       </p:sp>
       <p:sp>
         <p:nvSpPr>
-          <p:cNvPr id="64" name="Text 62"/>
-          <p:cNvSpPr txBox="1"/>
-          <p:nvPr/>
-        </p:nvSpPr>
-        <p:spPr>
-          <a:xfrm>
-            <a:off x="10323576" y="4588459"/>
-            <a:ext cx="1115568" cy="828446"/>
-          </a:xfrm>
-          <a:prstGeom prst="rect">
-            <a:avLst/>
-          </a:prstGeom>
-          <a:noFill/>
-          <a:ln/>
-        </p:spPr>
-        <p:txBody>
-          <a:bodyPr wrap="square" lIns="0" tIns="0" rIns="0" bIns="0" rtlCol="0" anchor="ctr"/>
+          <p:cNvPr id="77" name="Text 75"/>
+          <p:cNvSpPr txBox="1"/>
+          <p:nvPr/>
+        </p:nvSpPr>
+        <p:spPr>
+          <a:xfrm>
+            <a:off x="10323576" y="4687873"/>
+            <a:ext cx="1115568" cy="414223"/>
+          </a:xfrm>
+          <a:prstGeom prst="rect">
+            <a:avLst/>
+          </a:prstGeom>
+          <a:noFill/>
+          <a:ln/>
+        </p:spPr>
+        <p:txBody>
+          <a:bodyPr wrap="square" lIns="0" tIns="0" rIns="0" bIns="0" rtlCol="0" anchor="b"/>
           <a:lstStyle/>
           <a:p>
             <a:pPr algn="r" indent="0" marL="0">
@@ -22373,7 +22880,46 @@
       </p:sp>
       <p:sp>
         <p:nvSpPr>
-          <p:cNvPr id="65" name="Shape 63"/>
+          <p:cNvPr id="78" name="Text 76"/>
+          <p:cNvSpPr txBox="1"/>
+          <p:nvPr/>
+        </p:nvSpPr>
+        <p:spPr>
+          <a:xfrm>
+            <a:off x="10323576" y="5068958"/>
+            <a:ext cx="1115568" cy="265103"/>
+          </a:xfrm>
+          <a:prstGeom prst="rect">
+            <a:avLst/>
+          </a:prstGeom>
+          <a:noFill/>
+          <a:ln/>
+        </p:spPr>
+        <p:txBody>
+          <a:bodyPr wrap="square" lIns="0" tIns="0" rIns="0" bIns="0" rtlCol="0" anchor="t"/>
+          <a:lstStyle/>
+          <a:p>
+            <a:pPr algn="r" indent="0" marL="0">
+              <a:buNone/>
+            </a:pPr>
+            <a:r>
+              <a:rPr lang="en-US" sz="1300" dirty="0">
+                <a:solidFill>
+                  <a:srgbClr val="595959"/>
+                </a:solidFill>
+                <a:latin typeface="Inter" pitchFamily="34" charset="0"/>
+                <a:ea typeface="Inter" pitchFamily="34" charset="-122"/>
+                <a:cs typeface="Inter" pitchFamily="34" charset="-120"/>
+              </a:rPr>
+              <a:t>+$28K</a:t>
+            </a:r>
+            <a:endParaRPr lang="en-US" sz="1300" dirty="0"/>
+          </a:p>
+        </p:txBody>
+      </p:sp>
+      <p:sp>
+        <p:nvSpPr>
+          <p:cNvPr id="79" name="Shape 77"/>
           <p:cNvSpPr/>
           <p:nvPr/>
         </p:nvSpPr>
@@ -22393,7 +22939,7 @@
       </p:sp>
       <p:sp>
         <p:nvSpPr>
-          <p:cNvPr id="66" name="Text 64"/>
+          <p:cNvPr id="80" name="Text 78"/>
           <p:cNvSpPr txBox="1"/>
           <p:nvPr/>
         </p:nvSpPr>
@@ -22432,7 +22978,7 @@
       </p:sp>
       <p:sp>
         <p:nvSpPr>
-          <p:cNvPr id="67" name="Text 65"/>
+          <p:cNvPr id="81" name="Text 79"/>
           <p:cNvSpPr txBox="1"/>
           <p:nvPr/>
         </p:nvSpPr>
@@ -22511,23 +23057,23 @@
       </p:sp>
       <p:sp>
         <p:nvSpPr>
-          <p:cNvPr id="68" name="Text 66"/>
-          <p:cNvSpPr txBox="1"/>
-          <p:nvPr/>
-        </p:nvSpPr>
-        <p:spPr>
-          <a:xfrm>
-            <a:off x="10323576" y="5416906"/>
-            <a:ext cx="1115568" cy="828446"/>
-          </a:xfrm>
-          <a:prstGeom prst="rect">
-            <a:avLst/>
-          </a:prstGeom>
-          <a:noFill/>
-          <a:ln/>
-        </p:spPr>
-        <p:txBody>
-          <a:bodyPr wrap="square" lIns="0" tIns="0" rIns="0" bIns="0" rtlCol="0" anchor="ctr"/>
+          <p:cNvPr id="82" name="Text 80"/>
+          <p:cNvSpPr txBox="1"/>
+          <p:nvPr/>
+        </p:nvSpPr>
+        <p:spPr>
+          <a:xfrm>
+            <a:off x="10323576" y="5516319"/>
+            <a:ext cx="1115568" cy="414223"/>
+          </a:xfrm>
+          <a:prstGeom prst="rect">
+            <a:avLst/>
+          </a:prstGeom>
+          <a:noFill/>
+          <a:ln/>
+        </p:spPr>
+        <p:txBody>
+          <a:bodyPr wrap="square" lIns="0" tIns="0" rIns="0" bIns="0" rtlCol="0" anchor="b"/>
           <a:lstStyle/>
           <a:p>
             <a:pPr algn="r" indent="0" marL="0">
@@ -22545,6 +23091,45 @@
               <a:t>+27.6%</a:t>
             </a:r>
             <a:endParaRPr lang="en-US" sz="1600" dirty="0"/>
+          </a:p>
+        </p:txBody>
+      </p:sp>
+      <p:sp>
+        <p:nvSpPr>
+          <p:cNvPr id="83" name="Text 81"/>
+          <p:cNvSpPr txBox="1"/>
+          <p:nvPr/>
+        </p:nvSpPr>
+        <p:spPr>
+          <a:xfrm>
+            <a:off x="10323576" y="5897405"/>
+            <a:ext cx="1115568" cy="265103"/>
+          </a:xfrm>
+          <a:prstGeom prst="rect">
+            <a:avLst/>
+          </a:prstGeom>
+          <a:noFill/>
+          <a:ln/>
+        </p:spPr>
+        <p:txBody>
+          <a:bodyPr wrap="square" lIns="0" tIns="0" rIns="0" bIns="0" rtlCol="0" anchor="t"/>
+          <a:lstStyle/>
+          <a:p>
+            <a:pPr algn="r" indent="0" marL="0">
+              <a:buNone/>
+            </a:pPr>
+            <a:r>
+              <a:rPr lang="en-US" sz="1300" dirty="0">
+                <a:solidFill>
+                  <a:srgbClr val="595959"/>
+                </a:solidFill>
+                <a:latin typeface="Inter" pitchFamily="34" charset="0"/>
+                <a:ea typeface="Inter" pitchFamily="34" charset="-122"/>
+                <a:cs typeface="Inter" pitchFamily="34" charset="-120"/>
+              </a:rPr>
+              <a:t>+$43K</a:t>
+            </a:r>
+            <a:endParaRPr lang="en-US" sz="1300" dirty="0"/>
           </a:p>
         </p:txBody>
       </p:sp>
@@ -35174,17 +35759,17 @@
         </p:nvSpPr>
         <p:spPr>
           <a:xfrm>
-            <a:off x="2941320" y="2103120"/>
-            <a:ext cx="1115568" cy="828446"/>
-          </a:xfrm>
-          <a:prstGeom prst="rect">
-            <a:avLst/>
-          </a:prstGeom>
-          <a:noFill/>
-          <a:ln/>
-        </p:spPr>
-        <p:txBody>
-          <a:bodyPr wrap="square" lIns="0" tIns="0" rIns="0" bIns="0" rtlCol="0" anchor="ctr"/>
+            <a:off x="2941320" y="2202534"/>
+            <a:ext cx="1115568" cy="414223"/>
+          </a:xfrm>
+          <a:prstGeom prst="rect">
+            <a:avLst/>
+          </a:prstGeom>
+          <a:noFill/>
+          <a:ln/>
+        </p:spPr>
+        <p:txBody>
+          <a:bodyPr wrap="square" lIns="0" tIns="0" rIns="0" bIns="0" rtlCol="0" anchor="b"/>
           <a:lstStyle/>
           <a:p>
             <a:pPr algn="r" indent="0" marL="0">
@@ -35208,6 +35793,45 @@
       <p:sp>
         <p:nvSpPr>
           <p:cNvPr id="14" name="Text 12"/>
+          <p:cNvSpPr txBox="1"/>
+          <p:nvPr/>
+        </p:nvSpPr>
+        <p:spPr>
+          <a:xfrm>
+            <a:off x="2941320" y="2583619"/>
+            <a:ext cx="1115568" cy="265103"/>
+          </a:xfrm>
+          <a:prstGeom prst="rect">
+            <a:avLst/>
+          </a:prstGeom>
+          <a:noFill/>
+          <a:ln/>
+        </p:spPr>
+        <p:txBody>
+          <a:bodyPr wrap="square" lIns="0" tIns="0" rIns="0" bIns="0" rtlCol="0" anchor="t"/>
+          <a:lstStyle/>
+          <a:p>
+            <a:pPr algn="r" indent="0" marL="0">
+              <a:buNone/>
+            </a:pPr>
+            <a:r>
+              <a:rPr lang="en-US" sz="1300" dirty="0">
+                <a:solidFill>
+                  <a:srgbClr val="595959"/>
+                </a:solidFill>
+                <a:latin typeface="Inter" pitchFamily="34" charset="0"/>
+                <a:ea typeface="Inter" pitchFamily="34" charset="-122"/>
+                <a:cs typeface="Inter" pitchFamily="34" charset="-120"/>
+              </a:rPr>
+              <a:t>+$404K</a:t>
+            </a:r>
+            <a:endParaRPr lang="en-US" sz="1300" dirty="0"/>
+          </a:p>
+        </p:txBody>
+      </p:sp>
+      <p:sp>
+        <p:nvSpPr>
+          <p:cNvPr id="15" name="Text 13"/>
           <p:cNvSpPr txBox="1"/>
           <p:nvPr/>
         </p:nvSpPr>
@@ -35246,7 +35870,7 @@
       </p:sp>
       <p:sp>
         <p:nvSpPr>
-          <p:cNvPr id="15" name="Text 13"/>
+          <p:cNvPr id="16" name="Text 14"/>
           <p:cNvSpPr txBox="1"/>
           <p:nvPr/>
         </p:nvSpPr>
@@ -35325,23 +35949,23 @@
       </p:sp>
       <p:sp>
         <p:nvSpPr>
-          <p:cNvPr id="16" name="Text 14"/>
-          <p:cNvSpPr txBox="1"/>
-          <p:nvPr/>
-        </p:nvSpPr>
-        <p:spPr>
-          <a:xfrm>
-            <a:off x="2941320" y="2931566"/>
-            <a:ext cx="1115568" cy="828446"/>
-          </a:xfrm>
-          <a:prstGeom prst="rect">
-            <a:avLst/>
-          </a:prstGeom>
-          <a:noFill/>
-          <a:ln/>
-        </p:spPr>
-        <p:txBody>
-          <a:bodyPr wrap="square" lIns="0" tIns="0" rIns="0" bIns="0" rtlCol="0" anchor="ctr"/>
+          <p:cNvPr id="17" name="Text 15"/>
+          <p:cNvSpPr txBox="1"/>
+          <p:nvPr/>
+        </p:nvSpPr>
+        <p:spPr>
+          <a:xfrm>
+            <a:off x="2941320" y="3030980"/>
+            <a:ext cx="1115568" cy="414223"/>
+          </a:xfrm>
+          <a:prstGeom prst="rect">
+            <a:avLst/>
+          </a:prstGeom>
+          <a:noFill/>
+          <a:ln/>
+        </p:spPr>
+        <p:txBody>
+          <a:bodyPr wrap="square" lIns="0" tIns="0" rIns="0" bIns="0" rtlCol="0" anchor="b"/>
           <a:lstStyle/>
           <a:p>
             <a:pPr algn="r" indent="0" marL="0">
@@ -35364,7 +35988,46 @@
       </p:sp>
       <p:sp>
         <p:nvSpPr>
-          <p:cNvPr id="17" name="Shape 15"/>
+          <p:cNvPr id="18" name="Text 16"/>
+          <p:cNvSpPr txBox="1"/>
+          <p:nvPr/>
+        </p:nvSpPr>
+        <p:spPr>
+          <a:xfrm>
+            <a:off x="2941320" y="3412065"/>
+            <a:ext cx="1115568" cy="265103"/>
+          </a:xfrm>
+          <a:prstGeom prst="rect">
+            <a:avLst/>
+          </a:prstGeom>
+          <a:noFill/>
+          <a:ln/>
+        </p:spPr>
+        <p:txBody>
+          <a:bodyPr wrap="square" lIns="0" tIns="0" rIns="0" bIns="0" rtlCol="0" anchor="t"/>
+          <a:lstStyle/>
+          <a:p>
+            <a:pPr algn="r" indent="0" marL="0">
+              <a:buNone/>
+            </a:pPr>
+            <a:r>
+              <a:rPr lang="en-US" sz="1300" dirty="0">
+                <a:solidFill>
+                  <a:srgbClr val="595959"/>
+                </a:solidFill>
+                <a:latin typeface="Inter" pitchFamily="34" charset="0"/>
+                <a:ea typeface="Inter" pitchFamily="34" charset="-122"/>
+                <a:cs typeface="Inter" pitchFamily="34" charset="-120"/>
+              </a:rPr>
+              <a:t>+$717K</a:t>
+            </a:r>
+            <a:endParaRPr lang="en-US" sz="1300" dirty="0"/>
+          </a:p>
+        </p:txBody>
+      </p:sp>
+      <p:sp>
+        <p:nvSpPr>
+          <p:cNvPr id="19" name="Shape 17"/>
           <p:cNvSpPr/>
           <p:nvPr/>
         </p:nvSpPr>
@@ -35384,7 +36047,7 @@
       </p:sp>
       <p:sp>
         <p:nvSpPr>
-          <p:cNvPr id="18" name="Text 16"/>
+          <p:cNvPr id="20" name="Text 18"/>
           <p:cNvSpPr txBox="1"/>
           <p:nvPr/>
         </p:nvSpPr>
@@ -35423,7 +36086,7 @@
       </p:sp>
       <p:sp>
         <p:nvSpPr>
-          <p:cNvPr id="19" name="Text 17"/>
+          <p:cNvPr id="21" name="Text 19"/>
           <p:cNvSpPr txBox="1"/>
           <p:nvPr/>
         </p:nvSpPr>
@@ -35502,23 +36165,23 @@
       </p:sp>
       <p:sp>
         <p:nvSpPr>
-          <p:cNvPr id="20" name="Text 18"/>
-          <p:cNvSpPr txBox="1"/>
-          <p:nvPr/>
-        </p:nvSpPr>
-        <p:spPr>
-          <a:xfrm>
-            <a:off x="2941320" y="3760013"/>
-            <a:ext cx="1115568" cy="828446"/>
-          </a:xfrm>
-          <a:prstGeom prst="rect">
-            <a:avLst/>
-          </a:prstGeom>
-          <a:noFill/>
-          <a:ln/>
-        </p:spPr>
-        <p:txBody>
-          <a:bodyPr wrap="square" lIns="0" tIns="0" rIns="0" bIns="0" rtlCol="0" anchor="ctr"/>
+          <p:cNvPr id="22" name="Text 20"/>
+          <p:cNvSpPr txBox="1"/>
+          <p:nvPr/>
+        </p:nvSpPr>
+        <p:spPr>
+          <a:xfrm>
+            <a:off x="2941320" y="3859426"/>
+            <a:ext cx="1115568" cy="414223"/>
+          </a:xfrm>
+          <a:prstGeom prst="rect">
+            <a:avLst/>
+          </a:prstGeom>
+          <a:noFill/>
+          <a:ln/>
+        </p:spPr>
+        <p:txBody>
+          <a:bodyPr wrap="square" lIns="0" tIns="0" rIns="0" bIns="0" rtlCol="0" anchor="b"/>
           <a:lstStyle/>
           <a:p>
             <a:pPr algn="r" indent="0" marL="0">
@@ -35541,7 +36204,46 @@
       </p:sp>
       <p:sp>
         <p:nvSpPr>
-          <p:cNvPr id="21" name="Text 19"/>
+          <p:cNvPr id="23" name="Text 21"/>
+          <p:cNvSpPr txBox="1"/>
+          <p:nvPr/>
+        </p:nvSpPr>
+        <p:spPr>
+          <a:xfrm>
+            <a:off x="2941320" y="4240512"/>
+            <a:ext cx="1115568" cy="265103"/>
+          </a:xfrm>
+          <a:prstGeom prst="rect">
+            <a:avLst/>
+          </a:prstGeom>
+          <a:noFill/>
+          <a:ln/>
+        </p:spPr>
+        <p:txBody>
+          <a:bodyPr wrap="square" lIns="0" tIns="0" rIns="0" bIns="0" rtlCol="0" anchor="t"/>
+          <a:lstStyle/>
+          <a:p>
+            <a:pPr algn="r" indent="0" marL="0">
+              <a:buNone/>
+            </a:pPr>
+            <a:r>
+              <a:rPr lang="en-US" sz="1300" dirty="0">
+                <a:solidFill>
+                  <a:srgbClr val="595959"/>
+                </a:solidFill>
+                <a:latin typeface="Inter" pitchFamily="34" charset="0"/>
+                <a:ea typeface="Inter" pitchFamily="34" charset="-122"/>
+                <a:cs typeface="Inter" pitchFamily="34" charset="-120"/>
+              </a:rPr>
+              <a:t>+$764K</a:t>
+            </a:r>
+            <a:endParaRPr lang="en-US" sz="1300" dirty="0"/>
+          </a:p>
+        </p:txBody>
+      </p:sp>
+      <p:sp>
+        <p:nvSpPr>
+          <p:cNvPr id="24" name="Text 22"/>
           <p:cNvSpPr txBox="1"/>
           <p:nvPr/>
         </p:nvSpPr>
@@ -35580,7 +36282,7 @@
       </p:sp>
       <p:sp>
         <p:nvSpPr>
-          <p:cNvPr id="22" name="Text 20"/>
+          <p:cNvPr id="25" name="Text 23"/>
           <p:cNvSpPr txBox="1"/>
           <p:nvPr/>
         </p:nvSpPr>
@@ -35659,23 +36361,23 @@
       </p:sp>
       <p:sp>
         <p:nvSpPr>
-          <p:cNvPr id="23" name="Text 21"/>
-          <p:cNvSpPr txBox="1"/>
-          <p:nvPr/>
-        </p:nvSpPr>
-        <p:spPr>
-          <a:xfrm>
-            <a:off x="2941320" y="4588459"/>
-            <a:ext cx="1115568" cy="828446"/>
-          </a:xfrm>
-          <a:prstGeom prst="rect">
-            <a:avLst/>
-          </a:prstGeom>
-          <a:noFill/>
-          <a:ln/>
-        </p:spPr>
-        <p:txBody>
-          <a:bodyPr wrap="square" lIns="0" tIns="0" rIns="0" bIns="0" rtlCol="0" anchor="ctr"/>
+          <p:cNvPr id="26" name="Text 24"/>
+          <p:cNvSpPr txBox="1"/>
+          <p:nvPr/>
+        </p:nvSpPr>
+        <p:spPr>
+          <a:xfrm>
+            <a:off x="2941320" y="4687873"/>
+            <a:ext cx="1115568" cy="414223"/>
+          </a:xfrm>
+          <a:prstGeom prst="rect">
+            <a:avLst/>
+          </a:prstGeom>
+          <a:noFill/>
+          <a:ln/>
+        </p:spPr>
+        <p:txBody>
+          <a:bodyPr wrap="square" lIns="0" tIns="0" rIns="0" bIns="0" rtlCol="0" anchor="b"/>
           <a:lstStyle/>
           <a:p>
             <a:pPr algn="r" indent="0" marL="0">
@@ -35698,7 +36400,46 @@
       </p:sp>
       <p:sp>
         <p:nvSpPr>
-          <p:cNvPr id="24" name="Shape 22"/>
+          <p:cNvPr id="27" name="Text 25"/>
+          <p:cNvSpPr txBox="1"/>
+          <p:nvPr/>
+        </p:nvSpPr>
+        <p:spPr>
+          <a:xfrm>
+            <a:off x="2941320" y="5068958"/>
+            <a:ext cx="1115568" cy="265103"/>
+          </a:xfrm>
+          <a:prstGeom prst="rect">
+            <a:avLst/>
+          </a:prstGeom>
+          <a:noFill/>
+          <a:ln/>
+        </p:spPr>
+        <p:txBody>
+          <a:bodyPr wrap="square" lIns="0" tIns="0" rIns="0" bIns="0" rtlCol="0" anchor="t"/>
+          <a:lstStyle/>
+          <a:p>
+            <a:pPr algn="r" indent="0" marL="0">
+              <a:buNone/>
+            </a:pPr>
+            <a:r>
+              <a:rPr lang="en-US" sz="1300" dirty="0">
+                <a:solidFill>
+                  <a:srgbClr val="595959"/>
+                </a:solidFill>
+                <a:latin typeface="Inter" pitchFamily="34" charset="0"/>
+                <a:ea typeface="Inter" pitchFamily="34" charset="-122"/>
+                <a:cs typeface="Inter" pitchFamily="34" charset="-120"/>
+              </a:rPr>
+              <a:t>+$1.70M</a:t>
+            </a:r>
+            <a:endParaRPr lang="en-US" sz="1300" dirty="0"/>
+          </a:p>
+        </p:txBody>
+      </p:sp>
+      <p:sp>
+        <p:nvSpPr>
+          <p:cNvPr id="28" name="Shape 26"/>
           <p:cNvSpPr/>
           <p:nvPr/>
         </p:nvSpPr>
@@ -35718,7 +36459,7 @@
       </p:sp>
       <p:sp>
         <p:nvSpPr>
-          <p:cNvPr id="25" name="Text 23"/>
+          <p:cNvPr id="29" name="Text 27"/>
           <p:cNvSpPr txBox="1"/>
           <p:nvPr/>
         </p:nvSpPr>
@@ -35757,7 +36498,7 @@
       </p:sp>
       <p:sp>
         <p:nvSpPr>
-          <p:cNvPr id="26" name="Text 24"/>
+          <p:cNvPr id="30" name="Text 28"/>
           <p:cNvSpPr txBox="1"/>
           <p:nvPr/>
         </p:nvSpPr>
@@ -35836,23 +36577,23 @@
       </p:sp>
       <p:sp>
         <p:nvSpPr>
-          <p:cNvPr id="27" name="Text 25"/>
-          <p:cNvSpPr txBox="1"/>
-          <p:nvPr/>
-        </p:nvSpPr>
-        <p:spPr>
-          <a:xfrm>
-            <a:off x="2941320" y="5416906"/>
-            <a:ext cx="1115568" cy="828446"/>
-          </a:xfrm>
-          <a:prstGeom prst="rect">
-            <a:avLst/>
-          </a:prstGeom>
-          <a:noFill/>
-          <a:ln/>
-        </p:spPr>
-        <p:txBody>
-          <a:bodyPr wrap="square" lIns="0" tIns="0" rIns="0" bIns="0" rtlCol="0" anchor="ctr"/>
+          <p:cNvPr id="31" name="Text 29"/>
+          <p:cNvSpPr txBox="1"/>
+          <p:nvPr/>
+        </p:nvSpPr>
+        <p:spPr>
+          <a:xfrm>
+            <a:off x="2941320" y="5516319"/>
+            <a:ext cx="1115568" cy="414223"/>
+          </a:xfrm>
+          <a:prstGeom prst="rect">
+            <a:avLst/>
+          </a:prstGeom>
+          <a:noFill/>
+          <a:ln/>
+        </p:spPr>
+        <p:txBody>
+          <a:bodyPr wrap="square" lIns="0" tIns="0" rIns="0" bIns="0" rtlCol="0" anchor="b"/>
           <a:lstStyle/>
           <a:p>
             <a:pPr algn="r" indent="0" marL="0">
@@ -35875,7 +36616,46 @@
       </p:sp>
       <p:sp>
         <p:nvSpPr>
-          <p:cNvPr id="28" name="Shape 26"/>
+          <p:cNvPr id="32" name="Text 30"/>
+          <p:cNvSpPr txBox="1"/>
+          <p:nvPr/>
+        </p:nvSpPr>
+        <p:spPr>
+          <a:xfrm>
+            <a:off x="2941320" y="5897405"/>
+            <a:ext cx="1115568" cy="265103"/>
+          </a:xfrm>
+          <a:prstGeom prst="rect">
+            <a:avLst/>
+          </a:prstGeom>
+          <a:noFill/>
+          <a:ln/>
+        </p:spPr>
+        <p:txBody>
+          <a:bodyPr wrap="square" lIns="0" tIns="0" rIns="0" bIns="0" rtlCol="0" anchor="t"/>
+          <a:lstStyle/>
+          <a:p>
+            <a:pPr algn="r" indent="0" marL="0">
+              <a:buNone/>
+            </a:pPr>
+            <a:r>
+              <a:rPr lang="en-US" sz="1300" dirty="0">
+                <a:solidFill>
+                  <a:srgbClr val="595959"/>
+                </a:solidFill>
+                <a:latin typeface="Inter" pitchFamily="34" charset="0"/>
+                <a:ea typeface="Inter" pitchFamily="34" charset="-122"/>
+                <a:cs typeface="Inter" pitchFamily="34" charset="-120"/>
+              </a:rPr>
+              <a:t>+$368K</a:t>
+            </a:r>
+            <a:endParaRPr lang="en-US" sz="1300" dirty="0"/>
+          </a:p>
+        </p:txBody>
+      </p:sp>
+      <p:sp>
+        <p:nvSpPr>
+          <p:cNvPr id="33" name="Shape 31"/>
           <p:cNvSpPr/>
           <p:nvPr/>
         </p:nvSpPr>
@@ -35895,7 +36675,7 @@
       </p:sp>
       <p:sp>
         <p:nvSpPr>
-          <p:cNvPr id="29" name="Text 27"/>
+          <p:cNvPr id="34" name="Text 32"/>
           <p:cNvSpPr txBox="1"/>
           <p:nvPr/>
         </p:nvSpPr>
@@ -35934,7 +36714,7 @@
       </p:sp>
       <p:sp>
         <p:nvSpPr>
-          <p:cNvPr id="30" name="Text 28"/>
+          <p:cNvPr id="35" name="Text 33"/>
           <p:cNvSpPr txBox="1"/>
           <p:nvPr/>
         </p:nvSpPr>
@@ -35973,7 +36753,7 @@
       </p:sp>
       <p:sp>
         <p:nvSpPr>
-          <p:cNvPr id="31" name="Shape 29"/>
+          <p:cNvPr id="36" name="Shape 34"/>
           <p:cNvSpPr/>
           <p:nvPr/>
         </p:nvSpPr>
@@ -35993,7 +36773,7 @@
       </p:sp>
       <p:sp>
         <p:nvSpPr>
-          <p:cNvPr id="32" name="Text 30"/>
+          <p:cNvPr id="37" name="Text 35"/>
           <p:cNvSpPr txBox="1"/>
           <p:nvPr/>
         </p:nvSpPr>
@@ -36032,7 +36812,7 @@
       </p:sp>
       <p:sp>
         <p:nvSpPr>
-          <p:cNvPr id="33" name="Text 31"/>
+          <p:cNvPr id="38" name="Text 36"/>
           <p:cNvSpPr txBox="1"/>
           <p:nvPr/>
         </p:nvSpPr>
@@ -36111,23 +36891,23 @@
       </p:sp>
       <p:sp>
         <p:nvSpPr>
-          <p:cNvPr id="34" name="Text 32"/>
-          <p:cNvSpPr txBox="1"/>
-          <p:nvPr/>
-        </p:nvSpPr>
-        <p:spPr>
-          <a:xfrm>
-            <a:off x="6632448" y="2103120"/>
-            <a:ext cx="1115568" cy="828446"/>
-          </a:xfrm>
-          <a:prstGeom prst="rect">
-            <a:avLst/>
-          </a:prstGeom>
-          <a:noFill/>
-          <a:ln/>
-        </p:spPr>
-        <p:txBody>
-          <a:bodyPr wrap="square" lIns="0" tIns="0" rIns="0" bIns="0" rtlCol="0" anchor="ctr"/>
+          <p:cNvPr id="39" name="Text 37"/>
+          <p:cNvSpPr txBox="1"/>
+          <p:nvPr/>
+        </p:nvSpPr>
+        <p:spPr>
+          <a:xfrm>
+            <a:off x="6632448" y="2202534"/>
+            <a:ext cx="1115568" cy="414223"/>
+          </a:xfrm>
+          <a:prstGeom prst="rect">
+            <a:avLst/>
+          </a:prstGeom>
+          <a:noFill/>
+          <a:ln/>
+        </p:spPr>
+        <p:txBody>
+          <a:bodyPr wrap="square" lIns="0" tIns="0" rIns="0" bIns="0" rtlCol="0" anchor="b"/>
           <a:lstStyle/>
           <a:p>
             <a:pPr algn="r" indent="0" marL="0">
@@ -36150,7 +36930,46 @@
       </p:sp>
       <p:sp>
         <p:nvSpPr>
-          <p:cNvPr id="35" name="Text 33"/>
+          <p:cNvPr id="40" name="Text 38"/>
+          <p:cNvSpPr txBox="1"/>
+          <p:nvPr/>
+        </p:nvSpPr>
+        <p:spPr>
+          <a:xfrm>
+            <a:off x="6632448" y="2583619"/>
+            <a:ext cx="1115568" cy="265103"/>
+          </a:xfrm>
+          <a:prstGeom prst="rect">
+            <a:avLst/>
+          </a:prstGeom>
+          <a:noFill/>
+          <a:ln/>
+        </p:spPr>
+        <p:txBody>
+          <a:bodyPr wrap="square" lIns="0" tIns="0" rIns="0" bIns="0" rtlCol="0" anchor="t"/>
+          <a:lstStyle/>
+          <a:p>
+            <a:pPr algn="r" indent="0" marL="0">
+              <a:buNone/>
+            </a:pPr>
+            <a:r>
+              <a:rPr lang="en-US" sz="1300" dirty="0">
+                <a:solidFill>
+                  <a:srgbClr val="595959"/>
+                </a:solidFill>
+                <a:latin typeface="Inter" pitchFamily="34" charset="0"/>
+                <a:ea typeface="Inter" pitchFamily="34" charset="-122"/>
+                <a:cs typeface="Inter" pitchFamily="34" charset="-120"/>
+              </a:rPr>
+              <a:t>−$517K</a:t>
+            </a:r>
+            <a:endParaRPr lang="en-US" sz="1300" dirty="0"/>
+          </a:p>
+        </p:txBody>
+      </p:sp>
+      <p:sp>
+        <p:nvSpPr>
+          <p:cNvPr id="41" name="Text 39"/>
           <p:cNvSpPr txBox="1"/>
           <p:nvPr/>
         </p:nvSpPr>
@@ -36189,7 +37008,7 @@
       </p:sp>
       <p:sp>
         <p:nvSpPr>
-          <p:cNvPr id="36" name="Text 34"/>
+          <p:cNvPr id="42" name="Text 40"/>
           <p:cNvSpPr txBox="1"/>
           <p:nvPr/>
         </p:nvSpPr>
@@ -36268,23 +37087,23 @@
       </p:sp>
       <p:sp>
         <p:nvSpPr>
-          <p:cNvPr id="37" name="Text 35"/>
-          <p:cNvSpPr txBox="1"/>
-          <p:nvPr/>
-        </p:nvSpPr>
-        <p:spPr>
-          <a:xfrm>
-            <a:off x="6632448" y="2931566"/>
-            <a:ext cx="1115568" cy="828446"/>
-          </a:xfrm>
-          <a:prstGeom prst="rect">
-            <a:avLst/>
-          </a:prstGeom>
-          <a:noFill/>
-          <a:ln/>
-        </p:spPr>
-        <p:txBody>
-          <a:bodyPr wrap="square" lIns="0" tIns="0" rIns="0" bIns="0" rtlCol="0" anchor="ctr"/>
+          <p:cNvPr id="43" name="Text 41"/>
+          <p:cNvSpPr txBox="1"/>
+          <p:nvPr/>
+        </p:nvSpPr>
+        <p:spPr>
+          <a:xfrm>
+            <a:off x="6632448" y="3030980"/>
+            <a:ext cx="1115568" cy="414223"/>
+          </a:xfrm>
+          <a:prstGeom prst="rect">
+            <a:avLst/>
+          </a:prstGeom>
+          <a:noFill/>
+          <a:ln/>
+        </p:spPr>
+        <p:txBody>
+          <a:bodyPr wrap="square" lIns="0" tIns="0" rIns="0" bIns="0" rtlCol="0" anchor="b"/>
           <a:lstStyle/>
           <a:p>
             <a:pPr algn="r" indent="0" marL="0">
@@ -36307,7 +37126,46 @@
       </p:sp>
       <p:sp>
         <p:nvSpPr>
-          <p:cNvPr id="38" name="Shape 36"/>
+          <p:cNvPr id="44" name="Text 42"/>
+          <p:cNvSpPr txBox="1"/>
+          <p:nvPr/>
+        </p:nvSpPr>
+        <p:spPr>
+          <a:xfrm>
+            <a:off x="6632448" y="3412065"/>
+            <a:ext cx="1115568" cy="265103"/>
+          </a:xfrm>
+          <a:prstGeom prst="rect">
+            <a:avLst/>
+          </a:prstGeom>
+          <a:noFill/>
+          <a:ln/>
+        </p:spPr>
+        <p:txBody>
+          <a:bodyPr wrap="square" lIns="0" tIns="0" rIns="0" bIns="0" rtlCol="0" anchor="t"/>
+          <a:lstStyle/>
+          <a:p>
+            <a:pPr algn="r" indent="0" marL="0">
+              <a:buNone/>
+            </a:pPr>
+            <a:r>
+              <a:rPr lang="en-US" sz="1300" dirty="0">
+                <a:solidFill>
+                  <a:srgbClr val="595959"/>
+                </a:solidFill>
+                <a:latin typeface="Inter" pitchFamily="34" charset="0"/>
+                <a:ea typeface="Inter" pitchFamily="34" charset="-122"/>
+                <a:cs typeface="Inter" pitchFamily="34" charset="-120"/>
+              </a:rPr>
+              <a:t>−$163K</a:t>
+            </a:r>
+            <a:endParaRPr lang="en-US" sz="1300" dirty="0"/>
+          </a:p>
+        </p:txBody>
+      </p:sp>
+      <p:sp>
+        <p:nvSpPr>
+          <p:cNvPr id="45" name="Shape 43"/>
           <p:cNvSpPr/>
           <p:nvPr/>
         </p:nvSpPr>
@@ -36327,7 +37185,7 @@
       </p:sp>
       <p:sp>
         <p:nvSpPr>
-          <p:cNvPr id="39" name="Text 37"/>
+          <p:cNvPr id="46" name="Text 44"/>
           <p:cNvSpPr txBox="1"/>
           <p:nvPr/>
         </p:nvSpPr>
@@ -36366,7 +37224,7 @@
       </p:sp>
       <p:sp>
         <p:nvSpPr>
-          <p:cNvPr id="40" name="Text 38"/>
+          <p:cNvPr id="47" name="Text 45"/>
           <p:cNvSpPr txBox="1"/>
           <p:nvPr/>
         </p:nvSpPr>
@@ -36445,23 +37303,23 @@
       </p:sp>
       <p:sp>
         <p:nvSpPr>
-          <p:cNvPr id="41" name="Text 39"/>
-          <p:cNvSpPr txBox="1"/>
-          <p:nvPr/>
-        </p:nvSpPr>
-        <p:spPr>
-          <a:xfrm>
-            <a:off x="6632448" y="3760013"/>
-            <a:ext cx="1115568" cy="828446"/>
-          </a:xfrm>
-          <a:prstGeom prst="rect">
-            <a:avLst/>
-          </a:prstGeom>
-          <a:noFill/>
-          <a:ln/>
-        </p:spPr>
-        <p:txBody>
-          <a:bodyPr wrap="square" lIns="0" tIns="0" rIns="0" bIns="0" rtlCol="0" anchor="ctr"/>
+          <p:cNvPr id="48" name="Text 46"/>
+          <p:cNvSpPr txBox="1"/>
+          <p:nvPr/>
+        </p:nvSpPr>
+        <p:spPr>
+          <a:xfrm>
+            <a:off x="6632448" y="3859426"/>
+            <a:ext cx="1115568" cy="414223"/>
+          </a:xfrm>
+          <a:prstGeom prst="rect">
+            <a:avLst/>
+          </a:prstGeom>
+          <a:noFill/>
+          <a:ln/>
+        </p:spPr>
+        <p:txBody>
+          <a:bodyPr wrap="square" lIns="0" tIns="0" rIns="0" bIns="0" rtlCol="0" anchor="b"/>
           <a:lstStyle/>
           <a:p>
             <a:pPr algn="r" indent="0" marL="0">
@@ -36484,7 +37342,46 @@
       </p:sp>
       <p:sp>
         <p:nvSpPr>
-          <p:cNvPr id="42" name="Text 40"/>
+          <p:cNvPr id="49" name="Text 47"/>
+          <p:cNvSpPr txBox="1"/>
+          <p:nvPr/>
+        </p:nvSpPr>
+        <p:spPr>
+          <a:xfrm>
+            <a:off x="6632448" y="4240512"/>
+            <a:ext cx="1115568" cy="265103"/>
+          </a:xfrm>
+          <a:prstGeom prst="rect">
+            <a:avLst/>
+          </a:prstGeom>
+          <a:noFill/>
+          <a:ln/>
+        </p:spPr>
+        <p:txBody>
+          <a:bodyPr wrap="square" lIns="0" tIns="0" rIns="0" bIns="0" rtlCol="0" anchor="t"/>
+          <a:lstStyle/>
+          <a:p>
+            <a:pPr algn="r" indent="0" marL="0">
+              <a:buNone/>
+            </a:pPr>
+            <a:r>
+              <a:rPr lang="en-US" sz="1300" dirty="0">
+                <a:solidFill>
+                  <a:srgbClr val="595959"/>
+                </a:solidFill>
+                <a:latin typeface="Inter" pitchFamily="34" charset="0"/>
+                <a:ea typeface="Inter" pitchFamily="34" charset="-122"/>
+                <a:cs typeface="Inter" pitchFamily="34" charset="-120"/>
+              </a:rPr>
+              <a:t>−$761K</a:t>
+            </a:r>
+            <a:endParaRPr lang="en-US" sz="1300" dirty="0"/>
+          </a:p>
+        </p:txBody>
+      </p:sp>
+      <p:sp>
+        <p:nvSpPr>
+          <p:cNvPr id="50" name="Text 48"/>
           <p:cNvSpPr txBox="1"/>
           <p:nvPr/>
         </p:nvSpPr>
@@ -36523,7 +37420,7 @@
       </p:sp>
       <p:sp>
         <p:nvSpPr>
-          <p:cNvPr id="43" name="Text 41"/>
+          <p:cNvPr id="51" name="Text 49"/>
           <p:cNvSpPr txBox="1"/>
           <p:nvPr/>
         </p:nvSpPr>
@@ -36602,23 +37499,23 @@
       </p:sp>
       <p:sp>
         <p:nvSpPr>
-          <p:cNvPr id="44" name="Text 42"/>
-          <p:cNvSpPr txBox="1"/>
-          <p:nvPr/>
-        </p:nvSpPr>
-        <p:spPr>
-          <a:xfrm>
-            <a:off x="6632448" y="4588459"/>
-            <a:ext cx="1115568" cy="828446"/>
-          </a:xfrm>
-          <a:prstGeom prst="rect">
-            <a:avLst/>
-          </a:prstGeom>
-          <a:noFill/>
-          <a:ln/>
-        </p:spPr>
-        <p:txBody>
-          <a:bodyPr wrap="square" lIns="0" tIns="0" rIns="0" bIns="0" rtlCol="0" anchor="ctr"/>
+          <p:cNvPr id="52" name="Text 50"/>
+          <p:cNvSpPr txBox="1"/>
+          <p:nvPr/>
+        </p:nvSpPr>
+        <p:spPr>
+          <a:xfrm>
+            <a:off x="6632448" y="4687873"/>
+            <a:ext cx="1115568" cy="414223"/>
+          </a:xfrm>
+          <a:prstGeom prst="rect">
+            <a:avLst/>
+          </a:prstGeom>
+          <a:noFill/>
+          <a:ln/>
+        </p:spPr>
+        <p:txBody>
+          <a:bodyPr wrap="square" lIns="0" tIns="0" rIns="0" bIns="0" rtlCol="0" anchor="b"/>
           <a:lstStyle/>
           <a:p>
             <a:pPr algn="r" indent="0" marL="0">
@@ -36641,7 +37538,46 @@
       </p:sp>
       <p:sp>
         <p:nvSpPr>
-          <p:cNvPr id="45" name="Shape 43"/>
+          <p:cNvPr id="53" name="Text 51"/>
+          <p:cNvSpPr txBox="1"/>
+          <p:nvPr/>
+        </p:nvSpPr>
+        <p:spPr>
+          <a:xfrm>
+            <a:off x="6632448" y="5068958"/>
+            <a:ext cx="1115568" cy="265103"/>
+          </a:xfrm>
+          <a:prstGeom prst="rect">
+            <a:avLst/>
+          </a:prstGeom>
+          <a:noFill/>
+          <a:ln/>
+        </p:spPr>
+        <p:txBody>
+          <a:bodyPr wrap="square" lIns="0" tIns="0" rIns="0" bIns="0" rtlCol="0" anchor="t"/>
+          <a:lstStyle/>
+          <a:p>
+            <a:pPr algn="r" indent="0" marL="0">
+              <a:buNone/>
+            </a:pPr>
+            <a:r>
+              <a:rPr lang="en-US" sz="1300" dirty="0">
+                <a:solidFill>
+                  <a:srgbClr val="595959"/>
+                </a:solidFill>
+                <a:latin typeface="Inter" pitchFamily="34" charset="0"/>
+                <a:ea typeface="Inter" pitchFamily="34" charset="-122"/>
+                <a:cs typeface="Inter" pitchFamily="34" charset="-120"/>
+              </a:rPr>
+              <a:t>−$520K</a:t>
+            </a:r>
+            <a:endParaRPr lang="en-US" sz="1300" dirty="0"/>
+          </a:p>
+        </p:txBody>
+      </p:sp>
+      <p:sp>
+        <p:nvSpPr>
+          <p:cNvPr id="54" name="Shape 52"/>
           <p:cNvSpPr/>
           <p:nvPr/>
         </p:nvSpPr>
@@ -36661,7 +37597,7 @@
       </p:sp>
       <p:sp>
         <p:nvSpPr>
-          <p:cNvPr id="46" name="Text 44"/>
+          <p:cNvPr id="55" name="Text 53"/>
           <p:cNvSpPr txBox="1"/>
           <p:nvPr/>
         </p:nvSpPr>
@@ -36700,7 +37636,7 @@
       </p:sp>
       <p:sp>
         <p:nvSpPr>
-          <p:cNvPr id="47" name="Text 45"/>
+          <p:cNvPr id="56" name="Text 54"/>
           <p:cNvSpPr txBox="1"/>
           <p:nvPr/>
         </p:nvSpPr>
@@ -36779,23 +37715,23 @@
       </p:sp>
       <p:sp>
         <p:nvSpPr>
-          <p:cNvPr id="48" name="Text 46"/>
-          <p:cNvSpPr txBox="1"/>
-          <p:nvPr/>
-        </p:nvSpPr>
-        <p:spPr>
-          <a:xfrm>
-            <a:off x="6632448" y="5416906"/>
-            <a:ext cx="1115568" cy="828446"/>
-          </a:xfrm>
-          <a:prstGeom prst="rect">
-            <a:avLst/>
-          </a:prstGeom>
-          <a:noFill/>
-          <a:ln/>
-        </p:spPr>
-        <p:txBody>
-          <a:bodyPr wrap="square" lIns="0" tIns="0" rIns="0" bIns="0" rtlCol="0" anchor="ctr"/>
+          <p:cNvPr id="57" name="Text 55"/>
+          <p:cNvSpPr txBox="1"/>
+          <p:nvPr/>
+        </p:nvSpPr>
+        <p:spPr>
+          <a:xfrm>
+            <a:off x="6632448" y="5516319"/>
+            <a:ext cx="1115568" cy="414223"/>
+          </a:xfrm>
+          <a:prstGeom prst="rect">
+            <a:avLst/>
+          </a:prstGeom>
+          <a:noFill/>
+          <a:ln/>
+        </p:spPr>
+        <p:txBody>
+          <a:bodyPr wrap="square" lIns="0" tIns="0" rIns="0" bIns="0" rtlCol="0" anchor="b"/>
           <a:lstStyle/>
           <a:p>
             <a:pPr algn="r" indent="0" marL="0">
@@ -36818,7 +37754,46 @@
       </p:sp>
       <p:sp>
         <p:nvSpPr>
-          <p:cNvPr id="49" name="Shape 47"/>
+          <p:cNvPr id="58" name="Text 56"/>
+          <p:cNvSpPr txBox="1"/>
+          <p:nvPr/>
+        </p:nvSpPr>
+        <p:spPr>
+          <a:xfrm>
+            <a:off x="6632448" y="5897405"/>
+            <a:ext cx="1115568" cy="265103"/>
+          </a:xfrm>
+          <a:prstGeom prst="rect">
+            <a:avLst/>
+          </a:prstGeom>
+          <a:noFill/>
+          <a:ln/>
+        </p:spPr>
+        <p:txBody>
+          <a:bodyPr wrap="square" lIns="0" tIns="0" rIns="0" bIns="0" rtlCol="0" anchor="t"/>
+          <a:lstStyle/>
+          <a:p>
+            <a:pPr algn="r" indent="0" marL="0">
+              <a:buNone/>
+            </a:pPr>
+            <a:r>
+              <a:rPr lang="en-US" sz="1300" dirty="0">
+                <a:solidFill>
+                  <a:srgbClr val="595959"/>
+                </a:solidFill>
+                <a:latin typeface="Inter" pitchFamily="34" charset="0"/>
+                <a:ea typeface="Inter" pitchFamily="34" charset="-122"/>
+                <a:cs typeface="Inter" pitchFamily="34" charset="-120"/>
+              </a:rPr>
+              <a:t>−$840K</a:t>
+            </a:r>
+            <a:endParaRPr lang="en-US" sz="1300" dirty="0"/>
+          </a:p>
+        </p:txBody>
+      </p:sp>
+      <p:sp>
+        <p:nvSpPr>
+          <p:cNvPr id="59" name="Shape 57"/>
           <p:cNvSpPr/>
           <p:nvPr/>
         </p:nvSpPr>
@@ -36838,7 +37813,7 @@
       </p:sp>
       <p:sp>
         <p:nvSpPr>
-          <p:cNvPr id="50" name="Text 48"/>
+          <p:cNvPr id="60" name="Text 58"/>
           <p:cNvSpPr txBox="1"/>
           <p:nvPr/>
         </p:nvSpPr>
@@ -36877,7 +37852,7 @@
       </p:sp>
       <p:sp>
         <p:nvSpPr>
-          <p:cNvPr id="51" name="Text 49"/>
+          <p:cNvPr id="61" name="Text 59"/>
           <p:cNvSpPr txBox="1"/>
           <p:nvPr/>
         </p:nvSpPr>
@@ -36916,7 +37891,7 @@
       </p:sp>
       <p:sp>
         <p:nvSpPr>
-          <p:cNvPr id="52" name="Shape 50"/>
+          <p:cNvPr id="62" name="Shape 60"/>
           <p:cNvSpPr/>
           <p:nvPr/>
         </p:nvSpPr>
@@ -36936,7 +37911,7 @@
       </p:sp>
       <p:sp>
         <p:nvSpPr>
-          <p:cNvPr id="53" name="Text 51"/>
+          <p:cNvPr id="63" name="Text 61"/>
           <p:cNvSpPr txBox="1"/>
           <p:nvPr/>
         </p:nvSpPr>
@@ -36975,7 +37950,7 @@
       </p:sp>
       <p:sp>
         <p:nvSpPr>
-          <p:cNvPr id="54" name="Text 52"/>
+          <p:cNvPr id="64" name="Text 62"/>
           <p:cNvSpPr txBox="1"/>
           <p:nvPr/>
         </p:nvSpPr>
@@ -37054,23 +38029,23 @@
       </p:sp>
       <p:sp>
         <p:nvSpPr>
-          <p:cNvPr id="55" name="Text 53"/>
-          <p:cNvSpPr txBox="1"/>
-          <p:nvPr/>
-        </p:nvSpPr>
-        <p:spPr>
-          <a:xfrm>
-            <a:off x="10323576" y="2103120"/>
-            <a:ext cx="1115568" cy="828446"/>
-          </a:xfrm>
-          <a:prstGeom prst="rect">
-            <a:avLst/>
-          </a:prstGeom>
-          <a:noFill/>
-          <a:ln/>
-        </p:spPr>
-        <p:txBody>
-          <a:bodyPr wrap="square" lIns="0" tIns="0" rIns="0" bIns="0" rtlCol="0" anchor="ctr"/>
+          <p:cNvPr id="65" name="Text 63"/>
+          <p:cNvSpPr txBox="1"/>
+          <p:nvPr/>
+        </p:nvSpPr>
+        <p:spPr>
+          <a:xfrm>
+            <a:off x="10323576" y="2202534"/>
+            <a:ext cx="1115568" cy="414223"/>
+          </a:xfrm>
+          <a:prstGeom prst="rect">
+            <a:avLst/>
+          </a:prstGeom>
+          <a:noFill/>
+          <a:ln/>
+        </p:spPr>
+        <p:txBody>
+          <a:bodyPr wrap="square" lIns="0" tIns="0" rIns="0" bIns="0" rtlCol="0" anchor="b"/>
           <a:lstStyle/>
           <a:p>
             <a:pPr algn="r" indent="0" marL="0">
@@ -37093,7 +38068,46 @@
       </p:sp>
       <p:sp>
         <p:nvSpPr>
-          <p:cNvPr id="56" name="Text 54"/>
+          <p:cNvPr id="66" name="Text 64"/>
+          <p:cNvSpPr txBox="1"/>
+          <p:nvPr/>
+        </p:nvSpPr>
+        <p:spPr>
+          <a:xfrm>
+            <a:off x="10323576" y="2583619"/>
+            <a:ext cx="1115568" cy="265103"/>
+          </a:xfrm>
+          <a:prstGeom prst="rect">
+            <a:avLst/>
+          </a:prstGeom>
+          <a:noFill/>
+          <a:ln/>
+        </p:spPr>
+        <p:txBody>
+          <a:bodyPr wrap="square" lIns="0" tIns="0" rIns="0" bIns="0" rtlCol="0" anchor="t"/>
+          <a:lstStyle/>
+          <a:p>
+            <a:pPr algn="r" indent="0" marL="0">
+              <a:buNone/>
+            </a:pPr>
+            <a:r>
+              <a:rPr lang="en-US" sz="1300" dirty="0">
+                <a:solidFill>
+                  <a:srgbClr val="595959"/>
+                </a:solidFill>
+                <a:latin typeface="Inter" pitchFamily="34" charset="0"/>
+                <a:ea typeface="Inter" pitchFamily="34" charset="-122"/>
+                <a:cs typeface="Inter" pitchFamily="34" charset="-120"/>
+              </a:rPr>
+              <a:t>+$112K</a:t>
+            </a:r>
+            <a:endParaRPr lang="en-US" sz="1300" dirty="0"/>
+          </a:p>
+        </p:txBody>
+      </p:sp>
+      <p:sp>
+        <p:nvSpPr>
+          <p:cNvPr id="67" name="Text 65"/>
           <p:cNvSpPr txBox="1"/>
           <p:nvPr/>
         </p:nvSpPr>
@@ -37132,7 +38146,7 @@
       </p:sp>
       <p:sp>
         <p:nvSpPr>
-          <p:cNvPr id="57" name="Text 55"/>
+          <p:cNvPr id="68" name="Text 66"/>
           <p:cNvSpPr txBox="1"/>
           <p:nvPr/>
         </p:nvSpPr>
@@ -37211,23 +38225,23 @@
       </p:sp>
       <p:sp>
         <p:nvSpPr>
-          <p:cNvPr id="58" name="Text 56"/>
-          <p:cNvSpPr txBox="1"/>
-          <p:nvPr/>
-        </p:nvSpPr>
-        <p:spPr>
-          <a:xfrm>
-            <a:off x="10323576" y="2931566"/>
-            <a:ext cx="1115568" cy="828446"/>
-          </a:xfrm>
-          <a:prstGeom prst="rect">
-            <a:avLst/>
-          </a:prstGeom>
-          <a:noFill/>
-          <a:ln/>
-        </p:spPr>
-        <p:txBody>
-          <a:bodyPr wrap="square" lIns="0" tIns="0" rIns="0" bIns="0" rtlCol="0" anchor="ctr"/>
+          <p:cNvPr id="69" name="Text 67"/>
+          <p:cNvSpPr txBox="1"/>
+          <p:nvPr/>
+        </p:nvSpPr>
+        <p:spPr>
+          <a:xfrm>
+            <a:off x="10323576" y="3030980"/>
+            <a:ext cx="1115568" cy="414223"/>
+          </a:xfrm>
+          <a:prstGeom prst="rect">
+            <a:avLst/>
+          </a:prstGeom>
+          <a:noFill/>
+          <a:ln/>
+        </p:spPr>
+        <p:txBody>
+          <a:bodyPr wrap="square" lIns="0" tIns="0" rIns="0" bIns="0" rtlCol="0" anchor="b"/>
           <a:lstStyle/>
           <a:p>
             <a:pPr algn="r" indent="0" marL="0">
@@ -37250,7 +38264,46 @@
       </p:sp>
       <p:sp>
         <p:nvSpPr>
-          <p:cNvPr id="59" name="Shape 57"/>
+          <p:cNvPr id="70" name="Text 68"/>
+          <p:cNvSpPr txBox="1"/>
+          <p:nvPr/>
+        </p:nvSpPr>
+        <p:spPr>
+          <a:xfrm>
+            <a:off x="10323576" y="3412065"/>
+            <a:ext cx="1115568" cy="265103"/>
+          </a:xfrm>
+          <a:prstGeom prst="rect">
+            <a:avLst/>
+          </a:prstGeom>
+          <a:noFill/>
+          <a:ln/>
+        </p:spPr>
+        <p:txBody>
+          <a:bodyPr wrap="square" lIns="0" tIns="0" rIns="0" bIns="0" rtlCol="0" anchor="t"/>
+          <a:lstStyle/>
+          <a:p>
+            <a:pPr algn="r" indent="0" marL="0">
+              <a:buNone/>
+            </a:pPr>
+            <a:r>
+              <a:rPr lang="en-US" sz="1300" dirty="0">
+                <a:solidFill>
+                  <a:srgbClr val="595959"/>
+                </a:solidFill>
+                <a:latin typeface="Inter" pitchFamily="34" charset="0"/>
+                <a:ea typeface="Inter" pitchFamily="34" charset="-122"/>
+                <a:cs typeface="Inter" pitchFamily="34" charset="-120"/>
+              </a:rPr>
+              <a:t>+$74K</a:t>
+            </a:r>
+            <a:endParaRPr lang="en-US" sz="1300" dirty="0"/>
+          </a:p>
+        </p:txBody>
+      </p:sp>
+      <p:sp>
+        <p:nvSpPr>
+          <p:cNvPr id="71" name="Shape 69"/>
           <p:cNvSpPr/>
           <p:nvPr/>
         </p:nvSpPr>
@@ -37270,7 +38323,7 @@
       </p:sp>
       <p:sp>
         <p:nvSpPr>
-          <p:cNvPr id="60" name="Text 58"/>
+          <p:cNvPr id="72" name="Text 70"/>
           <p:cNvSpPr txBox="1"/>
           <p:nvPr/>
         </p:nvSpPr>
@@ -37309,7 +38362,7 @@
       </p:sp>
       <p:sp>
         <p:nvSpPr>
-          <p:cNvPr id="61" name="Text 59"/>
+          <p:cNvPr id="73" name="Text 71"/>
           <p:cNvSpPr txBox="1"/>
           <p:nvPr/>
         </p:nvSpPr>
@@ -37388,23 +38441,23 @@
       </p:sp>
       <p:sp>
         <p:nvSpPr>
-          <p:cNvPr id="62" name="Text 60"/>
-          <p:cNvSpPr txBox="1"/>
-          <p:nvPr/>
-        </p:nvSpPr>
-        <p:spPr>
-          <a:xfrm>
-            <a:off x="10323576" y="3760013"/>
-            <a:ext cx="1115568" cy="828446"/>
-          </a:xfrm>
-          <a:prstGeom prst="rect">
-            <a:avLst/>
-          </a:prstGeom>
-          <a:noFill/>
-          <a:ln/>
-        </p:spPr>
-        <p:txBody>
-          <a:bodyPr wrap="square" lIns="0" tIns="0" rIns="0" bIns="0" rtlCol="0" anchor="ctr"/>
+          <p:cNvPr id="74" name="Text 72"/>
+          <p:cNvSpPr txBox="1"/>
+          <p:nvPr/>
+        </p:nvSpPr>
+        <p:spPr>
+          <a:xfrm>
+            <a:off x="10323576" y="3859426"/>
+            <a:ext cx="1115568" cy="414223"/>
+          </a:xfrm>
+          <a:prstGeom prst="rect">
+            <a:avLst/>
+          </a:prstGeom>
+          <a:noFill/>
+          <a:ln/>
+        </p:spPr>
+        <p:txBody>
+          <a:bodyPr wrap="square" lIns="0" tIns="0" rIns="0" bIns="0" rtlCol="0" anchor="b"/>
           <a:lstStyle/>
           <a:p>
             <a:pPr algn="r" indent="0" marL="0">
@@ -37427,7 +38480,46 @@
       </p:sp>
       <p:sp>
         <p:nvSpPr>
-          <p:cNvPr id="63" name="Text 61"/>
+          <p:cNvPr id="75" name="Text 73"/>
+          <p:cNvSpPr txBox="1"/>
+          <p:nvPr/>
+        </p:nvSpPr>
+        <p:spPr>
+          <a:xfrm>
+            <a:off x="10323576" y="4240512"/>
+            <a:ext cx="1115568" cy="265103"/>
+          </a:xfrm>
+          <a:prstGeom prst="rect">
+            <a:avLst/>
+          </a:prstGeom>
+          <a:noFill/>
+          <a:ln/>
+        </p:spPr>
+        <p:txBody>
+          <a:bodyPr wrap="square" lIns="0" tIns="0" rIns="0" bIns="0" rtlCol="0" anchor="t"/>
+          <a:lstStyle/>
+          <a:p>
+            <a:pPr algn="r" indent="0" marL="0">
+              <a:buNone/>
+            </a:pPr>
+            <a:r>
+              <a:rPr lang="en-US" sz="1300" dirty="0">
+                <a:solidFill>
+                  <a:srgbClr val="595959"/>
+                </a:solidFill>
+                <a:latin typeface="Inter" pitchFamily="34" charset="0"/>
+                <a:ea typeface="Inter" pitchFamily="34" charset="-122"/>
+                <a:cs typeface="Inter" pitchFamily="34" charset="-120"/>
+              </a:rPr>
+              <a:t>+$97K</a:t>
+            </a:r>
+            <a:endParaRPr lang="en-US" sz="1300" dirty="0"/>
+          </a:p>
+        </p:txBody>
+      </p:sp>
+      <p:sp>
+        <p:nvSpPr>
+          <p:cNvPr id="76" name="Text 74"/>
           <p:cNvSpPr txBox="1"/>
           <p:nvPr/>
         </p:nvSpPr>
@@ -37466,7 +38558,7 @@
       </p:sp>
       <p:sp>
         <p:nvSpPr>
-          <p:cNvPr id="64" name="Text 62"/>
+          <p:cNvPr id="77" name="Text 75"/>
           <p:cNvSpPr txBox="1"/>
           <p:nvPr/>
         </p:nvSpPr>
@@ -37545,23 +38637,23 @@
       </p:sp>
       <p:sp>
         <p:nvSpPr>
-          <p:cNvPr id="65" name="Text 63"/>
-          <p:cNvSpPr txBox="1"/>
-          <p:nvPr/>
-        </p:nvSpPr>
-        <p:spPr>
-          <a:xfrm>
-            <a:off x="10323576" y="4588459"/>
-            <a:ext cx="1115568" cy="828446"/>
-          </a:xfrm>
-          <a:prstGeom prst="rect">
-            <a:avLst/>
-          </a:prstGeom>
-          <a:noFill/>
-          <a:ln/>
-        </p:spPr>
-        <p:txBody>
-          <a:bodyPr wrap="square" lIns="0" tIns="0" rIns="0" bIns="0" rtlCol="0" anchor="ctr"/>
+          <p:cNvPr id="78" name="Text 76"/>
+          <p:cNvSpPr txBox="1"/>
+          <p:nvPr/>
+        </p:nvSpPr>
+        <p:spPr>
+          <a:xfrm>
+            <a:off x="10323576" y="4687873"/>
+            <a:ext cx="1115568" cy="414223"/>
+          </a:xfrm>
+          <a:prstGeom prst="rect">
+            <a:avLst/>
+          </a:prstGeom>
+          <a:noFill/>
+          <a:ln/>
+        </p:spPr>
+        <p:txBody>
+          <a:bodyPr wrap="square" lIns="0" tIns="0" rIns="0" bIns="0" rtlCol="0" anchor="b"/>
           <a:lstStyle/>
           <a:p>
             <a:pPr algn="r" indent="0" marL="0">
@@ -37584,7 +38676,46 @@
       </p:sp>
       <p:sp>
         <p:nvSpPr>
-          <p:cNvPr id="66" name="Shape 64"/>
+          <p:cNvPr id="79" name="Text 77"/>
+          <p:cNvSpPr txBox="1"/>
+          <p:nvPr/>
+        </p:nvSpPr>
+        <p:spPr>
+          <a:xfrm>
+            <a:off x="10323576" y="5068958"/>
+            <a:ext cx="1115568" cy="265103"/>
+          </a:xfrm>
+          <a:prstGeom prst="rect">
+            <a:avLst/>
+          </a:prstGeom>
+          <a:noFill/>
+          <a:ln/>
+        </p:spPr>
+        <p:txBody>
+          <a:bodyPr wrap="square" lIns="0" tIns="0" rIns="0" bIns="0" rtlCol="0" anchor="t"/>
+          <a:lstStyle/>
+          <a:p>
+            <a:pPr algn="r" indent="0" marL="0">
+              <a:buNone/>
+            </a:pPr>
+            <a:r>
+              <a:rPr lang="en-US" sz="1300" dirty="0">
+                <a:solidFill>
+                  <a:srgbClr val="595959"/>
+                </a:solidFill>
+                <a:latin typeface="Inter" pitchFamily="34" charset="0"/>
+                <a:ea typeface="Inter" pitchFamily="34" charset="-122"/>
+                <a:cs typeface="Inter" pitchFamily="34" charset="-120"/>
+              </a:rPr>
+              <a:t>+$84K</a:t>
+            </a:r>
+            <a:endParaRPr lang="en-US" sz="1300" dirty="0"/>
+          </a:p>
+        </p:txBody>
+      </p:sp>
+      <p:sp>
+        <p:nvSpPr>
+          <p:cNvPr id="80" name="Shape 78"/>
           <p:cNvSpPr/>
           <p:nvPr/>
         </p:nvSpPr>
@@ -37604,7 +38735,7 @@
       </p:sp>
       <p:sp>
         <p:nvSpPr>
-          <p:cNvPr id="67" name="Shape 65"/>
+          <p:cNvPr id="81" name="Shape 79"/>
           <p:cNvSpPr/>
           <p:nvPr/>
         </p:nvSpPr>
@@ -37624,7 +38755,7 @@
       </p:sp>
       <p:sp>
         <p:nvSpPr>
-          <p:cNvPr id="68" name="Text 66"/>
+          <p:cNvPr id="82" name="Text 80"/>
           <p:cNvSpPr txBox="1"/>
           <p:nvPr/>
         </p:nvSpPr>
@@ -37663,7 +38794,7 @@
       </p:sp>
       <p:sp>
         <p:nvSpPr>
-          <p:cNvPr id="69" name="Text 67"/>
+          <p:cNvPr id="83" name="Text 81"/>
           <p:cNvSpPr txBox="1"/>
           <p:nvPr/>
         </p:nvSpPr>
@@ -37742,23 +38873,23 @@
       </p:sp>
       <p:sp>
         <p:nvSpPr>
-          <p:cNvPr id="70" name="Text 68"/>
-          <p:cNvSpPr txBox="1"/>
-          <p:nvPr/>
-        </p:nvSpPr>
-        <p:spPr>
-          <a:xfrm>
-            <a:off x="10323576" y="5416906"/>
-            <a:ext cx="1115568" cy="828446"/>
-          </a:xfrm>
-          <a:prstGeom prst="rect">
-            <a:avLst/>
-          </a:prstGeom>
-          <a:noFill/>
-          <a:ln/>
-        </p:spPr>
-        <p:txBody>
-          <a:bodyPr wrap="square" lIns="0" tIns="0" rIns="0" bIns="0" rtlCol="0" anchor="ctr"/>
+          <p:cNvPr id="84" name="Text 82"/>
+          <p:cNvSpPr txBox="1"/>
+          <p:nvPr/>
+        </p:nvSpPr>
+        <p:spPr>
+          <a:xfrm>
+            <a:off x="10323576" y="5516319"/>
+            <a:ext cx="1115568" cy="414223"/>
+          </a:xfrm>
+          <a:prstGeom prst="rect">
+            <a:avLst/>
+          </a:prstGeom>
+          <a:noFill/>
+          <a:ln/>
+        </p:spPr>
+        <p:txBody>
+          <a:bodyPr wrap="square" lIns="0" tIns="0" rIns="0" bIns="0" rtlCol="0" anchor="b"/>
           <a:lstStyle/>
           <a:p>
             <a:pPr algn="r" indent="0" marL="0">
@@ -37776,6 +38907,45 @@
               <a:t>+19.1%</a:t>
             </a:r>
             <a:endParaRPr lang="en-US" sz="1600" dirty="0"/>
+          </a:p>
+        </p:txBody>
+      </p:sp>
+      <p:sp>
+        <p:nvSpPr>
+          <p:cNvPr id="85" name="Text 83"/>
+          <p:cNvSpPr txBox="1"/>
+          <p:nvPr/>
+        </p:nvSpPr>
+        <p:spPr>
+          <a:xfrm>
+            <a:off x="10323576" y="5897405"/>
+            <a:ext cx="1115568" cy="265103"/>
+          </a:xfrm>
+          <a:prstGeom prst="rect">
+            <a:avLst/>
+          </a:prstGeom>
+          <a:noFill/>
+          <a:ln/>
+        </p:spPr>
+        <p:txBody>
+          <a:bodyPr wrap="square" lIns="0" tIns="0" rIns="0" bIns="0" rtlCol="0" anchor="t"/>
+          <a:lstStyle/>
+          <a:p>
+            <a:pPr algn="r" indent="0" marL="0">
+              <a:buNone/>
+            </a:pPr>
+            <a:r>
+              <a:rPr lang="en-US" sz="1300" dirty="0">
+                <a:solidFill>
+                  <a:srgbClr val="595959"/>
+                </a:solidFill>
+                <a:latin typeface="Inter" pitchFamily="34" charset="0"/>
+                <a:ea typeface="Inter" pitchFamily="34" charset="-122"/>
+                <a:cs typeface="Inter" pitchFamily="34" charset="-120"/>
+              </a:rPr>
+              <a:t>+$30K</a:t>
+            </a:r>
+            <a:endParaRPr lang="en-US" sz="1300" dirty="0"/>
           </a:p>
         </p:txBody>
       </p:sp>
@@ -50389,17 +51559,17 @@
         </p:nvSpPr>
         <p:spPr>
           <a:xfrm>
-            <a:off x="2941320" y="2103120"/>
-            <a:ext cx="1115568" cy="828446"/>
-          </a:xfrm>
-          <a:prstGeom prst="rect">
-            <a:avLst/>
-          </a:prstGeom>
-          <a:noFill/>
-          <a:ln/>
-        </p:spPr>
-        <p:txBody>
-          <a:bodyPr wrap="square" lIns="0" tIns="0" rIns="0" bIns="0" rtlCol="0" anchor="ctr"/>
+            <a:off x="2941320" y="2202534"/>
+            <a:ext cx="1115568" cy="414223"/>
+          </a:xfrm>
+          <a:prstGeom prst="rect">
+            <a:avLst/>
+          </a:prstGeom>
+          <a:noFill/>
+          <a:ln/>
+        </p:spPr>
+        <p:txBody>
+          <a:bodyPr wrap="square" lIns="0" tIns="0" rIns="0" bIns="0" rtlCol="0" anchor="b"/>
           <a:lstStyle/>
           <a:p>
             <a:pPr algn="r" indent="0" marL="0">
@@ -50423,6 +51593,45 @@
       <p:sp>
         <p:nvSpPr>
           <p:cNvPr id="14" name="Text 12"/>
+          <p:cNvSpPr txBox="1"/>
+          <p:nvPr/>
+        </p:nvSpPr>
+        <p:spPr>
+          <a:xfrm>
+            <a:off x="2941320" y="2583619"/>
+            <a:ext cx="1115568" cy="265103"/>
+          </a:xfrm>
+          <a:prstGeom prst="rect">
+            <a:avLst/>
+          </a:prstGeom>
+          <a:noFill/>
+          <a:ln/>
+        </p:spPr>
+        <p:txBody>
+          <a:bodyPr wrap="square" lIns="0" tIns="0" rIns="0" bIns="0" rtlCol="0" anchor="t"/>
+          <a:lstStyle/>
+          <a:p>
+            <a:pPr algn="r" indent="0" marL="0">
+              <a:buNone/>
+            </a:pPr>
+            <a:r>
+              <a:rPr lang="en-US" sz="1300" dirty="0">
+                <a:solidFill>
+                  <a:srgbClr val="595959"/>
+                </a:solidFill>
+                <a:latin typeface="Inter" pitchFamily="34" charset="0"/>
+                <a:ea typeface="Inter" pitchFamily="34" charset="-122"/>
+                <a:cs typeface="Inter" pitchFamily="34" charset="-120"/>
+              </a:rPr>
+              <a:t>+$345K</a:t>
+            </a:r>
+            <a:endParaRPr lang="en-US" sz="1300" dirty="0"/>
+          </a:p>
+        </p:txBody>
+      </p:sp>
+      <p:sp>
+        <p:nvSpPr>
+          <p:cNvPr id="15" name="Text 13"/>
           <p:cNvSpPr txBox="1"/>
           <p:nvPr/>
         </p:nvSpPr>
@@ -50461,7 +51670,7 @@
       </p:sp>
       <p:sp>
         <p:nvSpPr>
-          <p:cNvPr id="15" name="Text 13"/>
+          <p:cNvPr id="16" name="Text 14"/>
           <p:cNvSpPr txBox="1"/>
           <p:nvPr/>
         </p:nvSpPr>
@@ -50540,23 +51749,23 @@
       </p:sp>
       <p:sp>
         <p:nvSpPr>
-          <p:cNvPr id="16" name="Text 14"/>
-          <p:cNvSpPr txBox="1"/>
-          <p:nvPr/>
-        </p:nvSpPr>
-        <p:spPr>
-          <a:xfrm>
-            <a:off x="2941320" y="2931566"/>
-            <a:ext cx="1115568" cy="828446"/>
-          </a:xfrm>
-          <a:prstGeom prst="rect">
-            <a:avLst/>
-          </a:prstGeom>
-          <a:noFill/>
-          <a:ln/>
-        </p:spPr>
-        <p:txBody>
-          <a:bodyPr wrap="square" lIns="0" tIns="0" rIns="0" bIns="0" rtlCol="0" anchor="ctr"/>
+          <p:cNvPr id="17" name="Text 15"/>
+          <p:cNvSpPr txBox="1"/>
+          <p:nvPr/>
+        </p:nvSpPr>
+        <p:spPr>
+          <a:xfrm>
+            <a:off x="2941320" y="3030980"/>
+            <a:ext cx="1115568" cy="414223"/>
+          </a:xfrm>
+          <a:prstGeom prst="rect">
+            <a:avLst/>
+          </a:prstGeom>
+          <a:noFill/>
+          <a:ln/>
+        </p:spPr>
+        <p:txBody>
+          <a:bodyPr wrap="square" lIns="0" tIns="0" rIns="0" bIns="0" rtlCol="0" anchor="b"/>
           <a:lstStyle/>
           <a:p>
             <a:pPr algn="r" indent="0" marL="0">
@@ -50579,7 +51788,46 @@
       </p:sp>
       <p:sp>
         <p:nvSpPr>
-          <p:cNvPr id="17" name="Shape 15"/>
+          <p:cNvPr id="18" name="Text 16"/>
+          <p:cNvSpPr txBox="1"/>
+          <p:nvPr/>
+        </p:nvSpPr>
+        <p:spPr>
+          <a:xfrm>
+            <a:off x="2941320" y="3412065"/>
+            <a:ext cx="1115568" cy="265103"/>
+          </a:xfrm>
+          <a:prstGeom prst="rect">
+            <a:avLst/>
+          </a:prstGeom>
+          <a:noFill/>
+          <a:ln/>
+        </p:spPr>
+        <p:txBody>
+          <a:bodyPr wrap="square" lIns="0" tIns="0" rIns="0" bIns="0" rtlCol="0" anchor="t"/>
+          <a:lstStyle/>
+          <a:p>
+            <a:pPr algn="r" indent="0" marL="0">
+              <a:buNone/>
+            </a:pPr>
+            <a:r>
+              <a:rPr lang="en-US" sz="1300" dirty="0">
+                <a:solidFill>
+                  <a:srgbClr val="595959"/>
+                </a:solidFill>
+                <a:latin typeface="Inter" pitchFamily="34" charset="0"/>
+                <a:ea typeface="Inter" pitchFamily="34" charset="-122"/>
+                <a:cs typeface="Inter" pitchFamily="34" charset="-120"/>
+              </a:rPr>
+              <a:t>+$475K</a:t>
+            </a:r>
+            <a:endParaRPr lang="en-US" sz="1300" dirty="0"/>
+          </a:p>
+        </p:txBody>
+      </p:sp>
+      <p:sp>
+        <p:nvSpPr>
+          <p:cNvPr id="19" name="Shape 17"/>
           <p:cNvSpPr/>
           <p:nvPr/>
         </p:nvSpPr>
@@ -50599,7 +51847,7 @@
       </p:sp>
       <p:sp>
         <p:nvSpPr>
-          <p:cNvPr id="18" name="Text 16"/>
+          <p:cNvPr id="20" name="Text 18"/>
           <p:cNvSpPr txBox="1"/>
           <p:nvPr/>
         </p:nvSpPr>
@@ -50638,7 +51886,7 @@
       </p:sp>
       <p:sp>
         <p:nvSpPr>
-          <p:cNvPr id="19" name="Text 17"/>
+          <p:cNvPr id="21" name="Text 19"/>
           <p:cNvSpPr txBox="1"/>
           <p:nvPr/>
         </p:nvSpPr>
@@ -50717,23 +51965,23 @@
       </p:sp>
       <p:sp>
         <p:nvSpPr>
-          <p:cNvPr id="20" name="Text 18"/>
-          <p:cNvSpPr txBox="1"/>
-          <p:nvPr/>
-        </p:nvSpPr>
-        <p:spPr>
-          <a:xfrm>
-            <a:off x="2941320" y="3760013"/>
-            <a:ext cx="1115568" cy="828446"/>
-          </a:xfrm>
-          <a:prstGeom prst="rect">
-            <a:avLst/>
-          </a:prstGeom>
-          <a:noFill/>
-          <a:ln/>
-        </p:spPr>
-        <p:txBody>
-          <a:bodyPr wrap="square" lIns="0" tIns="0" rIns="0" bIns="0" rtlCol="0" anchor="ctr"/>
+          <p:cNvPr id="22" name="Text 20"/>
+          <p:cNvSpPr txBox="1"/>
+          <p:nvPr/>
+        </p:nvSpPr>
+        <p:spPr>
+          <a:xfrm>
+            <a:off x="2941320" y="3859426"/>
+            <a:ext cx="1115568" cy="414223"/>
+          </a:xfrm>
+          <a:prstGeom prst="rect">
+            <a:avLst/>
+          </a:prstGeom>
+          <a:noFill/>
+          <a:ln/>
+        </p:spPr>
+        <p:txBody>
+          <a:bodyPr wrap="square" lIns="0" tIns="0" rIns="0" bIns="0" rtlCol="0" anchor="b"/>
           <a:lstStyle/>
           <a:p>
             <a:pPr algn="r" indent="0" marL="0">
@@ -50756,7 +52004,46 @@
       </p:sp>
       <p:sp>
         <p:nvSpPr>
-          <p:cNvPr id="21" name="Text 19"/>
+          <p:cNvPr id="23" name="Text 21"/>
+          <p:cNvSpPr txBox="1"/>
+          <p:nvPr/>
+        </p:nvSpPr>
+        <p:spPr>
+          <a:xfrm>
+            <a:off x="2941320" y="4240512"/>
+            <a:ext cx="1115568" cy="265103"/>
+          </a:xfrm>
+          <a:prstGeom prst="rect">
+            <a:avLst/>
+          </a:prstGeom>
+          <a:noFill/>
+          <a:ln/>
+        </p:spPr>
+        <p:txBody>
+          <a:bodyPr wrap="square" lIns="0" tIns="0" rIns="0" bIns="0" rtlCol="0" anchor="t"/>
+          <a:lstStyle/>
+          <a:p>
+            <a:pPr algn="r" indent="0" marL="0">
+              <a:buNone/>
+            </a:pPr>
+            <a:r>
+              <a:rPr lang="en-US" sz="1300" dirty="0">
+                <a:solidFill>
+                  <a:srgbClr val="595959"/>
+                </a:solidFill>
+                <a:latin typeface="Inter" pitchFamily="34" charset="0"/>
+                <a:ea typeface="Inter" pitchFamily="34" charset="-122"/>
+                <a:cs typeface="Inter" pitchFamily="34" charset="-120"/>
+              </a:rPr>
+              <a:t>+$639K</a:t>
+            </a:r>
+            <a:endParaRPr lang="en-US" sz="1300" dirty="0"/>
+          </a:p>
+        </p:txBody>
+      </p:sp>
+      <p:sp>
+        <p:nvSpPr>
+          <p:cNvPr id="24" name="Text 22"/>
           <p:cNvSpPr txBox="1"/>
           <p:nvPr/>
         </p:nvSpPr>
@@ -50795,7 +52082,7 @@
       </p:sp>
       <p:sp>
         <p:nvSpPr>
-          <p:cNvPr id="22" name="Text 20"/>
+          <p:cNvPr id="25" name="Text 23"/>
           <p:cNvSpPr txBox="1"/>
           <p:nvPr/>
         </p:nvSpPr>
@@ -50874,23 +52161,23 @@
       </p:sp>
       <p:sp>
         <p:nvSpPr>
-          <p:cNvPr id="23" name="Text 21"/>
-          <p:cNvSpPr txBox="1"/>
-          <p:nvPr/>
-        </p:nvSpPr>
-        <p:spPr>
-          <a:xfrm>
-            <a:off x="2941320" y="4588459"/>
-            <a:ext cx="1115568" cy="828446"/>
-          </a:xfrm>
-          <a:prstGeom prst="rect">
-            <a:avLst/>
-          </a:prstGeom>
-          <a:noFill/>
-          <a:ln/>
-        </p:spPr>
-        <p:txBody>
-          <a:bodyPr wrap="square" lIns="0" tIns="0" rIns="0" bIns="0" rtlCol="0" anchor="ctr"/>
+          <p:cNvPr id="26" name="Text 24"/>
+          <p:cNvSpPr txBox="1"/>
+          <p:nvPr/>
+        </p:nvSpPr>
+        <p:spPr>
+          <a:xfrm>
+            <a:off x="2941320" y="4687873"/>
+            <a:ext cx="1115568" cy="414223"/>
+          </a:xfrm>
+          <a:prstGeom prst="rect">
+            <a:avLst/>
+          </a:prstGeom>
+          <a:noFill/>
+          <a:ln/>
+        </p:spPr>
+        <p:txBody>
+          <a:bodyPr wrap="square" lIns="0" tIns="0" rIns="0" bIns="0" rtlCol="0" anchor="b"/>
           <a:lstStyle/>
           <a:p>
             <a:pPr algn="r" indent="0" marL="0">
@@ -50913,7 +52200,46 @@
       </p:sp>
       <p:sp>
         <p:nvSpPr>
-          <p:cNvPr id="24" name="Shape 22"/>
+          <p:cNvPr id="27" name="Text 25"/>
+          <p:cNvSpPr txBox="1"/>
+          <p:nvPr/>
+        </p:nvSpPr>
+        <p:spPr>
+          <a:xfrm>
+            <a:off x="2941320" y="5068958"/>
+            <a:ext cx="1115568" cy="265103"/>
+          </a:xfrm>
+          <a:prstGeom prst="rect">
+            <a:avLst/>
+          </a:prstGeom>
+          <a:noFill/>
+          <a:ln/>
+        </p:spPr>
+        <p:txBody>
+          <a:bodyPr wrap="square" lIns="0" tIns="0" rIns="0" bIns="0" rtlCol="0" anchor="t"/>
+          <a:lstStyle/>
+          <a:p>
+            <a:pPr algn="r" indent="0" marL="0">
+              <a:buNone/>
+            </a:pPr>
+            <a:r>
+              <a:rPr lang="en-US" sz="1300" dirty="0">
+                <a:solidFill>
+                  <a:srgbClr val="595959"/>
+                </a:solidFill>
+                <a:latin typeface="Inter" pitchFamily="34" charset="0"/>
+                <a:ea typeface="Inter" pitchFamily="34" charset="-122"/>
+                <a:cs typeface="Inter" pitchFamily="34" charset="-120"/>
+              </a:rPr>
+              <a:t>+$315K</a:t>
+            </a:r>
+            <a:endParaRPr lang="en-US" sz="1300" dirty="0"/>
+          </a:p>
+        </p:txBody>
+      </p:sp>
+      <p:sp>
+        <p:nvSpPr>
+          <p:cNvPr id="28" name="Shape 26"/>
           <p:cNvSpPr/>
           <p:nvPr/>
         </p:nvSpPr>
@@ -50933,7 +52259,7 @@
       </p:sp>
       <p:sp>
         <p:nvSpPr>
-          <p:cNvPr id="25" name="Text 23"/>
+          <p:cNvPr id="29" name="Text 27"/>
           <p:cNvSpPr txBox="1"/>
           <p:nvPr/>
         </p:nvSpPr>
@@ -50972,7 +52298,7 @@
       </p:sp>
       <p:sp>
         <p:nvSpPr>
-          <p:cNvPr id="26" name="Text 24"/>
+          <p:cNvPr id="30" name="Text 28"/>
           <p:cNvSpPr txBox="1"/>
           <p:nvPr/>
         </p:nvSpPr>
@@ -51051,23 +52377,23 @@
       </p:sp>
       <p:sp>
         <p:nvSpPr>
-          <p:cNvPr id="27" name="Text 25"/>
-          <p:cNvSpPr txBox="1"/>
-          <p:nvPr/>
-        </p:nvSpPr>
-        <p:spPr>
-          <a:xfrm>
-            <a:off x="2941320" y="5416906"/>
-            <a:ext cx="1115568" cy="828446"/>
-          </a:xfrm>
-          <a:prstGeom prst="rect">
-            <a:avLst/>
-          </a:prstGeom>
-          <a:noFill/>
-          <a:ln/>
-        </p:spPr>
-        <p:txBody>
-          <a:bodyPr wrap="square" lIns="0" tIns="0" rIns="0" bIns="0" rtlCol="0" anchor="ctr"/>
+          <p:cNvPr id="31" name="Text 29"/>
+          <p:cNvSpPr txBox="1"/>
+          <p:nvPr/>
+        </p:nvSpPr>
+        <p:spPr>
+          <a:xfrm>
+            <a:off x="2941320" y="5516319"/>
+            <a:ext cx="1115568" cy="414223"/>
+          </a:xfrm>
+          <a:prstGeom prst="rect">
+            <a:avLst/>
+          </a:prstGeom>
+          <a:noFill/>
+          <a:ln/>
+        </p:spPr>
+        <p:txBody>
+          <a:bodyPr wrap="square" lIns="0" tIns="0" rIns="0" bIns="0" rtlCol="0" anchor="b"/>
           <a:lstStyle/>
           <a:p>
             <a:pPr algn="r" indent="0" marL="0">
@@ -51090,7 +52416,46 @@
       </p:sp>
       <p:sp>
         <p:nvSpPr>
-          <p:cNvPr id="28" name="Shape 26"/>
+          <p:cNvPr id="32" name="Text 30"/>
+          <p:cNvSpPr txBox="1"/>
+          <p:nvPr/>
+        </p:nvSpPr>
+        <p:spPr>
+          <a:xfrm>
+            <a:off x="2941320" y="5897405"/>
+            <a:ext cx="1115568" cy="265103"/>
+          </a:xfrm>
+          <a:prstGeom prst="rect">
+            <a:avLst/>
+          </a:prstGeom>
+          <a:noFill/>
+          <a:ln/>
+        </p:spPr>
+        <p:txBody>
+          <a:bodyPr wrap="square" lIns="0" tIns="0" rIns="0" bIns="0" rtlCol="0" anchor="t"/>
+          <a:lstStyle/>
+          <a:p>
+            <a:pPr algn="r" indent="0" marL="0">
+              <a:buNone/>
+            </a:pPr>
+            <a:r>
+              <a:rPr lang="en-US" sz="1300" dirty="0">
+                <a:solidFill>
+                  <a:srgbClr val="595959"/>
+                </a:solidFill>
+                <a:latin typeface="Inter" pitchFamily="34" charset="0"/>
+                <a:ea typeface="Inter" pitchFamily="34" charset="-122"/>
+                <a:cs typeface="Inter" pitchFamily="34" charset="-120"/>
+              </a:rPr>
+              <a:t>+$619K</a:t>
+            </a:r>
+            <a:endParaRPr lang="en-US" sz="1300" dirty="0"/>
+          </a:p>
+        </p:txBody>
+      </p:sp>
+      <p:sp>
+        <p:nvSpPr>
+          <p:cNvPr id="33" name="Shape 31"/>
           <p:cNvSpPr/>
           <p:nvPr/>
         </p:nvSpPr>
@@ -51110,7 +52475,7 @@
       </p:sp>
       <p:sp>
         <p:nvSpPr>
-          <p:cNvPr id="29" name="Text 27"/>
+          <p:cNvPr id="34" name="Text 32"/>
           <p:cNvSpPr txBox="1"/>
           <p:nvPr/>
         </p:nvSpPr>
@@ -51149,7 +52514,7 @@
       </p:sp>
       <p:sp>
         <p:nvSpPr>
-          <p:cNvPr id="30" name="Text 28"/>
+          <p:cNvPr id="35" name="Text 33"/>
           <p:cNvSpPr txBox="1"/>
           <p:nvPr/>
         </p:nvSpPr>
@@ -51188,7 +52553,7 @@
       </p:sp>
       <p:sp>
         <p:nvSpPr>
-          <p:cNvPr id="31" name="Shape 29"/>
+          <p:cNvPr id="36" name="Shape 34"/>
           <p:cNvSpPr/>
           <p:nvPr/>
         </p:nvSpPr>
@@ -51208,7 +52573,7 @@
       </p:sp>
       <p:sp>
         <p:nvSpPr>
-          <p:cNvPr id="32" name="Text 30"/>
+          <p:cNvPr id="37" name="Text 35"/>
           <p:cNvSpPr txBox="1"/>
           <p:nvPr/>
         </p:nvSpPr>
@@ -51247,7 +52612,7 @@
       </p:sp>
       <p:sp>
         <p:nvSpPr>
-          <p:cNvPr id="33" name="Text 31"/>
+          <p:cNvPr id="38" name="Text 36"/>
           <p:cNvSpPr txBox="1"/>
           <p:nvPr/>
         </p:nvSpPr>
@@ -51326,23 +52691,23 @@
       </p:sp>
       <p:sp>
         <p:nvSpPr>
-          <p:cNvPr id="34" name="Text 32"/>
-          <p:cNvSpPr txBox="1"/>
-          <p:nvPr/>
-        </p:nvSpPr>
-        <p:spPr>
-          <a:xfrm>
-            <a:off x="6632448" y="2103120"/>
-            <a:ext cx="1115568" cy="828446"/>
-          </a:xfrm>
-          <a:prstGeom prst="rect">
-            <a:avLst/>
-          </a:prstGeom>
-          <a:noFill/>
-          <a:ln/>
-        </p:spPr>
-        <p:txBody>
-          <a:bodyPr wrap="square" lIns="0" tIns="0" rIns="0" bIns="0" rtlCol="0" anchor="ctr"/>
+          <p:cNvPr id="39" name="Text 37"/>
+          <p:cNvSpPr txBox="1"/>
+          <p:nvPr/>
+        </p:nvSpPr>
+        <p:spPr>
+          <a:xfrm>
+            <a:off x="6632448" y="2202534"/>
+            <a:ext cx="1115568" cy="414223"/>
+          </a:xfrm>
+          <a:prstGeom prst="rect">
+            <a:avLst/>
+          </a:prstGeom>
+          <a:noFill/>
+          <a:ln/>
+        </p:spPr>
+        <p:txBody>
+          <a:bodyPr wrap="square" lIns="0" tIns="0" rIns="0" bIns="0" rtlCol="0" anchor="b"/>
           <a:lstStyle/>
           <a:p>
             <a:pPr algn="r" indent="0" marL="0">
@@ -51365,7 +52730,46 @@
       </p:sp>
       <p:sp>
         <p:nvSpPr>
-          <p:cNvPr id="35" name="Text 33"/>
+          <p:cNvPr id="40" name="Text 38"/>
+          <p:cNvSpPr txBox="1"/>
+          <p:nvPr/>
+        </p:nvSpPr>
+        <p:spPr>
+          <a:xfrm>
+            <a:off x="6632448" y="2583619"/>
+            <a:ext cx="1115568" cy="265103"/>
+          </a:xfrm>
+          <a:prstGeom prst="rect">
+            <a:avLst/>
+          </a:prstGeom>
+          <a:noFill/>
+          <a:ln/>
+        </p:spPr>
+        <p:txBody>
+          <a:bodyPr wrap="square" lIns="0" tIns="0" rIns="0" bIns="0" rtlCol="0" anchor="t"/>
+          <a:lstStyle/>
+          <a:p>
+            <a:pPr algn="r" indent="0" marL="0">
+              <a:buNone/>
+            </a:pPr>
+            <a:r>
+              <a:rPr lang="en-US" sz="1300" dirty="0">
+                <a:solidFill>
+                  <a:srgbClr val="595959"/>
+                </a:solidFill>
+                <a:latin typeface="Inter" pitchFamily="34" charset="0"/>
+                <a:ea typeface="Inter" pitchFamily="34" charset="-122"/>
+                <a:cs typeface="Inter" pitchFamily="34" charset="-120"/>
+              </a:rPr>
+              <a:t>−$438K</a:t>
+            </a:r>
+            <a:endParaRPr lang="en-US" sz="1300" dirty="0"/>
+          </a:p>
+        </p:txBody>
+      </p:sp>
+      <p:sp>
+        <p:nvSpPr>
+          <p:cNvPr id="41" name="Text 39"/>
           <p:cNvSpPr txBox="1"/>
           <p:nvPr/>
         </p:nvSpPr>
@@ -51404,7 +52808,7 @@
       </p:sp>
       <p:sp>
         <p:nvSpPr>
-          <p:cNvPr id="36" name="Text 34"/>
+          <p:cNvPr id="42" name="Text 40"/>
           <p:cNvSpPr txBox="1"/>
           <p:nvPr/>
         </p:nvSpPr>
@@ -51483,23 +52887,23 @@
       </p:sp>
       <p:sp>
         <p:nvSpPr>
-          <p:cNvPr id="37" name="Text 35"/>
-          <p:cNvSpPr txBox="1"/>
-          <p:nvPr/>
-        </p:nvSpPr>
-        <p:spPr>
-          <a:xfrm>
-            <a:off x="6632448" y="2931566"/>
-            <a:ext cx="1115568" cy="828446"/>
-          </a:xfrm>
-          <a:prstGeom prst="rect">
-            <a:avLst/>
-          </a:prstGeom>
-          <a:noFill/>
-          <a:ln/>
-        </p:spPr>
-        <p:txBody>
-          <a:bodyPr wrap="square" lIns="0" tIns="0" rIns="0" bIns="0" rtlCol="0" anchor="ctr"/>
+          <p:cNvPr id="43" name="Text 41"/>
+          <p:cNvSpPr txBox="1"/>
+          <p:nvPr/>
+        </p:nvSpPr>
+        <p:spPr>
+          <a:xfrm>
+            <a:off x="6632448" y="3030980"/>
+            <a:ext cx="1115568" cy="414223"/>
+          </a:xfrm>
+          <a:prstGeom prst="rect">
+            <a:avLst/>
+          </a:prstGeom>
+          <a:noFill/>
+          <a:ln/>
+        </p:spPr>
+        <p:txBody>
+          <a:bodyPr wrap="square" lIns="0" tIns="0" rIns="0" bIns="0" rtlCol="0" anchor="b"/>
           <a:lstStyle/>
           <a:p>
             <a:pPr algn="r" indent="0" marL="0">
@@ -51522,7 +52926,46 @@
       </p:sp>
       <p:sp>
         <p:nvSpPr>
-          <p:cNvPr id="38" name="Shape 36"/>
+          <p:cNvPr id="44" name="Text 42"/>
+          <p:cNvSpPr txBox="1"/>
+          <p:nvPr/>
+        </p:nvSpPr>
+        <p:spPr>
+          <a:xfrm>
+            <a:off x="6632448" y="3412065"/>
+            <a:ext cx="1115568" cy="265103"/>
+          </a:xfrm>
+          <a:prstGeom prst="rect">
+            <a:avLst/>
+          </a:prstGeom>
+          <a:noFill/>
+          <a:ln/>
+        </p:spPr>
+        <p:txBody>
+          <a:bodyPr wrap="square" lIns="0" tIns="0" rIns="0" bIns="0" rtlCol="0" anchor="t"/>
+          <a:lstStyle/>
+          <a:p>
+            <a:pPr algn="r" indent="0" marL="0">
+              <a:buNone/>
+            </a:pPr>
+            <a:r>
+              <a:rPr lang="en-US" sz="1300" dirty="0">
+                <a:solidFill>
+                  <a:srgbClr val="595959"/>
+                </a:solidFill>
+                <a:latin typeface="Inter" pitchFamily="34" charset="0"/>
+                <a:ea typeface="Inter" pitchFamily="34" charset="-122"/>
+                <a:cs typeface="Inter" pitchFamily="34" charset="-120"/>
+              </a:rPr>
+              <a:t>−$135K</a:t>
+            </a:r>
+            <a:endParaRPr lang="en-US" sz="1300" dirty="0"/>
+          </a:p>
+        </p:txBody>
+      </p:sp>
+      <p:sp>
+        <p:nvSpPr>
+          <p:cNvPr id="45" name="Shape 43"/>
           <p:cNvSpPr/>
           <p:nvPr/>
         </p:nvSpPr>
@@ -51542,7 +52985,7 @@
       </p:sp>
       <p:sp>
         <p:nvSpPr>
-          <p:cNvPr id="39" name="Text 37"/>
+          <p:cNvPr id="46" name="Text 44"/>
           <p:cNvSpPr txBox="1"/>
           <p:nvPr/>
         </p:nvSpPr>
@@ -51581,7 +53024,7 @@
       </p:sp>
       <p:sp>
         <p:nvSpPr>
-          <p:cNvPr id="40" name="Text 38"/>
+          <p:cNvPr id="47" name="Text 45"/>
           <p:cNvSpPr txBox="1"/>
           <p:nvPr/>
         </p:nvSpPr>
@@ -51660,23 +53103,23 @@
       </p:sp>
       <p:sp>
         <p:nvSpPr>
-          <p:cNvPr id="41" name="Text 39"/>
-          <p:cNvSpPr txBox="1"/>
-          <p:nvPr/>
-        </p:nvSpPr>
-        <p:spPr>
-          <a:xfrm>
-            <a:off x="6632448" y="3760013"/>
-            <a:ext cx="1115568" cy="828446"/>
-          </a:xfrm>
-          <a:prstGeom prst="rect">
-            <a:avLst/>
-          </a:prstGeom>
-          <a:noFill/>
-          <a:ln/>
-        </p:spPr>
-        <p:txBody>
-          <a:bodyPr wrap="square" lIns="0" tIns="0" rIns="0" bIns="0" rtlCol="0" anchor="ctr"/>
+          <p:cNvPr id="48" name="Text 46"/>
+          <p:cNvSpPr txBox="1"/>
+          <p:nvPr/>
+        </p:nvSpPr>
+        <p:spPr>
+          <a:xfrm>
+            <a:off x="6632448" y="3859426"/>
+            <a:ext cx="1115568" cy="414223"/>
+          </a:xfrm>
+          <a:prstGeom prst="rect">
+            <a:avLst/>
+          </a:prstGeom>
+          <a:noFill/>
+          <a:ln/>
+        </p:spPr>
+        <p:txBody>
+          <a:bodyPr wrap="square" lIns="0" tIns="0" rIns="0" bIns="0" rtlCol="0" anchor="b"/>
           <a:lstStyle/>
           <a:p>
             <a:pPr algn="r" indent="0" marL="0">
@@ -51699,7 +53142,46 @@
       </p:sp>
       <p:sp>
         <p:nvSpPr>
-          <p:cNvPr id="42" name="Text 40"/>
+          <p:cNvPr id="49" name="Text 47"/>
+          <p:cNvSpPr txBox="1"/>
+          <p:nvPr/>
+        </p:nvSpPr>
+        <p:spPr>
+          <a:xfrm>
+            <a:off x="6632448" y="4240512"/>
+            <a:ext cx="1115568" cy="265103"/>
+          </a:xfrm>
+          <a:prstGeom prst="rect">
+            <a:avLst/>
+          </a:prstGeom>
+          <a:noFill/>
+          <a:ln/>
+        </p:spPr>
+        <p:txBody>
+          <a:bodyPr wrap="square" lIns="0" tIns="0" rIns="0" bIns="0" rtlCol="0" anchor="t"/>
+          <a:lstStyle/>
+          <a:p>
+            <a:pPr algn="r" indent="0" marL="0">
+              <a:buNone/>
+            </a:pPr>
+            <a:r>
+              <a:rPr lang="en-US" sz="1300" dirty="0">
+                <a:solidFill>
+                  <a:srgbClr val="595959"/>
+                </a:solidFill>
+                <a:latin typeface="Inter" pitchFamily="34" charset="0"/>
+                <a:ea typeface="Inter" pitchFamily="34" charset="-122"/>
+                <a:cs typeface="Inter" pitchFamily="34" charset="-120"/>
+              </a:rPr>
+              <a:t>−$547K</a:t>
+            </a:r>
+            <a:endParaRPr lang="en-US" sz="1300" dirty="0"/>
+          </a:p>
+        </p:txBody>
+      </p:sp>
+      <p:sp>
+        <p:nvSpPr>
+          <p:cNvPr id="50" name="Text 48"/>
           <p:cNvSpPr txBox="1"/>
           <p:nvPr/>
         </p:nvSpPr>
@@ -51738,7 +53220,7 @@
       </p:sp>
       <p:sp>
         <p:nvSpPr>
-          <p:cNvPr id="43" name="Text 41"/>
+          <p:cNvPr id="51" name="Text 49"/>
           <p:cNvSpPr txBox="1"/>
           <p:nvPr/>
         </p:nvSpPr>
@@ -51817,23 +53299,23 @@
       </p:sp>
       <p:sp>
         <p:nvSpPr>
-          <p:cNvPr id="44" name="Text 42"/>
-          <p:cNvSpPr txBox="1"/>
-          <p:nvPr/>
-        </p:nvSpPr>
-        <p:spPr>
-          <a:xfrm>
-            <a:off x="6632448" y="4588459"/>
-            <a:ext cx="1115568" cy="828446"/>
-          </a:xfrm>
-          <a:prstGeom prst="rect">
-            <a:avLst/>
-          </a:prstGeom>
-          <a:noFill/>
-          <a:ln/>
-        </p:spPr>
-        <p:txBody>
-          <a:bodyPr wrap="square" lIns="0" tIns="0" rIns="0" bIns="0" rtlCol="0" anchor="ctr"/>
+          <p:cNvPr id="52" name="Text 50"/>
+          <p:cNvSpPr txBox="1"/>
+          <p:nvPr/>
+        </p:nvSpPr>
+        <p:spPr>
+          <a:xfrm>
+            <a:off x="6632448" y="4687873"/>
+            <a:ext cx="1115568" cy="414223"/>
+          </a:xfrm>
+          <a:prstGeom prst="rect">
+            <a:avLst/>
+          </a:prstGeom>
+          <a:noFill/>
+          <a:ln/>
+        </p:spPr>
+        <p:txBody>
+          <a:bodyPr wrap="square" lIns="0" tIns="0" rIns="0" bIns="0" rtlCol="0" anchor="b"/>
           <a:lstStyle/>
           <a:p>
             <a:pPr algn="r" indent="0" marL="0">
@@ -51856,7 +53338,46 @@
       </p:sp>
       <p:sp>
         <p:nvSpPr>
-          <p:cNvPr id="45" name="Shape 43"/>
+          <p:cNvPr id="53" name="Text 51"/>
+          <p:cNvSpPr txBox="1"/>
+          <p:nvPr/>
+        </p:nvSpPr>
+        <p:spPr>
+          <a:xfrm>
+            <a:off x="6632448" y="5068958"/>
+            <a:ext cx="1115568" cy="265103"/>
+          </a:xfrm>
+          <a:prstGeom prst="rect">
+            <a:avLst/>
+          </a:prstGeom>
+          <a:noFill/>
+          <a:ln/>
+        </p:spPr>
+        <p:txBody>
+          <a:bodyPr wrap="square" lIns="0" tIns="0" rIns="0" bIns="0" rtlCol="0" anchor="t"/>
+          <a:lstStyle/>
+          <a:p>
+            <a:pPr algn="r" indent="0" marL="0">
+              <a:buNone/>
+            </a:pPr>
+            <a:r>
+              <a:rPr lang="en-US" sz="1300" dirty="0">
+                <a:solidFill>
+                  <a:srgbClr val="595959"/>
+                </a:solidFill>
+                <a:latin typeface="Inter" pitchFamily="34" charset="0"/>
+                <a:ea typeface="Inter" pitchFamily="34" charset="-122"/>
+                <a:cs typeface="Inter" pitchFamily="34" charset="-120"/>
+              </a:rPr>
+              <a:t>−$695K</a:t>
+            </a:r>
+            <a:endParaRPr lang="en-US" sz="1300" dirty="0"/>
+          </a:p>
+        </p:txBody>
+      </p:sp>
+      <p:sp>
+        <p:nvSpPr>
+          <p:cNvPr id="54" name="Shape 52"/>
           <p:cNvSpPr/>
           <p:nvPr/>
         </p:nvSpPr>
@@ -51876,7 +53397,7 @@
       </p:sp>
       <p:sp>
         <p:nvSpPr>
-          <p:cNvPr id="46" name="Text 44"/>
+          <p:cNvPr id="55" name="Text 53"/>
           <p:cNvSpPr txBox="1"/>
           <p:nvPr/>
         </p:nvSpPr>
@@ -51915,7 +53436,7 @@
       </p:sp>
       <p:sp>
         <p:nvSpPr>
-          <p:cNvPr id="47" name="Text 45"/>
+          <p:cNvPr id="56" name="Text 54"/>
           <p:cNvSpPr txBox="1"/>
           <p:nvPr/>
         </p:nvSpPr>
@@ -51994,23 +53515,23 @@
       </p:sp>
       <p:sp>
         <p:nvSpPr>
-          <p:cNvPr id="48" name="Text 46"/>
-          <p:cNvSpPr txBox="1"/>
-          <p:nvPr/>
-        </p:nvSpPr>
-        <p:spPr>
-          <a:xfrm>
-            <a:off x="6632448" y="5416906"/>
-            <a:ext cx="1115568" cy="828446"/>
-          </a:xfrm>
-          <a:prstGeom prst="rect">
-            <a:avLst/>
-          </a:prstGeom>
-          <a:noFill/>
-          <a:ln/>
-        </p:spPr>
-        <p:txBody>
-          <a:bodyPr wrap="square" lIns="0" tIns="0" rIns="0" bIns="0" rtlCol="0" anchor="ctr"/>
+          <p:cNvPr id="57" name="Text 55"/>
+          <p:cNvSpPr txBox="1"/>
+          <p:nvPr/>
+        </p:nvSpPr>
+        <p:spPr>
+          <a:xfrm>
+            <a:off x="6632448" y="5516319"/>
+            <a:ext cx="1115568" cy="414223"/>
+          </a:xfrm>
+          <a:prstGeom prst="rect">
+            <a:avLst/>
+          </a:prstGeom>
+          <a:noFill/>
+          <a:ln/>
+        </p:spPr>
+        <p:txBody>
+          <a:bodyPr wrap="square" lIns="0" tIns="0" rIns="0" bIns="0" rtlCol="0" anchor="b"/>
           <a:lstStyle/>
           <a:p>
             <a:pPr algn="r" indent="0" marL="0">
@@ -52033,7 +53554,46 @@
       </p:sp>
       <p:sp>
         <p:nvSpPr>
-          <p:cNvPr id="49" name="Shape 47"/>
+          <p:cNvPr id="58" name="Text 56"/>
+          <p:cNvSpPr txBox="1"/>
+          <p:nvPr/>
+        </p:nvSpPr>
+        <p:spPr>
+          <a:xfrm>
+            <a:off x="6632448" y="5897405"/>
+            <a:ext cx="1115568" cy="265103"/>
+          </a:xfrm>
+          <a:prstGeom prst="rect">
+            <a:avLst/>
+          </a:prstGeom>
+          <a:noFill/>
+          <a:ln/>
+        </p:spPr>
+        <p:txBody>
+          <a:bodyPr wrap="square" lIns="0" tIns="0" rIns="0" bIns="0" rtlCol="0" anchor="t"/>
+          <a:lstStyle/>
+          <a:p>
+            <a:pPr algn="r" indent="0" marL="0">
+              <a:buNone/>
+            </a:pPr>
+            <a:r>
+              <a:rPr lang="en-US" sz="1300" dirty="0">
+                <a:solidFill>
+                  <a:srgbClr val="595959"/>
+                </a:solidFill>
+                <a:latin typeface="Inter" pitchFamily="34" charset="0"/>
+                <a:ea typeface="Inter" pitchFamily="34" charset="-122"/>
+                <a:cs typeface="Inter" pitchFamily="34" charset="-120"/>
+              </a:rPr>
+              <a:t>−$192K</a:t>
+            </a:r>
+            <a:endParaRPr lang="en-US" sz="1300" dirty="0"/>
+          </a:p>
+        </p:txBody>
+      </p:sp>
+      <p:sp>
+        <p:nvSpPr>
+          <p:cNvPr id="59" name="Shape 57"/>
           <p:cNvSpPr/>
           <p:nvPr/>
         </p:nvSpPr>
@@ -52053,7 +53613,7 @@
       </p:sp>
       <p:sp>
         <p:nvSpPr>
-          <p:cNvPr id="50" name="Text 48"/>
+          <p:cNvPr id="60" name="Text 58"/>
           <p:cNvSpPr txBox="1"/>
           <p:nvPr/>
         </p:nvSpPr>
@@ -52092,7 +53652,7 @@
       </p:sp>
       <p:sp>
         <p:nvSpPr>
-          <p:cNvPr id="51" name="Text 49"/>
+          <p:cNvPr id="61" name="Text 59"/>
           <p:cNvSpPr txBox="1"/>
           <p:nvPr/>
         </p:nvSpPr>
@@ -52131,7 +53691,7 @@
       </p:sp>
       <p:sp>
         <p:nvSpPr>
-          <p:cNvPr id="52" name="Shape 50"/>
+          <p:cNvPr id="62" name="Shape 60"/>
           <p:cNvSpPr/>
           <p:nvPr/>
         </p:nvSpPr>
@@ -52151,7 +53711,7 @@
       </p:sp>
       <p:sp>
         <p:nvSpPr>
-          <p:cNvPr id="53" name="Text 51"/>
+          <p:cNvPr id="63" name="Text 61"/>
           <p:cNvSpPr txBox="1"/>
           <p:nvPr/>
         </p:nvSpPr>
@@ -52190,7 +53750,7 @@
       </p:sp>
       <p:sp>
         <p:nvSpPr>
-          <p:cNvPr id="54" name="Text 52"/>
+          <p:cNvPr id="64" name="Text 62"/>
           <p:cNvSpPr txBox="1"/>
           <p:nvPr/>
         </p:nvSpPr>
@@ -52269,23 +53829,23 @@
       </p:sp>
       <p:sp>
         <p:nvSpPr>
-          <p:cNvPr id="55" name="Text 53"/>
-          <p:cNvSpPr txBox="1"/>
-          <p:nvPr/>
-        </p:nvSpPr>
-        <p:spPr>
-          <a:xfrm>
-            <a:off x="10323576" y="2103120"/>
-            <a:ext cx="1115568" cy="828446"/>
-          </a:xfrm>
-          <a:prstGeom prst="rect">
-            <a:avLst/>
-          </a:prstGeom>
-          <a:noFill/>
-          <a:ln/>
-        </p:spPr>
-        <p:txBody>
-          <a:bodyPr wrap="square" lIns="0" tIns="0" rIns="0" bIns="0" rtlCol="0" anchor="ctr"/>
+          <p:cNvPr id="65" name="Text 63"/>
+          <p:cNvSpPr txBox="1"/>
+          <p:nvPr/>
+        </p:nvSpPr>
+        <p:spPr>
+          <a:xfrm>
+            <a:off x="10323576" y="2202534"/>
+            <a:ext cx="1115568" cy="414223"/>
+          </a:xfrm>
+          <a:prstGeom prst="rect">
+            <a:avLst/>
+          </a:prstGeom>
+          <a:noFill/>
+          <a:ln/>
+        </p:spPr>
+        <p:txBody>
+          <a:bodyPr wrap="square" lIns="0" tIns="0" rIns="0" bIns="0" rtlCol="0" anchor="b"/>
           <a:lstStyle/>
           <a:p>
             <a:pPr algn="r" indent="0" marL="0">
@@ -52308,7 +53868,46 @@
       </p:sp>
       <p:sp>
         <p:nvSpPr>
-          <p:cNvPr id="56" name="Text 54"/>
+          <p:cNvPr id="66" name="Text 64"/>
+          <p:cNvSpPr txBox="1"/>
+          <p:nvPr/>
+        </p:nvSpPr>
+        <p:spPr>
+          <a:xfrm>
+            <a:off x="10323576" y="2583619"/>
+            <a:ext cx="1115568" cy="265103"/>
+          </a:xfrm>
+          <a:prstGeom prst="rect">
+            <a:avLst/>
+          </a:prstGeom>
+          <a:noFill/>
+          <a:ln/>
+        </p:spPr>
+        <p:txBody>
+          <a:bodyPr wrap="square" lIns="0" tIns="0" rIns="0" bIns="0" rtlCol="0" anchor="t"/>
+          <a:lstStyle/>
+          <a:p>
+            <a:pPr algn="r" indent="0" marL="0">
+              <a:buNone/>
+            </a:pPr>
+            <a:r>
+              <a:rPr lang="en-US" sz="1300" dirty="0">
+                <a:solidFill>
+                  <a:srgbClr val="595959"/>
+                </a:solidFill>
+                <a:latin typeface="Inter" pitchFamily="34" charset="0"/>
+                <a:ea typeface="Inter" pitchFamily="34" charset="-122"/>
+                <a:cs typeface="Inter" pitchFamily="34" charset="-120"/>
+              </a:rPr>
+              <a:t>+$76K</a:t>
+            </a:r>
+            <a:endParaRPr lang="en-US" sz="1300" dirty="0"/>
+          </a:p>
+        </p:txBody>
+      </p:sp>
+      <p:sp>
+        <p:nvSpPr>
+          <p:cNvPr id="67" name="Text 65"/>
           <p:cNvSpPr txBox="1"/>
           <p:nvPr/>
         </p:nvSpPr>
@@ -52347,7 +53946,7 @@
       </p:sp>
       <p:sp>
         <p:nvSpPr>
-          <p:cNvPr id="57" name="Text 55"/>
+          <p:cNvPr id="68" name="Text 66"/>
           <p:cNvSpPr txBox="1"/>
           <p:nvPr/>
         </p:nvSpPr>
@@ -52426,23 +54025,23 @@
       </p:sp>
       <p:sp>
         <p:nvSpPr>
-          <p:cNvPr id="58" name="Text 56"/>
-          <p:cNvSpPr txBox="1"/>
-          <p:nvPr/>
-        </p:nvSpPr>
-        <p:spPr>
-          <a:xfrm>
-            <a:off x="10323576" y="2931566"/>
-            <a:ext cx="1115568" cy="828446"/>
-          </a:xfrm>
-          <a:prstGeom prst="rect">
-            <a:avLst/>
-          </a:prstGeom>
-          <a:noFill/>
-          <a:ln/>
-        </p:spPr>
-        <p:txBody>
-          <a:bodyPr wrap="square" lIns="0" tIns="0" rIns="0" bIns="0" rtlCol="0" anchor="ctr"/>
+          <p:cNvPr id="69" name="Text 67"/>
+          <p:cNvSpPr txBox="1"/>
+          <p:nvPr/>
+        </p:nvSpPr>
+        <p:spPr>
+          <a:xfrm>
+            <a:off x="10323576" y="3030980"/>
+            <a:ext cx="1115568" cy="414223"/>
+          </a:xfrm>
+          <a:prstGeom prst="rect">
+            <a:avLst/>
+          </a:prstGeom>
+          <a:noFill/>
+          <a:ln/>
+        </p:spPr>
+        <p:txBody>
+          <a:bodyPr wrap="square" lIns="0" tIns="0" rIns="0" bIns="0" rtlCol="0" anchor="b"/>
           <a:lstStyle/>
           <a:p>
             <a:pPr algn="r" indent="0" marL="0">
@@ -52465,7 +54064,46 @@
       </p:sp>
       <p:sp>
         <p:nvSpPr>
-          <p:cNvPr id="59" name="Shape 57"/>
+          <p:cNvPr id="70" name="Text 68"/>
+          <p:cNvSpPr txBox="1"/>
+          <p:nvPr/>
+        </p:nvSpPr>
+        <p:spPr>
+          <a:xfrm>
+            <a:off x="10323576" y="3412065"/>
+            <a:ext cx="1115568" cy="265103"/>
+          </a:xfrm>
+          <a:prstGeom prst="rect">
+            <a:avLst/>
+          </a:prstGeom>
+          <a:noFill/>
+          <a:ln/>
+        </p:spPr>
+        <p:txBody>
+          <a:bodyPr wrap="square" lIns="0" tIns="0" rIns="0" bIns="0" rtlCol="0" anchor="t"/>
+          <a:lstStyle/>
+          <a:p>
+            <a:pPr algn="r" indent="0" marL="0">
+              <a:buNone/>
+            </a:pPr>
+            <a:r>
+              <a:rPr lang="en-US" sz="1300" dirty="0">
+                <a:solidFill>
+                  <a:srgbClr val="595959"/>
+                </a:solidFill>
+                <a:latin typeface="Inter" pitchFamily="34" charset="0"/>
+                <a:ea typeface="Inter" pitchFamily="34" charset="-122"/>
+                <a:cs typeface="Inter" pitchFamily="34" charset="-120"/>
+              </a:rPr>
+              <a:t>+$46K</a:t>
+            </a:r>
+            <a:endParaRPr lang="en-US" sz="1300" dirty="0"/>
+          </a:p>
+        </p:txBody>
+      </p:sp>
+      <p:sp>
+        <p:nvSpPr>
+          <p:cNvPr id="71" name="Shape 69"/>
           <p:cNvSpPr/>
           <p:nvPr/>
         </p:nvSpPr>
@@ -52485,7 +54123,7 @@
       </p:sp>
       <p:sp>
         <p:nvSpPr>
-          <p:cNvPr id="60" name="Shape 58"/>
+          <p:cNvPr id="72" name="Shape 70"/>
           <p:cNvSpPr/>
           <p:nvPr/>
         </p:nvSpPr>
@@ -52505,7 +54143,7 @@
       </p:sp>
       <p:sp>
         <p:nvSpPr>
-          <p:cNvPr id="61" name="Text 59"/>
+          <p:cNvPr id="73" name="Text 71"/>
           <p:cNvSpPr txBox="1"/>
           <p:nvPr/>
         </p:nvSpPr>
@@ -52544,7 +54182,7 @@
       </p:sp>
       <p:sp>
         <p:nvSpPr>
-          <p:cNvPr id="62" name="Text 60"/>
+          <p:cNvPr id="74" name="Text 72"/>
           <p:cNvSpPr txBox="1"/>
           <p:nvPr/>
         </p:nvSpPr>
@@ -52623,23 +54261,23 @@
       </p:sp>
       <p:sp>
         <p:nvSpPr>
-          <p:cNvPr id="63" name="Text 61"/>
-          <p:cNvSpPr txBox="1"/>
-          <p:nvPr/>
-        </p:nvSpPr>
-        <p:spPr>
-          <a:xfrm>
-            <a:off x="10323576" y="3760013"/>
-            <a:ext cx="1115568" cy="828446"/>
-          </a:xfrm>
-          <a:prstGeom prst="rect">
-            <a:avLst/>
-          </a:prstGeom>
-          <a:noFill/>
-          <a:ln/>
-        </p:spPr>
-        <p:txBody>
-          <a:bodyPr wrap="square" lIns="0" tIns="0" rIns="0" bIns="0" rtlCol="0" anchor="ctr"/>
+          <p:cNvPr id="75" name="Text 73"/>
+          <p:cNvSpPr txBox="1"/>
+          <p:nvPr/>
+        </p:nvSpPr>
+        <p:spPr>
+          <a:xfrm>
+            <a:off x="10323576" y="3859426"/>
+            <a:ext cx="1115568" cy="414223"/>
+          </a:xfrm>
+          <a:prstGeom prst="rect">
+            <a:avLst/>
+          </a:prstGeom>
+          <a:noFill/>
+          <a:ln/>
+        </p:spPr>
+        <p:txBody>
+          <a:bodyPr wrap="square" lIns="0" tIns="0" rIns="0" bIns="0" rtlCol="0" anchor="b"/>
           <a:lstStyle/>
           <a:p>
             <a:pPr algn="r" indent="0" marL="0">
@@ -52662,7 +54300,46 @@
       </p:sp>
       <p:sp>
         <p:nvSpPr>
-          <p:cNvPr id="64" name="Text 62"/>
+          <p:cNvPr id="76" name="Text 74"/>
+          <p:cNvSpPr txBox="1"/>
+          <p:nvPr/>
+        </p:nvSpPr>
+        <p:spPr>
+          <a:xfrm>
+            <a:off x="10323576" y="4240512"/>
+            <a:ext cx="1115568" cy="265103"/>
+          </a:xfrm>
+          <a:prstGeom prst="rect">
+            <a:avLst/>
+          </a:prstGeom>
+          <a:noFill/>
+          <a:ln/>
+        </p:spPr>
+        <p:txBody>
+          <a:bodyPr wrap="square" lIns="0" tIns="0" rIns="0" bIns="0" rtlCol="0" anchor="t"/>
+          <a:lstStyle/>
+          <a:p>
+            <a:pPr algn="r" indent="0" marL="0">
+              <a:buNone/>
+            </a:pPr>
+            <a:r>
+              <a:rPr lang="en-US" sz="1300" dirty="0">
+                <a:solidFill>
+                  <a:srgbClr val="595959"/>
+                </a:solidFill>
+                <a:latin typeface="Inter" pitchFamily="34" charset="0"/>
+                <a:ea typeface="Inter" pitchFamily="34" charset="-122"/>
+                <a:cs typeface="Inter" pitchFamily="34" charset="-120"/>
+              </a:rPr>
+              <a:t>+$33K</a:t>
+            </a:r>
+            <a:endParaRPr lang="en-US" sz="1300" dirty="0"/>
+          </a:p>
+        </p:txBody>
+      </p:sp>
+      <p:sp>
+        <p:nvSpPr>
+          <p:cNvPr id="77" name="Text 75"/>
           <p:cNvSpPr txBox="1"/>
           <p:nvPr/>
         </p:nvSpPr>
@@ -52701,7 +54378,7 @@
       </p:sp>
       <p:sp>
         <p:nvSpPr>
-          <p:cNvPr id="65" name="Text 63"/>
+          <p:cNvPr id="78" name="Text 76"/>
           <p:cNvSpPr txBox="1"/>
           <p:nvPr/>
         </p:nvSpPr>
@@ -52780,23 +54457,23 @@
       </p:sp>
       <p:sp>
         <p:nvSpPr>
-          <p:cNvPr id="66" name="Text 64"/>
-          <p:cNvSpPr txBox="1"/>
-          <p:nvPr/>
-        </p:nvSpPr>
-        <p:spPr>
-          <a:xfrm>
-            <a:off x="10323576" y="4588459"/>
-            <a:ext cx="1115568" cy="828446"/>
-          </a:xfrm>
-          <a:prstGeom prst="rect">
-            <a:avLst/>
-          </a:prstGeom>
-          <a:noFill/>
-          <a:ln/>
-        </p:spPr>
-        <p:txBody>
-          <a:bodyPr wrap="square" lIns="0" tIns="0" rIns="0" bIns="0" rtlCol="0" anchor="ctr"/>
+          <p:cNvPr id="79" name="Text 77"/>
+          <p:cNvSpPr txBox="1"/>
+          <p:nvPr/>
+        </p:nvSpPr>
+        <p:spPr>
+          <a:xfrm>
+            <a:off x="10323576" y="4687873"/>
+            <a:ext cx="1115568" cy="414223"/>
+          </a:xfrm>
+          <a:prstGeom prst="rect">
+            <a:avLst/>
+          </a:prstGeom>
+          <a:noFill/>
+          <a:ln/>
+        </p:spPr>
+        <p:txBody>
+          <a:bodyPr wrap="square" lIns="0" tIns="0" rIns="0" bIns="0" rtlCol="0" anchor="b"/>
           <a:lstStyle/>
           <a:p>
             <a:pPr algn="r" indent="0" marL="0">
@@ -52819,7 +54496,46 @@
       </p:sp>
       <p:sp>
         <p:nvSpPr>
-          <p:cNvPr id="67" name="Shape 65"/>
+          <p:cNvPr id="80" name="Text 78"/>
+          <p:cNvSpPr txBox="1"/>
+          <p:nvPr/>
+        </p:nvSpPr>
+        <p:spPr>
+          <a:xfrm>
+            <a:off x="10323576" y="5068958"/>
+            <a:ext cx="1115568" cy="265103"/>
+          </a:xfrm>
+          <a:prstGeom prst="rect">
+            <a:avLst/>
+          </a:prstGeom>
+          <a:noFill/>
+          <a:ln/>
+        </p:spPr>
+        <p:txBody>
+          <a:bodyPr wrap="square" lIns="0" tIns="0" rIns="0" bIns="0" rtlCol="0" anchor="t"/>
+          <a:lstStyle/>
+          <a:p>
+            <a:pPr algn="r" indent="0" marL="0">
+              <a:buNone/>
+            </a:pPr>
+            <a:r>
+              <a:rPr lang="en-US" sz="1300" dirty="0">
+                <a:solidFill>
+                  <a:srgbClr val="595959"/>
+                </a:solidFill>
+                <a:latin typeface="Inter" pitchFamily="34" charset="0"/>
+                <a:ea typeface="Inter" pitchFamily="34" charset="-122"/>
+                <a:cs typeface="Inter" pitchFamily="34" charset="-120"/>
+              </a:rPr>
+              <a:t>+$67K</a:t>
+            </a:r>
+            <a:endParaRPr lang="en-US" sz="1300" dirty="0"/>
+          </a:p>
+        </p:txBody>
+      </p:sp>
+      <p:sp>
+        <p:nvSpPr>
+          <p:cNvPr id="81" name="Shape 79"/>
           <p:cNvSpPr/>
           <p:nvPr/>
         </p:nvSpPr>
@@ -52839,7 +54555,7 @@
       </p:sp>
       <p:sp>
         <p:nvSpPr>
-          <p:cNvPr id="68" name="Text 66"/>
+          <p:cNvPr id="82" name="Text 80"/>
           <p:cNvSpPr txBox="1"/>
           <p:nvPr/>
         </p:nvSpPr>
@@ -52878,7 +54594,7 @@
       </p:sp>
       <p:sp>
         <p:nvSpPr>
-          <p:cNvPr id="69" name="Text 67"/>
+          <p:cNvPr id="83" name="Text 81"/>
           <p:cNvSpPr txBox="1"/>
           <p:nvPr/>
         </p:nvSpPr>
@@ -52957,23 +54673,23 @@
       </p:sp>
       <p:sp>
         <p:nvSpPr>
-          <p:cNvPr id="70" name="Text 68"/>
-          <p:cNvSpPr txBox="1"/>
-          <p:nvPr/>
-        </p:nvSpPr>
-        <p:spPr>
-          <a:xfrm>
-            <a:off x="10323576" y="5416906"/>
-            <a:ext cx="1115568" cy="828446"/>
-          </a:xfrm>
-          <a:prstGeom prst="rect">
-            <a:avLst/>
-          </a:prstGeom>
-          <a:noFill/>
-          <a:ln/>
-        </p:spPr>
-        <p:txBody>
-          <a:bodyPr wrap="square" lIns="0" tIns="0" rIns="0" bIns="0" rtlCol="0" anchor="ctr"/>
+          <p:cNvPr id="84" name="Text 82"/>
+          <p:cNvSpPr txBox="1"/>
+          <p:nvPr/>
+        </p:nvSpPr>
+        <p:spPr>
+          <a:xfrm>
+            <a:off x="10323576" y="5516319"/>
+            <a:ext cx="1115568" cy="414223"/>
+          </a:xfrm>
+          <a:prstGeom prst="rect">
+            <a:avLst/>
+          </a:prstGeom>
+          <a:noFill/>
+          <a:ln/>
+        </p:spPr>
+        <p:txBody>
+          <a:bodyPr wrap="square" lIns="0" tIns="0" rIns="0" bIns="0" rtlCol="0" anchor="b"/>
           <a:lstStyle/>
           <a:p>
             <a:pPr algn="r" indent="0" marL="0">
@@ -52991,6 +54707,45 @@
               <a:t>+22.9%</a:t>
             </a:r>
             <a:endParaRPr lang="en-US" sz="1600" dirty="0"/>
+          </a:p>
+        </p:txBody>
+      </p:sp>
+      <p:sp>
+        <p:nvSpPr>
+          <p:cNvPr id="85" name="Text 83"/>
+          <p:cNvSpPr txBox="1"/>
+          <p:nvPr/>
+        </p:nvSpPr>
+        <p:spPr>
+          <a:xfrm>
+            <a:off x="10323576" y="5897405"/>
+            <a:ext cx="1115568" cy="265103"/>
+          </a:xfrm>
+          <a:prstGeom prst="rect">
+            <a:avLst/>
+          </a:prstGeom>
+          <a:noFill/>
+          <a:ln/>
+        </p:spPr>
+        <p:txBody>
+          <a:bodyPr wrap="square" lIns="0" tIns="0" rIns="0" bIns="0" rtlCol="0" anchor="t"/>
+          <a:lstStyle/>
+          <a:p>
+            <a:pPr algn="r" indent="0" marL="0">
+              <a:buNone/>
+            </a:pPr>
+            <a:r>
+              <a:rPr lang="en-US" sz="1300" dirty="0">
+                <a:solidFill>
+                  <a:srgbClr val="595959"/>
+                </a:solidFill>
+                <a:latin typeface="Inter" pitchFamily="34" charset="0"/>
+                <a:ea typeface="Inter" pitchFamily="34" charset="-122"/>
+                <a:cs typeface="Inter" pitchFamily="34" charset="-120"/>
+              </a:rPr>
+              <a:t>+$54K</a:t>
+            </a:r>
+            <a:endParaRPr lang="en-US" sz="1300" dirty="0"/>
           </a:p>
         </p:txBody>
       </p:sp>
